--- a/Pregrado/Trabajo de grado 2/Clases/Sesion 01 - Presentación del curso · docente · estudiantes · ACAs/Presentacion.pptx
+++ b/Pregrado/Trabajo de grado 2/Clases/Sesion 01 - Presentación del curso · docente · estudiantes · ACAs/Presentacion.pptx
@@ -13,6 +13,21 @@
     <p:sldId id="261" r:id="rId12"/>
     <p:sldId id="262" r:id="rId13"/>
     <p:sldId id="263" r:id="rId14"/>
+    <p:sldId id="264" r:id="rId15"/>
+    <p:sldId id="265" r:id="rId16"/>
+    <p:sldId id="266" r:id="rId17"/>
+    <p:sldId id="267" r:id="rId18"/>
+    <p:sldId id="268" r:id="rId19"/>
+    <p:sldId id="269" r:id="rId20"/>
+    <p:sldId id="270" r:id="rId21"/>
+    <p:sldId id="271" r:id="rId22"/>
+    <p:sldId id="272" r:id="rId23"/>
+    <p:sldId id="273" r:id="rId24"/>
+    <p:sldId id="274" r:id="rId25"/>
+    <p:sldId id="275" r:id="rId26"/>
+    <p:sldId id="276" r:id="rId27"/>
+    <p:sldId id="277" r:id="rId28"/>
+    <p:sldId id="278" r:id="rId29"/>
   </p:sldIdLst>
   <p:sldSz cx="12191695" cy="6858000" type="screen4x3"/>
   <p:notesSz cx="6858000" cy="9144000"/>
@@ -3407,6 +3422,5553 @@
 </p:sld>
 </file>
 
+<file path=ppt/slides/slide10.xml><?xml version="1.0" encoding="utf-8"?>
+<p:sld xmlns:a="http://schemas.openxmlformats.org/drawingml/2006/main" xmlns:p="http://schemas.openxmlformats.org/presentationml/2006/main" xmlns:r="http://schemas.openxmlformats.org/officeDocument/2006/relationships">
+  <p:cSld>
+    <p:bg>
+      <p:bgPr>
+        <a:solidFill>
+          <a:srgbClr val="FFFFFF"/>
+        </a:solidFill>
+        <a:effectLst/>
+      </p:bgPr>
+    </p:bg>
+    <p:spTree>
+      <p:nvGrpSpPr>
+        <p:cNvPr id="1" name=""/>
+        <p:cNvGrpSpPr/>
+        <p:nvPr/>
+      </p:nvGrpSpPr>
+      <p:grpSpPr/>
+      <p:sp>
+        <p:nvSpPr>
+          <p:cNvPr id="2" name="Rectangle 1"/>
+          <p:cNvSpPr/>
+          <p:nvPr/>
+        </p:nvSpPr>
+        <p:spPr>
+          <a:xfrm>
+            <a:off x="0" y="0"/>
+            <a:ext cx="12191695" cy="1188720"/>
+          </a:xfrm>
+          <a:prstGeom prst="rect">
+            <a:avLst/>
+          </a:prstGeom>
+          <a:solidFill>
+            <a:srgbClr val="0C2340"/>
+          </a:solidFill>
+          <a:ln>
+            <a:noFill/>
+          </a:ln>
+          <a:effectLst/>
+        </p:spPr>
+        <p:style>
+          <a:lnRef idx="1">
+            <a:schemeClr val="accent1"/>
+          </a:lnRef>
+          <a:fillRef idx="3">
+            <a:schemeClr val="accent1"/>
+          </a:fillRef>
+          <a:effectRef idx="2">
+            <a:schemeClr val="accent1"/>
+          </a:effectRef>
+          <a:fontRef idx="minor">
+            <a:schemeClr val="lt1"/>
+          </a:fontRef>
+        </p:style>
+        <p:txBody>
+          <a:bodyPr rtlCol="0" anchor="ctr"/>
+          <a:lstStyle/>
+          <a:p>
+            <a:pPr algn="ctr"/>
+          </a:p>
+        </p:txBody>
+      </p:sp>
+      <p:sp>
+        <p:nvSpPr>
+          <p:cNvPr id="3" name="TextBox 2"/>
+          <p:cNvSpPr txBox="1"/>
+          <p:nvPr/>
+        </p:nvSpPr>
+        <p:spPr>
+          <a:xfrm>
+            <a:off x="640080" y="0"/>
+            <a:ext cx="9082735" cy="1188720"/>
+          </a:xfrm>
+          <a:prstGeom prst="rect">
+            <a:avLst/>
+          </a:prstGeom>
+          <a:noFill/>
+        </p:spPr>
+        <p:txBody>
+          <a:bodyPr wrap="square" anchor="ctr" lIns="0" rIns="0" tIns="0" bIns="0">
+            <a:spAutoFit/>
+          </a:bodyPr>
+          <a:lstStyle/>
+          <a:p>
+            <a:pPr algn="ctr"/>
+            <a:r>
+              <a:rPr sz="2600" b="1" i="0">
+                <a:solidFill>
+                  <a:srgbClr val="FFFFFF"/>
+                </a:solidFill>
+                <a:latin typeface="Calibri"/>
+              </a:rPr>
+              <a:t>Qué se llevan al final: el avance escrito que alimenta TG3</a:t>
+            </a:r>
+          </a:p>
+        </p:txBody>
+      </p:sp>
+      <p:sp>
+        <p:nvSpPr>
+          <p:cNvPr id="4" name="TextBox 3"/>
+          <p:cNvSpPr txBox="1"/>
+          <p:nvPr/>
+        </p:nvSpPr>
+        <p:spPr>
+          <a:xfrm>
+            <a:off x="640080" y="1691639"/>
+            <a:ext cx="10911535" cy="4617720"/>
+          </a:xfrm>
+          <a:prstGeom prst="rect">
+            <a:avLst/>
+          </a:prstGeom>
+          <a:noFill/>
+        </p:spPr>
+        <p:txBody>
+          <a:bodyPr wrap="square" anchor="t" lIns="0" rIns="0" tIns="0" bIns="0">
+            <a:spAutoFit/>
+          </a:bodyPr>
+          <a:lstStyle/>
+          <a:p>
+            <a:pPr>
+              <a:spcAft>
+                <a:spcPts val="1000"/>
+              </a:spcAft>
+            </a:pPr>
+            <a:r>
+              <a:rPr sz="1600" b="0" i="0">
+                <a:solidFill>
+                  <a:srgbClr val="2B2B2B"/>
+                </a:solidFill>
+                <a:latin typeface="Calibri"/>
+              </a:rPr>
+              <a:t>–   El producto de TG2 es </a:t>
+            </a:r>
+            <a:r>
+              <a:rPr sz="1600" b="1" i="0">
+                <a:solidFill>
+                  <a:srgbClr val="2B2B2B"/>
+                </a:solidFill>
+                <a:latin typeface="Calibri"/>
+              </a:rPr>
+              <a:t>un solo documento</a:t>
+            </a:r>
+            <a:r>
+              <a:rPr sz="1600" b="0" i="0">
+                <a:solidFill>
+                  <a:srgbClr val="2B2B2B"/>
+                </a:solidFill>
+                <a:latin typeface="Calibri"/>
+              </a:rPr>
+              <a:t>: el avance consolidado de su trabajo de grado.</a:t>
+            </a:r>
+          </a:p>
+          <a:p>
+            <a:pPr>
+              <a:spcAft>
+                <a:spcPts val="1000"/>
+              </a:spcAft>
+            </a:pPr>
+            <a:r>
+              <a:rPr sz="1600" b="0" i="0">
+                <a:solidFill>
+                  <a:srgbClr val="2B2B2B"/>
+                </a:solidFill>
+                <a:latin typeface="Calibri"/>
+              </a:rPr>
+              <a:t>–   Terminar TG2 </a:t>
+            </a:r>
+            <a:r>
+              <a:rPr sz="1600" b="1" i="0">
+                <a:solidFill>
+                  <a:srgbClr val="2B2B2B"/>
+                </a:solidFill>
+                <a:latin typeface="Calibri"/>
+              </a:rPr>
+              <a:t>no</a:t>
+            </a:r>
+            <a:r>
+              <a:rPr sz="1600" b="0" i="0">
+                <a:solidFill>
+                  <a:srgbClr val="2B2B2B"/>
+                </a:solidFill>
+                <a:latin typeface="Calibri"/>
+              </a:rPr>
+              <a:t> es terminar el trabajo de grado. Es dejarlo listo para que en TG3 solo quede </a:t>
+            </a:r>
+            <a:r>
+              <a:rPr sz="1600" b="1" i="0">
+                <a:solidFill>
+                  <a:srgbClr val="2B2B2B"/>
+                </a:solidFill>
+                <a:latin typeface="Calibri"/>
+              </a:rPr>
+              <a:t>ejecutar y sustentar</a:t>
+            </a:r>
+            <a:r>
+              <a:rPr sz="1600" b="0" i="0">
+                <a:solidFill>
+                  <a:srgbClr val="2B2B2B"/>
+                </a:solidFill>
+                <a:latin typeface="Calibri"/>
+              </a:rPr>
+              <a:t>.</a:t>
+            </a:r>
+          </a:p>
+          <a:p>
+            <a:pPr>
+              <a:spcAft>
+                <a:spcPts val="1000"/>
+              </a:spcAft>
+            </a:pPr>
+            <a:r>
+              <a:rPr sz="1600" b="0" i="0">
+                <a:solidFill>
+                  <a:srgbClr val="2B2B2B"/>
+                </a:solidFill>
+                <a:latin typeface="Calibri"/>
+              </a:rPr>
+              <a:t>–   Al cerrar el periodo su documento debe tener:</a:t>
+            </a:r>
+          </a:p>
+          <a:p>
+            <a:pPr lvl="1">
+              <a:spcAft>
+                <a:spcPts val="600"/>
+              </a:spcAft>
+            </a:pPr>
+            <a:r>
+              <a:rPr sz="1500" b="0" i="0">
+                <a:solidFill>
+                  <a:srgbClr val="2B2B2B"/>
+                </a:solidFill>
+                <a:latin typeface="Calibri"/>
+              </a:rPr>
+              <a:t>●   </a:t>
+            </a:r>
+            <a:r>
+              <a:rPr sz="1500" b="1" i="0">
+                <a:solidFill>
+                  <a:srgbClr val="2B2B2B"/>
+                </a:solidFill>
+                <a:latin typeface="Calibri"/>
+              </a:rPr>
+              <a:t>Planteamiento del problema</a:t>
+            </a:r>
+            <a:r>
+              <a:rPr sz="1500" b="0" i="0">
+                <a:solidFill>
+                  <a:srgbClr val="2B2B2B"/>
+                </a:solidFill>
+                <a:latin typeface="Calibri"/>
+              </a:rPr>
+              <a:t>, pregunta y objetivos definitivos.</a:t>
+            </a:r>
+          </a:p>
+          <a:p>
+            <a:pPr lvl="1">
+              <a:spcAft>
+                <a:spcPts val="600"/>
+              </a:spcAft>
+            </a:pPr>
+            <a:r>
+              <a:rPr sz="1500" b="0" i="0">
+                <a:solidFill>
+                  <a:srgbClr val="2B2B2B"/>
+                </a:solidFill>
+                <a:latin typeface="Calibri"/>
+              </a:rPr>
+              <a:t>●   </a:t>
+            </a:r>
+            <a:r>
+              <a:rPr sz="1500" b="1" i="0">
+                <a:solidFill>
+                  <a:srgbClr val="2B2B2B"/>
+                </a:solidFill>
+                <a:latin typeface="Calibri"/>
+              </a:rPr>
+              <a:t>Marco referencial</a:t>
+            </a:r>
+            <a:r>
+              <a:rPr sz="1500" b="0" i="0">
+                <a:solidFill>
+                  <a:srgbClr val="2B2B2B"/>
+                </a:solidFill>
+                <a:latin typeface="Calibri"/>
+              </a:rPr>
+              <a:t>: antecedentes, marco teórico, conceptual y contextual, citados en APA 7.</a:t>
+            </a:r>
+          </a:p>
+          <a:p>
+            <a:pPr lvl="1">
+              <a:spcAft>
+                <a:spcPts val="600"/>
+              </a:spcAft>
+            </a:pPr>
+            <a:r>
+              <a:rPr sz="1500" b="0" i="0">
+                <a:solidFill>
+                  <a:srgbClr val="2B2B2B"/>
+                </a:solidFill>
+                <a:latin typeface="Calibri"/>
+              </a:rPr>
+              <a:t>●   </a:t>
+            </a:r>
+            <a:r>
+              <a:rPr sz="1500" b="1" i="0">
+                <a:solidFill>
+                  <a:srgbClr val="2B2B2B"/>
+                </a:solidFill>
+                <a:latin typeface="Calibri"/>
+              </a:rPr>
+              <a:t>Metodología propuesta</a:t>
+            </a:r>
+            <a:r>
+              <a:rPr sz="1500" b="0" i="0">
+                <a:solidFill>
+                  <a:srgbClr val="2B2B2B"/>
+                </a:solidFill>
+                <a:latin typeface="Calibri"/>
+              </a:rPr>
+              <a:t> (en futuro: “se aplicará”, “se propone”), con instrumentos bosquejados.</a:t>
+            </a:r>
+          </a:p>
+          <a:p>
+            <a:pPr lvl="1">
+              <a:spcAft>
+                <a:spcPts val="600"/>
+              </a:spcAft>
+            </a:pPr>
+            <a:r>
+              <a:rPr sz="1500" b="0" i="0">
+                <a:solidFill>
+                  <a:srgbClr val="2B2B2B"/>
+                </a:solidFill>
+                <a:latin typeface="Calibri"/>
+              </a:rPr>
+              <a:t>●   Una </a:t>
+            </a:r>
+            <a:r>
+              <a:rPr sz="1500" b="1" i="0">
+                <a:solidFill>
+                  <a:srgbClr val="2B2B2B"/>
+                </a:solidFill>
+                <a:latin typeface="Calibri"/>
+              </a:rPr>
+              <a:t>lista de pendientes para TG3</a:t>
+            </a:r>
+            <a:r>
+              <a:rPr sz="1500" b="0" i="0">
+                <a:solidFill>
+                  <a:srgbClr val="2B2B2B"/>
+                </a:solidFill>
+                <a:latin typeface="Calibri"/>
+              </a:rPr>
+              <a:t>, explícita y en imperativo.</a:t>
+            </a:r>
+          </a:p>
+          <a:p>
+            <a:pPr>
+              <a:spcAft>
+                <a:spcPts val="1000"/>
+              </a:spcAft>
+            </a:pPr>
+            <a:r>
+              <a:rPr sz="1600" b="0" i="0">
+                <a:solidFill>
+                  <a:srgbClr val="2B2B2B"/>
+                </a:solidFill>
+                <a:latin typeface="Calibri"/>
+              </a:rPr>
+              <a:t>–   Para qué le sirve después: quien llega a TG3 con esto hecho </a:t>
+            </a:r>
+            <a:r>
+              <a:rPr sz="1600" b="1" i="0">
+                <a:solidFill>
+                  <a:srgbClr val="2B2B2B"/>
+                </a:solidFill>
+                <a:latin typeface="Calibri"/>
+              </a:rPr>
+              <a:t>arranca ejecutando</a:t>
+            </a:r>
+            <a:r>
+              <a:rPr sz="1600" b="0" i="0">
+                <a:solidFill>
+                  <a:srgbClr val="2B2B2B"/>
+                </a:solidFill>
+                <a:latin typeface="Calibri"/>
+              </a:rPr>
+              <a:t>; quien llega sin esto, repite TG2 dentro de TG3 y no alcanza a sustentar.</a:t>
+            </a:r>
+          </a:p>
+        </p:txBody>
+      </p:sp>
+      <p:sp>
+        <p:nvSpPr>
+          <p:cNvPr id="5" name="TextBox 4"/>
+          <p:cNvSpPr txBox="1"/>
+          <p:nvPr/>
+        </p:nvSpPr>
+        <p:spPr>
+          <a:xfrm>
+            <a:off x="2194560" y="6446520"/>
+            <a:ext cx="5943600" cy="274320"/>
+          </a:xfrm>
+          <a:prstGeom prst="rect">
+            <a:avLst/>
+          </a:prstGeom>
+          <a:noFill/>
+        </p:spPr>
+        <p:txBody>
+          <a:bodyPr wrap="square" anchor="t" lIns="0" rIns="0" tIns="0" bIns="0">
+            <a:spAutoFit/>
+          </a:bodyPr>
+          <a:lstStyle/>
+          <a:p>
+            <a:pPr algn="l"/>
+            <a:r>
+              <a:rPr sz="1000" b="1" i="0">
+                <a:solidFill>
+                  <a:srgbClr val="8F989D"/>
+                </a:solidFill>
+                <a:latin typeface="Calibri"/>
+              </a:rPr>
+              <a:t>Inicio 5:10 pm</a:t>
+            </a:r>
+          </a:p>
+        </p:txBody>
+      </p:sp>
+      <p:sp>
+        <p:nvSpPr>
+          <p:cNvPr id="6" name="TextBox 5"/>
+          <p:cNvSpPr txBox="1"/>
+          <p:nvPr/>
+        </p:nvSpPr>
+        <p:spPr>
+          <a:xfrm>
+            <a:off x="11094415" y="6446520"/>
+            <a:ext cx="548640" cy="274320"/>
+          </a:xfrm>
+          <a:prstGeom prst="rect">
+            <a:avLst/>
+          </a:prstGeom>
+          <a:noFill/>
+        </p:spPr>
+        <p:txBody>
+          <a:bodyPr wrap="square" anchor="t" lIns="0" rIns="0" tIns="0" bIns="0">
+            <a:spAutoFit/>
+          </a:bodyPr>
+          <a:lstStyle/>
+          <a:p>
+            <a:pPr algn="r"/>
+            <a:r>
+              <a:rPr sz="1000" b="1" i="0">
+                <a:solidFill>
+                  <a:srgbClr val="8F989D"/>
+                </a:solidFill>
+                <a:latin typeface="Calibri"/>
+              </a:rPr>
+              <a:t>10</a:t>
+            </a:r>
+          </a:p>
+        </p:txBody>
+      </p:sp>
+      <p:sp>
+        <p:nvSpPr>
+          <p:cNvPr id="7" name="TextBox 6"/>
+          <p:cNvSpPr txBox="1"/>
+          <p:nvPr/>
+        </p:nvSpPr>
+        <p:spPr>
+          <a:xfrm>
+            <a:off x="640080" y="5943600"/>
+            <a:ext cx="9997135" cy="457200"/>
+          </a:xfrm>
+          <a:prstGeom prst="rect">
+            <a:avLst/>
+          </a:prstGeom>
+          <a:noFill/>
+        </p:spPr>
+        <p:txBody>
+          <a:bodyPr wrap="square" anchor="t" lIns="0" rIns="0" tIns="0" bIns="0">
+            <a:spAutoFit/>
+          </a:bodyPr>
+          <a:lstStyle/>
+          <a:p>
+            <a:r>
+              <a:rPr sz="1200" b="0" i="1">
+                <a:solidFill>
+                  <a:srgbClr val="2B2B2B"/>
+                </a:solidFill>
+                <a:latin typeface="Calibri"/>
+              </a:rPr>
+              <a:t>Aquí no hay resultados todavía: el trabajo de campo es de TG3. Prometer hallazgos en este avance es el error que más se arrastra.</a:t>
+            </a:r>
+          </a:p>
+        </p:txBody>
+      </p:sp>
+    </p:spTree>
+  </p:cSld>
+  <p:clrMapOvr>
+    <a:masterClrMapping/>
+  </p:clrMapOvr>
+</p:sld>
+</file>
+
+<file path=ppt/slides/slide11.xml><?xml version="1.0" encoding="utf-8"?>
+<p:sld xmlns:a="http://schemas.openxmlformats.org/drawingml/2006/main" xmlns:p="http://schemas.openxmlformats.org/presentationml/2006/main" xmlns:r="http://schemas.openxmlformats.org/officeDocument/2006/relationships">
+  <p:cSld>
+    <p:bg>
+      <p:bgPr>
+        <a:solidFill>
+          <a:srgbClr val="FFFFFF"/>
+        </a:solidFill>
+        <a:effectLst/>
+      </p:bgPr>
+    </p:bg>
+    <p:spTree>
+      <p:nvGrpSpPr>
+        <p:cNvPr id="1" name=""/>
+        <p:cNvGrpSpPr/>
+        <p:nvPr/>
+      </p:nvGrpSpPr>
+      <p:grpSpPr/>
+      <p:sp>
+        <p:nvSpPr>
+          <p:cNvPr id="2" name="Rectangle 1"/>
+          <p:cNvSpPr/>
+          <p:nvPr/>
+        </p:nvSpPr>
+        <p:spPr>
+          <a:xfrm>
+            <a:off x="0" y="0"/>
+            <a:ext cx="12191695" cy="1188720"/>
+          </a:xfrm>
+          <a:prstGeom prst="rect">
+            <a:avLst/>
+          </a:prstGeom>
+          <a:solidFill>
+            <a:srgbClr val="0C2340"/>
+          </a:solidFill>
+          <a:ln>
+            <a:noFill/>
+          </a:ln>
+          <a:effectLst/>
+        </p:spPr>
+        <p:style>
+          <a:lnRef idx="1">
+            <a:schemeClr val="accent1"/>
+          </a:lnRef>
+          <a:fillRef idx="3">
+            <a:schemeClr val="accent1"/>
+          </a:fillRef>
+          <a:effectRef idx="2">
+            <a:schemeClr val="accent1"/>
+          </a:effectRef>
+          <a:fontRef idx="minor">
+            <a:schemeClr val="lt1"/>
+          </a:fontRef>
+        </p:style>
+        <p:txBody>
+          <a:bodyPr rtlCol="0" anchor="ctr"/>
+          <a:lstStyle/>
+          <a:p>
+            <a:pPr algn="ctr"/>
+          </a:p>
+        </p:txBody>
+      </p:sp>
+      <p:sp>
+        <p:nvSpPr>
+          <p:cNvPr id="3" name="TextBox 2"/>
+          <p:cNvSpPr txBox="1"/>
+          <p:nvPr/>
+        </p:nvSpPr>
+        <p:spPr>
+          <a:xfrm>
+            <a:off x="640080" y="0"/>
+            <a:ext cx="9082735" cy="1188720"/>
+          </a:xfrm>
+          <a:prstGeom prst="rect">
+            <a:avLst/>
+          </a:prstGeom>
+          <a:noFill/>
+        </p:spPr>
+        <p:txBody>
+          <a:bodyPr wrap="square" anchor="ctr" lIns="0" rIns="0" tIns="0" bIns="0">
+            <a:spAutoFit/>
+          </a:bodyPr>
+          <a:lstStyle/>
+          <a:p>
+            <a:pPr algn="ctr"/>
+            <a:r>
+              <a:rPr sz="2600" b="1" i="0">
+                <a:solidFill>
+                  <a:srgbClr val="FFFFFF"/>
+                </a:solidFill>
+                <a:latin typeface="Calibri"/>
+              </a:rPr>
+              <a:t>El acuerdo pedagógico: qué pactamos hoy</a:t>
+            </a:r>
+          </a:p>
+        </p:txBody>
+      </p:sp>
+      <p:sp>
+        <p:nvSpPr>
+          <p:cNvPr id="4" name="TextBox 3"/>
+          <p:cNvSpPr txBox="1"/>
+          <p:nvPr/>
+        </p:nvSpPr>
+        <p:spPr>
+          <a:xfrm>
+            <a:off x="640080" y="1691639"/>
+            <a:ext cx="10911535" cy="4617720"/>
+          </a:xfrm>
+          <a:prstGeom prst="rect">
+            <a:avLst/>
+          </a:prstGeom>
+          <a:noFill/>
+        </p:spPr>
+        <p:txBody>
+          <a:bodyPr wrap="square" anchor="t" lIns="0" rIns="0" tIns="0" bIns="0">
+            <a:spAutoFit/>
+          </a:bodyPr>
+          <a:lstStyle/>
+          <a:p>
+            <a:pPr>
+              <a:spcAft>
+                <a:spcPts val="1000"/>
+              </a:spcAft>
+            </a:pPr>
+            <a:r>
+              <a:rPr sz="1600" b="0" i="0">
+                <a:solidFill>
+                  <a:srgbClr val="2B2B2B"/>
+                </a:solidFill>
+                <a:latin typeface="Calibri"/>
+              </a:rPr>
+              <a:t>–   Es el </a:t>
+            </a:r>
+            <a:r>
+              <a:rPr sz="1600" b="1" i="0">
+                <a:solidFill>
+                  <a:srgbClr val="2B2B2B"/>
+                </a:solidFill>
+                <a:latin typeface="Calibri"/>
+              </a:rPr>
+              <a:t>pacto de trabajo del curso</a:t>
+            </a:r>
+            <a:r>
+              <a:rPr sz="1600" b="0" i="0">
+                <a:solidFill>
+                  <a:srgbClr val="2B2B2B"/>
+                </a:solidFill>
+                <a:latin typeface="Calibri"/>
+              </a:rPr>
+              <a:t>, y se deja por escrito hoy en el espacio del curso en CDigital.</a:t>
+            </a:r>
+          </a:p>
+          <a:p>
+            <a:pPr>
+              <a:spcAft>
+                <a:spcPts val="1000"/>
+              </a:spcAft>
+            </a:pPr>
+            <a:r>
+              <a:rPr sz="1600" b="0" i="0">
+                <a:solidFill>
+                  <a:srgbClr val="2B2B2B"/>
+                </a:solidFill>
+                <a:latin typeface="Calibri"/>
+              </a:rPr>
+              <a:t>–   Qué contiene, punto por punto:</a:t>
+            </a:r>
+          </a:p>
+          <a:p>
+            <a:pPr lvl="1">
+              <a:spcAft>
+                <a:spcPts val="600"/>
+              </a:spcAft>
+            </a:pPr>
+            <a:r>
+              <a:rPr sz="1500" b="0" i="0">
+                <a:solidFill>
+                  <a:srgbClr val="2B2B2B"/>
+                </a:solidFill>
+                <a:latin typeface="Calibri"/>
+              </a:rPr>
+              <a:t>●   </a:t>
+            </a:r>
+            <a:r>
+              <a:rPr sz="1500" b="1" i="0">
+                <a:solidFill>
+                  <a:srgbClr val="2B2B2B"/>
+                </a:solidFill>
+                <a:latin typeface="Calibri"/>
+              </a:rPr>
+              <a:t>Ritmo:</a:t>
+            </a:r>
+            <a:r>
+              <a:rPr sz="1500" b="0" i="0">
+                <a:solidFill>
+                  <a:srgbClr val="2B2B2B"/>
+                </a:solidFill>
+                <a:latin typeface="Calibri"/>
+              </a:rPr>
+              <a:t> una sección escrita por sesión, subida antes del siguiente encuentro.</a:t>
+            </a:r>
+          </a:p>
+          <a:p>
+            <a:pPr lvl="1">
+              <a:spcAft>
+                <a:spcPts val="600"/>
+              </a:spcAft>
+            </a:pPr>
+            <a:r>
+              <a:rPr sz="1500" b="0" i="0">
+                <a:solidFill>
+                  <a:srgbClr val="2B2B2B"/>
+                </a:solidFill>
+                <a:latin typeface="Calibri"/>
+              </a:rPr>
+              <a:t>●   </a:t>
+            </a:r>
+            <a:r>
+              <a:rPr sz="1500" b="1" i="0">
+                <a:solidFill>
+                  <a:srgbClr val="2B2B2B"/>
+                </a:solidFill>
+                <a:latin typeface="Calibri"/>
+              </a:rPr>
+              <a:t>Formato:</a:t>
+            </a:r>
+            <a:r>
+              <a:rPr sz="1500" b="0" i="0">
+                <a:solidFill>
+                  <a:srgbClr val="2B2B2B"/>
+                </a:solidFill>
+                <a:latin typeface="Calibri"/>
+              </a:rPr>
+              <a:t> plantilla APA CUN, abierta en Google Docs.</a:t>
+            </a:r>
+          </a:p>
+          <a:p>
+            <a:pPr lvl="1">
+              <a:spcAft>
+                <a:spcPts val="600"/>
+              </a:spcAft>
+            </a:pPr>
+            <a:r>
+              <a:rPr sz="1500" b="0" i="0">
+                <a:solidFill>
+                  <a:srgbClr val="2B2B2B"/>
+                </a:solidFill>
+                <a:latin typeface="Calibri"/>
+              </a:rPr>
+              <a:t>●   </a:t>
+            </a:r>
+            <a:r>
+              <a:rPr sz="1500" b="1" i="0">
+                <a:solidFill>
+                  <a:srgbClr val="2B2B2B"/>
+                </a:solidFill>
+                <a:latin typeface="Calibri"/>
+              </a:rPr>
+              <a:t>Canal:</a:t>
+            </a:r>
+            <a:r>
+              <a:rPr sz="1500" b="0" i="0">
+                <a:solidFill>
+                  <a:srgbClr val="2B2B2B"/>
+                </a:solidFill>
+                <a:latin typeface="Calibri"/>
+              </a:rPr>
+              <a:t> CDigital para todo lo que se entrega y se califica.</a:t>
+            </a:r>
+          </a:p>
+          <a:p>
+            <a:pPr lvl="1">
+              <a:spcAft>
+                <a:spcPts val="600"/>
+              </a:spcAft>
+            </a:pPr>
+            <a:r>
+              <a:rPr sz="1500" b="0" i="0">
+                <a:solidFill>
+                  <a:srgbClr val="2B2B2B"/>
+                </a:solidFill>
+                <a:latin typeface="Calibri"/>
+              </a:rPr>
+              <a:t>●   </a:t>
+            </a:r>
+            <a:r>
+              <a:rPr sz="1500" b="1" i="0">
+                <a:solidFill>
+                  <a:srgbClr val="2B2B2B"/>
+                </a:solidFill>
+                <a:latin typeface="Calibri"/>
+              </a:rPr>
+              <a:t>Festivos:</a:t>
+            </a:r>
+            <a:r>
+              <a:rPr sz="1500" b="0" i="0">
+                <a:solidFill>
+                  <a:srgbClr val="2B2B2B"/>
+                </a:solidFill>
+                <a:latin typeface="Calibri"/>
+              </a:rPr>
+              <a:t> lunes festivo = </a:t>
+            </a:r>
+            <a:r>
+              <a:rPr sz="1500" b="1" i="0">
+                <a:solidFill>
+                  <a:srgbClr val="2B2B2B"/>
+                </a:solidFill>
+                <a:latin typeface="Calibri"/>
+              </a:rPr>
+              <a:t>clase autónoma</a:t>
+            </a:r>
+            <a:r>
+              <a:rPr sz="1500" b="0" i="0">
+                <a:solidFill>
+                  <a:srgbClr val="2B2B2B"/>
+                </a:solidFill>
+                <a:latin typeface="Calibri"/>
+              </a:rPr>
+              <a:t>, con actividad publicada.</a:t>
+            </a:r>
+          </a:p>
+          <a:p>
+            <a:pPr lvl="1">
+              <a:spcAft>
+                <a:spcPts val="600"/>
+              </a:spcAft>
+            </a:pPr>
+            <a:r>
+              <a:rPr sz="1500" b="0" i="0">
+                <a:solidFill>
+                  <a:srgbClr val="2B2B2B"/>
+                </a:solidFill>
+                <a:latin typeface="Calibri"/>
+              </a:rPr>
+              <a:t>●   </a:t>
+            </a:r>
+            <a:r>
+              <a:rPr sz="1500" b="1" i="0">
+                <a:solidFill>
+                  <a:srgbClr val="2B2B2B"/>
+                </a:solidFill>
+                <a:latin typeface="Calibri"/>
+              </a:rPr>
+              <a:t>Retroalimentación:</a:t>
+            </a:r>
+            <a:r>
+              <a:rPr sz="1500" b="0" i="0">
+                <a:solidFill>
+                  <a:srgbClr val="2B2B2B"/>
+                </a:solidFill>
+                <a:latin typeface="Calibri"/>
+              </a:rPr>
+              <a:t> el Docente comenta sobre lo entregado; sin entrega no hay retroalimentación posible.</a:t>
+            </a:r>
+          </a:p>
+          <a:p>
+            <a:pPr>
+              <a:spcAft>
+                <a:spcPts val="1000"/>
+              </a:spcAft>
+            </a:pPr>
+            <a:r>
+              <a:rPr sz="1600" b="0" i="0">
+                <a:solidFill>
+                  <a:srgbClr val="2B2B2B"/>
+                </a:solidFill>
+                <a:latin typeface="Calibri"/>
+              </a:rPr>
+              <a:t>–   No es un trámite: es lo que se invoca cuando alguien dice “yo no sabía”. Léalo antes de aceptarlo.</a:t>
+            </a:r>
+          </a:p>
+        </p:txBody>
+      </p:sp>
+      <p:sp>
+        <p:nvSpPr>
+          <p:cNvPr id="5" name="TextBox 4"/>
+          <p:cNvSpPr txBox="1"/>
+          <p:nvPr/>
+        </p:nvSpPr>
+        <p:spPr>
+          <a:xfrm>
+            <a:off x="2194560" y="6446520"/>
+            <a:ext cx="5943600" cy="274320"/>
+          </a:xfrm>
+          <a:prstGeom prst="rect">
+            <a:avLst/>
+          </a:prstGeom>
+          <a:noFill/>
+        </p:spPr>
+        <p:txBody>
+          <a:bodyPr wrap="square" anchor="t" lIns="0" rIns="0" tIns="0" bIns="0">
+            <a:spAutoFit/>
+          </a:bodyPr>
+          <a:lstStyle/>
+          <a:p>
+            <a:pPr algn="l"/>
+            <a:r>
+              <a:rPr sz="1000" b="1" i="0">
+                <a:solidFill>
+                  <a:srgbClr val="8F989D"/>
+                </a:solidFill>
+                <a:latin typeface="Calibri"/>
+              </a:rPr>
+              <a:t>Inicio 5:10 pm</a:t>
+            </a:r>
+          </a:p>
+        </p:txBody>
+      </p:sp>
+      <p:sp>
+        <p:nvSpPr>
+          <p:cNvPr id="6" name="TextBox 5"/>
+          <p:cNvSpPr txBox="1"/>
+          <p:nvPr/>
+        </p:nvSpPr>
+        <p:spPr>
+          <a:xfrm>
+            <a:off x="11094415" y="6446520"/>
+            <a:ext cx="548640" cy="274320"/>
+          </a:xfrm>
+          <a:prstGeom prst="rect">
+            <a:avLst/>
+          </a:prstGeom>
+          <a:noFill/>
+        </p:spPr>
+        <p:txBody>
+          <a:bodyPr wrap="square" anchor="t" lIns="0" rIns="0" tIns="0" bIns="0">
+            <a:spAutoFit/>
+          </a:bodyPr>
+          <a:lstStyle/>
+          <a:p>
+            <a:pPr algn="r"/>
+            <a:r>
+              <a:rPr sz="1000" b="1" i="0">
+                <a:solidFill>
+                  <a:srgbClr val="8F989D"/>
+                </a:solidFill>
+                <a:latin typeface="Calibri"/>
+              </a:rPr>
+              <a:t>11</a:t>
+            </a:r>
+          </a:p>
+        </p:txBody>
+      </p:sp>
+    </p:spTree>
+  </p:cSld>
+  <p:clrMapOvr>
+    <a:masterClrMapping/>
+  </p:clrMapOvr>
+</p:sld>
+</file>
+
+<file path=ppt/slides/slide12.xml><?xml version="1.0" encoding="utf-8"?>
+<p:sld xmlns:a="http://schemas.openxmlformats.org/drawingml/2006/main" xmlns:p="http://schemas.openxmlformats.org/presentationml/2006/main" xmlns:r="http://schemas.openxmlformats.org/officeDocument/2006/relationships">
+  <p:cSld>
+    <p:bg>
+      <p:bgPr>
+        <a:solidFill>
+          <a:srgbClr val="FFFFFF"/>
+        </a:solidFill>
+        <a:effectLst/>
+      </p:bgPr>
+    </p:bg>
+    <p:spTree>
+      <p:nvGrpSpPr>
+        <p:cNvPr id="1" name=""/>
+        <p:cNvGrpSpPr/>
+        <p:nvPr/>
+      </p:nvGrpSpPr>
+      <p:grpSpPr/>
+      <p:sp>
+        <p:nvSpPr>
+          <p:cNvPr id="2" name="Rectangle 1"/>
+          <p:cNvSpPr/>
+          <p:nvPr/>
+        </p:nvSpPr>
+        <p:spPr>
+          <a:xfrm>
+            <a:off x="0" y="0"/>
+            <a:ext cx="12191695" cy="1188720"/>
+          </a:xfrm>
+          <a:prstGeom prst="rect">
+            <a:avLst/>
+          </a:prstGeom>
+          <a:solidFill>
+            <a:srgbClr val="0C2340"/>
+          </a:solidFill>
+          <a:ln>
+            <a:noFill/>
+          </a:ln>
+          <a:effectLst/>
+        </p:spPr>
+        <p:style>
+          <a:lnRef idx="1">
+            <a:schemeClr val="accent1"/>
+          </a:lnRef>
+          <a:fillRef idx="3">
+            <a:schemeClr val="accent1"/>
+          </a:fillRef>
+          <a:effectRef idx="2">
+            <a:schemeClr val="accent1"/>
+          </a:effectRef>
+          <a:fontRef idx="minor">
+            <a:schemeClr val="lt1"/>
+          </a:fontRef>
+        </p:style>
+        <p:txBody>
+          <a:bodyPr rtlCol="0" anchor="ctr"/>
+          <a:lstStyle/>
+          <a:p>
+            <a:pPr algn="ctr"/>
+          </a:p>
+        </p:txBody>
+      </p:sp>
+      <p:sp>
+        <p:nvSpPr>
+          <p:cNvPr id="3" name="TextBox 2"/>
+          <p:cNvSpPr txBox="1"/>
+          <p:nvPr/>
+        </p:nvSpPr>
+        <p:spPr>
+          <a:xfrm>
+            <a:off x="640080" y="0"/>
+            <a:ext cx="9082735" cy="1188720"/>
+          </a:xfrm>
+          <a:prstGeom prst="rect">
+            <a:avLst/>
+          </a:prstGeom>
+          <a:noFill/>
+        </p:spPr>
+        <p:txBody>
+          <a:bodyPr wrap="square" anchor="ctr" lIns="0" rIns="0" tIns="0" bIns="0">
+            <a:spAutoFit/>
+          </a:bodyPr>
+          <a:lstStyle/>
+          <a:p>
+            <a:pPr algn="ctr"/>
+            <a:r>
+              <a:rPr sz="2600" b="1" i="0">
+                <a:solidFill>
+                  <a:srgbClr val="FFFFFF"/>
+                </a:solidFill>
+                <a:latin typeface="Calibri"/>
+              </a:rPr>
+              <a:t>Las ACAs, una por una: qué se entrega y qué se mira</a:t>
+            </a:r>
+          </a:p>
+        </p:txBody>
+      </p:sp>
+      <p:graphicFrame>
+        <p:nvGraphicFramePr>
+          <p:cNvPr id="4" name="Table 3"/>
+          <p:cNvGraphicFramePr>
+            <a:graphicFrameLocks noGrp="1"/>
+          </p:cNvGraphicFramePr>
+          <p:nvPr/>
+        </p:nvGraphicFramePr>
+        <p:xfrm>
+          <a:off x="640080" y="1691639"/>
+          <a:ext cx="10911533" cy="2011680"/>
+        </p:xfrm>
+        <a:graphic>
+          <a:graphicData uri="http://schemas.openxmlformats.org/drawingml/2006/table">
+            <a:tbl>
+              <a:tblPr>
+                <a:tableStyleId>{2D5ABB26-0587-4C30-8999-92F81FD0307C}</a:tableStyleId>
+              </a:tblPr>
+              <a:tblGrid>
+                <a:gridCol w="916935"/>
+                <a:gridCol w="2934194"/>
+                <a:gridCol w="2934194"/>
+                <a:gridCol w="4126210"/>
+              </a:tblGrid>
+              <a:tr h="502920">
+                <a:tc>
+                  <a:txBody>
+                    <a:bodyPr/>
+                    <a:lstStyle/>
+                    <a:p>
+                      <a:pPr algn="l"/>
+                      <a:r>
+                        <a:rPr sz="1300" b="1" i="0">
+                          <a:solidFill>
+                            <a:srgbClr val="FFFFFF"/>
+                          </a:solidFill>
+                          <a:latin typeface="Calibri"/>
+                        </a:rPr>
+                        <a:t>ACA</a:t>
+                      </a:r>
+                    </a:p>
+                  </a:txBody>
+                  <a:tcPr anchor="ctr" marL="109728" marR="91440" marT="36576" marB="36576">
+                    <a:solidFill>
+                      <a:srgbClr val="0C2340"/>
+                    </a:solidFill>
+                  </a:tcPr>
+                </a:tc>
+                <a:tc>
+                  <a:txBody>
+                    <a:bodyPr/>
+                    <a:lstStyle/>
+                    <a:p>
+                      <a:pPr algn="l"/>
+                      <a:r>
+                        <a:rPr sz="1300" b="1" i="0">
+                          <a:solidFill>
+                            <a:srgbClr val="FFFFFF"/>
+                          </a:solidFill>
+                          <a:latin typeface="Calibri"/>
+                        </a:rPr>
+                        <a:t>Qué entrega</a:t>
+                      </a:r>
+                    </a:p>
+                  </a:txBody>
+                  <a:tcPr anchor="ctr" marL="109728" marR="91440" marT="36576" marB="36576">
+                    <a:solidFill>
+                      <a:srgbClr val="0C2340"/>
+                    </a:solidFill>
+                  </a:tcPr>
+                </a:tc>
+                <a:tc>
+                  <a:txBody>
+                    <a:bodyPr/>
+                    <a:lstStyle/>
+                    <a:p>
+                      <a:pPr algn="l"/>
+                      <a:r>
+                        <a:rPr sz="1300" b="1" i="0">
+                          <a:solidFill>
+                            <a:srgbClr val="FFFFFF"/>
+                          </a:solidFill>
+                          <a:latin typeface="Calibri"/>
+                        </a:rPr>
+                        <a:t>Qué mira el Docente</a:t>
+                      </a:r>
+                    </a:p>
+                  </a:txBody>
+                  <a:tcPr anchor="ctr" marL="109728" marR="91440" marT="36576" marB="36576">
+                    <a:solidFill>
+                      <a:srgbClr val="0C2340"/>
+                    </a:solidFill>
+                  </a:tcPr>
+                </a:tc>
+                <a:tc>
+                  <a:txBody>
+                    <a:bodyPr/>
+                    <a:lstStyle/>
+                    <a:p>
+                      <a:pPr algn="l"/>
+                      <a:r>
+                        <a:rPr sz="1300" b="1" i="0">
+                          <a:solidFill>
+                            <a:srgbClr val="FFFFFF"/>
+                          </a:solidFill>
+                          <a:latin typeface="Calibri"/>
+                        </a:rPr>
+                        <a:t>Flojo vs. bueno</a:t>
+                      </a:r>
+                    </a:p>
+                  </a:txBody>
+                  <a:tcPr anchor="ctr" marL="109728" marR="91440" marT="36576" marB="36576">
+                    <a:solidFill>
+                      <a:srgbClr val="0C2340"/>
+                    </a:solidFill>
+                  </a:tcPr>
+                </a:tc>
+              </a:tr>
+              <a:tr h="502920">
+                <a:tc>
+                  <a:txBody>
+                    <a:bodyPr/>
+                    <a:lstStyle/>
+                    <a:p>
+                      <a:pPr algn="l"/>
+                      <a:r>
+                        <a:rPr sz="1100" b="1" i="0">
+                          <a:solidFill>
+                            <a:srgbClr val="2B2B2B"/>
+                          </a:solidFill>
+                          <a:latin typeface="Calibri"/>
+                        </a:rPr>
+                        <a:t>ACA 1</a:t>
+                      </a:r>
+                    </a:p>
+                  </a:txBody>
+                  <a:tcPr anchor="ctr" marL="109728" marR="91440" marT="36576" marB="36576">
+                    <a:solidFill>
+                      <a:srgbClr val="FFFFFF"/>
+                    </a:solidFill>
+                  </a:tcPr>
+                </a:tc>
+                <a:tc>
+                  <a:txBody>
+                    <a:bodyPr/>
+                    <a:lstStyle/>
+                    <a:p>
+                      <a:pPr algn="l"/>
+                      <a:r>
+                        <a:rPr sz="1100" b="0" i="0">
+                          <a:solidFill>
+                            <a:srgbClr val="2B2B2B"/>
+                          </a:solidFill>
+                          <a:latin typeface="Calibri"/>
+                        </a:rPr>
+                        <a:t>Delimitación y formulación: tema delimitado, problema, pregunta, objetivos y título provisional</a:t>
+                      </a:r>
+                    </a:p>
+                  </a:txBody>
+                  <a:tcPr anchor="ctr" marL="109728" marR="91440" marT="36576" marB="36576">
+                    <a:solidFill>
+                      <a:srgbClr val="FFFFFF"/>
+                    </a:solidFill>
+                  </a:tcPr>
+                </a:tc>
+                <a:tc>
+                  <a:txBody>
+                    <a:bodyPr/>
+                    <a:lstStyle/>
+                    <a:p>
+                      <a:pPr algn="l"/>
+                      <a:r>
+                        <a:rPr sz="1100" b="0" i="0">
+                          <a:solidFill>
+                            <a:srgbClr val="2B2B2B"/>
+                          </a:solidFill>
+                          <a:latin typeface="Calibri"/>
+                        </a:rPr>
+                        <a:t>Que el tema tenga foco y que objetivos y pregunta hablen de lo mismo</a:t>
+                      </a:r>
+                    </a:p>
+                  </a:txBody>
+                  <a:tcPr anchor="ctr" marL="109728" marR="91440" marT="36576" marB="36576">
+                    <a:solidFill>
+                      <a:srgbClr val="FFFFFF"/>
+                    </a:solidFill>
+                  </a:tcPr>
+                </a:tc>
+                <a:tc>
+                  <a:txBody>
+                    <a:bodyPr/>
+                    <a:lstStyle/>
+                    <a:p>
+                      <a:pPr algn="l"/>
+                      <a:r>
+                        <a:rPr sz="1100" b="0" i="0">
+                          <a:solidFill>
+                            <a:srgbClr val="2B2B2B"/>
+                          </a:solidFill>
+                          <a:latin typeface="Calibri"/>
+                        </a:rPr>
+                        <a:t>Flojo: “IA en las empresas” · Bueno: actor, fenómeno y contexto en una sola frase, con objetivos que responden a la pregunta</a:t>
+                      </a:r>
+                    </a:p>
+                  </a:txBody>
+                  <a:tcPr anchor="ctr" marL="109728" marR="91440" marT="36576" marB="36576">
+                    <a:solidFill>
+                      <a:srgbClr val="FFFFFF"/>
+                    </a:solidFill>
+                  </a:tcPr>
+                </a:tc>
+              </a:tr>
+              <a:tr h="502920">
+                <a:tc>
+                  <a:txBody>
+                    <a:bodyPr/>
+                    <a:lstStyle/>
+                    <a:p>
+                      <a:pPr algn="l"/>
+                      <a:r>
+                        <a:rPr sz="1100" b="1" i="0">
+                          <a:solidFill>
+                            <a:srgbClr val="2B2B2B"/>
+                          </a:solidFill>
+                          <a:latin typeface="Calibri"/>
+                        </a:rPr>
+                        <a:t>ACA 2</a:t>
+                      </a:r>
+                    </a:p>
+                  </a:txBody>
+                  <a:tcPr anchor="ctr" marL="109728" marR="91440" marT="36576" marB="36576">
+                    <a:solidFill>
+                      <a:srgbClr val="F2F2F2"/>
+                    </a:solidFill>
+                  </a:tcPr>
+                </a:tc>
+                <a:tc>
+                  <a:txBody>
+                    <a:bodyPr/>
+                    <a:lstStyle/>
+                    <a:p>
+                      <a:pPr algn="l"/>
+                      <a:r>
+                        <a:rPr sz="1100" b="0" i="0">
+                          <a:solidFill>
+                            <a:srgbClr val="2B2B2B"/>
+                          </a:solidFill>
+                          <a:latin typeface="Calibri"/>
+                        </a:rPr>
+                        <a:t>Marco referencial: antecedentes, marco teórico, conceptual y contextual con citas en APA 7</a:t>
+                      </a:r>
+                    </a:p>
+                  </a:txBody>
+                  <a:tcPr anchor="ctr" marL="109728" marR="91440" marT="36576" marB="36576">
+                    <a:solidFill>
+                      <a:srgbClr val="F2F2F2"/>
+                    </a:solidFill>
+                  </a:tcPr>
+                </a:tc>
+                <a:tc>
+                  <a:txBody>
+                    <a:bodyPr/>
+                    <a:lstStyle/>
+                    <a:p>
+                      <a:pPr algn="l"/>
+                      <a:r>
+                        <a:rPr sz="1100" b="0" i="0">
+                          <a:solidFill>
+                            <a:srgbClr val="2B2B2B"/>
+                          </a:solidFill>
+                          <a:latin typeface="Calibri"/>
+                        </a:rPr>
+                        <a:t>Que las fuentes se usen como argumento y no como adorno; que estén citadas en el cuerpo</a:t>
+                      </a:r>
+                    </a:p>
+                  </a:txBody>
+                  <a:tcPr anchor="ctr" marL="109728" marR="91440" marT="36576" marB="36576">
+                    <a:solidFill>
+                      <a:srgbClr val="F2F2F2"/>
+                    </a:solidFill>
+                  </a:tcPr>
+                </a:tc>
+                <a:tc>
+                  <a:txBody>
+                    <a:bodyPr/>
+                    <a:lstStyle/>
+                    <a:p>
+                      <a:pPr algn="l"/>
+                      <a:r>
+                        <a:rPr sz="1100" b="0" i="0">
+                          <a:solidFill>
+                            <a:srgbClr val="2B2B2B"/>
+                          </a:solidFill>
+                          <a:latin typeface="Calibri"/>
+                        </a:rPr>
+                        <a:t>Flojo: definiciones copiadas una tras otra · Bueno: tres o cuatro conceptos hilados, cada uno sosteniendo una parte de la pregunta</a:t>
+                      </a:r>
+                    </a:p>
+                  </a:txBody>
+                  <a:tcPr anchor="ctr" marL="109728" marR="91440" marT="36576" marB="36576">
+                    <a:solidFill>
+                      <a:srgbClr val="F2F2F2"/>
+                    </a:solidFill>
+                  </a:tcPr>
+                </a:tc>
+              </a:tr>
+              <a:tr h="502920">
+                <a:tc>
+                  <a:txBody>
+                    <a:bodyPr/>
+                    <a:lstStyle/>
+                    <a:p>
+                      <a:pPr algn="l"/>
+                      <a:r>
+                        <a:rPr sz="1100" b="1" i="0">
+                          <a:solidFill>
+                            <a:srgbClr val="2B2B2B"/>
+                          </a:solidFill>
+                          <a:latin typeface="Calibri"/>
+                        </a:rPr>
+                        <a:t>ACA 3</a:t>
+                      </a:r>
+                    </a:p>
+                  </a:txBody>
+                  <a:tcPr anchor="ctr" marL="109728" marR="91440" marT="36576" marB="36576">
+                    <a:solidFill>
+                      <a:srgbClr val="FFFFFF"/>
+                    </a:solidFill>
+                  </a:tcPr>
+                </a:tc>
+                <a:tc>
+                  <a:txBody>
+                    <a:bodyPr/>
+                    <a:lstStyle/>
+                    <a:p>
+                      <a:pPr algn="l"/>
+                      <a:r>
+                        <a:rPr sz="1100" b="0" i="0">
+                          <a:solidFill>
+                            <a:srgbClr val="2B2B2B"/>
+                          </a:solidFill>
+                          <a:latin typeface="Calibri"/>
+                        </a:rPr>
+                        <a:t>Metodología propuesta e integración del avance en una versión limpia</a:t>
+                      </a:r>
+                    </a:p>
+                  </a:txBody>
+                  <a:tcPr anchor="ctr" marL="109728" marR="91440" marT="36576" marB="36576">
+                    <a:solidFill>
+                      <a:srgbClr val="FFFFFF"/>
+                    </a:solidFill>
+                  </a:tcPr>
+                </a:tc>
+                <a:tc>
+                  <a:txBody>
+                    <a:bodyPr/>
+                    <a:lstStyle/>
+                    <a:p>
+                      <a:pPr algn="l"/>
+                      <a:r>
+                        <a:rPr sz="1100" b="0" i="0">
+                          <a:solidFill>
+                            <a:srgbClr val="2B2B2B"/>
+                          </a:solidFill>
+                          <a:latin typeface="Calibri"/>
+                        </a:rPr>
+                        <a:t>Coherencia objetivo → método → instrumento, y que el documento se lea como un todo</a:t>
+                      </a:r>
+                    </a:p>
+                  </a:txBody>
+                  <a:tcPr anchor="ctr" marL="109728" marR="91440" marT="36576" marB="36576">
+                    <a:solidFill>
+                      <a:srgbClr val="FFFFFF"/>
+                    </a:solidFill>
+                  </a:tcPr>
+                </a:tc>
+                <a:tc>
+                  <a:txBody>
+                    <a:bodyPr/>
+                    <a:lstStyle/>
+                    <a:p>
+                      <a:pPr algn="l"/>
+                      <a:r>
+                        <a:rPr sz="1100" b="0" i="0">
+                          <a:solidFill>
+                            <a:srgbClr val="2B2B2B"/>
+                          </a:solidFill>
+                          <a:latin typeface="Calibri"/>
+                        </a:rPr>
+                        <a:t>Flojo: método “porque sí” y secciones pegadas · Bueno: matriz donde cada objetivo tiene su método, y un documento sin costuras</a:t>
+                      </a:r>
+                    </a:p>
+                  </a:txBody>
+                  <a:tcPr anchor="ctr" marL="109728" marR="91440" marT="36576" marB="36576">
+                    <a:solidFill>
+                      <a:srgbClr val="FFFFFF"/>
+                    </a:solidFill>
+                  </a:tcPr>
+                </a:tc>
+              </a:tr>
+            </a:tbl>
+          </a:graphicData>
+        </a:graphic>
+      </p:graphicFrame>
+      <p:sp>
+        <p:nvSpPr>
+          <p:cNvPr id="5" name="TextBox 4"/>
+          <p:cNvSpPr txBox="1"/>
+          <p:nvPr/>
+        </p:nvSpPr>
+        <p:spPr>
+          <a:xfrm>
+            <a:off x="640080" y="3840480"/>
+            <a:ext cx="10911535" cy="548640"/>
+          </a:xfrm>
+          <a:prstGeom prst="rect">
+            <a:avLst/>
+          </a:prstGeom>
+          <a:noFill/>
+        </p:spPr>
+        <p:txBody>
+          <a:bodyPr wrap="square" anchor="t" lIns="0" rIns="0" tIns="0" bIns="0">
+            <a:spAutoFit/>
+          </a:bodyPr>
+          <a:lstStyle/>
+          <a:p>
+            <a:r>
+              <a:rPr sz="1200" b="0" i="1">
+                <a:solidFill>
+                  <a:srgbClr val="2B2B2B"/>
+                </a:solidFill>
+                <a:latin typeface="Calibri"/>
+              </a:rPr>
+              <a:t>Enunciado completo, criterios y </a:t>
+            </a:r>
+            <a:r>
+              <a:rPr sz="1200" b="1" i="1">
+                <a:solidFill>
+                  <a:srgbClr val="2B2B2B"/>
+                </a:solidFill>
+                <a:latin typeface="Calibri"/>
+              </a:rPr>
+              <a:t>fechas exactas</a:t>
+            </a:r>
+            <a:r>
+              <a:rPr sz="1200" b="0" i="1">
+                <a:solidFill>
+                  <a:srgbClr val="2B2B2B"/>
+                </a:solidFill>
+                <a:latin typeface="Calibri"/>
+              </a:rPr>
+              <a:t> de cada corte: `Clases/Recursos/ACAs/` y CDigital.</a:t>
+            </a:r>
+          </a:p>
+        </p:txBody>
+      </p:sp>
+      <p:sp>
+        <p:nvSpPr>
+          <p:cNvPr id="6" name="TextBox 5"/>
+          <p:cNvSpPr txBox="1"/>
+          <p:nvPr/>
+        </p:nvSpPr>
+        <p:spPr>
+          <a:xfrm>
+            <a:off x="2194560" y="6446520"/>
+            <a:ext cx="5943600" cy="274320"/>
+          </a:xfrm>
+          <a:prstGeom prst="rect">
+            <a:avLst/>
+          </a:prstGeom>
+          <a:noFill/>
+        </p:spPr>
+        <p:txBody>
+          <a:bodyPr wrap="square" anchor="t" lIns="0" rIns="0" tIns="0" bIns="0">
+            <a:spAutoFit/>
+          </a:bodyPr>
+          <a:lstStyle/>
+          <a:p>
+            <a:pPr algn="l"/>
+            <a:r>
+              <a:rPr sz="1000" b="1" i="0">
+                <a:solidFill>
+                  <a:srgbClr val="8F989D"/>
+                </a:solidFill>
+                <a:latin typeface="Calibri"/>
+              </a:rPr>
+              <a:t>Inicio 5:10 pm</a:t>
+            </a:r>
+          </a:p>
+        </p:txBody>
+      </p:sp>
+      <p:sp>
+        <p:nvSpPr>
+          <p:cNvPr id="7" name="TextBox 6"/>
+          <p:cNvSpPr txBox="1"/>
+          <p:nvPr/>
+        </p:nvSpPr>
+        <p:spPr>
+          <a:xfrm>
+            <a:off x="11094415" y="6446520"/>
+            <a:ext cx="548640" cy="274320"/>
+          </a:xfrm>
+          <a:prstGeom prst="rect">
+            <a:avLst/>
+          </a:prstGeom>
+          <a:noFill/>
+        </p:spPr>
+        <p:txBody>
+          <a:bodyPr wrap="square" anchor="t" lIns="0" rIns="0" tIns="0" bIns="0">
+            <a:spAutoFit/>
+          </a:bodyPr>
+          <a:lstStyle/>
+          <a:p>
+            <a:pPr algn="r"/>
+            <a:r>
+              <a:rPr sz="1000" b="1" i="0">
+                <a:solidFill>
+                  <a:srgbClr val="8F989D"/>
+                </a:solidFill>
+                <a:latin typeface="Calibri"/>
+              </a:rPr>
+              <a:t>12</a:t>
+            </a:r>
+          </a:p>
+        </p:txBody>
+      </p:sp>
+    </p:spTree>
+  </p:cSld>
+  <p:clrMapOvr>
+    <a:masterClrMapping/>
+  </p:clrMapOvr>
+</p:sld>
+</file>
+
+<file path=ppt/slides/slide13.xml><?xml version="1.0" encoding="utf-8"?>
+<p:sld xmlns:a="http://schemas.openxmlformats.org/drawingml/2006/main" xmlns:p="http://schemas.openxmlformats.org/presentationml/2006/main" xmlns:r="http://schemas.openxmlformats.org/officeDocument/2006/relationships">
+  <p:cSld>
+    <p:bg>
+      <p:bgPr>
+        <a:solidFill>
+          <a:srgbClr val="FFFFFF"/>
+        </a:solidFill>
+        <a:effectLst/>
+      </p:bgPr>
+    </p:bg>
+    <p:spTree>
+      <p:nvGrpSpPr>
+        <p:cNvPr id="1" name=""/>
+        <p:cNvGrpSpPr/>
+        <p:nvPr/>
+      </p:nvGrpSpPr>
+      <p:grpSpPr/>
+      <p:sp>
+        <p:nvSpPr>
+          <p:cNvPr id="2" name="Rectangle 1"/>
+          <p:cNvSpPr/>
+          <p:nvPr/>
+        </p:nvSpPr>
+        <p:spPr>
+          <a:xfrm>
+            <a:off x="0" y="0"/>
+            <a:ext cx="12191695" cy="1188720"/>
+          </a:xfrm>
+          <a:prstGeom prst="rect">
+            <a:avLst/>
+          </a:prstGeom>
+          <a:solidFill>
+            <a:srgbClr val="0C2340"/>
+          </a:solidFill>
+          <a:ln>
+            <a:noFill/>
+          </a:ln>
+          <a:effectLst/>
+        </p:spPr>
+        <p:style>
+          <a:lnRef idx="1">
+            <a:schemeClr val="accent1"/>
+          </a:lnRef>
+          <a:fillRef idx="3">
+            <a:schemeClr val="accent1"/>
+          </a:fillRef>
+          <a:effectRef idx="2">
+            <a:schemeClr val="accent1"/>
+          </a:effectRef>
+          <a:fontRef idx="minor">
+            <a:schemeClr val="lt1"/>
+          </a:fontRef>
+        </p:style>
+        <p:txBody>
+          <a:bodyPr rtlCol="0" anchor="ctr"/>
+          <a:lstStyle/>
+          <a:p>
+            <a:pPr algn="ctr"/>
+          </a:p>
+        </p:txBody>
+      </p:sp>
+      <p:sp>
+        <p:nvSpPr>
+          <p:cNvPr id="3" name="TextBox 2"/>
+          <p:cNvSpPr txBox="1"/>
+          <p:nvPr/>
+        </p:nvSpPr>
+        <p:spPr>
+          <a:xfrm>
+            <a:off x="640080" y="0"/>
+            <a:ext cx="9082735" cy="1188720"/>
+          </a:xfrm>
+          <a:prstGeom prst="rect">
+            <a:avLst/>
+          </a:prstGeom>
+          <a:noFill/>
+        </p:spPr>
+        <p:txBody>
+          <a:bodyPr wrap="square" anchor="ctr" lIns="0" rIns="0" tIns="0" bIns="0">
+            <a:spAutoFit/>
+          </a:bodyPr>
+          <a:lstStyle/>
+          <a:p>
+            <a:pPr algn="ctr"/>
+            <a:r>
+              <a:rPr sz="2600" b="1" i="0">
+                <a:solidFill>
+                  <a:srgbClr val="FFFFFF"/>
+                </a:solidFill>
+                <a:latin typeface="Calibri"/>
+              </a:rPr>
+              <a:t>Cómo se entrega, paso a paso</a:t>
+            </a:r>
+          </a:p>
+        </p:txBody>
+      </p:sp>
+      <p:sp>
+        <p:nvSpPr>
+          <p:cNvPr id="4" name="TextBox 3"/>
+          <p:cNvSpPr txBox="1"/>
+          <p:nvPr/>
+        </p:nvSpPr>
+        <p:spPr>
+          <a:xfrm>
+            <a:off x="640080" y="1691639"/>
+            <a:ext cx="10911535" cy="4617720"/>
+          </a:xfrm>
+          <a:prstGeom prst="rect">
+            <a:avLst/>
+          </a:prstGeom>
+          <a:noFill/>
+        </p:spPr>
+        <p:txBody>
+          <a:bodyPr wrap="square" anchor="t" lIns="0" rIns="0" tIns="0" bIns="0">
+            <a:spAutoFit/>
+          </a:bodyPr>
+          <a:lstStyle/>
+          <a:p>
+            <a:pPr>
+              <a:spcAft>
+                <a:spcPts val="1000"/>
+              </a:spcAft>
+            </a:pPr>
+            <a:r>
+              <a:rPr sz="1600" b="0" i="0">
+                <a:solidFill>
+                  <a:srgbClr val="2B2B2B"/>
+                </a:solidFill>
+                <a:latin typeface="Calibri"/>
+              </a:rPr>
+              <a:t>–   </a:t>
+            </a:r>
+            <a:r>
+              <a:rPr sz="1600" b="1" i="0">
+                <a:solidFill>
+                  <a:srgbClr val="2B2B2B"/>
+                </a:solidFill>
+                <a:latin typeface="Calibri"/>
+              </a:rPr>
+              <a:t>1.</a:t>
+            </a:r>
+            <a:r>
+              <a:rPr sz="1600" b="0" i="0">
+                <a:solidFill>
+                  <a:srgbClr val="2B2B2B"/>
+                </a:solidFill>
+                <a:latin typeface="Calibri"/>
+              </a:rPr>
+              <a:t> Escriba en </a:t>
+            </a:r>
+            <a:r>
+              <a:rPr sz="1600" b="1" i="0">
+                <a:solidFill>
+                  <a:srgbClr val="2B2B2B"/>
+                </a:solidFill>
+                <a:latin typeface="Calibri"/>
+              </a:rPr>
+              <a:t>Google Docs</a:t>
+            </a:r>
+            <a:r>
+              <a:rPr sz="1600" b="0" i="0">
+                <a:solidFill>
+                  <a:srgbClr val="2B2B2B"/>
+                </a:solidFill>
+                <a:latin typeface="Calibri"/>
+              </a:rPr>
+              <a:t> sobre la </a:t>
+            </a:r>
+            <a:r>
+              <a:rPr sz="1600" b="1" i="0">
+                <a:solidFill>
+                  <a:srgbClr val="2B2B2B"/>
+                </a:solidFill>
+                <a:latin typeface="Calibri"/>
+              </a:rPr>
+              <a:t>plantilla APA CUN</a:t>
+            </a:r>
+            <a:r>
+              <a:rPr sz="1600" b="0" i="0">
+                <a:solidFill>
+                  <a:srgbClr val="2B2B2B"/>
+                </a:solidFill>
+                <a:latin typeface="Calibri"/>
+              </a:rPr>
+              <a:t> de `Clases/Recursos/` (*Archivo → Abrir con → Documentos de Google*).</a:t>
+            </a:r>
+          </a:p>
+          <a:p>
+            <a:pPr>
+              <a:spcAft>
+                <a:spcPts val="1000"/>
+              </a:spcAft>
+            </a:pPr>
+            <a:r>
+              <a:rPr sz="1600" b="0" i="0">
+                <a:solidFill>
+                  <a:srgbClr val="2B2B2B"/>
+                </a:solidFill>
+                <a:latin typeface="Calibri"/>
+              </a:rPr>
+              <a:t>–   </a:t>
+            </a:r>
+            <a:r>
+              <a:rPr sz="1600" b="1" i="0">
+                <a:solidFill>
+                  <a:srgbClr val="2B2B2B"/>
+                </a:solidFill>
+                <a:latin typeface="Calibri"/>
+              </a:rPr>
+              <a:t>2.</a:t>
+            </a:r>
+            <a:r>
+              <a:rPr sz="1600" b="0" i="0">
+                <a:solidFill>
+                  <a:srgbClr val="2B2B2B"/>
+                </a:solidFill>
+                <a:latin typeface="Calibri"/>
+              </a:rPr>
+              <a:t> Trabaje </a:t>
+            </a:r>
+            <a:r>
+              <a:rPr sz="1600" b="1" i="0">
+                <a:solidFill>
+                  <a:srgbClr val="2B2B2B"/>
+                </a:solidFill>
+                <a:latin typeface="Calibri"/>
+              </a:rPr>
+              <a:t>siempre en el mismo documento</a:t>
+            </a:r>
+            <a:r>
+              <a:rPr sz="1600" b="0" i="0">
+                <a:solidFill>
+                  <a:srgbClr val="2B2B2B"/>
+                </a:solidFill>
+                <a:latin typeface="Calibri"/>
+              </a:rPr>
+              <a:t>: TG2 se evalúa por versiones de un texto que crece, no por archivos sueltos.</a:t>
+            </a:r>
+          </a:p>
+          <a:p>
+            <a:pPr>
+              <a:spcAft>
+                <a:spcPts val="1000"/>
+              </a:spcAft>
+            </a:pPr>
+            <a:r>
+              <a:rPr sz="1600" b="0" i="0">
+                <a:solidFill>
+                  <a:srgbClr val="2B2B2B"/>
+                </a:solidFill>
+                <a:latin typeface="Calibri"/>
+              </a:rPr>
+              <a:t>–   </a:t>
+            </a:r>
+            <a:r>
+              <a:rPr sz="1600" b="1" i="0">
+                <a:solidFill>
+                  <a:srgbClr val="2B2B2B"/>
+                </a:solidFill>
+                <a:latin typeface="Calibri"/>
+              </a:rPr>
+              <a:t>3.</a:t>
+            </a:r>
+            <a:r>
+              <a:rPr sz="1600" b="0" i="0">
+                <a:solidFill>
+                  <a:srgbClr val="2B2B2B"/>
+                </a:solidFill>
+                <a:latin typeface="Calibri"/>
+              </a:rPr>
+              <a:t> Nombre el archivo `SNN_Tema_Apellido`. Ejemplo: `S02_PreguntaObjetivos_Perez`.</a:t>
+            </a:r>
+          </a:p>
+          <a:p>
+            <a:pPr>
+              <a:spcAft>
+                <a:spcPts val="1000"/>
+              </a:spcAft>
+            </a:pPr>
+            <a:r>
+              <a:rPr sz="1600" b="0" i="0">
+                <a:solidFill>
+                  <a:srgbClr val="2B2B2B"/>
+                </a:solidFill>
+                <a:latin typeface="Calibri"/>
+              </a:rPr>
+              <a:t>–   </a:t>
+            </a:r>
+            <a:r>
+              <a:rPr sz="1600" b="1" i="0">
+                <a:solidFill>
+                  <a:srgbClr val="2B2B2B"/>
+                </a:solidFill>
+                <a:latin typeface="Calibri"/>
+              </a:rPr>
+              <a:t>4.</a:t>
+            </a:r>
+            <a:r>
+              <a:rPr sz="1600" b="0" i="0">
+                <a:solidFill>
+                  <a:srgbClr val="2B2B2B"/>
+                </a:solidFill>
+                <a:latin typeface="Calibri"/>
+              </a:rPr>
+              <a:t> Entregue en </a:t>
+            </a:r>
+            <a:r>
+              <a:rPr sz="1600" b="1" i="0">
+                <a:solidFill>
+                  <a:srgbClr val="2B2B2B"/>
+                </a:solidFill>
+                <a:latin typeface="Calibri"/>
+              </a:rPr>
+              <a:t>PDF</a:t>
+            </a:r>
+            <a:r>
+              <a:rPr sz="1600" b="0" i="0">
+                <a:solidFill>
+                  <a:srgbClr val="2B2B2B"/>
+                </a:solidFill>
+                <a:latin typeface="Calibri"/>
+              </a:rPr>
+              <a:t> (*Archivo → Descargar → PDF*), salvo que el Docente pida el enlace.</a:t>
+            </a:r>
+          </a:p>
+          <a:p>
+            <a:pPr>
+              <a:spcAft>
+                <a:spcPts val="1000"/>
+              </a:spcAft>
+            </a:pPr>
+            <a:r>
+              <a:rPr sz="1600" b="0" i="0">
+                <a:solidFill>
+                  <a:srgbClr val="2B2B2B"/>
+                </a:solidFill>
+                <a:latin typeface="Calibri"/>
+              </a:rPr>
+              <a:t>–   </a:t>
+            </a:r>
+            <a:r>
+              <a:rPr sz="1600" b="1" i="0">
+                <a:solidFill>
+                  <a:srgbClr val="2B2B2B"/>
+                </a:solidFill>
+                <a:latin typeface="Calibri"/>
+              </a:rPr>
+              <a:t>5.</a:t>
+            </a:r>
+            <a:r>
+              <a:rPr sz="1600" b="0" i="0">
+                <a:solidFill>
+                  <a:srgbClr val="2B2B2B"/>
+                </a:solidFill>
+                <a:latin typeface="Calibri"/>
+              </a:rPr>
+              <a:t> Suba a </a:t>
+            </a:r>
+            <a:r>
+              <a:rPr sz="1600" b="1" i="0">
+                <a:solidFill>
+                  <a:srgbClr val="2B2B2B"/>
+                </a:solidFill>
+                <a:latin typeface="Calibri"/>
+              </a:rPr>
+              <a:t>CDigital</a:t>
+            </a:r>
+            <a:r>
+              <a:rPr sz="1600" b="0" i="0">
+                <a:solidFill>
+                  <a:srgbClr val="2B2B2B"/>
+                </a:solidFill>
+                <a:latin typeface="Calibri"/>
+              </a:rPr>
+              <a:t> en el espacio de la sesión: [URL CDigital — campus del curso pendiente]</a:t>
+            </a:r>
+          </a:p>
+          <a:p>
+            <a:pPr>
+              <a:spcAft>
+                <a:spcPts val="1000"/>
+              </a:spcAft>
+            </a:pPr>
+            <a:r>
+              <a:rPr sz="1600" b="0" i="0">
+                <a:solidFill>
+                  <a:srgbClr val="2B2B2B"/>
+                </a:solidFill>
+                <a:latin typeface="Calibri"/>
+              </a:rPr>
+              <a:t>–   </a:t>
+            </a:r>
+            <a:r>
+              <a:rPr sz="1600" b="1" i="0">
+                <a:solidFill>
+                  <a:srgbClr val="2B2B2B"/>
+                </a:solidFill>
+                <a:latin typeface="Calibri"/>
+              </a:rPr>
+              <a:t>6.</a:t>
+            </a:r>
+            <a:r>
+              <a:rPr sz="1600" b="0" i="0">
+                <a:solidFill>
+                  <a:srgbClr val="2B2B2B"/>
+                </a:solidFill>
+                <a:latin typeface="Calibri"/>
+              </a:rPr>
+              <a:t> Verifique el estado: </a:t>
+            </a:r>
+            <a:r>
+              <a:rPr sz="1600" b="1" i="0">
+                <a:solidFill>
+                  <a:srgbClr val="2B2B2B"/>
+                </a:solidFill>
+                <a:latin typeface="Calibri"/>
+              </a:rPr>
+              <a:t>subido no es entregado</a:t>
+            </a:r>
+            <a:r>
+              <a:rPr sz="1600" b="0" i="0">
+                <a:solidFill>
+                  <a:srgbClr val="2B2B2B"/>
+                </a:solidFill>
+                <a:latin typeface="Calibri"/>
+              </a:rPr>
+              <a:t>. Guarde la captura del envío si el campus la permite.</a:t>
+            </a:r>
+          </a:p>
+          <a:p>
+            <a:pPr>
+              <a:spcAft>
+                <a:spcPts val="1000"/>
+              </a:spcAft>
+            </a:pPr>
+            <a:r>
+              <a:rPr sz="1600" b="0" i="0">
+                <a:solidFill>
+                  <a:srgbClr val="2B2B2B"/>
+                </a:solidFill>
+                <a:latin typeface="Calibri"/>
+              </a:rPr>
+              <a:t>–   </a:t>
+            </a:r>
+            <a:r>
+              <a:rPr sz="1600" b="1" i="0">
+                <a:solidFill>
+                  <a:srgbClr val="2B2B2B"/>
+                </a:solidFill>
+                <a:latin typeface="Calibri"/>
+              </a:rPr>
+              <a:t>Si entrega tarde:</a:t>
+            </a:r>
+            <a:r>
+              <a:rPr sz="1600" b="0" i="0">
+                <a:solidFill>
+                  <a:srgbClr val="2B2B2B"/>
+                </a:solidFill>
+                <a:latin typeface="Calibri"/>
+              </a:rPr>
+              <a:t> avise </a:t>
+            </a:r>
+            <a:r>
+              <a:rPr sz="1600" b="1" i="0">
+                <a:solidFill>
+                  <a:srgbClr val="2B2B2B"/>
+                </a:solidFill>
+                <a:latin typeface="Calibri"/>
+              </a:rPr>
+              <a:t>antes</a:t>
+            </a:r>
+            <a:r>
+              <a:rPr sz="1600" b="0" i="0">
+                <a:solidFill>
+                  <a:srgbClr val="2B2B2B"/>
+                </a:solidFill>
+                <a:latin typeface="Calibri"/>
+              </a:rPr>
+              <a:t> del cierre. Se recibe, pero se califica lo que exista dentro del plazo.</a:t>
+            </a:r>
+          </a:p>
+          <a:p>
+            <a:pPr>
+              <a:spcAft>
+                <a:spcPts val="1000"/>
+              </a:spcAft>
+            </a:pPr>
+            <a:r>
+              <a:rPr sz="1600" b="0" i="0">
+                <a:solidFill>
+                  <a:srgbClr val="2B2B2B"/>
+                </a:solidFill>
+                <a:latin typeface="Calibri"/>
+              </a:rPr>
+              <a:t>–   </a:t>
+            </a:r>
+            <a:r>
+              <a:rPr sz="1600" b="1" i="0">
+                <a:solidFill>
+                  <a:srgbClr val="2B2B2B"/>
+                </a:solidFill>
+                <a:latin typeface="Calibri"/>
+              </a:rPr>
+              <a:t>Lo que no está en CDigital, no está entregado.</a:t>
+            </a:r>
+            <a:r>
+              <a:rPr sz="1600" b="0" i="0">
+                <a:solidFill>
+                  <a:srgbClr val="2B2B2B"/>
+                </a:solidFill>
+                <a:latin typeface="Calibri"/>
+              </a:rPr>
+              <a:t> No hay entregas por WhatsApp ni por correo personal.</a:t>
+            </a:r>
+          </a:p>
+        </p:txBody>
+      </p:sp>
+      <p:sp>
+        <p:nvSpPr>
+          <p:cNvPr id="5" name="TextBox 4"/>
+          <p:cNvSpPr txBox="1"/>
+          <p:nvPr/>
+        </p:nvSpPr>
+        <p:spPr>
+          <a:xfrm>
+            <a:off x="2194560" y="6446520"/>
+            <a:ext cx="5943600" cy="274320"/>
+          </a:xfrm>
+          <a:prstGeom prst="rect">
+            <a:avLst/>
+          </a:prstGeom>
+          <a:noFill/>
+        </p:spPr>
+        <p:txBody>
+          <a:bodyPr wrap="square" anchor="t" lIns="0" rIns="0" tIns="0" bIns="0">
+            <a:spAutoFit/>
+          </a:bodyPr>
+          <a:lstStyle/>
+          <a:p>
+            <a:pPr algn="l"/>
+            <a:r>
+              <a:rPr sz="1000" b="1" i="0">
+                <a:solidFill>
+                  <a:srgbClr val="8F989D"/>
+                </a:solidFill>
+                <a:latin typeface="Calibri"/>
+              </a:rPr>
+              <a:t>Inicio 5:10 pm</a:t>
+            </a:r>
+          </a:p>
+        </p:txBody>
+      </p:sp>
+      <p:sp>
+        <p:nvSpPr>
+          <p:cNvPr id="6" name="TextBox 5"/>
+          <p:cNvSpPr txBox="1"/>
+          <p:nvPr/>
+        </p:nvSpPr>
+        <p:spPr>
+          <a:xfrm>
+            <a:off x="11094415" y="6446520"/>
+            <a:ext cx="548640" cy="274320"/>
+          </a:xfrm>
+          <a:prstGeom prst="rect">
+            <a:avLst/>
+          </a:prstGeom>
+          <a:noFill/>
+        </p:spPr>
+        <p:txBody>
+          <a:bodyPr wrap="square" anchor="t" lIns="0" rIns="0" tIns="0" bIns="0">
+            <a:spAutoFit/>
+          </a:bodyPr>
+          <a:lstStyle/>
+          <a:p>
+            <a:pPr algn="r"/>
+            <a:r>
+              <a:rPr sz="1000" b="1" i="0">
+                <a:solidFill>
+                  <a:srgbClr val="8F989D"/>
+                </a:solidFill>
+                <a:latin typeface="Calibri"/>
+              </a:rPr>
+              <a:t>13</a:t>
+            </a:r>
+          </a:p>
+        </p:txBody>
+      </p:sp>
+    </p:spTree>
+  </p:cSld>
+  <p:clrMapOvr>
+    <a:masterClrMapping/>
+  </p:clrMapOvr>
+</p:sld>
+</file>
+
+<file path=ppt/slides/slide14.xml><?xml version="1.0" encoding="utf-8"?>
+<p:sld xmlns:a="http://schemas.openxmlformats.org/drawingml/2006/main" xmlns:p="http://schemas.openxmlformats.org/presentationml/2006/main" xmlns:r="http://schemas.openxmlformats.org/officeDocument/2006/relationships">
+  <p:cSld>
+    <p:bg>
+      <p:bgPr>
+        <a:solidFill>
+          <a:srgbClr val="FFFFFF"/>
+        </a:solidFill>
+        <a:effectLst/>
+      </p:bgPr>
+    </p:bg>
+    <p:spTree>
+      <p:nvGrpSpPr>
+        <p:cNvPr id="1" name=""/>
+        <p:cNvGrpSpPr/>
+        <p:nvPr/>
+      </p:nvGrpSpPr>
+      <p:grpSpPr/>
+      <p:sp>
+        <p:nvSpPr>
+          <p:cNvPr id="2" name="Rectangle 1"/>
+          <p:cNvSpPr/>
+          <p:nvPr/>
+        </p:nvSpPr>
+        <p:spPr>
+          <a:xfrm>
+            <a:off x="0" y="0"/>
+            <a:ext cx="12191695" cy="1188720"/>
+          </a:xfrm>
+          <a:prstGeom prst="rect">
+            <a:avLst/>
+          </a:prstGeom>
+          <a:solidFill>
+            <a:srgbClr val="0C2340"/>
+          </a:solidFill>
+          <a:ln>
+            <a:noFill/>
+          </a:ln>
+          <a:effectLst/>
+        </p:spPr>
+        <p:style>
+          <a:lnRef idx="1">
+            <a:schemeClr val="accent1"/>
+          </a:lnRef>
+          <a:fillRef idx="3">
+            <a:schemeClr val="accent1"/>
+          </a:fillRef>
+          <a:effectRef idx="2">
+            <a:schemeClr val="accent1"/>
+          </a:effectRef>
+          <a:fontRef idx="minor">
+            <a:schemeClr val="lt1"/>
+          </a:fontRef>
+        </p:style>
+        <p:txBody>
+          <a:bodyPr rtlCol="0" anchor="ctr"/>
+          <a:lstStyle/>
+          <a:p>
+            <a:pPr algn="ctr"/>
+          </a:p>
+        </p:txBody>
+      </p:sp>
+      <p:sp>
+        <p:nvSpPr>
+          <p:cNvPr id="3" name="TextBox 2"/>
+          <p:cNvSpPr txBox="1"/>
+          <p:nvPr/>
+        </p:nvSpPr>
+        <p:spPr>
+          <a:xfrm>
+            <a:off x="640080" y="0"/>
+            <a:ext cx="9082735" cy="1188720"/>
+          </a:xfrm>
+          <a:prstGeom prst="rect">
+            <a:avLst/>
+          </a:prstGeom>
+          <a:noFill/>
+        </p:spPr>
+        <p:txBody>
+          <a:bodyPr wrap="square" anchor="ctr" lIns="0" rIns="0" tIns="0" bIns="0">
+            <a:spAutoFit/>
+          </a:bodyPr>
+          <a:lstStyle/>
+          <a:p>
+            <a:pPr algn="ctr"/>
+            <a:r>
+              <a:rPr sz="2600" b="1" i="0">
+                <a:solidFill>
+                  <a:srgbClr val="FFFFFF"/>
+                </a:solidFill>
+                <a:latin typeface="Calibri"/>
+              </a:rPr>
+              <a:t>Integridad académica: en trabajo de grado se revisa de verdad</a:t>
+            </a:r>
+          </a:p>
+        </p:txBody>
+      </p:sp>
+      <p:sp>
+        <p:nvSpPr>
+          <p:cNvPr id="4" name="TextBox 3"/>
+          <p:cNvSpPr txBox="1"/>
+          <p:nvPr/>
+        </p:nvSpPr>
+        <p:spPr>
+          <a:xfrm>
+            <a:off x="640080" y="1691639"/>
+            <a:ext cx="10911535" cy="4617720"/>
+          </a:xfrm>
+          <a:prstGeom prst="rect">
+            <a:avLst/>
+          </a:prstGeom>
+          <a:noFill/>
+        </p:spPr>
+        <p:txBody>
+          <a:bodyPr wrap="square" anchor="t" lIns="0" rIns="0" tIns="0" bIns="0">
+            <a:spAutoFit/>
+          </a:bodyPr>
+          <a:lstStyle/>
+          <a:p>
+            <a:pPr>
+              <a:spcAft>
+                <a:spcPts val="1000"/>
+              </a:spcAft>
+            </a:pPr>
+            <a:r>
+              <a:rPr sz="1600" b="0" i="0">
+                <a:solidFill>
+                  <a:srgbClr val="2B2B2B"/>
+                </a:solidFill>
+                <a:latin typeface="Calibri"/>
+              </a:rPr>
+              <a:t>–   Todo lo que no es suyo se </a:t>
+            </a:r>
+            <a:r>
+              <a:rPr sz="1600" b="1" i="0">
+                <a:solidFill>
+                  <a:srgbClr val="2B2B2B"/>
+                </a:solidFill>
+                <a:latin typeface="Calibri"/>
+              </a:rPr>
+              <a:t>cita en APA 7</a:t>
+            </a:r>
+            <a:r>
+              <a:rPr sz="1600" b="0" i="0">
+                <a:solidFill>
+                  <a:srgbClr val="2B2B2B"/>
+                </a:solidFill>
+                <a:latin typeface="Calibri"/>
+              </a:rPr>
+              <a:t>: ideas, datos, tablas, figuras, código y fragmentos de su propio trabajo anterior.</a:t>
+            </a:r>
+          </a:p>
+          <a:p>
+            <a:pPr>
+              <a:spcAft>
+                <a:spcPts val="1000"/>
+              </a:spcAft>
+            </a:pPr>
+            <a:r>
+              <a:rPr sz="1600" b="0" i="0">
+                <a:solidFill>
+                  <a:srgbClr val="2B2B2B"/>
+                </a:solidFill>
+                <a:latin typeface="Calibri"/>
+              </a:rPr>
+              <a:t>–   </a:t>
+            </a:r>
+            <a:r>
+              <a:rPr sz="1600" b="1" i="0">
+                <a:solidFill>
+                  <a:srgbClr val="2B2B2B"/>
+                </a:solidFill>
+                <a:latin typeface="Calibri"/>
+              </a:rPr>
+              <a:t>Parafrasear</a:t>
+            </a:r>
+            <a:r>
+              <a:rPr sz="1600" b="0" i="0">
+                <a:solidFill>
+                  <a:srgbClr val="2B2B2B"/>
+                </a:solidFill>
+                <a:latin typeface="Calibri"/>
+              </a:rPr>
+              <a:t> es reescribir con sus palabras </a:t>
+            </a:r>
+            <a:r>
+              <a:rPr sz="1600" b="1" i="0">
+                <a:solidFill>
+                  <a:srgbClr val="2B2B2B"/>
+                </a:solidFill>
+                <a:latin typeface="Calibri"/>
+              </a:rPr>
+              <a:t>y citar igual</a:t>
+            </a:r>
+            <a:r>
+              <a:rPr sz="1600" b="0" i="0">
+                <a:solidFill>
+                  <a:srgbClr val="2B2B2B"/>
+                </a:solidFill>
+                <a:latin typeface="Calibri"/>
+              </a:rPr>
+              <a:t>; cambiar dos palabras no es parafrasear.</a:t>
+            </a:r>
+          </a:p>
+          <a:p>
+            <a:pPr>
+              <a:spcAft>
+                <a:spcPts val="1000"/>
+              </a:spcAft>
+            </a:pPr>
+            <a:r>
+              <a:rPr sz="1600" b="0" i="0">
+                <a:solidFill>
+                  <a:srgbClr val="2B2B2B"/>
+                </a:solidFill>
+                <a:latin typeface="Calibri"/>
+              </a:rPr>
+              <a:t>–   Cuenta como plagio:</a:t>
+            </a:r>
+          </a:p>
+          <a:p>
+            <a:pPr lvl="1">
+              <a:spcAft>
+                <a:spcPts val="600"/>
+              </a:spcAft>
+            </a:pPr>
+            <a:r>
+              <a:rPr sz="1500" b="0" i="0">
+                <a:solidFill>
+                  <a:srgbClr val="2B2B2B"/>
+                </a:solidFill>
+                <a:latin typeface="Calibri"/>
+              </a:rPr>
+              <a:t>●   Copiar y pegar sin comillas ni referencia.</a:t>
+            </a:r>
+          </a:p>
+          <a:p>
+            <a:pPr lvl="1">
+              <a:spcAft>
+                <a:spcPts val="600"/>
+              </a:spcAft>
+            </a:pPr>
+            <a:r>
+              <a:rPr sz="1500" b="0" i="0">
+                <a:solidFill>
+                  <a:srgbClr val="2B2B2B"/>
+                </a:solidFill>
+                <a:latin typeface="Calibri"/>
+              </a:rPr>
+              <a:t>●   Traducir un texto ajeno y firmarlo como propio.</a:t>
+            </a:r>
+          </a:p>
+          <a:p>
+            <a:pPr lvl="1">
+              <a:spcAft>
+                <a:spcPts val="600"/>
+              </a:spcAft>
+            </a:pPr>
+            <a:r>
+              <a:rPr sz="1500" b="0" i="0">
+                <a:solidFill>
+                  <a:srgbClr val="2B2B2B"/>
+                </a:solidFill>
+                <a:latin typeface="Calibri"/>
+              </a:rPr>
+              <a:t>●   Reutilizar un trabajo de otro semestre sin declararlo (</a:t>
+            </a:r>
+            <a:r>
+              <a:rPr sz="1500" b="1" i="0">
+                <a:solidFill>
+                  <a:srgbClr val="2B2B2B"/>
+                </a:solidFill>
+                <a:latin typeface="Calibri"/>
+              </a:rPr>
+              <a:t>autoplagio</a:t>
+            </a:r>
+            <a:r>
+              <a:rPr sz="1500" b="0" i="0">
+                <a:solidFill>
+                  <a:srgbClr val="2B2B2B"/>
+                </a:solidFill>
+                <a:latin typeface="Calibri"/>
+              </a:rPr>
+              <a:t>).</a:t>
+            </a:r>
+          </a:p>
+          <a:p>
+            <a:pPr>
+              <a:spcAft>
+                <a:spcPts val="1000"/>
+              </a:spcAft>
+            </a:pPr>
+            <a:r>
+              <a:rPr sz="1600" b="0" i="0">
+                <a:solidFill>
+                  <a:srgbClr val="2B2B2B"/>
+                </a:solidFill>
+                <a:latin typeface="Calibri"/>
+              </a:rPr>
+              <a:t>–   En TG3 el documento pasa por la </a:t>
+            </a:r>
+            <a:r>
+              <a:rPr sz="1600" b="1" i="0">
+                <a:solidFill>
+                  <a:srgbClr val="2B2B2B"/>
+                </a:solidFill>
+                <a:latin typeface="Calibri"/>
+              </a:rPr>
+              <a:t>herramienta antiplagio institucional del campus</a:t>
+            </a:r>
+            <a:r>
+              <a:rPr sz="1600" b="0" i="0">
+                <a:solidFill>
+                  <a:srgbClr val="2B2B2B"/>
+                </a:solidFill>
+                <a:latin typeface="Calibri"/>
+              </a:rPr>
+              <a:t>: el hábito se corrige aquí, no allá.</a:t>
+            </a:r>
+          </a:p>
+          <a:p>
+            <a:pPr>
+              <a:spcAft>
+                <a:spcPts val="1000"/>
+              </a:spcAft>
+            </a:pPr>
+            <a:r>
+              <a:rPr sz="1600" b="0" i="0">
+                <a:solidFill>
+                  <a:srgbClr val="2B2B2B"/>
+                </a:solidFill>
+                <a:latin typeface="Calibri"/>
+              </a:rPr>
+              <a:t>–   Si se detecta plagio se activa el </a:t>
+            </a:r>
+            <a:r>
+              <a:rPr sz="1600" b="1" i="0">
+                <a:solidFill>
+                  <a:srgbClr val="2B2B2B"/>
+                </a:solidFill>
+                <a:latin typeface="Calibri"/>
+              </a:rPr>
+              <a:t>debido proceso institucional</a:t>
+            </a:r>
+            <a:r>
+              <a:rPr sz="1600" b="0" i="0">
+                <a:solidFill>
+                  <a:srgbClr val="2B2B2B"/>
+                </a:solidFill>
+                <a:latin typeface="Calibri"/>
+              </a:rPr>
+              <a:t>, con consecuencias sobre la opción de grado.</a:t>
+            </a:r>
+          </a:p>
+        </p:txBody>
+      </p:sp>
+      <p:sp>
+        <p:nvSpPr>
+          <p:cNvPr id="5" name="TextBox 4"/>
+          <p:cNvSpPr txBox="1"/>
+          <p:nvPr/>
+        </p:nvSpPr>
+        <p:spPr>
+          <a:xfrm>
+            <a:off x="2194560" y="6446520"/>
+            <a:ext cx="5943600" cy="274320"/>
+          </a:xfrm>
+          <a:prstGeom prst="rect">
+            <a:avLst/>
+          </a:prstGeom>
+          <a:noFill/>
+        </p:spPr>
+        <p:txBody>
+          <a:bodyPr wrap="square" anchor="t" lIns="0" rIns="0" tIns="0" bIns="0">
+            <a:spAutoFit/>
+          </a:bodyPr>
+          <a:lstStyle/>
+          <a:p>
+            <a:pPr algn="l"/>
+            <a:r>
+              <a:rPr sz="1000" b="1" i="0">
+                <a:solidFill>
+                  <a:srgbClr val="8F989D"/>
+                </a:solidFill>
+                <a:latin typeface="Calibri"/>
+              </a:rPr>
+              <a:t>Inicio 5:10 pm</a:t>
+            </a:r>
+          </a:p>
+        </p:txBody>
+      </p:sp>
+      <p:sp>
+        <p:nvSpPr>
+          <p:cNvPr id="6" name="TextBox 5"/>
+          <p:cNvSpPr txBox="1"/>
+          <p:nvPr/>
+        </p:nvSpPr>
+        <p:spPr>
+          <a:xfrm>
+            <a:off x="11094415" y="6446520"/>
+            <a:ext cx="548640" cy="274320"/>
+          </a:xfrm>
+          <a:prstGeom prst="rect">
+            <a:avLst/>
+          </a:prstGeom>
+          <a:noFill/>
+        </p:spPr>
+        <p:txBody>
+          <a:bodyPr wrap="square" anchor="t" lIns="0" rIns="0" tIns="0" bIns="0">
+            <a:spAutoFit/>
+          </a:bodyPr>
+          <a:lstStyle/>
+          <a:p>
+            <a:pPr algn="r"/>
+            <a:r>
+              <a:rPr sz="1000" b="1" i="0">
+                <a:solidFill>
+                  <a:srgbClr val="8F989D"/>
+                </a:solidFill>
+                <a:latin typeface="Calibri"/>
+              </a:rPr>
+              <a:t>14</a:t>
+            </a:r>
+          </a:p>
+        </p:txBody>
+      </p:sp>
+      <p:sp>
+        <p:nvSpPr>
+          <p:cNvPr id="7" name="TextBox 6"/>
+          <p:cNvSpPr txBox="1"/>
+          <p:nvPr/>
+        </p:nvSpPr>
+        <p:spPr>
+          <a:xfrm>
+            <a:off x="640080" y="5943600"/>
+            <a:ext cx="9997135" cy="457200"/>
+          </a:xfrm>
+          <a:prstGeom prst="rect">
+            <a:avLst/>
+          </a:prstGeom>
+          <a:noFill/>
+        </p:spPr>
+        <p:txBody>
+          <a:bodyPr wrap="square" anchor="t" lIns="0" rIns="0" tIns="0" bIns="0">
+            <a:spAutoFit/>
+          </a:bodyPr>
+          <a:lstStyle/>
+          <a:p>
+            <a:r>
+              <a:rPr sz="1200" b="0" i="1">
+                <a:solidFill>
+                  <a:srgbClr val="2B2B2B"/>
+                </a:solidFill>
+                <a:latin typeface="Calibri"/>
+              </a:rPr>
+              <a:t>Regla práctica: </a:t>
+            </a:r>
+            <a:r>
+              <a:rPr sz="1200" b="1" i="1">
+                <a:solidFill>
+                  <a:srgbClr val="2B2B2B"/>
+                </a:solidFill>
+                <a:latin typeface="Calibri"/>
+              </a:rPr>
+              <a:t>anote la fuente en el instante</a:t>
+            </a:r>
+            <a:r>
+              <a:rPr sz="1200" b="0" i="1">
+                <a:solidFill>
+                  <a:srgbClr val="2B2B2B"/>
+                </a:solidFill>
+                <a:latin typeface="Calibri"/>
+              </a:rPr>
+              <a:t> en que pega algo. En un documento que crece seis meses, reconstruirla es imposible.</a:t>
+            </a:r>
+          </a:p>
+        </p:txBody>
+      </p:sp>
+    </p:spTree>
+  </p:cSld>
+  <p:clrMapOvr>
+    <a:masterClrMapping/>
+  </p:clrMapOvr>
+</p:sld>
+</file>
+
+<file path=ppt/slides/slide15.xml><?xml version="1.0" encoding="utf-8"?>
+<p:sld xmlns:a="http://schemas.openxmlformats.org/drawingml/2006/main" xmlns:p="http://schemas.openxmlformats.org/presentationml/2006/main" xmlns:r="http://schemas.openxmlformats.org/officeDocument/2006/relationships">
+  <p:cSld>
+    <p:bg>
+      <p:bgPr>
+        <a:solidFill>
+          <a:srgbClr val="FFFFFF"/>
+        </a:solidFill>
+        <a:effectLst/>
+      </p:bgPr>
+    </p:bg>
+    <p:spTree>
+      <p:nvGrpSpPr>
+        <p:cNvPr id="1" name=""/>
+        <p:cNvGrpSpPr/>
+        <p:nvPr/>
+      </p:nvGrpSpPr>
+      <p:grpSpPr/>
+      <p:sp>
+        <p:nvSpPr>
+          <p:cNvPr id="2" name="Rectangle 1"/>
+          <p:cNvSpPr/>
+          <p:nvPr/>
+        </p:nvSpPr>
+        <p:spPr>
+          <a:xfrm>
+            <a:off x="0" y="0"/>
+            <a:ext cx="12191695" cy="1188720"/>
+          </a:xfrm>
+          <a:prstGeom prst="rect">
+            <a:avLst/>
+          </a:prstGeom>
+          <a:solidFill>
+            <a:srgbClr val="0C2340"/>
+          </a:solidFill>
+          <a:ln>
+            <a:noFill/>
+          </a:ln>
+          <a:effectLst/>
+        </p:spPr>
+        <p:style>
+          <a:lnRef idx="1">
+            <a:schemeClr val="accent1"/>
+          </a:lnRef>
+          <a:fillRef idx="3">
+            <a:schemeClr val="accent1"/>
+          </a:fillRef>
+          <a:effectRef idx="2">
+            <a:schemeClr val="accent1"/>
+          </a:effectRef>
+          <a:fontRef idx="minor">
+            <a:schemeClr val="lt1"/>
+          </a:fontRef>
+        </p:style>
+        <p:txBody>
+          <a:bodyPr rtlCol="0" anchor="ctr"/>
+          <a:lstStyle/>
+          <a:p>
+            <a:pPr algn="ctr"/>
+          </a:p>
+        </p:txBody>
+      </p:sp>
+      <p:sp>
+        <p:nvSpPr>
+          <p:cNvPr id="3" name="TextBox 2"/>
+          <p:cNvSpPr txBox="1"/>
+          <p:nvPr/>
+        </p:nvSpPr>
+        <p:spPr>
+          <a:xfrm>
+            <a:off x="640080" y="0"/>
+            <a:ext cx="9082735" cy="1188720"/>
+          </a:xfrm>
+          <a:prstGeom prst="rect">
+            <a:avLst/>
+          </a:prstGeom>
+          <a:noFill/>
+        </p:spPr>
+        <p:txBody>
+          <a:bodyPr wrap="square" anchor="ctr" lIns="0" rIns="0" tIns="0" bIns="0">
+            <a:spAutoFit/>
+          </a:bodyPr>
+          <a:lstStyle/>
+          <a:p>
+            <a:pPr algn="ctr"/>
+            <a:r>
+              <a:rPr sz="2600" b="1" i="0">
+                <a:solidFill>
+                  <a:srgbClr val="FFFFFF"/>
+                </a:solidFill>
+                <a:latin typeface="Calibri"/>
+              </a:rPr>
+              <a:t>Inteligencia artificial generativa: reglas de la casa</a:t>
+            </a:r>
+          </a:p>
+        </p:txBody>
+      </p:sp>
+      <p:sp>
+        <p:nvSpPr>
+          <p:cNvPr id="4" name="Rounded Rectangle 3"/>
+          <p:cNvSpPr/>
+          <p:nvPr/>
+        </p:nvSpPr>
+        <p:spPr>
+          <a:xfrm>
+            <a:off x="640080" y="1737360"/>
+            <a:ext cx="10911535" cy="969264"/>
+          </a:xfrm>
+          <a:prstGeom prst="roundRect">
+            <a:avLst/>
+          </a:prstGeom>
+          <a:solidFill>
+            <a:srgbClr val="E8F5EC"/>
+          </a:solidFill>
+          <a:ln>
+            <a:noFill/>
+          </a:ln>
+          <a:effectLst/>
+        </p:spPr>
+        <p:style>
+          <a:lnRef idx="1">
+            <a:schemeClr val="accent1"/>
+          </a:lnRef>
+          <a:fillRef idx="3">
+            <a:schemeClr val="accent1"/>
+          </a:fillRef>
+          <a:effectRef idx="2">
+            <a:schemeClr val="accent1"/>
+          </a:effectRef>
+          <a:fontRef idx="minor">
+            <a:schemeClr val="lt1"/>
+          </a:fontRef>
+        </p:style>
+        <p:txBody>
+          <a:bodyPr rtlCol="0" anchor="ctr"/>
+          <a:lstStyle/>
+          <a:p>
+            <a:pPr algn="ctr"/>
+          </a:p>
+        </p:txBody>
+      </p:sp>
+      <p:sp>
+        <p:nvSpPr>
+          <p:cNvPr id="5" name="TextBox 4"/>
+          <p:cNvSpPr txBox="1"/>
+          <p:nvPr/>
+        </p:nvSpPr>
+        <p:spPr>
+          <a:xfrm>
+            <a:off x="868680" y="1847088"/>
+            <a:ext cx="10454335" cy="749808"/>
+          </a:xfrm>
+          <a:prstGeom prst="rect">
+            <a:avLst/>
+          </a:prstGeom>
+          <a:noFill/>
+        </p:spPr>
+        <p:txBody>
+          <a:bodyPr wrap="square" anchor="t" lIns="0" rIns="0" tIns="0" bIns="0">
+            <a:spAutoFit/>
+          </a:bodyPr>
+          <a:lstStyle/>
+          <a:p>
+            <a:r>
+              <a:rPr sz="1300" b="1" i="0">
+                <a:solidFill>
+                  <a:srgbClr val="0C2340"/>
+                </a:solidFill>
+                <a:latin typeface="Calibri"/>
+              </a:rPr>
+              <a:t>ℹ️ Nota institucional</a:t>
+            </a:r>
+          </a:p>
+          <a:p>
+            <a:pPr>
+              <a:spcBef>
+                <a:spcPts val="400"/>
+              </a:spcBef>
+            </a:pPr>
+            <a:r>
+              <a:rPr sz="1300" b="1" i="0">
+                <a:solidFill>
+                  <a:srgbClr val="2B2B2B"/>
+                </a:solidFill>
+                <a:latin typeface="Calibri"/>
+              </a:rPr>
+              <a:t>Sí se puede usar</a:t>
+            </a:r>
+            <a:r>
+              <a:rPr sz="1300" b="0" i="0">
+                <a:solidFill>
+                  <a:srgbClr val="2B2B2B"/>
+                </a:solidFill>
+                <a:latin typeface="Calibri"/>
+              </a:rPr>
+              <a:t> para entender un concepto, ordenar la estructura de una sección o mejorar la redacción de un párrafo que usted ya escribió.</a:t>
+            </a:r>
+          </a:p>
+        </p:txBody>
+      </p:sp>
+      <p:sp>
+        <p:nvSpPr>
+          <p:cNvPr id="6" name="Rounded Rectangle 5"/>
+          <p:cNvSpPr/>
+          <p:nvPr/>
+        </p:nvSpPr>
+        <p:spPr>
+          <a:xfrm>
+            <a:off x="640080" y="2935224"/>
+            <a:ext cx="10911535" cy="969264"/>
+          </a:xfrm>
+          <a:prstGeom prst="roundRect">
+            <a:avLst/>
+          </a:prstGeom>
+          <a:solidFill>
+            <a:srgbClr val="FDECD8"/>
+          </a:solidFill>
+          <a:ln>
+            <a:noFill/>
+          </a:ln>
+          <a:effectLst/>
+        </p:spPr>
+        <p:style>
+          <a:lnRef idx="1">
+            <a:schemeClr val="accent1"/>
+          </a:lnRef>
+          <a:fillRef idx="3">
+            <a:schemeClr val="accent1"/>
+          </a:fillRef>
+          <a:effectRef idx="2">
+            <a:schemeClr val="accent1"/>
+          </a:effectRef>
+          <a:fontRef idx="minor">
+            <a:schemeClr val="lt1"/>
+          </a:fontRef>
+        </p:style>
+        <p:txBody>
+          <a:bodyPr rtlCol="0" anchor="ctr"/>
+          <a:lstStyle/>
+          <a:p>
+            <a:pPr algn="ctr"/>
+          </a:p>
+        </p:txBody>
+      </p:sp>
+      <p:sp>
+        <p:nvSpPr>
+          <p:cNvPr id="7" name="TextBox 6"/>
+          <p:cNvSpPr txBox="1"/>
+          <p:nvPr/>
+        </p:nvSpPr>
+        <p:spPr>
+          <a:xfrm>
+            <a:off x="868680" y="3044952"/>
+            <a:ext cx="10454335" cy="749808"/>
+          </a:xfrm>
+          <a:prstGeom prst="rect">
+            <a:avLst/>
+          </a:prstGeom>
+          <a:noFill/>
+        </p:spPr>
+        <p:txBody>
+          <a:bodyPr wrap="square" anchor="t" lIns="0" rIns="0" tIns="0" bIns="0">
+            <a:spAutoFit/>
+          </a:bodyPr>
+          <a:lstStyle/>
+          <a:p>
+            <a:r>
+              <a:rPr sz="1300" b="1" i="0">
+                <a:solidFill>
+                  <a:srgbClr val="0C2340"/>
+                </a:solidFill>
+                <a:latin typeface="Calibri"/>
+              </a:rPr>
+              <a:t>💡 Aclaración</a:t>
+            </a:r>
+          </a:p>
+          <a:p>
+            <a:pPr>
+              <a:spcBef>
+                <a:spcPts val="400"/>
+              </a:spcBef>
+            </a:pPr>
+            <a:r>
+              <a:rPr sz="1300" b="1" i="0">
+                <a:solidFill>
+                  <a:srgbClr val="2B2B2B"/>
+                </a:solidFill>
+                <a:latin typeface="Calibri"/>
+              </a:rPr>
+              <a:t>Se declara.</a:t>
+            </a:r>
+            <a:r>
+              <a:rPr sz="1300" b="0" i="0">
+                <a:solidFill>
+                  <a:srgbClr val="2B2B2B"/>
+                </a:solidFill>
+                <a:latin typeface="Calibri"/>
+              </a:rPr>
+              <a:t> Una línea al final del documento: qué herramienta usó y para qué. Usarla no es falta; ocultarlo sí.</a:t>
+            </a:r>
+          </a:p>
+        </p:txBody>
+      </p:sp>
+      <p:sp>
+        <p:nvSpPr>
+          <p:cNvPr id="8" name="Rounded Rectangle 7"/>
+          <p:cNvSpPr/>
+          <p:nvPr/>
+        </p:nvSpPr>
+        <p:spPr>
+          <a:xfrm>
+            <a:off x="640080" y="4133087"/>
+            <a:ext cx="10911535" cy="1225296"/>
+          </a:xfrm>
+          <a:prstGeom prst="roundRect">
+            <a:avLst/>
+          </a:prstGeom>
+          <a:solidFill>
+            <a:srgbClr val="FBE4E4"/>
+          </a:solidFill>
+          <a:ln>
+            <a:noFill/>
+          </a:ln>
+          <a:effectLst/>
+        </p:spPr>
+        <p:style>
+          <a:lnRef idx="1">
+            <a:schemeClr val="accent1"/>
+          </a:lnRef>
+          <a:fillRef idx="3">
+            <a:schemeClr val="accent1"/>
+          </a:fillRef>
+          <a:effectRef idx="2">
+            <a:schemeClr val="accent1"/>
+          </a:effectRef>
+          <a:fontRef idx="minor">
+            <a:schemeClr val="lt1"/>
+          </a:fontRef>
+        </p:style>
+        <p:txBody>
+          <a:bodyPr rtlCol="0" anchor="ctr"/>
+          <a:lstStyle/>
+          <a:p>
+            <a:pPr algn="ctr"/>
+          </a:p>
+        </p:txBody>
+      </p:sp>
+      <p:sp>
+        <p:nvSpPr>
+          <p:cNvPr id="9" name="TextBox 8"/>
+          <p:cNvSpPr txBox="1"/>
+          <p:nvPr/>
+        </p:nvSpPr>
+        <p:spPr>
+          <a:xfrm>
+            <a:off x="868680" y="4242816"/>
+            <a:ext cx="10454335" cy="1005840"/>
+          </a:xfrm>
+          <a:prstGeom prst="rect">
+            <a:avLst/>
+          </a:prstGeom>
+          <a:noFill/>
+        </p:spPr>
+        <p:txBody>
+          <a:bodyPr wrap="square" anchor="t" lIns="0" rIns="0" tIns="0" bIns="0">
+            <a:spAutoFit/>
+          </a:bodyPr>
+          <a:lstStyle/>
+          <a:p>
+            <a:r>
+              <a:rPr sz="1300" b="1" i="0">
+                <a:solidFill>
+                  <a:srgbClr val="0C2340"/>
+                </a:solidFill>
+                <a:latin typeface="Calibri"/>
+              </a:rPr>
+              <a:t>⚠️ Importante</a:t>
+            </a:r>
+          </a:p>
+          <a:p>
+            <a:pPr>
+              <a:spcBef>
+                <a:spcPts val="400"/>
+              </a:spcBef>
+            </a:pPr>
+            <a:r>
+              <a:rPr sz="1300" b="1" i="0">
+                <a:solidFill>
+                  <a:srgbClr val="2B2B2B"/>
+                </a:solidFill>
+                <a:latin typeface="Calibri"/>
+              </a:rPr>
+              <a:t>Verifique cada referencia: estos modelos inventan autores, títulos y DOIs.</a:t>
+            </a:r>
+            <a:r>
+              <a:rPr sz="1300" b="0" i="0">
+                <a:solidFill>
+                  <a:srgbClr val="2B2B2B"/>
+                </a:solidFill>
+                <a:latin typeface="Calibri"/>
+              </a:rPr>
+              <a:t> Y recuerde que en TG3 hay sustentación ante jurados: un párrafo que usted no puede explicar en voz alta le va a costar caro.</a:t>
+            </a:r>
+          </a:p>
+        </p:txBody>
+      </p:sp>
+      <p:sp>
+        <p:nvSpPr>
+          <p:cNvPr id="10" name="TextBox 9"/>
+          <p:cNvSpPr txBox="1"/>
+          <p:nvPr/>
+        </p:nvSpPr>
+        <p:spPr>
+          <a:xfrm>
+            <a:off x="2194560" y="6446520"/>
+            <a:ext cx="5943600" cy="274320"/>
+          </a:xfrm>
+          <a:prstGeom prst="rect">
+            <a:avLst/>
+          </a:prstGeom>
+          <a:noFill/>
+        </p:spPr>
+        <p:txBody>
+          <a:bodyPr wrap="square" anchor="t" lIns="0" rIns="0" tIns="0" bIns="0">
+            <a:spAutoFit/>
+          </a:bodyPr>
+          <a:lstStyle/>
+          <a:p>
+            <a:pPr algn="l"/>
+            <a:r>
+              <a:rPr sz="1000" b="1" i="0">
+                <a:solidFill>
+                  <a:srgbClr val="8F989D"/>
+                </a:solidFill>
+                <a:latin typeface="Calibri"/>
+              </a:rPr>
+              <a:t>Inicio 5:10 pm</a:t>
+            </a:r>
+          </a:p>
+        </p:txBody>
+      </p:sp>
+      <p:sp>
+        <p:nvSpPr>
+          <p:cNvPr id="11" name="TextBox 10"/>
+          <p:cNvSpPr txBox="1"/>
+          <p:nvPr/>
+        </p:nvSpPr>
+        <p:spPr>
+          <a:xfrm>
+            <a:off x="11094415" y="6446520"/>
+            <a:ext cx="548640" cy="274320"/>
+          </a:xfrm>
+          <a:prstGeom prst="rect">
+            <a:avLst/>
+          </a:prstGeom>
+          <a:noFill/>
+        </p:spPr>
+        <p:txBody>
+          <a:bodyPr wrap="square" anchor="t" lIns="0" rIns="0" tIns="0" bIns="0">
+            <a:spAutoFit/>
+          </a:bodyPr>
+          <a:lstStyle/>
+          <a:p>
+            <a:pPr algn="r"/>
+            <a:r>
+              <a:rPr sz="1000" b="1" i="0">
+                <a:solidFill>
+                  <a:srgbClr val="8F989D"/>
+                </a:solidFill>
+                <a:latin typeface="Calibri"/>
+              </a:rPr>
+              <a:t>15</a:t>
+            </a:r>
+          </a:p>
+        </p:txBody>
+      </p:sp>
+    </p:spTree>
+  </p:cSld>
+  <p:clrMapOvr>
+    <a:masterClrMapping/>
+  </p:clrMapOvr>
+</p:sld>
+</file>
+
+<file path=ppt/slides/slide16.xml><?xml version="1.0" encoding="utf-8"?>
+<p:sld xmlns:a="http://schemas.openxmlformats.org/drawingml/2006/main" xmlns:p="http://schemas.openxmlformats.org/presentationml/2006/main" xmlns:r="http://schemas.openxmlformats.org/officeDocument/2006/relationships">
+  <p:cSld>
+    <p:bg>
+      <p:bgPr>
+        <a:solidFill>
+          <a:srgbClr val="FFFFFF"/>
+        </a:solidFill>
+        <a:effectLst/>
+      </p:bgPr>
+    </p:bg>
+    <p:spTree>
+      <p:nvGrpSpPr>
+        <p:cNvPr id="1" name=""/>
+        <p:cNvGrpSpPr/>
+        <p:nvPr/>
+      </p:nvGrpSpPr>
+      <p:grpSpPr/>
+      <p:sp>
+        <p:nvSpPr>
+          <p:cNvPr id="2" name="Rectangle 1"/>
+          <p:cNvSpPr/>
+          <p:nvPr/>
+        </p:nvSpPr>
+        <p:spPr>
+          <a:xfrm>
+            <a:off x="0" y="0"/>
+            <a:ext cx="12191695" cy="1188720"/>
+          </a:xfrm>
+          <a:prstGeom prst="rect">
+            <a:avLst/>
+          </a:prstGeom>
+          <a:solidFill>
+            <a:srgbClr val="0C2340"/>
+          </a:solidFill>
+          <a:ln>
+            <a:noFill/>
+          </a:ln>
+          <a:effectLst/>
+        </p:spPr>
+        <p:style>
+          <a:lnRef idx="1">
+            <a:schemeClr val="accent1"/>
+          </a:lnRef>
+          <a:fillRef idx="3">
+            <a:schemeClr val="accent1"/>
+          </a:fillRef>
+          <a:effectRef idx="2">
+            <a:schemeClr val="accent1"/>
+          </a:effectRef>
+          <a:fontRef idx="minor">
+            <a:schemeClr val="lt1"/>
+          </a:fontRef>
+        </p:style>
+        <p:txBody>
+          <a:bodyPr rtlCol="0" anchor="ctr"/>
+          <a:lstStyle/>
+          <a:p>
+            <a:pPr algn="ctr"/>
+          </a:p>
+        </p:txBody>
+      </p:sp>
+      <p:sp>
+        <p:nvSpPr>
+          <p:cNvPr id="3" name="TextBox 2"/>
+          <p:cNvSpPr txBox="1"/>
+          <p:nvPr/>
+        </p:nvSpPr>
+        <p:spPr>
+          <a:xfrm>
+            <a:off x="640080" y="0"/>
+            <a:ext cx="9082735" cy="1188720"/>
+          </a:xfrm>
+          <a:prstGeom prst="rect">
+            <a:avLst/>
+          </a:prstGeom>
+          <a:noFill/>
+        </p:spPr>
+        <p:txBody>
+          <a:bodyPr wrap="square" anchor="ctr" lIns="0" rIns="0" tIns="0" bIns="0">
+            <a:spAutoFit/>
+          </a:bodyPr>
+          <a:lstStyle/>
+          <a:p>
+            <a:pPr algn="ctr"/>
+            <a:r>
+              <a:rPr sz="2600" b="1" i="0">
+                <a:solidFill>
+                  <a:srgbClr val="FFFFFF"/>
+                </a:solidFill>
+                <a:latin typeface="Calibri"/>
+              </a:rPr>
+              <a:t>Herramientas del curso: todas gratis, todas en el navegador</a:t>
+            </a:r>
+          </a:p>
+        </p:txBody>
+      </p:sp>
+      <p:graphicFrame>
+        <p:nvGraphicFramePr>
+          <p:cNvPr id="4" name="Table 3"/>
+          <p:cNvGraphicFramePr>
+            <a:graphicFrameLocks noGrp="1"/>
+          </p:cNvGraphicFramePr>
+          <p:nvPr/>
+        </p:nvGraphicFramePr>
+        <p:xfrm>
+          <a:off x="640080" y="1691639"/>
+          <a:ext cx="10911533" cy="4526280"/>
+        </p:xfrm>
+        <a:graphic>
+          <a:graphicData uri="http://schemas.openxmlformats.org/drawingml/2006/table">
+            <a:tbl>
+              <a:tblPr>
+                <a:tableStyleId>{2D5ABB26-0587-4C30-8999-92F81FD0307C}</a:tableStyleId>
+              </a:tblPr>
+              <a:tblGrid>
+                <a:gridCol w="2384032"/>
+                <a:gridCol w="5409920"/>
+                <a:gridCol w="3117581"/>
+              </a:tblGrid>
+              <a:tr h="502920">
+                <a:tc>
+                  <a:txBody>
+                    <a:bodyPr/>
+                    <a:lstStyle/>
+                    <a:p>
+                      <a:pPr algn="l"/>
+                      <a:r>
+                        <a:rPr sz="1300" b="1" i="0">
+                          <a:solidFill>
+                            <a:srgbClr val="FFFFFF"/>
+                          </a:solidFill>
+                          <a:latin typeface="Calibri"/>
+                        </a:rPr>
+                        <a:t>Herramienta</a:t>
+                      </a:r>
+                    </a:p>
+                  </a:txBody>
+                  <a:tcPr anchor="ctr" marL="109728" marR="91440" marT="36576" marB="36576">
+                    <a:solidFill>
+                      <a:srgbClr val="0C2340"/>
+                    </a:solidFill>
+                  </a:tcPr>
+                </a:tc>
+                <a:tc>
+                  <a:txBody>
+                    <a:bodyPr/>
+                    <a:lstStyle/>
+                    <a:p>
+                      <a:pPr algn="l"/>
+                      <a:r>
+                        <a:rPr sz="1300" b="1" i="0">
+                          <a:solidFill>
+                            <a:srgbClr val="FFFFFF"/>
+                          </a:solidFill>
+                          <a:latin typeface="Calibri"/>
+                        </a:rPr>
+                        <a:t>Para qué la usamos</a:t>
+                      </a:r>
+                    </a:p>
+                  </a:txBody>
+                  <a:tcPr anchor="ctr" marL="109728" marR="91440" marT="36576" marB="36576">
+                    <a:solidFill>
+                      <a:srgbClr val="0C2340"/>
+                    </a:solidFill>
+                  </a:tcPr>
+                </a:tc>
+                <a:tc>
+                  <a:txBody>
+                    <a:bodyPr/>
+                    <a:lstStyle/>
+                    <a:p>
+                      <a:pPr algn="l"/>
+                      <a:r>
+                        <a:rPr sz="1300" b="1" i="0">
+                          <a:solidFill>
+                            <a:srgbClr val="FFFFFF"/>
+                          </a:solidFill>
+                          <a:latin typeface="Calibri"/>
+                        </a:rPr>
+                        <a:t>Cuándo aparece</a:t>
+                      </a:r>
+                    </a:p>
+                  </a:txBody>
+                  <a:tcPr anchor="ctr" marL="109728" marR="91440" marT="36576" marB="36576">
+                    <a:solidFill>
+                      <a:srgbClr val="0C2340"/>
+                    </a:solidFill>
+                  </a:tcPr>
+                </a:tc>
+              </a:tr>
+              <a:tr h="502920">
+                <a:tc>
+                  <a:txBody>
+                    <a:bodyPr/>
+                    <a:lstStyle/>
+                    <a:p>
+                      <a:pPr algn="l"/>
+                      <a:r>
+                        <a:rPr sz="1100" b="1" i="0">
+                          <a:solidFill>
+                            <a:srgbClr val="2B2B2B"/>
+                          </a:solidFill>
+                          <a:latin typeface="Calibri"/>
+                        </a:rPr>
+                        <a:t>CDigital</a:t>
+                      </a:r>
+                    </a:p>
+                  </a:txBody>
+                  <a:tcPr anchor="ctr" marL="109728" marR="91440" marT="36576" marB="36576">
+                    <a:solidFill>
+                      <a:srgbClr val="FFFFFF"/>
+                    </a:solidFill>
+                  </a:tcPr>
+                </a:tc>
+                <a:tc>
+                  <a:txBody>
+                    <a:bodyPr/>
+                    <a:lstStyle/>
+                    <a:p>
+                      <a:pPr algn="l"/>
+                      <a:r>
+                        <a:rPr sz="1100" b="0" i="0">
+                          <a:solidFill>
+                            <a:srgbClr val="2B2B2B"/>
+                          </a:solidFill>
+                          <a:latin typeface="Calibri"/>
+                        </a:rPr>
+                        <a:t>Entrega oficial, materiales, avisos y notas</a:t>
+                      </a:r>
+                    </a:p>
+                  </a:txBody>
+                  <a:tcPr anchor="ctr" marL="109728" marR="91440" marT="36576" marB="36576">
+                    <a:solidFill>
+                      <a:srgbClr val="FFFFFF"/>
+                    </a:solidFill>
+                  </a:tcPr>
+                </a:tc>
+                <a:tc>
+                  <a:txBody>
+                    <a:bodyPr/>
+                    <a:lstStyle/>
+                    <a:p>
+                      <a:pPr algn="l"/>
+                      <a:r>
+                        <a:rPr sz="1100" b="0" i="0">
+                          <a:solidFill>
+                            <a:srgbClr val="2B2B2B"/>
+                          </a:solidFill>
+                          <a:latin typeface="Calibri"/>
+                        </a:rPr>
+                        <a:t>Siempre</a:t>
+                      </a:r>
+                    </a:p>
+                  </a:txBody>
+                  <a:tcPr anchor="ctr" marL="109728" marR="91440" marT="36576" marB="36576">
+                    <a:solidFill>
+                      <a:srgbClr val="FFFFFF"/>
+                    </a:solidFill>
+                  </a:tcPr>
+                </a:tc>
+              </a:tr>
+              <a:tr h="502920">
+                <a:tc>
+                  <a:txBody>
+                    <a:bodyPr/>
+                    <a:lstStyle/>
+                    <a:p>
+                      <a:pPr algn="l"/>
+                      <a:r>
+                        <a:rPr sz="1100" b="1" i="0">
+                          <a:solidFill>
+                            <a:srgbClr val="2B2B2B"/>
+                          </a:solidFill>
+                          <a:latin typeface="Calibri"/>
+                        </a:rPr>
+                        <a:t>Google Docs</a:t>
+                      </a:r>
+                    </a:p>
+                  </a:txBody>
+                  <a:tcPr anchor="ctr" marL="109728" marR="91440" marT="36576" marB="36576">
+                    <a:solidFill>
+                      <a:srgbClr val="F2F2F2"/>
+                    </a:solidFill>
+                  </a:tcPr>
+                </a:tc>
+                <a:tc>
+                  <a:txBody>
+                    <a:bodyPr/>
+                    <a:lstStyle/>
+                    <a:p>
+                      <a:pPr algn="l"/>
+                      <a:r>
+                        <a:rPr sz="1100" b="0" i="0">
+                          <a:solidFill>
+                            <a:srgbClr val="2B2B2B"/>
+                          </a:solidFill>
+                          <a:latin typeface="Calibri"/>
+                        </a:rPr>
+                        <a:t>Escribir el avance sobre la plantilla APA CUN, con historial de versiones</a:t>
+                      </a:r>
+                    </a:p>
+                  </a:txBody>
+                  <a:tcPr anchor="ctr" marL="109728" marR="91440" marT="36576" marB="36576">
+                    <a:solidFill>
+                      <a:srgbClr val="F2F2F2"/>
+                    </a:solidFill>
+                  </a:tcPr>
+                </a:tc>
+                <a:tc>
+                  <a:txBody>
+                    <a:bodyPr/>
+                    <a:lstStyle/>
+                    <a:p>
+                      <a:pPr algn="l"/>
+                      <a:r>
+                        <a:rPr sz="1100" b="0" i="0">
+                          <a:solidFill>
+                            <a:srgbClr val="2B2B2B"/>
+                          </a:solidFill>
+                          <a:latin typeface="Calibri"/>
+                        </a:rPr>
+                        <a:t>Todas las sesiones</a:t>
+                      </a:r>
+                    </a:p>
+                  </a:txBody>
+                  <a:tcPr anchor="ctr" marL="109728" marR="91440" marT="36576" marB="36576">
+                    <a:solidFill>
+                      <a:srgbClr val="F2F2F2"/>
+                    </a:solidFill>
+                  </a:tcPr>
+                </a:tc>
+              </a:tr>
+              <a:tr h="502920">
+                <a:tc>
+                  <a:txBody>
+                    <a:bodyPr/>
+                    <a:lstStyle/>
+                    <a:p>
+                      <a:pPr algn="l"/>
+                      <a:r>
+                        <a:rPr sz="1100" b="1" i="0">
+                          <a:solidFill>
+                            <a:srgbClr val="2B2B2B"/>
+                          </a:solidFill>
+                          <a:latin typeface="Calibri"/>
+                        </a:rPr>
+                        <a:t>Google Académico</a:t>
+                      </a:r>
+                    </a:p>
+                  </a:txBody>
+                  <a:tcPr anchor="ctr" marL="109728" marR="91440" marT="36576" marB="36576">
+                    <a:solidFill>
+                      <a:srgbClr val="FFFFFF"/>
+                    </a:solidFill>
+                  </a:tcPr>
+                </a:tc>
+                <a:tc>
+                  <a:txBody>
+                    <a:bodyPr/>
+                    <a:lstStyle/>
+                    <a:p>
+                      <a:pPr algn="l"/>
+                      <a:r>
+                        <a:rPr sz="1100" b="0" i="0">
+                          <a:solidFill>
+                            <a:srgbClr val="2B2B2B"/>
+                          </a:solidFill>
+                          <a:latin typeface="Calibri"/>
+                        </a:rPr>
+                        <a:t>Buscar antecedentes y referentes; ver quién cita a quién</a:t>
+                      </a:r>
+                    </a:p>
+                  </a:txBody>
+                  <a:tcPr anchor="ctr" marL="109728" marR="91440" marT="36576" marB="36576">
+                    <a:solidFill>
+                      <a:srgbClr val="FFFFFF"/>
+                    </a:solidFill>
+                  </a:tcPr>
+                </a:tc>
+                <a:tc>
+                  <a:txBody>
+                    <a:bodyPr/>
+                    <a:lstStyle/>
+                    <a:p>
+                      <a:pPr algn="l"/>
+                      <a:r>
+                        <a:rPr sz="1100" b="0" i="0">
+                          <a:solidFill>
+                            <a:srgbClr val="2B2B2B"/>
+                          </a:solidFill>
+                          <a:latin typeface="Calibri"/>
+                        </a:rPr>
+                        <a:t>Desde la sesión de antecedentes</a:t>
+                      </a:r>
+                    </a:p>
+                  </a:txBody>
+                  <a:tcPr anchor="ctr" marL="109728" marR="91440" marT="36576" marB="36576">
+                    <a:solidFill>
+                      <a:srgbClr val="FFFFFF"/>
+                    </a:solidFill>
+                  </a:tcPr>
+                </a:tc>
+              </a:tr>
+              <a:tr h="502920">
+                <a:tc>
+                  <a:txBody>
+                    <a:bodyPr/>
+                    <a:lstStyle/>
+                    <a:p>
+                      <a:pPr algn="l"/>
+                      <a:r>
+                        <a:rPr sz="1100" b="1" i="0">
+                          <a:solidFill>
+                            <a:srgbClr val="2B2B2B"/>
+                          </a:solidFill>
+                          <a:latin typeface="Calibri"/>
+                        </a:rPr>
+                        <a:t>SciELO y Redalyc</a:t>
+                      </a:r>
+                    </a:p>
+                  </a:txBody>
+                  <a:tcPr anchor="ctr" marL="109728" marR="91440" marT="36576" marB="36576">
+                    <a:solidFill>
+                      <a:srgbClr val="F2F2F2"/>
+                    </a:solidFill>
+                  </a:tcPr>
+                </a:tc>
+                <a:tc>
+                  <a:txBody>
+                    <a:bodyPr/>
+                    <a:lstStyle/>
+                    <a:p>
+                      <a:pPr algn="l"/>
+                      <a:r>
+                        <a:rPr sz="1100" b="0" i="0">
+                          <a:solidFill>
+                            <a:srgbClr val="2B2B2B"/>
+                          </a:solidFill>
+                          <a:latin typeface="Calibri"/>
+                        </a:rPr>
+                        <a:t>Fuentes abiertas iberoamericanas, útiles para el contexto local</a:t>
+                      </a:r>
+                    </a:p>
+                  </a:txBody>
+                  <a:tcPr anchor="ctr" marL="109728" marR="91440" marT="36576" marB="36576">
+                    <a:solidFill>
+                      <a:srgbClr val="F2F2F2"/>
+                    </a:solidFill>
+                  </a:tcPr>
+                </a:tc>
+                <a:tc>
+                  <a:txBody>
+                    <a:bodyPr/>
+                    <a:lstStyle/>
+                    <a:p>
+                      <a:pPr algn="l"/>
+                      <a:r>
+                        <a:rPr sz="1100" b="0" i="0">
+                          <a:solidFill>
+                            <a:srgbClr val="2B2B2B"/>
+                          </a:solidFill>
+                          <a:latin typeface="Calibri"/>
+                        </a:rPr>
+                        <a:t>Marco referencial</a:t>
+                      </a:r>
+                    </a:p>
+                  </a:txBody>
+                  <a:tcPr anchor="ctr" marL="109728" marR="91440" marT="36576" marB="36576">
+                    <a:solidFill>
+                      <a:srgbClr val="F2F2F2"/>
+                    </a:solidFill>
+                  </a:tcPr>
+                </a:tc>
+              </a:tr>
+              <a:tr h="502920">
+                <a:tc>
+                  <a:txBody>
+                    <a:bodyPr/>
+                    <a:lstStyle/>
+                    <a:p>
+                      <a:pPr algn="l"/>
+                      <a:r>
+                        <a:rPr sz="1100" b="1" i="0">
+                          <a:solidFill>
+                            <a:srgbClr val="2B2B2B"/>
+                          </a:solidFill>
+                          <a:latin typeface="Calibri"/>
+                        </a:rPr>
+                        <a:t>Biblioteca CUN (web)</a:t>
+                      </a:r>
+                    </a:p>
+                  </a:txBody>
+                  <a:tcPr anchor="ctr" marL="109728" marR="91440" marT="36576" marB="36576">
+                    <a:solidFill>
+                      <a:srgbClr val="FFFFFF"/>
+                    </a:solidFill>
+                  </a:tcPr>
+                </a:tc>
+                <a:tc>
+                  <a:txBody>
+                    <a:bodyPr/>
+                    <a:lstStyle/>
+                    <a:p>
+                      <a:pPr algn="l"/>
+                      <a:r>
+                        <a:rPr sz="1100" b="0" i="0">
+                          <a:solidFill>
+                            <a:srgbClr val="2B2B2B"/>
+                          </a:solidFill>
+                          <a:latin typeface="Calibri"/>
+                        </a:rPr>
+                        <a:t>Texto completo de bases suscritas, con login institucional</a:t>
+                      </a:r>
+                    </a:p>
+                  </a:txBody>
+                  <a:tcPr anchor="ctr" marL="109728" marR="91440" marT="36576" marB="36576">
+                    <a:solidFill>
+                      <a:srgbClr val="FFFFFF"/>
+                    </a:solidFill>
+                  </a:tcPr>
+                </a:tc>
+                <a:tc>
+                  <a:txBody>
+                    <a:bodyPr/>
+                    <a:lstStyle/>
+                    <a:p>
+                      <a:pPr algn="l"/>
+                      <a:r>
+                        <a:rPr sz="1100" b="0" i="0">
+                          <a:solidFill>
+                            <a:srgbClr val="2B2B2B"/>
+                          </a:solidFill>
+                          <a:latin typeface="Calibri"/>
+                        </a:rPr>
+                        <a:t>Cuando el PDF no es abierto</a:t>
+                      </a:r>
+                    </a:p>
+                  </a:txBody>
+                  <a:tcPr anchor="ctr" marL="109728" marR="91440" marT="36576" marB="36576">
+                    <a:solidFill>
+                      <a:srgbClr val="FFFFFF"/>
+                    </a:solidFill>
+                  </a:tcPr>
+                </a:tc>
+              </a:tr>
+              <a:tr h="502920">
+                <a:tc>
+                  <a:txBody>
+                    <a:bodyPr/>
+                    <a:lstStyle/>
+                    <a:p>
+                      <a:pPr algn="l"/>
+                      <a:r>
+                        <a:rPr sz="1100" b="1" i="0">
+                          <a:solidFill>
+                            <a:srgbClr val="2B2B2B"/>
+                          </a:solidFill>
+                          <a:latin typeface="Calibri"/>
+                        </a:rPr>
+                        <a:t>ZoteroBib (zbib.org)</a:t>
+                      </a:r>
+                    </a:p>
+                  </a:txBody>
+                  <a:tcPr anchor="ctr" marL="109728" marR="91440" marT="36576" marB="36576">
+                    <a:solidFill>
+                      <a:srgbClr val="F2F2F2"/>
+                    </a:solidFill>
+                  </a:tcPr>
+                </a:tc>
+                <a:tc>
+                  <a:txBody>
+                    <a:bodyPr/>
+                    <a:lstStyle/>
+                    <a:p>
+                      <a:pPr algn="l"/>
+                      <a:r>
+                        <a:rPr sz="1100" b="0" i="0">
+                          <a:solidFill>
+                            <a:srgbClr val="2B2B2B"/>
+                          </a:solidFill>
+                          <a:latin typeface="Calibri"/>
+                        </a:rPr>
+                        <a:t>Generar referencias en APA 7 sin instalar ni registrarse</a:t>
+                      </a:r>
+                    </a:p>
+                  </a:txBody>
+                  <a:tcPr anchor="ctr" marL="109728" marR="91440" marT="36576" marB="36576">
+                    <a:solidFill>
+                      <a:srgbClr val="F2F2F2"/>
+                    </a:solidFill>
+                  </a:tcPr>
+                </a:tc>
+                <a:tc>
+                  <a:txBody>
+                    <a:bodyPr/>
+                    <a:lstStyle/>
+                    <a:p>
+                      <a:pPr algn="l"/>
+                      <a:r>
+                        <a:rPr sz="1100" b="0" i="0">
+                          <a:solidFill>
+                            <a:srgbClr val="2B2B2B"/>
+                          </a:solidFill>
+                          <a:latin typeface="Calibri"/>
+                        </a:rPr>
+                        <a:t>Cada vez que cite</a:t>
+                      </a:r>
+                    </a:p>
+                  </a:txBody>
+                  <a:tcPr anchor="ctr" marL="109728" marR="91440" marT="36576" marB="36576">
+                    <a:solidFill>
+                      <a:srgbClr val="F2F2F2"/>
+                    </a:solidFill>
+                  </a:tcPr>
+                </a:tc>
+              </a:tr>
+              <a:tr h="502920">
+                <a:tc>
+                  <a:txBody>
+                    <a:bodyPr/>
+                    <a:lstStyle/>
+                    <a:p>
+                      <a:pPr algn="l"/>
+                      <a:r>
+                        <a:rPr sz="1100" b="1" i="0">
+                          <a:solidFill>
+                            <a:srgbClr val="2B2B2B"/>
+                          </a:solidFill>
+                          <a:latin typeface="Calibri"/>
+                        </a:rPr>
+                        <a:t>Excalidraw</a:t>
+                      </a:r>
+                    </a:p>
+                  </a:txBody>
+                  <a:tcPr anchor="ctr" marL="109728" marR="91440" marT="36576" marB="36576">
+                    <a:solidFill>
+                      <a:srgbClr val="FFFFFF"/>
+                    </a:solidFill>
+                  </a:tcPr>
+                </a:tc>
+                <a:tc>
+                  <a:txBody>
+                    <a:bodyPr/>
+                    <a:lstStyle/>
+                    <a:p>
+                      <a:pPr algn="l"/>
+                      <a:r>
+                        <a:rPr sz="1100" b="0" i="0">
+                          <a:solidFill>
+                            <a:srgbClr val="2B2B2B"/>
+                          </a:solidFill>
+                          <a:latin typeface="Calibri"/>
+                        </a:rPr>
+                        <a:t>Diagramar el problema o el diseño metodológico</a:t>
+                      </a:r>
+                    </a:p>
+                  </a:txBody>
+                  <a:tcPr anchor="ctr" marL="109728" marR="91440" marT="36576" marB="36576">
+                    <a:solidFill>
+                      <a:srgbClr val="FFFFFF"/>
+                    </a:solidFill>
+                  </a:tcPr>
+                </a:tc>
+                <a:tc>
+                  <a:txBody>
+                    <a:bodyPr/>
+                    <a:lstStyle/>
+                    <a:p>
+                      <a:pPr algn="l"/>
+                      <a:r>
+                        <a:rPr sz="1100" b="0" i="0">
+                          <a:solidFill>
+                            <a:srgbClr val="2B2B2B"/>
+                          </a:solidFill>
+                          <a:latin typeface="Calibri"/>
+                        </a:rPr>
+                        <a:t>Sesiones de problema y método</a:t>
+                      </a:r>
+                    </a:p>
+                  </a:txBody>
+                  <a:tcPr anchor="ctr" marL="109728" marR="91440" marT="36576" marB="36576">
+                    <a:solidFill>
+                      <a:srgbClr val="FFFFFF"/>
+                    </a:solidFill>
+                  </a:tcPr>
+                </a:tc>
+              </a:tr>
+              <a:tr h="502920">
+                <a:tc>
+                  <a:txBody>
+                    <a:bodyPr/>
+                    <a:lstStyle/>
+                    <a:p>
+                      <a:pPr algn="l"/>
+                      <a:r>
+                        <a:rPr sz="1100" b="1" i="0">
+                          <a:solidFill>
+                            <a:srgbClr val="2B2B2B"/>
+                          </a:solidFill>
+                          <a:latin typeface="Calibri"/>
+                        </a:rPr>
+                        <a:t>Padlet</a:t>
+                      </a:r>
+                    </a:p>
+                  </a:txBody>
+                  <a:tcPr anchor="ctr" marL="109728" marR="91440" marT="36576" marB="36576">
+                    <a:solidFill>
+                      <a:srgbClr val="F2F2F2"/>
+                    </a:solidFill>
+                  </a:tcPr>
+                </a:tc>
+                <a:tc>
+                  <a:txBody>
+                    <a:bodyPr/>
+                    <a:lstStyle/>
+                    <a:p>
+                      <a:pPr algn="l"/>
+                      <a:r>
+                        <a:rPr sz="1100" b="0" i="0">
+                          <a:solidFill>
+                            <a:srgbClr val="2B2B2B"/>
+                          </a:solidFill>
+                          <a:latin typeface="Calibri"/>
+                        </a:rPr>
+                        <a:t>Tablero donde nos presentamos como grupo</a:t>
+                      </a:r>
+                    </a:p>
+                  </a:txBody>
+                  <a:tcPr anchor="ctr" marL="109728" marR="91440" marT="36576" marB="36576">
+                    <a:solidFill>
+                      <a:srgbClr val="F2F2F2"/>
+                    </a:solidFill>
+                  </a:tcPr>
+                </a:tc>
+                <a:tc>
+                  <a:txBody>
+                    <a:bodyPr/>
+                    <a:lstStyle/>
+                    <a:p>
+                      <a:pPr algn="l"/>
+                      <a:r>
+                        <a:rPr sz="1100" b="0" i="0">
+                          <a:solidFill>
+                            <a:srgbClr val="2B2B2B"/>
+                          </a:solidFill>
+                          <a:latin typeface="Calibri"/>
+                        </a:rPr>
+                        <a:t>Hoy</a:t>
+                      </a:r>
+                    </a:p>
+                  </a:txBody>
+                  <a:tcPr anchor="ctr" marL="109728" marR="91440" marT="36576" marB="36576">
+                    <a:solidFill>
+                      <a:srgbClr val="F2F2F2"/>
+                    </a:solidFill>
+                  </a:tcPr>
+                </a:tc>
+              </a:tr>
+            </a:tbl>
+          </a:graphicData>
+        </a:graphic>
+      </p:graphicFrame>
+      <p:sp>
+        <p:nvSpPr>
+          <p:cNvPr id="5" name="TextBox 4"/>
+          <p:cNvSpPr txBox="1"/>
+          <p:nvPr/>
+        </p:nvSpPr>
+        <p:spPr>
+          <a:xfrm>
+            <a:off x="640080" y="6080760"/>
+            <a:ext cx="10911535" cy="548640"/>
+          </a:xfrm>
+          <a:prstGeom prst="rect">
+            <a:avLst/>
+          </a:prstGeom>
+          <a:noFill/>
+        </p:spPr>
+        <p:txBody>
+          <a:bodyPr wrap="square" anchor="t" lIns="0" rIns="0" tIns="0" bIns="0">
+            <a:spAutoFit/>
+          </a:bodyPr>
+          <a:lstStyle/>
+          <a:p>
+            <a:r>
+              <a:rPr sz="1200" b="0" i="1">
+                <a:solidFill>
+                  <a:srgbClr val="2B2B2B"/>
+                </a:solidFill>
+                <a:latin typeface="Calibri"/>
+              </a:rPr>
+              <a:t>No se exige instalar nada: ni Office de escritorio, ni Mendeley, ni Zotero de escritorio. Un navegador y su cuenta institucional bastan.</a:t>
+            </a:r>
+          </a:p>
+        </p:txBody>
+      </p:sp>
+      <p:sp>
+        <p:nvSpPr>
+          <p:cNvPr id="6" name="TextBox 5"/>
+          <p:cNvSpPr txBox="1"/>
+          <p:nvPr/>
+        </p:nvSpPr>
+        <p:spPr>
+          <a:xfrm>
+            <a:off x="2194560" y="6446520"/>
+            <a:ext cx="5943600" cy="274320"/>
+          </a:xfrm>
+          <a:prstGeom prst="rect">
+            <a:avLst/>
+          </a:prstGeom>
+          <a:noFill/>
+        </p:spPr>
+        <p:txBody>
+          <a:bodyPr wrap="square" anchor="t" lIns="0" rIns="0" tIns="0" bIns="0">
+            <a:spAutoFit/>
+          </a:bodyPr>
+          <a:lstStyle/>
+          <a:p>
+            <a:pPr algn="l"/>
+            <a:r>
+              <a:rPr sz="1000" b="1" i="0">
+                <a:solidFill>
+                  <a:srgbClr val="8F989D"/>
+                </a:solidFill>
+                <a:latin typeface="Calibri"/>
+              </a:rPr>
+              <a:t>Inicio 5:10 pm</a:t>
+            </a:r>
+          </a:p>
+        </p:txBody>
+      </p:sp>
+      <p:sp>
+        <p:nvSpPr>
+          <p:cNvPr id="7" name="TextBox 6"/>
+          <p:cNvSpPr txBox="1"/>
+          <p:nvPr/>
+        </p:nvSpPr>
+        <p:spPr>
+          <a:xfrm>
+            <a:off x="11094415" y="6446520"/>
+            <a:ext cx="548640" cy="274320"/>
+          </a:xfrm>
+          <a:prstGeom prst="rect">
+            <a:avLst/>
+          </a:prstGeom>
+          <a:noFill/>
+        </p:spPr>
+        <p:txBody>
+          <a:bodyPr wrap="square" anchor="t" lIns="0" rIns="0" tIns="0" bIns="0">
+            <a:spAutoFit/>
+          </a:bodyPr>
+          <a:lstStyle/>
+          <a:p>
+            <a:pPr algn="r"/>
+            <a:r>
+              <a:rPr sz="1000" b="1" i="0">
+                <a:solidFill>
+                  <a:srgbClr val="8F989D"/>
+                </a:solidFill>
+                <a:latin typeface="Calibri"/>
+              </a:rPr>
+              <a:t>16</a:t>
+            </a:r>
+          </a:p>
+        </p:txBody>
+      </p:sp>
+    </p:spTree>
+  </p:cSld>
+  <p:clrMapOvr>
+    <a:masterClrMapping/>
+  </p:clrMapOvr>
+</p:sld>
+</file>
+
+<file path=ppt/slides/slide17.xml><?xml version="1.0" encoding="utf-8"?>
+<p:sld xmlns:a="http://schemas.openxmlformats.org/drawingml/2006/main" xmlns:p="http://schemas.openxmlformats.org/presentationml/2006/main" xmlns:r="http://schemas.openxmlformats.org/officeDocument/2006/relationships">
+  <p:cSld>
+    <p:bg>
+      <p:bgPr>
+        <a:solidFill>
+          <a:srgbClr val="FFFFFF"/>
+        </a:solidFill>
+        <a:effectLst/>
+      </p:bgPr>
+    </p:bg>
+    <p:spTree>
+      <p:nvGrpSpPr>
+        <p:cNvPr id="1" name=""/>
+        <p:cNvGrpSpPr/>
+        <p:nvPr/>
+      </p:nvGrpSpPr>
+      <p:grpSpPr/>
+      <p:sp>
+        <p:nvSpPr>
+          <p:cNvPr id="2" name="Rectangle 1"/>
+          <p:cNvSpPr/>
+          <p:nvPr/>
+        </p:nvSpPr>
+        <p:spPr>
+          <a:xfrm>
+            <a:off x="0" y="0"/>
+            <a:ext cx="12191695" cy="1188720"/>
+          </a:xfrm>
+          <a:prstGeom prst="rect">
+            <a:avLst/>
+          </a:prstGeom>
+          <a:solidFill>
+            <a:srgbClr val="0C2340"/>
+          </a:solidFill>
+          <a:ln>
+            <a:noFill/>
+          </a:ln>
+          <a:effectLst/>
+        </p:spPr>
+        <p:style>
+          <a:lnRef idx="1">
+            <a:schemeClr val="accent1"/>
+          </a:lnRef>
+          <a:fillRef idx="3">
+            <a:schemeClr val="accent1"/>
+          </a:fillRef>
+          <a:effectRef idx="2">
+            <a:schemeClr val="accent1"/>
+          </a:effectRef>
+          <a:fontRef idx="minor">
+            <a:schemeClr val="lt1"/>
+          </a:fontRef>
+        </p:style>
+        <p:txBody>
+          <a:bodyPr rtlCol="0" anchor="ctr"/>
+          <a:lstStyle/>
+          <a:p>
+            <a:pPr algn="ctr"/>
+          </a:p>
+        </p:txBody>
+      </p:sp>
+      <p:sp>
+        <p:nvSpPr>
+          <p:cNvPr id="3" name="TextBox 2"/>
+          <p:cNvSpPr txBox="1"/>
+          <p:nvPr/>
+        </p:nvSpPr>
+        <p:spPr>
+          <a:xfrm>
+            <a:off x="640080" y="0"/>
+            <a:ext cx="9082735" cy="1188720"/>
+          </a:xfrm>
+          <a:prstGeom prst="rect">
+            <a:avLst/>
+          </a:prstGeom>
+          <a:noFill/>
+        </p:spPr>
+        <p:txBody>
+          <a:bodyPr wrap="square" anchor="ctr" lIns="0" rIns="0" tIns="0" bIns="0">
+            <a:spAutoFit/>
+          </a:bodyPr>
+          <a:lstStyle/>
+          <a:p>
+            <a:pPr algn="ctr"/>
+            <a:r>
+              <a:rPr sz="2600" b="1" i="0">
+                <a:solidFill>
+                  <a:srgbClr val="FFFFFF"/>
+                </a:solidFill>
+                <a:latin typeface="Calibri"/>
+              </a:rPr>
+              <a:t>Cómo pedir ayuda (y cómo pedirla bien)</a:t>
+            </a:r>
+          </a:p>
+        </p:txBody>
+      </p:sp>
+      <p:sp>
+        <p:nvSpPr>
+          <p:cNvPr id="4" name="TextBox 3"/>
+          <p:cNvSpPr txBox="1"/>
+          <p:nvPr/>
+        </p:nvSpPr>
+        <p:spPr>
+          <a:xfrm>
+            <a:off x="640080" y="1691639"/>
+            <a:ext cx="10911535" cy="4617720"/>
+          </a:xfrm>
+          <a:prstGeom prst="rect">
+            <a:avLst/>
+          </a:prstGeom>
+          <a:noFill/>
+        </p:spPr>
+        <p:txBody>
+          <a:bodyPr wrap="square" anchor="t" lIns="0" rIns="0" tIns="0" bIns="0">
+            <a:spAutoFit/>
+          </a:bodyPr>
+          <a:lstStyle/>
+          <a:p>
+            <a:pPr>
+              <a:spcAft>
+                <a:spcPts val="1000"/>
+              </a:spcAft>
+            </a:pPr>
+            <a:r>
+              <a:rPr sz="1600" b="0" i="0">
+                <a:solidFill>
+                  <a:srgbClr val="2B2B2B"/>
+                </a:solidFill>
+                <a:latin typeface="Calibri"/>
+              </a:rPr>
+              <a:t>–   </a:t>
+            </a:r>
+            <a:r>
+              <a:rPr sz="1600" b="1" i="0">
+                <a:solidFill>
+                  <a:srgbClr val="2B2B2B"/>
+                </a:solidFill>
+                <a:latin typeface="Calibri"/>
+              </a:rPr>
+              <a:t>Canal oficial:</a:t>
+            </a:r>
+            <a:r>
+              <a:rPr sz="1600" b="0" i="0">
+                <a:solidFill>
+                  <a:srgbClr val="2B2B2B"/>
+                </a:solidFill>
+                <a:latin typeface="Calibri"/>
+              </a:rPr>
+              <a:t> el espacio de mensajes o foro del curso en </a:t>
+            </a:r>
+            <a:r>
+              <a:rPr sz="1600" b="1" i="0">
+                <a:solidFill>
+                  <a:srgbClr val="2B2B2B"/>
+                </a:solidFill>
+                <a:latin typeface="Calibri"/>
+              </a:rPr>
+              <a:t>CDigital</a:t>
+            </a:r>
+            <a:r>
+              <a:rPr sz="1600" b="0" i="0">
+                <a:solidFill>
+                  <a:srgbClr val="2B2B2B"/>
+                </a:solidFill>
+                <a:latin typeface="Calibri"/>
+              </a:rPr>
+              <a:t>. Ahí queda registro de lo que se preguntó y se respondió.</a:t>
+            </a:r>
+          </a:p>
+          <a:p>
+            <a:pPr>
+              <a:spcAft>
+                <a:spcPts val="1000"/>
+              </a:spcAft>
+            </a:pPr>
+            <a:r>
+              <a:rPr sz="1600" b="0" i="0">
+                <a:solidFill>
+                  <a:srgbClr val="2B2B2B"/>
+                </a:solidFill>
+                <a:latin typeface="Calibri"/>
+              </a:rPr>
+              <a:t>–   </a:t>
+            </a:r>
+            <a:r>
+              <a:rPr sz="1600" b="1" i="0">
+                <a:solidFill>
+                  <a:srgbClr val="2B2B2B"/>
+                </a:solidFill>
+                <a:latin typeface="Calibri"/>
+              </a:rPr>
+              <a:t>Correo del Docente</a:t>
+            </a:r>
+            <a:r>
+              <a:rPr sz="1600" b="0" i="0">
+                <a:solidFill>
+                  <a:srgbClr val="2B2B2B"/>
+                </a:solidFill>
+                <a:latin typeface="Calibri"/>
+              </a:rPr>
+              <a:t> (el de la slide *Docente*): novedades personales — incapacidad, cruce de horario, fuerza mayor.</a:t>
+            </a:r>
+          </a:p>
+          <a:p>
+            <a:pPr>
+              <a:spcAft>
+                <a:spcPts val="1000"/>
+              </a:spcAft>
+            </a:pPr>
+            <a:r>
+              <a:rPr sz="1600" b="0" i="0">
+                <a:solidFill>
+                  <a:srgbClr val="2B2B2B"/>
+                </a:solidFill>
+                <a:latin typeface="Calibri"/>
+              </a:rPr>
+              <a:t>–   </a:t>
+            </a:r>
+            <a:r>
+              <a:rPr sz="1600" b="1" i="0">
+                <a:solidFill>
+                  <a:srgbClr val="2B2B2B"/>
+                </a:solidFill>
+                <a:latin typeface="Calibri"/>
+              </a:rPr>
+              <a:t>Tiempo de respuesta:</a:t>
+            </a:r>
+            <a:r>
+              <a:rPr sz="1600" b="0" i="0">
+                <a:solidFill>
+                  <a:srgbClr val="2B2B2B"/>
+                </a:solidFill>
+                <a:latin typeface="Calibri"/>
+              </a:rPr>
+              <a:t> en días hábiles y, en todo caso, </a:t>
+            </a:r>
+            <a:r>
+              <a:rPr sz="1600" b="1" i="0">
+                <a:solidFill>
+                  <a:srgbClr val="2B2B2B"/>
+                </a:solidFill>
+                <a:latin typeface="Calibri"/>
+              </a:rPr>
+              <a:t>antes del siguiente encuentro</a:t>
+            </a:r>
+            <a:r>
+              <a:rPr sz="1600" b="0" i="0">
+                <a:solidFill>
+                  <a:srgbClr val="2B2B2B"/>
+                </a:solidFill>
+                <a:latin typeface="Calibri"/>
+              </a:rPr>
+              <a:t>.</a:t>
+            </a:r>
+          </a:p>
+          <a:p>
+            <a:pPr>
+              <a:spcAft>
+                <a:spcPts val="1000"/>
+              </a:spcAft>
+            </a:pPr>
+            <a:r>
+              <a:rPr sz="1600" b="0" i="0">
+                <a:solidFill>
+                  <a:srgbClr val="2B2B2B"/>
+                </a:solidFill>
+                <a:latin typeface="Calibri"/>
+              </a:rPr>
+              <a:t>–   </a:t>
+            </a:r>
+            <a:r>
+              <a:rPr sz="1600" b="1" i="0">
+                <a:solidFill>
+                  <a:srgbClr val="2B2B2B"/>
+                </a:solidFill>
+                <a:latin typeface="Calibri"/>
+              </a:rPr>
+              <a:t>En el encuentro:</a:t>
+            </a:r>
+            <a:r>
+              <a:rPr sz="1600" b="0" i="0">
+                <a:solidFill>
+                  <a:srgbClr val="2B2B2B"/>
+                </a:solidFill>
+                <a:latin typeface="Calibri"/>
+              </a:rPr>
+              <a:t> el taller es el momento de revisión uno a uno. Llegue con el párrafo abierto y señalado.</a:t>
+            </a:r>
+          </a:p>
+          <a:p>
+            <a:pPr>
+              <a:spcAft>
+                <a:spcPts val="1000"/>
+              </a:spcAft>
+            </a:pPr>
+            <a:r>
+              <a:rPr sz="1600" b="0" i="0">
+                <a:solidFill>
+                  <a:srgbClr val="2B2B2B"/>
+                </a:solidFill>
+                <a:latin typeface="Calibri"/>
+              </a:rPr>
+              <a:t>–   </a:t>
+            </a:r>
+            <a:r>
+              <a:rPr sz="1600" b="1" i="0">
+                <a:solidFill>
+                  <a:srgbClr val="2B2B2B"/>
+                </a:solidFill>
+                <a:latin typeface="Calibri"/>
+              </a:rPr>
+              <a:t>Una buena pregunta trae el texto:</a:t>
+            </a:r>
+          </a:p>
+          <a:p>
+            <a:pPr lvl="1">
+              <a:spcAft>
+                <a:spcPts val="600"/>
+              </a:spcAft>
+            </a:pPr>
+            <a:r>
+              <a:rPr sz="1500" b="0" i="0">
+                <a:solidFill>
+                  <a:srgbClr val="2B2B2B"/>
+                </a:solidFill>
+                <a:latin typeface="Calibri"/>
+              </a:rPr>
+              <a:t>●   Mal: “profe, ¿cómo hago el marco teórico?”.</a:t>
+            </a:r>
+          </a:p>
+          <a:p>
+            <a:pPr lvl="1">
+              <a:spcAft>
+                <a:spcPts val="600"/>
+              </a:spcAft>
+            </a:pPr>
+            <a:r>
+              <a:rPr sz="1500" b="0" i="0">
+                <a:solidFill>
+                  <a:srgbClr val="2B2B2B"/>
+                </a:solidFill>
+                <a:latin typeface="Calibri"/>
+              </a:rPr>
+              <a:t>●   Bien: “tengo estos tres conceptos y estas cuatro fuentes: ¿sobra alguno o falta uno?”.</a:t>
+            </a:r>
+          </a:p>
+          <a:p>
+            <a:pPr>
+              <a:spcAft>
+                <a:spcPts val="1000"/>
+              </a:spcAft>
+            </a:pPr>
+            <a:r>
+              <a:rPr sz="1600" b="0" i="0">
+                <a:solidFill>
+                  <a:srgbClr val="2B2B2B"/>
+                </a:solidFill>
+                <a:latin typeface="Calibri"/>
+              </a:rPr>
+              <a:t>–   Si va a faltar, avise </a:t>
+            </a:r>
+            <a:r>
+              <a:rPr sz="1600" b="1" i="0">
+                <a:solidFill>
+                  <a:srgbClr val="2B2B2B"/>
+                </a:solidFill>
+                <a:latin typeface="Calibri"/>
+              </a:rPr>
+              <a:t>antes</a:t>
+            </a:r>
+            <a:r>
+              <a:rPr sz="1600" b="0" i="0">
+                <a:solidFill>
+                  <a:srgbClr val="2B2B2B"/>
+                </a:solidFill>
+                <a:latin typeface="Calibri"/>
+              </a:rPr>
+              <a:t> y revise CDigital ese mismo día: en TG2 una semana perdida se nota en el avance.</a:t>
+            </a:r>
+          </a:p>
+        </p:txBody>
+      </p:sp>
+      <p:sp>
+        <p:nvSpPr>
+          <p:cNvPr id="5" name="TextBox 4"/>
+          <p:cNvSpPr txBox="1"/>
+          <p:nvPr/>
+        </p:nvSpPr>
+        <p:spPr>
+          <a:xfrm>
+            <a:off x="2194560" y="6446520"/>
+            <a:ext cx="5943600" cy="274320"/>
+          </a:xfrm>
+          <a:prstGeom prst="rect">
+            <a:avLst/>
+          </a:prstGeom>
+          <a:noFill/>
+        </p:spPr>
+        <p:txBody>
+          <a:bodyPr wrap="square" anchor="t" lIns="0" rIns="0" tIns="0" bIns="0">
+            <a:spAutoFit/>
+          </a:bodyPr>
+          <a:lstStyle/>
+          <a:p>
+            <a:pPr algn="l"/>
+            <a:r>
+              <a:rPr sz="1000" b="1" i="0">
+                <a:solidFill>
+                  <a:srgbClr val="8F989D"/>
+                </a:solidFill>
+                <a:latin typeface="Calibri"/>
+              </a:rPr>
+              <a:t>Inicio 5:10 pm</a:t>
+            </a:r>
+          </a:p>
+        </p:txBody>
+      </p:sp>
+      <p:sp>
+        <p:nvSpPr>
+          <p:cNvPr id="6" name="TextBox 5"/>
+          <p:cNvSpPr txBox="1"/>
+          <p:nvPr/>
+        </p:nvSpPr>
+        <p:spPr>
+          <a:xfrm>
+            <a:off x="11094415" y="6446520"/>
+            <a:ext cx="548640" cy="274320"/>
+          </a:xfrm>
+          <a:prstGeom prst="rect">
+            <a:avLst/>
+          </a:prstGeom>
+          <a:noFill/>
+        </p:spPr>
+        <p:txBody>
+          <a:bodyPr wrap="square" anchor="t" lIns="0" rIns="0" tIns="0" bIns="0">
+            <a:spAutoFit/>
+          </a:bodyPr>
+          <a:lstStyle/>
+          <a:p>
+            <a:pPr algn="r"/>
+            <a:r>
+              <a:rPr sz="1000" b="1" i="0">
+                <a:solidFill>
+                  <a:srgbClr val="8F989D"/>
+                </a:solidFill>
+                <a:latin typeface="Calibri"/>
+              </a:rPr>
+              <a:t>17</a:t>
+            </a:r>
+          </a:p>
+        </p:txBody>
+      </p:sp>
+    </p:spTree>
+  </p:cSld>
+  <p:clrMapOvr>
+    <a:masterClrMapping/>
+  </p:clrMapOvr>
+</p:sld>
+</file>
+
+<file path=ppt/slides/slide18.xml><?xml version="1.0" encoding="utf-8"?>
+<p:sld xmlns:a="http://schemas.openxmlformats.org/drawingml/2006/main" xmlns:p="http://schemas.openxmlformats.org/presentationml/2006/main" xmlns:r="http://schemas.openxmlformats.org/officeDocument/2006/relationships">
+  <p:cSld>
+    <p:bg>
+      <p:bgPr>
+        <a:solidFill>
+          <a:srgbClr val="FFFFFF"/>
+        </a:solidFill>
+        <a:effectLst/>
+      </p:bgPr>
+    </p:bg>
+    <p:spTree>
+      <p:nvGrpSpPr>
+        <p:cNvPr id="1" name=""/>
+        <p:cNvGrpSpPr/>
+        <p:nvPr/>
+      </p:nvGrpSpPr>
+      <p:grpSpPr/>
+      <p:sp>
+        <p:nvSpPr>
+          <p:cNvPr id="2" name="Rectangle 1"/>
+          <p:cNvSpPr/>
+          <p:nvPr/>
+        </p:nvSpPr>
+        <p:spPr>
+          <a:xfrm>
+            <a:off x="0" y="0"/>
+            <a:ext cx="12191695" cy="1188720"/>
+          </a:xfrm>
+          <a:prstGeom prst="rect">
+            <a:avLst/>
+          </a:prstGeom>
+          <a:solidFill>
+            <a:srgbClr val="0C2340"/>
+          </a:solidFill>
+          <a:ln>
+            <a:noFill/>
+          </a:ln>
+          <a:effectLst/>
+        </p:spPr>
+        <p:style>
+          <a:lnRef idx="1">
+            <a:schemeClr val="accent1"/>
+          </a:lnRef>
+          <a:fillRef idx="3">
+            <a:schemeClr val="accent1"/>
+          </a:fillRef>
+          <a:effectRef idx="2">
+            <a:schemeClr val="accent1"/>
+          </a:effectRef>
+          <a:fontRef idx="minor">
+            <a:schemeClr val="lt1"/>
+          </a:fontRef>
+        </p:style>
+        <p:txBody>
+          <a:bodyPr rtlCol="0" anchor="ctr"/>
+          <a:lstStyle/>
+          <a:p>
+            <a:pPr algn="ctr"/>
+          </a:p>
+        </p:txBody>
+      </p:sp>
+      <p:sp>
+        <p:nvSpPr>
+          <p:cNvPr id="3" name="TextBox 2"/>
+          <p:cNvSpPr txBox="1"/>
+          <p:nvPr/>
+        </p:nvSpPr>
+        <p:spPr>
+          <a:xfrm>
+            <a:off x="640080" y="0"/>
+            <a:ext cx="9082735" cy="1188720"/>
+          </a:xfrm>
+          <a:prstGeom prst="rect">
+            <a:avLst/>
+          </a:prstGeom>
+          <a:noFill/>
+        </p:spPr>
+        <p:txBody>
+          <a:bodyPr wrap="square" anchor="ctr" lIns="0" rIns="0" tIns="0" bIns="0">
+            <a:spAutoFit/>
+          </a:bodyPr>
+          <a:lstStyle/>
+          <a:p>
+            <a:pPr algn="ctr"/>
+            <a:r>
+              <a:rPr sz="2600" b="1" i="0">
+                <a:solidFill>
+                  <a:srgbClr val="FFFFFF"/>
+                </a:solidFill>
+                <a:latin typeface="Calibri"/>
+              </a:rPr>
+              <a:t>Acuerdos de convivencia del encuentro virtual</a:t>
+            </a:r>
+          </a:p>
+        </p:txBody>
+      </p:sp>
+      <p:sp>
+        <p:nvSpPr>
+          <p:cNvPr id="4" name="Rounded Rectangle 3"/>
+          <p:cNvSpPr/>
+          <p:nvPr/>
+        </p:nvSpPr>
+        <p:spPr>
+          <a:xfrm>
+            <a:off x="640080" y="1737360"/>
+            <a:ext cx="10911535" cy="1225296"/>
+          </a:xfrm>
+          <a:prstGeom prst="roundRect">
+            <a:avLst/>
+          </a:prstGeom>
+          <a:solidFill>
+            <a:srgbClr val="E8F5EC"/>
+          </a:solidFill>
+          <a:ln>
+            <a:noFill/>
+          </a:ln>
+          <a:effectLst/>
+        </p:spPr>
+        <p:style>
+          <a:lnRef idx="1">
+            <a:schemeClr val="accent1"/>
+          </a:lnRef>
+          <a:fillRef idx="3">
+            <a:schemeClr val="accent1"/>
+          </a:fillRef>
+          <a:effectRef idx="2">
+            <a:schemeClr val="accent1"/>
+          </a:effectRef>
+          <a:fontRef idx="minor">
+            <a:schemeClr val="lt1"/>
+          </a:fontRef>
+        </p:style>
+        <p:txBody>
+          <a:bodyPr rtlCol="0" anchor="ctr"/>
+          <a:lstStyle/>
+          <a:p>
+            <a:pPr algn="ctr"/>
+          </a:p>
+        </p:txBody>
+      </p:sp>
+      <p:sp>
+        <p:nvSpPr>
+          <p:cNvPr id="5" name="TextBox 4"/>
+          <p:cNvSpPr txBox="1"/>
+          <p:nvPr/>
+        </p:nvSpPr>
+        <p:spPr>
+          <a:xfrm>
+            <a:off x="868680" y="1847088"/>
+            <a:ext cx="10454335" cy="1005840"/>
+          </a:xfrm>
+          <a:prstGeom prst="rect">
+            <a:avLst/>
+          </a:prstGeom>
+          <a:noFill/>
+        </p:spPr>
+        <p:txBody>
+          <a:bodyPr wrap="square" anchor="t" lIns="0" rIns="0" tIns="0" bIns="0">
+            <a:spAutoFit/>
+          </a:bodyPr>
+          <a:lstStyle/>
+          <a:p>
+            <a:r>
+              <a:rPr sz="1300" b="1" i="0">
+                <a:solidFill>
+                  <a:srgbClr val="0C2340"/>
+                </a:solidFill>
+                <a:latin typeface="Calibri"/>
+              </a:rPr>
+              <a:t>ℹ️ Nota institucional</a:t>
+            </a:r>
+          </a:p>
+          <a:p>
+            <a:pPr>
+              <a:spcBef>
+                <a:spcPts val="400"/>
+              </a:spcBef>
+            </a:pPr>
+            <a:r>
+              <a:rPr sz="1300" b="1" i="0">
+                <a:solidFill>
+                  <a:srgbClr val="2B2B2B"/>
+                </a:solidFill>
+                <a:latin typeface="Calibri"/>
+              </a:rPr>
+              <a:t>Puntualidad.</a:t>
+            </a:r>
+            <a:r>
+              <a:rPr sz="1300" b="0" i="0">
+                <a:solidFill>
+                  <a:srgbClr val="2B2B2B"/>
+                </a:solidFill>
+                <a:latin typeface="Calibri"/>
+              </a:rPr>
+              <a:t> Se empieza a la hora del pie de estas diapositivas. La primera parte fija el criterio de la sesión: sin eso, el taller no rinde. </a:t>
+            </a:r>
+            <a:r>
+              <a:rPr sz="1300" b="1" i="0">
+                <a:solidFill>
+                  <a:srgbClr val="2B2B2B"/>
+                </a:solidFill>
+                <a:latin typeface="Calibri"/>
+              </a:rPr>
+              <a:t>Micrófono</a:t>
+            </a:r>
+            <a:r>
+              <a:rPr sz="1300" b="0" i="0">
+                <a:solidFill>
+                  <a:srgbClr val="2B2B2B"/>
+                </a:solidFill>
+                <a:latin typeface="Calibri"/>
+              </a:rPr>
+              <a:t> apagado mientras alguien expone.</a:t>
+            </a:r>
+          </a:p>
+        </p:txBody>
+      </p:sp>
+      <p:sp>
+        <p:nvSpPr>
+          <p:cNvPr id="6" name="Rounded Rectangle 5"/>
+          <p:cNvSpPr/>
+          <p:nvPr/>
+        </p:nvSpPr>
+        <p:spPr>
+          <a:xfrm>
+            <a:off x="640080" y="3191256"/>
+            <a:ext cx="10911535" cy="1225296"/>
+          </a:xfrm>
+          <a:prstGeom prst="roundRect">
+            <a:avLst/>
+          </a:prstGeom>
+          <a:solidFill>
+            <a:srgbClr val="FDECD8"/>
+          </a:solidFill>
+          <a:ln>
+            <a:noFill/>
+          </a:ln>
+          <a:effectLst/>
+        </p:spPr>
+        <p:style>
+          <a:lnRef idx="1">
+            <a:schemeClr val="accent1"/>
+          </a:lnRef>
+          <a:fillRef idx="3">
+            <a:schemeClr val="accent1"/>
+          </a:fillRef>
+          <a:effectRef idx="2">
+            <a:schemeClr val="accent1"/>
+          </a:effectRef>
+          <a:fontRef idx="minor">
+            <a:schemeClr val="lt1"/>
+          </a:fontRef>
+        </p:style>
+        <p:txBody>
+          <a:bodyPr rtlCol="0" anchor="ctr"/>
+          <a:lstStyle/>
+          <a:p>
+            <a:pPr algn="ctr"/>
+          </a:p>
+        </p:txBody>
+      </p:sp>
+      <p:sp>
+        <p:nvSpPr>
+          <p:cNvPr id="7" name="TextBox 6"/>
+          <p:cNvSpPr txBox="1"/>
+          <p:nvPr/>
+        </p:nvSpPr>
+        <p:spPr>
+          <a:xfrm>
+            <a:off x="868680" y="3300984"/>
+            <a:ext cx="10454335" cy="1005840"/>
+          </a:xfrm>
+          <a:prstGeom prst="rect">
+            <a:avLst/>
+          </a:prstGeom>
+          <a:noFill/>
+        </p:spPr>
+        <p:txBody>
+          <a:bodyPr wrap="square" anchor="t" lIns="0" rIns="0" tIns="0" bIns="0">
+            <a:spAutoFit/>
+          </a:bodyPr>
+          <a:lstStyle/>
+          <a:p>
+            <a:r>
+              <a:rPr sz="1300" b="1" i="0">
+                <a:solidFill>
+                  <a:srgbClr val="0C2340"/>
+                </a:solidFill>
+                <a:latin typeface="Calibri"/>
+              </a:rPr>
+              <a:t>💡 Aclaración</a:t>
+            </a:r>
+          </a:p>
+          <a:p>
+            <a:pPr>
+              <a:spcBef>
+                <a:spcPts val="400"/>
+              </a:spcBef>
+            </a:pPr>
+            <a:r>
+              <a:rPr sz="1300" b="1" i="0">
+                <a:solidFill>
+                  <a:srgbClr val="2B2B2B"/>
+                </a:solidFill>
+                <a:latin typeface="Calibri"/>
+              </a:rPr>
+              <a:t>Compartir pantalla es parte del curso.</a:t>
+            </a:r>
+            <a:r>
+              <a:rPr sz="1300" b="0" i="0">
+                <a:solidFill>
+                  <a:srgbClr val="2B2B2B"/>
+                </a:solidFill>
+                <a:latin typeface="Calibri"/>
+              </a:rPr>
+              <a:t> En las revisiones se proyecta el documento de alguien; la </a:t>
+            </a:r>
+            <a:r>
+              <a:rPr sz="1300" b="1" i="0">
+                <a:solidFill>
+                  <a:srgbClr val="2B2B2B"/>
+                </a:solidFill>
+                <a:latin typeface="Calibri"/>
+              </a:rPr>
+              <a:t>cámara</a:t>
+            </a:r>
+            <a:r>
+              <a:rPr sz="1300" b="0" i="0">
+                <a:solidFill>
+                  <a:srgbClr val="2B2B2B"/>
+                </a:solidFill>
+                <a:latin typeface="Calibri"/>
+              </a:rPr>
+              <a:t> se agradece si su conexión lo permite. Nadie se burla de un borrador: todos mostramos texto a medio hacer.</a:t>
+            </a:r>
+          </a:p>
+        </p:txBody>
+      </p:sp>
+      <p:sp>
+        <p:nvSpPr>
+          <p:cNvPr id="8" name="Rounded Rectangle 7"/>
+          <p:cNvSpPr/>
+          <p:nvPr/>
+        </p:nvSpPr>
+        <p:spPr>
+          <a:xfrm>
+            <a:off x="640080" y="4645152"/>
+            <a:ext cx="10911535" cy="969264"/>
+          </a:xfrm>
+          <a:prstGeom prst="roundRect">
+            <a:avLst/>
+          </a:prstGeom>
+          <a:solidFill>
+            <a:srgbClr val="FBE4E4"/>
+          </a:solidFill>
+          <a:ln>
+            <a:noFill/>
+          </a:ln>
+          <a:effectLst/>
+        </p:spPr>
+        <p:style>
+          <a:lnRef idx="1">
+            <a:schemeClr val="accent1"/>
+          </a:lnRef>
+          <a:fillRef idx="3">
+            <a:schemeClr val="accent1"/>
+          </a:fillRef>
+          <a:effectRef idx="2">
+            <a:schemeClr val="accent1"/>
+          </a:effectRef>
+          <a:fontRef idx="minor">
+            <a:schemeClr val="lt1"/>
+          </a:fontRef>
+        </p:style>
+        <p:txBody>
+          <a:bodyPr rtlCol="0" anchor="ctr"/>
+          <a:lstStyle/>
+          <a:p>
+            <a:pPr algn="ctr"/>
+          </a:p>
+        </p:txBody>
+      </p:sp>
+      <p:sp>
+        <p:nvSpPr>
+          <p:cNvPr id="9" name="TextBox 8"/>
+          <p:cNvSpPr txBox="1"/>
+          <p:nvPr/>
+        </p:nvSpPr>
+        <p:spPr>
+          <a:xfrm>
+            <a:off x="868680" y="4754880"/>
+            <a:ext cx="10454335" cy="749808"/>
+          </a:xfrm>
+          <a:prstGeom prst="rect">
+            <a:avLst/>
+          </a:prstGeom>
+          <a:noFill/>
+        </p:spPr>
+        <p:txBody>
+          <a:bodyPr wrap="square" anchor="t" lIns="0" rIns="0" tIns="0" bIns="0">
+            <a:spAutoFit/>
+          </a:bodyPr>
+          <a:lstStyle/>
+          <a:p>
+            <a:r>
+              <a:rPr sz="1300" b="1" i="0">
+                <a:solidFill>
+                  <a:srgbClr val="0C2340"/>
+                </a:solidFill>
+                <a:latin typeface="Calibri"/>
+              </a:rPr>
+              <a:t>⚠️ Importante</a:t>
+            </a:r>
+          </a:p>
+          <a:p>
+            <a:pPr>
+              <a:spcBef>
+                <a:spcPts val="400"/>
+              </a:spcBef>
+            </a:pPr>
+            <a:r>
+              <a:rPr sz="1300" b="1" i="0">
+                <a:solidFill>
+                  <a:srgbClr val="2B2B2B"/>
+                </a:solidFill>
+                <a:latin typeface="Calibri"/>
+              </a:rPr>
+              <a:t>Respeto en la retroalimentación.</a:t>
+            </a:r>
+            <a:r>
+              <a:rPr sz="1300" b="0" i="0">
+                <a:solidFill>
+                  <a:srgbClr val="2B2B2B"/>
+                </a:solidFill>
+                <a:latin typeface="Calibri"/>
+              </a:rPr>
+              <a:t> Se comenta el texto, no a la persona, y siempre con una propuesta concreta: qué cambiar y por qué.</a:t>
+            </a:r>
+          </a:p>
+        </p:txBody>
+      </p:sp>
+      <p:sp>
+        <p:nvSpPr>
+          <p:cNvPr id="10" name="TextBox 9"/>
+          <p:cNvSpPr txBox="1"/>
+          <p:nvPr/>
+        </p:nvSpPr>
+        <p:spPr>
+          <a:xfrm>
+            <a:off x="2194560" y="6446520"/>
+            <a:ext cx="5943600" cy="274320"/>
+          </a:xfrm>
+          <a:prstGeom prst="rect">
+            <a:avLst/>
+          </a:prstGeom>
+          <a:noFill/>
+        </p:spPr>
+        <p:txBody>
+          <a:bodyPr wrap="square" anchor="t" lIns="0" rIns="0" tIns="0" bIns="0">
+            <a:spAutoFit/>
+          </a:bodyPr>
+          <a:lstStyle/>
+          <a:p>
+            <a:pPr algn="l"/>
+            <a:r>
+              <a:rPr sz="1000" b="1" i="0">
+                <a:solidFill>
+                  <a:srgbClr val="8F989D"/>
+                </a:solidFill>
+                <a:latin typeface="Calibri"/>
+              </a:rPr>
+              <a:t>Inicio 5:10 pm</a:t>
+            </a:r>
+          </a:p>
+        </p:txBody>
+      </p:sp>
+      <p:sp>
+        <p:nvSpPr>
+          <p:cNvPr id="11" name="TextBox 10"/>
+          <p:cNvSpPr txBox="1"/>
+          <p:nvPr/>
+        </p:nvSpPr>
+        <p:spPr>
+          <a:xfrm>
+            <a:off x="11094415" y="6446520"/>
+            <a:ext cx="548640" cy="274320"/>
+          </a:xfrm>
+          <a:prstGeom prst="rect">
+            <a:avLst/>
+          </a:prstGeom>
+          <a:noFill/>
+        </p:spPr>
+        <p:txBody>
+          <a:bodyPr wrap="square" anchor="t" lIns="0" rIns="0" tIns="0" bIns="0">
+            <a:spAutoFit/>
+          </a:bodyPr>
+          <a:lstStyle/>
+          <a:p>
+            <a:pPr algn="r"/>
+            <a:r>
+              <a:rPr sz="1000" b="1" i="0">
+                <a:solidFill>
+                  <a:srgbClr val="8F989D"/>
+                </a:solidFill>
+                <a:latin typeface="Calibri"/>
+              </a:rPr>
+              <a:t>18</a:t>
+            </a:r>
+          </a:p>
+        </p:txBody>
+      </p:sp>
+    </p:spTree>
+  </p:cSld>
+  <p:clrMapOvr>
+    <a:masterClrMapping/>
+  </p:clrMapOvr>
+</p:sld>
+</file>
+
+<file path=ppt/slides/slide19.xml><?xml version="1.0" encoding="utf-8"?>
+<p:sld xmlns:a="http://schemas.openxmlformats.org/drawingml/2006/main" xmlns:p="http://schemas.openxmlformats.org/presentationml/2006/main" xmlns:r="http://schemas.openxmlformats.org/officeDocument/2006/relationships">
+  <p:cSld>
+    <p:bg>
+      <p:bgPr>
+        <a:solidFill>
+          <a:srgbClr val="FFFFFF"/>
+        </a:solidFill>
+        <a:effectLst/>
+      </p:bgPr>
+    </p:bg>
+    <p:spTree>
+      <p:nvGrpSpPr>
+        <p:cNvPr id="1" name=""/>
+        <p:cNvGrpSpPr/>
+        <p:nvPr/>
+      </p:nvGrpSpPr>
+      <p:grpSpPr/>
+      <p:sp>
+        <p:nvSpPr>
+          <p:cNvPr id="2" name="Rectangle 1"/>
+          <p:cNvSpPr/>
+          <p:nvPr/>
+        </p:nvSpPr>
+        <p:spPr>
+          <a:xfrm>
+            <a:off x="0" y="0"/>
+            <a:ext cx="12191695" cy="1188720"/>
+          </a:xfrm>
+          <a:prstGeom prst="rect">
+            <a:avLst/>
+          </a:prstGeom>
+          <a:solidFill>
+            <a:srgbClr val="0C2340"/>
+          </a:solidFill>
+          <a:ln>
+            <a:noFill/>
+          </a:ln>
+          <a:effectLst/>
+        </p:spPr>
+        <p:style>
+          <a:lnRef idx="1">
+            <a:schemeClr val="accent1"/>
+          </a:lnRef>
+          <a:fillRef idx="3">
+            <a:schemeClr val="accent1"/>
+          </a:fillRef>
+          <a:effectRef idx="2">
+            <a:schemeClr val="accent1"/>
+          </a:effectRef>
+          <a:fontRef idx="minor">
+            <a:schemeClr val="lt1"/>
+          </a:fontRef>
+        </p:style>
+        <p:txBody>
+          <a:bodyPr rtlCol="0" anchor="ctr"/>
+          <a:lstStyle/>
+          <a:p>
+            <a:pPr algn="ctr"/>
+          </a:p>
+        </p:txBody>
+      </p:sp>
+      <p:sp>
+        <p:nvSpPr>
+          <p:cNvPr id="3" name="TextBox 2"/>
+          <p:cNvSpPr txBox="1"/>
+          <p:nvPr/>
+        </p:nvSpPr>
+        <p:spPr>
+          <a:xfrm>
+            <a:off x="640080" y="0"/>
+            <a:ext cx="9082735" cy="1188720"/>
+          </a:xfrm>
+          <a:prstGeom prst="rect">
+            <a:avLst/>
+          </a:prstGeom>
+          <a:noFill/>
+        </p:spPr>
+        <p:txBody>
+          <a:bodyPr wrap="square" anchor="ctr" lIns="0" rIns="0" tIns="0" bIns="0">
+            <a:spAutoFit/>
+          </a:bodyPr>
+          <a:lstStyle/>
+          <a:p>
+            <a:pPr algn="ctr"/>
+            <a:r>
+              <a:rPr sz="2600" b="1" i="0">
+                <a:solidFill>
+                  <a:srgbClr val="FFFFFF"/>
+                </a:solidFill>
+                <a:latin typeface="Calibri"/>
+              </a:rPr>
+              <a:t>Preguntas frecuentes del primer día</a:t>
+            </a:r>
+          </a:p>
+        </p:txBody>
+      </p:sp>
+      <p:sp>
+        <p:nvSpPr>
+          <p:cNvPr id="4" name="Rounded Rectangle 3"/>
+          <p:cNvSpPr/>
+          <p:nvPr/>
+        </p:nvSpPr>
+        <p:spPr>
+          <a:xfrm>
+            <a:off x="640080" y="1737360"/>
+            <a:ext cx="10911535" cy="1225296"/>
+          </a:xfrm>
+          <a:prstGeom prst="roundRect">
+            <a:avLst/>
+          </a:prstGeom>
+          <a:solidFill>
+            <a:srgbClr val="E8F5EC"/>
+          </a:solidFill>
+          <a:ln>
+            <a:noFill/>
+          </a:ln>
+          <a:effectLst/>
+        </p:spPr>
+        <p:style>
+          <a:lnRef idx="1">
+            <a:schemeClr val="accent1"/>
+          </a:lnRef>
+          <a:fillRef idx="3">
+            <a:schemeClr val="accent1"/>
+          </a:fillRef>
+          <a:effectRef idx="2">
+            <a:schemeClr val="accent1"/>
+          </a:effectRef>
+          <a:fontRef idx="minor">
+            <a:schemeClr val="lt1"/>
+          </a:fontRef>
+        </p:style>
+        <p:txBody>
+          <a:bodyPr rtlCol="0" anchor="ctr"/>
+          <a:lstStyle/>
+          <a:p>
+            <a:pPr algn="ctr"/>
+          </a:p>
+        </p:txBody>
+      </p:sp>
+      <p:sp>
+        <p:nvSpPr>
+          <p:cNvPr id="5" name="TextBox 4"/>
+          <p:cNvSpPr txBox="1"/>
+          <p:nvPr/>
+        </p:nvSpPr>
+        <p:spPr>
+          <a:xfrm>
+            <a:off x="868680" y="1847088"/>
+            <a:ext cx="10454335" cy="1005840"/>
+          </a:xfrm>
+          <a:prstGeom prst="rect">
+            <a:avLst/>
+          </a:prstGeom>
+          <a:noFill/>
+        </p:spPr>
+        <p:txBody>
+          <a:bodyPr wrap="square" anchor="t" lIns="0" rIns="0" tIns="0" bIns="0">
+            <a:spAutoFit/>
+          </a:bodyPr>
+          <a:lstStyle/>
+          <a:p>
+            <a:r>
+              <a:rPr sz="1300" b="1" i="0">
+                <a:solidFill>
+                  <a:srgbClr val="0C2340"/>
+                </a:solidFill>
+                <a:latin typeface="Calibri"/>
+              </a:rPr>
+              <a:t>ℹ️ Nota institucional</a:t>
+            </a:r>
+          </a:p>
+          <a:p>
+            <a:pPr>
+              <a:spcBef>
+                <a:spcPts val="400"/>
+              </a:spcBef>
+            </a:pPr>
+            <a:r>
+              <a:rPr sz="1300" b="1" i="0">
+                <a:solidFill>
+                  <a:srgbClr val="2B2B2B"/>
+                </a:solidFill>
+                <a:latin typeface="Calibri"/>
+              </a:rPr>
+              <a:t>“¿Esto se pierde fácil?”</a:t>
+            </a:r>
+            <a:r>
+              <a:rPr sz="1300" b="0" i="0">
+                <a:solidFill>
+                  <a:srgbClr val="2B2B2B"/>
+                </a:solidFill>
+                <a:latin typeface="Calibri"/>
+              </a:rPr>
+              <a:t> Se pierde por no entregar, casi nunca por escribir mal. El documento se corrige; la entrega que no llegó, no. </a:t>
+            </a:r>
+            <a:r>
+              <a:rPr sz="1300" b="1" i="0">
+                <a:solidFill>
+                  <a:srgbClr val="2B2B2B"/>
+                </a:solidFill>
+                <a:latin typeface="Calibri"/>
+              </a:rPr>
+              <a:t>“¿Puedo trabajar solo?”</a:t>
+            </a:r>
+            <a:r>
+              <a:rPr sz="1300" b="0" i="0">
+                <a:solidFill>
+                  <a:srgbClr val="2B2B2B"/>
+                </a:solidFill>
+                <a:latin typeface="Calibri"/>
+              </a:rPr>
+              <a:t> Según lo que autorice el programa: consúltelo hoy, no a mitad de periodo.</a:t>
+            </a:r>
+          </a:p>
+        </p:txBody>
+      </p:sp>
+      <p:sp>
+        <p:nvSpPr>
+          <p:cNvPr id="6" name="Rounded Rectangle 5"/>
+          <p:cNvSpPr/>
+          <p:nvPr/>
+        </p:nvSpPr>
+        <p:spPr>
+          <a:xfrm>
+            <a:off x="640080" y="3191256"/>
+            <a:ext cx="10911535" cy="1225296"/>
+          </a:xfrm>
+          <a:prstGeom prst="roundRect">
+            <a:avLst/>
+          </a:prstGeom>
+          <a:solidFill>
+            <a:srgbClr val="FBE4E4"/>
+          </a:solidFill>
+          <a:ln>
+            <a:noFill/>
+          </a:ln>
+          <a:effectLst/>
+        </p:spPr>
+        <p:style>
+          <a:lnRef idx="1">
+            <a:schemeClr val="accent1"/>
+          </a:lnRef>
+          <a:fillRef idx="3">
+            <a:schemeClr val="accent1"/>
+          </a:fillRef>
+          <a:effectRef idx="2">
+            <a:schemeClr val="accent1"/>
+          </a:effectRef>
+          <a:fontRef idx="minor">
+            <a:schemeClr val="lt1"/>
+          </a:fontRef>
+        </p:style>
+        <p:txBody>
+          <a:bodyPr rtlCol="0" anchor="ctr"/>
+          <a:lstStyle/>
+          <a:p>
+            <a:pPr algn="ctr"/>
+          </a:p>
+        </p:txBody>
+      </p:sp>
+      <p:sp>
+        <p:nvSpPr>
+          <p:cNvPr id="7" name="TextBox 6"/>
+          <p:cNvSpPr txBox="1"/>
+          <p:nvPr/>
+        </p:nvSpPr>
+        <p:spPr>
+          <a:xfrm>
+            <a:off x="868680" y="3300984"/>
+            <a:ext cx="10454335" cy="1005840"/>
+          </a:xfrm>
+          <a:prstGeom prst="rect">
+            <a:avLst/>
+          </a:prstGeom>
+          <a:noFill/>
+        </p:spPr>
+        <p:txBody>
+          <a:bodyPr wrap="square" anchor="t" lIns="0" rIns="0" tIns="0" bIns="0">
+            <a:spAutoFit/>
+          </a:bodyPr>
+          <a:lstStyle/>
+          <a:p>
+            <a:r>
+              <a:rPr sz="1300" b="1" i="0">
+                <a:solidFill>
+                  <a:srgbClr val="0C2340"/>
+                </a:solidFill>
+                <a:latin typeface="Calibri"/>
+              </a:rPr>
+              <a:t>⚠️ Importante</a:t>
+            </a:r>
+          </a:p>
+          <a:p>
+            <a:pPr>
+              <a:spcBef>
+                <a:spcPts val="400"/>
+              </a:spcBef>
+            </a:pPr>
+            <a:r>
+              <a:rPr sz="1300" b="1" i="0">
+                <a:solidFill>
+                  <a:srgbClr val="2B2B2B"/>
+                </a:solidFill>
+                <a:latin typeface="Calibri"/>
+              </a:rPr>
+              <a:t>“¿Puedo cambiar de tema?”</a:t>
+            </a:r>
+            <a:r>
+              <a:rPr sz="1300" b="0" i="0">
+                <a:solidFill>
+                  <a:srgbClr val="2B2B2B"/>
+                </a:solidFill>
+                <a:latin typeface="Calibri"/>
+              </a:rPr>
+              <a:t> </a:t>
+            </a:r>
+            <a:r>
+              <a:rPr sz="1300" b="1" i="0">
+                <a:solidFill>
+                  <a:srgbClr val="2B2B2B"/>
+                </a:solidFill>
+                <a:latin typeface="Calibri"/>
+              </a:rPr>
+              <a:t>Reformular</a:t>
+            </a:r>
+            <a:r>
+              <a:rPr sz="1300" b="0" i="0">
+                <a:solidFill>
+                  <a:srgbClr val="2B2B2B"/>
+                </a:solidFill>
+                <a:latin typeface="Calibri"/>
+              </a:rPr>
+              <a:t> (afinar el foco) sí, y hoy mismo. </a:t>
+            </a:r>
+            <a:r>
+              <a:rPr sz="1300" b="1" i="0">
+                <a:solidFill>
+                  <a:srgbClr val="2B2B2B"/>
+                </a:solidFill>
+                <a:latin typeface="Calibri"/>
+              </a:rPr>
+              <a:t>Cambiar de proyecto entero</a:t>
+            </a:r>
+            <a:r>
+              <a:rPr sz="1300" b="0" i="0">
+                <a:solidFill>
+                  <a:srgbClr val="2B2B2B"/>
+                </a:solidFill>
+                <a:latin typeface="Calibri"/>
+              </a:rPr>
+              <a:t> cuesta semanas que este periodo no tiene: solo por fuerza mayor y hablado con el Docente.</a:t>
+            </a:r>
+          </a:p>
+        </p:txBody>
+      </p:sp>
+      <p:sp>
+        <p:nvSpPr>
+          <p:cNvPr id="8" name="Rounded Rectangle 7"/>
+          <p:cNvSpPr/>
+          <p:nvPr/>
+        </p:nvSpPr>
+        <p:spPr>
+          <a:xfrm>
+            <a:off x="640080" y="4645152"/>
+            <a:ext cx="10911535" cy="969264"/>
+          </a:xfrm>
+          <a:prstGeom prst="roundRect">
+            <a:avLst/>
+          </a:prstGeom>
+          <a:solidFill>
+            <a:srgbClr val="FDECD8"/>
+          </a:solidFill>
+          <a:ln>
+            <a:noFill/>
+          </a:ln>
+          <a:effectLst/>
+        </p:spPr>
+        <p:style>
+          <a:lnRef idx="1">
+            <a:schemeClr val="accent1"/>
+          </a:lnRef>
+          <a:fillRef idx="3">
+            <a:schemeClr val="accent1"/>
+          </a:fillRef>
+          <a:effectRef idx="2">
+            <a:schemeClr val="accent1"/>
+          </a:effectRef>
+          <a:fontRef idx="minor">
+            <a:schemeClr val="lt1"/>
+          </a:fontRef>
+        </p:style>
+        <p:txBody>
+          <a:bodyPr rtlCol="0" anchor="ctr"/>
+          <a:lstStyle/>
+          <a:p>
+            <a:pPr algn="ctr"/>
+          </a:p>
+        </p:txBody>
+      </p:sp>
+      <p:sp>
+        <p:nvSpPr>
+          <p:cNvPr id="9" name="TextBox 8"/>
+          <p:cNvSpPr txBox="1"/>
+          <p:nvPr/>
+        </p:nvSpPr>
+        <p:spPr>
+          <a:xfrm>
+            <a:off x="868680" y="4754880"/>
+            <a:ext cx="10454335" cy="749808"/>
+          </a:xfrm>
+          <a:prstGeom prst="rect">
+            <a:avLst/>
+          </a:prstGeom>
+          <a:noFill/>
+        </p:spPr>
+        <p:txBody>
+          <a:bodyPr wrap="square" anchor="t" lIns="0" rIns="0" tIns="0" bIns="0">
+            <a:spAutoFit/>
+          </a:bodyPr>
+          <a:lstStyle/>
+          <a:p>
+            <a:r>
+              <a:rPr sz="1300" b="1" i="0">
+                <a:solidFill>
+                  <a:srgbClr val="0C2340"/>
+                </a:solidFill>
+                <a:latin typeface="Calibri"/>
+              </a:rPr>
+              <a:t>💡 Aclaración</a:t>
+            </a:r>
+          </a:p>
+          <a:p>
+            <a:pPr>
+              <a:spcBef>
+                <a:spcPts val="400"/>
+              </a:spcBef>
+            </a:pPr>
+            <a:r>
+              <a:rPr sz="1300" b="1" i="0">
+                <a:solidFill>
+                  <a:srgbClr val="2B2B2B"/>
+                </a:solidFill>
+                <a:latin typeface="Calibri"/>
+              </a:rPr>
+              <a:t>“¿Me sirve lo que hice en el semestre anterior?”</a:t>
+            </a:r>
+            <a:r>
+              <a:rPr sz="1300" b="0" i="0">
+                <a:solidFill>
+                  <a:srgbClr val="2B2B2B"/>
+                </a:solidFill>
+                <a:latin typeface="Calibri"/>
+              </a:rPr>
+              <a:t> Sí, esa es la idea: TG2 continúa lo que ya existe. Pero se revisa, se actualiza y se cita si reutiliza fragmentos propios.</a:t>
+            </a:r>
+          </a:p>
+        </p:txBody>
+      </p:sp>
+      <p:sp>
+        <p:nvSpPr>
+          <p:cNvPr id="10" name="TextBox 9"/>
+          <p:cNvSpPr txBox="1"/>
+          <p:nvPr/>
+        </p:nvSpPr>
+        <p:spPr>
+          <a:xfrm>
+            <a:off x="2194560" y="6446520"/>
+            <a:ext cx="5943600" cy="274320"/>
+          </a:xfrm>
+          <a:prstGeom prst="rect">
+            <a:avLst/>
+          </a:prstGeom>
+          <a:noFill/>
+        </p:spPr>
+        <p:txBody>
+          <a:bodyPr wrap="square" anchor="t" lIns="0" rIns="0" tIns="0" bIns="0">
+            <a:spAutoFit/>
+          </a:bodyPr>
+          <a:lstStyle/>
+          <a:p>
+            <a:pPr algn="l"/>
+            <a:r>
+              <a:rPr sz="1000" b="1" i="0">
+                <a:solidFill>
+                  <a:srgbClr val="8F989D"/>
+                </a:solidFill>
+                <a:latin typeface="Calibri"/>
+              </a:rPr>
+              <a:t>Inicio 5:10 pm</a:t>
+            </a:r>
+          </a:p>
+        </p:txBody>
+      </p:sp>
+      <p:sp>
+        <p:nvSpPr>
+          <p:cNvPr id="11" name="TextBox 10"/>
+          <p:cNvSpPr txBox="1"/>
+          <p:nvPr/>
+        </p:nvSpPr>
+        <p:spPr>
+          <a:xfrm>
+            <a:off x="11094415" y="6446520"/>
+            <a:ext cx="548640" cy="274320"/>
+          </a:xfrm>
+          <a:prstGeom prst="rect">
+            <a:avLst/>
+          </a:prstGeom>
+          <a:noFill/>
+        </p:spPr>
+        <p:txBody>
+          <a:bodyPr wrap="square" anchor="t" lIns="0" rIns="0" tIns="0" bIns="0">
+            <a:spAutoFit/>
+          </a:bodyPr>
+          <a:lstStyle/>
+          <a:p>
+            <a:pPr algn="r"/>
+            <a:r>
+              <a:rPr sz="1000" b="1" i="0">
+                <a:solidFill>
+                  <a:srgbClr val="8F989D"/>
+                </a:solidFill>
+                <a:latin typeface="Calibri"/>
+              </a:rPr>
+              <a:t>19</a:t>
+            </a:r>
+          </a:p>
+        </p:txBody>
+      </p:sp>
+    </p:spTree>
+  </p:cSld>
+  <p:clrMapOvr>
+    <a:masterClrMapping/>
+  </p:clrMapOvr>
+</p:sld>
+</file>
+
 <file path=ppt/slides/slide2.xml><?xml version="1.0" encoding="utf-8"?>
 <p:sld xmlns:a="http://schemas.openxmlformats.org/drawingml/2006/main" xmlns:p="http://schemas.openxmlformats.org/presentationml/2006/main" xmlns:r="http://schemas.openxmlformats.org/officeDocument/2006/relationships">
   <p:cSld>
@@ -3798,6 +9360,1629 @@
                 <a:latin typeface="Calibri"/>
               </a:rPr>
               <a:t>2</a:t>
+            </a:r>
+          </a:p>
+        </p:txBody>
+      </p:sp>
+    </p:spTree>
+  </p:cSld>
+  <p:clrMapOvr>
+    <a:masterClrMapping/>
+  </p:clrMapOvr>
+</p:sld>
+</file>
+
+<file path=ppt/slides/slide20.xml><?xml version="1.0" encoding="utf-8"?>
+<p:sld xmlns:a="http://schemas.openxmlformats.org/drawingml/2006/main" xmlns:p="http://schemas.openxmlformats.org/presentationml/2006/main" xmlns:r="http://schemas.openxmlformats.org/officeDocument/2006/relationships">
+  <p:cSld>
+    <p:bg>
+      <p:bgPr>
+        <a:solidFill>
+          <a:srgbClr val="FFFFFF"/>
+        </a:solidFill>
+        <a:effectLst/>
+      </p:bgPr>
+    </p:bg>
+    <p:spTree>
+      <p:nvGrpSpPr>
+        <p:cNvPr id="1" name=""/>
+        <p:cNvGrpSpPr/>
+        <p:nvPr/>
+      </p:nvGrpSpPr>
+      <p:grpSpPr/>
+      <p:sp>
+        <p:nvSpPr>
+          <p:cNvPr id="2" name="Rectangle 1"/>
+          <p:cNvSpPr/>
+          <p:nvPr/>
+        </p:nvSpPr>
+        <p:spPr>
+          <a:xfrm>
+            <a:off x="0" y="0"/>
+            <a:ext cx="12191695" cy="1188720"/>
+          </a:xfrm>
+          <a:prstGeom prst="rect">
+            <a:avLst/>
+          </a:prstGeom>
+          <a:solidFill>
+            <a:srgbClr val="0C2340"/>
+          </a:solidFill>
+          <a:ln>
+            <a:noFill/>
+          </a:ln>
+          <a:effectLst/>
+        </p:spPr>
+        <p:style>
+          <a:lnRef idx="1">
+            <a:schemeClr val="accent1"/>
+          </a:lnRef>
+          <a:fillRef idx="3">
+            <a:schemeClr val="accent1"/>
+          </a:fillRef>
+          <a:effectRef idx="2">
+            <a:schemeClr val="accent1"/>
+          </a:effectRef>
+          <a:fontRef idx="minor">
+            <a:schemeClr val="lt1"/>
+          </a:fontRef>
+        </p:style>
+        <p:txBody>
+          <a:bodyPr rtlCol="0" anchor="ctr"/>
+          <a:lstStyle/>
+          <a:p>
+            <a:pPr algn="ctr"/>
+          </a:p>
+        </p:txBody>
+      </p:sp>
+      <p:sp>
+        <p:nvSpPr>
+          <p:cNvPr id="3" name="TextBox 2"/>
+          <p:cNvSpPr txBox="1"/>
+          <p:nvPr/>
+        </p:nvSpPr>
+        <p:spPr>
+          <a:xfrm>
+            <a:off x="640080" y="0"/>
+            <a:ext cx="9082735" cy="1188720"/>
+          </a:xfrm>
+          <a:prstGeom prst="rect">
+            <a:avLst/>
+          </a:prstGeom>
+          <a:noFill/>
+        </p:spPr>
+        <p:txBody>
+          <a:bodyPr wrap="square" anchor="ctr" lIns="0" rIns="0" tIns="0" bIns="0">
+            <a:spAutoFit/>
+          </a:bodyPr>
+          <a:lstStyle/>
+          <a:p>
+            <a:pPr algn="ctr"/>
+            <a:r>
+              <a:rPr sz="2600" b="1" i="0">
+                <a:solidFill>
+                  <a:srgbClr val="FFFFFF"/>
+                </a:solidFill>
+                <a:latin typeface="Calibri"/>
+              </a:rPr>
+              <a:t>Lo que debe tener listo para la Sesión 02</a:t>
+            </a:r>
+          </a:p>
+        </p:txBody>
+      </p:sp>
+      <p:sp>
+        <p:nvSpPr>
+          <p:cNvPr id="4" name="TextBox 3"/>
+          <p:cNvSpPr txBox="1"/>
+          <p:nvPr/>
+        </p:nvSpPr>
+        <p:spPr>
+          <a:xfrm>
+            <a:off x="640080" y="1691639"/>
+            <a:ext cx="10911535" cy="4617720"/>
+          </a:xfrm>
+          <a:prstGeom prst="rect">
+            <a:avLst/>
+          </a:prstGeom>
+          <a:noFill/>
+        </p:spPr>
+        <p:txBody>
+          <a:bodyPr wrap="square" anchor="t" lIns="0" rIns="0" tIns="0" bIns="0">
+            <a:spAutoFit/>
+          </a:bodyPr>
+          <a:lstStyle/>
+          <a:p>
+            <a:pPr>
+              <a:spcAft>
+                <a:spcPts val="1000"/>
+              </a:spcAft>
+            </a:pPr>
+            <a:r>
+              <a:rPr sz="1600" b="0" i="0">
+                <a:solidFill>
+                  <a:srgbClr val="2B2B2B"/>
+                </a:solidFill>
+                <a:latin typeface="Calibri"/>
+              </a:rPr>
+              <a:t>–   </a:t>
+            </a:r>
+            <a:r>
+              <a:rPr sz="1600" b="1" i="0">
+                <a:solidFill>
+                  <a:srgbClr val="2B2B2B"/>
+                </a:solidFill>
+                <a:latin typeface="Calibri"/>
+              </a:rPr>
+              <a:t>Lectura autónoma (obligatoria):</a:t>
+            </a:r>
+            <a:r>
+              <a:rPr sz="1600" b="0" i="0">
+                <a:solidFill>
+                  <a:srgbClr val="2B2B2B"/>
+                </a:solidFill>
+                <a:latin typeface="Calibri"/>
+              </a:rPr>
+              <a:t> </a:t>
+            </a:r>
+            <a:r>
+              <a:rPr sz="1600" b="1" i="0">
+                <a:solidFill>
+                  <a:srgbClr val="2B2B2B"/>
+                </a:solidFill>
+                <a:latin typeface="Calibri"/>
+              </a:rPr>
+              <a:t>delimitación y reformulación del tema</a:t>
+            </a:r>
+            <a:r>
+              <a:rPr sz="1600" b="0" i="0">
+                <a:solidFill>
+                  <a:srgbClr val="2B2B2B"/>
+                </a:solidFill>
+                <a:latin typeface="Calibri"/>
+              </a:rPr>
+              <a:t> — cómo se pasa de un tema amplio a uno investigable.</a:t>
+            </a:r>
+          </a:p>
+          <a:p>
+            <a:pPr lvl="1">
+              <a:spcAft>
+                <a:spcPts val="600"/>
+              </a:spcAft>
+            </a:pPr>
+            <a:r>
+              <a:rPr sz="1500" b="0" i="0">
+                <a:solidFill>
+                  <a:srgbClr val="2B2B2B"/>
+                </a:solidFill>
+                <a:latin typeface="Calibri"/>
+              </a:rPr>
+              <a:t>●   Hoy no se dictó: se lee en casa y se </a:t>
+            </a:r>
+            <a:r>
+              <a:rPr sz="1500" b="1" i="0">
+                <a:solidFill>
+                  <a:srgbClr val="2B2B2B"/>
+                </a:solidFill>
+                <a:latin typeface="Calibri"/>
+              </a:rPr>
+              <a:t>retoma al abrir la Sesión 02</a:t>
+            </a:r>
+            <a:r>
+              <a:rPr sz="1500" b="0" i="0">
+                <a:solidFill>
+                  <a:srgbClr val="2B2B2B"/>
+                </a:solidFill>
+                <a:latin typeface="Calibri"/>
+              </a:rPr>
+              <a:t>.</a:t>
+            </a:r>
+          </a:p>
+          <a:p>
+            <a:pPr lvl="1">
+              <a:spcAft>
+                <a:spcPts val="600"/>
+              </a:spcAft>
+            </a:pPr>
+            <a:r>
+              <a:rPr sz="1500" b="0" i="0">
+                <a:solidFill>
+                  <a:srgbClr val="2B2B2B"/>
+                </a:solidFill>
+                <a:latin typeface="Calibri"/>
+              </a:rPr>
+              <a:t>●   Dónde: material de la Sesión 01 en CDigital — [URL CDigital — campus del curso pendiente]</a:t>
+            </a:r>
+          </a:p>
+          <a:p>
+            <a:pPr>
+              <a:spcAft>
+                <a:spcPts val="1000"/>
+              </a:spcAft>
+            </a:pPr>
+            <a:r>
+              <a:rPr sz="1600" b="0" i="0">
+                <a:solidFill>
+                  <a:srgbClr val="2B2B2B"/>
+                </a:solidFill>
+                <a:latin typeface="Calibri"/>
+              </a:rPr>
+              <a:t>–   </a:t>
+            </a:r>
+            <a:r>
+              <a:rPr sz="1600" b="1" i="0">
+                <a:solidFill>
+                  <a:srgbClr val="2B2B2B"/>
+                </a:solidFill>
+                <a:latin typeface="Calibri"/>
+              </a:rPr>
+              <a:t>Haga el inventario de su proyecto</a:t>
+            </a:r>
+            <a:r>
+              <a:rPr sz="1600" b="0" i="0">
+                <a:solidFill>
+                  <a:srgbClr val="2B2B2B"/>
+                </a:solidFill>
+                <a:latin typeface="Calibri"/>
+              </a:rPr>
+              <a:t> en un Google Doc llamado `S01_EstadoProyecto_Apellido`:</a:t>
+            </a:r>
+          </a:p>
+          <a:p>
+            <a:pPr lvl="1">
+              <a:spcAft>
+                <a:spcPts val="600"/>
+              </a:spcAft>
+            </a:pPr>
+            <a:r>
+              <a:rPr sz="1500" b="0" i="0">
+                <a:solidFill>
+                  <a:srgbClr val="2B2B2B"/>
+                </a:solidFill>
+                <a:latin typeface="Calibri"/>
+              </a:rPr>
+              <a:t>●   Una </a:t>
+            </a:r>
+            <a:r>
+              <a:rPr sz="1500" b="1" i="0">
+                <a:solidFill>
+                  <a:srgbClr val="2B2B2B"/>
+                </a:solidFill>
+                <a:latin typeface="Calibri"/>
+              </a:rPr>
+              <a:t>matriz de estado</a:t>
+            </a:r>
+            <a:r>
+              <a:rPr sz="1500" b="0" i="0">
+                <a:solidFill>
+                  <a:srgbClr val="2B2B2B"/>
+                </a:solidFill>
+                <a:latin typeface="Calibri"/>
+              </a:rPr>
+              <a:t>: para cada sección (tema, problema, objetivos, marco, metodología) marque </a:t>
+            </a:r>
+            <a:r>
+              <a:rPr sz="1500" b="1" i="0">
+                <a:solidFill>
+                  <a:srgbClr val="2B2B2B"/>
+                </a:solidFill>
+                <a:latin typeface="Calibri"/>
+              </a:rPr>
+              <a:t>lista / a medias / inexistente</a:t>
+            </a:r>
+            <a:r>
+              <a:rPr sz="1500" b="0" i="0">
+                <a:solidFill>
+                  <a:srgbClr val="2B2B2B"/>
+                </a:solidFill>
+                <a:latin typeface="Calibri"/>
+              </a:rPr>
+              <a:t> y pegue la </a:t>
+            </a:r>
+            <a:r>
+              <a:rPr sz="1500" b="1" i="0">
+                <a:solidFill>
+                  <a:srgbClr val="2B2B2B"/>
+                </a:solidFill>
+                <a:latin typeface="Calibri"/>
+              </a:rPr>
+              <a:t>evidencia</a:t>
+            </a:r>
+            <a:r>
+              <a:rPr sz="1500" b="0" i="0">
+                <a:solidFill>
+                  <a:srgbClr val="2B2B2B"/>
+                </a:solidFill>
+                <a:latin typeface="Calibri"/>
+              </a:rPr>
+              <a:t> (el párrafo o el enlace).</a:t>
+            </a:r>
+          </a:p>
+          <a:p>
+            <a:pPr lvl="1">
+              <a:spcAft>
+                <a:spcPts val="600"/>
+              </a:spcAft>
+            </a:pPr>
+            <a:r>
+              <a:rPr sz="1500" b="0" i="0">
+                <a:solidFill>
+                  <a:srgbClr val="2B2B2B"/>
+                </a:solidFill>
+                <a:latin typeface="Calibri"/>
+              </a:rPr>
+              <a:t>●   Su </a:t>
+            </a:r>
+            <a:r>
+              <a:rPr sz="1500" b="1" i="0">
+                <a:solidFill>
+                  <a:srgbClr val="2B2B2B"/>
+                </a:solidFill>
+                <a:latin typeface="Calibri"/>
+              </a:rPr>
+              <a:t>tema delimitado</a:t>
+            </a:r>
+            <a:r>
+              <a:rPr sz="1500" b="0" i="0">
+                <a:solidFill>
+                  <a:srgbClr val="2B2B2B"/>
+                </a:solidFill>
+                <a:latin typeface="Calibri"/>
+              </a:rPr>
+              <a:t> en una sola frase: actor + fenómeno + contexto.</a:t>
+            </a:r>
+          </a:p>
+          <a:p>
+            <a:pPr lvl="1">
+              <a:spcAft>
+                <a:spcPts val="600"/>
+              </a:spcAft>
+            </a:pPr>
+            <a:r>
+              <a:rPr sz="1500" b="0" i="0">
+                <a:solidFill>
+                  <a:srgbClr val="2B2B2B"/>
+                </a:solidFill>
+                <a:latin typeface="Calibri"/>
+              </a:rPr>
+              <a:t>●   </a:t>
+            </a:r>
+            <a:r>
+              <a:rPr sz="1500" b="1" i="0">
+                <a:solidFill>
+                  <a:srgbClr val="2B2B2B"/>
+                </a:solidFill>
+                <a:latin typeface="Calibri"/>
+              </a:rPr>
+              <a:t>Tres compromisos</a:t>
+            </a:r>
+            <a:r>
+              <a:rPr sz="1500" b="0" i="0">
+                <a:solidFill>
+                  <a:srgbClr val="2B2B2B"/>
+                </a:solidFill>
+                <a:latin typeface="Calibri"/>
+              </a:rPr>
+              <a:t> concretos suyos para las próximas dos semanas.</a:t>
+            </a:r>
+          </a:p>
+          <a:p>
+            <a:pPr>
+              <a:spcAft>
+                <a:spcPts val="1000"/>
+              </a:spcAft>
+            </a:pPr>
+            <a:r>
+              <a:rPr sz="1600" b="0" i="0">
+                <a:solidFill>
+                  <a:srgbClr val="2B2B2B"/>
+                </a:solidFill>
+                <a:latin typeface="Calibri"/>
+              </a:rPr>
+              <a:t>–   </a:t>
+            </a:r>
+            <a:r>
+              <a:rPr sz="1600" b="1" i="0">
+                <a:solidFill>
+                  <a:srgbClr val="2B2B2B"/>
+                </a:solidFill>
+                <a:latin typeface="Calibri"/>
+              </a:rPr>
+              <a:t>Súbalo a CDigital antes de la Sesión 02</a:t>
+            </a:r>
+            <a:r>
+              <a:rPr sz="1600" b="0" i="0">
+                <a:solidFill>
+                  <a:srgbClr val="2B2B2B"/>
+                </a:solidFill>
+                <a:latin typeface="Calibri"/>
+              </a:rPr>
+              <a:t> y </a:t>
+            </a:r>
+            <a:r>
+              <a:rPr sz="1600" b="1" i="0">
+                <a:solidFill>
+                  <a:srgbClr val="2B2B2B"/>
+                </a:solidFill>
+                <a:latin typeface="Calibri"/>
+              </a:rPr>
+              <a:t>abra el enunciado de la ACA 1</a:t>
+            </a:r>
+            <a:r>
+              <a:rPr sz="1600" b="0" i="0">
+                <a:solidFill>
+                  <a:srgbClr val="2B2B2B"/>
+                </a:solidFill>
+                <a:latin typeface="Calibri"/>
+              </a:rPr>
+              <a:t> en `Clases/Recursos/ACAs/`.</a:t>
+            </a:r>
+          </a:p>
+        </p:txBody>
+      </p:sp>
+      <p:sp>
+        <p:nvSpPr>
+          <p:cNvPr id="5" name="TextBox 4"/>
+          <p:cNvSpPr txBox="1"/>
+          <p:nvPr/>
+        </p:nvSpPr>
+        <p:spPr>
+          <a:xfrm>
+            <a:off x="2194560" y="6446520"/>
+            <a:ext cx="5943600" cy="274320"/>
+          </a:xfrm>
+          <a:prstGeom prst="rect">
+            <a:avLst/>
+          </a:prstGeom>
+          <a:noFill/>
+        </p:spPr>
+        <p:txBody>
+          <a:bodyPr wrap="square" anchor="t" lIns="0" rIns="0" tIns="0" bIns="0">
+            <a:spAutoFit/>
+          </a:bodyPr>
+          <a:lstStyle/>
+          <a:p>
+            <a:pPr algn="l"/>
+            <a:r>
+              <a:rPr sz="1000" b="1" i="0">
+                <a:solidFill>
+                  <a:srgbClr val="8F989D"/>
+                </a:solidFill>
+                <a:latin typeface="Calibri"/>
+              </a:rPr>
+              <a:t>Inicio 5:10 pm</a:t>
+            </a:r>
+          </a:p>
+        </p:txBody>
+      </p:sp>
+      <p:sp>
+        <p:nvSpPr>
+          <p:cNvPr id="6" name="TextBox 5"/>
+          <p:cNvSpPr txBox="1"/>
+          <p:nvPr/>
+        </p:nvSpPr>
+        <p:spPr>
+          <a:xfrm>
+            <a:off x="11094415" y="6446520"/>
+            <a:ext cx="548640" cy="274320"/>
+          </a:xfrm>
+          <a:prstGeom prst="rect">
+            <a:avLst/>
+          </a:prstGeom>
+          <a:noFill/>
+        </p:spPr>
+        <p:txBody>
+          <a:bodyPr wrap="square" anchor="t" lIns="0" rIns="0" tIns="0" bIns="0">
+            <a:spAutoFit/>
+          </a:bodyPr>
+          <a:lstStyle/>
+          <a:p>
+            <a:pPr algn="r"/>
+            <a:r>
+              <a:rPr sz="1000" b="1" i="0">
+                <a:solidFill>
+                  <a:srgbClr val="8F989D"/>
+                </a:solidFill>
+                <a:latin typeface="Calibri"/>
+              </a:rPr>
+              <a:t>20</a:t>
+            </a:r>
+          </a:p>
+        </p:txBody>
+      </p:sp>
+      <p:sp>
+        <p:nvSpPr>
+          <p:cNvPr id="7" name="TextBox 6"/>
+          <p:cNvSpPr txBox="1"/>
+          <p:nvPr/>
+        </p:nvSpPr>
+        <p:spPr>
+          <a:xfrm>
+            <a:off x="640080" y="5943600"/>
+            <a:ext cx="9997135" cy="457200"/>
+          </a:xfrm>
+          <a:prstGeom prst="rect">
+            <a:avLst/>
+          </a:prstGeom>
+          <a:noFill/>
+        </p:spPr>
+        <p:txBody>
+          <a:bodyPr wrap="square" anchor="t" lIns="0" rIns="0" tIns="0" bIns="0">
+            <a:spAutoFit/>
+          </a:bodyPr>
+          <a:lstStyle/>
+          <a:p>
+            <a:r>
+              <a:rPr sz="1200" b="0" i="1">
+                <a:solidFill>
+                  <a:srgbClr val="2B2B2B"/>
+                </a:solidFill>
+                <a:latin typeface="Calibri"/>
+              </a:rPr>
+              <a:t>“A medias” e “inexistente” son respuestas honestas y válidas. Lo que no sirve es el “más o menos” sin nada escrito debajo.</a:t>
+            </a:r>
+          </a:p>
+        </p:txBody>
+      </p:sp>
+    </p:spTree>
+  </p:cSld>
+  <p:clrMapOvr>
+    <a:masterClrMapping/>
+  </p:clrMapOvr>
+</p:sld>
+</file>
+
+<file path=ppt/slides/slide21.xml><?xml version="1.0" encoding="utf-8"?>
+<p:sld xmlns:a="http://schemas.openxmlformats.org/drawingml/2006/main" xmlns:p="http://schemas.openxmlformats.org/presentationml/2006/main" xmlns:r="http://schemas.openxmlformats.org/officeDocument/2006/relationships">
+  <p:cSld>
+    <p:bg>
+      <p:bgPr>
+        <a:solidFill>
+          <a:srgbClr val="FFFFFF"/>
+        </a:solidFill>
+        <a:effectLst/>
+      </p:bgPr>
+    </p:bg>
+    <p:spTree>
+      <p:nvGrpSpPr>
+        <p:cNvPr id="1" name=""/>
+        <p:cNvGrpSpPr/>
+        <p:nvPr/>
+      </p:nvGrpSpPr>
+      <p:grpSpPr/>
+      <p:sp>
+        <p:nvSpPr>
+          <p:cNvPr id="2" name="Rectangle 1"/>
+          <p:cNvSpPr/>
+          <p:nvPr/>
+        </p:nvSpPr>
+        <p:spPr>
+          <a:xfrm>
+            <a:off x="0" y="0"/>
+            <a:ext cx="12191695" cy="1188720"/>
+          </a:xfrm>
+          <a:prstGeom prst="rect">
+            <a:avLst/>
+          </a:prstGeom>
+          <a:solidFill>
+            <a:srgbClr val="0C2340"/>
+          </a:solidFill>
+          <a:ln>
+            <a:noFill/>
+          </a:ln>
+          <a:effectLst/>
+        </p:spPr>
+        <p:style>
+          <a:lnRef idx="1">
+            <a:schemeClr val="accent1"/>
+          </a:lnRef>
+          <a:fillRef idx="3">
+            <a:schemeClr val="accent1"/>
+          </a:fillRef>
+          <a:effectRef idx="2">
+            <a:schemeClr val="accent1"/>
+          </a:effectRef>
+          <a:fontRef idx="minor">
+            <a:schemeClr val="lt1"/>
+          </a:fontRef>
+        </p:style>
+        <p:txBody>
+          <a:bodyPr rtlCol="0" anchor="ctr"/>
+          <a:lstStyle/>
+          <a:p>
+            <a:pPr algn="ctr"/>
+          </a:p>
+        </p:txBody>
+      </p:sp>
+      <p:sp>
+        <p:nvSpPr>
+          <p:cNvPr id="3" name="TextBox 2"/>
+          <p:cNvSpPr txBox="1"/>
+          <p:nvPr/>
+        </p:nvSpPr>
+        <p:spPr>
+          <a:xfrm>
+            <a:off x="640080" y="0"/>
+            <a:ext cx="9082735" cy="1188720"/>
+          </a:xfrm>
+          <a:prstGeom prst="rect">
+            <a:avLst/>
+          </a:prstGeom>
+          <a:noFill/>
+        </p:spPr>
+        <p:txBody>
+          <a:bodyPr wrap="square" anchor="ctr" lIns="0" rIns="0" tIns="0" bIns="0">
+            <a:spAutoFit/>
+          </a:bodyPr>
+          <a:lstStyle/>
+          <a:p>
+            <a:pPr algn="ctr"/>
+            <a:r>
+              <a:rPr sz="2600" b="1" i="0">
+                <a:solidFill>
+                  <a:srgbClr val="FFFFFF"/>
+                </a:solidFill>
+                <a:latin typeface="Calibri"/>
+              </a:rPr>
+              <a:t>ACUERDOS DE TRABAJO</a:t>
+            </a:r>
+          </a:p>
+        </p:txBody>
+      </p:sp>
+      <p:sp>
+        <p:nvSpPr>
+          <p:cNvPr id="4" name="Rounded Rectangle 3"/>
+          <p:cNvSpPr/>
+          <p:nvPr/>
+        </p:nvSpPr>
+        <p:spPr>
+          <a:xfrm>
+            <a:off x="640080" y="1737360"/>
+            <a:ext cx="10911535" cy="713232"/>
+          </a:xfrm>
+          <a:prstGeom prst="roundRect">
+            <a:avLst/>
+          </a:prstGeom>
+          <a:solidFill>
+            <a:srgbClr val="E8F5EC"/>
+          </a:solidFill>
+          <a:ln>
+            <a:noFill/>
+          </a:ln>
+          <a:effectLst/>
+        </p:spPr>
+        <p:style>
+          <a:lnRef idx="1">
+            <a:schemeClr val="accent1"/>
+          </a:lnRef>
+          <a:fillRef idx="3">
+            <a:schemeClr val="accent1"/>
+          </a:fillRef>
+          <a:effectRef idx="2">
+            <a:schemeClr val="accent1"/>
+          </a:effectRef>
+          <a:fontRef idx="minor">
+            <a:schemeClr val="lt1"/>
+          </a:fontRef>
+        </p:style>
+        <p:txBody>
+          <a:bodyPr rtlCol="0" anchor="ctr"/>
+          <a:lstStyle/>
+          <a:p>
+            <a:pPr algn="ctr"/>
+          </a:p>
+        </p:txBody>
+      </p:sp>
+      <p:sp>
+        <p:nvSpPr>
+          <p:cNvPr id="5" name="TextBox 4"/>
+          <p:cNvSpPr txBox="1"/>
+          <p:nvPr/>
+        </p:nvSpPr>
+        <p:spPr>
+          <a:xfrm>
+            <a:off x="868680" y="1847088"/>
+            <a:ext cx="10454335" cy="493776"/>
+          </a:xfrm>
+          <a:prstGeom prst="rect">
+            <a:avLst/>
+          </a:prstGeom>
+          <a:noFill/>
+        </p:spPr>
+        <p:txBody>
+          <a:bodyPr wrap="square" anchor="t" lIns="0" rIns="0" tIns="0" bIns="0">
+            <a:spAutoFit/>
+          </a:bodyPr>
+          <a:lstStyle/>
+          <a:p>
+            <a:r>
+              <a:rPr sz="1300" b="1" i="0">
+                <a:solidFill>
+                  <a:srgbClr val="0C2340"/>
+                </a:solidFill>
+                <a:latin typeface="Calibri"/>
+              </a:rPr>
+              <a:t>ℹ️ Nota institucional</a:t>
+            </a:r>
+          </a:p>
+          <a:p>
+            <a:pPr>
+              <a:spcBef>
+                <a:spcPts val="400"/>
+              </a:spcBef>
+            </a:pPr>
+            <a:r>
+              <a:rPr sz="1300" b="1" i="0">
+                <a:solidFill>
+                  <a:srgbClr val="2B2B2B"/>
+                </a:solidFill>
+                <a:latin typeface="Calibri"/>
+              </a:rPr>
+              <a:t>Entrega oficial: CDigital.</a:t>
+            </a:r>
+            <a:r>
+              <a:rPr sz="1300" b="0" i="0">
+                <a:solidFill>
+                  <a:srgbClr val="2B2B2B"/>
+                </a:solidFill>
+                <a:latin typeface="Calibri"/>
+              </a:rPr>
+              <a:t> Lo que no esté ahí, no está entregado.</a:t>
+            </a:r>
+          </a:p>
+        </p:txBody>
+      </p:sp>
+      <p:sp>
+        <p:nvSpPr>
+          <p:cNvPr id="6" name="Rounded Rectangle 5"/>
+          <p:cNvSpPr/>
+          <p:nvPr/>
+        </p:nvSpPr>
+        <p:spPr>
+          <a:xfrm>
+            <a:off x="640080" y="2679191"/>
+            <a:ext cx="10911535" cy="713232"/>
+          </a:xfrm>
+          <a:prstGeom prst="roundRect">
+            <a:avLst/>
+          </a:prstGeom>
+          <a:solidFill>
+            <a:srgbClr val="FDECD8"/>
+          </a:solidFill>
+          <a:ln>
+            <a:noFill/>
+          </a:ln>
+          <a:effectLst/>
+        </p:spPr>
+        <p:style>
+          <a:lnRef idx="1">
+            <a:schemeClr val="accent1"/>
+          </a:lnRef>
+          <a:fillRef idx="3">
+            <a:schemeClr val="accent1"/>
+          </a:fillRef>
+          <a:effectRef idx="2">
+            <a:schemeClr val="accent1"/>
+          </a:effectRef>
+          <a:fontRef idx="minor">
+            <a:schemeClr val="lt1"/>
+          </a:fontRef>
+        </p:style>
+        <p:txBody>
+          <a:bodyPr rtlCol="0" anchor="ctr"/>
+          <a:lstStyle/>
+          <a:p>
+            <a:pPr algn="ctr"/>
+          </a:p>
+        </p:txBody>
+      </p:sp>
+      <p:sp>
+        <p:nvSpPr>
+          <p:cNvPr id="7" name="TextBox 6"/>
+          <p:cNvSpPr txBox="1"/>
+          <p:nvPr/>
+        </p:nvSpPr>
+        <p:spPr>
+          <a:xfrm>
+            <a:off x="868680" y="2788920"/>
+            <a:ext cx="10454335" cy="493776"/>
+          </a:xfrm>
+          <a:prstGeom prst="rect">
+            <a:avLst/>
+          </a:prstGeom>
+          <a:noFill/>
+        </p:spPr>
+        <p:txBody>
+          <a:bodyPr wrap="square" anchor="t" lIns="0" rIns="0" tIns="0" bIns="0">
+            <a:spAutoFit/>
+          </a:bodyPr>
+          <a:lstStyle/>
+          <a:p>
+            <a:r>
+              <a:rPr sz="1300" b="1" i="0">
+                <a:solidFill>
+                  <a:srgbClr val="0C2340"/>
+                </a:solidFill>
+                <a:latin typeface="Calibri"/>
+              </a:rPr>
+              <a:t>💡 Aclaración</a:t>
+            </a:r>
+          </a:p>
+          <a:p>
+            <a:pPr>
+              <a:spcBef>
+                <a:spcPts val="400"/>
+              </a:spcBef>
+            </a:pPr>
+            <a:r>
+              <a:rPr sz="1300" b="0" i="0">
+                <a:solidFill>
+                  <a:srgbClr val="2B2B2B"/>
+                </a:solidFill>
+                <a:latin typeface="Calibri"/>
+              </a:rPr>
+              <a:t>Traer el avance </a:t>
+            </a:r>
+            <a:r>
+              <a:rPr sz="1300" b="1" i="0">
+                <a:solidFill>
+                  <a:srgbClr val="2B2B2B"/>
+                </a:solidFill>
+                <a:latin typeface="Calibri"/>
+              </a:rPr>
+              <a:t>escrito</a:t>
+            </a:r>
+            <a:r>
+              <a:rPr sz="1300" b="0" i="0">
+                <a:solidFill>
+                  <a:srgbClr val="2B2B2B"/>
+                </a:solidFill>
+                <a:latin typeface="Calibri"/>
+              </a:rPr>
+              <a:t> a cada encuentro: se trabaja sobre lo que ya existe.</a:t>
+            </a:r>
+          </a:p>
+        </p:txBody>
+      </p:sp>
+      <p:sp>
+        <p:nvSpPr>
+          <p:cNvPr id="8" name="Rounded Rectangle 7"/>
+          <p:cNvSpPr/>
+          <p:nvPr/>
+        </p:nvSpPr>
+        <p:spPr>
+          <a:xfrm>
+            <a:off x="640080" y="3621024"/>
+            <a:ext cx="10911535" cy="713232"/>
+          </a:xfrm>
+          <a:prstGeom prst="roundRect">
+            <a:avLst/>
+          </a:prstGeom>
+          <a:solidFill>
+            <a:srgbClr val="FBE4E4"/>
+          </a:solidFill>
+          <a:ln>
+            <a:noFill/>
+          </a:ln>
+          <a:effectLst/>
+        </p:spPr>
+        <p:style>
+          <a:lnRef idx="1">
+            <a:schemeClr val="accent1"/>
+          </a:lnRef>
+          <a:fillRef idx="3">
+            <a:schemeClr val="accent1"/>
+          </a:fillRef>
+          <a:effectRef idx="2">
+            <a:schemeClr val="accent1"/>
+          </a:effectRef>
+          <a:fontRef idx="minor">
+            <a:schemeClr val="lt1"/>
+          </a:fontRef>
+        </p:style>
+        <p:txBody>
+          <a:bodyPr rtlCol="0" anchor="ctr"/>
+          <a:lstStyle/>
+          <a:p>
+            <a:pPr algn="ctr"/>
+          </a:p>
+        </p:txBody>
+      </p:sp>
+      <p:sp>
+        <p:nvSpPr>
+          <p:cNvPr id="9" name="TextBox 8"/>
+          <p:cNvSpPr txBox="1"/>
+          <p:nvPr/>
+        </p:nvSpPr>
+        <p:spPr>
+          <a:xfrm>
+            <a:off x="868680" y="3730752"/>
+            <a:ext cx="10454335" cy="493776"/>
+          </a:xfrm>
+          <a:prstGeom prst="rect">
+            <a:avLst/>
+          </a:prstGeom>
+          <a:noFill/>
+        </p:spPr>
+        <p:txBody>
+          <a:bodyPr wrap="square" anchor="t" lIns="0" rIns="0" tIns="0" bIns="0">
+            <a:spAutoFit/>
+          </a:bodyPr>
+          <a:lstStyle/>
+          <a:p>
+            <a:r>
+              <a:rPr sz="1300" b="1" i="0">
+                <a:solidFill>
+                  <a:srgbClr val="0C2340"/>
+                </a:solidFill>
+                <a:latin typeface="Calibri"/>
+              </a:rPr>
+              <a:t>⚠️ Importante</a:t>
+            </a:r>
+          </a:p>
+          <a:p>
+            <a:pPr>
+              <a:spcBef>
+                <a:spcPts val="400"/>
+              </a:spcBef>
+            </a:pPr>
+            <a:r>
+              <a:rPr sz="1300" b="0" i="0">
+                <a:solidFill>
+                  <a:srgbClr val="2B2B2B"/>
+                </a:solidFill>
+                <a:latin typeface="Calibri"/>
+              </a:rPr>
+              <a:t>Integridad académica: citar siempre en </a:t>
+            </a:r>
+            <a:r>
+              <a:rPr sz="1300" b="1" i="0">
+                <a:solidFill>
+                  <a:srgbClr val="2B2B2B"/>
+                </a:solidFill>
+                <a:latin typeface="Calibri"/>
+              </a:rPr>
+              <a:t>APA 7</a:t>
+            </a:r>
+            <a:r>
+              <a:rPr sz="1300" b="0" i="0">
+                <a:solidFill>
+                  <a:srgbClr val="2B2B2B"/>
+                </a:solidFill>
+                <a:latin typeface="Calibri"/>
+              </a:rPr>
+              <a:t>. El plagio tiene debido proceso.</a:t>
+            </a:r>
+          </a:p>
+        </p:txBody>
+      </p:sp>
+      <p:sp>
+        <p:nvSpPr>
+          <p:cNvPr id="10" name="TextBox 9"/>
+          <p:cNvSpPr txBox="1"/>
+          <p:nvPr/>
+        </p:nvSpPr>
+        <p:spPr>
+          <a:xfrm>
+            <a:off x="2194560" y="6446520"/>
+            <a:ext cx="5943600" cy="274320"/>
+          </a:xfrm>
+          <a:prstGeom prst="rect">
+            <a:avLst/>
+          </a:prstGeom>
+          <a:noFill/>
+        </p:spPr>
+        <p:txBody>
+          <a:bodyPr wrap="square" anchor="t" lIns="0" rIns="0" tIns="0" bIns="0">
+            <a:spAutoFit/>
+          </a:bodyPr>
+          <a:lstStyle/>
+          <a:p>
+            <a:pPr algn="l"/>
+            <a:r>
+              <a:rPr sz="1000" b="1" i="0">
+                <a:solidFill>
+                  <a:srgbClr val="8F989D"/>
+                </a:solidFill>
+                <a:latin typeface="Calibri"/>
+              </a:rPr>
+              <a:t>Inicio 5:10 pm</a:t>
+            </a:r>
+          </a:p>
+        </p:txBody>
+      </p:sp>
+      <p:sp>
+        <p:nvSpPr>
+          <p:cNvPr id="11" name="TextBox 10"/>
+          <p:cNvSpPr txBox="1"/>
+          <p:nvPr/>
+        </p:nvSpPr>
+        <p:spPr>
+          <a:xfrm>
+            <a:off x="11094415" y="6446520"/>
+            <a:ext cx="548640" cy="274320"/>
+          </a:xfrm>
+          <a:prstGeom prst="rect">
+            <a:avLst/>
+          </a:prstGeom>
+          <a:noFill/>
+        </p:spPr>
+        <p:txBody>
+          <a:bodyPr wrap="square" anchor="t" lIns="0" rIns="0" tIns="0" bIns="0">
+            <a:spAutoFit/>
+          </a:bodyPr>
+          <a:lstStyle/>
+          <a:p>
+            <a:pPr algn="r"/>
+            <a:r>
+              <a:rPr sz="1000" b="1" i="0">
+                <a:solidFill>
+                  <a:srgbClr val="8F989D"/>
+                </a:solidFill>
+                <a:latin typeface="Calibri"/>
+              </a:rPr>
+              <a:t>21</a:t>
+            </a:r>
+          </a:p>
+        </p:txBody>
+      </p:sp>
+    </p:spTree>
+  </p:cSld>
+  <p:clrMapOvr>
+    <a:masterClrMapping/>
+  </p:clrMapOvr>
+</p:sld>
+</file>
+
+<file path=ppt/slides/slide22.xml><?xml version="1.0" encoding="utf-8"?>
+<p:sld xmlns:a="http://schemas.openxmlformats.org/drawingml/2006/main" xmlns:p="http://schemas.openxmlformats.org/presentationml/2006/main" xmlns:r="http://schemas.openxmlformats.org/officeDocument/2006/relationships">
+  <p:cSld>
+    <p:bg>
+      <p:bgPr>
+        <a:solidFill>
+          <a:srgbClr val="FFFFFF"/>
+        </a:solidFill>
+        <a:effectLst/>
+      </p:bgPr>
+    </p:bg>
+    <p:spTree>
+      <p:nvGrpSpPr>
+        <p:cNvPr id="1" name=""/>
+        <p:cNvGrpSpPr/>
+        <p:nvPr/>
+      </p:nvGrpSpPr>
+      <p:grpSpPr/>
+      <p:sp>
+        <p:nvSpPr>
+          <p:cNvPr id="2" name="Rectangle 1"/>
+          <p:cNvSpPr/>
+          <p:nvPr/>
+        </p:nvSpPr>
+        <p:spPr>
+          <a:xfrm>
+            <a:off x="0" y="0"/>
+            <a:ext cx="12191695" cy="1188720"/>
+          </a:xfrm>
+          <a:prstGeom prst="rect">
+            <a:avLst/>
+          </a:prstGeom>
+          <a:solidFill>
+            <a:srgbClr val="0C2340"/>
+          </a:solidFill>
+          <a:ln>
+            <a:noFill/>
+          </a:ln>
+          <a:effectLst/>
+        </p:spPr>
+        <p:style>
+          <a:lnRef idx="1">
+            <a:schemeClr val="accent1"/>
+          </a:lnRef>
+          <a:fillRef idx="3">
+            <a:schemeClr val="accent1"/>
+          </a:fillRef>
+          <a:effectRef idx="2">
+            <a:schemeClr val="accent1"/>
+          </a:effectRef>
+          <a:fontRef idx="minor">
+            <a:schemeClr val="lt1"/>
+          </a:fontRef>
+        </p:style>
+        <p:txBody>
+          <a:bodyPr rtlCol="0" anchor="ctr"/>
+          <a:lstStyle/>
+          <a:p>
+            <a:pPr algn="ctr"/>
+          </a:p>
+        </p:txBody>
+      </p:sp>
+      <p:sp>
+        <p:nvSpPr>
+          <p:cNvPr id="3" name="TextBox 2"/>
+          <p:cNvSpPr txBox="1"/>
+          <p:nvPr/>
+        </p:nvSpPr>
+        <p:spPr>
+          <a:xfrm>
+            <a:off x="640080" y="0"/>
+            <a:ext cx="9082735" cy="1188720"/>
+          </a:xfrm>
+          <a:prstGeom prst="rect">
+            <a:avLst/>
+          </a:prstGeom>
+          <a:noFill/>
+        </p:spPr>
+        <p:txBody>
+          <a:bodyPr wrap="square" anchor="ctr" lIns="0" rIns="0" tIns="0" bIns="0">
+            <a:spAutoFit/>
+          </a:bodyPr>
+          <a:lstStyle/>
+          <a:p>
+            <a:pPr algn="ctr"/>
+            <a:r>
+              <a:rPr sz="2600" b="1" i="0">
+                <a:solidFill>
+                  <a:srgbClr val="FFFFFF"/>
+                </a:solidFill>
+                <a:latin typeface="Calibri"/>
+              </a:rPr>
+              <a:t>PARA LA PRÓXIMA SESIÓN</a:t>
+            </a:r>
+          </a:p>
+        </p:txBody>
+      </p:sp>
+      <p:sp>
+        <p:nvSpPr>
+          <p:cNvPr id="4" name="TextBox 3"/>
+          <p:cNvSpPr txBox="1"/>
+          <p:nvPr/>
+        </p:nvSpPr>
+        <p:spPr>
+          <a:xfrm>
+            <a:off x="640080" y="1691639"/>
+            <a:ext cx="10911535" cy="4617720"/>
+          </a:xfrm>
+          <a:prstGeom prst="rect">
+            <a:avLst/>
+          </a:prstGeom>
+          <a:noFill/>
+        </p:spPr>
+        <p:txBody>
+          <a:bodyPr wrap="square" anchor="t" lIns="0" rIns="0" tIns="0" bIns="0">
+            <a:spAutoFit/>
+          </a:bodyPr>
+          <a:lstStyle/>
+          <a:p>
+            <a:pPr>
+              <a:spcAft>
+                <a:spcPts val="1000"/>
+              </a:spcAft>
+            </a:pPr>
+            <a:r>
+              <a:rPr sz="1600" b="0" i="0">
+                <a:solidFill>
+                  <a:srgbClr val="2B2B2B"/>
+                </a:solidFill>
+                <a:latin typeface="Calibri"/>
+              </a:rPr>
+              <a:t>–   </a:t>
+            </a:r>
+            <a:r>
+              <a:rPr sz="1600" b="1" i="0">
+                <a:solidFill>
+                  <a:srgbClr val="2B2B2B"/>
+                </a:solidFill>
+                <a:latin typeface="Calibri"/>
+              </a:rPr>
+              <a:t>Lectura autónoma:</a:t>
+            </a:r>
+            <a:r>
+              <a:rPr sz="1600" b="0" i="0">
+                <a:solidFill>
+                  <a:srgbClr val="2B2B2B"/>
+                </a:solidFill>
+                <a:latin typeface="Calibri"/>
+              </a:rPr>
+              <a:t> Delimitación / reformulación del tema — la retomamos al abrir la Sesión 02.</a:t>
+            </a:r>
+          </a:p>
+          <a:p>
+            <a:pPr>
+              <a:spcAft>
+                <a:spcPts val="1000"/>
+              </a:spcAft>
+            </a:pPr>
+            <a:r>
+              <a:rPr sz="1600" b="0" i="0">
+                <a:solidFill>
+                  <a:srgbClr val="2B2B2B"/>
+                </a:solidFill>
+                <a:latin typeface="Calibri"/>
+              </a:rPr>
+              <a:t>–   Revisar la </a:t>
+            </a:r>
+            <a:r>
+              <a:rPr sz="1600" b="1" i="0">
+                <a:solidFill>
+                  <a:srgbClr val="2B2B2B"/>
+                </a:solidFill>
+                <a:latin typeface="Calibri"/>
+              </a:rPr>
+              <a:t>Presentación del Curso</a:t>
+            </a:r>
+            <a:r>
+              <a:rPr sz="1600" b="0" i="0">
+                <a:solidFill>
+                  <a:srgbClr val="2B2B2B"/>
+                </a:solidFill>
+                <a:latin typeface="Calibri"/>
+              </a:rPr>
+              <a:t> completa (fechas, evaluación, contenido de todas las sesiones).</a:t>
+            </a:r>
+          </a:p>
+          <a:p>
+            <a:pPr>
+              <a:spcAft>
+                <a:spcPts val="1000"/>
+              </a:spcAft>
+            </a:pPr>
+            <a:r>
+              <a:rPr sz="1600" b="0" i="0">
+                <a:solidFill>
+                  <a:srgbClr val="2B2B2B"/>
+                </a:solidFill>
+                <a:latin typeface="Calibri"/>
+              </a:rPr>
+              <a:t>–   Abrir el enunciado de la </a:t>
+            </a:r>
+            <a:r>
+              <a:rPr sz="1600" b="1" i="0">
+                <a:solidFill>
+                  <a:srgbClr val="2B2B2B"/>
+                </a:solidFill>
+                <a:latin typeface="Calibri"/>
+              </a:rPr>
+              <a:t>ACA 1</a:t>
+            </a:r>
+            <a:r>
+              <a:rPr sz="1600" b="0" i="0">
+                <a:solidFill>
+                  <a:srgbClr val="2B2B2B"/>
+                </a:solidFill>
+                <a:latin typeface="Calibri"/>
+              </a:rPr>
+              <a:t> en `Clases/Recursos/ACAs/` y leerlo entero.</a:t>
+            </a:r>
+          </a:p>
+        </p:txBody>
+      </p:sp>
+      <p:sp>
+        <p:nvSpPr>
+          <p:cNvPr id="5" name="TextBox 4"/>
+          <p:cNvSpPr txBox="1"/>
+          <p:nvPr/>
+        </p:nvSpPr>
+        <p:spPr>
+          <a:xfrm>
+            <a:off x="2194560" y="6446520"/>
+            <a:ext cx="5943600" cy="274320"/>
+          </a:xfrm>
+          <a:prstGeom prst="rect">
+            <a:avLst/>
+          </a:prstGeom>
+          <a:noFill/>
+        </p:spPr>
+        <p:txBody>
+          <a:bodyPr wrap="square" anchor="t" lIns="0" rIns="0" tIns="0" bIns="0">
+            <a:spAutoFit/>
+          </a:bodyPr>
+          <a:lstStyle/>
+          <a:p>
+            <a:pPr algn="l"/>
+            <a:r>
+              <a:rPr sz="1000" b="1" i="0">
+                <a:solidFill>
+                  <a:srgbClr val="8F989D"/>
+                </a:solidFill>
+                <a:latin typeface="Calibri"/>
+              </a:rPr>
+              <a:t>Inicio 5:10 pm</a:t>
+            </a:r>
+          </a:p>
+        </p:txBody>
+      </p:sp>
+      <p:sp>
+        <p:nvSpPr>
+          <p:cNvPr id="6" name="TextBox 5"/>
+          <p:cNvSpPr txBox="1"/>
+          <p:nvPr/>
+        </p:nvSpPr>
+        <p:spPr>
+          <a:xfrm>
+            <a:off x="11094415" y="6446520"/>
+            <a:ext cx="548640" cy="274320"/>
+          </a:xfrm>
+          <a:prstGeom prst="rect">
+            <a:avLst/>
+          </a:prstGeom>
+          <a:noFill/>
+        </p:spPr>
+        <p:txBody>
+          <a:bodyPr wrap="square" anchor="t" lIns="0" rIns="0" tIns="0" bIns="0">
+            <a:spAutoFit/>
+          </a:bodyPr>
+          <a:lstStyle/>
+          <a:p>
+            <a:pPr algn="r"/>
+            <a:r>
+              <a:rPr sz="1000" b="1" i="0">
+                <a:solidFill>
+                  <a:srgbClr val="8F989D"/>
+                </a:solidFill>
+                <a:latin typeface="Calibri"/>
+              </a:rPr>
+              <a:t>22</a:t>
+            </a:r>
+          </a:p>
+        </p:txBody>
+      </p:sp>
+    </p:spTree>
+  </p:cSld>
+  <p:clrMapOvr>
+    <a:masterClrMapping/>
+  </p:clrMapOvr>
+</p:sld>
+</file>
+
+<file path=ppt/slides/slide23.xml><?xml version="1.0" encoding="utf-8"?>
+<p:sld xmlns:a="http://schemas.openxmlformats.org/drawingml/2006/main" xmlns:p="http://schemas.openxmlformats.org/presentationml/2006/main" xmlns:r="http://schemas.openxmlformats.org/officeDocument/2006/relationships">
+  <p:cSld>
+    <p:bg>
+      <p:bgPr>
+        <a:solidFill>
+          <a:srgbClr val="FFFFFF"/>
+        </a:solidFill>
+        <a:effectLst/>
+      </p:bgPr>
+    </p:bg>
+    <p:spTree>
+      <p:nvGrpSpPr>
+        <p:cNvPr id="1" name=""/>
+        <p:cNvGrpSpPr/>
+        <p:nvPr/>
+      </p:nvGrpSpPr>
+      <p:grpSpPr/>
+      <p:sp>
+        <p:nvSpPr>
+          <p:cNvPr id="2" name="Rectangle 1"/>
+          <p:cNvSpPr/>
+          <p:nvPr/>
+        </p:nvSpPr>
+        <p:spPr>
+          <a:xfrm>
+            <a:off x="0" y="0"/>
+            <a:ext cx="12191695" cy="164592"/>
+          </a:xfrm>
+          <a:prstGeom prst="rect">
+            <a:avLst/>
+          </a:prstGeom>
+          <a:solidFill>
+            <a:srgbClr val="007433"/>
+          </a:solidFill>
+          <a:ln>
+            <a:noFill/>
+          </a:ln>
+          <a:effectLst/>
+        </p:spPr>
+        <p:style>
+          <a:lnRef idx="1">
+            <a:schemeClr val="accent1"/>
+          </a:lnRef>
+          <a:fillRef idx="3">
+            <a:schemeClr val="accent1"/>
+          </a:fillRef>
+          <a:effectRef idx="2">
+            <a:schemeClr val="accent1"/>
+          </a:effectRef>
+          <a:fontRef idx="minor">
+            <a:schemeClr val="lt1"/>
+          </a:fontRef>
+        </p:style>
+        <p:txBody>
+          <a:bodyPr rtlCol="0" anchor="ctr"/>
+          <a:lstStyle/>
+          <a:p>
+            <a:pPr algn="ctr"/>
+          </a:p>
+        </p:txBody>
+      </p:sp>
+      <p:pic>
+        <p:nvPicPr>
+          <p:cNvPr id="3" name="Picture 2" descr="logo_cun_solo.png"/>
+          <p:cNvPicPr>
+            <a:picLocks noChangeAspect="1"/>
+          </p:cNvPicPr>
+          <p:nvPr/>
+        </p:nvPicPr>
+        <p:blipFill>
+          <a:blip r:embed="rId2"/>
+          <a:stretch>
+            <a:fillRect/>
+          </a:stretch>
+        </p:blipFill>
+        <p:spPr>
+          <a:xfrm>
+            <a:off x="10362895" y="5632704"/>
+            <a:ext cx="1371600" cy="950976"/>
+          </a:xfrm>
+          <a:prstGeom prst="rect">
+            <a:avLst/>
+          </a:prstGeom>
+        </p:spPr>
+      </p:pic>
+      <p:sp>
+        <p:nvSpPr>
+          <p:cNvPr id="4" name="TextBox 3"/>
+          <p:cNvSpPr txBox="1"/>
+          <p:nvPr/>
+        </p:nvSpPr>
+        <p:spPr>
+          <a:xfrm>
+            <a:off x="640080" y="1737360"/>
+            <a:ext cx="10911535" cy="1097280"/>
+          </a:xfrm>
+          <a:prstGeom prst="rect">
+            <a:avLst/>
+          </a:prstGeom>
+          <a:noFill/>
+        </p:spPr>
+        <p:txBody>
+          <a:bodyPr wrap="square" anchor="ctr" lIns="0" rIns="0" tIns="0" bIns="0">
+            <a:spAutoFit/>
+          </a:bodyPr>
+          <a:lstStyle/>
+          <a:p>
+            <a:pPr algn="ctr"/>
+            <a:r>
+              <a:rPr sz="3400" b="1" i="0">
+                <a:solidFill>
+                  <a:srgbClr val="0C2340"/>
+                </a:solidFill>
+                <a:latin typeface="Calibri"/>
+              </a:rPr>
+              <a:t>Cierre — Sesión 01</a:t>
+            </a:r>
+          </a:p>
+        </p:txBody>
+      </p:sp>
+      <p:sp>
+        <p:nvSpPr>
+          <p:cNvPr id="5" name="TextBox 4"/>
+          <p:cNvSpPr txBox="1"/>
+          <p:nvPr/>
+        </p:nvSpPr>
+        <p:spPr>
+          <a:xfrm>
+            <a:off x="640080" y="3017520"/>
+            <a:ext cx="10911535" cy="1645920"/>
+          </a:xfrm>
+          <a:prstGeom prst="rect">
+            <a:avLst/>
+          </a:prstGeom>
+          <a:noFill/>
+        </p:spPr>
+        <p:txBody>
+          <a:bodyPr wrap="square" anchor="t" lIns="0" rIns="0" tIns="0" bIns="0">
+            <a:spAutoFit/>
+          </a:bodyPr>
+          <a:lstStyle/>
+          <a:p>
+            <a:pPr algn="ctr">
+              <a:spcAft>
+                <a:spcPts val="600"/>
+              </a:spcAft>
+            </a:pPr>
+            <a:r>
+              <a:rPr sz="1600" b="0" i="0">
+                <a:solidFill>
+                  <a:srgbClr val="2B2B2B"/>
+                </a:solidFill>
+                <a:latin typeface="Calibri"/>
+              </a:rPr>
+              <a:t>Ya sabemos qué haremos, cómo se evalúa y quién es quién.</a:t>
+            </a:r>
+          </a:p>
+          <a:p>
+            <a:pPr algn="ctr">
+              <a:spcAft>
+                <a:spcPts val="600"/>
+              </a:spcAft>
+            </a:pPr>
+            <a:r>
+              <a:rPr sz="1600" b="1" i="0">
+                <a:solidFill>
+                  <a:srgbClr val="2B2B2B"/>
+                </a:solidFill>
+                <a:latin typeface="Calibri"/>
+              </a:rPr>
+              <a:t>Sesión 02:</a:t>
+            </a:r>
+            <a:r>
+              <a:rPr sz="1600" b="0" i="0">
+                <a:solidFill>
+                  <a:srgbClr val="2B2B2B"/>
+                </a:solidFill>
+                <a:latin typeface="Calibri"/>
+              </a:rPr>
+              <a:t> arranca el contenido del curso.</a:t>
+            </a:r>
+          </a:p>
+        </p:txBody>
+      </p:sp>
+      <p:sp>
+        <p:nvSpPr>
+          <p:cNvPr id="6" name="TextBox 5"/>
+          <p:cNvSpPr txBox="1"/>
+          <p:nvPr/>
+        </p:nvSpPr>
+        <p:spPr>
+          <a:xfrm>
+            <a:off x="640080" y="4754880"/>
+            <a:ext cx="10911535" cy="640080"/>
+          </a:xfrm>
+          <a:prstGeom prst="rect">
+            <a:avLst/>
+          </a:prstGeom>
+          <a:noFill/>
+        </p:spPr>
+        <p:txBody>
+          <a:bodyPr wrap="square" anchor="t" lIns="0" rIns="0" tIns="0" bIns="0">
+            <a:spAutoFit/>
+          </a:bodyPr>
+          <a:lstStyle/>
+          <a:p>
+            <a:pPr algn="ctr"/>
+            <a:r>
+              <a:rPr sz="2000" b="1" i="0">
+                <a:solidFill>
+                  <a:srgbClr val="007433"/>
+                </a:solidFill>
+                <a:latin typeface="Calibri"/>
+              </a:rPr>
+              <a:t>TRABAJO DE GRADO 2</a:t>
+            </a:r>
+          </a:p>
+        </p:txBody>
+      </p:sp>
+      <p:sp>
+        <p:nvSpPr>
+          <p:cNvPr id="7" name="TextBox 6"/>
+          <p:cNvSpPr txBox="1"/>
+          <p:nvPr/>
+        </p:nvSpPr>
+        <p:spPr>
+          <a:xfrm>
+            <a:off x="2194560" y="6446520"/>
+            <a:ext cx="5943600" cy="274320"/>
+          </a:xfrm>
+          <a:prstGeom prst="rect">
+            <a:avLst/>
+          </a:prstGeom>
+          <a:noFill/>
+        </p:spPr>
+        <p:txBody>
+          <a:bodyPr wrap="square" anchor="t" lIns="0" rIns="0" tIns="0" bIns="0">
+            <a:spAutoFit/>
+          </a:bodyPr>
+          <a:lstStyle/>
+          <a:p>
+            <a:pPr algn="l"/>
+            <a:r>
+              <a:rPr sz="1000" b="1" i="0">
+                <a:solidFill>
+                  <a:srgbClr val="8F989D"/>
+                </a:solidFill>
+                <a:latin typeface="Calibri"/>
+              </a:rPr>
+              <a:t>Inicio 5:10 pm</a:t>
             </a:r>
           </a:p>
         </p:txBody>
@@ -5353,65 +12538,21 @@
                 </a:solidFill>
                 <a:latin typeface="Calibri"/>
               </a:rPr>
-              <a:t>ACUERDOS DE TRABAJO</a:t>
-            </a:r>
-          </a:p>
-        </p:txBody>
-      </p:sp>
-      <p:sp>
-        <p:nvSpPr>
-          <p:cNvPr id="4" name="Rounded Rectangle 3"/>
-          <p:cNvSpPr/>
-          <p:nvPr/>
-        </p:nvSpPr>
-        <p:spPr>
-          <a:xfrm>
-            <a:off x="640080" y="1737360"/>
-            <a:ext cx="10911535" cy="713232"/>
-          </a:xfrm>
-          <a:prstGeom prst="roundRect">
-            <a:avLst/>
-          </a:prstGeom>
-          <a:solidFill>
-            <a:srgbClr val="E8F5EC"/>
-          </a:solidFill>
-          <a:ln>
-            <a:noFill/>
-          </a:ln>
-          <a:effectLst/>
-        </p:spPr>
-        <p:style>
-          <a:lnRef idx="1">
-            <a:schemeClr val="accent1"/>
-          </a:lnRef>
-          <a:fillRef idx="3">
-            <a:schemeClr val="accent1"/>
-          </a:fillRef>
-          <a:effectRef idx="2">
-            <a:schemeClr val="accent1"/>
-          </a:effectRef>
-          <a:fontRef idx="minor">
-            <a:schemeClr val="lt1"/>
-          </a:fontRef>
-        </p:style>
-        <p:txBody>
-          <a:bodyPr rtlCol="0" anchor="ctr"/>
-          <a:lstStyle/>
-          <a:p>
-            <a:pPr algn="ctr"/>
-          </a:p>
-        </p:txBody>
-      </p:sp>
-      <p:sp>
-        <p:nvSpPr>
-          <p:cNvPr id="5" name="TextBox 4"/>
+              <a:t>Cómo trabajamos: TG2 es un taller de escritura, no una clase magistral</a:t>
+            </a:r>
+          </a:p>
+        </p:txBody>
+      </p:sp>
+      <p:sp>
+        <p:nvSpPr>
+          <p:cNvPr id="4" name="TextBox 3"/>
           <p:cNvSpPr txBox="1"/>
           <p:nvPr/>
         </p:nvSpPr>
         <p:spPr>
           <a:xfrm>
-            <a:off x="868680" y="1847088"/>
-            <a:ext cx="10454335" cy="493776"/>
+            <a:off x="640080" y="1691639"/>
+            <a:ext cx="10911535" cy="4617720"/>
           </a:xfrm>
           <a:prstGeom prst="rect">
             <a:avLst/>
@@ -5424,97 +12565,298 @@
           </a:bodyPr>
           <a:lstStyle/>
           <a:p>
-            <a:r>
-              <a:rPr sz="1300" b="1" i="0">
-                <a:solidFill>
-                  <a:srgbClr val="0C2340"/>
-                </a:solidFill>
-                <a:latin typeface="Calibri"/>
-              </a:rPr>
-              <a:t>ℹ️ Nota institucional</a:t>
-            </a:r>
-          </a:p>
-          <a:p>
             <a:pPr>
-              <a:spcBef>
-                <a:spcPts val="400"/>
-              </a:spcBef>
+              <a:spcAft>
+                <a:spcPts val="1000"/>
+              </a:spcAft>
             </a:pPr>
             <a:r>
-              <a:rPr sz="1300" b="1" i="0">
-                <a:solidFill>
-                  <a:srgbClr val="2B2B2B"/>
-                </a:solidFill>
-                <a:latin typeface="Calibri"/>
-              </a:rPr>
-              <a:t>Entrega oficial: CDigital.</a:t>
-            </a:r>
-            <a:r>
-              <a:rPr sz="1300" b="0" i="0">
-                <a:solidFill>
-                  <a:srgbClr val="2B2B2B"/>
-                </a:solidFill>
-                <a:latin typeface="Calibri"/>
-              </a:rPr>
-              <a:t> Lo que no esté ahí, no está entregado.</a:t>
-            </a:r>
-          </a:p>
-        </p:txBody>
-      </p:sp>
-      <p:sp>
-        <p:nvSpPr>
-          <p:cNvPr id="6" name="Rounded Rectangle 5"/>
-          <p:cNvSpPr/>
-          <p:nvPr/>
-        </p:nvSpPr>
-        <p:spPr>
-          <a:xfrm>
-            <a:off x="640080" y="2679191"/>
-            <a:ext cx="10911535" cy="713232"/>
-          </a:xfrm>
-          <a:prstGeom prst="roundRect">
-            <a:avLst/>
-          </a:prstGeom>
-          <a:solidFill>
-            <a:srgbClr val="FDECD8"/>
-          </a:solidFill>
-          <a:ln>
-            <a:noFill/>
-          </a:ln>
-          <a:effectLst/>
-        </p:spPr>
-        <p:style>
-          <a:lnRef idx="1">
-            <a:schemeClr val="accent1"/>
-          </a:lnRef>
-          <a:fillRef idx="3">
-            <a:schemeClr val="accent1"/>
-          </a:fillRef>
-          <a:effectRef idx="2">
-            <a:schemeClr val="accent1"/>
-          </a:effectRef>
-          <a:fontRef idx="minor">
-            <a:schemeClr val="lt1"/>
-          </a:fontRef>
-        </p:style>
-        <p:txBody>
-          <a:bodyPr rtlCol="0" anchor="ctr"/>
-          <a:lstStyle/>
-          <a:p>
-            <a:pPr algn="ctr"/>
-          </a:p>
-        </p:txBody>
-      </p:sp>
-      <p:sp>
-        <p:nvSpPr>
-          <p:cNvPr id="7" name="TextBox 6"/>
+              <a:rPr sz="1600" b="0" i="0">
+                <a:solidFill>
+                  <a:srgbClr val="2B2B2B"/>
+                </a:solidFill>
+                <a:latin typeface="Calibri"/>
+              </a:rPr>
+              <a:t>–   </a:t>
+            </a:r>
+            <a:r>
+              <a:rPr sz="1600" b="1" i="0">
+                <a:solidFill>
+                  <a:srgbClr val="2B2B2B"/>
+                </a:solidFill>
+                <a:latin typeface="Calibri"/>
+              </a:rPr>
+              <a:t>Una hora sincrónica por semana</a:t>
+            </a:r>
+            <a:r>
+              <a:rPr sz="1600" b="0" i="0">
+                <a:solidFill>
+                  <a:srgbClr val="2B2B2B"/>
+                </a:solidFill>
+                <a:latin typeface="Calibri"/>
+              </a:rPr>
+              <a:t> y once encuentros. Usted </a:t>
+            </a:r>
+            <a:r>
+              <a:rPr sz="1600" b="1" i="0">
+                <a:solidFill>
+                  <a:srgbClr val="2B2B2B"/>
+                </a:solidFill>
+                <a:latin typeface="Calibri"/>
+              </a:rPr>
+              <a:t>no empieza de cero</a:t>
+            </a:r>
+            <a:r>
+              <a:rPr sz="1600" b="0" i="0">
+                <a:solidFill>
+                  <a:srgbClr val="2B2B2B"/>
+                </a:solidFill>
+                <a:latin typeface="Calibri"/>
+              </a:rPr>
+              <a:t>: trae un proyecto y lo lleva a un avance consolidado.</a:t>
+            </a:r>
+          </a:p>
+          <a:p>
+            <a:pPr>
+              <a:spcAft>
+                <a:spcPts val="1000"/>
+              </a:spcAft>
+            </a:pPr>
+            <a:r>
+              <a:rPr sz="1600" b="0" i="0">
+                <a:solidFill>
+                  <a:srgbClr val="2B2B2B"/>
+                </a:solidFill>
+                <a:latin typeface="Calibri"/>
+              </a:rPr>
+              <a:t>–   </a:t>
+            </a:r>
+            <a:r>
+              <a:rPr sz="1600" b="1" i="0">
+                <a:solidFill>
+                  <a:srgbClr val="2B2B2B"/>
+                </a:solidFill>
+                <a:latin typeface="Calibri"/>
+              </a:rPr>
+              <a:t>Antes de cada encuentro:</a:t>
+            </a:r>
+            <a:r>
+              <a:rPr sz="1600" b="0" i="0">
+                <a:solidFill>
+                  <a:srgbClr val="2B2B2B"/>
+                </a:solidFill>
+                <a:latin typeface="Calibri"/>
+              </a:rPr>
+              <a:t> revisa en CDigital lo que el Docente deja y </a:t>
+            </a:r>
+            <a:r>
+              <a:rPr sz="1600" b="1" i="0">
+                <a:solidFill>
+                  <a:srgbClr val="2B2B2B"/>
+                </a:solidFill>
+                <a:latin typeface="Calibri"/>
+              </a:rPr>
+              <a:t>escribe algo</a:t>
+            </a:r>
+            <a:r>
+              <a:rPr sz="1600" b="0" i="0">
+                <a:solidFill>
+                  <a:srgbClr val="2B2B2B"/>
+                </a:solidFill>
+                <a:latin typeface="Calibri"/>
+              </a:rPr>
+              <a:t>, aunque sea imperfecto.</a:t>
+            </a:r>
+          </a:p>
+          <a:p>
+            <a:pPr>
+              <a:spcAft>
+                <a:spcPts val="1000"/>
+              </a:spcAft>
+            </a:pPr>
+            <a:r>
+              <a:rPr sz="1600" b="0" i="0">
+                <a:solidFill>
+                  <a:srgbClr val="2B2B2B"/>
+                </a:solidFill>
+                <a:latin typeface="Calibri"/>
+              </a:rPr>
+              <a:t>–   </a:t>
+            </a:r>
+            <a:r>
+              <a:rPr sz="1600" b="1" i="0">
+                <a:solidFill>
+                  <a:srgbClr val="2B2B2B"/>
+                </a:solidFill>
+                <a:latin typeface="Calibri"/>
+              </a:rPr>
+              <a:t>Durante el encuentro:</a:t>
+            </a:r>
+            <a:r>
+              <a:rPr sz="1600" b="0" i="0">
+                <a:solidFill>
+                  <a:srgbClr val="2B2B2B"/>
+                </a:solidFill>
+                <a:latin typeface="Calibri"/>
+              </a:rPr>
+              <a:t> 15 minutos de criterio y ejemplo, y el resto </a:t>
+            </a:r>
+            <a:r>
+              <a:rPr sz="1600" b="1" i="0">
+                <a:solidFill>
+                  <a:srgbClr val="2B2B2B"/>
+                </a:solidFill>
+                <a:latin typeface="Calibri"/>
+              </a:rPr>
+              <a:t>escribiendo o corrigiendo su propio documento</a:t>
+            </a:r>
+            <a:r>
+              <a:rPr sz="1600" b="0" i="0">
+                <a:solidFill>
+                  <a:srgbClr val="2B2B2B"/>
+                </a:solidFill>
+                <a:latin typeface="Calibri"/>
+              </a:rPr>
+              <a:t> con el Docente al lado.</a:t>
+            </a:r>
+          </a:p>
+          <a:p>
+            <a:pPr>
+              <a:spcAft>
+                <a:spcPts val="1000"/>
+              </a:spcAft>
+            </a:pPr>
+            <a:r>
+              <a:rPr sz="1600" b="0" i="0">
+                <a:solidFill>
+                  <a:srgbClr val="2B2B2B"/>
+                </a:solidFill>
+                <a:latin typeface="Calibri"/>
+              </a:rPr>
+              <a:t>–   </a:t>
+            </a:r>
+            <a:r>
+              <a:rPr sz="1600" b="1" i="0">
+                <a:solidFill>
+                  <a:srgbClr val="2B2B2B"/>
+                </a:solidFill>
+                <a:latin typeface="Calibri"/>
+              </a:rPr>
+              <a:t>Después:</a:t>
+            </a:r>
+            <a:r>
+              <a:rPr sz="1600" b="0" i="0">
+                <a:solidFill>
+                  <a:srgbClr val="2B2B2B"/>
+                </a:solidFill>
+                <a:latin typeface="Calibri"/>
+              </a:rPr>
+              <a:t> termina la sección y la sube a CDigital antes de la siguiente clase.</a:t>
+            </a:r>
+          </a:p>
+          <a:p>
+            <a:pPr>
+              <a:spcAft>
+                <a:spcPts val="1000"/>
+              </a:spcAft>
+            </a:pPr>
+            <a:r>
+              <a:rPr sz="1600" b="0" i="0">
+                <a:solidFill>
+                  <a:srgbClr val="2B2B2B"/>
+                </a:solidFill>
+                <a:latin typeface="Calibri"/>
+              </a:rPr>
+              <a:t>–   </a:t>
+            </a:r>
+            <a:r>
+              <a:rPr sz="1600" b="1" i="0">
+                <a:solidFill>
+                  <a:srgbClr val="2B2B2B"/>
+                </a:solidFill>
+                <a:latin typeface="Calibri"/>
+              </a:rPr>
+              <a:t>Qué traer siempre:</a:t>
+            </a:r>
+          </a:p>
+          <a:p>
+            <a:pPr lvl="1">
+              <a:spcAft>
+                <a:spcPts val="600"/>
+              </a:spcAft>
+            </a:pPr>
+            <a:r>
+              <a:rPr sz="1500" b="0" i="0">
+                <a:solidFill>
+                  <a:srgbClr val="2B2B2B"/>
+                </a:solidFill>
+                <a:latin typeface="Calibri"/>
+              </a:rPr>
+              <a:t>●   Su </a:t>
+            </a:r>
+            <a:r>
+              <a:rPr sz="1500" b="1" i="0">
+                <a:solidFill>
+                  <a:srgbClr val="2B2B2B"/>
+                </a:solidFill>
+                <a:latin typeface="Calibri"/>
+              </a:rPr>
+              <a:t>documento de trabajo de grado abierto</a:t>
+            </a:r>
+            <a:r>
+              <a:rPr sz="1500" b="0" i="0">
+                <a:solidFill>
+                  <a:srgbClr val="2B2B2B"/>
+                </a:solidFill>
+                <a:latin typeface="Calibri"/>
+              </a:rPr>
+              <a:t>, en la versión más reciente.</a:t>
+            </a:r>
+          </a:p>
+          <a:p>
+            <a:pPr lvl="1">
+              <a:spcAft>
+                <a:spcPts val="600"/>
+              </a:spcAft>
+            </a:pPr>
+            <a:r>
+              <a:rPr sz="1500" b="0" i="0">
+                <a:solidFill>
+                  <a:srgbClr val="2B2B2B"/>
+                </a:solidFill>
+                <a:latin typeface="Calibri"/>
+              </a:rPr>
+              <a:t>●   La sección de la semana anterior ya escrita (aunque esté fea).</a:t>
+            </a:r>
+          </a:p>
+          <a:p>
+            <a:pPr lvl="1">
+              <a:spcAft>
+                <a:spcPts val="600"/>
+              </a:spcAft>
+            </a:pPr>
+            <a:r>
+              <a:rPr sz="1500" b="0" i="0">
+                <a:solidFill>
+                  <a:srgbClr val="2B2B2B"/>
+                </a:solidFill>
+                <a:latin typeface="Calibri"/>
+              </a:rPr>
+              <a:t>●   Una duda concreta: “este párrafo no me cuadra”, no “no sé por dónde empezar”.</a:t>
+            </a:r>
+          </a:p>
+        </p:txBody>
+      </p:sp>
+      <p:sp>
+        <p:nvSpPr>
+          <p:cNvPr id="5" name="TextBox 4"/>
           <p:cNvSpPr txBox="1"/>
           <p:nvPr/>
         </p:nvSpPr>
         <p:spPr>
           <a:xfrm>
-            <a:off x="868680" y="2788920"/>
-            <a:ext cx="10454335" cy="493776"/>
+            <a:off x="2194560" y="6446520"/>
+            <a:ext cx="5943600" cy="274320"/>
           </a:xfrm>
           <a:prstGeom prst="rect">
             <a:avLst/>
@@ -5527,106 +12869,29 @@
           </a:bodyPr>
           <a:lstStyle/>
           <a:p>
-            <a:r>
-              <a:rPr sz="1300" b="1" i="0">
-                <a:solidFill>
-                  <a:srgbClr val="0C2340"/>
-                </a:solidFill>
-                <a:latin typeface="Calibri"/>
-              </a:rPr>
-              <a:t>💡 Aclaración</a:t>
-            </a:r>
-          </a:p>
-          <a:p>
-            <a:pPr>
-              <a:spcBef>
-                <a:spcPts val="400"/>
-              </a:spcBef>
-            </a:pPr>
-            <a:r>
-              <a:rPr sz="1300" b="0" i="0">
-                <a:solidFill>
-                  <a:srgbClr val="2B2B2B"/>
-                </a:solidFill>
-                <a:latin typeface="Calibri"/>
-              </a:rPr>
-              <a:t>Traer el avance </a:t>
-            </a:r>
-            <a:r>
-              <a:rPr sz="1300" b="1" i="0">
-                <a:solidFill>
-                  <a:srgbClr val="2B2B2B"/>
-                </a:solidFill>
-                <a:latin typeface="Calibri"/>
-              </a:rPr>
-              <a:t>escrito</a:t>
-            </a:r>
-            <a:r>
-              <a:rPr sz="1300" b="0" i="0">
-                <a:solidFill>
-                  <a:srgbClr val="2B2B2B"/>
-                </a:solidFill>
-                <a:latin typeface="Calibri"/>
-              </a:rPr>
-              <a:t> a cada encuentro: se trabaja sobre lo que ya existe.</a:t>
-            </a:r>
-          </a:p>
-        </p:txBody>
-      </p:sp>
-      <p:sp>
-        <p:nvSpPr>
-          <p:cNvPr id="8" name="Rounded Rectangle 7"/>
-          <p:cNvSpPr/>
-          <p:nvPr/>
-        </p:nvSpPr>
-        <p:spPr>
-          <a:xfrm>
-            <a:off x="640080" y="3621024"/>
-            <a:ext cx="10911535" cy="713232"/>
-          </a:xfrm>
-          <a:prstGeom prst="roundRect">
-            <a:avLst/>
-          </a:prstGeom>
-          <a:solidFill>
-            <a:srgbClr val="FBE4E4"/>
-          </a:solidFill>
-          <a:ln>
-            <a:noFill/>
-          </a:ln>
-          <a:effectLst/>
-        </p:spPr>
-        <p:style>
-          <a:lnRef idx="1">
-            <a:schemeClr val="accent1"/>
-          </a:lnRef>
-          <a:fillRef idx="3">
-            <a:schemeClr val="accent1"/>
-          </a:fillRef>
-          <a:effectRef idx="2">
-            <a:schemeClr val="accent1"/>
-          </a:effectRef>
-          <a:fontRef idx="minor">
-            <a:schemeClr val="lt1"/>
-          </a:fontRef>
-        </p:style>
-        <p:txBody>
-          <a:bodyPr rtlCol="0" anchor="ctr"/>
-          <a:lstStyle/>
-          <a:p>
-            <a:pPr algn="ctr"/>
-          </a:p>
-        </p:txBody>
-      </p:sp>
-      <p:sp>
-        <p:nvSpPr>
-          <p:cNvPr id="9" name="TextBox 8"/>
+            <a:pPr algn="l"/>
+            <a:r>
+              <a:rPr sz="1000" b="1" i="0">
+                <a:solidFill>
+                  <a:srgbClr val="8F989D"/>
+                </a:solidFill>
+                <a:latin typeface="Calibri"/>
+              </a:rPr>
+              <a:t>Inicio 5:10 pm</a:t>
+            </a:r>
+          </a:p>
+        </p:txBody>
+      </p:sp>
+      <p:sp>
+        <p:nvSpPr>
+          <p:cNvPr id="6" name="TextBox 5"/>
           <p:cNvSpPr txBox="1"/>
           <p:nvPr/>
         </p:nvSpPr>
         <p:spPr>
           <a:xfrm>
-            <a:off x="868680" y="3730752"/>
-            <a:ext cx="10454335" cy="493776"/>
+            <a:off x="11094415" y="6446520"/>
+            <a:ext cx="548640" cy="274320"/>
           </a:xfrm>
           <a:prstGeom prst="rect">
             <a:avLst/>
@@ -5639,62 +12904,29 @@
           </a:bodyPr>
           <a:lstStyle/>
           <a:p>
-            <a:r>
-              <a:rPr sz="1300" b="1" i="0">
-                <a:solidFill>
-                  <a:srgbClr val="0C2340"/>
-                </a:solidFill>
-                <a:latin typeface="Calibri"/>
-              </a:rPr>
-              <a:t>⚠️ Importante</a:t>
-            </a:r>
-          </a:p>
-          <a:p>
-            <a:pPr>
-              <a:spcBef>
-                <a:spcPts val="400"/>
-              </a:spcBef>
-            </a:pPr>
-            <a:r>
-              <a:rPr sz="1300" b="0" i="0">
-                <a:solidFill>
-                  <a:srgbClr val="2B2B2B"/>
-                </a:solidFill>
-                <a:latin typeface="Calibri"/>
-              </a:rPr>
-              <a:t>Integridad académica: citar siempre en </a:t>
-            </a:r>
-            <a:r>
-              <a:rPr sz="1300" b="1" i="0">
-                <a:solidFill>
-                  <a:srgbClr val="2B2B2B"/>
-                </a:solidFill>
-                <a:latin typeface="Calibri"/>
-              </a:rPr>
-              <a:t>APA 7</a:t>
-            </a:r>
-            <a:r>
-              <a:rPr sz="1300" b="0" i="0">
-                <a:solidFill>
-                  <a:srgbClr val="2B2B2B"/>
-                </a:solidFill>
-                <a:latin typeface="Calibri"/>
-              </a:rPr>
-              <a:t>. El plagio tiene debido proceso.</a:t>
-            </a:r>
-          </a:p>
-        </p:txBody>
-      </p:sp>
-      <p:sp>
-        <p:nvSpPr>
-          <p:cNvPr id="10" name="TextBox 9"/>
+            <a:pPr algn="r"/>
+            <a:r>
+              <a:rPr sz="1000" b="1" i="0">
+                <a:solidFill>
+                  <a:srgbClr val="8F989D"/>
+                </a:solidFill>
+                <a:latin typeface="Calibri"/>
+              </a:rPr>
+              <a:t>6</a:t>
+            </a:r>
+          </a:p>
+        </p:txBody>
+      </p:sp>
+      <p:sp>
+        <p:nvSpPr>
+          <p:cNvPr id="7" name="TextBox 6"/>
           <p:cNvSpPr txBox="1"/>
           <p:nvPr/>
         </p:nvSpPr>
         <p:spPr>
           <a:xfrm>
-            <a:off x="2194560" y="6446520"/>
-            <a:ext cx="5943600" cy="274320"/>
+            <a:off x="640080" y="5943600"/>
+            <a:ext cx="9997135" cy="457200"/>
           </a:xfrm>
           <a:prstGeom prst="rect">
             <a:avLst/>
@@ -5707,50 +12939,32 @@
           </a:bodyPr>
           <a:lstStyle/>
           <a:p>
-            <a:pPr algn="l"/>
-            <a:r>
-              <a:rPr sz="1000" b="1" i="0">
-                <a:solidFill>
-                  <a:srgbClr val="8F989D"/>
-                </a:solidFill>
-                <a:latin typeface="Calibri"/>
-              </a:rPr>
-              <a:t>Inicio 5:10 pm</a:t>
-            </a:r>
-          </a:p>
-        </p:txBody>
-      </p:sp>
-      <p:sp>
-        <p:nvSpPr>
-          <p:cNvPr id="11" name="TextBox 10"/>
-          <p:cNvSpPr txBox="1"/>
-          <p:nvPr/>
-        </p:nvSpPr>
-        <p:spPr>
-          <a:xfrm>
-            <a:off x="11094415" y="6446520"/>
-            <a:ext cx="548640" cy="274320"/>
-          </a:xfrm>
-          <a:prstGeom prst="rect">
-            <a:avLst/>
-          </a:prstGeom>
-          <a:noFill/>
-        </p:spPr>
-        <p:txBody>
-          <a:bodyPr wrap="square" anchor="t" lIns="0" rIns="0" tIns="0" bIns="0">
-            <a:spAutoFit/>
-          </a:bodyPr>
-          <a:lstStyle/>
-          <a:p>
-            <a:pPr algn="r"/>
-            <a:r>
-              <a:rPr sz="1000" b="1" i="0">
-                <a:solidFill>
-                  <a:srgbClr val="8F989D"/>
-                </a:solidFill>
-                <a:latin typeface="Calibri"/>
-              </a:rPr>
-              <a:t>6</a:t>
+            <a:r>
+              <a:rPr sz="1200" b="0" i="1">
+                <a:solidFill>
+                  <a:srgbClr val="2B2B2B"/>
+                </a:solidFill>
+                <a:latin typeface="Calibri"/>
+              </a:rPr>
+              <a:t>Principio del curso: </a:t>
+            </a:r>
+            <a:r>
+              <a:rPr sz="1200" b="1" i="1">
+                <a:solidFill>
+                  <a:srgbClr val="2B2B2B"/>
+                </a:solidFill>
+                <a:latin typeface="Calibri"/>
+              </a:rPr>
+              <a:t>solo cuenta lo escrito</a:t>
+            </a:r>
+            <a:r>
+              <a:rPr sz="1200" b="0" i="1">
+                <a:solidFill>
+                  <a:srgbClr val="2B2B2B"/>
+                </a:solidFill>
+                <a:latin typeface="Calibri"/>
+              </a:rPr>
+              <a:t>. “Lo tengo en la cabeza” no es un avance, es una intención.</a:t>
             </a:r>
           </a:p>
         </p:txBody>
@@ -5855,21 +13069,65 @@
                 </a:solidFill>
                 <a:latin typeface="Calibri"/>
               </a:rPr>
-              <a:t>PARA LA PRÓXIMA SESIÓN</a:t>
-            </a:r>
-          </a:p>
-        </p:txBody>
-      </p:sp>
-      <p:sp>
-        <p:nvSpPr>
-          <p:cNvPr id="4" name="TextBox 3"/>
+              <a:t>Aviso honesto sobre este curso</a:t>
+            </a:r>
+          </a:p>
+        </p:txBody>
+      </p:sp>
+      <p:sp>
+        <p:nvSpPr>
+          <p:cNvPr id="4" name="Rounded Rectangle 3"/>
+          <p:cNvSpPr/>
+          <p:nvPr/>
+        </p:nvSpPr>
+        <p:spPr>
+          <a:xfrm>
+            <a:off x="640080" y="1737360"/>
+            <a:ext cx="10911535" cy="1225296"/>
+          </a:xfrm>
+          <a:prstGeom prst="roundRect">
+            <a:avLst/>
+          </a:prstGeom>
+          <a:solidFill>
+            <a:srgbClr val="FBE4E4"/>
+          </a:solidFill>
+          <a:ln>
+            <a:noFill/>
+          </a:ln>
+          <a:effectLst/>
+        </p:spPr>
+        <p:style>
+          <a:lnRef idx="1">
+            <a:schemeClr val="accent1"/>
+          </a:lnRef>
+          <a:fillRef idx="3">
+            <a:schemeClr val="accent1"/>
+          </a:fillRef>
+          <a:effectRef idx="2">
+            <a:schemeClr val="accent1"/>
+          </a:effectRef>
+          <a:fontRef idx="minor">
+            <a:schemeClr val="lt1"/>
+          </a:fontRef>
+        </p:style>
+        <p:txBody>
+          <a:bodyPr rtlCol="0" anchor="ctr"/>
+          <a:lstStyle/>
+          <a:p>
+            <a:pPr algn="ctr"/>
+          </a:p>
+        </p:txBody>
+      </p:sp>
+      <p:sp>
+        <p:nvSpPr>
+          <p:cNvPr id="5" name="TextBox 4"/>
           <p:cNvSpPr txBox="1"/>
           <p:nvPr/>
         </p:nvSpPr>
         <p:spPr>
           <a:xfrm>
-            <a:off x="640080" y="1691639"/>
-            <a:ext cx="10911535" cy="4617720"/>
+            <a:off x="868680" y="1847088"/>
+            <a:ext cx="10454335" cy="1005840"/>
           </a:xfrm>
           <a:prstGeom prst="rect">
             <a:avLst/>
@@ -5882,119 +13140,115 @@
           </a:bodyPr>
           <a:lstStyle/>
           <a:p>
+            <a:r>
+              <a:rPr sz="1300" b="1" i="0">
+                <a:solidFill>
+                  <a:srgbClr val="0C2340"/>
+                </a:solidFill>
+                <a:latin typeface="Calibri"/>
+              </a:rPr>
+              <a:t>⚠️ Importante</a:t>
+            </a:r>
+          </a:p>
+          <a:p>
             <a:pPr>
-              <a:spcAft>
-                <a:spcPts val="1000"/>
-              </a:spcAft>
+              <a:spcBef>
+                <a:spcPts val="400"/>
+              </a:spcBef>
             </a:pPr>
             <a:r>
-              <a:rPr sz="1600" b="0" i="0">
-                <a:solidFill>
-                  <a:srgbClr val="2B2B2B"/>
-                </a:solidFill>
-                <a:latin typeface="Calibri"/>
-              </a:rPr>
-              <a:t>–   </a:t>
-            </a:r>
-            <a:r>
-              <a:rPr sz="1600" b="1" i="0">
-                <a:solidFill>
-                  <a:srgbClr val="2B2B2B"/>
-                </a:solidFill>
-                <a:latin typeface="Calibri"/>
-              </a:rPr>
-              <a:t>Lectura autónoma:</a:t>
-            </a:r>
-            <a:r>
-              <a:rPr sz="1600" b="0" i="0">
-                <a:solidFill>
-                  <a:srgbClr val="2B2B2B"/>
-                </a:solidFill>
-                <a:latin typeface="Calibri"/>
-              </a:rPr>
-              <a:t> Delimitación / reformulación del tema — la retomamos al abrir la Sesión 02.</a:t>
-            </a:r>
-          </a:p>
-          <a:p>
-            <a:pPr>
-              <a:spcAft>
-                <a:spcPts val="1000"/>
-              </a:spcAft>
-            </a:pPr>
-            <a:r>
-              <a:rPr sz="1600" b="0" i="0">
-                <a:solidFill>
-                  <a:srgbClr val="2B2B2B"/>
-                </a:solidFill>
-                <a:latin typeface="Calibri"/>
-              </a:rPr>
-              <a:t>–   Revisar la </a:t>
-            </a:r>
-            <a:r>
-              <a:rPr sz="1600" b="1" i="0">
-                <a:solidFill>
-                  <a:srgbClr val="2B2B2B"/>
-                </a:solidFill>
-                <a:latin typeface="Calibri"/>
-              </a:rPr>
-              <a:t>Presentación del Curso</a:t>
-            </a:r>
-            <a:r>
-              <a:rPr sz="1600" b="0" i="0">
-                <a:solidFill>
-                  <a:srgbClr val="2B2B2B"/>
-                </a:solidFill>
-                <a:latin typeface="Calibri"/>
-              </a:rPr>
-              <a:t> completa (fechas, evaluación, contenido de todas las sesiones).</a:t>
-            </a:r>
-          </a:p>
-          <a:p>
-            <a:pPr>
-              <a:spcAft>
-                <a:spcPts val="1000"/>
-              </a:spcAft>
-            </a:pPr>
-            <a:r>
-              <a:rPr sz="1600" b="0" i="0">
-                <a:solidFill>
-                  <a:srgbClr val="2B2B2B"/>
-                </a:solidFill>
-                <a:latin typeface="Calibri"/>
-              </a:rPr>
-              <a:t>–   Abrir el enunciado de la </a:t>
-            </a:r>
-            <a:r>
-              <a:rPr sz="1600" b="1" i="0">
-                <a:solidFill>
-                  <a:srgbClr val="2B2B2B"/>
-                </a:solidFill>
-                <a:latin typeface="Calibri"/>
-              </a:rPr>
-              <a:t>ACA 1</a:t>
-            </a:r>
-            <a:r>
-              <a:rPr sz="1600" b="0" i="0">
-                <a:solidFill>
-                  <a:srgbClr val="2B2B2B"/>
-                </a:solidFill>
-                <a:latin typeface="Calibri"/>
-              </a:rPr>
-              <a:t> en `Clases/Recursos/ACAs/` y leerlo entero.</a:t>
-            </a:r>
-          </a:p>
-        </p:txBody>
-      </p:sp>
-      <p:sp>
-        <p:nvSpPr>
-          <p:cNvPr id="5" name="TextBox 4"/>
+              <a:rPr sz="1300" b="1" i="0">
+                <a:solidFill>
+                  <a:srgbClr val="2B2B2B"/>
+                </a:solidFill>
+                <a:latin typeface="Calibri"/>
+              </a:rPr>
+              <a:t>Trabajo de Grado 2 no tiene Syllabus SIAC cargado</a:t>
+            </a:r>
+            <a:r>
+              <a:rPr sz="1300" b="0" i="0">
+                <a:solidFill>
+                  <a:srgbClr val="2B2B2B"/>
+                </a:solidFill>
+                <a:latin typeface="Calibri"/>
+              </a:rPr>
+              <a:t> en la carpeta del programa. El temario que verá a continuación es </a:t>
+            </a:r>
+            <a:r>
+              <a:rPr sz="1300" b="1" i="0">
+                <a:solidFill>
+                  <a:srgbClr val="2B2B2B"/>
+                </a:solidFill>
+                <a:latin typeface="Calibri"/>
+              </a:rPr>
+              <a:t>orientativo</a:t>
+            </a:r>
+            <a:r>
+              <a:rPr sz="1300" b="0" i="0">
+                <a:solidFill>
+                  <a:srgbClr val="2B2B2B"/>
+                </a:solidFill>
+                <a:latin typeface="Calibri"/>
+              </a:rPr>
+              <a:t>: se construyó a partir del Manual del Docente y de la ruta que sigue TG3.</a:t>
+            </a:r>
+          </a:p>
+        </p:txBody>
+      </p:sp>
+      <p:sp>
+        <p:nvSpPr>
+          <p:cNvPr id="6" name="Rounded Rectangle 5"/>
+          <p:cNvSpPr/>
+          <p:nvPr/>
+        </p:nvSpPr>
+        <p:spPr>
+          <a:xfrm>
+            <a:off x="640080" y="3191256"/>
+            <a:ext cx="10911535" cy="1225296"/>
+          </a:xfrm>
+          <a:prstGeom prst="roundRect">
+            <a:avLst/>
+          </a:prstGeom>
+          <a:solidFill>
+            <a:srgbClr val="FDECD8"/>
+          </a:solidFill>
+          <a:ln>
+            <a:noFill/>
+          </a:ln>
+          <a:effectLst/>
+        </p:spPr>
+        <p:style>
+          <a:lnRef idx="1">
+            <a:schemeClr val="accent1"/>
+          </a:lnRef>
+          <a:fillRef idx="3">
+            <a:schemeClr val="accent1"/>
+          </a:fillRef>
+          <a:effectRef idx="2">
+            <a:schemeClr val="accent1"/>
+          </a:effectRef>
+          <a:fontRef idx="minor">
+            <a:schemeClr val="lt1"/>
+          </a:fontRef>
+        </p:style>
+        <p:txBody>
+          <a:bodyPr rtlCol="0" anchor="ctr"/>
+          <a:lstStyle/>
+          <a:p>
+            <a:pPr algn="ctr"/>
+          </a:p>
+        </p:txBody>
+      </p:sp>
+      <p:sp>
+        <p:nvSpPr>
+          <p:cNvPr id="7" name="TextBox 6"/>
           <p:cNvSpPr txBox="1"/>
           <p:nvPr/>
         </p:nvSpPr>
         <p:spPr>
           <a:xfrm>
-            <a:off x="2194560" y="6446520"/>
-            <a:ext cx="5943600" cy="274320"/>
+            <a:off x="868680" y="3300984"/>
+            <a:ext cx="10454335" cy="1005840"/>
           </a:xfrm>
           <a:prstGeom prst="rect">
             <a:avLst/>
@@ -6007,6 +13261,204 @@
           </a:bodyPr>
           <a:lstStyle/>
           <a:p>
+            <a:r>
+              <a:rPr sz="1300" b="1" i="0">
+                <a:solidFill>
+                  <a:srgbClr val="0C2340"/>
+                </a:solidFill>
+                <a:latin typeface="Calibri"/>
+              </a:rPr>
+              <a:t>💡 Aclaración</a:t>
+            </a:r>
+          </a:p>
+          <a:p>
+            <a:pPr>
+              <a:spcBef>
+                <a:spcPts val="400"/>
+              </a:spcBef>
+            </a:pPr>
+            <a:r>
+              <a:rPr sz="1300" b="0" i="0">
+                <a:solidFill>
+                  <a:srgbClr val="2B2B2B"/>
+                </a:solidFill>
+                <a:latin typeface="Calibri"/>
+              </a:rPr>
+              <a:t>Por lo mismo, los porcentajes de los tres cortes (</a:t>
+            </a:r>
+            <a:r>
+              <a:rPr sz="1300" b="1" i="0">
+                <a:solidFill>
+                  <a:srgbClr val="2B2B2B"/>
+                </a:solidFill>
+                <a:latin typeface="Calibri"/>
+              </a:rPr>
+              <a:t>30 / 30 / 40</a:t>
+            </a:r>
+            <a:r>
+              <a:rPr sz="1300" b="0" i="0">
+                <a:solidFill>
+                  <a:srgbClr val="2B2B2B"/>
+                </a:solidFill>
+                <a:latin typeface="Calibri"/>
+              </a:rPr>
+              <a:t>) están marcados con asterisco: son la regla general del reglamento, y se </a:t>
+            </a:r>
+            <a:r>
+              <a:rPr sz="1300" b="1" i="0">
+                <a:solidFill>
+                  <a:srgbClr val="2B2B2B"/>
+                </a:solidFill>
+                <a:latin typeface="Calibri"/>
+              </a:rPr>
+              <a:t>confirman en CDigital</a:t>
+            </a:r>
+            <a:r>
+              <a:rPr sz="1300" b="0" i="0">
+                <a:solidFill>
+                  <a:srgbClr val="2B2B2B"/>
+                </a:solidFill>
+                <a:latin typeface="Calibri"/>
+              </a:rPr>
+              <a:t>, que es la fuente oficial de este grupo.</a:t>
+            </a:r>
+          </a:p>
+        </p:txBody>
+      </p:sp>
+      <p:sp>
+        <p:nvSpPr>
+          <p:cNvPr id="8" name="Rounded Rectangle 7"/>
+          <p:cNvSpPr/>
+          <p:nvPr/>
+        </p:nvSpPr>
+        <p:spPr>
+          <a:xfrm>
+            <a:off x="640080" y="4645152"/>
+            <a:ext cx="10911535" cy="1225296"/>
+          </a:xfrm>
+          <a:prstGeom prst="roundRect">
+            <a:avLst/>
+          </a:prstGeom>
+          <a:solidFill>
+            <a:srgbClr val="E8F5EC"/>
+          </a:solidFill>
+          <a:ln>
+            <a:noFill/>
+          </a:ln>
+          <a:effectLst/>
+        </p:spPr>
+        <p:style>
+          <a:lnRef idx="1">
+            <a:schemeClr val="accent1"/>
+          </a:lnRef>
+          <a:fillRef idx="3">
+            <a:schemeClr val="accent1"/>
+          </a:fillRef>
+          <a:effectRef idx="2">
+            <a:schemeClr val="accent1"/>
+          </a:effectRef>
+          <a:fontRef idx="minor">
+            <a:schemeClr val="lt1"/>
+          </a:fontRef>
+        </p:style>
+        <p:txBody>
+          <a:bodyPr rtlCol="0" anchor="ctr"/>
+          <a:lstStyle/>
+          <a:p>
+            <a:pPr algn="ctr"/>
+          </a:p>
+        </p:txBody>
+      </p:sp>
+      <p:sp>
+        <p:nvSpPr>
+          <p:cNvPr id="9" name="TextBox 8"/>
+          <p:cNvSpPr txBox="1"/>
+          <p:nvPr/>
+        </p:nvSpPr>
+        <p:spPr>
+          <a:xfrm>
+            <a:off x="868680" y="4754880"/>
+            <a:ext cx="10454335" cy="1005840"/>
+          </a:xfrm>
+          <a:prstGeom prst="rect">
+            <a:avLst/>
+          </a:prstGeom>
+          <a:noFill/>
+        </p:spPr>
+        <p:txBody>
+          <a:bodyPr wrap="square" anchor="t" lIns="0" rIns="0" tIns="0" bIns="0">
+            <a:spAutoFit/>
+          </a:bodyPr>
+          <a:lstStyle/>
+          <a:p>
+            <a:r>
+              <a:rPr sz="1300" b="1" i="0">
+                <a:solidFill>
+                  <a:srgbClr val="0C2340"/>
+                </a:solidFill>
+                <a:latin typeface="Calibri"/>
+              </a:rPr>
+              <a:t>ℹ️ Nota institucional</a:t>
+            </a:r>
+          </a:p>
+          <a:p>
+            <a:pPr>
+              <a:spcBef>
+                <a:spcPts val="400"/>
+              </a:spcBef>
+            </a:pPr>
+            <a:r>
+              <a:rPr sz="1300" b="0" i="0">
+                <a:solidFill>
+                  <a:srgbClr val="2B2B2B"/>
+                </a:solidFill>
+                <a:latin typeface="Calibri"/>
+              </a:rPr>
+              <a:t>Qué significa esto en la práctica: </a:t>
+            </a:r>
+            <a:r>
+              <a:rPr sz="1300" b="1" i="0">
+                <a:solidFill>
+                  <a:srgbClr val="2B2B2B"/>
+                </a:solidFill>
+                <a:latin typeface="Calibri"/>
+              </a:rPr>
+              <a:t>el orden de los temas puede ajustarse</a:t>
+            </a:r>
+            <a:r>
+              <a:rPr sz="1300" b="0" i="0">
+                <a:solidFill>
+                  <a:srgbClr val="2B2B2B"/>
+                </a:solidFill>
+                <a:latin typeface="Calibri"/>
+              </a:rPr>
+              <a:t>, pero el producto final y los tres momentos de entrega no cambian. Si algo se mueve, el Docente lo avisa en CDigital, no de palabra.</a:t>
+            </a:r>
+          </a:p>
+        </p:txBody>
+      </p:sp>
+      <p:sp>
+        <p:nvSpPr>
+          <p:cNvPr id="10" name="TextBox 9"/>
+          <p:cNvSpPr txBox="1"/>
+          <p:nvPr/>
+        </p:nvSpPr>
+        <p:spPr>
+          <a:xfrm>
+            <a:off x="2194560" y="6446520"/>
+            <a:ext cx="5943600" cy="274320"/>
+          </a:xfrm>
+          <a:prstGeom prst="rect">
+            <a:avLst/>
+          </a:prstGeom>
+          <a:noFill/>
+        </p:spPr>
+        <p:txBody>
+          <a:bodyPr wrap="square" anchor="t" lIns="0" rIns="0" tIns="0" bIns="0">
+            <a:spAutoFit/>
+          </a:bodyPr>
+          <a:lstStyle/>
+          <a:p>
             <a:pPr algn="l"/>
             <a:r>
               <a:rPr sz="1000" b="1" i="0">
@@ -6022,7 +13474,7 @@
       </p:sp>
       <p:sp>
         <p:nvSpPr>
-          <p:cNvPr id="6" name="TextBox 5"/>
+          <p:cNvPr id="11" name="TextBox 10"/>
           <p:cNvSpPr txBox="1"/>
           <p:nvPr/>
         </p:nvSpPr>
@@ -6090,13 +13542,13 @@
         <p:spPr>
           <a:xfrm>
             <a:off x="0" y="0"/>
-            <a:ext cx="12191695" cy="164592"/>
+            <a:ext cx="12191695" cy="1188720"/>
           </a:xfrm>
           <a:prstGeom prst="rect">
             <a:avLst/>
           </a:prstGeom>
           <a:solidFill>
-            <a:srgbClr val="007433"/>
+            <a:srgbClr val="0C2340"/>
           </a:solidFill>
           <a:ln>
             <a:noFill/>
@@ -6125,40 +13577,16 @@
           </a:p>
         </p:txBody>
       </p:sp>
-      <p:pic>
-        <p:nvPicPr>
-          <p:cNvPr id="3" name="Picture 2" descr="logo_cun_solo.png"/>
-          <p:cNvPicPr>
-            <a:picLocks noChangeAspect="1"/>
-          </p:cNvPicPr>
-          <p:nvPr/>
-        </p:nvPicPr>
-        <p:blipFill>
-          <a:blip r:embed="rId2"/>
-          <a:stretch>
-            <a:fillRect/>
-          </a:stretch>
-        </p:blipFill>
-        <p:spPr>
-          <a:xfrm>
-            <a:off x="10362895" y="5632704"/>
-            <a:ext cx="1371600" cy="950976"/>
-          </a:xfrm>
-          <a:prstGeom prst="rect">
-            <a:avLst/>
-          </a:prstGeom>
-        </p:spPr>
-      </p:pic>
-      <p:sp>
-        <p:nvSpPr>
-          <p:cNvPr id="4" name="TextBox 3"/>
+      <p:sp>
+        <p:nvSpPr>
+          <p:cNvPr id="3" name="TextBox 2"/>
           <p:cNvSpPr txBox="1"/>
           <p:nvPr/>
         </p:nvSpPr>
         <p:spPr>
           <a:xfrm>
-            <a:off x="640080" y="1737360"/>
-            <a:ext cx="10911535" cy="1097280"/>
+            <a:off x="640080" y="0"/>
+            <a:ext cx="9082735" cy="1188720"/>
           </a:xfrm>
           <a:prstGeom prst="rect">
             <a:avLst/>
@@ -6173,17 +13601,559 @@
           <a:p>
             <a:pPr algn="ctr"/>
             <a:r>
-              <a:rPr sz="3400" b="1" i="0">
-                <a:solidFill>
-                  <a:srgbClr val="0C2340"/>
-                </a:solidFill>
-                <a:latin typeface="Calibri"/>
-              </a:rPr>
-              <a:t>Cierre — Sesión 01</a:t>
-            </a:r>
-          </a:p>
-        </p:txBody>
-      </p:sp>
+              <a:rPr sz="2600" b="1" i="0">
+                <a:solidFill>
+                  <a:srgbClr val="FFFFFF"/>
+                </a:solidFill>
+                <a:latin typeface="Calibri"/>
+              </a:rPr>
+              <a:t>Mapa del curso (1/2): del tema al marco referencial</a:t>
+            </a:r>
+          </a:p>
+        </p:txBody>
+      </p:sp>
+      <p:graphicFrame>
+        <p:nvGraphicFramePr>
+          <p:cNvPr id="4" name="Table 3"/>
+          <p:cNvGraphicFramePr>
+            <a:graphicFrameLocks noGrp="1"/>
+          </p:cNvGraphicFramePr>
+          <p:nvPr/>
+        </p:nvGraphicFramePr>
+        <p:xfrm>
+          <a:off x="640080" y="1691639"/>
+          <a:ext cx="10911533" cy="3520440"/>
+        </p:xfrm>
+        <a:graphic>
+          <a:graphicData uri="http://schemas.openxmlformats.org/drawingml/2006/table">
+            <a:tbl>
+              <a:tblPr>
+                <a:tableStyleId>{2D5ABB26-0587-4C30-8999-92F81FD0307C}</a:tableStyleId>
+              </a:tblPr>
+              <a:tblGrid>
+                <a:gridCol w="1008629"/>
+                <a:gridCol w="4951452"/>
+                <a:gridCol w="4951452"/>
+              </a:tblGrid>
+              <a:tr h="502920">
+                <a:tc>
+                  <a:txBody>
+                    <a:bodyPr/>
+                    <a:lstStyle/>
+                    <a:p>
+                      <a:pPr algn="l"/>
+                      <a:r>
+                        <a:rPr sz="1300" b="1" i="0">
+                          <a:solidFill>
+                            <a:srgbClr val="FFFFFF"/>
+                          </a:solidFill>
+                          <a:latin typeface="Calibri"/>
+                        </a:rPr>
+                        <a:t>Sesión</a:t>
+                      </a:r>
+                    </a:p>
+                  </a:txBody>
+                  <a:tcPr anchor="ctr" marL="109728" marR="91440" marT="36576" marB="36576">
+                    <a:solidFill>
+                      <a:srgbClr val="0C2340"/>
+                    </a:solidFill>
+                  </a:tcPr>
+                </a:tc>
+                <a:tc>
+                  <a:txBody>
+                    <a:bodyPr/>
+                    <a:lstStyle/>
+                    <a:p>
+                      <a:pPr algn="l"/>
+                      <a:r>
+                        <a:rPr sz="1300" b="1" i="0">
+                          <a:solidFill>
+                            <a:srgbClr val="FFFFFF"/>
+                          </a:solidFill>
+                          <a:latin typeface="Calibri"/>
+                        </a:rPr>
+                        <a:t>De qué se ocupa</a:t>
+                      </a:r>
+                    </a:p>
+                  </a:txBody>
+                  <a:tcPr anchor="ctr" marL="109728" marR="91440" marT="36576" marB="36576">
+                    <a:solidFill>
+                      <a:srgbClr val="0C2340"/>
+                    </a:solidFill>
+                  </a:tcPr>
+                </a:tc>
+                <a:tc>
+                  <a:txBody>
+                    <a:bodyPr/>
+                    <a:lstStyle/>
+                    <a:p>
+                      <a:pPr algn="l"/>
+                      <a:r>
+                        <a:rPr sz="1300" b="1" i="0">
+                          <a:solidFill>
+                            <a:srgbClr val="FFFFFF"/>
+                          </a:solidFill>
+                          <a:latin typeface="Calibri"/>
+                        </a:rPr>
+                        <a:t>Qué queda escrito</a:t>
+                      </a:r>
+                    </a:p>
+                  </a:txBody>
+                  <a:tcPr anchor="ctr" marL="109728" marR="91440" marT="36576" marB="36576">
+                    <a:solidFill>
+                      <a:srgbClr val="0C2340"/>
+                    </a:solidFill>
+                  </a:tcPr>
+                </a:tc>
+              </a:tr>
+              <a:tr h="502920">
+                <a:tc>
+                  <a:txBody>
+                    <a:bodyPr/>
+                    <a:lstStyle/>
+                    <a:p>
+                      <a:pPr algn="l"/>
+                      <a:r>
+                        <a:rPr sz="1200" b="1" i="0">
+                          <a:solidFill>
+                            <a:srgbClr val="2B2B2B"/>
+                          </a:solidFill>
+                          <a:latin typeface="Calibri"/>
+                        </a:rPr>
+                        <a:t>01</a:t>
+                      </a:r>
+                    </a:p>
+                  </a:txBody>
+                  <a:tcPr anchor="ctr" marL="109728" marR="91440" marT="36576" marB="36576">
+                    <a:solidFill>
+                      <a:srgbClr val="FFFFFF"/>
+                    </a:solidFill>
+                  </a:tcPr>
+                </a:tc>
+                <a:tc>
+                  <a:txBody>
+                    <a:bodyPr/>
+                    <a:lstStyle/>
+                    <a:p>
+                      <a:pPr algn="l"/>
+                      <a:r>
+                        <a:rPr sz="1200" b="0" i="0">
+                          <a:solidFill>
+                            <a:srgbClr val="2B2B2B"/>
+                          </a:solidFill>
+                          <a:latin typeface="Calibri"/>
+                        </a:rPr>
+                        <a:t>Presentación del curso, del Docente, de ustedes y de las ACAs (</a:t>
+                      </a:r>
+                      <a:r>
+                        <a:rPr sz="1200" b="1" i="0">
+                          <a:solidFill>
+                            <a:srgbClr val="2B2B2B"/>
+                          </a:solidFill>
+                          <a:latin typeface="Calibri"/>
+                        </a:rPr>
+                        <a:t>hoy</a:t>
+                      </a:r>
+                      <a:r>
+                        <a:rPr sz="1200" b="0" i="0">
+                          <a:solidFill>
+                            <a:srgbClr val="2B2B2B"/>
+                          </a:solidFill>
+                          <a:latin typeface="Calibri"/>
+                        </a:rPr>
+                        <a:t>)</a:t>
+                      </a:r>
+                    </a:p>
+                  </a:txBody>
+                  <a:tcPr anchor="ctr" marL="109728" marR="91440" marT="36576" marB="36576">
+                    <a:solidFill>
+                      <a:srgbClr val="FFFFFF"/>
+                    </a:solidFill>
+                  </a:tcPr>
+                </a:tc>
+                <a:tc>
+                  <a:txBody>
+                    <a:bodyPr/>
+                    <a:lstStyle/>
+                    <a:p>
+                      <a:pPr algn="l"/>
+                      <a:r>
+                        <a:rPr sz="1200" b="0" i="0">
+                          <a:solidFill>
+                            <a:srgbClr val="2B2B2B"/>
+                          </a:solidFill>
+                          <a:latin typeface="Calibri"/>
+                        </a:rPr>
+                        <a:t>Encuadre, acuerdo pedagógico y encargo autónomo</a:t>
+                      </a:r>
+                    </a:p>
+                  </a:txBody>
+                  <a:tcPr anchor="ctr" marL="109728" marR="91440" marT="36576" marB="36576">
+                    <a:solidFill>
+                      <a:srgbClr val="FFFFFF"/>
+                    </a:solidFill>
+                  </a:tcPr>
+                </a:tc>
+              </a:tr>
+              <a:tr h="502920">
+                <a:tc>
+                  <a:txBody>
+                    <a:bodyPr/>
+                    <a:lstStyle/>
+                    <a:p>
+                      <a:pPr algn="l"/>
+                      <a:r>
+                        <a:rPr sz="1200" b="1" i="0">
+                          <a:solidFill>
+                            <a:srgbClr val="2B2B2B"/>
+                          </a:solidFill>
+                          <a:latin typeface="Calibri"/>
+                        </a:rPr>
+                        <a:t>02</a:t>
+                      </a:r>
+                    </a:p>
+                  </a:txBody>
+                  <a:tcPr anchor="ctr" marL="109728" marR="91440" marT="36576" marB="36576">
+                    <a:solidFill>
+                      <a:srgbClr val="F2F2F2"/>
+                    </a:solidFill>
+                  </a:tcPr>
+                </a:tc>
+                <a:tc>
+                  <a:txBody>
+                    <a:bodyPr/>
+                    <a:lstStyle/>
+                    <a:p>
+                      <a:pPr algn="l"/>
+                      <a:r>
+                        <a:rPr sz="1200" b="0" i="0">
+                          <a:solidFill>
+                            <a:srgbClr val="2B2B2B"/>
+                          </a:solidFill>
+                          <a:latin typeface="Calibri"/>
+                        </a:rPr>
+                        <a:t>Pregunta, objetivos y título provisional</a:t>
+                      </a:r>
+                    </a:p>
+                  </a:txBody>
+                  <a:tcPr anchor="ctr" marL="109728" marR="91440" marT="36576" marB="36576">
+                    <a:solidFill>
+                      <a:srgbClr val="F2F2F2"/>
+                    </a:solidFill>
+                  </a:tcPr>
+                </a:tc>
+                <a:tc>
+                  <a:txBody>
+                    <a:bodyPr/>
+                    <a:lstStyle/>
+                    <a:p>
+                      <a:pPr algn="l"/>
+                      <a:r>
+                        <a:rPr sz="1200" b="0" i="0">
+                          <a:solidFill>
+                            <a:srgbClr val="2B2B2B"/>
+                          </a:solidFill>
+                          <a:latin typeface="Calibri"/>
+                        </a:rPr>
+                        <a:t>El esqueleto del avance en una página</a:t>
+                      </a:r>
+                    </a:p>
+                  </a:txBody>
+                  <a:tcPr anchor="ctr" marL="109728" marR="91440" marT="36576" marB="36576">
+                    <a:solidFill>
+                      <a:srgbClr val="F2F2F2"/>
+                    </a:solidFill>
+                  </a:tcPr>
+                </a:tc>
+              </a:tr>
+              <a:tr h="502920">
+                <a:tc>
+                  <a:txBody>
+                    <a:bodyPr/>
+                    <a:lstStyle/>
+                    <a:p>
+                      <a:pPr algn="l"/>
+                      <a:r>
+                        <a:rPr sz="1200" b="1" i="0">
+                          <a:solidFill>
+                            <a:srgbClr val="2B2B2B"/>
+                          </a:solidFill>
+                          <a:latin typeface="Calibri"/>
+                        </a:rPr>
+                        <a:t>03</a:t>
+                      </a:r>
+                    </a:p>
+                  </a:txBody>
+                  <a:tcPr anchor="ctr" marL="109728" marR="91440" marT="36576" marB="36576">
+                    <a:solidFill>
+                      <a:srgbClr val="FFFFFF"/>
+                    </a:solidFill>
+                  </a:tcPr>
+                </a:tc>
+                <a:tc>
+                  <a:txBody>
+                    <a:bodyPr/>
+                    <a:lstStyle/>
+                    <a:p>
+                      <a:pPr algn="l"/>
+                      <a:r>
+                        <a:rPr sz="1200" b="0" i="0">
+                          <a:solidFill>
+                            <a:srgbClr val="2B2B2B"/>
+                          </a:solidFill>
+                          <a:latin typeface="Calibri"/>
+                        </a:rPr>
+                        <a:t>Estructura del documento / artículo de avance</a:t>
+                      </a:r>
+                    </a:p>
+                  </a:txBody>
+                  <a:tcPr anchor="ctr" marL="109728" marR="91440" marT="36576" marB="36576">
+                    <a:solidFill>
+                      <a:srgbClr val="FFFFFF"/>
+                    </a:solidFill>
+                  </a:tcPr>
+                </a:tc>
+                <a:tc>
+                  <a:txBody>
+                    <a:bodyPr/>
+                    <a:lstStyle/>
+                    <a:p>
+                      <a:pPr algn="l"/>
+                      <a:r>
+                        <a:rPr sz="1200" b="0" i="0">
+                          <a:solidFill>
+                            <a:srgbClr val="2B2B2B"/>
+                          </a:solidFill>
+                          <a:latin typeface="Calibri"/>
+                        </a:rPr>
+                        <a:t>Índice de secciones y plantilla APA CUN aplicada</a:t>
+                      </a:r>
+                    </a:p>
+                  </a:txBody>
+                  <a:tcPr anchor="ctr" marL="109728" marR="91440" marT="36576" marB="36576">
+                    <a:solidFill>
+                      <a:srgbClr val="FFFFFF"/>
+                    </a:solidFill>
+                  </a:tcPr>
+                </a:tc>
+              </a:tr>
+              <a:tr h="502920">
+                <a:tc>
+                  <a:txBody>
+                    <a:bodyPr/>
+                    <a:lstStyle/>
+                    <a:p>
+                      <a:pPr algn="l"/>
+                      <a:r>
+                        <a:rPr sz="1200" b="1" i="0">
+                          <a:solidFill>
+                            <a:srgbClr val="2B2B2B"/>
+                          </a:solidFill>
+                          <a:latin typeface="Calibri"/>
+                        </a:rPr>
+                        <a:t>04</a:t>
+                      </a:r>
+                    </a:p>
+                  </a:txBody>
+                  <a:tcPr anchor="ctr" marL="109728" marR="91440" marT="36576" marB="36576">
+                    <a:solidFill>
+                      <a:srgbClr val="F2F2F2"/>
+                    </a:solidFill>
+                  </a:tcPr>
+                </a:tc>
+                <a:tc>
+                  <a:txBody>
+                    <a:bodyPr/>
+                    <a:lstStyle/>
+                    <a:p>
+                      <a:pPr algn="l"/>
+                      <a:r>
+                        <a:rPr sz="1200" b="0" i="0">
+                          <a:solidFill>
+                            <a:srgbClr val="2B2B2B"/>
+                          </a:solidFill>
+                          <a:latin typeface="Calibri"/>
+                        </a:rPr>
+                        <a:t>Antecedentes y referentes (Fase I)</a:t>
+                      </a:r>
+                    </a:p>
+                  </a:txBody>
+                  <a:tcPr anchor="ctr" marL="109728" marR="91440" marT="36576" marB="36576">
+                    <a:solidFill>
+                      <a:srgbClr val="F2F2F2"/>
+                    </a:solidFill>
+                  </a:tcPr>
+                </a:tc>
+                <a:tc>
+                  <a:txBody>
+                    <a:bodyPr/>
+                    <a:lstStyle/>
+                    <a:p>
+                      <a:pPr algn="l"/>
+                      <a:r>
+                        <a:rPr sz="1200" b="0" i="0">
+                          <a:solidFill>
+                            <a:srgbClr val="2B2B2B"/>
+                          </a:solidFill>
+                          <a:latin typeface="Calibri"/>
+                        </a:rPr>
+                        <a:t>Fichas de lectura de los primeros referentes</a:t>
+                      </a:r>
+                    </a:p>
+                  </a:txBody>
+                  <a:tcPr anchor="ctr" marL="109728" marR="91440" marT="36576" marB="36576">
+                    <a:solidFill>
+                      <a:srgbClr val="F2F2F2"/>
+                    </a:solidFill>
+                  </a:tcPr>
+                </a:tc>
+              </a:tr>
+              <a:tr h="502920">
+                <a:tc>
+                  <a:txBody>
+                    <a:bodyPr/>
+                    <a:lstStyle/>
+                    <a:p>
+                      <a:pPr algn="l"/>
+                      <a:r>
+                        <a:rPr sz="1200" b="1" i="0">
+                          <a:solidFill>
+                            <a:srgbClr val="2B2B2B"/>
+                          </a:solidFill>
+                          <a:latin typeface="Calibri"/>
+                        </a:rPr>
+                        <a:t>05</a:t>
+                      </a:r>
+                    </a:p>
+                  </a:txBody>
+                  <a:tcPr anchor="ctr" marL="109728" marR="91440" marT="36576" marB="36576">
+                    <a:solidFill>
+                      <a:srgbClr val="FFFFFF"/>
+                    </a:solidFill>
+                  </a:tcPr>
+                </a:tc>
+                <a:tc>
+                  <a:txBody>
+                    <a:bodyPr/>
+                    <a:lstStyle/>
+                    <a:p>
+                      <a:pPr algn="l"/>
+                      <a:r>
+                        <a:rPr sz="1200" b="0" i="0">
+                          <a:solidFill>
+                            <a:srgbClr val="2B2B2B"/>
+                          </a:solidFill>
+                          <a:latin typeface="Calibri"/>
+                        </a:rPr>
+                        <a:t>Marco teórico — avance</a:t>
+                      </a:r>
+                    </a:p>
+                  </a:txBody>
+                  <a:tcPr anchor="ctr" marL="109728" marR="91440" marT="36576" marB="36576">
+                    <a:solidFill>
+                      <a:srgbClr val="FFFFFF"/>
+                    </a:solidFill>
+                  </a:tcPr>
+                </a:tc>
+                <a:tc>
+                  <a:txBody>
+                    <a:bodyPr/>
+                    <a:lstStyle/>
+                    <a:p>
+                      <a:pPr algn="l"/>
+                      <a:r>
+                        <a:rPr sz="1200" b="0" i="0">
+                          <a:solidFill>
+                            <a:srgbClr val="2B2B2B"/>
+                          </a:solidFill>
+                          <a:latin typeface="Calibri"/>
+                        </a:rPr>
+                        <a:t>Bases teóricas organizadas por concepto</a:t>
+                      </a:r>
+                    </a:p>
+                  </a:txBody>
+                  <a:tcPr anchor="ctr" marL="109728" marR="91440" marT="36576" marB="36576">
+                    <a:solidFill>
+                      <a:srgbClr val="FFFFFF"/>
+                    </a:solidFill>
+                  </a:tcPr>
+                </a:tc>
+              </a:tr>
+              <a:tr h="502920">
+                <a:tc>
+                  <a:txBody>
+                    <a:bodyPr/>
+                    <a:lstStyle/>
+                    <a:p>
+                      <a:pPr algn="l"/>
+                      <a:r>
+                        <a:rPr sz="1200" b="1" i="0">
+                          <a:solidFill>
+                            <a:srgbClr val="2B2B2B"/>
+                          </a:solidFill>
+                          <a:latin typeface="Calibri"/>
+                        </a:rPr>
+                        <a:t>06</a:t>
+                      </a:r>
+                    </a:p>
+                  </a:txBody>
+                  <a:tcPr anchor="ctr" marL="109728" marR="91440" marT="36576" marB="36576">
+                    <a:solidFill>
+                      <a:srgbClr val="F2F2F2"/>
+                    </a:solidFill>
+                  </a:tcPr>
+                </a:tc>
+                <a:tc>
+                  <a:txBody>
+                    <a:bodyPr/>
+                    <a:lstStyle/>
+                    <a:p>
+                      <a:pPr algn="l"/>
+                      <a:r>
+                        <a:rPr sz="1200" b="0" i="0">
+                          <a:solidFill>
+                            <a:srgbClr val="2B2B2B"/>
+                          </a:solidFill>
+                          <a:latin typeface="Calibri"/>
+                        </a:rPr>
+                        <a:t>Marco conceptual y contextual</a:t>
+                      </a:r>
+                    </a:p>
+                  </a:txBody>
+                  <a:tcPr anchor="ctr" marL="109728" marR="91440" marT="36576" marB="36576">
+                    <a:solidFill>
+                      <a:srgbClr val="F2F2F2"/>
+                    </a:solidFill>
+                  </a:tcPr>
+                </a:tc>
+                <a:tc>
+                  <a:txBody>
+                    <a:bodyPr/>
+                    <a:lstStyle/>
+                    <a:p>
+                      <a:pPr algn="l"/>
+                      <a:r>
+                        <a:rPr sz="1200" b="0" i="0">
+                          <a:solidFill>
+                            <a:srgbClr val="2B2B2B"/>
+                          </a:solidFill>
+                          <a:latin typeface="Calibri"/>
+                        </a:rPr>
+                        <a:t>Definiciones operativas y contexto concreto</a:t>
+                      </a:r>
+                    </a:p>
+                  </a:txBody>
+                  <a:tcPr anchor="ctr" marL="109728" marR="91440" marT="36576" marB="36576">
+                    <a:solidFill>
+                      <a:srgbClr val="F2F2F2"/>
+                    </a:solidFill>
+                  </a:tcPr>
+                </a:tc>
+              </a:tr>
+            </a:tbl>
+          </a:graphicData>
+        </a:graphic>
+      </p:graphicFrame>
       <p:sp>
         <p:nvSpPr>
           <p:cNvPr id="5" name="TextBox 4"/>
@@ -6192,8 +14162,8 @@
         </p:nvSpPr>
         <p:spPr>
           <a:xfrm>
-            <a:off x="640080" y="3017520"/>
-            <a:ext cx="10911535" cy="1645920"/>
+            <a:off x="640080" y="5349240"/>
+            <a:ext cx="10911535" cy="548640"/>
           </a:xfrm>
           <a:prstGeom prst="rect">
             <a:avLst/>
@@ -6206,44 +14176,50 @@
           </a:bodyPr>
           <a:lstStyle/>
           <a:p>
-            <a:pPr algn="ctr">
-              <a:spcAft>
-                <a:spcPts val="600"/>
-              </a:spcAft>
-            </a:pPr>
-            <a:r>
-              <a:rPr sz="1600" b="0" i="0">
-                <a:solidFill>
-                  <a:srgbClr val="2B2B2B"/>
-                </a:solidFill>
-                <a:latin typeface="Calibri"/>
-              </a:rPr>
-              <a:t>Ya sabemos qué haremos, cómo se evalúa y quién es quién.</a:t>
-            </a:r>
-          </a:p>
-          <a:p>
-            <a:pPr algn="ctr">
-              <a:spcAft>
-                <a:spcPts val="600"/>
-              </a:spcAft>
-            </a:pPr>
-            <a:r>
-              <a:rPr sz="1600" b="1" i="0">
-                <a:solidFill>
-                  <a:srgbClr val="2B2B2B"/>
-                </a:solidFill>
-                <a:latin typeface="Calibri"/>
-              </a:rPr>
-              <a:t>Sesión 02:</a:t>
-            </a:r>
-            <a:r>
-              <a:rPr sz="1600" b="0" i="0">
-                <a:solidFill>
-                  <a:srgbClr val="2B2B2B"/>
-                </a:solidFill>
-                <a:latin typeface="Calibri"/>
-              </a:rPr>
-              <a:t> arranca el contenido del curso.</a:t>
+            <a:r>
+              <a:rPr sz="1200" b="0" i="1">
+                <a:solidFill>
+                  <a:srgbClr val="2B2B2B"/>
+                </a:solidFill>
+                <a:latin typeface="Calibri"/>
+              </a:rPr>
+              <a:t>Cuando un lunes sea </a:t>
+            </a:r>
+            <a:r>
+              <a:rPr sz="1200" b="1" i="1">
+                <a:solidFill>
+                  <a:srgbClr val="2B2B2B"/>
+                </a:solidFill>
+                <a:latin typeface="Calibri"/>
+              </a:rPr>
+              <a:t>festivo</a:t>
+            </a:r>
+            <a:r>
+              <a:rPr sz="1200" b="0" i="1">
+                <a:solidFill>
+                  <a:srgbClr val="2B2B2B"/>
+                </a:solidFill>
+                <a:latin typeface="Calibri"/>
+              </a:rPr>
+              <a:t>, esa sesión es </a:t>
+            </a:r>
+            <a:r>
+              <a:rPr sz="1200" b="1" i="1">
+                <a:solidFill>
+                  <a:srgbClr val="2B2B2B"/>
+                </a:solidFill>
+                <a:latin typeface="Calibri"/>
+              </a:rPr>
+              <a:t>clase autónoma</a:t>
+            </a:r>
+            <a:r>
+              <a:rPr sz="1200" b="0" i="1">
+                <a:solidFill>
+                  <a:srgbClr val="2B2B2B"/>
+                </a:solidFill>
+                <a:latin typeface="Calibri"/>
+              </a:rPr>
+              <a:t>: no se cancela, la actividad queda publicada en CDigital.</a:t>
             </a:r>
           </a:p>
         </p:txBody>
@@ -6256,8 +14232,8 @@
         </p:nvSpPr>
         <p:spPr>
           <a:xfrm>
-            <a:off x="640080" y="4754880"/>
-            <a:ext cx="10911535" cy="640080"/>
+            <a:off x="2194560" y="6446520"/>
+            <a:ext cx="5943600" cy="274320"/>
           </a:xfrm>
           <a:prstGeom prst="rect">
             <a:avLst/>
@@ -6270,15 +14246,15 @@
           </a:bodyPr>
           <a:lstStyle/>
           <a:p>
-            <a:pPr algn="ctr"/>
-            <a:r>
-              <a:rPr sz="2000" b="1" i="0">
-                <a:solidFill>
-                  <a:srgbClr val="007433"/>
-                </a:solidFill>
-                <a:latin typeface="Calibri"/>
-              </a:rPr>
-              <a:t>TRABAJO DE GRADO 2</a:t>
+            <a:pPr algn="l"/>
+            <a:r>
+              <a:rPr sz="1000" b="1" i="0">
+                <a:solidFill>
+                  <a:srgbClr val="8F989D"/>
+                </a:solidFill>
+                <a:latin typeface="Calibri"/>
+              </a:rPr>
+              <a:t>Inicio 5:10 pm</a:t>
             </a:r>
           </a:p>
         </p:txBody>
@@ -6291,8 +14267,8 @@
         </p:nvSpPr>
         <p:spPr>
           <a:xfrm>
-            <a:off x="2194560" y="6446520"/>
-            <a:ext cx="5943600" cy="274320"/>
+            <a:off x="11094415" y="6446520"/>
+            <a:ext cx="548640" cy="274320"/>
           </a:xfrm>
           <a:prstGeom prst="rect">
             <a:avLst/>
@@ -6305,6 +14281,651 @@
           </a:bodyPr>
           <a:lstStyle/>
           <a:p>
+            <a:pPr algn="r"/>
+            <a:r>
+              <a:rPr sz="1000" b="1" i="0">
+                <a:solidFill>
+                  <a:srgbClr val="8F989D"/>
+                </a:solidFill>
+                <a:latin typeface="Calibri"/>
+              </a:rPr>
+              <a:t>8</a:t>
+            </a:r>
+          </a:p>
+        </p:txBody>
+      </p:sp>
+    </p:spTree>
+  </p:cSld>
+  <p:clrMapOvr>
+    <a:masterClrMapping/>
+  </p:clrMapOvr>
+</p:sld>
+</file>
+
+<file path=ppt/slides/slide9.xml><?xml version="1.0" encoding="utf-8"?>
+<p:sld xmlns:a="http://schemas.openxmlformats.org/drawingml/2006/main" xmlns:p="http://schemas.openxmlformats.org/presentationml/2006/main" xmlns:r="http://schemas.openxmlformats.org/officeDocument/2006/relationships">
+  <p:cSld>
+    <p:bg>
+      <p:bgPr>
+        <a:solidFill>
+          <a:srgbClr val="FFFFFF"/>
+        </a:solidFill>
+        <a:effectLst/>
+      </p:bgPr>
+    </p:bg>
+    <p:spTree>
+      <p:nvGrpSpPr>
+        <p:cNvPr id="1" name=""/>
+        <p:cNvGrpSpPr/>
+        <p:nvPr/>
+      </p:nvGrpSpPr>
+      <p:grpSpPr/>
+      <p:sp>
+        <p:nvSpPr>
+          <p:cNvPr id="2" name="Rectangle 1"/>
+          <p:cNvSpPr/>
+          <p:nvPr/>
+        </p:nvSpPr>
+        <p:spPr>
+          <a:xfrm>
+            <a:off x="0" y="0"/>
+            <a:ext cx="12191695" cy="1188720"/>
+          </a:xfrm>
+          <a:prstGeom prst="rect">
+            <a:avLst/>
+          </a:prstGeom>
+          <a:solidFill>
+            <a:srgbClr val="0C2340"/>
+          </a:solidFill>
+          <a:ln>
+            <a:noFill/>
+          </a:ln>
+          <a:effectLst/>
+        </p:spPr>
+        <p:style>
+          <a:lnRef idx="1">
+            <a:schemeClr val="accent1"/>
+          </a:lnRef>
+          <a:fillRef idx="3">
+            <a:schemeClr val="accent1"/>
+          </a:fillRef>
+          <a:effectRef idx="2">
+            <a:schemeClr val="accent1"/>
+          </a:effectRef>
+          <a:fontRef idx="minor">
+            <a:schemeClr val="lt1"/>
+          </a:fontRef>
+        </p:style>
+        <p:txBody>
+          <a:bodyPr rtlCol="0" anchor="ctr"/>
+          <a:lstStyle/>
+          <a:p>
+            <a:pPr algn="ctr"/>
+          </a:p>
+        </p:txBody>
+      </p:sp>
+      <p:sp>
+        <p:nvSpPr>
+          <p:cNvPr id="3" name="TextBox 2"/>
+          <p:cNvSpPr txBox="1"/>
+          <p:nvPr/>
+        </p:nvSpPr>
+        <p:spPr>
+          <a:xfrm>
+            <a:off x="640080" y="0"/>
+            <a:ext cx="9082735" cy="1188720"/>
+          </a:xfrm>
+          <a:prstGeom prst="rect">
+            <a:avLst/>
+          </a:prstGeom>
+          <a:noFill/>
+        </p:spPr>
+        <p:txBody>
+          <a:bodyPr wrap="square" anchor="ctr" lIns="0" rIns="0" tIns="0" bIns="0">
+            <a:spAutoFit/>
+          </a:bodyPr>
+          <a:lstStyle/>
+          <a:p>
+            <a:pPr algn="ctr"/>
+            <a:r>
+              <a:rPr sz="2600" b="1" i="0">
+                <a:solidFill>
+                  <a:srgbClr val="FFFFFF"/>
+                </a:solidFill>
+                <a:latin typeface="Calibri"/>
+              </a:rPr>
+              <a:t>Mapa del curso (2/2): del método al cierre del avance</a:t>
+            </a:r>
+          </a:p>
+        </p:txBody>
+      </p:sp>
+      <p:graphicFrame>
+        <p:nvGraphicFramePr>
+          <p:cNvPr id="4" name="Table 3"/>
+          <p:cNvGraphicFramePr>
+            <a:graphicFrameLocks noGrp="1"/>
+          </p:cNvGraphicFramePr>
+          <p:nvPr/>
+        </p:nvGraphicFramePr>
+        <p:xfrm>
+          <a:off x="640080" y="1691639"/>
+          <a:ext cx="10911533" cy="3017520"/>
+        </p:xfrm>
+        <a:graphic>
+          <a:graphicData uri="http://schemas.openxmlformats.org/drawingml/2006/table">
+            <a:tbl>
+              <a:tblPr>
+                <a:tableStyleId>{2D5ABB26-0587-4C30-8999-92F81FD0307C}</a:tableStyleId>
+              </a:tblPr>
+              <a:tblGrid>
+                <a:gridCol w="1008629"/>
+                <a:gridCol w="4951452"/>
+                <a:gridCol w="4951452"/>
+              </a:tblGrid>
+              <a:tr h="502920">
+                <a:tc>
+                  <a:txBody>
+                    <a:bodyPr/>
+                    <a:lstStyle/>
+                    <a:p>
+                      <a:pPr algn="l"/>
+                      <a:r>
+                        <a:rPr sz="1300" b="1" i="0">
+                          <a:solidFill>
+                            <a:srgbClr val="FFFFFF"/>
+                          </a:solidFill>
+                          <a:latin typeface="Calibri"/>
+                        </a:rPr>
+                        <a:t>Sesión</a:t>
+                      </a:r>
+                    </a:p>
+                  </a:txBody>
+                  <a:tcPr anchor="ctr" marL="109728" marR="91440" marT="36576" marB="36576">
+                    <a:solidFill>
+                      <a:srgbClr val="0C2340"/>
+                    </a:solidFill>
+                  </a:tcPr>
+                </a:tc>
+                <a:tc>
+                  <a:txBody>
+                    <a:bodyPr/>
+                    <a:lstStyle/>
+                    <a:p>
+                      <a:pPr algn="l"/>
+                      <a:r>
+                        <a:rPr sz="1300" b="1" i="0">
+                          <a:solidFill>
+                            <a:srgbClr val="FFFFFF"/>
+                          </a:solidFill>
+                          <a:latin typeface="Calibri"/>
+                        </a:rPr>
+                        <a:t>De qué se ocupa</a:t>
+                      </a:r>
+                    </a:p>
+                  </a:txBody>
+                  <a:tcPr anchor="ctr" marL="109728" marR="91440" marT="36576" marB="36576">
+                    <a:solidFill>
+                      <a:srgbClr val="0C2340"/>
+                    </a:solidFill>
+                  </a:tcPr>
+                </a:tc>
+                <a:tc>
+                  <a:txBody>
+                    <a:bodyPr/>
+                    <a:lstStyle/>
+                    <a:p>
+                      <a:pPr algn="l"/>
+                      <a:r>
+                        <a:rPr sz="1300" b="1" i="0">
+                          <a:solidFill>
+                            <a:srgbClr val="FFFFFF"/>
+                          </a:solidFill>
+                          <a:latin typeface="Calibri"/>
+                        </a:rPr>
+                        <a:t>Qué queda escrito</a:t>
+                      </a:r>
+                    </a:p>
+                  </a:txBody>
+                  <a:tcPr anchor="ctr" marL="109728" marR="91440" marT="36576" marB="36576">
+                    <a:solidFill>
+                      <a:srgbClr val="0C2340"/>
+                    </a:solidFill>
+                  </a:tcPr>
+                </a:tc>
+              </a:tr>
+              <a:tr h="502920">
+                <a:tc>
+                  <a:txBody>
+                    <a:bodyPr/>
+                    <a:lstStyle/>
+                    <a:p>
+                      <a:pPr algn="l"/>
+                      <a:r>
+                        <a:rPr sz="1200" b="1" i="0">
+                          <a:solidFill>
+                            <a:srgbClr val="2B2B2B"/>
+                          </a:solidFill>
+                          <a:latin typeface="Calibri"/>
+                        </a:rPr>
+                        <a:t>07</a:t>
+                      </a:r>
+                    </a:p>
+                  </a:txBody>
+                  <a:tcPr anchor="ctr" marL="109728" marR="91440" marT="36576" marB="36576">
+                    <a:solidFill>
+                      <a:srgbClr val="FFFFFF"/>
+                    </a:solidFill>
+                  </a:tcPr>
+                </a:tc>
+                <a:tc>
+                  <a:txBody>
+                    <a:bodyPr/>
+                    <a:lstStyle/>
+                    <a:p>
+                      <a:pPr algn="l"/>
+                      <a:r>
+                        <a:rPr sz="1200" b="0" i="0">
+                          <a:solidFill>
+                            <a:srgbClr val="2B2B2B"/>
+                          </a:solidFill>
+                          <a:latin typeface="Calibri"/>
+                        </a:rPr>
+                        <a:t>Diseño metodológico (propuesto)</a:t>
+                      </a:r>
+                    </a:p>
+                  </a:txBody>
+                  <a:tcPr anchor="ctr" marL="109728" marR="91440" marT="36576" marB="36576">
+                    <a:solidFill>
+                      <a:srgbClr val="FFFFFF"/>
+                    </a:solidFill>
+                  </a:tcPr>
+                </a:tc>
+                <a:tc>
+                  <a:txBody>
+                    <a:bodyPr/>
+                    <a:lstStyle/>
+                    <a:p>
+                      <a:pPr algn="l"/>
+                      <a:r>
+                        <a:rPr sz="1200" b="0" i="0">
+                          <a:solidFill>
+                            <a:srgbClr val="2B2B2B"/>
+                          </a:solidFill>
+                          <a:latin typeface="Calibri"/>
+                        </a:rPr>
+                        <a:t>Enfoque, tipo y alcance, escritos en futuro</a:t>
+                      </a:r>
+                    </a:p>
+                  </a:txBody>
+                  <a:tcPr anchor="ctr" marL="109728" marR="91440" marT="36576" marB="36576">
+                    <a:solidFill>
+                      <a:srgbClr val="FFFFFF"/>
+                    </a:solidFill>
+                  </a:tcPr>
+                </a:tc>
+              </a:tr>
+              <a:tr h="502920">
+                <a:tc>
+                  <a:txBody>
+                    <a:bodyPr/>
+                    <a:lstStyle/>
+                    <a:p>
+                      <a:pPr algn="l"/>
+                      <a:r>
+                        <a:rPr sz="1200" b="1" i="0">
+                          <a:solidFill>
+                            <a:srgbClr val="2B2B2B"/>
+                          </a:solidFill>
+                          <a:latin typeface="Calibri"/>
+                        </a:rPr>
+                        <a:t>08</a:t>
+                      </a:r>
+                    </a:p>
+                  </a:txBody>
+                  <a:tcPr anchor="ctr" marL="109728" marR="91440" marT="36576" marB="36576">
+                    <a:solidFill>
+                      <a:srgbClr val="F2F2F2"/>
+                    </a:solidFill>
+                  </a:tcPr>
+                </a:tc>
+                <a:tc>
+                  <a:txBody>
+                    <a:bodyPr/>
+                    <a:lstStyle/>
+                    <a:p>
+                      <a:pPr algn="l"/>
+                      <a:r>
+                        <a:rPr sz="1200" b="0" i="0">
+                          <a:solidFill>
+                            <a:srgbClr val="2B2B2B"/>
+                          </a:solidFill>
+                          <a:latin typeface="Calibri"/>
+                        </a:rPr>
+                        <a:t>Instrumentos y plan de análisis (propuestos)</a:t>
+                      </a:r>
+                    </a:p>
+                  </a:txBody>
+                  <a:tcPr anchor="ctr" marL="109728" marR="91440" marT="36576" marB="36576">
+                    <a:solidFill>
+                      <a:srgbClr val="F2F2F2"/>
+                    </a:solidFill>
+                  </a:tcPr>
+                </a:tc>
+                <a:tc>
+                  <a:txBody>
+                    <a:bodyPr/>
+                    <a:lstStyle/>
+                    <a:p>
+                      <a:pPr algn="l"/>
+                      <a:r>
+                        <a:rPr sz="1200" b="0" i="0">
+                          <a:solidFill>
+                            <a:srgbClr val="2B2B2B"/>
+                          </a:solidFill>
+                          <a:latin typeface="Calibri"/>
+                        </a:rPr>
+                        <a:t>Bosquejo de instrumento y plan de análisis</a:t>
+                      </a:r>
+                    </a:p>
+                  </a:txBody>
+                  <a:tcPr anchor="ctr" marL="109728" marR="91440" marT="36576" marB="36576">
+                    <a:solidFill>
+                      <a:srgbClr val="F2F2F2"/>
+                    </a:solidFill>
+                  </a:tcPr>
+                </a:tc>
+              </a:tr>
+              <a:tr h="502920">
+                <a:tc>
+                  <a:txBody>
+                    <a:bodyPr/>
+                    <a:lstStyle/>
+                    <a:p>
+                      <a:pPr algn="l"/>
+                      <a:r>
+                        <a:rPr sz="1200" b="1" i="0">
+                          <a:solidFill>
+                            <a:srgbClr val="2B2B2B"/>
+                          </a:solidFill>
+                          <a:latin typeface="Calibri"/>
+                        </a:rPr>
+                        <a:t>09</a:t>
+                      </a:r>
+                    </a:p>
+                  </a:txBody>
+                  <a:tcPr anchor="ctr" marL="109728" marR="91440" marT="36576" marB="36576">
+                    <a:solidFill>
+                      <a:srgbClr val="FFFFFF"/>
+                    </a:solidFill>
+                  </a:tcPr>
+                </a:tc>
+                <a:tc>
+                  <a:txBody>
+                    <a:bodyPr/>
+                    <a:lstStyle/>
+                    <a:p>
+                      <a:pPr algn="l"/>
+                      <a:r>
+                        <a:rPr sz="1200" b="0" i="0">
+                          <a:solidFill>
+                            <a:srgbClr val="2B2B2B"/>
+                          </a:solidFill>
+                          <a:latin typeface="Calibri"/>
+                        </a:rPr>
+                        <a:t>Integración del avance · correcciones</a:t>
+                      </a:r>
+                    </a:p>
+                  </a:txBody>
+                  <a:tcPr anchor="ctr" marL="109728" marR="91440" marT="36576" marB="36576">
+                    <a:solidFill>
+                      <a:srgbClr val="FFFFFF"/>
+                    </a:solidFill>
+                  </a:tcPr>
+                </a:tc>
+                <a:tc>
+                  <a:txBody>
+                    <a:bodyPr/>
+                    <a:lstStyle/>
+                    <a:p>
+                      <a:pPr algn="l"/>
+                      <a:r>
+                        <a:rPr sz="1200" b="0" i="0">
+                          <a:solidFill>
+                            <a:srgbClr val="2B2B2B"/>
+                          </a:solidFill>
+                          <a:latin typeface="Calibri"/>
+                        </a:rPr>
+                        <a:t>Documento consolidado y coherente</a:t>
+                      </a:r>
+                    </a:p>
+                  </a:txBody>
+                  <a:tcPr anchor="ctr" marL="109728" marR="91440" marT="36576" marB="36576">
+                    <a:solidFill>
+                      <a:srgbClr val="FFFFFF"/>
+                    </a:solidFill>
+                  </a:tcPr>
+                </a:tc>
+              </a:tr>
+              <a:tr h="502920">
+                <a:tc>
+                  <a:txBody>
+                    <a:bodyPr/>
+                    <a:lstStyle/>
+                    <a:p>
+                      <a:pPr algn="l"/>
+                      <a:r>
+                        <a:rPr sz="1200" b="1" i="0">
+                          <a:solidFill>
+                            <a:srgbClr val="2B2B2B"/>
+                          </a:solidFill>
+                          <a:latin typeface="Calibri"/>
+                        </a:rPr>
+                        <a:t>10</a:t>
+                      </a:r>
+                    </a:p>
+                  </a:txBody>
+                  <a:tcPr anchor="ctr" marL="109728" marR="91440" marT="36576" marB="36576">
+                    <a:solidFill>
+                      <a:srgbClr val="F2F2F2"/>
+                    </a:solidFill>
+                  </a:tcPr>
+                </a:tc>
+                <a:tc>
+                  <a:txBody>
+                    <a:bodyPr/>
+                    <a:lstStyle/>
+                    <a:p>
+                      <a:pPr algn="l"/>
+                      <a:r>
+                        <a:rPr sz="1200" b="0" i="0">
+                          <a:solidFill>
+                            <a:srgbClr val="2B2B2B"/>
+                          </a:solidFill>
+                          <a:latin typeface="Calibri"/>
+                        </a:rPr>
+                        <a:t>Socialización de avances</a:t>
+                      </a:r>
+                    </a:p>
+                  </a:txBody>
+                  <a:tcPr anchor="ctr" marL="109728" marR="91440" marT="36576" marB="36576">
+                    <a:solidFill>
+                      <a:srgbClr val="F2F2F2"/>
+                    </a:solidFill>
+                  </a:tcPr>
+                </a:tc>
+                <a:tc>
+                  <a:txBody>
+                    <a:bodyPr/>
+                    <a:lstStyle/>
+                    <a:p>
+                      <a:pPr algn="l"/>
+                      <a:r>
+                        <a:rPr sz="1200" b="0" i="0">
+                          <a:solidFill>
+                            <a:srgbClr val="2B2B2B"/>
+                          </a:solidFill>
+                          <a:latin typeface="Calibri"/>
+                        </a:rPr>
+                        <a:t>Pitch de 3 minutos y retroalimentación de pares</a:t>
+                      </a:r>
+                    </a:p>
+                  </a:txBody>
+                  <a:tcPr anchor="ctr" marL="109728" marR="91440" marT="36576" marB="36576">
+                    <a:solidFill>
+                      <a:srgbClr val="F2F2F2"/>
+                    </a:solidFill>
+                  </a:tcPr>
+                </a:tc>
+              </a:tr>
+              <a:tr h="502920">
+                <a:tc>
+                  <a:txBody>
+                    <a:bodyPr/>
+                    <a:lstStyle/>
+                    <a:p>
+                      <a:pPr algn="l"/>
+                      <a:r>
+                        <a:rPr sz="1200" b="1" i="0">
+                          <a:solidFill>
+                            <a:srgbClr val="2B2B2B"/>
+                          </a:solidFill>
+                          <a:latin typeface="Calibri"/>
+                        </a:rPr>
+                        <a:t>11</a:t>
+                      </a:r>
+                    </a:p>
+                  </a:txBody>
+                  <a:tcPr anchor="ctr" marL="109728" marR="91440" marT="36576" marB="36576">
+                    <a:solidFill>
+                      <a:srgbClr val="FFFFFF"/>
+                    </a:solidFill>
+                  </a:tcPr>
+                </a:tc>
+                <a:tc>
+                  <a:txBody>
+                    <a:bodyPr/>
+                    <a:lstStyle/>
+                    <a:p>
+                      <a:pPr algn="l"/>
+                      <a:r>
+                        <a:rPr sz="1200" b="0" i="0">
+                          <a:solidFill>
+                            <a:srgbClr val="2B2B2B"/>
+                          </a:solidFill>
+                          <a:latin typeface="Calibri"/>
+                        </a:rPr>
+                        <a:t>Cierre del avance · preparación para TG3</a:t>
+                      </a:r>
+                    </a:p>
+                  </a:txBody>
+                  <a:tcPr anchor="ctr" marL="109728" marR="91440" marT="36576" marB="36576">
+                    <a:solidFill>
+                      <a:srgbClr val="FFFFFF"/>
+                    </a:solidFill>
+                  </a:tcPr>
+                </a:tc>
+                <a:tc>
+                  <a:txBody>
+                    <a:bodyPr/>
+                    <a:lstStyle/>
+                    <a:p>
+                      <a:pPr algn="l"/>
+                      <a:r>
+                        <a:rPr sz="1200" b="0" i="0">
+                          <a:solidFill>
+                            <a:srgbClr val="2B2B2B"/>
+                          </a:solidFill>
+                          <a:latin typeface="Calibri"/>
+                        </a:rPr>
+                        <a:t>Versión limpia y lista de pendientes para TG3</a:t>
+                      </a:r>
+                    </a:p>
+                  </a:txBody>
+                  <a:tcPr anchor="ctr" marL="109728" marR="91440" marT="36576" marB="36576">
+                    <a:solidFill>
+                      <a:srgbClr val="FFFFFF"/>
+                    </a:solidFill>
+                  </a:tcPr>
+                </a:tc>
+              </a:tr>
+            </a:tbl>
+          </a:graphicData>
+        </a:graphic>
+      </p:graphicFrame>
+      <p:sp>
+        <p:nvSpPr>
+          <p:cNvPr id="5" name="TextBox 4"/>
+          <p:cNvSpPr txBox="1"/>
+          <p:nvPr/>
+        </p:nvSpPr>
+        <p:spPr>
+          <a:xfrm>
+            <a:off x="640080" y="4846320"/>
+            <a:ext cx="10911535" cy="548640"/>
+          </a:xfrm>
+          <a:prstGeom prst="rect">
+            <a:avLst/>
+          </a:prstGeom>
+          <a:noFill/>
+        </p:spPr>
+        <p:txBody>
+          <a:bodyPr wrap="square" anchor="t" lIns="0" rIns="0" tIns="0" bIns="0">
+            <a:spAutoFit/>
+          </a:bodyPr>
+          <a:lstStyle/>
+          <a:p>
+            <a:r>
+              <a:rPr sz="1200" b="0" i="1">
+                <a:solidFill>
+                  <a:srgbClr val="2B2B2B"/>
+                </a:solidFill>
+                <a:latin typeface="Calibri"/>
+              </a:rPr>
+              <a:t>Las once sesiones construyen </a:t>
+            </a:r>
+            <a:r>
+              <a:rPr sz="1200" b="1" i="1">
+                <a:solidFill>
+                  <a:srgbClr val="2B2B2B"/>
+                </a:solidFill>
+                <a:latin typeface="Calibri"/>
+              </a:rPr>
+              <a:t>un solo documento</a:t>
+            </a:r>
+            <a:r>
+              <a:rPr sz="1200" b="0" i="1">
+                <a:solidFill>
+                  <a:srgbClr val="2B2B2B"/>
+                </a:solidFill>
+                <a:latin typeface="Calibri"/>
+              </a:rPr>
+              <a:t>. Si falta a una, la siguiente le va a pedir algo que no escribió.</a:t>
+            </a:r>
+          </a:p>
+        </p:txBody>
+      </p:sp>
+      <p:sp>
+        <p:nvSpPr>
+          <p:cNvPr id="6" name="TextBox 5"/>
+          <p:cNvSpPr txBox="1"/>
+          <p:nvPr/>
+        </p:nvSpPr>
+        <p:spPr>
+          <a:xfrm>
+            <a:off x="2194560" y="6446520"/>
+            <a:ext cx="5943600" cy="274320"/>
+          </a:xfrm>
+          <a:prstGeom prst="rect">
+            <a:avLst/>
+          </a:prstGeom>
+          <a:noFill/>
+        </p:spPr>
+        <p:txBody>
+          <a:bodyPr wrap="square" anchor="t" lIns="0" rIns="0" tIns="0" bIns="0">
+            <a:spAutoFit/>
+          </a:bodyPr>
+          <a:lstStyle/>
+          <a:p>
             <a:pPr algn="l"/>
             <a:r>
               <a:rPr sz="1000" b="1" i="0">
@@ -6314,6 +14935,41 @@
                 <a:latin typeface="Calibri"/>
               </a:rPr>
               <a:t>Inicio 5:10 pm</a:t>
+            </a:r>
+          </a:p>
+        </p:txBody>
+      </p:sp>
+      <p:sp>
+        <p:nvSpPr>
+          <p:cNvPr id="7" name="TextBox 6"/>
+          <p:cNvSpPr txBox="1"/>
+          <p:nvPr/>
+        </p:nvSpPr>
+        <p:spPr>
+          <a:xfrm>
+            <a:off x="11094415" y="6446520"/>
+            <a:ext cx="548640" cy="274320"/>
+          </a:xfrm>
+          <a:prstGeom prst="rect">
+            <a:avLst/>
+          </a:prstGeom>
+          <a:noFill/>
+        </p:spPr>
+        <p:txBody>
+          <a:bodyPr wrap="square" anchor="t" lIns="0" rIns="0" tIns="0" bIns="0">
+            <a:spAutoFit/>
+          </a:bodyPr>
+          <a:lstStyle/>
+          <a:p>
+            <a:pPr algn="r"/>
+            <a:r>
+              <a:rPr sz="1000" b="1" i="0">
+                <a:solidFill>
+                  <a:srgbClr val="8F989D"/>
+                </a:solidFill>
+                <a:latin typeface="Calibri"/>
+              </a:rPr>
+              <a:t>9</a:t>
             </a:r>
           </a:p>
         </p:txBody>

--- a/Pregrado/Trabajo de grado 2/Clases/Sesion 01 - Presentación del curso · docente · estudiantes · ACAs/Presentacion.pptx
+++ b/Pregrado/Trabajo de grado 2/Clases/Sesion 01 - Presentación del curso · docente · estudiantes · ACAs/Presentacion.pptx
@@ -3379,41 +3379,6 @@
           </a:p>
         </p:txBody>
       </p:sp>
-      <p:sp>
-        <p:nvSpPr>
-          <p:cNvPr id="7" name="TextBox 6"/>
-          <p:cNvSpPr txBox="1"/>
-          <p:nvPr/>
-        </p:nvSpPr>
-        <p:spPr>
-          <a:xfrm>
-            <a:off x="2194560" y="6446520"/>
-            <a:ext cx="5943600" cy="274320"/>
-          </a:xfrm>
-          <a:prstGeom prst="rect">
-            <a:avLst/>
-          </a:prstGeom>
-          <a:noFill/>
-        </p:spPr>
-        <p:txBody>
-          <a:bodyPr wrap="square" anchor="t" lIns="0" rIns="0" tIns="0" bIns="0">
-            <a:spAutoFit/>
-          </a:bodyPr>
-          <a:lstStyle/>
-          <a:p>
-            <a:pPr algn="l"/>
-            <a:r>
-              <a:rPr sz="1000" b="1" i="0">
-                <a:solidFill>
-                  <a:srgbClr val="8F989D"/>
-                </a:solidFill>
-                <a:latin typeface="Calibri"/>
-              </a:rPr>
-              <a:t>Inicio 5:10 pm</a:t>
-            </a:r>
-          </a:p>
-        </p:txBody>
-      </p:sp>
     </p:spTree>
   </p:cSld>
   <p:clrMapOvr>
@@ -3822,8 +3787,8 @@
         </p:nvSpPr>
         <p:spPr>
           <a:xfrm>
-            <a:off x="2194560" y="6446520"/>
-            <a:ext cx="5943600" cy="274320"/>
+            <a:off x="11094415" y="6446520"/>
+            <a:ext cx="548640" cy="274320"/>
           </a:xfrm>
           <a:prstGeom prst="rect">
             <a:avLst/>
@@ -3836,7 +3801,7 @@
           </a:bodyPr>
           <a:lstStyle/>
           <a:p>
-            <a:pPr algn="l"/>
+            <a:pPr algn="r"/>
             <a:r>
               <a:rPr sz="1000" b="1" i="0">
                 <a:solidFill>
@@ -3844,7 +3809,7 @@
                 </a:solidFill>
                 <a:latin typeface="Calibri"/>
               </a:rPr>
-              <a:t>Inicio 5:10 pm</a:t>
+              <a:t>10</a:t>
             </a:r>
           </a:p>
         </p:txBody>
@@ -3852,41 +3817,6 @@
       <p:sp>
         <p:nvSpPr>
           <p:cNvPr id="6" name="TextBox 5"/>
-          <p:cNvSpPr txBox="1"/>
-          <p:nvPr/>
-        </p:nvSpPr>
-        <p:spPr>
-          <a:xfrm>
-            <a:off x="11094415" y="6446520"/>
-            <a:ext cx="548640" cy="274320"/>
-          </a:xfrm>
-          <a:prstGeom prst="rect">
-            <a:avLst/>
-          </a:prstGeom>
-          <a:noFill/>
-        </p:spPr>
-        <p:txBody>
-          <a:bodyPr wrap="square" anchor="t" lIns="0" rIns="0" tIns="0" bIns="0">
-            <a:spAutoFit/>
-          </a:bodyPr>
-          <a:lstStyle/>
-          <a:p>
-            <a:pPr algn="r"/>
-            <a:r>
-              <a:rPr sz="1000" b="1" i="0">
-                <a:solidFill>
-                  <a:srgbClr val="8F989D"/>
-                </a:solidFill>
-                <a:latin typeface="Calibri"/>
-              </a:rPr>
-              <a:t>10</a:t>
-            </a:r>
-          </a:p>
-        </p:txBody>
-      </p:sp>
-      <p:sp>
-        <p:nvSpPr>
-          <p:cNvPr id="7" name="TextBox 6"/>
           <p:cNvSpPr txBox="1"/>
           <p:nvPr/>
         </p:nvSpPr>
@@ -4303,41 +4233,6 @@
       <p:sp>
         <p:nvSpPr>
           <p:cNvPr id="5" name="TextBox 4"/>
-          <p:cNvSpPr txBox="1"/>
-          <p:nvPr/>
-        </p:nvSpPr>
-        <p:spPr>
-          <a:xfrm>
-            <a:off x="2194560" y="6446520"/>
-            <a:ext cx="5943600" cy="274320"/>
-          </a:xfrm>
-          <a:prstGeom prst="rect">
-            <a:avLst/>
-          </a:prstGeom>
-          <a:noFill/>
-        </p:spPr>
-        <p:txBody>
-          <a:bodyPr wrap="square" anchor="t" lIns="0" rIns="0" tIns="0" bIns="0">
-            <a:spAutoFit/>
-          </a:bodyPr>
-          <a:lstStyle/>
-          <a:p>
-            <a:pPr algn="l"/>
-            <a:r>
-              <a:rPr sz="1000" b="1" i="0">
-                <a:solidFill>
-                  <a:srgbClr val="8F989D"/>
-                </a:solidFill>
-                <a:latin typeface="Calibri"/>
-              </a:rPr>
-              <a:t>Inicio 5:10 pm</a:t>
-            </a:r>
-          </a:p>
-        </p:txBody>
-      </p:sp>
-      <p:sp>
-        <p:nvSpPr>
-          <p:cNvPr id="6" name="TextBox 5"/>
           <p:cNvSpPr txBox="1"/>
           <p:nvPr/>
         </p:nvSpPr>
@@ -4939,41 +4834,6 @@
         </p:nvSpPr>
         <p:spPr>
           <a:xfrm>
-            <a:off x="2194560" y="6446520"/>
-            <a:ext cx="5943600" cy="274320"/>
-          </a:xfrm>
-          <a:prstGeom prst="rect">
-            <a:avLst/>
-          </a:prstGeom>
-          <a:noFill/>
-        </p:spPr>
-        <p:txBody>
-          <a:bodyPr wrap="square" anchor="t" lIns="0" rIns="0" tIns="0" bIns="0">
-            <a:spAutoFit/>
-          </a:bodyPr>
-          <a:lstStyle/>
-          <a:p>
-            <a:pPr algn="l"/>
-            <a:r>
-              <a:rPr sz="1000" b="1" i="0">
-                <a:solidFill>
-                  <a:srgbClr val="8F989D"/>
-                </a:solidFill>
-                <a:latin typeface="Calibri"/>
-              </a:rPr>
-              <a:t>Inicio 5:10 pm</a:t>
-            </a:r>
-          </a:p>
-        </p:txBody>
-      </p:sp>
-      <p:sp>
-        <p:nvSpPr>
-          <p:cNvPr id="7" name="TextBox 6"/>
-          <p:cNvSpPr txBox="1"/>
-          <p:nvPr/>
-        </p:nvSpPr>
-        <p:spPr>
-          <a:xfrm>
             <a:off x="11094415" y="6446520"/>
             <a:ext cx="548640" cy="274320"/>
           </a:xfrm>
@@ -5535,41 +5395,6 @@
         </p:nvSpPr>
         <p:spPr>
           <a:xfrm>
-            <a:off x="2194560" y="6446520"/>
-            <a:ext cx="5943600" cy="274320"/>
-          </a:xfrm>
-          <a:prstGeom prst="rect">
-            <a:avLst/>
-          </a:prstGeom>
-          <a:noFill/>
-        </p:spPr>
-        <p:txBody>
-          <a:bodyPr wrap="square" anchor="t" lIns="0" rIns="0" tIns="0" bIns="0">
-            <a:spAutoFit/>
-          </a:bodyPr>
-          <a:lstStyle/>
-          <a:p>
-            <a:pPr algn="l"/>
-            <a:r>
-              <a:rPr sz="1000" b="1" i="0">
-                <a:solidFill>
-                  <a:srgbClr val="8F989D"/>
-                </a:solidFill>
-                <a:latin typeface="Calibri"/>
-              </a:rPr>
-              <a:t>Inicio 5:10 pm</a:t>
-            </a:r>
-          </a:p>
-        </p:txBody>
-      </p:sp>
-      <p:sp>
-        <p:nvSpPr>
-          <p:cNvPr id="6" name="TextBox 5"/>
-          <p:cNvSpPr txBox="1"/>
-          <p:nvPr/>
-        </p:nvSpPr>
-        <p:spPr>
-          <a:xfrm>
             <a:off x="11094415" y="6446520"/>
             <a:ext cx="548640" cy="274320"/>
           </a:xfrm>
@@ -5904,7 +5729,7 @@
                 </a:solidFill>
                 <a:latin typeface="Calibri"/>
               </a:rPr>
-              <a:t>–   En TG3 el documento pasa por la </a:t>
+              <a:t>–   En TG3 la entrega pasa por la </a:t>
             </a:r>
             <a:r>
               <a:rPr sz="1600" b="1" i="0">
@@ -5913,7 +5738,7 @@
                 </a:solidFill>
                 <a:latin typeface="Calibri"/>
               </a:rPr>
-              <a:t>herramienta antiplagio institucional del campus</a:t>
+              <a:t>revisión de similitud institucional del aula (CDigital)</a:t>
             </a:r>
             <a:r>
               <a:rPr sz="1600" b="0" i="0">
@@ -5922,7 +5747,7 @@
                 </a:solidFill>
                 <a:latin typeface="Calibri"/>
               </a:rPr>
-              <a:t>: el hábito se corrige aquí, no allá.</a:t>
+              <a:t>, y allá el Docente confirma cómo opera: el hábito se corrige aquí, no allá.</a:t>
             </a:r>
           </a:p>
           <a:p>
@@ -5969,8 +5794,8 @@
         </p:nvSpPr>
         <p:spPr>
           <a:xfrm>
-            <a:off x="2194560" y="6446520"/>
-            <a:ext cx="5943600" cy="274320"/>
+            <a:off x="11094415" y="6446520"/>
+            <a:ext cx="548640" cy="274320"/>
           </a:xfrm>
           <a:prstGeom prst="rect">
             <a:avLst/>
@@ -5983,7 +5808,7 @@
           </a:bodyPr>
           <a:lstStyle/>
           <a:p>
-            <a:pPr algn="l"/>
+            <a:pPr algn="r"/>
             <a:r>
               <a:rPr sz="1000" b="1" i="0">
                 <a:solidFill>
@@ -5991,7 +5816,7 @@
                 </a:solidFill>
                 <a:latin typeface="Calibri"/>
               </a:rPr>
-              <a:t>Inicio 5:10 pm</a:t>
+              <a:t>14</a:t>
             </a:r>
           </a:p>
         </p:txBody>
@@ -5999,41 +5824,6 @@
       <p:sp>
         <p:nvSpPr>
           <p:cNvPr id="6" name="TextBox 5"/>
-          <p:cNvSpPr txBox="1"/>
-          <p:nvPr/>
-        </p:nvSpPr>
-        <p:spPr>
-          <a:xfrm>
-            <a:off x="11094415" y="6446520"/>
-            <a:ext cx="548640" cy="274320"/>
-          </a:xfrm>
-          <a:prstGeom prst="rect">
-            <a:avLst/>
-          </a:prstGeom>
-          <a:noFill/>
-        </p:spPr>
-        <p:txBody>
-          <a:bodyPr wrap="square" anchor="t" lIns="0" rIns="0" tIns="0" bIns="0">
-            <a:spAutoFit/>
-          </a:bodyPr>
-          <a:lstStyle/>
-          <a:p>
-            <a:pPr algn="r"/>
-            <a:r>
-              <a:rPr sz="1000" b="1" i="0">
-                <a:solidFill>
-                  <a:srgbClr val="8F989D"/>
-                </a:solidFill>
-                <a:latin typeface="Calibri"/>
-              </a:rPr>
-              <a:t>14</a:t>
-            </a:r>
-          </a:p>
-        </p:txBody>
-      </p:sp>
-      <p:sp>
-        <p:nvSpPr>
-          <p:cNvPr id="7" name="TextBox 6"/>
           <p:cNvSpPr txBox="1"/>
           <p:nvPr/>
         </p:nvSpPr>
@@ -6505,41 +6295,6 @@
         </p:nvSpPr>
         <p:spPr>
           <a:xfrm>
-            <a:off x="2194560" y="6446520"/>
-            <a:ext cx="5943600" cy="274320"/>
-          </a:xfrm>
-          <a:prstGeom prst="rect">
-            <a:avLst/>
-          </a:prstGeom>
-          <a:noFill/>
-        </p:spPr>
-        <p:txBody>
-          <a:bodyPr wrap="square" anchor="t" lIns="0" rIns="0" tIns="0" bIns="0">
-            <a:spAutoFit/>
-          </a:bodyPr>
-          <a:lstStyle/>
-          <a:p>
-            <a:pPr algn="l"/>
-            <a:r>
-              <a:rPr sz="1000" b="1" i="0">
-                <a:solidFill>
-                  <a:srgbClr val="8F989D"/>
-                </a:solidFill>
-                <a:latin typeface="Calibri"/>
-              </a:rPr>
-              <a:t>Inicio 5:10 pm</a:t>
-            </a:r>
-          </a:p>
-        </p:txBody>
-      </p:sp>
-      <p:sp>
-        <p:nvSpPr>
-          <p:cNvPr id="11" name="TextBox 10"/>
-          <p:cNvSpPr txBox="1"/>
-          <p:nvPr/>
-        </p:nvSpPr>
-        <p:spPr>
-          <a:xfrm>
             <a:off x="11094415" y="6446520"/>
             <a:ext cx="548640" cy="274320"/>
           </a:xfrm>
@@ -6682,7 +6437,7 @@
         </p:nvGraphicFramePr>
         <p:xfrm>
           <a:off x="640080" y="1691639"/>
-          <a:ext cx="10911533" cy="4526280"/>
+          <a:ext cx="10911533" cy="4023360"/>
         </p:xfrm>
         <a:graphic>
           <a:graphicData uri="http://schemas.openxmlformats.org/drawingml/2006/table">
@@ -7263,77 +7018,6 @@
                   </a:tcPr>
                 </a:tc>
               </a:tr>
-              <a:tr h="502920">
-                <a:tc>
-                  <a:txBody>
-                    <a:bodyPr/>
-                    <a:lstStyle/>
-                    <a:p>
-                      <a:pPr algn="l"/>
-                      <a:r>
-                        <a:rPr sz="1100" b="1" i="0">
-                          <a:solidFill>
-                            <a:srgbClr val="2B2B2B"/>
-                          </a:solidFill>
-                          <a:latin typeface="Calibri"/>
-                        </a:rPr>
-                        <a:t>Padlet</a:t>
-                      </a:r>
-                    </a:p>
-                  </a:txBody>
-                  <a:tcPr anchor="ctr" marL="109728" marR="91440" marT="36576" marB="36576">
-                    <a:solidFill>
-                      <a:srgbClr val="F2F2F2"/>
-                    </a:solidFill>
-                  </a:tcPr>
-                </a:tc>
-                <a:tc>
-                  <a:txBody>
-                    <a:bodyPr/>
-                    <a:lstStyle/>
-                    <a:p>
-                      <a:pPr algn="l"/>
-                      <a:r>
-                        <a:rPr sz="1100" b="0" i="0">
-                          <a:solidFill>
-                            <a:srgbClr val="2B2B2B"/>
-                          </a:solidFill>
-                          <a:latin typeface="Calibri"/>
-                        </a:rPr>
-                        <a:t>Tablero donde nos presentamos como grupo</a:t>
-                      </a:r>
-                    </a:p>
-                  </a:txBody>
-                  <a:tcPr anchor="ctr" marL="109728" marR="91440" marT="36576" marB="36576">
-                    <a:solidFill>
-                      <a:srgbClr val="F2F2F2"/>
-                    </a:solidFill>
-                  </a:tcPr>
-                </a:tc>
-                <a:tc>
-                  <a:txBody>
-                    <a:bodyPr/>
-                    <a:lstStyle/>
-                    <a:p>
-                      <a:pPr algn="l"/>
-                      <a:r>
-                        <a:rPr sz="1100" b="0" i="0">
-                          <a:solidFill>
-                            <a:srgbClr val="2B2B2B"/>
-                          </a:solidFill>
-                          <a:latin typeface="Calibri"/>
-                        </a:rPr>
-                        <a:t>Hoy</a:t>
-                      </a:r>
-                    </a:p>
-                  </a:txBody>
-                  <a:tcPr anchor="ctr" marL="109728" marR="91440" marT="36576" marB="36576">
-                    <a:solidFill>
-                      <a:srgbClr val="F2F2F2"/>
-                    </a:solidFill>
-                  </a:tcPr>
-                </a:tc>
-              </a:tr>
             </a:tbl>
           </a:graphicData>
         </a:graphic>
@@ -7346,7 +7030,7 @@
         </p:nvSpPr>
         <p:spPr>
           <a:xfrm>
-            <a:off x="640080" y="6080760"/>
+            <a:off x="640080" y="5852160"/>
             <a:ext cx="10911535" cy="548640"/>
           </a:xfrm>
           <a:prstGeom prst="rect">
@@ -7375,41 +7059,6 @@
       <p:sp>
         <p:nvSpPr>
           <p:cNvPr id="6" name="TextBox 5"/>
-          <p:cNvSpPr txBox="1"/>
-          <p:nvPr/>
-        </p:nvSpPr>
-        <p:spPr>
-          <a:xfrm>
-            <a:off x="2194560" y="6446520"/>
-            <a:ext cx="5943600" cy="274320"/>
-          </a:xfrm>
-          <a:prstGeom prst="rect">
-            <a:avLst/>
-          </a:prstGeom>
-          <a:noFill/>
-        </p:spPr>
-        <p:txBody>
-          <a:bodyPr wrap="square" anchor="t" lIns="0" rIns="0" tIns="0" bIns="0">
-            <a:spAutoFit/>
-          </a:bodyPr>
-          <a:lstStyle/>
-          <a:p>
-            <a:pPr algn="l"/>
-            <a:r>
-              <a:rPr sz="1000" b="1" i="0">
-                <a:solidFill>
-                  <a:srgbClr val="8F989D"/>
-                </a:solidFill>
-                <a:latin typeface="Calibri"/>
-              </a:rPr>
-              <a:t>Inicio 5:10 pm</a:t>
-            </a:r>
-          </a:p>
-        </p:txBody>
-      </p:sp>
-      <p:sp>
-        <p:nvSpPr>
-          <p:cNvPr id="7" name="TextBox 6"/>
           <p:cNvSpPr txBox="1"/>
           <p:nvPr/>
         </p:nvSpPr>
@@ -7841,41 +7490,6 @@
         </p:nvSpPr>
         <p:spPr>
           <a:xfrm>
-            <a:off x="2194560" y="6446520"/>
-            <a:ext cx="5943600" cy="274320"/>
-          </a:xfrm>
-          <a:prstGeom prst="rect">
-            <a:avLst/>
-          </a:prstGeom>
-          <a:noFill/>
-        </p:spPr>
-        <p:txBody>
-          <a:bodyPr wrap="square" anchor="t" lIns="0" rIns="0" tIns="0" bIns="0">
-            <a:spAutoFit/>
-          </a:bodyPr>
-          <a:lstStyle/>
-          <a:p>
-            <a:pPr algn="l"/>
-            <a:r>
-              <a:rPr sz="1000" b="1" i="0">
-                <a:solidFill>
-                  <a:srgbClr val="8F989D"/>
-                </a:solidFill>
-                <a:latin typeface="Calibri"/>
-              </a:rPr>
-              <a:t>Inicio 5:10 pm</a:t>
-            </a:r>
-          </a:p>
-        </p:txBody>
-      </p:sp>
-      <p:sp>
-        <p:nvSpPr>
-          <p:cNvPr id="6" name="TextBox 5"/>
-          <p:cNvSpPr txBox="1"/>
-          <p:nvPr/>
-        </p:nvSpPr>
-        <p:spPr>
-          <a:xfrm>
             <a:off x="11094415" y="6446520"/>
             <a:ext cx="548640" cy="274320"/>
           </a:xfrm>
@@ -8361,41 +7975,6 @@
         </p:nvSpPr>
         <p:spPr>
           <a:xfrm>
-            <a:off x="2194560" y="6446520"/>
-            <a:ext cx="5943600" cy="274320"/>
-          </a:xfrm>
-          <a:prstGeom prst="rect">
-            <a:avLst/>
-          </a:prstGeom>
-          <a:noFill/>
-        </p:spPr>
-        <p:txBody>
-          <a:bodyPr wrap="square" anchor="t" lIns="0" rIns="0" tIns="0" bIns="0">
-            <a:spAutoFit/>
-          </a:bodyPr>
-          <a:lstStyle/>
-          <a:p>
-            <a:pPr algn="l"/>
-            <a:r>
-              <a:rPr sz="1000" b="1" i="0">
-                <a:solidFill>
-                  <a:srgbClr val="8F989D"/>
-                </a:solidFill>
-                <a:latin typeface="Calibri"/>
-              </a:rPr>
-              <a:t>Inicio 5:10 pm</a:t>
-            </a:r>
-          </a:p>
-        </p:txBody>
-      </p:sp>
-      <p:sp>
-        <p:nvSpPr>
-          <p:cNvPr id="11" name="TextBox 10"/>
-          <p:cNvSpPr txBox="1"/>
-          <p:nvPr/>
-        </p:nvSpPr>
-        <p:spPr>
-          <a:xfrm>
             <a:off x="11094415" y="6446520"/>
             <a:ext cx="548640" cy="274320"/>
           </a:xfrm>
@@ -8899,41 +8478,6 @@
         </p:nvSpPr>
         <p:spPr>
           <a:xfrm>
-            <a:off x="2194560" y="6446520"/>
-            <a:ext cx="5943600" cy="274320"/>
-          </a:xfrm>
-          <a:prstGeom prst="rect">
-            <a:avLst/>
-          </a:prstGeom>
-          <a:noFill/>
-        </p:spPr>
-        <p:txBody>
-          <a:bodyPr wrap="square" anchor="t" lIns="0" rIns="0" tIns="0" bIns="0">
-            <a:spAutoFit/>
-          </a:bodyPr>
-          <a:lstStyle/>
-          <a:p>
-            <a:pPr algn="l"/>
-            <a:r>
-              <a:rPr sz="1000" b="1" i="0">
-                <a:solidFill>
-                  <a:srgbClr val="8F989D"/>
-                </a:solidFill>
-                <a:latin typeface="Calibri"/>
-              </a:rPr>
-              <a:t>Inicio 5:10 pm</a:t>
-            </a:r>
-          </a:p>
-        </p:txBody>
-      </p:sp>
-      <p:sp>
-        <p:nvSpPr>
-          <p:cNvPr id="11" name="TextBox 10"/>
-          <p:cNvSpPr txBox="1"/>
-          <p:nvPr/>
-        </p:nvSpPr>
-        <p:spPr>
-          <a:xfrm>
             <a:off x="11094415" y="6446520"/>
             <a:ext cx="548640" cy="274320"/>
           </a:xfrm>
@@ -9302,41 +8846,6 @@
         </p:nvSpPr>
         <p:spPr>
           <a:xfrm>
-            <a:off x="2194560" y="6446520"/>
-            <a:ext cx="5943600" cy="274320"/>
-          </a:xfrm>
-          <a:prstGeom prst="rect">
-            <a:avLst/>
-          </a:prstGeom>
-          <a:noFill/>
-        </p:spPr>
-        <p:txBody>
-          <a:bodyPr wrap="square" anchor="t" lIns="0" rIns="0" tIns="0" bIns="0">
-            <a:spAutoFit/>
-          </a:bodyPr>
-          <a:lstStyle/>
-          <a:p>
-            <a:pPr algn="l"/>
-            <a:r>
-              <a:rPr sz="1000" b="1" i="0">
-                <a:solidFill>
-                  <a:srgbClr val="8F989D"/>
-                </a:solidFill>
-                <a:latin typeface="Calibri"/>
-              </a:rPr>
-              <a:t>Inicio 5:10 pm</a:t>
-            </a:r>
-          </a:p>
-        </p:txBody>
-      </p:sp>
-      <p:sp>
-        <p:nvSpPr>
-          <p:cNvPr id="7" name="TextBox 6"/>
-          <p:cNvSpPr txBox="1"/>
-          <p:nvPr/>
-        </p:nvSpPr>
-        <p:spPr>
-          <a:xfrm>
             <a:off x="11094415" y="6446520"/>
             <a:ext cx="548640" cy="274320"/>
           </a:xfrm>
@@ -9826,8 +9335,8 @@
         </p:nvSpPr>
         <p:spPr>
           <a:xfrm>
-            <a:off x="2194560" y="6446520"/>
-            <a:ext cx="5943600" cy="274320"/>
+            <a:off x="11094415" y="6446520"/>
+            <a:ext cx="548640" cy="274320"/>
           </a:xfrm>
           <a:prstGeom prst="rect">
             <a:avLst/>
@@ -9840,7 +9349,7 @@
           </a:bodyPr>
           <a:lstStyle/>
           <a:p>
-            <a:pPr algn="l"/>
+            <a:pPr algn="r"/>
             <a:r>
               <a:rPr sz="1000" b="1" i="0">
                 <a:solidFill>
@@ -9848,7 +9357,7 @@
                 </a:solidFill>
                 <a:latin typeface="Calibri"/>
               </a:rPr>
-              <a:t>Inicio 5:10 pm</a:t>
+              <a:t>20</a:t>
             </a:r>
           </a:p>
         </p:txBody>
@@ -9856,41 +9365,6 @@
       <p:sp>
         <p:nvSpPr>
           <p:cNvPr id="6" name="TextBox 5"/>
-          <p:cNvSpPr txBox="1"/>
-          <p:nvPr/>
-        </p:nvSpPr>
-        <p:spPr>
-          <a:xfrm>
-            <a:off x="11094415" y="6446520"/>
-            <a:ext cx="548640" cy="274320"/>
-          </a:xfrm>
-          <a:prstGeom prst="rect">
-            <a:avLst/>
-          </a:prstGeom>
-          <a:noFill/>
-        </p:spPr>
-        <p:txBody>
-          <a:bodyPr wrap="square" anchor="t" lIns="0" rIns="0" tIns="0" bIns="0">
-            <a:spAutoFit/>
-          </a:bodyPr>
-          <a:lstStyle/>
-          <a:p>
-            <a:pPr algn="r"/>
-            <a:r>
-              <a:rPr sz="1000" b="1" i="0">
-                <a:solidFill>
-                  <a:srgbClr val="8F989D"/>
-                </a:solidFill>
-                <a:latin typeface="Calibri"/>
-              </a:rPr>
-              <a:t>20</a:t>
-            </a:r>
-          </a:p>
-        </p:txBody>
-      </p:sp>
-      <p:sp>
-        <p:nvSpPr>
-          <p:cNvPr id="7" name="TextBox 6"/>
           <p:cNvSpPr txBox="1"/>
           <p:nvPr/>
         </p:nvSpPr>
@@ -10362,41 +9836,6 @@
         </p:nvSpPr>
         <p:spPr>
           <a:xfrm>
-            <a:off x="2194560" y="6446520"/>
-            <a:ext cx="5943600" cy="274320"/>
-          </a:xfrm>
-          <a:prstGeom prst="rect">
-            <a:avLst/>
-          </a:prstGeom>
-          <a:noFill/>
-        </p:spPr>
-        <p:txBody>
-          <a:bodyPr wrap="square" anchor="t" lIns="0" rIns="0" tIns="0" bIns="0">
-            <a:spAutoFit/>
-          </a:bodyPr>
-          <a:lstStyle/>
-          <a:p>
-            <a:pPr algn="l"/>
-            <a:r>
-              <a:rPr sz="1000" b="1" i="0">
-                <a:solidFill>
-                  <a:srgbClr val="8F989D"/>
-                </a:solidFill>
-                <a:latin typeface="Calibri"/>
-              </a:rPr>
-              <a:t>Inicio 5:10 pm</a:t>
-            </a:r>
-          </a:p>
-        </p:txBody>
-      </p:sp>
-      <p:sp>
-        <p:nvSpPr>
-          <p:cNvPr id="11" name="TextBox 10"/>
-          <p:cNvSpPr txBox="1"/>
-          <p:nvPr/>
-        </p:nvSpPr>
-        <p:spPr>
-          <a:xfrm>
             <a:off x="11094415" y="6446520"/>
             <a:ext cx="548640" cy="274320"/>
           </a:xfrm>
@@ -10662,41 +10101,6 @@
         </p:nvSpPr>
         <p:spPr>
           <a:xfrm>
-            <a:off x="2194560" y="6446520"/>
-            <a:ext cx="5943600" cy="274320"/>
-          </a:xfrm>
-          <a:prstGeom prst="rect">
-            <a:avLst/>
-          </a:prstGeom>
-          <a:noFill/>
-        </p:spPr>
-        <p:txBody>
-          <a:bodyPr wrap="square" anchor="t" lIns="0" rIns="0" tIns="0" bIns="0">
-            <a:spAutoFit/>
-          </a:bodyPr>
-          <a:lstStyle/>
-          <a:p>
-            <a:pPr algn="l"/>
-            <a:r>
-              <a:rPr sz="1000" b="1" i="0">
-                <a:solidFill>
-                  <a:srgbClr val="8F989D"/>
-                </a:solidFill>
-                <a:latin typeface="Calibri"/>
-              </a:rPr>
-              <a:t>Inicio 5:10 pm</a:t>
-            </a:r>
-          </a:p>
-        </p:txBody>
-      </p:sp>
-      <p:sp>
-        <p:nvSpPr>
-          <p:cNvPr id="6" name="TextBox 5"/>
-          <p:cNvSpPr txBox="1"/>
-          <p:nvPr/>
-        </p:nvSpPr>
-        <p:spPr>
-          <a:xfrm>
             <a:off x="11094415" y="6446520"/>
             <a:ext cx="548640" cy="274320"/>
           </a:xfrm>
@@ -10952,41 +10356,6 @@
           </a:p>
         </p:txBody>
       </p:sp>
-      <p:sp>
-        <p:nvSpPr>
-          <p:cNvPr id="7" name="TextBox 6"/>
-          <p:cNvSpPr txBox="1"/>
-          <p:nvPr/>
-        </p:nvSpPr>
-        <p:spPr>
-          <a:xfrm>
-            <a:off x="2194560" y="6446520"/>
-            <a:ext cx="5943600" cy="274320"/>
-          </a:xfrm>
-          <a:prstGeom prst="rect">
-            <a:avLst/>
-          </a:prstGeom>
-          <a:noFill/>
-        </p:spPr>
-        <p:txBody>
-          <a:bodyPr wrap="square" anchor="t" lIns="0" rIns="0" tIns="0" bIns="0">
-            <a:spAutoFit/>
-          </a:bodyPr>
-          <a:lstStyle/>
-          <a:p>
-            <a:pPr algn="l"/>
-            <a:r>
-              <a:rPr sz="1000" b="1" i="0">
-                <a:solidFill>
-                  <a:srgbClr val="8F989D"/>
-                </a:solidFill>
-                <a:latin typeface="Calibri"/>
-              </a:rPr>
-              <a:t>Inicio 5:10 pm</a:t>
-            </a:r>
-          </a:p>
-        </p:txBody>
-      </p:sp>
     </p:spTree>
   </p:cSld>
   <p:clrMapOvr>
@@ -11269,41 +10638,6 @@
         </p:nvSpPr>
         <p:spPr>
           <a:xfrm>
-            <a:off x="2194560" y="6446520"/>
-            <a:ext cx="5943600" cy="274320"/>
-          </a:xfrm>
-          <a:prstGeom prst="rect">
-            <a:avLst/>
-          </a:prstGeom>
-          <a:noFill/>
-        </p:spPr>
-        <p:txBody>
-          <a:bodyPr wrap="square" anchor="t" lIns="0" rIns="0" tIns="0" bIns="0">
-            <a:spAutoFit/>
-          </a:bodyPr>
-          <a:lstStyle/>
-          <a:p>
-            <a:pPr algn="l"/>
-            <a:r>
-              <a:rPr sz="1000" b="1" i="0">
-                <a:solidFill>
-                  <a:srgbClr val="8F989D"/>
-                </a:solidFill>
-                <a:latin typeface="Calibri"/>
-              </a:rPr>
-              <a:t>Inicio 5:10 pm</a:t>
-            </a:r>
-          </a:p>
-        </p:txBody>
-      </p:sp>
-      <p:sp>
-        <p:nvSpPr>
-          <p:cNvPr id="9" name="TextBox 8"/>
-          <p:cNvSpPr txBox="1"/>
-          <p:nvPr/>
-        </p:nvSpPr>
-        <p:spPr>
-          <a:xfrm>
             <a:off x="11094415" y="6446520"/>
             <a:ext cx="548640" cy="274320"/>
           </a:xfrm>
@@ -11789,41 +11123,6 @@
       <p:sp>
         <p:nvSpPr>
           <p:cNvPr id="10" name="TextBox 9"/>
-          <p:cNvSpPr txBox="1"/>
-          <p:nvPr/>
-        </p:nvSpPr>
-        <p:spPr>
-          <a:xfrm>
-            <a:off x="2194560" y="6446520"/>
-            <a:ext cx="5943600" cy="274320"/>
-          </a:xfrm>
-          <a:prstGeom prst="rect">
-            <a:avLst/>
-          </a:prstGeom>
-          <a:noFill/>
-        </p:spPr>
-        <p:txBody>
-          <a:bodyPr wrap="square" anchor="t" lIns="0" rIns="0" tIns="0" bIns="0">
-            <a:spAutoFit/>
-          </a:bodyPr>
-          <a:lstStyle/>
-          <a:p>
-            <a:pPr algn="l"/>
-            <a:r>
-              <a:rPr sz="1000" b="1" i="0">
-                <a:solidFill>
-                  <a:srgbClr val="8F989D"/>
-                </a:solidFill>
-                <a:latin typeface="Calibri"/>
-              </a:rPr>
-              <a:t>Inicio 5:10 pm</a:t>
-            </a:r>
-          </a:p>
-        </p:txBody>
-      </p:sp>
-      <p:sp>
-        <p:nvSpPr>
-          <p:cNvPr id="11" name="TextBox 10"/>
           <p:cNvSpPr txBox="1"/>
           <p:nvPr/>
         </p:nvSpPr>
@@ -12376,41 +11675,6 @@
         </p:nvSpPr>
         <p:spPr>
           <a:xfrm>
-            <a:off x="2194560" y="6446520"/>
-            <a:ext cx="5943600" cy="274320"/>
-          </a:xfrm>
-          <a:prstGeom prst="rect">
-            <a:avLst/>
-          </a:prstGeom>
-          <a:noFill/>
-        </p:spPr>
-        <p:txBody>
-          <a:bodyPr wrap="square" anchor="t" lIns="0" rIns="0" tIns="0" bIns="0">
-            <a:spAutoFit/>
-          </a:bodyPr>
-          <a:lstStyle/>
-          <a:p>
-            <a:pPr algn="l"/>
-            <a:r>
-              <a:rPr sz="1000" b="1" i="0">
-                <a:solidFill>
-                  <a:srgbClr val="8F989D"/>
-                </a:solidFill>
-                <a:latin typeface="Calibri"/>
-              </a:rPr>
-              <a:t>Inicio 5:10 pm</a:t>
-            </a:r>
-          </a:p>
-        </p:txBody>
-      </p:sp>
-      <p:sp>
-        <p:nvSpPr>
-          <p:cNvPr id="8" name="TextBox 7"/>
-          <p:cNvSpPr txBox="1"/>
-          <p:nvPr/>
-        </p:nvSpPr>
-        <p:spPr>
-          <a:xfrm>
             <a:off x="11094415" y="6446520"/>
             <a:ext cx="548640" cy="274320"/>
           </a:xfrm>
@@ -12855,8 +12119,8 @@
         </p:nvSpPr>
         <p:spPr>
           <a:xfrm>
-            <a:off x="2194560" y="6446520"/>
-            <a:ext cx="5943600" cy="274320"/>
+            <a:off x="11094415" y="6446520"/>
+            <a:ext cx="548640" cy="274320"/>
           </a:xfrm>
           <a:prstGeom prst="rect">
             <a:avLst/>
@@ -12869,7 +12133,7 @@
           </a:bodyPr>
           <a:lstStyle/>
           <a:p>
-            <a:pPr algn="l"/>
+            <a:pPr algn="r"/>
             <a:r>
               <a:rPr sz="1000" b="1" i="0">
                 <a:solidFill>
@@ -12877,7 +12141,7 @@
                 </a:solidFill>
                 <a:latin typeface="Calibri"/>
               </a:rPr>
-              <a:t>Inicio 5:10 pm</a:t>
+              <a:t>6</a:t>
             </a:r>
           </a:p>
         </p:txBody>
@@ -12885,41 +12149,6 @@
       <p:sp>
         <p:nvSpPr>
           <p:cNvPr id="6" name="TextBox 5"/>
-          <p:cNvSpPr txBox="1"/>
-          <p:nvPr/>
-        </p:nvSpPr>
-        <p:spPr>
-          <a:xfrm>
-            <a:off x="11094415" y="6446520"/>
-            <a:ext cx="548640" cy="274320"/>
-          </a:xfrm>
-          <a:prstGeom prst="rect">
-            <a:avLst/>
-          </a:prstGeom>
-          <a:noFill/>
-        </p:spPr>
-        <p:txBody>
-          <a:bodyPr wrap="square" anchor="t" lIns="0" rIns="0" tIns="0" bIns="0">
-            <a:spAutoFit/>
-          </a:bodyPr>
-          <a:lstStyle/>
-          <a:p>
-            <a:pPr algn="r"/>
-            <a:r>
-              <a:rPr sz="1000" b="1" i="0">
-                <a:solidFill>
-                  <a:srgbClr val="8F989D"/>
-                </a:solidFill>
-                <a:latin typeface="Calibri"/>
-              </a:rPr>
-              <a:t>6</a:t>
-            </a:r>
-          </a:p>
-        </p:txBody>
-      </p:sp>
-      <p:sp>
-        <p:nvSpPr>
-          <p:cNvPr id="7" name="TextBox 6"/>
           <p:cNvSpPr txBox="1"/>
           <p:nvPr/>
         </p:nvSpPr>
@@ -13440,41 +12669,6 @@
       <p:sp>
         <p:nvSpPr>
           <p:cNvPr id="10" name="TextBox 9"/>
-          <p:cNvSpPr txBox="1"/>
-          <p:nvPr/>
-        </p:nvSpPr>
-        <p:spPr>
-          <a:xfrm>
-            <a:off x="2194560" y="6446520"/>
-            <a:ext cx="5943600" cy="274320"/>
-          </a:xfrm>
-          <a:prstGeom prst="rect">
-            <a:avLst/>
-          </a:prstGeom>
-          <a:noFill/>
-        </p:spPr>
-        <p:txBody>
-          <a:bodyPr wrap="square" anchor="t" lIns="0" rIns="0" tIns="0" bIns="0">
-            <a:spAutoFit/>
-          </a:bodyPr>
-          <a:lstStyle/>
-          <a:p>
-            <a:pPr algn="l"/>
-            <a:r>
-              <a:rPr sz="1000" b="1" i="0">
-                <a:solidFill>
-                  <a:srgbClr val="8F989D"/>
-                </a:solidFill>
-                <a:latin typeface="Calibri"/>
-              </a:rPr>
-              <a:t>Inicio 5:10 pm</a:t>
-            </a:r>
-          </a:p>
-        </p:txBody>
-      </p:sp>
-      <p:sp>
-        <p:nvSpPr>
-          <p:cNvPr id="11" name="TextBox 10"/>
           <p:cNvSpPr txBox="1"/>
           <p:nvPr/>
         </p:nvSpPr>
@@ -14232,41 +13426,6 @@
         </p:nvSpPr>
         <p:spPr>
           <a:xfrm>
-            <a:off x="2194560" y="6446520"/>
-            <a:ext cx="5943600" cy="274320"/>
-          </a:xfrm>
-          <a:prstGeom prst="rect">
-            <a:avLst/>
-          </a:prstGeom>
-          <a:noFill/>
-        </p:spPr>
-        <p:txBody>
-          <a:bodyPr wrap="square" anchor="t" lIns="0" rIns="0" tIns="0" bIns="0">
-            <a:spAutoFit/>
-          </a:bodyPr>
-          <a:lstStyle/>
-          <a:p>
-            <a:pPr algn="l"/>
-            <a:r>
-              <a:rPr sz="1000" b="1" i="0">
-                <a:solidFill>
-                  <a:srgbClr val="8F989D"/>
-                </a:solidFill>
-                <a:latin typeface="Calibri"/>
-              </a:rPr>
-              <a:t>Inicio 5:10 pm</a:t>
-            </a:r>
-          </a:p>
-        </p:txBody>
-      </p:sp>
-      <p:sp>
-        <p:nvSpPr>
-          <p:cNvPr id="7" name="TextBox 6"/>
-          <p:cNvSpPr txBox="1"/>
-          <p:nvPr/>
-        </p:nvSpPr>
-        <p:spPr>
-          <a:xfrm>
             <a:off x="11094415" y="6446520"/>
             <a:ext cx="548640" cy="274320"/>
           </a:xfrm>
@@ -14912,41 +14071,6 @@
         </p:nvSpPr>
         <p:spPr>
           <a:xfrm>
-            <a:off x="2194560" y="6446520"/>
-            <a:ext cx="5943600" cy="274320"/>
-          </a:xfrm>
-          <a:prstGeom prst="rect">
-            <a:avLst/>
-          </a:prstGeom>
-          <a:noFill/>
-        </p:spPr>
-        <p:txBody>
-          <a:bodyPr wrap="square" anchor="t" lIns="0" rIns="0" tIns="0" bIns="0">
-            <a:spAutoFit/>
-          </a:bodyPr>
-          <a:lstStyle/>
-          <a:p>
-            <a:pPr algn="l"/>
-            <a:r>
-              <a:rPr sz="1000" b="1" i="0">
-                <a:solidFill>
-                  <a:srgbClr val="8F989D"/>
-                </a:solidFill>
-                <a:latin typeface="Calibri"/>
-              </a:rPr>
-              <a:t>Inicio 5:10 pm</a:t>
-            </a:r>
-          </a:p>
-        </p:txBody>
-      </p:sp>
-      <p:sp>
-        <p:nvSpPr>
-          <p:cNvPr id="7" name="TextBox 6"/>
-          <p:cNvSpPr txBox="1"/>
-          <p:nvPr/>
-        </p:nvSpPr>
-        <p:spPr>
-          <a:xfrm>
             <a:off x="11094415" y="6446520"/>
             <a:ext cx="548640" cy="274320"/>
           </a:xfrm>

--- a/Pregrado/Trabajo de grado 2/Clases/Sesion 01 - Presentación del curso · docente · estudiantes · ACAs/Presentacion.pptx
+++ b/Pregrado/Trabajo de grado 2/Clases/Sesion 01 - Presentación del curso · docente · estudiantes · ACAs/Presentacion.pptx
@@ -9098,7 +9098,25 @@
                 </a:solidFill>
                 <a:latin typeface="Calibri"/>
               </a:rPr>
-              <a:t>●   Dónde: material de la Sesión 01 en CDigital — [URL CDigital — campus del curso pendiente]</a:t>
+              <a:t>●   </a:t>
+            </a:r>
+            <a:r>
+              <a:rPr sz="1500" b="1" i="0">
+                <a:solidFill>
+                  <a:srgbClr val="2B2B2B"/>
+                </a:solidFill>
+                <a:latin typeface="Calibri"/>
+              </a:rPr>
+              <a:t>Dónde está:</a:t>
+            </a:r>
+            <a:r>
+              <a:rPr sz="1500" b="0" i="0">
+                <a:solidFill>
+                  <a:srgbClr val="2B2B2B"/>
+                </a:solidFill>
+                <a:latin typeface="Calibri"/>
+              </a:rPr>
+              <a:t> ya viene en tu carpeta del curso, en `Sesion 01 - …/` (el PDF y el archivo `Lectura autonoma - Sesion 01.txt` con la cita y el enlace). También queda publicada en CDigital.</a:t>
             </a:r>
           </a:p>
           <a:p>

--- a/Pregrado/Trabajo de grado 2/Clases/Sesion 01 - Presentación del curso · docente · estudiantes · ACAs/Presentacion.pptx
+++ b/Pregrado/Trabajo de grado 2/Clases/Sesion 01 - Presentación del curso · docente · estudiantes · ACAs/Presentacion.pptx
@@ -3349,7 +3349,7 @@
                 </a:solidFill>
                 <a:latin typeface="Calibri"/>
               </a:rPr>
-              <a:t> el curso · el Docente · ustedes · las ACAs</a:t>
+              <a:t> el curso · el Docente · ustedes · cómo se evalúa</a:t>
             </a:r>
           </a:p>
           <a:p>
@@ -4365,7 +4365,7 @@
                 </a:solidFill>
                 <a:latin typeface="Calibri"/>
               </a:rPr>
-              <a:t>Las ACAs, una por una: qué se entrega y qué se mira</a:t>
+              <a:t>Corte por corte: qué hay en el aula y qué se prepara</a:t>
             </a:r>
           </a:p>
         </p:txBody>
@@ -4389,10 +4389,10 @@
                 <a:tableStyleId>{2D5ABB26-0587-4C30-8999-92F81FD0307C}</a:tableStyleId>
               </a:tblPr>
               <a:tblGrid>
-                <a:gridCol w="916935"/>
-                <a:gridCol w="2934194"/>
-                <a:gridCol w="2934194"/>
-                <a:gridCol w="4126210"/>
+                <a:gridCol w="825242"/>
+                <a:gridCol w="3117581"/>
+                <a:gridCol w="3300968"/>
+                <a:gridCol w="3667742"/>
               </a:tblGrid>
               <a:tr h="502920">
                 <a:tc>
@@ -4408,7 +4408,7 @@
                           </a:solidFill>
                           <a:latin typeface="Calibri"/>
                         </a:rPr>
-                        <a:t>ACA</a:t>
+                        <a:t>Corte</a:t>
                       </a:r>
                     </a:p>
                   </a:txBody>
@@ -4431,7 +4431,7 @@
                           </a:solidFill>
                           <a:latin typeface="Calibri"/>
                         </a:rPr>
-                        <a:t>Qué entrega</a:t>
+                        <a:t>Qué hay en el aula (CDigital)</a:t>
                       </a:r>
                     </a:p>
                   </a:txBody>
@@ -4454,7 +4454,7 @@
                           </a:solidFill>
                           <a:latin typeface="Calibri"/>
                         </a:rPr>
-                        <a:t>Qué mira el Docente</a:t>
+                        <a:t>Qué se prepara para eso</a:t>
                       </a:r>
                     </a:p>
                   </a:txBody>
@@ -4502,7 +4502,57 @@
                           </a:solidFill>
                           <a:latin typeface="Calibri"/>
                         </a:rPr>
-                        <a:t>ACA 1</a:t>
+                        <a:t>Corte 1</a:t>
+                      </a:r>
+                    </a:p>
+                  </a:txBody>
+                  <a:tcPr anchor="ctr" marL="109728" marR="91440" marT="36576" marB="36576">
+                    <a:solidFill>
+                      <a:srgbClr val="FFFFFF"/>
+                    </a:solidFill>
+                  </a:tcPr>
+                </a:tc>
+                <a:tc>
+                  <a:txBody>
+                    <a:bodyPr/>
+                    <a:lstStyle/>
+                    <a:p>
+                      <a:pPr algn="l"/>
+                      <a:r>
+                        <a:rPr sz="1100" b="1" i="0">
+                          <a:solidFill>
+                            <a:srgbClr val="2B2B2B"/>
+                          </a:solidFill>
+                          <a:latin typeface="Calibri"/>
+                        </a:rPr>
+                        <a:t>Quiz 1</a:t>
+                      </a:r>
+                      <a:r>
+                        <a:rPr sz="1100" b="0" i="0">
+                          <a:solidFill>
+                            <a:srgbClr val="2B2B2B"/>
+                          </a:solidFill>
+                          <a:latin typeface="Calibri"/>
+                        </a:rPr>
+                        <a:t> y </a:t>
+                      </a:r>
+                      <a:r>
+                        <a:rPr sz="1100" b="1" i="0">
+                          <a:solidFill>
+                            <a:srgbClr val="2B2B2B"/>
+                          </a:solidFill>
+                          <a:latin typeface="Calibri"/>
+                        </a:rPr>
+                        <a:t>Parcial 1</a:t>
+                      </a:r>
+                      <a:r>
+                        <a:rPr sz="1100" b="0" i="0">
+                          <a:solidFill>
+                            <a:srgbClr val="2B2B2B"/>
+                          </a:solidFill>
+                          <a:latin typeface="Calibri"/>
+                        </a:rPr>
+                        <a:t>: cuestionarios que se resuelven en el aula, dentro de su ventana. No se sube archivo.</a:t>
                       </a:r>
                     </a:p>
                   </a:txBody>
@@ -4525,7 +4575,7 @@
                           </a:solidFill>
                           <a:latin typeface="Calibri"/>
                         </a:rPr>
-                        <a:t>Delimitación y formulación: tema delimitado, problema, pregunta, objetivos y título provisional</a:t>
+                        <a:t>Delimitación y formulación: tema delimitado, problema, pregunta, objetivos y título provisional. Guías escritas: `Quiz 1 (6%)` y `Parcial 1 (24%)`.</a:t>
                       </a:r>
                     </a:p>
                   </a:txBody>
@@ -4548,30 +4598,7 @@
                           </a:solidFill>
                           <a:latin typeface="Calibri"/>
                         </a:rPr>
-                        <a:t>Que el tema tenga foco y que objetivos y pregunta hablen de lo mismo</a:t>
-                      </a:r>
-                    </a:p>
-                  </a:txBody>
-                  <a:tcPr anchor="ctr" marL="109728" marR="91440" marT="36576" marB="36576">
-                    <a:solidFill>
-                      <a:srgbClr val="FFFFFF"/>
-                    </a:solidFill>
-                  </a:tcPr>
-                </a:tc>
-                <a:tc>
-                  <a:txBody>
-                    <a:bodyPr/>
-                    <a:lstStyle/>
-                    <a:p>
-                      <a:pPr algn="l"/>
-                      <a:r>
-                        <a:rPr sz="1100" b="0" i="0">
-                          <a:solidFill>
-                            <a:srgbClr val="2B2B2B"/>
-                          </a:solidFill>
-                          <a:latin typeface="Calibri"/>
-                        </a:rPr>
-                        <a:t>Flojo: “IA en las empresas” · Bueno: actor, fenómeno y contexto en una sola frase, con objetivos que responden a la pregunta</a:t>
+                        <a:t>Flojo: “IA en las empresas” · Bueno: actor, fenómeno y contexto en una frase, con objetivos que responden a la pregunta</a:t>
                       </a:r>
                     </a:p>
                   </a:txBody>
@@ -4596,7 +4623,57 @@
                           </a:solidFill>
                           <a:latin typeface="Calibri"/>
                         </a:rPr>
-                        <a:t>ACA 2</a:t>
+                        <a:t>Corte 2</a:t>
+                      </a:r>
+                    </a:p>
+                  </a:txBody>
+                  <a:tcPr anchor="ctr" marL="109728" marR="91440" marT="36576" marB="36576">
+                    <a:solidFill>
+                      <a:srgbClr val="F2F2F2"/>
+                    </a:solidFill>
+                  </a:tcPr>
+                </a:tc>
+                <a:tc>
+                  <a:txBody>
+                    <a:bodyPr/>
+                    <a:lstStyle/>
+                    <a:p>
+                      <a:pPr algn="l"/>
+                      <a:r>
+                        <a:rPr sz="1100" b="1" i="0">
+                          <a:solidFill>
+                            <a:srgbClr val="2B2B2B"/>
+                          </a:solidFill>
+                          <a:latin typeface="Calibri"/>
+                        </a:rPr>
+                        <a:t>Quiz 2</a:t>
+                      </a:r>
+                      <a:r>
+                        <a:rPr sz="1100" b="0" i="0">
+                          <a:solidFill>
+                            <a:srgbClr val="2B2B2B"/>
+                          </a:solidFill>
+                          <a:latin typeface="Calibri"/>
+                        </a:rPr>
+                        <a:t> y </a:t>
+                      </a:r>
+                      <a:r>
+                        <a:rPr sz="1100" b="1" i="0">
+                          <a:solidFill>
+                            <a:srgbClr val="2B2B2B"/>
+                          </a:solidFill>
+                          <a:latin typeface="Calibri"/>
+                        </a:rPr>
+                        <a:t>Parcial 2</a:t>
+                      </a:r>
+                      <a:r>
+                        <a:rPr sz="1100" b="0" i="0">
+                          <a:solidFill>
+                            <a:srgbClr val="2B2B2B"/>
+                          </a:solidFill>
+                          <a:latin typeface="Calibri"/>
+                        </a:rPr>
+                        <a:t>: también cuestionarios en el aula.</a:t>
                       </a:r>
                     </a:p>
                   </a:txBody>
@@ -4619,7 +4696,7 @@
                           </a:solidFill>
                           <a:latin typeface="Calibri"/>
                         </a:rPr>
-                        <a:t>Marco referencial: antecedentes, marco teórico, conceptual y contextual con citas en APA 7</a:t>
+                        <a:t>Marco referencial: antecedentes, marco teórico, conceptual y contextual, citados en APA 7. Guías: `Quiz 2 (9%)` y `Parcial 2 (21%)`.</a:t>
                       </a:r>
                     </a:p>
                   </a:txBody>
@@ -4642,30 +4719,7 @@
                           </a:solidFill>
                           <a:latin typeface="Calibri"/>
                         </a:rPr>
-                        <a:t>Que las fuentes se usen como argumento y no como adorno; que estén citadas en el cuerpo</a:t>
-                      </a:r>
-                    </a:p>
-                  </a:txBody>
-                  <a:tcPr anchor="ctr" marL="109728" marR="91440" marT="36576" marB="36576">
-                    <a:solidFill>
-                      <a:srgbClr val="F2F2F2"/>
-                    </a:solidFill>
-                  </a:tcPr>
-                </a:tc>
-                <a:tc>
-                  <a:txBody>
-                    <a:bodyPr/>
-                    <a:lstStyle/>
-                    <a:p>
-                      <a:pPr algn="l"/>
-                      <a:r>
-                        <a:rPr sz="1100" b="0" i="0">
-                          <a:solidFill>
-                            <a:srgbClr val="2B2B2B"/>
-                          </a:solidFill>
-                          <a:latin typeface="Calibri"/>
-                        </a:rPr>
-                        <a:t>Flojo: definiciones copiadas una tras otra · Bueno: tres o cuatro conceptos hilados, cada uno sosteniendo una parte de la pregunta</a:t>
+                        <a:t>Flojo: definiciones copiadas una tras otra · Bueno: tres o cuatro conceptos hilados, cada uno sosteniendo parte de la pregunta</a:t>
                       </a:r>
                     </a:p>
                   </a:txBody>
@@ -4690,7 +4744,93 @@
                           </a:solidFill>
                           <a:latin typeface="Calibri"/>
                         </a:rPr>
-                        <a:t>ACA 3</a:t>
+                        <a:t>Corte 3</a:t>
+                      </a:r>
+                    </a:p>
+                  </a:txBody>
+                  <a:tcPr anchor="ctr" marL="109728" marR="91440" marT="36576" marB="36576">
+                    <a:solidFill>
+                      <a:srgbClr val="FFFFFF"/>
+                    </a:solidFill>
+                  </a:tcPr>
+                </a:tc>
+                <a:tc>
+                  <a:txBody>
+                    <a:bodyPr/>
+                    <a:lstStyle/>
+                    <a:p>
+                      <a:pPr algn="l"/>
+                      <a:r>
+                        <a:rPr sz="1100" b="1" i="0">
+                          <a:solidFill>
+                            <a:srgbClr val="2B2B2B"/>
+                          </a:solidFill>
+                          <a:latin typeface="Calibri"/>
+                        </a:rPr>
+                        <a:t>ACA Final</a:t>
+                      </a:r>
+                      <a:r>
+                        <a:rPr sz="1100" b="0" i="0">
+                          <a:solidFill>
+                            <a:srgbClr val="2B2B2B"/>
+                          </a:solidFill>
+                          <a:latin typeface="Calibri"/>
+                        </a:rPr>
+                        <a:t> (tarea: el único documento que se sube) + </a:t>
+                      </a:r>
+                      <a:r>
+                        <a:rPr sz="1100" b="1" i="0">
+                          <a:solidFill>
+                            <a:srgbClr val="2B2B2B"/>
+                          </a:solidFill>
+                          <a:latin typeface="Calibri"/>
+                        </a:rPr>
+                        <a:t>Quiz 3</a:t>
+                      </a:r>
+                      <a:r>
+                        <a:rPr sz="1100" b="0" i="0">
+                          <a:solidFill>
+                            <a:srgbClr val="2B2B2B"/>
+                          </a:solidFill>
+                          <a:latin typeface="Calibri"/>
+                        </a:rPr>
+                        <a:t> + </a:t>
+                      </a:r>
+                      <a:r>
+                        <a:rPr sz="1100" b="1" i="0">
+                          <a:solidFill>
+                            <a:srgbClr val="2B2B2B"/>
+                          </a:solidFill>
+                          <a:latin typeface="Calibri"/>
+                        </a:rPr>
+                        <a:t>autoevaluación</a:t>
+                      </a:r>
+                      <a:r>
+                        <a:rPr sz="1100" b="0" i="0">
+                          <a:solidFill>
+                            <a:srgbClr val="2B2B2B"/>
+                          </a:solidFill>
+                          <a:latin typeface="Calibri"/>
+                        </a:rPr>
+                        <a:t> (cuestionario) y </a:t>
+                      </a:r>
+                      <a:r>
+                        <a:rPr sz="1100" b="1" i="0">
+                          <a:solidFill>
+                            <a:srgbClr val="2B2B2B"/>
+                          </a:solidFill>
+                          <a:latin typeface="Calibri"/>
+                        </a:rPr>
+                        <a:t>coevaluación</a:t>
+                      </a:r>
+                      <a:r>
+                        <a:rPr sz="1100" b="0" i="0">
+                          <a:solidFill>
+                            <a:srgbClr val="2B2B2B"/>
+                          </a:solidFill>
+                          <a:latin typeface="Calibri"/>
+                        </a:rPr>
+                        <a:t> (foro).</a:t>
                       </a:r>
                     </a:p>
                   </a:txBody>
@@ -4713,7 +4853,7 @@
                           </a:solidFill>
                           <a:latin typeface="Calibri"/>
                         </a:rPr>
-                        <a:t>Metodología propuesta e integración del avance en una versión limpia</a:t>
+                        <a:t>Metodología propuesta e integración del avance en una versión limpia, lista para TG3. Guías: `Quiz 3 (4%)` y `ACA Final (32,8%)`.</a:t>
                       </a:r>
                     </a:p>
                   </a:txBody>
@@ -4736,30 +4876,7 @@
                           </a:solidFill>
                           <a:latin typeface="Calibri"/>
                         </a:rPr>
-                        <a:t>Coherencia objetivo → método → instrumento, y que el documento se lea como un todo</a:t>
-                      </a:r>
-                    </a:p>
-                  </a:txBody>
-                  <a:tcPr anchor="ctr" marL="109728" marR="91440" marT="36576" marB="36576">
-                    <a:solidFill>
-                      <a:srgbClr val="FFFFFF"/>
-                    </a:solidFill>
-                  </a:tcPr>
-                </a:tc>
-                <a:tc>
-                  <a:txBody>
-                    <a:bodyPr/>
-                    <a:lstStyle/>
-                    <a:p>
-                      <a:pPr algn="l"/>
-                      <a:r>
-                        <a:rPr sz="1100" b="0" i="0">
-                          <a:solidFill>
-                            <a:srgbClr val="2B2B2B"/>
-                          </a:solidFill>
-                          <a:latin typeface="Calibri"/>
-                        </a:rPr>
-                        <a:t>Flojo: método “porque sí” y secciones pegadas · Bueno: matriz donde cada objetivo tiene su método, y un documento sin costuras</a:t>
+                        <a:t>Flojo: método “porque sí” y secciones pegadas · Bueno: cada objetivo con su método, y un documento sin costuras</a:t>
                       </a:r>
                     </a:p>
                   </a:txBody>
@@ -4803,7 +4920,7 @@
                 </a:solidFill>
                 <a:latin typeface="Calibri"/>
               </a:rPr>
-              <a:t>Enunciado completo, criterios y </a:t>
+              <a:t>El peso de cada ítem está en la slide «CÓMO SE EVALÚA» de esta sesión, con su tipo de actividad. Enunciados y criterios: `Clases/Recursos/ACAs/`; </a:t>
             </a:r>
             <a:r>
               <a:rPr sz="1200" b="1" i="1">
@@ -4821,7 +4938,7 @@
                 </a:solidFill>
                 <a:latin typeface="Calibri"/>
               </a:rPr>
-              <a:t> de cada corte: `Clases/Recursos/ACAs/` y CDigital.</a:t>
+              <a:t>, en la Presentación del Curso y en CDigital.</a:t>
             </a:r>
           </a:p>
         </p:txBody>
@@ -5349,6 +5466,40 @@
                 <a:latin typeface="Calibri"/>
               </a:rPr>
               <a:t> del cierre. Se recibe, pero se califica lo que exista dentro del plazo.</a:t>
+            </a:r>
+          </a:p>
+          <a:p>
+            <a:pPr>
+              <a:spcAft>
+                <a:spcPts val="1000"/>
+              </a:spcAft>
+            </a:pPr>
+            <a:r>
+              <a:rPr sz="1600" b="0" i="0">
+                <a:solidFill>
+                  <a:srgbClr val="2B2B2B"/>
+                </a:solidFill>
+                <a:latin typeface="Calibri"/>
+              </a:rPr>
+              <a:t>–   </a:t>
+            </a:r>
+            <a:r>
+              <a:rPr sz="1600" b="1" i="0">
+                <a:solidFill>
+                  <a:srgbClr val="2B2B2B"/>
+                </a:solidFill>
+                <a:latin typeface="Calibri"/>
+              </a:rPr>
+              <a:t>Los quices y parciales no se suben:</a:t>
+            </a:r>
+            <a:r>
+              <a:rPr sz="1600" b="0" i="0">
+                <a:solidFill>
+                  <a:srgbClr val="2B2B2B"/>
+                </a:solidFill>
+                <a:latin typeface="Calibri"/>
+              </a:rPr>
+              <a:t> son cuestionarios que se resuelven en el aula dentro de su ventana; si se cierra, no hay archivo que lo reemplace.</a:t>
             </a:r>
           </a:p>
           <a:p>
@@ -8116,7 +8267,7 @@
         <p:spPr>
           <a:xfrm>
             <a:off x="640080" y="1737360"/>
-            <a:ext cx="10911535" cy="1225296"/>
+            <a:ext cx="10911535" cy="1481328"/>
           </a:xfrm>
           <a:prstGeom prst="roundRect">
             <a:avLst/>
@@ -8160,7 +8311,7 @@
         <p:spPr>
           <a:xfrm>
             <a:off x="868680" y="1847088"/>
-            <a:ext cx="10454335" cy="1005840"/>
+            <a:ext cx="10454335" cy="1261872"/>
           </a:xfrm>
           <a:prstGeom prst="rect">
             <a:avLst/>
@@ -8205,7 +8356,7 @@
                 </a:solidFill>
                 <a:latin typeface="Calibri"/>
               </a:rPr>
-              <a:t> Se pierde por no entregar, casi nunca por escribir mal. El documento se corrige; la entrega que no llegó, no. </a:t>
+              <a:t> Se pierde por dejar pasar la ventana de un quiz o un parcial y por no entregar la ACA Final; casi nunca por escribir mal. El documento se corrige; la ventana cerrada, no. </a:t>
             </a:r>
             <a:r>
               <a:rPr sz="1300" b="1" i="0">
@@ -8236,7 +8387,7 @@
         </p:nvSpPr>
         <p:spPr>
           <a:xfrm>
-            <a:off x="640080" y="3191256"/>
+            <a:off x="640080" y="3447288"/>
             <a:ext cx="10911535" cy="1225296"/>
           </a:xfrm>
           <a:prstGeom prst="roundRect">
@@ -8280,7 +8431,7 @@
         </p:nvSpPr>
         <p:spPr>
           <a:xfrm>
-            <a:off x="868680" y="3300984"/>
+            <a:off x="868680" y="3557016"/>
             <a:ext cx="10454335" cy="1005840"/>
           </a:xfrm>
           <a:prstGeom prst="rect">
@@ -8375,7 +8526,7 @@
         </p:nvSpPr>
         <p:spPr>
           <a:xfrm>
-            <a:off x="640080" y="4645152"/>
+            <a:off x="640080" y="4901184"/>
             <a:ext cx="10911535" cy="969264"/>
           </a:xfrm>
           <a:prstGeom prst="roundRect">
@@ -8419,7 +8570,7 @@
         </p:nvSpPr>
         <p:spPr>
           <a:xfrm>
-            <a:off x="868680" y="4754880"/>
+            <a:off x="868680" y="5010912"/>
             <a:ext cx="10454335" cy="749808"/>
           </a:xfrm>
           <a:prstGeom prst="rect">
@@ -8790,7 +8941,7 @@
                 </a:solidFill>
                 <a:latin typeface="Calibri"/>
               </a:rPr>
-              <a:t>Las ACAs:</a:t>
+              <a:t>Cómo se evalúa:</a:t>
             </a:r>
             <a:r>
               <a:rPr sz="1600" b="0" i="0">
@@ -8799,7 +8950,7 @@
                 </a:solidFill>
                 <a:latin typeface="Calibri"/>
               </a:rPr>
-              <a:t> qué se entrega, cuánto pesa y dónde se sube.</a:t>
+              <a:t> qué ítems tiene el aula, cuánto pesa cada uno y qué se hace con él.</a:t>
             </a:r>
           </a:p>
           <a:p>
@@ -9331,7 +9482,7 @@
                 </a:solidFill>
                 <a:latin typeface="Calibri"/>
               </a:rPr>
-              <a:t>abra el enunciado de la ACA 1</a:t>
+              <a:t>abra las dos guías del primer corte</a:t>
             </a:r>
             <a:r>
               <a:rPr sz="1600" b="0" i="0">
@@ -9340,7 +9491,7 @@
                 </a:solidFill>
                 <a:latin typeface="Calibri"/>
               </a:rPr>
-              <a:t> en `Clases/Recursos/ACAs/`.</a:t>
+              <a:t> en `Clases/Recursos/ACAs/`: `Quiz 1 (6%)` y `Parcial 1 (24%)`, que es lo que se pregunta.</a:t>
             </a:r>
           </a:p>
         </p:txBody>
@@ -10088,25 +10239,7 @@
                 </a:solidFill>
                 <a:latin typeface="Calibri"/>
               </a:rPr>
-              <a:t>–   Abrir el enunciado de la </a:t>
-            </a:r>
-            <a:r>
-              <a:rPr sz="1600" b="1" i="0">
-                <a:solidFill>
-                  <a:srgbClr val="2B2B2B"/>
-                </a:solidFill>
-                <a:latin typeface="Calibri"/>
-              </a:rPr>
-              <a:t>ACA 1</a:t>
-            </a:r>
-            <a:r>
-              <a:rPr sz="1600" b="0" i="0">
-                <a:solidFill>
-                  <a:srgbClr val="2B2B2B"/>
-                </a:solidFill>
-                <a:latin typeface="Calibri"/>
-              </a:rPr>
-              <a:t> en `Clases/Recursos/ACAs/` y leerlo entero.</a:t>
+              <a:t>–   Abrir los enunciados de `Clases/Recursos/ACAs/`: son la guía escrita de lo que evalúa cada corte.</a:t>
             </a:r>
           </a:p>
         </p:txBody>
@@ -11273,7 +11406,7 @@
                 </a:solidFill>
                 <a:latin typeface="Calibri"/>
               </a:rPr>
-              <a:t>LAS ACAs — QUÉ SE EVALÚA</a:t>
+              <a:t>CÓMO SE EVALÚA — LOS ÍTEMS DEL AULA</a:t>
             </a:r>
           </a:p>
         </p:txBody>
@@ -11308,7 +11441,7 @@
                 </a:solidFill>
                 <a:latin typeface="Calibri"/>
               </a:rPr>
-              <a:t>Entrega oficial: </a:t>
+              <a:t>Evaluación y notas: solo en </a:t>
             </a:r>
             <a:r>
               <a:rPr sz="1500" b="1" i="0">
@@ -11318,6 +11451,33 @@
                 <a:latin typeface="Calibri"/>
               </a:rPr>
               <a:t>CDigital</a:t>
+            </a:r>
+            <a:r>
+              <a:rPr sz="1500" b="0" i="0">
+                <a:solidFill>
+                  <a:srgbClr val="2B2B2B"/>
+                </a:solidFill>
+                <a:latin typeface="Calibri"/>
+              </a:rPr>
+              <a:t> · los pesos suman </a:t>
+            </a:r>
+            <a:r>
+              <a:rPr sz="1500" b="1" i="0">
+                <a:solidFill>
+                  <a:srgbClr val="2B2B2B"/>
+                </a:solidFill>
+                <a:latin typeface="Calibri"/>
+              </a:rPr>
+              <a:t>100%</a:t>
+            </a:r>
+            <a:r>
+              <a:rPr sz="1500" b="0" i="0">
+                <a:solidFill>
+                  <a:srgbClr val="2B2B2B"/>
+                </a:solidFill>
+                <a:latin typeface="Calibri"/>
+              </a:rPr>
+              <a:t> · fechas: enunciados y Presentación del Curso</a:t>
             </a:r>
           </a:p>
         </p:txBody>
@@ -11332,7 +11492,7 @@
         </p:nvGraphicFramePr>
         <p:xfrm>
           <a:off x="640080" y="2011679"/>
-          <a:ext cx="10911533" cy="2011680"/>
+          <a:ext cx="10911533" cy="4297680"/>
         </p:xfrm>
         <a:graphic>
           <a:graphicData uri="http://schemas.openxmlformats.org/drawingml/2006/table">
@@ -11341,11 +11501,13 @@
                 <a:tableStyleId>{2D5ABB26-0587-4C30-8999-92F81FD0307C}</a:tableStyleId>
               </a:tblPr>
               <a:tblGrid>
-                <a:gridCol w="1993453"/>
-                <a:gridCol w="7763976"/>
-                <a:gridCol w="1154104"/>
+                <a:gridCol w="1833871"/>
+                <a:gridCol w="1192016"/>
+                <a:gridCol w="1192016"/>
+                <a:gridCol w="825242"/>
+                <a:gridCol w="5868388"/>
               </a:tblGrid>
-              <a:tr h="502920">
+              <a:tr h="477520">
                 <a:tc>
                   <a:txBody>
                     <a:bodyPr/>
@@ -11359,7 +11521,7 @@
                           </a:solidFill>
                           <a:latin typeface="Calibri"/>
                         </a:rPr>
-                        <a:t>ACA</a:t>
+                        <a:t>Ítem en CDigital</a:t>
                       </a:r>
                     </a:p>
                   </a:txBody>
@@ -11382,7 +11544,30 @@
                           </a:solidFill>
                           <a:latin typeface="Calibri"/>
                         </a:rPr>
-                        <a:t>Qué entregas</a:t>
+                        <a:t>Tipo</a:t>
+                      </a:r>
+                    </a:p>
+                  </a:txBody>
+                  <a:tcPr anchor="ctr" marL="109728" marR="91440" marT="36576" marB="36576">
+                    <a:solidFill>
+                      <a:srgbClr val="0C2340"/>
+                    </a:solidFill>
+                  </a:tcPr>
+                </a:tc>
+                <a:tc>
+                  <a:txBody>
+                    <a:bodyPr/>
+                    <a:lstStyle/>
+                    <a:p>
+                      <a:pPr algn="l"/>
+                      <a:r>
+                        <a:rPr sz="1300" b="1" i="0">
+                          <a:solidFill>
+                            <a:srgbClr val="FFFFFF"/>
+                          </a:solidFill>
+                          <a:latin typeface="Calibri"/>
+                        </a:rPr>
+                        <a:t>Corte (peso)</a:t>
                       </a:r>
                     </a:p>
                   </a:txBody>
@@ -11415,8 +11600,6 @@
                     </a:solidFill>
                   </a:tcPr>
                 </a:tc>
-              </a:tr>
-              <a:tr h="502920">
                 <a:tc>
                   <a:txBody>
                     <a:bodyPr/>
@@ -11424,13 +11607,38 @@
                     <a:p>
                       <a:pPr algn="l"/>
                       <a:r>
-                        <a:rPr sz="1200" b="0" i="0">
+                        <a:rPr sz="1300" b="1" i="0">
+                          <a:solidFill>
+                            <a:srgbClr val="FFFFFF"/>
+                          </a:solidFill>
+                          <a:latin typeface="Calibri"/>
+                        </a:rPr>
+                        <a:t>Qué haces con él</a:t>
+                      </a:r>
+                    </a:p>
+                  </a:txBody>
+                  <a:tcPr anchor="ctr" marL="109728" marR="91440" marT="36576" marB="36576">
+                    <a:solidFill>
+                      <a:srgbClr val="0C2340"/>
+                    </a:solidFill>
+                  </a:tcPr>
+                </a:tc>
+              </a:tr>
+              <a:tr h="477520">
+                <a:tc>
+                  <a:txBody>
+                    <a:bodyPr/>
+                    <a:lstStyle/>
+                    <a:p>
+                      <a:pPr algn="l"/>
+                      <a:r>
+                        <a:rPr sz="1100" b="1" i="0">
                           <a:solidFill>
                             <a:srgbClr val="2B2B2B"/>
                           </a:solidFill>
                           <a:latin typeface="Calibri"/>
                         </a:rPr>
-                        <a:t>ACA 1</a:t>
+                        <a:t>Quiz 1</a:t>
                       </a:r>
                     </a:p>
                   </a:txBody>
@@ -11447,13 +11655,13 @@
                     <a:p>
                       <a:pPr algn="l"/>
                       <a:r>
-                        <a:rPr sz="1200" b="0" i="0">
+                        <a:rPr sz="1100" b="0" i="0">
                           <a:solidFill>
                             <a:srgbClr val="2B2B2B"/>
                           </a:solidFill>
                           <a:latin typeface="Calibri"/>
                         </a:rPr>
-                        <a:t>Corte 1 · Delimitación y formulación</a:t>
+                        <a:t>Cuestionario</a:t>
                       </a:r>
                     </a:p>
                   </a:txBody>
@@ -11470,13 +11678,59 @@
                     <a:p>
                       <a:pPr algn="l"/>
                       <a:r>
-                        <a:rPr sz="1200" b="0" i="0">
+                        <a:rPr sz="1100" b="0" i="0">
                           <a:solidFill>
                             <a:srgbClr val="2B2B2B"/>
                           </a:solidFill>
                           <a:latin typeface="Calibri"/>
                         </a:rPr>
-                        <a:t>30%*</a:t>
+                        <a:t>1 (30%)</a:t>
+                      </a:r>
+                    </a:p>
+                  </a:txBody>
+                  <a:tcPr anchor="ctr" marL="109728" marR="91440" marT="36576" marB="36576">
+                    <a:solidFill>
+                      <a:srgbClr val="FFFFFF"/>
+                    </a:solidFill>
+                  </a:tcPr>
+                </a:tc>
+                <a:tc>
+                  <a:txBody>
+                    <a:bodyPr/>
+                    <a:lstStyle/>
+                    <a:p>
+                      <a:pPr algn="l"/>
+                      <a:r>
+                        <a:rPr sz="1100" b="1" i="0">
+                          <a:solidFill>
+                            <a:srgbClr val="2B2B2B"/>
+                          </a:solidFill>
+                          <a:latin typeface="Calibri"/>
+                        </a:rPr>
+                        <a:t>6%</a:t>
+                      </a:r>
+                    </a:p>
+                  </a:txBody>
+                  <a:tcPr anchor="ctr" marL="109728" marR="91440" marT="36576" marB="36576">
+                    <a:solidFill>
+                      <a:srgbClr val="FFFFFF"/>
+                    </a:solidFill>
+                  </a:tcPr>
+                </a:tc>
+                <a:tc>
+                  <a:txBody>
+                    <a:bodyPr/>
+                    <a:lstStyle/>
+                    <a:p>
+                      <a:pPr algn="l"/>
+                      <a:r>
+                        <a:rPr sz="1100" b="0" i="0">
+                          <a:solidFill>
+                            <a:srgbClr val="2B2B2B"/>
+                          </a:solidFill>
+                          <a:latin typeface="Calibri"/>
+                        </a:rPr>
+                        <a:t>Lo resuelves en CDigital dentro de su ventana. No se sube archivo.</a:t>
                       </a:r>
                     </a:p>
                   </a:txBody>
@@ -11487,7 +11741,7 @@
                   </a:tcPr>
                 </a:tc>
               </a:tr>
-              <a:tr h="502920">
+              <a:tr h="477520">
                 <a:tc>
                   <a:txBody>
                     <a:bodyPr/>
@@ -11495,13 +11749,13 @@
                     <a:p>
                       <a:pPr algn="l"/>
                       <a:r>
-                        <a:rPr sz="1200" b="0" i="0">
+                        <a:rPr sz="1100" b="1" i="0">
                           <a:solidFill>
                             <a:srgbClr val="2B2B2B"/>
                           </a:solidFill>
                           <a:latin typeface="Calibri"/>
                         </a:rPr>
-                        <a:t>ACA 2</a:t>
+                        <a:t>Parcial 1</a:t>
                       </a:r>
                     </a:p>
                   </a:txBody>
@@ -11518,13 +11772,13 @@
                     <a:p>
                       <a:pPr algn="l"/>
                       <a:r>
-                        <a:rPr sz="1200" b="0" i="0">
+                        <a:rPr sz="1100" b="0" i="0">
                           <a:solidFill>
                             <a:srgbClr val="2B2B2B"/>
                           </a:solidFill>
                           <a:latin typeface="Calibri"/>
                         </a:rPr>
-                        <a:t>Corte 2 · Marco referencial</a:t>
+                        <a:t>Cuestionario</a:t>
                       </a:r>
                     </a:p>
                   </a:txBody>
@@ -11541,13 +11795,59 @@
                     <a:p>
                       <a:pPr algn="l"/>
                       <a:r>
-                        <a:rPr sz="1200" b="0" i="0">
+                        <a:rPr sz="1100" b="0" i="0">
                           <a:solidFill>
                             <a:srgbClr val="2B2B2B"/>
                           </a:solidFill>
                           <a:latin typeface="Calibri"/>
                         </a:rPr>
-                        <a:t>30%*</a:t>
+                        <a:t>1 (30%)</a:t>
+                      </a:r>
+                    </a:p>
+                  </a:txBody>
+                  <a:tcPr anchor="ctr" marL="109728" marR="91440" marT="36576" marB="36576">
+                    <a:solidFill>
+                      <a:srgbClr val="F2F2F2"/>
+                    </a:solidFill>
+                  </a:tcPr>
+                </a:tc>
+                <a:tc>
+                  <a:txBody>
+                    <a:bodyPr/>
+                    <a:lstStyle/>
+                    <a:p>
+                      <a:pPr algn="l"/>
+                      <a:r>
+                        <a:rPr sz="1100" b="1" i="0">
+                          <a:solidFill>
+                            <a:srgbClr val="2B2B2B"/>
+                          </a:solidFill>
+                          <a:latin typeface="Calibri"/>
+                        </a:rPr>
+                        <a:t>24%</a:t>
+                      </a:r>
+                    </a:p>
+                  </a:txBody>
+                  <a:tcPr anchor="ctr" marL="109728" marR="91440" marT="36576" marB="36576">
+                    <a:solidFill>
+                      <a:srgbClr val="F2F2F2"/>
+                    </a:solidFill>
+                  </a:tcPr>
+                </a:tc>
+                <a:tc>
+                  <a:txBody>
+                    <a:bodyPr/>
+                    <a:lstStyle/>
+                    <a:p>
+                      <a:pPr algn="l"/>
+                      <a:r>
+                        <a:rPr sz="1100" b="0" i="0">
+                          <a:solidFill>
+                            <a:srgbClr val="2B2B2B"/>
+                          </a:solidFill>
+                          <a:latin typeface="Calibri"/>
+                        </a:rPr>
+                        <a:t>Lo resuelves en CDigital dentro de su ventana. No se sube archivo.</a:t>
                       </a:r>
                     </a:p>
                   </a:txBody>
@@ -11558,7 +11858,7 @@
                   </a:tcPr>
                 </a:tc>
               </a:tr>
-              <a:tr h="502920">
+              <a:tr h="477520">
                 <a:tc>
                   <a:txBody>
                     <a:bodyPr/>
@@ -11566,13 +11866,13 @@
                     <a:p>
                       <a:pPr algn="l"/>
                       <a:r>
-                        <a:rPr sz="1200" b="0" i="0">
+                        <a:rPr sz="1100" b="1" i="0">
                           <a:solidFill>
                             <a:srgbClr val="2B2B2B"/>
                           </a:solidFill>
                           <a:latin typeface="Calibri"/>
                         </a:rPr>
-                        <a:t>ACA 3</a:t>
+                        <a:t>Quiz 2</a:t>
                       </a:r>
                     </a:p>
                   </a:txBody>
@@ -11589,13 +11889,13 @@
                     <a:p>
                       <a:pPr algn="l"/>
                       <a:r>
-                        <a:rPr sz="1200" b="0" i="0">
+                        <a:rPr sz="1100" b="0" i="0">
                           <a:solidFill>
                             <a:srgbClr val="2B2B2B"/>
                           </a:solidFill>
                           <a:latin typeface="Calibri"/>
                         </a:rPr>
-                        <a:t>Corte 3 · Metodología e integración</a:t>
+                        <a:t>Cuestionario</a:t>
                       </a:r>
                     </a:p>
                   </a:txBody>
@@ -11612,13 +11912,59 @@
                     <a:p>
                       <a:pPr algn="l"/>
                       <a:r>
-                        <a:rPr sz="1200" b="0" i="0">
+                        <a:rPr sz="1100" b="0" i="0">
                           <a:solidFill>
                             <a:srgbClr val="2B2B2B"/>
                           </a:solidFill>
                           <a:latin typeface="Calibri"/>
                         </a:rPr>
-                        <a:t>40%*</a:t>
+                        <a:t>2 (30%)</a:t>
+                      </a:r>
+                    </a:p>
+                  </a:txBody>
+                  <a:tcPr anchor="ctr" marL="109728" marR="91440" marT="36576" marB="36576">
+                    <a:solidFill>
+                      <a:srgbClr val="FFFFFF"/>
+                    </a:solidFill>
+                  </a:tcPr>
+                </a:tc>
+                <a:tc>
+                  <a:txBody>
+                    <a:bodyPr/>
+                    <a:lstStyle/>
+                    <a:p>
+                      <a:pPr algn="l"/>
+                      <a:r>
+                        <a:rPr sz="1100" b="1" i="0">
+                          <a:solidFill>
+                            <a:srgbClr val="2B2B2B"/>
+                          </a:solidFill>
+                          <a:latin typeface="Calibri"/>
+                        </a:rPr>
+                        <a:t>9%</a:t>
+                      </a:r>
+                    </a:p>
+                  </a:txBody>
+                  <a:tcPr anchor="ctr" marL="109728" marR="91440" marT="36576" marB="36576">
+                    <a:solidFill>
+                      <a:srgbClr val="FFFFFF"/>
+                    </a:solidFill>
+                  </a:tcPr>
+                </a:tc>
+                <a:tc>
+                  <a:txBody>
+                    <a:bodyPr/>
+                    <a:lstStyle/>
+                    <a:p>
+                      <a:pPr algn="l"/>
+                      <a:r>
+                        <a:rPr sz="1100" b="0" i="0">
+                          <a:solidFill>
+                            <a:srgbClr val="2B2B2B"/>
+                          </a:solidFill>
+                          <a:latin typeface="Calibri"/>
+                        </a:rPr>
+                        <a:t>Lo resuelves en CDigital dentro de su ventana. No se sube archivo.</a:t>
                       </a:r>
                     </a:p>
                   </a:txBody>
@@ -11629,6 +11975,591 @@
                   </a:tcPr>
                 </a:tc>
               </a:tr>
+              <a:tr h="477520">
+                <a:tc>
+                  <a:txBody>
+                    <a:bodyPr/>
+                    <a:lstStyle/>
+                    <a:p>
+                      <a:pPr algn="l"/>
+                      <a:r>
+                        <a:rPr sz="1100" b="1" i="0">
+                          <a:solidFill>
+                            <a:srgbClr val="2B2B2B"/>
+                          </a:solidFill>
+                          <a:latin typeface="Calibri"/>
+                        </a:rPr>
+                        <a:t>Parcial 2</a:t>
+                      </a:r>
+                    </a:p>
+                  </a:txBody>
+                  <a:tcPr anchor="ctr" marL="109728" marR="91440" marT="36576" marB="36576">
+                    <a:solidFill>
+                      <a:srgbClr val="F2F2F2"/>
+                    </a:solidFill>
+                  </a:tcPr>
+                </a:tc>
+                <a:tc>
+                  <a:txBody>
+                    <a:bodyPr/>
+                    <a:lstStyle/>
+                    <a:p>
+                      <a:pPr algn="l"/>
+                      <a:r>
+                        <a:rPr sz="1100" b="0" i="0">
+                          <a:solidFill>
+                            <a:srgbClr val="2B2B2B"/>
+                          </a:solidFill>
+                          <a:latin typeface="Calibri"/>
+                        </a:rPr>
+                        <a:t>Cuestionario</a:t>
+                      </a:r>
+                    </a:p>
+                  </a:txBody>
+                  <a:tcPr anchor="ctr" marL="109728" marR="91440" marT="36576" marB="36576">
+                    <a:solidFill>
+                      <a:srgbClr val="F2F2F2"/>
+                    </a:solidFill>
+                  </a:tcPr>
+                </a:tc>
+                <a:tc>
+                  <a:txBody>
+                    <a:bodyPr/>
+                    <a:lstStyle/>
+                    <a:p>
+                      <a:pPr algn="l"/>
+                      <a:r>
+                        <a:rPr sz="1100" b="0" i="0">
+                          <a:solidFill>
+                            <a:srgbClr val="2B2B2B"/>
+                          </a:solidFill>
+                          <a:latin typeface="Calibri"/>
+                        </a:rPr>
+                        <a:t>2 (30%)</a:t>
+                      </a:r>
+                    </a:p>
+                  </a:txBody>
+                  <a:tcPr anchor="ctr" marL="109728" marR="91440" marT="36576" marB="36576">
+                    <a:solidFill>
+                      <a:srgbClr val="F2F2F2"/>
+                    </a:solidFill>
+                  </a:tcPr>
+                </a:tc>
+                <a:tc>
+                  <a:txBody>
+                    <a:bodyPr/>
+                    <a:lstStyle/>
+                    <a:p>
+                      <a:pPr algn="l"/>
+                      <a:r>
+                        <a:rPr sz="1100" b="1" i="0">
+                          <a:solidFill>
+                            <a:srgbClr val="2B2B2B"/>
+                          </a:solidFill>
+                          <a:latin typeface="Calibri"/>
+                        </a:rPr>
+                        <a:t>21%</a:t>
+                      </a:r>
+                    </a:p>
+                  </a:txBody>
+                  <a:tcPr anchor="ctr" marL="109728" marR="91440" marT="36576" marB="36576">
+                    <a:solidFill>
+                      <a:srgbClr val="F2F2F2"/>
+                    </a:solidFill>
+                  </a:tcPr>
+                </a:tc>
+                <a:tc>
+                  <a:txBody>
+                    <a:bodyPr/>
+                    <a:lstStyle/>
+                    <a:p>
+                      <a:pPr algn="l"/>
+                      <a:r>
+                        <a:rPr sz="1100" b="0" i="0">
+                          <a:solidFill>
+                            <a:srgbClr val="2B2B2B"/>
+                          </a:solidFill>
+                          <a:latin typeface="Calibri"/>
+                        </a:rPr>
+                        <a:t>Lo resuelves en CDigital dentro de su ventana. No se sube archivo.</a:t>
+                      </a:r>
+                    </a:p>
+                  </a:txBody>
+                  <a:tcPr anchor="ctr" marL="109728" marR="91440" marT="36576" marB="36576">
+                    <a:solidFill>
+                      <a:srgbClr val="F2F2F2"/>
+                    </a:solidFill>
+                  </a:tcPr>
+                </a:tc>
+              </a:tr>
+              <a:tr h="477520">
+                <a:tc>
+                  <a:txBody>
+                    <a:bodyPr/>
+                    <a:lstStyle/>
+                    <a:p>
+                      <a:pPr algn="l"/>
+                      <a:r>
+                        <a:rPr sz="1100" b="1" i="0">
+                          <a:solidFill>
+                            <a:srgbClr val="2B2B2B"/>
+                          </a:solidFill>
+                          <a:latin typeface="Calibri"/>
+                        </a:rPr>
+                        <a:t>ACA Final</a:t>
+                      </a:r>
+                    </a:p>
+                  </a:txBody>
+                  <a:tcPr anchor="ctr" marL="109728" marR="91440" marT="36576" marB="36576">
+                    <a:solidFill>
+                      <a:srgbClr val="FFFFFF"/>
+                    </a:solidFill>
+                  </a:tcPr>
+                </a:tc>
+                <a:tc>
+                  <a:txBody>
+                    <a:bodyPr/>
+                    <a:lstStyle/>
+                    <a:p>
+                      <a:pPr algn="l"/>
+                      <a:r>
+                        <a:rPr sz="1100" b="0" i="0">
+                          <a:solidFill>
+                            <a:srgbClr val="2B2B2B"/>
+                          </a:solidFill>
+                          <a:latin typeface="Calibri"/>
+                        </a:rPr>
+                        <a:t>Tarea</a:t>
+                      </a:r>
+                    </a:p>
+                  </a:txBody>
+                  <a:tcPr anchor="ctr" marL="109728" marR="91440" marT="36576" marB="36576">
+                    <a:solidFill>
+                      <a:srgbClr val="FFFFFF"/>
+                    </a:solidFill>
+                  </a:tcPr>
+                </a:tc>
+                <a:tc>
+                  <a:txBody>
+                    <a:bodyPr/>
+                    <a:lstStyle/>
+                    <a:p>
+                      <a:pPr algn="l"/>
+                      <a:r>
+                        <a:rPr sz="1100" b="0" i="0">
+                          <a:solidFill>
+                            <a:srgbClr val="2B2B2B"/>
+                          </a:solidFill>
+                          <a:latin typeface="Calibri"/>
+                        </a:rPr>
+                        <a:t>3 (40%)</a:t>
+                      </a:r>
+                    </a:p>
+                  </a:txBody>
+                  <a:tcPr anchor="ctr" marL="109728" marR="91440" marT="36576" marB="36576">
+                    <a:solidFill>
+                      <a:srgbClr val="FFFFFF"/>
+                    </a:solidFill>
+                  </a:tcPr>
+                </a:tc>
+                <a:tc>
+                  <a:txBody>
+                    <a:bodyPr/>
+                    <a:lstStyle/>
+                    <a:p>
+                      <a:pPr algn="l"/>
+                      <a:r>
+                        <a:rPr sz="1100" b="1" i="0">
+                          <a:solidFill>
+                            <a:srgbClr val="2B2B2B"/>
+                          </a:solidFill>
+                          <a:latin typeface="Calibri"/>
+                        </a:rPr>
+                        <a:t>32,8%</a:t>
+                      </a:r>
+                    </a:p>
+                  </a:txBody>
+                  <a:tcPr anchor="ctr" marL="109728" marR="91440" marT="36576" marB="36576">
+                    <a:solidFill>
+                      <a:srgbClr val="FFFFFF"/>
+                    </a:solidFill>
+                  </a:tcPr>
+                </a:tc>
+                <a:tc>
+                  <a:txBody>
+                    <a:bodyPr/>
+                    <a:lstStyle/>
+                    <a:p>
+                      <a:pPr algn="l"/>
+                      <a:r>
+                        <a:rPr sz="1100" b="0" i="0">
+                          <a:solidFill>
+                            <a:srgbClr val="2B2B2B"/>
+                          </a:solidFill>
+                          <a:latin typeface="Calibri"/>
+                        </a:rPr>
+                        <a:t>Subes el documento (plantilla APA CUN) al espacio de la tarea.</a:t>
+                      </a:r>
+                    </a:p>
+                  </a:txBody>
+                  <a:tcPr anchor="ctr" marL="109728" marR="91440" marT="36576" marB="36576">
+                    <a:solidFill>
+                      <a:srgbClr val="FFFFFF"/>
+                    </a:solidFill>
+                  </a:tcPr>
+                </a:tc>
+              </a:tr>
+              <a:tr h="477520">
+                <a:tc>
+                  <a:txBody>
+                    <a:bodyPr/>
+                    <a:lstStyle/>
+                    <a:p>
+                      <a:pPr algn="l"/>
+                      <a:r>
+                        <a:rPr sz="1100" b="1" i="0">
+                          <a:solidFill>
+                            <a:srgbClr val="2B2B2B"/>
+                          </a:solidFill>
+                          <a:latin typeface="Calibri"/>
+                        </a:rPr>
+                        <a:t>Quiz 3</a:t>
+                      </a:r>
+                    </a:p>
+                  </a:txBody>
+                  <a:tcPr anchor="ctr" marL="109728" marR="91440" marT="36576" marB="36576">
+                    <a:solidFill>
+                      <a:srgbClr val="F2F2F2"/>
+                    </a:solidFill>
+                  </a:tcPr>
+                </a:tc>
+                <a:tc>
+                  <a:txBody>
+                    <a:bodyPr/>
+                    <a:lstStyle/>
+                    <a:p>
+                      <a:pPr algn="l"/>
+                      <a:r>
+                        <a:rPr sz="1100" b="0" i="0">
+                          <a:solidFill>
+                            <a:srgbClr val="2B2B2B"/>
+                          </a:solidFill>
+                          <a:latin typeface="Calibri"/>
+                        </a:rPr>
+                        <a:t>Cuestionario</a:t>
+                      </a:r>
+                    </a:p>
+                  </a:txBody>
+                  <a:tcPr anchor="ctr" marL="109728" marR="91440" marT="36576" marB="36576">
+                    <a:solidFill>
+                      <a:srgbClr val="F2F2F2"/>
+                    </a:solidFill>
+                  </a:tcPr>
+                </a:tc>
+                <a:tc>
+                  <a:txBody>
+                    <a:bodyPr/>
+                    <a:lstStyle/>
+                    <a:p>
+                      <a:pPr algn="l"/>
+                      <a:r>
+                        <a:rPr sz="1100" b="0" i="0">
+                          <a:solidFill>
+                            <a:srgbClr val="2B2B2B"/>
+                          </a:solidFill>
+                          <a:latin typeface="Calibri"/>
+                        </a:rPr>
+                        <a:t>3 (40%)</a:t>
+                      </a:r>
+                    </a:p>
+                  </a:txBody>
+                  <a:tcPr anchor="ctr" marL="109728" marR="91440" marT="36576" marB="36576">
+                    <a:solidFill>
+                      <a:srgbClr val="F2F2F2"/>
+                    </a:solidFill>
+                  </a:tcPr>
+                </a:tc>
+                <a:tc>
+                  <a:txBody>
+                    <a:bodyPr/>
+                    <a:lstStyle/>
+                    <a:p>
+                      <a:pPr algn="l"/>
+                      <a:r>
+                        <a:rPr sz="1100" b="1" i="0">
+                          <a:solidFill>
+                            <a:srgbClr val="2B2B2B"/>
+                          </a:solidFill>
+                          <a:latin typeface="Calibri"/>
+                        </a:rPr>
+                        <a:t>4%</a:t>
+                      </a:r>
+                    </a:p>
+                  </a:txBody>
+                  <a:tcPr anchor="ctr" marL="109728" marR="91440" marT="36576" marB="36576">
+                    <a:solidFill>
+                      <a:srgbClr val="F2F2F2"/>
+                    </a:solidFill>
+                  </a:tcPr>
+                </a:tc>
+                <a:tc>
+                  <a:txBody>
+                    <a:bodyPr/>
+                    <a:lstStyle/>
+                    <a:p>
+                      <a:pPr algn="l"/>
+                      <a:r>
+                        <a:rPr sz="1100" b="0" i="0">
+                          <a:solidFill>
+                            <a:srgbClr val="2B2B2B"/>
+                          </a:solidFill>
+                          <a:latin typeface="Calibri"/>
+                        </a:rPr>
+                        <a:t>Lo resuelves en CDigital dentro de su ventana. No se sube archivo.</a:t>
+                      </a:r>
+                    </a:p>
+                  </a:txBody>
+                  <a:tcPr anchor="ctr" marL="109728" marR="91440" marT="36576" marB="36576">
+                    <a:solidFill>
+                      <a:srgbClr val="F2F2F2"/>
+                    </a:solidFill>
+                  </a:tcPr>
+                </a:tc>
+              </a:tr>
+              <a:tr h="477520">
+                <a:tc>
+                  <a:txBody>
+                    <a:bodyPr/>
+                    <a:lstStyle/>
+                    <a:p>
+                      <a:pPr algn="l"/>
+                      <a:r>
+                        <a:rPr sz="1100" b="1" i="0">
+                          <a:solidFill>
+                            <a:srgbClr val="2B2B2B"/>
+                          </a:solidFill>
+                          <a:latin typeface="Calibri"/>
+                        </a:rPr>
+                        <a:t>Autoevaluación</a:t>
+                      </a:r>
+                    </a:p>
+                  </a:txBody>
+                  <a:tcPr anchor="ctr" marL="109728" marR="91440" marT="36576" marB="36576">
+                    <a:solidFill>
+                      <a:srgbClr val="FFFFFF"/>
+                    </a:solidFill>
+                  </a:tcPr>
+                </a:tc>
+                <a:tc>
+                  <a:txBody>
+                    <a:bodyPr/>
+                    <a:lstStyle/>
+                    <a:p>
+                      <a:pPr algn="l"/>
+                      <a:r>
+                        <a:rPr sz="1100" b="0" i="0">
+                          <a:solidFill>
+                            <a:srgbClr val="2B2B2B"/>
+                          </a:solidFill>
+                          <a:latin typeface="Calibri"/>
+                        </a:rPr>
+                        <a:t>Cuestionario</a:t>
+                      </a:r>
+                    </a:p>
+                  </a:txBody>
+                  <a:tcPr anchor="ctr" marL="109728" marR="91440" marT="36576" marB="36576">
+                    <a:solidFill>
+                      <a:srgbClr val="FFFFFF"/>
+                    </a:solidFill>
+                  </a:tcPr>
+                </a:tc>
+                <a:tc>
+                  <a:txBody>
+                    <a:bodyPr/>
+                    <a:lstStyle/>
+                    <a:p>
+                      <a:pPr algn="l"/>
+                      <a:r>
+                        <a:rPr sz="1100" b="0" i="0">
+                          <a:solidFill>
+                            <a:srgbClr val="2B2B2B"/>
+                          </a:solidFill>
+                          <a:latin typeface="Calibri"/>
+                        </a:rPr>
+                        <a:t>3 (40%)</a:t>
+                      </a:r>
+                    </a:p>
+                  </a:txBody>
+                  <a:tcPr anchor="ctr" marL="109728" marR="91440" marT="36576" marB="36576">
+                    <a:solidFill>
+                      <a:srgbClr val="FFFFFF"/>
+                    </a:solidFill>
+                  </a:tcPr>
+                </a:tc>
+                <a:tc>
+                  <a:txBody>
+                    <a:bodyPr/>
+                    <a:lstStyle/>
+                    <a:p>
+                      <a:pPr algn="l"/>
+                      <a:r>
+                        <a:rPr sz="1100" b="1" i="0">
+                          <a:solidFill>
+                            <a:srgbClr val="2B2B2B"/>
+                          </a:solidFill>
+                          <a:latin typeface="Calibri"/>
+                        </a:rPr>
+                        <a:t>1,6%</a:t>
+                      </a:r>
+                    </a:p>
+                  </a:txBody>
+                  <a:tcPr anchor="ctr" marL="109728" marR="91440" marT="36576" marB="36576">
+                    <a:solidFill>
+                      <a:srgbClr val="FFFFFF"/>
+                    </a:solidFill>
+                  </a:tcPr>
+                </a:tc>
+                <a:tc>
+                  <a:txBody>
+                    <a:bodyPr/>
+                    <a:lstStyle/>
+                    <a:p>
+                      <a:pPr algn="l"/>
+                      <a:r>
+                        <a:rPr sz="1100" b="0" i="0">
+                          <a:solidFill>
+                            <a:srgbClr val="2B2B2B"/>
+                          </a:solidFill>
+                          <a:latin typeface="Calibri"/>
+                        </a:rPr>
+                        <a:t>La diligencias tú mismo en el aula (cuestionario individual).</a:t>
+                      </a:r>
+                    </a:p>
+                  </a:txBody>
+                  <a:tcPr anchor="ctr" marL="109728" marR="91440" marT="36576" marB="36576">
+                    <a:solidFill>
+                      <a:srgbClr val="FFFFFF"/>
+                    </a:solidFill>
+                  </a:tcPr>
+                </a:tc>
+              </a:tr>
+              <a:tr h="477520">
+                <a:tc>
+                  <a:txBody>
+                    <a:bodyPr/>
+                    <a:lstStyle/>
+                    <a:p>
+                      <a:pPr algn="l"/>
+                      <a:r>
+                        <a:rPr sz="1100" b="1" i="0">
+                          <a:solidFill>
+                            <a:srgbClr val="2B2B2B"/>
+                          </a:solidFill>
+                          <a:latin typeface="Calibri"/>
+                        </a:rPr>
+                        <a:t>Coevaluación</a:t>
+                      </a:r>
+                    </a:p>
+                  </a:txBody>
+                  <a:tcPr anchor="ctr" marL="109728" marR="91440" marT="36576" marB="36576">
+                    <a:solidFill>
+                      <a:srgbClr val="F2F2F2"/>
+                    </a:solidFill>
+                  </a:tcPr>
+                </a:tc>
+                <a:tc>
+                  <a:txBody>
+                    <a:bodyPr/>
+                    <a:lstStyle/>
+                    <a:p>
+                      <a:pPr algn="l"/>
+                      <a:r>
+                        <a:rPr sz="1100" b="0" i="0">
+                          <a:solidFill>
+                            <a:srgbClr val="2B2B2B"/>
+                          </a:solidFill>
+                          <a:latin typeface="Calibri"/>
+                        </a:rPr>
+                        <a:t>Foro</a:t>
+                      </a:r>
+                    </a:p>
+                  </a:txBody>
+                  <a:tcPr anchor="ctr" marL="109728" marR="91440" marT="36576" marB="36576">
+                    <a:solidFill>
+                      <a:srgbClr val="F2F2F2"/>
+                    </a:solidFill>
+                  </a:tcPr>
+                </a:tc>
+                <a:tc>
+                  <a:txBody>
+                    <a:bodyPr/>
+                    <a:lstStyle/>
+                    <a:p>
+                      <a:pPr algn="l"/>
+                      <a:r>
+                        <a:rPr sz="1100" b="0" i="0">
+                          <a:solidFill>
+                            <a:srgbClr val="2B2B2B"/>
+                          </a:solidFill>
+                          <a:latin typeface="Calibri"/>
+                        </a:rPr>
+                        <a:t>3 (40%)</a:t>
+                      </a:r>
+                    </a:p>
+                  </a:txBody>
+                  <a:tcPr anchor="ctr" marL="109728" marR="91440" marT="36576" marB="36576">
+                    <a:solidFill>
+                      <a:srgbClr val="F2F2F2"/>
+                    </a:solidFill>
+                  </a:tcPr>
+                </a:tc>
+                <a:tc>
+                  <a:txBody>
+                    <a:bodyPr/>
+                    <a:lstStyle/>
+                    <a:p>
+                      <a:pPr algn="l"/>
+                      <a:r>
+                        <a:rPr sz="1100" b="1" i="0">
+                          <a:solidFill>
+                            <a:srgbClr val="2B2B2B"/>
+                          </a:solidFill>
+                          <a:latin typeface="Calibri"/>
+                        </a:rPr>
+                        <a:t>1,6%</a:t>
+                      </a:r>
+                    </a:p>
+                  </a:txBody>
+                  <a:tcPr anchor="ctr" marL="109728" marR="91440" marT="36576" marB="36576">
+                    <a:solidFill>
+                      <a:srgbClr val="F2F2F2"/>
+                    </a:solidFill>
+                  </a:tcPr>
+                </a:tc>
+                <a:tc>
+                  <a:txBody>
+                    <a:bodyPr/>
+                    <a:lstStyle/>
+                    <a:p>
+                      <a:pPr algn="l"/>
+                      <a:r>
+                        <a:rPr sz="1100" b="0" i="0">
+                          <a:solidFill>
+                            <a:srgbClr val="2B2B2B"/>
+                          </a:solidFill>
+                          <a:latin typeface="Calibri"/>
+                        </a:rPr>
+                        <a:t>Participas en el foro valorando el trabajo de tus pares.</a:t>
+                      </a:r>
+                    </a:p>
+                  </a:txBody>
+                  <a:tcPr anchor="ctr" marL="109728" marR="91440" marT="36576" marB="36576">
+                    <a:solidFill>
+                      <a:srgbClr val="F2F2F2"/>
+                    </a:solidFill>
+                  </a:tcPr>
+                </a:tc>
+              </a:tr>
             </a:tbl>
           </a:graphicData>
         </a:graphic>
@@ -11636,58 +12567,6 @@
       <p:sp>
         <p:nvSpPr>
           <p:cNvPr id="6" name="TextBox 5"/>
-          <p:cNvSpPr txBox="1"/>
-          <p:nvPr/>
-        </p:nvSpPr>
-        <p:spPr>
-          <a:xfrm>
-            <a:off x="640080" y="4160520"/>
-            <a:ext cx="10911535" cy="548640"/>
-          </a:xfrm>
-          <a:prstGeom prst="rect">
-            <a:avLst/>
-          </a:prstGeom>
-          <a:noFill/>
-        </p:spPr>
-        <p:txBody>
-          <a:bodyPr wrap="square" anchor="t" lIns="0" rIns="0" tIns="0" bIns="0">
-            <a:spAutoFit/>
-          </a:bodyPr>
-          <a:lstStyle/>
-          <a:p>
-            <a:r>
-              <a:rPr sz="1200" b="0" i="1">
-                <a:solidFill>
-                  <a:srgbClr val="2B2B2B"/>
-                </a:solidFill>
-                <a:latin typeface="Calibri"/>
-              </a:rPr>
-              <a:t>Enunciado completo y </a:t>
-            </a:r>
-            <a:r>
-              <a:rPr sz="1200" b="1" i="1">
-                <a:solidFill>
-                  <a:srgbClr val="2B2B2B"/>
-                </a:solidFill>
-                <a:latin typeface="Calibri"/>
-              </a:rPr>
-              <a:t>fechas exactas</a:t>
-            </a:r>
-            <a:r>
-              <a:rPr sz="1200" b="0" i="1">
-                <a:solidFill>
-                  <a:srgbClr val="2B2B2B"/>
-                </a:solidFill>
-                <a:latin typeface="Calibri"/>
-              </a:rPr>
-              <a:t>: `Clases/Recursos/ACAs/` y la Presentación del Curso.</a:t>
-            </a:r>
-          </a:p>
-        </p:txBody>
-      </p:sp>
-      <p:sp>
-        <p:nvSpPr>
-          <p:cNvPr id="7" name="TextBox 6"/>
           <p:cNvSpPr txBox="1"/>
           <p:nvPr/>
         </p:nvSpPr>
@@ -12531,7 +13410,7 @@
                 </a:solidFill>
                 <a:latin typeface="Calibri"/>
               </a:rPr>
-              <a:t>Por lo mismo, los porcentajes de los tres cortes (</a:t>
+              <a:t>Lo que </a:t>
             </a:r>
             <a:r>
               <a:rPr sz="1300" b="1" i="0">
@@ -12540,7 +13419,7 @@
                 </a:solidFill>
                 <a:latin typeface="Calibri"/>
               </a:rPr>
-              <a:t>30 / 30 / 40</a:t>
+              <a:t>sí está confirmado</a:t>
             </a:r>
             <a:r>
               <a:rPr sz="1300" b="0" i="0">
@@ -12549,7 +13428,7 @@
                 </a:solidFill>
                 <a:latin typeface="Calibri"/>
               </a:rPr>
-              <a:t>) están marcados con asterisco: son la regla general del reglamento, y se </a:t>
+              <a:t> es la evaluación: los tres cortes, sus quices, sus parciales, la ACA Final y la auto/coevaluación salen del </a:t>
             </a:r>
             <a:r>
               <a:rPr sz="1300" b="1" i="0">
@@ -12558,7 +13437,7 @@
                 </a:solidFill>
                 <a:latin typeface="Calibri"/>
               </a:rPr>
-              <a:t>confirman en CDigital</a:t>
+              <a:t>libro de calificaciones del aula</a:t>
             </a:r>
             <a:r>
               <a:rPr sz="1300" b="0" i="0">
@@ -12567,7 +13446,7 @@
                 </a:solidFill>
                 <a:latin typeface="Calibri"/>
               </a:rPr>
-              <a:t>, que es la fuente oficial de este grupo.</a:t>
+              <a:t>, no de una suposición. Los verá con su peso en la slide «CÓMO SE EVALÚA».</a:t>
             </a:r>
           </a:p>
         </p:txBody>
@@ -12679,7 +13558,7 @@
                 </a:solidFill>
                 <a:latin typeface="Calibri"/>
               </a:rPr>
-              <a:t>, pero el producto final y los tres momentos de entrega no cambian. Si algo se mueve, el Docente lo avisa en CDigital, no de palabra.</a:t>
+              <a:t>, pero la estructura de evaluación y el producto final no cambian. Si algo se mueve, el Docente lo avisa en CDigital, no de palabra.</a:t>
             </a:r>
           </a:p>
         </p:txBody>
@@ -12955,7 +13834,7 @@
                           </a:solidFill>
                           <a:latin typeface="Calibri"/>
                         </a:rPr>
-                        <a:t>Presentación del curso, del Docente, de ustedes y de las ACAs (</a:t>
+                        <a:t>Presentación del curso, del Docente, de ustedes y de cómo se evalúa (</a:t>
                       </a:r>
                       <a:r>
                         <a:rPr sz="1200" b="1" i="0">

--- a/Pregrado/Trabajo de grado 2/Clases/Sesion 01 - Presentación del curso · docente · estudiantes · ACAs/Presentacion.pptx
+++ b/Pregrado/Trabajo de grado 2/Clases/Sesion 01 - Presentación del curso · docente · estudiantes · ACAs/Presentacion.pptx
@@ -28,6 +28,7 @@
     <p:sldId id="276" r:id="rId27"/>
     <p:sldId id="277" r:id="rId28"/>
     <p:sldId id="278" r:id="rId29"/>
+    <p:sldId id="279" r:id="rId30"/>
   </p:sldIdLst>
   <p:sldSz cx="12191695" cy="6858000" type="screen4x3"/>
   <p:notesSz cx="6858000" cy="9144000"/>
@@ -3479,21 +3480,474 @@
                 </a:solidFill>
                 <a:latin typeface="Calibri"/>
               </a:rPr>
-              <a:t>Qué se llevan al final: el avance escrito que alimenta TG3</a:t>
-            </a:r>
-          </a:p>
-        </p:txBody>
-      </p:sp>
-      <p:sp>
-        <p:nvSpPr>
-          <p:cNvPr id="4" name="TextBox 3"/>
+              <a:t>Mapa del curso (2/2): del método al cierre del avance</a:t>
+            </a:r>
+          </a:p>
+        </p:txBody>
+      </p:sp>
+      <p:graphicFrame>
+        <p:nvGraphicFramePr>
+          <p:cNvPr id="4" name="Table 3"/>
+          <p:cNvGraphicFramePr>
+            <a:graphicFrameLocks noGrp="1"/>
+          </p:cNvGraphicFramePr>
+          <p:nvPr/>
+        </p:nvGraphicFramePr>
+        <p:xfrm>
+          <a:off x="640080" y="1691639"/>
+          <a:ext cx="10911533" cy="3017520"/>
+        </p:xfrm>
+        <a:graphic>
+          <a:graphicData uri="http://schemas.openxmlformats.org/drawingml/2006/table">
+            <a:tbl>
+              <a:tblPr>
+                <a:tableStyleId>{2D5ABB26-0587-4C30-8999-92F81FD0307C}</a:tableStyleId>
+              </a:tblPr>
+              <a:tblGrid>
+                <a:gridCol w="1008629"/>
+                <a:gridCol w="4951452"/>
+                <a:gridCol w="4951452"/>
+              </a:tblGrid>
+              <a:tr h="502920">
+                <a:tc>
+                  <a:txBody>
+                    <a:bodyPr/>
+                    <a:lstStyle/>
+                    <a:p>
+                      <a:pPr algn="l"/>
+                      <a:r>
+                        <a:rPr sz="1300" b="1" i="0">
+                          <a:solidFill>
+                            <a:srgbClr val="FFFFFF"/>
+                          </a:solidFill>
+                          <a:latin typeface="Calibri"/>
+                        </a:rPr>
+                        <a:t>Sesión</a:t>
+                      </a:r>
+                    </a:p>
+                  </a:txBody>
+                  <a:tcPr anchor="ctr" marL="109728" marR="91440" marT="36576" marB="36576">
+                    <a:solidFill>
+                      <a:srgbClr val="0C2340"/>
+                    </a:solidFill>
+                  </a:tcPr>
+                </a:tc>
+                <a:tc>
+                  <a:txBody>
+                    <a:bodyPr/>
+                    <a:lstStyle/>
+                    <a:p>
+                      <a:pPr algn="l"/>
+                      <a:r>
+                        <a:rPr sz="1300" b="1" i="0">
+                          <a:solidFill>
+                            <a:srgbClr val="FFFFFF"/>
+                          </a:solidFill>
+                          <a:latin typeface="Calibri"/>
+                        </a:rPr>
+                        <a:t>De qué se ocupa</a:t>
+                      </a:r>
+                    </a:p>
+                  </a:txBody>
+                  <a:tcPr anchor="ctr" marL="109728" marR="91440" marT="36576" marB="36576">
+                    <a:solidFill>
+                      <a:srgbClr val="0C2340"/>
+                    </a:solidFill>
+                  </a:tcPr>
+                </a:tc>
+                <a:tc>
+                  <a:txBody>
+                    <a:bodyPr/>
+                    <a:lstStyle/>
+                    <a:p>
+                      <a:pPr algn="l"/>
+                      <a:r>
+                        <a:rPr sz="1300" b="1" i="0">
+                          <a:solidFill>
+                            <a:srgbClr val="FFFFFF"/>
+                          </a:solidFill>
+                          <a:latin typeface="Calibri"/>
+                        </a:rPr>
+                        <a:t>Qué queda escrito</a:t>
+                      </a:r>
+                    </a:p>
+                  </a:txBody>
+                  <a:tcPr anchor="ctr" marL="109728" marR="91440" marT="36576" marB="36576">
+                    <a:solidFill>
+                      <a:srgbClr val="0C2340"/>
+                    </a:solidFill>
+                  </a:tcPr>
+                </a:tc>
+              </a:tr>
+              <a:tr h="502920">
+                <a:tc>
+                  <a:txBody>
+                    <a:bodyPr/>
+                    <a:lstStyle/>
+                    <a:p>
+                      <a:pPr algn="l"/>
+                      <a:r>
+                        <a:rPr sz="1200" b="1" i="0">
+                          <a:solidFill>
+                            <a:srgbClr val="2B2B2B"/>
+                          </a:solidFill>
+                          <a:latin typeface="Calibri"/>
+                        </a:rPr>
+                        <a:t>07</a:t>
+                      </a:r>
+                    </a:p>
+                  </a:txBody>
+                  <a:tcPr anchor="ctr" marL="109728" marR="91440" marT="36576" marB="36576">
+                    <a:solidFill>
+                      <a:srgbClr val="FFFFFF"/>
+                    </a:solidFill>
+                  </a:tcPr>
+                </a:tc>
+                <a:tc>
+                  <a:txBody>
+                    <a:bodyPr/>
+                    <a:lstStyle/>
+                    <a:p>
+                      <a:pPr algn="l"/>
+                      <a:r>
+                        <a:rPr sz="1200" b="0" i="0">
+                          <a:solidFill>
+                            <a:srgbClr val="2B2B2B"/>
+                          </a:solidFill>
+                          <a:latin typeface="Calibri"/>
+                        </a:rPr>
+                        <a:t>Diseño metodológico (propuesto)</a:t>
+                      </a:r>
+                    </a:p>
+                  </a:txBody>
+                  <a:tcPr anchor="ctr" marL="109728" marR="91440" marT="36576" marB="36576">
+                    <a:solidFill>
+                      <a:srgbClr val="FFFFFF"/>
+                    </a:solidFill>
+                  </a:tcPr>
+                </a:tc>
+                <a:tc>
+                  <a:txBody>
+                    <a:bodyPr/>
+                    <a:lstStyle/>
+                    <a:p>
+                      <a:pPr algn="l"/>
+                      <a:r>
+                        <a:rPr sz="1200" b="0" i="0">
+                          <a:solidFill>
+                            <a:srgbClr val="2B2B2B"/>
+                          </a:solidFill>
+                          <a:latin typeface="Calibri"/>
+                        </a:rPr>
+                        <a:t>Enfoque, tipo y alcance, escritos en futuro</a:t>
+                      </a:r>
+                    </a:p>
+                  </a:txBody>
+                  <a:tcPr anchor="ctr" marL="109728" marR="91440" marT="36576" marB="36576">
+                    <a:solidFill>
+                      <a:srgbClr val="FFFFFF"/>
+                    </a:solidFill>
+                  </a:tcPr>
+                </a:tc>
+              </a:tr>
+              <a:tr h="502920">
+                <a:tc>
+                  <a:txBody>
+                    <a:bodyPr/>
+                    <a:lstStyle/>
+                    <a:p>
+                      <a:pPr algn="l"/>
+                      <a:r>
+                        <a:rPr sz="1200" b="1" i="0">
+                          <a:solidFill>
+                            <a:srgbClr val="2B2B2B"/>
+                          </a:solidFill>
+                          <a:latin typeface="Calibri"/>
+                        </a:rPr>
+                        <a:t>08</a:t>
+                      </a:r>
+                    </a:p>
+                  </a:txBody>
+                  <a:tcPr anchor="ctr" marL="109728" marR="91440" marT="36576" marB="36576">
+                    <a:solidFill>
+                      <a:srgbClr val="F2F2F2"/>
+                    </a:solidFill>
+                  </a:tcPr>
+                </a:tc>
+                <a:tc>
+                  <a:txBody>
+                    <a:bodyPr/>
+                    <a:lstStyle/>
+                    <a:p>
+                      <a:pPr algn="l"/>
+                      <a:r>
+                        <a:rPr sz="1200" b="0" i="0">
+                          <a:solidFill>
+                            <a:srgbClr val="2B2B2B"/>
+                          </a:solidFill>
+                          <a:latin typeface="Calibri"/>
+                        </a:rPr>
+                        <a:t>Instrumentos y plan de análisis (propuestos)</a:t>
+                      </a:r>
+                    </a:p>
+                  </a:txBody>
+                  <a:tcPr anchor="ctr" marL="109728" marR="91440" marT="36576" marB="36576">
+                    <a:solidFill>
+                      <a:srgbClr val="F2F2F2"/>
+                    </a:solidFill>
+                  </a:tcPr>
+                </a:tc>
+                <a:tc>
+                  <a:txBody>
+                    <a:bodyPr/>
+                    <a:lstStyle/>
+                    <a:p>
+                      <a:pPr algn="l"/>
+                      <a:r>
+                        <a:rPr sz="1200" b="0" i="0">
+                          <a:solidFill>
+                            <a:srgbClr val="2B2B2B"/>
+                          </a:solidFill>
+                          <a:latin typeface="Calibri"/>
+                        </a:rPr>
+                        <a:t>Bosquejo de instrumento y plan de análisis</a:t>
+                      </a:r>
+                    </a:p>
+                  </a:txBody>
+                  <a:tcPr anchor="ctr" marL="109728" marR="91440" marT="36576" marB="36576">
+                    <a:solidFill>
+                      <a:srgbClr val="F2F2F2"/>
+                    </a:solidFill>
+                  </a:tcPr>
+                </a:tc>
+              </a:tr>
+              <a:tr h="502920">
+                <a:tc>
+                  <a:txBody>
+                    <a:bodyPr/>
+                    <a:lstStyle/>
+                    <a:p>
+                      <a:pPr algn="l"/>
+                      <a:r>
+                        <a:rPr sz="1200" b="1" i="0">
+                          <a:solidFill>
+                            <a:srgbClr val="2B2B2B"/>
+                          </a:solidFill>
+                          <a:latin typeface="Calibri"/>
+                        </a:rPr>
+                        <a:t>09</a:t>
+                      </a:r>
+                    </a:p>
+                  </a:txBody>
+                  <a:tcPr anchor="ctr" marL="109728" marR="91440" marT="36576" marB="36576">
+                    <a:solidFill>
+                      <a:srgbClr val="FFFFFF"/>
+                    </a:solidFill>
+                  </a:tcPr>
+                </a:tc>
+                <a:tc>
+                  <a:txBody>
+                    <a:bodyPr/>
+                    <a:lstStyle/>
+                    <a:p>
+                      <a:pPr algn="l"/>
+                      <a:r>
+                        <a:rPr sz="1200" b="0" i="0">
+                          <a:solidFill>
+                            <a:srgbClr val="2B2B2B"/>
+                          </a:solidFill>
+                          <a:latin typeface="Calibri"/>
+                        </a:rPr>
+                        <a:t>Integración del avance · correcciones</a:t>
+                      </a:r>
+                    </a:p>
+                  </a:txBody>
+                  <a:tcPr anchor="ctr" marL="109728" marR="91440" marT="36576" marB="36576">
+                    <a:solidFill>
+                      <a:srgbClr val="FFFFFF"/>
+                    </a:solidFill>
+                  </a:tcPr>
+                </a:tc>
+                <a:tc>
+                  <a:txBody>
+                    <a:bodyPr/>
+                    <a:lstStyle/>
+                    <a:p>
+                      <a:pPr algn="l"/>
+                      <a:r>
+                        <a:rPr sz="1200" b="0" i="0">
+                          <a:solidFill>
+                            <a:srgbClr val="2B2B2B"/>
+                          </a:solidFill>
+                          <a:latin typeface="Calibri"/>
+                        </a:rPr>
+                        <a:t>Documento consolidado y coherente</a:t>
+                      </a:r>
+                    </a:p>
+                  </a:txBody>
+                  <a:tcPr anchor="ctr" marL="109728" marR="91440" marT="36576" marB="36576">
+                    <a:solidFill>
+                      <a:srgbClr val="FFFFFF"/>
+                    </a:solidFill>
+                  </a:tcPr>
+                </a:tc>
+              </a:tr>
+              <a:tr h="502920">
+                <a:tc>
+                  <a:txBody>
+                    <a:bodyPr/>
+                    <a:lstStyle/>
+                    <a:p>
+                      <a:pPr algn="l"/>
+                      <a:r>
+                        <a:rPr sz="1200" b="1" i="0">
+                          <a:solidFill>
+                            <a:srgbClr val="2B2B2B"/>
+                          </a:solidFill>
+                          <a:latin typeface="Calibri"/>
+                        </a:rPr>
+                        <a:t>10</a:t>
+                      </a:r>
+                    </a:p>
+                  </a:txBody>
+                  <a:tcPr anchor="ctr" marL="109728" marR="91440" marT="36576" marB="36576">
+                    <a:solidFill>
+                      <a:srgbClr val="F2F2F2"/>
+                    </a:solidFill>
+                  </a:tcPr>
+                </a:tc>
+                <a:tc>
+                  <a:txBody>
+                    <a:bodyPr/>
+                    <a:lstStyle/>
+                    <a:p>
+                      <a:pPr algn="l"/>
+                      <a:r>
+                        <a:rPr sz="1200" b="0" i="0">
+                          <a:solidFill>
+                            <a:srgbClr val="2B2B2B"/>
+                          </a:solidFill>
+                          <a:latin typeface="Calibri"/>
+                        </a:rPr>
+                        <a:t>Socialización de avances</a:t>
+                      </a:r>
+                    </a:p>
+                  </a:txBody>
+                  <a:tcPr anchor="ctr" marL="109728" marR="91440" marT="36576" marB="36576">
+                    <a:solidFill>
+                      <a:srgbClr val="F2F2F2"/>
+                    </a:solidFill>
+                  </a:tcPr>
+                </a:tc>
+                <a:tc>
+                  <a:txBody>
+                    <a:bodyPr/>
+                    <a:lstStyle/>
+                    <a:p>
+                      <a:pPr algn="l"/>
+                      <a:r>
+                        <a:rPr sz="1200" b="0" i="0">
+                          <a:solidFill>
+                            <a:srgbClr val="2B2B2B"/>
+                          </a:solidFill>
+                          <a:latin typeface="Calibri"/>
+                        </a:rPr>
+                        <a:t>Pitch de 3 minutos y retroalimentación de pares</a:t>
+                      </a:r>
+                    </a:p>
+                  </a:txBody>
+                  <a:tcPr anchor="ctr" marL="109728" marR="91440" marT="36576" marB="36576">
+                    <a:solidFill>
+                      <a:srgbClr val="F2F2F2"/>
+                    </a:solidFill>
+                  </a:tcPr>
+                </a:tc>
+              </a:tr>
+              <a:tr h="502920">
+                <a:tc>
+                  <a:txBody>
+                    <a:bodyPr/>
+                    <a:lstStyle/>
+                    <a:p>
+                      <a:pPr algn="l"/>
+                      <a:r>
+                        <a:rPr sz="1200" b="1" i="0">
+                          <a:solidFill>
+                            <a:srgbClr val="2B2B2B"/>
+                          </a:solidFill>
+                          <a:latin typeface="Calibri"/>
+                        </a:rPr>
+                        <a:t>11</a:t>
+                      </a:r>
+                    </a:p>
+                  </a:txBody>
+                  <a:tcPr anchor="ctr" marL="109728" marR="91440" marT="36576" marB="36576">
+                    <a:solidFill>
+                      <a:srgbClr val="FFFFFF"/>
+                    </a:solidFill>
+                  </a:tcPr>
+                </a:tc>
+                <a:tc>
+                  <a:txBody>
+                    <a:bodyPr/>
+                    <a:lstStyle/>
+                    <a:p>
+                      <a:pPr algn="l"/>
+                      <a:r>
+                        <a:rPr sz="1200" b="0" i="0">
+                          <a:solidFill>
+                            <a:srgbClr val="2B2B2B"/>
+                          </a:solidFill>
+                          <a:latin typeface="Calibri"/>
+                        </a:rPr>
+                        <a:t>Cierre del avance · preparación para TG3</a:t>
+                      </a:r>
+                    </a:p>
+                  </a:txBody>
+                  <a:tcPr anchor="ctr" marL="109728" marR="91440" marT="36576" marB="36576">
+                    <a:solidFill>
+                      <a:srgbClr val="FFFFFF"/>
+                    </a:solidFill>
+                  </a:tcPr>
+                </a:tc>
+                <a:tc>
+                  <a:txBody>
+                    <a:bodyPr/>
+                    <a:lstStyle/>
+                    <a:p>
+                      <a:pPr algn="l"/>
+                      <a:r>
+                        <a:rPr sz="1200" b="0" i="0">
+                          <a:solidFill>
+                            <a:srgbClr val="2B2B2B"/>
+                          </a:solidFill>
+                          <a:latin typeface="Calibri"/>
+                        </a:rPr>
+                        <a:t>Versión limpia y lista de pendientes para TG3</a:t>
+                      </a:r>
+                    </a:p>
+                  </a:txBody>
+                  <a:tcPr anchor="ctr" marL="109728" marR="91440" marT="36576" marB="36576">
+                    <a:solidFill>
+                      <a:srgbClr val="FFFFFF"/>
+                    </a:solidFill>
+                  </a:tcPr>
+                </a:tc>
+              </a:tr>
+            </a:tbl>
+          </a:graphicData>
+        </a:graphic>
+      </p:graphicFrame>
+      <p:sp>
+        <p:nvSpPr>
+          <p:cNvPr id="5" name="TextBox 4"/>
           <p:cNvSpPr txBox="1"/>
           <p:nvPr/>
         </p:nvSpPr>
         <p:spPr>
           <a:xfrm>
-            <a:off x="640080" y="1691639"/>
-            <a:ext cx="10911535" cy="4617720"/>
+            <a:off x="640080" y="4846320"/>
+            <a:ext cx="10911535" cy="548640"/>
           </a:xfrm>
           <a:prstGeom prst="rect">
             <a:avLst/>
@@ -3506,22 +3960,17 @@
           </a:bodyPr>
           <a:lstStyle/>
           <a:p>
-            <a:pPr>
-              <a:spcAft>
-                <a:spcPts val="1000"/>
-              </a:spcAft>
-            </a:pPr>
-            <a:r>
-              <a:rPr sz="1600" b="0" i="0">
-                <a:solidFill>
-                  <a:srgbClr val="2B2B2B"/>
-                </a:solidFill>
-                <a:latin typeface="Calibri"/>
-              </a:rPr>
-              <a:t>–   El producto de TG2 es </a:t>
-            </a:r>
-            <a:r>
-              <a:rPr sz="1600" b="1" i="0">
+            <a:r>
+              <a:rPr sz="1200" b="0" i="1">
+                <a:solidFill>
+                  <a:srgbClr val="2B2B2B"/>
+                </a:solidFill>
+                <a:latin typeface="Calibri"/>
+              </a:rPr>
+              <a:t>Las once sesiones construyen </a:t>
+            </a:r>
+            <a:r>
+              <a:rPr sz="1200" b="1" i="1">
                 <a:solidFill>
                   <a:srgbClr val="2B2B2B"/>
                 </a:solidFill>
@@ -3530,258 +3979,20 @@
               <a:t>un solo documento</a:t>
             </a:r>
             <a:r>
-              <a:rPr sz="1600" b="0" i="0">
-                <a:solidFill>
-                  <a:srgbClr val="2B2B2B"/>
-                </a:solidFill>
-                <a:latin typeface="Calibri"/>
-              </a:rPr>
-              <a:t>: el avance consolidado de su trabajo de grado.</a:t>
-            </a:r>
-          </a:p>
-          <a:p>
-            <a:pPr>
-              <a:spcAft>
-                <a:spcPts val="1000"/>
-              </a:spcAft>
-            </a:pPr>
-            <a:r>
-              <a:rPr sz="1600" b="0" i="0">
-                <a:solidFill>
-                  <a:srgbClr val="2B2B2B"/>
-                </a:solidFill>
-                <a:latin typeface="Calibri"/>
-              </a:rPr>
-              <a:t>–   Terminar TG2 </a:t>
-            </a:r>
-            <a:r>
-              <a:rPr sz="1600" b="1" i="0">
-                <a:solidFill>
-                  <a:srgbClr val="2B2B2B"/>
-                </a:solidFill>
-                <a:latin typeface="Calibri"/>
-              </a:rPr>
-              <a:t>no</a:t>
-            </a:r>
-            <a:r>
-              <a:rPr sz="1600" b="0" i="0">
-                <a:solidFill>
-                  <a:srgbClr val="2B2B2B"/>
-                </a:solidFill>
-                <a:latin typeface="Calibri"/>
-              </a:rPr>
-              <a:t> es terminar el trabajo de grado. Es dejarlo listo para que en TG3 solo quede </a:t>
-            </a:r>
-            <a:r>
-              <a:rPr sz="1600" b="1" i="0">
-                <a:solidFill>
-                  <a:srgbClr val="2B2B2B"/>
-                </a:solidFill>
-                <a:latin typeface="Calibri"/>
-              </a:rPr>
-              <a:t>ejecutar y sustentar</a:t>
-            </a:r>
-            <a:r>
-              <a:rPr sz="1600" b="0" i="0">
-                <a:solidFill>
-                  <a:srgbClr val="2B2B2B"/>
-                </a:solidFill>
-                <a:latin typeface="Calibri"/>
-              </a:rPr>
-              <a:t>.</a:t>
-            </a:r>
-          </a:p>
-          <a:p>
-            <a:pPr>
-              <a:spcAft>
-                <a:spcPts val="1000"/>
-              </a:spcAft>
-            </a:pPr>
-            <a:r>
-              <a:rPr sz="1600" b="0" i="0">
-                <a:solidFill>
-                  <a:srgbClr val="2B2B2B"/>
-                </a:solidFill>
-                <a:latin typeface="Calibri"/>
-              </a:rPr>
-              <a:t>–   Al cerrar el periodo su documento debe tener:</a:t>
-            </a:r>
-          </a:p>
-          <a:p>
-            <a:pPr lvl="1">
-              <a:spcAft>
-                <a:spcPts val="600"/>
-              </a:spcAft>
-            </a:pPr>
-            <a:r>
-              <a:rPr sz="1500" b="0" i="0">
-                <a:solidFill>
-                  <a:srgbClr val="2B2B2B"/>
-                </a:solidFill>
-                <a:latin typeface="Calibri"/>
-              </a:rPr>
-              <a:t>●   </a:t>
-            </a:r>
-            <a:r>
-              <a:rPr sz="1500" b="1" i="0">
-                <a:solidFill>
-                  <a:srgbClr val="2B2B2B"/>
-                </a:solidFill>
-                <a:latin typeface="Calibri"/>
-              </a:rPr>
-              <a:t>Planteamiento del problema</a:t>
-            </a:r>
-            <a:r>
-              <a:rPr sz="1500" b="0" i="0">
-                <a:solidFill>
-                  <a:srgbClr val="2B2B2B"/>
-                </a:solidFill>
-                <a:latin typeface="Calibri"/>
-              </a:rPr>
-              <a:t>, pregunta y objetivos definitivos.</a:t>
-            </a:r>
-          </a:p>
-          <a:p>
-            <a:pPr lvl="1">
-              <a:spcAft>
-                <a:spcPts val="600"/>
-              </a:spcAft>
-            </a:pPr>
-            <a:r>
-              <a:rPr sz="1500" b="0" i="0">
-                <a:solidFill>
-                  <a:srgbClr val="2B2B2B"/>
-                </a:solidFill>
-                <a:latin typeface="Calibri"/>
-              </a:rPr>
-              <a:t>●   </a:t>
-            </a:r>
-            <a:r>
-              <a:rPr sz="1500" b="1" i="0">
-                <a:solidFill>
-                  <a:srgbClr val="2B2B2B"/>
-                </a:solidFill>
-                <a:latin typeface="Calibri"/>
-              </a:rPr>
-              <a:t>Marco referencial</a:t>
-            </a:r>
-            <a:r>
-              <a:rPr sz="1500" b="0" i="0">
-                <a:solidFill>
-                  <a:srgbClr val="2B2B2B"/>
-                </a:solidFill>
-                <a:latin typeface="Calibri"/>
-              </a:rPr>
-              <a:t>: antecedentes, marco teórico, conceptual y contextual, citados en APA 7.</a:t>
-            </a:r>
-          </a:p>
-          <a:p>
-            <a:pPr lvl="1">
-              <a:spcAft>
-                <a:spcPts val="600"/>
-              </a:spcAft>
-            </a:pPr>
-            <a:r>
-              <a:rPr sz="1500" b="0" i="0">
-                <a:solidFill>
-                  <a:srgbClr val="2B2B2B"/>
-                </a:solidFill>
-                <a:latin typeface="Calibri"/>
-              </a:rPr>
-              <a:t>●   </a:t>
-            </a:r>
-            <a:r>
-              <a:rPr sz="1500" b="1" i="0">
-                <a:solidFill>
-                  <a:srgbClr val="2B2B2B"/>
-                </a:solidFill>
-                <a:latin typeface="Calibri"/>
-              </a:rPr>
-              <a:t>Metodología propuesta</a:t>
-            </a:r>
-            <a:r>
-              <a:rPr sz="1500" b="0" i="0">
-                <a:solidFill>
-                  <a:srgbClr val="2B2B2B"/>
-                </a:solidFill>
-                <a:latin typeface="Calibri"/>
-              </a:rPr>
-              <a:t> (en futuro: “se aplicará”, “se propone”), con instrumentos bosquejados.</a:t>
-            </a:r>
-          </a:p>
-          <a:p>
-            <a:pPr lvl="1">
-              <a:spcAft>
-                <a:spcPts val="600"/>
-              </a:spcAft>
-            </a:pPr>
-            <a:r>
-              <a:rPr sz="1500" b="0" i="0">
-                <a:solidFill>
-                  <a:srgbClr val="2B2B2B"/>
-                </a:solidFill>
-                <a:latin typeface="Calibri"/>
-              </a:rPr>
-              <a:t>●   Una </a:t>
-            </a:r>
-            <a:r>
-              <a:rPr sz="1500" b="1" i="0">
-                <a:solidFill>
-                  <a:srgbClr val="2B2B2B"/>
-                </a:solidFill>
-                <a:latin typeface="Calibri"/>
-              </a:rPr>
-              <a:t>lista de pendientes para TG3</a:t>
-            </a:r>
-            <a:r>
-              <a:rPr sz="1500" b="0" i="0">
-                <a:solidFill>
-                  <a:srgbClr val="2B2B2B"/>
-                </a:solidFill>
-                <a:latin typeface="Calibri"/>
-              </a:rPr>
-              <a:t>, explícita y en imperativo.</a:t>
-            </a:r>
-          </a:p>
-          <a:p>
-            <a:pPr>
-              <a:spcAft>
-                <a:spcPts val="1000"/>
-              </a:spcAft>
-            </a:pPr>
-            <a:r>
-              <a:rPr sz="1600" b="0" i="0">
-                <a:solidFill>
-                  <a:srgbClr val="2B2B2B"/>
-                </a:solidFill>
-                <a:latin typeface="Calibri"/>
-              </a:rPr>
-              <a:t>–   Para qué le sirve después: quien llega a TG3 con esto hecho </a:t>
-            </a:r>
-            <a:r>
-              <a:rPr sz="1600" b="1" i="0">
-                <a:solidFill>
-                  <a:srgbClr val="2B2B2B"/>
-                </a:solidFill>
-                <a:latin typeface="Calibri"/>
-              </a:rPr>
-              <a:t>arranca ejecutando</a:t>
-            </a:r>
-            <a:r>
-              <a:rPr sz="1600" b="0" i="0">
-                <a:solidFill>
-                  <a:srgbClr val="2B2B2B"/>
-                </a:solidFill>
-                <a:latin typeface="Calibri"/>
-              </a:rPr>
-              <a:t>; quien llega sin esto, repite TG2 dentro de TG3 y no alcanza a sustentar.</a:t>
-            </a:r>
-          </a:p>
-        </p:txBody>
-      </p:sp>
-      <p:sp>
-        <p:nvSpPr>
-          <p:cNvPr id="5" name="TextBox 4"/>
+              <a:rPr sz="1200" b="0" i="1">
+                <a:solidFill>
+                  <a:srgbClr val="2B2B2B"/>
+                </a:solidFill>
+                <a:latin typeface="Calibri"/>
+              </a:rPr>
+              <a:t>. Si falta a una, la siguiente le va a pedir algo que no escribió.</a:t>
+            </a:r>
+          </a:p>
+        </p:txBody>
+      </p:sp>
+      <p:sp>
+        <p:nvSpPr>
+          <p:cNvPr id="6" name="TextBox 5"/>
           <p:cNvSpPr txBox="1"/>
           <p:nvPr/>
         </p:nvSpPr>
@@ -3810,40 +4021,6 @@
                 <a:latin typeface="Calibri"/>
               </a:rPr>
               <a:t>10</a:t>
-            </a:r>
-          </a:p>
-        </p:txBody>
-      </p:sp>
-      <p:sp>
-        <p:nvSpPr>
-          <p:cNvPr id="6" name="TextBox 5"/>
-          <p:cNvSpPr txBox="1"/>
-          <p:nvPr/>
-        </p:nvSpPr>
-        <p:spPr>
-          <a:xfrm>
-            <a:off x="640080" y="5943600"/>
-            <a:ext cx="9997135" cy="457200"/>
-          </a:xfrm>
-          <a:prstGeom prst="rect">
-            <a:avLst/>
-          </a:prstGeom>
-          <a:noFill/>
-        </p:spPr>
-        <p:txBody>
-          <a:bodyPr wrap="square" anchor="t" lIns="0" rIns="0" tIns="0" bIns="0">
-            <a:spAutoFit/>
-          </a:bodyPr>
-          <a:lstStyle/>
-          <a:p>
-            <a:r>
-              <a:rPr sz="1200" b="0" i="1">
-                <a:solidFill>
-                  <a:srgbClr val="2B2B2B"/>
-                </a:solidFill>
-                <a:latin typeface="Calibri"/>
-              </a:rPr>
-              <a:t>Aquí no hay resultados todavía: el trabajo de campo es de TG3. Prometer hallazgos en este avance es el error que más se arrastra.</a:t>
             </a:r>
           </a:p>
         </p:txBody>
@@ -3948,7 +4125,7 @@
                 </a:solidFill>
                 <a:latin typeface="Calibri"/>
               </a:rPr>
-              <a:t>El acuerdo pedagógico: qué pactamos hoy</a:t>
+              <a:t>Qué se llevan al final: el avance escrito que alimenta TG3</a:t>
             </a:r>
           </a:p>
         </p:txBody>
@@ -3987,7 +4164,7 @@
                 </a:solidFill>
                 <a:latin typeface="Calibri"/>
               </a:rPr>
-              <a:t>–   Es el </a:t>
+              <a:t>–   El producto de TG2 es </a:t>
             </a:r>
             <a:r>
               <a:rPr sz="1600" b="1" i="0">
@@ -3996,7 +4173,7 @@
                 </a:solidFill>
                 <a:latin typeface="Calibri"/>
               </a:rPr>
-              <a:t>pacto de trabajo del curso</a:t>
+              <a:t>un solo documento</a:t>
             </a:r>
             <a:r>
               <a:rPr sz="1600" b="0" i="0">
@@ -4005,7 +4182,7 @@
                 </a:solidFill>
                 <a:latin typeface="Calibri"/>
               </a:rPr>
-              <a:t>, y se deja por escrito hoy en el espacio del curso en CDigital.</a:t>
+              <a:t>: el avance consolidado de su trabajo de grado.</a:t>
             </a:r>
           </a:p>
           <a:p>
@@ -4021,7 +4198,59 @@
                 </a:solidFill>
                 <a:latin typeface="Calibri"/>
               </a:rPr>
-              <a:t>–   Qué contiene, punto por punto:</a:t>
+              <a:t>–   Terminar TG2 </a:t>
+            </a:r>
+            <a:r>
+              <a:rPr sz="1600" b="1" i="0">
+                <a:solidFill>
+                  <a:srgbClr val="2B2B2B"/>
+                </a:solidFill>
+                <a:latin typeface="Calibri"/>
+              </a:rPr>
+              <a:t>no</a:t>
+            </a:r>
+            <a:r>
+              <a:rPr sz="1600" b="0" i="0">
+                <a:solidFill>
+                  <a:srgbClr val="2B2B2B"/>
+                </a:solidFill>
+                <a:latin typeface="Calibri"/>
+              </a:rPr>
+              <a:t> es terminar el trabajo de grado. Es dejarlo listo para que en TG3 solo quede </a:t>
+            </a:r>
+            <a:r>
+              <a:rPr sz="1600" b="1" i="0">
+                <a:solidFill>
+                  <a:srgbClr val="2B2B2B"/>
+                </a:solidFill>
+                <a:latin typeface="Calibri"/>
+              </a:rPr>
+              <a:t>ejecutar y sustentar</a:t>
+            </a:r>
+            <a:r>
+              <a:rPr sz="1600" b="0" i="0">
+                <a:solidFill>
+                  <a:srgbClr val="2B2B2B"/>
+                </a:solidFill>
+                <a:latin typeface="Calibri"/>
+              </a:rPr>
+              <a:t>.</a:t>
+            </a:r>
+          </a:p>
+          <a:p>
+            <a:pPr>
+              <a:spcAft>
+                <a:spcPts val="1000"/>
+              </a:spcAft>
+            </a:pPr>
+            <a:r>
+              <a:rPr sz="1600" b="0" i="0">
+                <a:solidFill>
+                  <a:srgbClr val="2B2B2B"/>
+                </a:solidFill>
+                <a:latin typeface="Calibri"/>
+              </a:rPr>
+              <a:t>–   Al cerrar el periodo su documento debe tener:</a:t>
             </a:r>
           </a:p>
           <a:p>
@@ -4046,7 +4275,7 @@
                 </a:solidFill>
                 <a:latin typeface="Calibri"/>
               </a:rPr>
-              <a:t>Ritmo:</a:t>
+              <a:t>Planteamiento del problema</a:t>
             </a:r>
             <a:r>
               <a:rPr sz="1500" b="0" i="0">
@@ -4055,7 +4284,7 @@
                 </a:solidFill>
                 <a:latin typeface="Calibri"/>
               </a:rPr>
-              <a:t> una sección escrita por sesión, subida antes del siguiente encuentro.</a:t>
+              <a:t>, pregunta y objetivos definitivos.</a:t>
             </a:r>
           </a:p>
           <a:p>
@@ -4080,7 +4309,7 @@
                 </a:solidFill>
                 <a:latin typeface="Calibri"/>
               </a:rPr>
-              <a:t>Formato:</a:t>
+              <a:t>Marco referencial</a:t>
             </a:r>
             <a:r>
               <a:rPr sz="1500" b="0" i="0">
@@ -4089,7 +4318,7 @@
                 </a:solidFill>
                 <a:latin typeface="Calibri"/>
               </a:rPr>
-              <a:t> plantilla APA CUN, abierta en Google Docs.</a:t>
+              <a:t>: antecedentes, marco teórico, conceptual y contextual, citados en APA 7.</a:t>
             </a:r>
           </a:p>
           <a:p>
@@ -4114,7 +4343,7 @@
                 </a:solidFill>
                 <a:latin typeface="Calibri"/>
               </a:rPr>
-              <a:t>Canal:</a:t>
+              <a:t>Metodología propuesta</a:t>
             </a:r>
             <a:r>
               <a:rPr sz="1500" b="0" i="0">
@@ -4123,7 +4352,7 @@
                 </a:solidFill>
                 <a:latin typeface="Calibri"/>
               </a:rPr>
-              <a:t> CDigital para todo lo que se entrega y se califica.</a:t>
+              <a:t> (en futuro: “se aplicará”, “se propone”), con instrumentos bosquejados.</a:t>
             </a:r>
           </a:p>
           <a:p>
@@ -4139,7 +4368,7 @@
                 </a:solidFill>
                 <a:latin typeface="Calibri"/>
               </a:rPr>
-              <a:t>●   </a:t>
+              <a:t>●   Una </a:t>
             </a:r>
             <a:r>
               <a:rPr sz="1500" b="1" i="0">
@@ -4148,7 +4377,7 @@
                 </a:solidFill>
                 <a:latin typeface="Calibri"/>
               </a:rPr>
-              <a:t>Festivos:</a:t>
+              <a:t>lista de pendientes para TG3</a:t>
             </a:r>
             <a:r>
               <a:rPr sz="1500" b="0" i="0">
@@ -4157,59 +4386,7 @@
                 </a:solidFill>
                 <a:latin typeface="Calibri"/>
               </a:rPr>
-              <a:t> lunes festivo = </a:t>
-            </a:r>
-            <a:r>
-              <a:rPr sz="1500" b="1" i="0">
-                <a:solidFill>
-                  <a:srgbClr val="2B2B2B"/>
-                </a:solidFill>
-                <a:latin typeface="Calibri"/>
-              </a:rPr>
-              <a:t>clase autónoma</a:t>
-            </a:r>
-            <a:r>
-              <a:rPr sz="1500" b="0" i="0">
-                <a:solidFill>
-                  <a:srgbClr val="2B2B2B"/>
-                </a:solidFill>
-                <a:latin typeface="Calibri"/>
-              </a:rPr>
-              <a:t>, con actividad publicada.</a:t>
-            </a:r>
-          </a:p>
-          <a:p>
-            <a:pPr lvl="1">
-              <a:spcAft>
-                <a:spcPts val="600"/>
-              </a:spcAft>
-            </a:pPr>
-            <a:r>
-              <a:rPr sz="1500" b="0" i="0">
-                <a:solidFill>
-                  <a:srgbClr val="2B2B2B"/>
-                </a:solidFill>
-                <a:latin typeface="Calibri"/>
-              </a:rPr>
-              <a:t>●   </a:t>
-            </a:r>
-            <a:r>
-              <a:rPr sz="1500" b="1" i="0">
-                <a:solidFill>
-                  <a:srgbClr val="2B2B2B"/>
-                </a:solidFill>
-                <a:latin typeface="Calibri"/>
-              </a:rPr>
-              <a:t>Retroalimentación:</a:t>
-            </a:r>
-            <a:r>
-              <a:rPr sz="1500" b="0" i="0">
-                <a:solidFill>
-                  <a:srgbClr val="2B2B2B"/>
-                </a:solidFill>
-                <a:latin typeface="Calibri"/>
-              </a:rPr>
-              <a:t> el Docente comenta sobre lo entregado; sin entrega no hay retroalimentación posible.</a:t>
+              <a:t>, explícita y en imperativo.</a:t>
             </a:r>
           </a:p>
           <a:p>
@@ -4225,7 +4402,25 @@
                 </a:solidFill>
                 <a:latin typeface="Calibri"/>
               </a:rPr>
-              <a:t>–   No es un trámite: es lo que se invoca cuando alguien dice “yo no sabía”. Léalo antes de aceptarlo.</a:t>
+              <a:t>–   Para qué le sirve después: quien llega a TG3 con esto hecho </a:t>
+            </a:r>
+            <a:r>
+              <a:rPr sz="1600" b="1" i="0">
+                <a:solidFill>
+                  <a:srgbClr val="2B2B2B"/>
+                </a:solidFill>
+                <a:latin typeface="Calibri"/>
+              </a:rPr>
+              <a:t>arranca ejecutando</a:t>
+            </a:r>
+            <a:r>
+              <a:rPr sz="1600" b="0" i="0">
+                <a:solidFill>
+                  <a:srgbClr val="2B2B2B"/>
+                </a:solidFill>
+                <a:latin typeface="Calibri"/>
+              </a:rPr>
+              <a:t>; quien llega sin esto, repite TG2 dentro de TG3 y no alcanza a sustentar.</a:t>
             </a:r>
           </a:p>
         </p:txBody>
@@ -4265,6 +4460,40 @@
           </a:p>
         </p:txBody>
       </p:sp>
+      <p:sp>
+        <p:nvSpPr>
+          <p:cNvPr id="6" name="TextBox 5"/>
+          <p:cNvSpPr txBox="1"/>
+          <p:nvPr/>
+        </p:nvSpPr>
+        <p:spPr>
+          <a:xfrm>
+            <a:off x="640080" y="5943600"/>
+            <a:ext cx="9997135" cy="457200"/>
+          </a:xfrm>
+          <a:prstGeom prst="rect">
+            <a:avLst/>
+          </a:prstGeom>
+          <a:noFill/>
+        </p:spPr>
+        <p:txBody>
+          <a:bodyPr wrap="square" anchor="t" lIns="0" rIns="0" tIns="0" bIns="0">
+            <a:spAutoFit/>
+          </a:bodyPr>
+          <a:lstStyle/>
+          <a:p>
+            <a:r>
+              <a:rPr sz="1200" b="0" i="1">
+                <a:solidFill>
+                  <a:srgbClr val="2B2B2B"/>
+                </a:solidFill>
+                <a:latin typeface="Calibri"/>
+              </a:rPr>
+              <a:t>Aquí no hay resultados todavía: el trabajo de campo es de TG3. Prometer hallazgos en este avance es el error que más se arrastra.</a:t>
+            </a:r>
+          </a:p>
+        </p:txBody>
+      </p:sp>
     </p:spTree>
   </p:cSld>
   <p:clrMapOvr>
@@ -4274,6 +4503,441 @@
 </file>
 
 <file path=ppt/slides/slide12.xml><?xml version="1.0" encoding="utf-8"?>
+<p:sld xmlns:a="http://schemas.openxmlformats.org/drawingml/2006/main" xmlns:p="http://schemas.openxmlformats.org/presentationml/2006/main" xmlns:r="http://schemas.openxmlformats.org/officeDocument/2006/relationships">
+  <p:cSld>
+    <p:bg>
+      <p:bgPr>
+        <a:solidFill>
+          <a:srgbClr val="FFFFFF"/>
+        </a:solidFill>
+        <a:effectLst/>
+      </p:bgPr>
+    </p:bg>
+    <p:spTree>
+      <p:nvGrpSpPr>
+        <p:cNvPr id="1" name=""/>
+        <p:cNvGrpSpPr/>
+        <p:nvPr/>
+      </p:nvGrpSpPr>
+      <p:grpSpPr/>
+      <p:sp>
+        <p:nvSpPr>
+          <p:cNvPr id="2" name="Rectangle 1"/>
+          <p:cNvSpPr/>
+          <p:nvPr/>
+        </p:nvSpPr>
+        <p:spPr>
+          <a:xfrm>
+            <a:off x="0" y="0"/>
+            <a:ext cx="12191695" cy="1188720"/>
+          </a:xfrm>
+          <a:prstGeom prst="rect">
+            <a:avLst/>
+          </a:prstGeom>
+          <a:solidFill>
+            <a:srgbClr val="0C2340"/>
+          </a:solidFill>
+          <a:ln>
+            <a:noFill/>
+          </a:ln>
+          <a:effectLst/>
+        </p:spPr>
+        <p:style>
+          <a:lnRef idx="1">
+            <a:schemeClr val="accent1"/>
+          </a:lnRef>
+          <a:fillRef idx="3">
+            <a:schemeClr val="accent1"/>
+          </a:fillRef>
+          <a:effectRef idx="2">
+            <a:schemeClr val="accent1"/>
+          </a:effectRef>
+          <a:fontRef idx="minor">
+            <a:schemeClr val="lt1"/>
+          </a:fontRef>
+        </p:style>
+        <p:txBody>
+          <a:bodyPr rtlCol="0" anchor="ctr"/>
+          <a:lstStyle/>
+          <a:p>
+            <a:pPr algn="ctr"/>
+          </a:p>
+        </p:txBody>
+      </p:sp>
+      <p:sp>
+        <p:nvSpPr>
+          <p:cNvPr id="3" name="TextBox 2"/>
+          <p:cNvSpPr txBox="1"/>
+          <p:nvPr/>
+        </p:nvSpPr>
+        <p:spPr>
+          <a:xfrm>
+            <a:off x="640080" y="0"/>
+            <a:ext cx="9082735" cy="1188720"/>
+          </a:xfrm>
+          <a:prstGeom prst="rect">
+            <a:avLst/>
+          </a:prstGeom>
+          <a:noFill/>
+        </p:spPr>
+        <p:txBody>
+          <a:bodyPr wrap="square" anchor="ctr" lIns="0" rIns="0" tIns="0" bIns="0">
+            <a:spAutoFit/>
+          </a:bodyPr>
+          <a:lstStyle/>
+          <a:p>
+            <a:pPr algn="ctr"/>
+            <a:r>
+              <a:rPr sz="2600" b="1" i="0">
+                <a:solidFill>
+                  <a:srgbClr val="FFFFFF"/>
+                </a:solidFill>
+                <a:latin typeface="Calibri"/>
+              </a:rPr>
+              <a:t>El acuerdo pedagógico: qué pactamos hoy</a:t>
+            </a:r>
+          </a:p>
+        </p:txBody>
+      </p:sp>
+      <p:sp>
+        <p:nvSpPr>
+          <p:cNvPr id="4" name="TextBox 3"/>
+          <p:cNvSpPr txBox="1"/>
+          <p:nvPr/>
+        </p:nvSpPr>
+        <p:spPr>
+          <a:xfrm>
+            <a:off x="640080" y="1691639"/>
+            <a:ext cx="10911535" cy="4617720"/>
+          </a:xfrm>
+          <a:prstGeom prst="rect">
+            <a:avLst/>
+          </a:prstGeom>
+          <a:noFill/>
+        </p:spPr>
+        <p:txBody>
+          <a:bodyPr wrap="square" anchor="t" lIns="0" rIns="0" tIns="0" bIns="0">
+            <a:spAutoFit/>
+          </a:bodyPr>
+          <a:lstStyle/>
+          <a:p>
+            <a:pPr>
+              <a:spcAft>
+                <a:spcPts val="1000"/>
+              </a:spcAft>
+            </a:pPr>
+            <a:r>
+              <a:rPr sz="1600" b="0" i="0">
+                <a:solidFill>
+                  <a:srgbClr val="2B2B2B"/>
+                </a:solidFill>
+                <a:latin typeface="Calibri"/>
+              </a:rPr>
+              <a:t>–   Es el </a:t>
+            </a:r>
+            <a:r>
+              <a:rPr sz="1600" b="1" i="0">
+                <a:solidFill>
+                  <a:srgbClr val="2B2B2B"/>
+                </a:solidFill>
+                <a:latin typeface="Calibri"/>
+              </a:rPr>
+              <a:t>pacto de trabajo del curso</a:t>
+            </a:r>
+            <a:r>
+              <a:rPr sz="1600" b="0" i="0">
+                <a:solidFill>
+                  <a:srgbClr val="2B2B2B"/>
+                </a:solidFill>
+                <a:latin typeface="Calibri"/>
+              </a:rPr>
+              <a:t>, y se deja por escrito hoy en el espacio del curso en CDigital.</a:t>
+            </a:r>
+          </a:p>
+          <a:p>
+            <a:pPr>
+              <a:spcAft>
+                <a:spcPts val="1000"/>
+              </a:spcAft>
+            </a:pPr>
+            <a:r>
+              <a:rPr sz="1600" b="0" i="0">
+                <a:solidFill>
+                  <a:srgbClr val="2B2B2B"/>
+                </a:solidFill>
+                <a:latin typeface="Calibri"/>
+              </a:rPr>
+              <a:t>–   Qué contiene, punto por punto:</a:t>
+            </a:r>
+          </a:p>
+          <a:p>
+            <a:pPr lvl="1">
+              <a:spcAft>
+                <a:spcPts val="600"/>
+              </a:spcAft>
+            </a:pPr>
+            <a:r>
+              <a:rPr sz="1500" b="0" i="0">
+                <a:solidFill>
+                  <a:srgbClr val="2B2B2B"/>
+                </a:solidFill>
+                <a:latin typeface="Calibri"/>
+              </a:rPr>
+              <a:t>●   </a:t>
+            </a:r>
+            <a:r>
+              <a:rPr sz="1500" b="1" i="0">
+                <a:solidFill>
+                  <a:srgbClr val="2B2B2B"/>
+                </a:solidFill>
+                <a:latin typeface="Calibri"/>
+              </a:rPr>
+              <a:t>Ritmo:</a:t>
+            </a:r>
+            <a:r>
+              <a:rPr sz="1500" b="0" i="0">
+                <a:solidFill>
+                  <a:srgbClr val="2B2B2B"/>
+                </a:solidFill>
+                <a:latin typeface="Calibri"/>
+              </a:rPr>
+              <a:t> una sección escrita por sesión, subida antes del siguiente encuentro.</a:t>
+            </a:r>
+          </a:p>
+          <a:p>
+            <a:pPr lvl="1">
+              <a:spcAft>
+                <a:spcPts val="600"/>
+              </a:spcAft>
+            </a:pPr>
+            <a:r>
+              <a:rPr sz="1500" b="0" i="0">
+                <a:solidFill>
+                  <a:srgbClr val="2B2B2B"/>
+                </a:solidFill>
+                <a:latin typeface="Calibri"/>
+              </a:rPr>
+              <a:t>●   </a:t>
+            </a:r>
+            <a:r>
+              <a:rPr sz="1500" b="1" i="0">
+                <a:solidFill>
+                  <a:srgbClr val="2B2B2B"/>
+                </a:solidFill>
+                <a:latin typeface="Calibri"/>
+              </a:rPr>
+              <a:t>Formato:</a:t>
+            </a:r>
+            <a:r>
+              <a:rPr sz="1500" b="0" i="0">
+                <a:solidFill>
+                  <a:srgbClr val="2B2B2B"/>
+                </a:solidFill>
+                <a:latin typeface="Calibri"/>
+              </a:rPr>
+              <a:t> plantilla APA CUN, abierta en Google Docs.</a:t>
+            </a:r>
+          </a:p>
+          <a:p>
+            <a:pPr lvl="1">
+              <a:spcAft>
+                <a:spcPts val="600"/>
+              </a:spcAft>
+            </a:pPr>
+            <a:r>
+              <a:rPr sz="1500" b="0" i="0">
+                <a:solidFill>
+                  <a:srgbClr val="2B2B2B"/>
+                </a:solidFill>
+                <a:latin typeface="Calibri"/>
+              </a:rPr>
+              <a:t>●   </a:t>
+            </a:r>
+            <a:r>
+              <a:rPr sz="1500" b="1" i="0">
+                <a:solidFill>
+                  <a:srgbClr val="2B2B2B"/>
+                </a:solidFill>
+                <a:latin typeface="Calibri"/>
+              </a:rPr>
+              <a:t>Canal:</a:t>
+            </a:r>
+            <a:r>
+              <a:rPr sz="1500" b="0" i="0">
+                <a:solidFill>
+                  <a:srgbClr val="2B2B2B"/>
+                </a:solidFill>
+                <a:latin typeface="Calibri"/>
+              </a:rPr>
+              <a:t> CDigital para todo lo que se entrega y se califica.</a:t>
+            </a:r>
+          </a:p>
+          <a:p>
+            <a:pPr lvl="1">
+              <a:spcAft>
+                <a:spcPts val="600"/>
+              </a:spcAft>
+            </a:pPr>
+            <a:r>
+              <a:rPr sz="1500" b="0" i="0">
+                <a:solidFill>
+                  <a:srgbClr val="2B2B2B"/>
+                </a:solidFill>
+                <a:latin typeface="Calibri"/>
+              </a:rPr>
+              <a:t>●   </a:t>
+            </a:r>
+            <a:r>
+              <a:rPr sz="1500" b="1" i="0">
+                <a:solidFill>
+                  <a:srgbClr val="2B2B2B"/>
+                </a:solidFill>
+                <a:latin typeface="Calibri"/>
+              </a:rPr>
+              <a:t>Festivos:</a:t>
+            </a:r>
+            <a:r>
+              <a:rPr sz="1500" b="0" i="0">
+                <a:solidFill>
+                  <a:srgbClr val="2B2B2B"/>
+                </a:solidFill>
+                <a:latin typeface="Calibri"/>
+              </a:rPr>
+              <a:t> lunes festivo = </a:t>
+            </a:r>
+            <a:r>
+              <a:rPr sz="1500" b="1" i="0">
+                <a:solidFill>
+                  <a:srgbClr val="2B2B2B"/>
+                </a:solidFill>
+                <a:latin typeface="Calibri"/>
+              </a:rPr>
+              <a:t>clase autónoma</a:t>
+            </a:r>
+            <a:r>
+              <a:rPr sz="1500" b="0" i="0">
+                <a:solidFill>
+                  <a:srgbClr val="2B2B2B"/>
+                </a:solidFill>
+                <a:latin typeface="Calibri"/>
+              </a:rPr>
+              <a:t>. La actividad queda en la carpeta de esa sesión en el </a:t>
+            </a:r>
+            <a:r>
+              <a:rPr sz="1500" b="1" i="0">
+                <a:solidFill>
+                  <a:srgbClr val="2B2B2B"/>
+                </a:solidFill>
+                <a:latin typeface="Calibri"/>
+              </a:rPr>
+              <a:t>Drive de clases</a:t>
+            </a:r>
+            <a:r>
+              <a:rPr sz="1500" b="0" i="0">
+                <a:solidFill>
+                  <a:srgbClr val="2B2B2B"/>
+                </a:solidFill>
+                <a:latin typeface="Calibri"/>
+              </a:rPr>
+              <a:t>; la entrega sigue siendo en CDigital.</a:t>
+            </a:r>
+          </a:p>
+          <a:p>
+            <a:pPr lvl="1">
+              <a:spcAft>
+                <a:spcPts val="600"/>
+              </a:spcAft>
+            </a:pPr>
+            <a:r>
+              <a:rPr sz="1500" b="0" i="0">
+                <a:solidFill>
+                  <a:srgbClr val="2B2B2B"/>
+                </a:solidFill>
+                <a:latin typeface="Calibri"/>
+              </a:rPr>
+              <a:t>●   </a:t>
+            </a:r>
+            <a:r>
+              <a:rPr sz="1500" b="1" i="0">
+                <a:solidFill>
+                  <a:srgbClr val="2B2B2B"/>
+                </a:solidFill>
+                <a:latin typeface="Calibri"/>
+              </a:rPr>
+              <a:t>Retroalimentación:</a:t>
+            </a:r>
+            <a:r>
+              <a:rPr sz="1500" b="0" i="0">
+                <a:solidFill>
+                  <a:srgbClr val="2B2B2B"/>
+                </a:solidFill>
+                <a:latin typeface="Calibri"/>
+              </a:rPr>
+              <a:t> el Docente comenta sobre lo entregado; sin entrega no hay retroalimentación posible.</a:t>
+            </a:r>
+          </a:p>
+          <a:p>
+            <a:pPr>
+              <a:spcAft>
+                <a:spcPts val="1000"/>
+              </a:spcAft>
+            </a:pPr>
+            <a:r>
+              <a:rPr sz="1600" b="0" i="0">
+                <a:solidFill>
+                  <a:srgbClr val="2B2B2B"/>
+                </a:solidFill>
+                <a:latin typeface="Calibri"/>
+              </a:rPr>
+              <a:t>–   No es un trámite: es lo que se invoca cuando alguien dice “yo no sabía”. Léalo antes de aceptarlo.</a:t>
+            </a:r>
+          </a:p>
+        </p:txBody>
+      </p:sp>
+      <p:sp>
+        <p:nvSpPr>
+          <p:cNvPr id="5" name="TextBox 4"/>
+          <p:cNvSpPr txBox="1"/>
+          <p:nvPr/>
+        </p:nvSpPr>
+        <p:spPr>
+          <a:xfrm>
+            <a:off x="11094415" y="6446520"/>
+            <a:ext cx="548640" cy="274320"/>
+          </a:xfrm>
+          <a:prstGeom prst="rect">
+            <a:avLst/>
+          </a:prstGeom>
+          <a:noFill/>
+        </p:spPr>
+        <p:txBody>
+          <a:bodyPr wrap="square" anchor="t" lIns="0" rIns="0" tIns="0" bIns="0">
+            <a:spAutoFit/>
+          </a:bodyPr>
+          <a:lstStyle/>
+          <a:p>
+            <a:pPr algn="r"/>
+            <a:r>
+              <a:rPr sz="1000" b="1" i="0">
+                <a:solidFill>
+                  <a:srgbClr val="8F989D"/>
+                </a:solidFill>
+                <a:latin typeface="Calibri"/>
+              </a:rPr>
+              <a:t>12</a:t>
+            </a:r>
+          </a:p>
+        </p:txBody>
+      </p:sp>
+    </p:spTree>
+  </p:cSld>
+  <p:clrMapOvr>
+    <a:masterClrMapping/>
+  </p:clrMapOvr>
+</p:sld>
+</file>
+
+<file path=ppt/slides/slide13.xml><?xml version="1.0" encoding="utf-8"?>
 <p:sld xmlns:a="http://schemas.openxmlformats.org/drawingml/2006/main" xmlns:p="http://schemas.openxmlformats.org/presentationml/2006/main" xmlns:r="http://schemas.openxmlformats.org/officeDocument/2006/relationships">
   <p:cSld>
     <p:bg>
@@ -4973,7 +5637,7 @@
                 </a:solidFill>
                 <a:latin typeface="Calibri"/>
               </a:rPr>
-              <a:t>12</a:t>
+              <a:t>13</a:t>
             </a:r>
           </a:p>
         </p:txBody>
@@ -4986,7 +5650,7 @@
 </p:sld>
 </file>
 
-<file path=ppt/slides/slide13.xml><?xml version="1.0" encoding="utf-8"?>
+<file path=ppt/slides/slide14.xml><?xml version="1.0" encoding="utf-8"?>
 <p:sld xmlns:a="http://schemas.openxmlformats.org/drawingml/2006/main" xmlns:p="http://schemas.openxmlformats.org/presentationml/2006/main" xmlns:r="http://schemas.openxmlformats.org/officeDocument/2006/relationships">
   <p:cSld>
     <p:bg>
@@ -5568,7 +6232,7 @@
                 </a:solidFill>
                 <a:latin typeface="Calibri"/>
               </a:rPr>
-              <a:t>13</a:t>
+              <a:t>14</a:t>
             </a:r>
           </a:p>
         </p:txBody>
@@ -5581,7 +6245,7 @@
 </p:sld>
 </file>
 
-<file path=ppt/slides/slide14.xml><?xml version="1.0" encoding="utf-8"?>
+<file path=ppt/slides/slide15.xml><?xml version="1.0" encoding="utf-8"?>
 <p:sld xmlns:a="http://schemas.openxmlformats.org/drawingml/2006/main" xmlns:p="http://schemas.openxmlformats.org/presentationml/2006/main" xmlns:r="http://schemas.openxmlformats.org/officeDocument/2006/relationships">
   <p:cSld>
     <p:bg>
@@ -5967,7 +6631,7 @@
                 </a:solidFill>
                 <a:latin typeface="Calibri"/>
               </a:rPr>
-              <a:t>14</a:t>
+              <a:t>15</a:t>
             </a:r>
           </a:p>
         </p:txBody>
@@ -6032,7 +6696,7 @@
 </p:sld>
 </file>
 
-<file path=ppt/slides/slide15.xml><?xml version="1.0" encoding="utf-8"?>
+<file path=ppt/slides/slide16.xml><?xml version="1.0" encoding="utf-8"?>
 <p:sld xmlns:a="http://schemas.openxmlformats.org/drawingml/2006/main" xmlns:p="http://schemas.openxmlformats.org/presentationml/2006/main" xmlns:r="http://schemas.openxmlformats.org/officeDocument/2006/relationships">
   <p:cSld>
     <p:bg>
@@ -6468,7 +7132,7 @@
                 </a:solidFill>
                 <a:latin typeface="Calibri"/>
               </a:rPr>
-              <a:t>15</a:t>
+              <a:t>16</a:t>
             </a:r>
           </a:p>
         </p:txBody>
@@ -6481,7 +7145,7 @@
 </p:sld>
 </file>
 
-<file path=ppt/slides/slide16.xml><?xml version="1.0" encoding="utf-8"?>
+<file path=ppt/slides/slide17.xml><?xml version="1.0" encoding="utf-8"?>
 <p:sld xmlns:a="http://schemas.openxmlformats.org/drawingml/2006/main" xmlns:p="http://schemas.openxmlformats.org/presentationml/2006/main" xmlns:r="http://schemas.openxmlformats.org/officeDocument/2006/relationships">
   <p:cSld>
     <p:bg>
@@ -7237,7 +7901,7 @@
                 </a:solidFill>
                 <a:latin typeface="Calibri"/>
               </a:rPr>
-              <a:t>16</a:t>
+              <a:t>17</a:t>
             </a:r>
           </a:p>
         </p:txBody>
@@ -7250,7 +7914,7 @@
 </p:sld>
 </file>
 
-<file path=ppt/slides/slide17.xml><?xml version="1.0" encoding="utf-8"?>
+<file path=ppt/slides/slide18.xml><?xml version="1.0" encoding="utf-8"?>
 <p:sld xmlns:a="http://schemas.openxmlformats.org/drawingml/2006/main" xmlns:p="http://schemas.openxmlformats.org/presentationml/2006/main" xmlns:r="http://schemas.openxmlformats.org/officeDocument/2006/relationships">
   <p:cSld>
     <p:bg>
@@ -7663,7 +8327,7 @@
                 </a:solidFill>
                 <a:latin typeface="Calibri"/>
               </a:rPr>
-              <a:t>17</a:t>
+              <a:t>18</a:t>
             </a:r>
           </a:p>
         </p:txBody>
@@ -7676,7 +8340,7 @@
 </p:sld>
 </file>
 
-<file path=ppt/slides/slide18.xml><?xml version="1.0" encoding="utf-8"?>
+<file path=ppt/slides/slide19.xml><?xml version="1.0" encoding="utf-8"?>
 <p:sld xmlns:a="http://schemas.openxmlformats.org/drawingml/2006/main" xmlns:p="http://schemas.openxmlformats.org/presentationml/2006/main" xmlns:r="http://schemas.openxmlformats.org/officeDocument/2006/relationships">
   <p:cSld>
     <p:bg>
@@ -8148,7 +8812,7 @@
                 </a:solidFill>
                 <a:latin typeface="Calibri"/>
               </a:rPr>
-              <a:t>18</a:t>
+              <a:t>19</a:t>
             </a:r>
           </a:p>
         </p:txBody>
@@ -8161,7 +8825,7 @@
 </p:sld>
 </file>
 
-<file path=ppt/slides/slide19.xml><?xml version="1.0" encoding="utf-8"?>
+<file path=ppt/slides/slide2.xml><?xml version="1.0" encoding="utf-8"?>
 <p:sld xmlns:a="http://schemas.openxmlformats.org/drawingml/2006/main" xmlns:p="http://schemas.openxmlformats.org/presentationml/2006/main" xmlns:r="http://schemas.openxmlformats.org/officeDocument/2006/relationships">
   <p:cSld>
     <p:bg>
@@ -8253,6 +8917,374 @@
                 </a:solidFill>
                 <a:latin typeface="Calibri"/>
               </a:rPr>
+              <a:t>AGENDA DE HOY</a:t>
+            </a:r>
+          </a:p>
+        </p:txBody>
+      </p:sp>
+      <p:sp>
+        <p:nvSpPr>
+          <p:cNvPr id="4" name="TextBox 3"/>
+          <p:cNvSpPr txBox="1"/>
+          <p:nvPr/>
+        </p:nvSpPr>
+        <p:spPr>
+          <a:xfrm>
+            <a:off x="640080" y="1280160"/>
+            <a:ext cx="10911535" cy="411480"/>
+          </a:xfrm>
+          <a:prstGeom prst="rect">
+            <a:avLst/>
+          </a:prstGeom>
+          <a:noFill/>
+        </p:spPr>
+        <p:txBody>
+          <a:bodyPr wrap="square" anchor="t" lIns="0" rIns="0" tIns="0" bIns="0">
+            <a:spAutoFit/>
+          </a:bodyPr>
+          <a:lstStyle/>
+          <a:p>
+            <a:pPr algn="ctr"/>
+            <a:r>
+              <a:rPr sz="1500" b="0" i="0">
+                <a:solidFill>
+                  <a:srgbClr val="2B2B2B"/>
+                </a:solidFill>
+                <a:latin typeface="Calibri"/>
+              </a:rPr>
+              <a:t>Sesión de encuadre — hoy no vemos tema; el contenido arranca en la Sesión 02.</a:t>
+            </a:r>
+          </a:p>
+        </p:txBody>
+      </p:sp>
+      <p:sp>
+        <p:nvSpPr>
+          <p:cNvPr id="5" name="TextBox 4"/>
+          <p:cNvSpPr txBox="1"/>
+          <p:nvPr/>
+        </p:nvSpPr>
+        <p:spPr>
+          <a:xfrm>
+            <a:off x="640080" y="2011679"/>
+            <a:ext cx="10911535" cy="4297680"/>
+          </a:xfrm>
+          <a:prstGeom prst="rect">
+            <a:avLst/>
+          </a:prstGeom>
+          <a:noFill/>
+        </p:spPr>
+        <p:txBody>
+          <a:bodyPr wrap="square" anchor="t" lIns="0" rIns="0" tIns="0" bIns="0">
+            <a:spAutoFit/>
+          </a:bodyPr>
+          <a:lstStyle/>
+          <a:p>
+            <a:pPr>
+              <a:spcAft>
+                <a:spcPts val="1000"/>
+              </a:spcAft>
+            </a:pPr>
+            <a:r>
+              <a:rPr sz="1600" b="0" i="0">
+                <a:solidFill>
+                  <a:srgbClr val="2B2B2B"/>
+                </a:solidFill>
+                <a:latin typeface="Calibri"/>
+              </a:rPr>
+              <a:t>–   </a:t>
+            </a:r>
+            <a:r>
+              <a:rPr sz="1600" b="1" i="0">
+                <a:solidFill>
+                  <a:srgbClr val="2B2B2B"/>
+                </a:solidFill>
+                <a:latin typeface="Calibri"/>
+              </a:rPr>
+              <a:t>El curso:</a:t>
+            </a:r>
+            <a:r>
+              <a:rPr sz="1600" b="0" i="0">
+                <a:solidFill>
+                  <a:srgbClr val="2B2B2B"/>
+                </a:solidFill>
+                <a:latin typeface="Calibri"/>
+              </a:rPr>
+              <a:t> de qué se trata, cómo trabajamos y qué se llevan al final.</a:t>
+            </a:r>
+          </a:p>
+          <a:p>
+            <a:pPr>
+              <a:spcAft>
+                <a:spcPts val="1000"/>
+              </a:spcAft>
+            </a:pPr>
+            <a:r>
+              <a:rPr sz="1600" b="0" i="0">
+                <a:solidFill>
+                  <a:srgbClr val="2B2B2B"/>
+                </a:solidFill>
+                <a:latin typeface="Calibri"/>
+              </a:rPr>
+              <a:t>–   </a:t>
+            </a:r>
+            <a:r>
+              <a:rPr sz="1600" b="1" i="0">
+                <a:solidFill>
+                  <a:srgbClr val="2B2B2B"/>
+                </a:solidFill>
+                <a:latin typeface="Calibri"/>
+              </a:rPr>
+              <a:t>El Docente:</a:t>
+            </a:r>
+            <a:r>
+              <a:rPr sz="1600" b="0" i="0">
+                <a:solidFill>
+                  <a:srgbClr val="2B2B2B"/>
+                </a:solidFill>
+                <a:latin typeface="Calibri"/>
+              </a:rPr>
+              <a:t> quién los acompaña y cómo contactarlo.</a:t>
+            </a:r>
+          </a:p>
+          <a:p>
+            <a:pPr>
+              <a:spcAft>
+                <a:spcPts val="1000"/>
+              </a:spcAft>
+            </a:pPr>
+            <a:r>
+              <a:rPr sz="1600" b="0" i="0">
+                <a:solidFill>
+                  <a:srgbClr val="2B2B2B"/>
+                </a:solidFill>
+                <a:latin typeface="Calibri"/>
+              </a:rPr>
+              <a:t>–   </a:t>
+            </a:r>
+            <a:r>
+              <a:rPr sz="1600" b="1" i="0">
+                <a:solidFill>
+                  <a:srgbClr val="2B2B2B"/>
+                </a:solidFill>
+                <a:latin typeface="Calibri"/>
+              </a:rPr>
+              <a:t>Ustedes:</a:t>
+            </a:r>
+            <a:r>
+              <a:rPr sz="1600" b="0" i="0">
+                <a:solidFill>
+                  <a:srgbClr val="2B2B2B"/>
+                </a:solidFill>
+                <a:latin typeface="Calibri"/>
+              </a:rPr>
+              <a:t> nos presentamos en el tablero colaborativo.</a:t>
+            </a:r>
+          </a:p>
+          <a:p>
+            <a:pPr>
+              <a:spcAft>
+                <a:spcPts val="1000"/>
+              </a:spcAft>
+            </a:pPr>
+            <a:r>
+              <a:rPr sz="1600" b="0" i="0">
+                <a:solidFill>
+                  <a:srgbClr val="2B2B2B"/>
+                </a:solidFill>
+                <a:latin typeface="Calibri"/>
+              </a:rPr>
+              <a:t>–   </a:t>
+            </a:r>
+            <a:r>
+              <a:rPr sz="1600" b="1" i="0">
+                <a:solidFill>
+                  <a:srgbClr val="2B2B2B"/>
+                </a:solidFill>
+                <a:latin typeface="Calibri"/>
+              </a:rPr>
+              <a:t>Cómo se evalúa:</a:t>
+            </a:r>
+            <a:r>
+              <a:rPr sz="1600" b="0" i="0">
+                <a:solidFill>
+                  <a:srgbClr val="2B2B2B"/>
+                </a:solidFill>
+                <a:latin typeface="Calibri"/>
+              </a:rPr>
+              <a:t> qué ítems tiene el aula, cuánto pesa cada uno y qué se hace con él.</a:t>
+            </a:r>
+          </a:p>
+          <a:p>
+            <a:pPr>
+              <a:spcAft>
+                <a:spcPts val="1000"/>
+              </a:spcAft>
+            </a:pPr>
+            <a:r>
+              <a:rPr sz="1600" b="0" i="0">
+                <a:solidFill>
+                  <a:srgbClr val="2B2B2B"/>
+                </a:solidFill>
+                <a:latin typeface="Calibri"/>
+              </a:rPr>
+              <a:t>–   </a:t>
+            </a:r>
+            <a:r>
+              <a:rPr sz="1600" b="1" i="0">
+                <a:solidFill>
+                  <a:srgbClr val="2B2B2B"/>
+                </a:solidFill>
+                <a:latin typeface="Calibri"/>
+              </a:rPr>
+              <a:t>Acuerdos</a:t>
+            </a:r>
+            <a:r>
+              <a:rPr sz="1600" b="0" i="0">
+                <a:solidFill>
+                  <a:srgbClr val="2B2B2B"/>
+                </a:solidFill>
+                <a:latin typeface="Calibri"/>
+              </a:rPr>
+              <a:t> de trabajo y el primer encargo autónomo.</a:t>
+            </a:r>
+          </a:p>
+        </p:txBody>
+      </p:sp>
+      <p:sp>
+        <p:nvSpPr>
+          <p:cNvPr id="6" name="TextBox 5"/>
+          <p:cNvSpPr txBox="1"/>
+          <p:nvPr/>
+        </p:nvSpPr>
+        <p:spPr>
+          <a:xfrm>
+            <a:off x="11094415" y="6446520"/>
+            <a:ext cx="548640" cy="274320"/>
+          </a:xfrm>
+          <a:prstGeom prst="rect">
+            <a:avLst/>
+          </a:prstGeom>
+          <a:noFill/>
+        </p:spPr>
+        <p:txBody>
+          <a:bodyPr wrap="square" anchor="t" lIns="0" rIns="0" tIns="0" bIns="0">
+            <a:spAutoFit/>
+          </a:bodyPr>
+          <a:lstStyle/>
+          <a:p>
+            <a:pPr algn="r"/>
+            <a:r>
+              <a:rPr sz="1000" b="1" i="0">
+                <a:solidFill>
+                  <a:srgbClr val="8F989D"/>
+                </a:solidFill>
+                <a:latin typeface="Calibri"/>
+              </a:rPr>
+              <a:t>2</a:t>
+            </a:r>
+          </a:p>
+        </p:txBody>
+      </p:sp>
+    </p:spTree>
+  </p:cSld>
+  <p:clrMapOvr>
+    <a:masterClrMapping/>
+  </p:clrMapOvr>
+</p:sld>
+</file>
+
+<file path=ppt/slides/slide20.xml><?xml version="1.0" encoding="utf-8"?>
+<p:sld xmlns:a="http://schemas.openxmlformats.org/drawingml/2006/main" xmlns:p="http://schemas.openxmlformats.org/presentationml/2006/main" xmlns:r="http://schemas.openxmlformats.org/officeDocument/2006/relationships">
+  <p:cSld>
+    <p:bg>
+      <p:bgPr>
+        <a:solidFill>
+          <a:srgbClr val="FFFFFF"/>
+        </a:solidFill>
+        <a:effectLst/>
+      </p:bgPr>
+    </p:bg>
+    <p:spTree>
+      <p:nvGrpSpPr>
+        <p:cNvPr id="1" name=""/>
+        <p:cNvGrpSpPr/>
+        <p:nvPr/>
+      </p:nvGrpSpPr>
+      <p:grpSpPr/>
+      <p:sp>
+        <p:nvSpPr>
+          <p:cNvPr id="2" name="Rectangle 1"/>
+          <p:cNvSpPr/>
+          <p:nvPr/>
+        </p:nvSpPr>
+        <p:spPr>
+          <a:xfrm>
+            <a:off x="0" y="0"/>
+            <a:ext cx="12191695" cy="1188720"/>
+          </a:xfrm>
+          <a:prstGeom prst="rect">
+            <a:avLst/>
+          </a:prstGeom>
+          <a:solidFill>
+            <a:srgbClr val="0C2340"/>
+          </a:solidFill>
+          <a:ln>
+            <a:noFill/>
+          </a:ln>
+          <a:effectLst/>
+        </p:spPr>
+        <p:style>
+          <a:lnRef idx="1">
+            <a:schemeClr val="accent1"/>
+          </a:lnRef>
+          <a:fillRef idx="3">
+            <a:schemeClr val="accent1"/>
+          </a:fillRef>
+          <a:effectRef idx="2">
+            <a:schemeClr val="accent1"/>
+          </a:effectRef>
+          <a:fontRef idx="minor">
+            <a:schemeClr val="lt1"/>
+          </a:fontRef>
+        </p:style>
+        <p:txBody>
+          <a:bodyPr rtlCol="0" anchor="ctr"/>
+          <a:lstStyle/>
+          <a:p>
+            <a:pPr algn="ctr"/>
+          </a:p>
+        </p:txBody>
+      </p:sp>
+      <p:sp>
+        <p:nvSpPr>
+          <p:cNvPr id="3" name="TextBox 2"/>
+          <p:cNvSpPr txBox="1"/>
+          <p:nvPr/>
+        </p:nvSpPr>
+        <p:spPr>
+          <a:xfrm>
+            <a:off x="640080" y="0"/>
+            <a:ext cx="9082735" cy="1188720"/>
+          </a:xfrm>
+          <a:prstGeom prst="rect">
+            <a:avLst/>
+          </a:prstGeom>
+          <a:noFill/>
+        </p:spPr>
+        <p:txBody>
+          <a:bodyPr wrap="square" anchor="ctr" lIns="0" rIns="0" tIns="0" bIns="0">
+            <a:spAutoFit/>
+          </a:bodyPr>
+          <a:lstStyle/>
+          <a:p>
+            <a:pPr algn="ctr"/>
+            <a:r>
+              <a:rPr sz="2600" b="1" i="0">
+                <a:solidFill>
+                  <a:srgbClr val="FFFFFF"/>
+                </a:solidFill>
+                <a:latin typeface="Calibri"/>
+              </a:rPr>
               <a:t>Preguntas frecuentes del primer día</a:t>
             </a:r>
           </a:p>
@@ -8651,7 +9683,7 @@
                 </a:solidFill>
                 <a:latin typeface="Calibri"/>
               </a:rPr>
-              <a:t>19</a:t>
+              <a:t>20</a:t>
             </a:r>
           </a:p>
         </p:txBody>
@@ -8664,7 +9696,7 @@
 </p:sld>
 </file>
 
-<file path=ppt/slides/slide2.xml><?xml version="1.0" encoding="utf-8"?>
+<file path=ppt/slides/slide21.xml><?xml version="1.0" encoding="utf-8"?>
 <p:sld xmlns:a="http://schemas.openxmlformats.org/drawingml/2006/main" xmlns:p="http://schemas.openxmlformats.org/presentationml/2006/main" xmlns:r="http://schemas.openxmlformats.org/officeDocument/2006/relationships">
   <p:cSld>
     <p:bg>
@@ -8756,7 +9788,7 @@
                 </a:solidFill>
                 <a:latin typeface="Calibri"/>
               </a:rPr>
-              <a:t>AGENDA DE HOY</a:t>
+              <a:t>Lo que debe tener listo para la Sesión 02</a:t>
             </a:r>
           </a:p>
         </p:txBody>
@@ -8769,8 +9801,8 @@
         </p:nvSpPr>
         <p:spPr>
           <a:xfrm>
-            <a:off x="640080" y="1280160"/>
-            <a:ext cx="10911535" cy="411480"/>
+            <a:off x="640080" y="1691639"/>
+            <a:ext cx="10911535" cy="4617720"/>
           </a:xfrm>
           <a:prstGeom prst="rect">
             <a:avLst/>
@@ -8783,41 +9815,6 @@
           </a:bodyPr>
           <a:lstStyle/>
           <a:p>
-            <a:pPr algn="ctr"/>
-            <a:r>
-              <a:rPr sz="1500" b="0" i="0">
-                <a:solidFill>
-                  <a:srgbClr val="2B2B2B"/>
-                </a:solidFill>
-                <a:latin typeface="Calibri"/>
-              </a:rPr>
-              <a:t>Sesión de encuadre — hoy no vemos tema; el contenido arranca en la Sesión 02.</a:t>
-            </a:r>
-          </a:p>
-        </p:txBody>
-      </p:sp>
-      <p:sp>
-        <p:nvSpPr>
-          <p:cNvPr id="5" name="TextBox 4"/>
-          <p:cNvSpPr txBox="1"/>
-          <p:nvPr/>
-        </p:nvSpPr>
-        <p:spPr>
-          <a:xfrm>
-            <a:off x="640080" y="2011679"/>
-            <a:ext cx="10911535" cy="4297680"/>
-          </a:xfrm>
-          <a:prstGeom prst="rect">
-            <a:avLst/>
-          </a:prstGeom>
-          <a:noFill/>
-        </p:spPr>
-        <p:txBody>
-          <a:bodyPr wrap="square" anchor="t" lIns="0" rIns="0" tIns="0" bIns="0">
-            <a:spAutoFit/>
-          </a:bodyPr>
-          <a:lstStyle/>
-          <a:p>
             <a:pPr>
               <a:spcAft>
                 <a:spcPts val="1000"/>
@@ -8839,7 +9836,7 @@
                 </a:solidFill>
                 <a:latin typeface="Calibri"/>
               </a:rPr>
-              <a:t>El curso:</a:t>
+              <a:t>Lectura autónoma (obligatoria):</a:t>
             </a:r>
             <a:r>
               <a:rPr sz="1600" b="0" i="0">
@@ -8848,7 +9845,93 @@
                 </a:solidFill>
                 <a:latin typeface="Calibri"/>
               </a:rPr>
-              <a:t> de qué se trata, cómo trabajamos y qué se llevan al final.</a:t>
+              <a:t> </a:t>
+            </a:r>
+            <a:r>
+              <a:rPr sz="1600" b="1" i="0">
+                <a:solidFill>
+                  <a:srgbClr val="2B2B2B"/>
+                </a:solidFill>
+                <a:latin typeface="Calibri"/>
+              </a:rPr>
+              <a:t>delimitación y reformulación del tema</a:t>
+            </a:r>
+            <a:r>
+              <a:rPr sz="1600" b="0" i="0">
+                <a:solidFill>
+                  <a:srgbClr val="2B2B2B"/>
+                </a:solidFill>
+                <a:latin typeface="Calibri"/>
+              </a:rPr>
+              <a:t> — cómo se pasa de un tema amplio a uno investigable.</a:t>
+            </a:r>
+          </a:p>
+          <a:p>
+            <a:pPr lvl="1">
+              <a:spcAft>
+                <a:spcPts val="600"/>
+              </a:spcAft>
+            </a:pPr>
+            <a:r>
+              <a:rPr sz="1500" b="0" i="0">
+                <a:solidFill>
+                  <a:srgbClr val="2B2B2B"/>
+                </a:solidFill>
+                <a:latin typeface="Calibri"/>
+              </a:rPr>
+              <a:t>●   Hoy no se dictó: se lee en casa y se </a:t>
+            </a:r>
+            <a:r>
+              <a:rPr sz="1500" b="1" i="0">
+                <a:solidFill>
+                  <a:srgbClr val="2B2B2B"/>
+                </a:solidFill>
+                <a:latin typeface="Calibri"/>
+              </a:rPr>
+              <a:t>retoma al abrir la Sesión 02</a:t>
+            </a:r>
+            <a:r>
+              <a:rPr sz="1500" b="0" i="0">
+                <a:solidFill>
+                  <a:srgbClr val="2B2B2B"/>
+                </a:solidFill>
+                <a:latin typeface="Calibri"/>
+              </a:rPr>
+              <a:t>.</a:t>
+            </a:r>
+          </a:p>
+          <a:p>
+            <a:pPr lvl="1">
+              <a:spcAft>
+                <a:spcPts val="600"/>
+              </a:spcAft>
+            </a:pPr>
+            <a:r>
+              <a:rPr sz="1500" b="0" i="0">
+                <a:solidFill>
+                  <a:srgbClr val="2B2B2B"/>
+                </a:solidFill>
+                <a:latin typeface="Calibri"/>
+              </a:rPr>
+              <a:t>●   </a:t>
+            </a:r>
+            <a:r>
+              <a:rPr sz="1500" b="1" i="0">
+                <a:solidFill>
+                  <a:srgbClr val="2B2B2B"/>
+                </a:solidFill>
+                <a:latin typeface="Calibri"/>
+              </a:rPr>
+              <a:t>Dónde está:</a:t>
+            </a:r>
+            <a:r>
+              <a:rPr sz="1500" b="0" i="0">
+                <a:solidFill>
+                  <a:srgbClr val="2B2B2B"/>
+                </a:solidFill>
+                <a:latin typeface="Calibri"/>
+              </a:rPr>
+              <a:t> ya viene en tu carpeta del curso, en `Sesion 01 - …/` (el PDF y el archivo `Lectura autonoma - Sesion 01.txt` con la cita y el enlace). También queda publicada en CDigital.</a:t>
             </a:r>
           </a:p>
           <a:p>
@@ -8873,7 +9956,7 @@
                 </a:solidFill>
                 <a:latin typeface="Calibri"/>
               </a:rPr>
-              <a:t>El Docente:</a:t>
+              <a:t>Haga el inventario de su proyecto</a:t>
             </a:r>
             <a:r>
               <a:rPr sz="1600" b="0" i="0">
@@ -8882,7 +9965,145 @@
                 </a:solidFill>
                 <a:latin typeface="Calibri"/>
               </a:rPr>
-              <a:t> quién los acompaña y cómo contactarlo.</a:t>
+              <a:t> en un Google Doc llamado `S01_EstadoProyecto_Apellido`:</a:t>
+            </a:r>
+          </a:p>
+          <a:p>
+            <a:pPr lvl="1">
+              <a:spcAft>
+                <a:spcPts val="600"/>
+              </a:spcAft>
+            </a:pPr>
+            <a:r>
+              <a:rPr sz="1500" b="0" i="0">
+                <a:solidFill>
+                  <a:srgbClr val="2B2B2B"/>
+                </a:solidFill>
+                <a:latin typeface="Calibri"/>
+              </a:rPr>
+              <a:t>●   Una </a:t>
+            </a:r>
+            <a:r>
+              <a:rPr sz="1500" b="1" i="0">
+                <a:solidFill>
+                  <a:srgbClr val="2B2B2B"/>
+                </a:solidFill>
+                <a:latin typeface="Calibri"/>
+              </a:rPr>
+              <a:t>matriz de estado</a:t>
+            </a:r>
+            <a:r>
+              <a:rPr sz="1500" b="0" i="0">
+                <a:solidFill>
+                  <a:srgbClr val="2B2B2B"/>
+                </a:solidFill>
+                <a:latin typeface="Calibri"/>
+              </a:rPr>
+              <a:t>: para cada sección (tema, problema, objetivos, marco, metodología) marque </a:t>
+            </a:r>
+            <a:r>
+              <a:rPr sz="1500" b="1" i="0">
+                <a:solidFill>
+                  <a:srgbClr val="2B2B2B"/>
+                </a:solidFill>
+                <a:latin typeface="Calibri"/>
+              </a:rPr>
+              <a:t>lista / a medias / inexistente</a:t>
+            </a:r>
+            <a:r>
+              <a:rPr sz="1500" b="0" i="0">
+                <a:solidFill>
+                  <a:srgbClr val="2B2B2B"/>
+                </a:solidFill>
+                <a:latin typeface="Calibri"/>
+              </a:rPr>
+              <a:t> y pegue la </a:t>
+            </a:r>
+            <a:r>
+              <a:rPr sz="1500" b="1" i="0">
+                <a:solidFill>
+                  <a:srgbClr val="2B2B2B"/>
+                </a:solidFill>
+                <a:latin typeface="Calibri"/>
+              </a:rPr>
+              <a:t>evidencia</a:t>
+            </a:r>
+            <a:r>
+              <a:rPr sz="1500" b="0" i="0">
+                <a:solidFill>
+                  <a:srgbClr val="2B2B2B"/>
+                </a:solidFill>
+                <a:latin typeface="Calibri"/>
+              </a:rPr>
+              <a:t> (el párrafo o el enlace).</a:t>
+            </a:r>
+          </a:p>
+          <a:p>
+            <a:pPr lvl="1">
+              <a:spcAft>
+                <a:spcPts val="600"/>
+              </a:spcAft>
+            </a:pPr>
+            <a:r>
+              <a:rPr sz="1500" b="0" i="0">
+                <a:solidFill>
+                  <a:srgbClr val="2B2B2B"/>
+                </a:solidFill>
+                <a:latin typeface="Calibri"/>
+              </a:rPr>
+              <a:t>●   Su </a:t>
+            </a:r>
+            <a:r>
+              <a:rPr sz="1500" b="1" i="0">
+                <a:solidFill>
+                  <a:srgbClr val="2B2B2B"/>
+                </a:solidFill>
+                <a:latin typeface="Calibri"/>
+              </a:rPr>
+              <a:t>tema delimitado</a:t>
+            </a:r>
+            <a:r>
+              <a:rPr sz="1500" b="0" i="0">
+                <a:solidFill>
+                  <a:srgbClr val="2B2B2B"/>
+                </a:solidFill>
+                <a:latin typeface="Calibri"/>
+              </a:rPr>
+              <a:t> en una sola frase: actor + fenómeno + contexto.</a:t>
+            </a:r>
+          </a:p>
+          <a:p>
+            <a:pPr lvl="1">
+              <a:spcAft>
+                <a:spcPts val="600"/>
+              </a:spcAft>
+            </a:pPr>
+            <a:r>
+              <a:rPr sz="1500" b="0" i="0">
+                <a:solidFill>
+                  <a:srgbClr val="2B2B2B"/>
+                </a:solidFill>
+                <a:latin typeface="Calibri"/>
+              </a:rPr>
+              <a:t>●   </a:t>
+            </a:r>
+            <a:r>
+              <a:rPr sz="1500" b="1" i="0">
+                <a:solidFill>
+                  <a:srgbClr val="2B2B2B"/>
+                </a:solidFill>
+                <a:latin typeface="Calibri"/>
+              </a:rPr>
+              <a:t>Tres compromisos</a:t>
+            </a:r>
+            <a:r>
+              <a:rPr sz="1500" b="0" i="0">
+                <a:solidFill>
+                  <a:srgbClr val="2B2B2B"/>
+                </a:solidFill>
+                <a:latin typeface="Calibri"/>
+              </a:rPr>
+              <a:t> concretos suyos para las próximas dos semanas.</a:t>
             </a:r>
           </a:p>
           <a:p>
@@ -8907,7 +10128,7 @@
                 </a:solidFill>
                 <a:latin typeface="Calibri"/>
               </a:rPr>
-              <a:t>Ustedes:</a:t>
+              <a:t>Súbalo a CDigital antes de la Sesión 02</a:t>
             </a:r>
             <a:r>
               <a:rPr sz="1600" b="0" i="0">
@@ -8916,15 +10137,17 @@
                 </a:solidFill>
                 <a:latin typeface="Calibri"/>
               </a:rPr>
-              <a:t> nos presentamos en el tablero colaborativo.</a:t>
-            </a:r>
-          </a:p>
-          <a:p>
-            <a:pPr>
-              <a:spcAft>
-                <a:spcPts val="1000"/>
-              </a:spcAft>
-            </a:pPr>
+              <a:t> y </a:t>
+            </a:r>
+            <a:r>
+              <a:rPr sz="1600" b="1" i="0">
+                <a:solidFill>
+                  <a:srgbClr val="2B2B2B"/>
+                </a:solidFill>
+                <a:latin typeface="Calibri"/>
+              </a:rPr>
+              <a:t>abra las dos guías del primer corte</a:t>
+            </a:r>
             <a:r>
               <a:rPr sz="1600" b="0" i="0">
                 <a:solidFill>
@@ -8932,66 +10155,14 @@
                 </a:solidFill>
                 <a:latin typeface="Calibri"/>
               </a:rPr>
-              <a:t>–   </a:t>
-            </a:r>
-            <a:r>
-              <a:rPr sz="1600" b="1" i="0">
-                <a:solidFill>
-                  <a:srgbClr val="2B2B2B"/>
-                </a:solidFill>
-                <a:latin typeface="Calibri"/>
-              </a:rPr>
-              <a:t>Cómo se evalúa:</a:t>
-            </a:r>
-            <a:r>
-              <a:rPr sz="1600" b="0" i="0">
-                <a:solidFill>
-                  <a:srgbClr val="2B2B2B"/>
-                </a:solidFill>
-                <a:latin typeface="Calibri"/>
-              </a:rPr>
-              <a:t> qué ítems tiene el aula, cuánto pesa cada uno y qué se hace con él.</a:t>
-            </a:r>
-          </a:p>
-          <a:p>
-            <a:pPr>
-              <a:spcAft>
-                <a:spcPts val="1000"/>
-              </a:spcAft>
-            </a:pPr>
-            <a:r>
-              <a:rPr sz="1600" b="0" i="0">
-                <a:solidFill>
-                  <a:srgbClr val="2B2B2B"/>
-                </a:solidFill>
-                <a:latin typeface="Calibri"/>
-              </a:rPr>
-              <a:t>–   </a:t>
-            </a:r>
-            <a:r>
-              <a:rPr sz="1600" b="1" i="0">
-                <a:solidFill>
-                  <a:srgbClr val="2B2B2B"/>
-                </a:solidFill>
-                <a:latin typeface="Calibri"/>
-              </a:rPr>
-              <a:t>Acuerdos</a:t>
-            </a:r>
-            <a:r>
-              <a:rPr sz="1600" b="0" i="0">
-                <a:solidFill>
-                  <a:srgbClr val="2B2B2B"/>
-                </a:solidFill>
-                <a:latin typeface="Calibri"/>
-              </a:rPr>
-              <a:t> de trabajo y el primer encargo autónomo.</a:t>
-            </a:r>
-          </a:p>
-        </p:txBody>
-      </p:sp>
-      <p:sp>
-        <p:nvSpPr>
-          <p:cNvPr id="6" name="TextBox 5"/>
+              <a:t> en `Clases/Recursos/ACAs/`: `Quiz 1 (6%)` y `Parcial 1 (24%)`, que es lo que se pregunta.</a:t>
+            </a:r>
+          </a:p>
+        </p:txBody>
+      </p:sp>
+      <p:sp>
+        <p:nvSpPr>
+          <p:cNvPr id="5" name="TextBox 4"/>
           <p:cNvSpPr txBox="1"/>
           <p:nvPr/>
         </p:nvSpPr>
@@ -9019,7 +10190,41 @@
                 </a:solidFill>
                 <a:latin typeface="Calibri"/>
               </a:rPr>
-              <a:t>2</a:t>
+              <a:t>21</a:t>
+            </a:r>
+          </a:p>
+        </p:txBody>
+      </p:sp>
+      <p:sp>
+        <p:nvSpPr>
+          <p:cNvPr id="6" name="TextBox 5"/>
+          <p:cNvSpPr txBox="1"/>
+          <p:nvPr/>
+        </p:nvSpPr>
+        <p:spPr>
+          <a:xfrm>
+            <a:off x="640080" y="5943600"/>
+            <a:ext cx="9997135" cy="457200"/>
+          </a:xfrm>
+          <a:prstGeom prst="rect">
+            <a:avLst/>
+          </a:prstGeom>
+          <a:noFill/>
+        </p:spPr>
+        <p:txBody>
+          <a:bodyPr wrap="square" anchor="t" lIns="0" rIns="0" tIns="0" bIns="0">
+            <a:spAutoFit/>
+          </a:bodyPr>
+          <a:lstStyle/>
+          <a:p>
+            <a:r>
+              <a:rPr sz="1200" b="0" i="1">
+                <a:solidFill>
+                  <a:srgbClr val="2B2B2B"/>
+                </a:solidFill>
+                <a:latin typeface="Calibri"/>
+              </a:rPr>
+              <a:t>“A medias” e “inexistente” son respuestas honestas y válidas. Lo que no sirve es el “más o menos” sin nada escrito debajo.</a:t>
             </a:r>
           </a:p>
         </p:txBody>
@@ -9032,7 +10237,7 @@
 </p:sld>
 </file>
 
-<file path=ppt/slides/slide20.xml><?xml version="1.0" encoding="utf-8"?>
+<file path=ppt/slides/slide22.xml><?xml version="1.0" encoding="utf-8"?>
 <p:sld xmlns:a="http://schemas.openxmlformats.org/drawingml/2006/main" xmlns:p="http://schemas.openxmlformats.org/presentationml/2006/main" xmlns:r="http://schemas.openxmlformats.org/officeDocument/2006/relationships">
   <p:cSld>
     <p:bg>
@@ -9124,21 +10329,65 @@
                 </a:solidFill>
                 <a:latin typeface="Calibri"/>
               </a:rPr>
-              <a:t>Lo que debe tener listo para la Sesión 02</a:t>
-            </a:r>
-          </a:p>
-        </p:txBody>
-      </p:sp>
-      <p:sp>
-        <p:nvSpPr>
-          <p:cNvPr id="4" name="TextBox 3"/>
+              <a:t>ACUERDOS DE TRABAJO</a:t>
+            </a:r>
+          </a:p>
+        </p:txBody>
+      </p:sp>
+      <p:sp>
+        <p:nvSpPr>
+          <p:cNvPr id="4" name="Rounded Rectangle 3"/>
+          <p:cNvSpPr/>
+          <p:nvPr/>
+        </p:nvSpPr>
+        <p:spPr>
+          <a:xfrm>
+            <a:off x="640080" y="1737360"/>
+            <a:ext cx="10911535" cy="713232"/>
+          </a:xfrm>
+          <a:prstGeom prst="roundRect">
+            <a:avLst/>
+          </a:prstGeom>
+          <a:solidFill>
+            <a:srgbClr val="E8F5EC"/>
+          </a:solidFill>
+          <a:ln>
+            <a:noFill/>
+          </a:ln>
+          <a:effectLst/>
+        </p:spPr>
+        <p:style>
+          <a:lnRef idx="1">
+            <a:schemeClr val="accent1"/>
+          </a:lnRef>
+          <a:fillRef idx="3">
+            <a:schemeClr val="accent1"/>
+          </a:fillRef>
+          <a:effectRef idx="2">
+            <a:schemeClr val="accent1"/>
+          </a:effectRef>
+          <a:fontRef idx="minor">
+            <a:schemeClr val="lt1"/>
+          </a:fontRef>
+        </p:style>
+        <p:txBody>
+          <a:bodyPr rtlCol="0" anchor="ctr"/>
+          <a:lstStyle/>
+          <a:p>
+            <a:pPr algn="ctr"/>
+          </a:p>
+        </p:txBody>
+      </p:sp>
+      <p:sp>
+        <p:nvSpPr>
+          <p:cNvPr id="5" name="TextBox 4"/>
           <p:cNvSpPr txBox="1"/>
           <p:nvPr/>
         </p:nvSpPr>
         <p:spPr>
           <a:xfrm>
-            <a:off x="640080" y="1691639"/>
-            <a:ext cx="10911535" cy="4617720"/>
+            <a:off x="868680" y="1847088"/>
+            <a:ext cx="10454335" cy="493776"/>
           </a:xfrm>
           <a:prstGeom prst="rect">
             <a:avLst/>
@@ -9151,354 +10400,270 @@
           </a:bodyPr>
           <a:lstStyle/>
           <a:p>
+            <a:r>
+              <a:rPr sz="1300" b="1" i="0">
+                <a:solidFill>
+                  <a:srgbClr val="0C2340"/>
+                </a:solidFill>
+                <a:latin typeface="Calibri"/>
+              </a:rPr>
+              <a:t>ℹ️ Nota institucional</a:t>
+            </a:r>
+          </a:p>
+          <a:p>
             <a:pPr>
-              <a:spcAft>
-                <a:spcPts val="1000"/>
-              </a:spcAft>
+              <a:spcBef>
+                <a:spcPts val="400"/>
+              </a:spcBef>
             </a:pPr>
             <a:r>
-              <a:rPr sz="1600" b="0" i="0">
-                <a:solidFill>
-                  <a:srgbClr val="2B2B2B"/>
-                </a:solidFill>
-                <a:latin typeface="Calibri"/>
-              </a:rPr>
-              <a:t>–   </a:t>
-            </a:r>
-            <a:r>
-              <a:rPr sz="1600" b="1" i="0">
-                <a:solidFill>
-                  <a:srgbClr val="2B2B2B"/>
-                </a:solidFill>
-                <a:latin typeface="Calibri"/>
-              </a:rPr>
-              <a:t>Lectura autónoma (obligatoria):</a:t>
-            </a:r>
-            <a:r>
-              <a:rPr sz="1600" b="0" i="0">
-                <a:solidFill>
-                  <a:srgbClr val="2B2B2B"/>
-                </a:solidFill>
-                <a:latin typeface="Calibri"/>
-              </a:rPr>
-              <a:t> </a:t>
-            </a:r>
-            <a:r>
-              <a:rPr sz="1600" b="1" i="0">
-                <a:solidFill>
-                  <a:srgbClr val="2B2B2B"/>
-                </a:solidFill>
-                <a:latin typeface="Calibri"/>
-              </a:rPr>
-              <a:t>delimitación y reformulación del tema</a:t>
-            </a:r>
-            <a:r>
-              <a:rPr sz="1600" b="0" i="0">
-                <a:solidFill>
-                  <a:srgbClr val="2B2B2B"/>
-                </a:solidFill>
-                <a:latin typeface="Calibri"/>
-              </a:rPr>
-              <a:t> — cómo se pasa de un tema amplio a uno investigable.</a:t>
-            </a:r>
-          </a:p>
-          <a:p>
-            <a:pPr lvl="1">
-              <a:spcAft>
-                <a:spcPts val="600"/>
-              </a:spcAft>
+              <a:rPr sz="1300" b="1" i="0">
+                <a:solidFill>
+                  <a:srgbClr val="2B2B2B"/>
+                </a:solidFill>
+                <a:latin typeface="Calibri"/>
+              </a:rPr>
+              <a:t>Entrega oficial: CDigital.</a:t>
+            </a:r>
+            <a:r>
+              <a:rPr sz="1300" b="0" i="0">
+                <a:solidFill>
+                  <a:srgbClr val="2B2B2B"/>
+                </a:solidFill>
+                <a:latin typeface="Calibri"/>
+              </a:rPr>
+              <a:t> Lo que no esté ahí, no está entregado.</a:t>
+            </a:r>
+          </a:p>
+        </p:txBody>
+      </p:sp>
+      <p:sp>
+        <p:nvSpPr>
+          <p:cNvPr id="6" name="Rounded Rectangle 5"/>
+          <p:cNvSpPr/>
+          <p:nvPr/>
+        </p:nvSpPr>
+        <p:spPr>
+          <a:xfrm>
+            <a:off x="640080" y="2679191"/>
+            <a:ext cx="10911535" cy="713232"/>
+          </a:xfrm>
+          <a:prstGeom prst="roundRect">
+            <a:avLst/>
+          </a:prstGeom>
+          <a:solidFill>
+            <a:srgbClr val="FDECD8"/>
+          </a:solidFill>
+          <a:ln>
+            <a:noFill/>
+          </a:ln>
+          <a:effectLst/>
+        </p:spPr>
+        <p:style>
+          <a:lnRef idx="1">
+            <a:schemeClr val="accent1"/>
+          </a:lnRef>
+          <a:fillRef idx="3">
+            <a:schemeClr val="accent1"/>
+          </a:fillRef>
+          <a:effectRef idx="2">
+            <a:schemeClr val="accent1"/>
+          </a:effectRef>
+          <a:fontRef idx="minor">
+            <a:schemeClr val="lt1"/>
+          </a:fontRef>
+        </p:style>
+        <p:txBody>
+          <a:bodyPr rtlCol="0" anchor="ctr"/>
+          <a:lstStyle/>
+          <a:p>
+            <a:pPr algn="ctr"/>
+          </a:p>
+        </p:txBody>
+      </p:sp>
+      <p:sp>
+        <p:nvSpPr>
+          <p:cNvPr id="7" name="TextBox 6"/>
+          <p:cNvSpPr txBox="1"/>
+          <p:nvPr/>
+        </p:nvSpPr>
+        <p:spPr>
+          <a:xfrm>
+            <a:off x="868680" y="2788920"/>
+            <a:ext cx="10454335" cy="493776"/>
+          </a:xfrm>
+          <a:prstGeom prst="rect">
+            <a:avLst/>
+          </a:prstGeom>
+          <a:noFill/>
+        </p:spPr>
+        <p:txBody>
+          <a:bodyPr wrap="square" anchor="t" lIns="0" rIns="0" tIns="0" bIns="0">
+            <a:spAutoFit/>
+          </a:bodyPr>
+          <a:lstStyle/>
+          <a:p>
+            <a:r>
+              <a:rPr sz="1300" b="1" i="0">
+                <a:solidFill>
+                  <a:srgbClr val="0C2340"/>
+                </a:solidFill>
+                <a:latin typeface="Calibri"/>
+              </a:rPr>
+              <a:t>💡 Aclaración</a:t>
+            </a:r>
+          </a:p>
+          <a:p>
+            <a:pPr>
+              <a:spcBef>
+                <a:spcPts val="400"/>
+              </a:spcBef>
             </a:pPr>
             <a:r>
-              <a:rPr sz="1500" b="0" i="0">
-                <a:solidFill>
-                  <a:srgbClr val="2B2B2B"/>
-                </a:solidFill>
-                <a:latin typeface="Calibri"/>
-              </a:rPr>
-              <a:t>●   Hoy no se dictó: se lee en casa y se </a:t>
-            </a:r>
-            <a:r>
-              <a:rPr sz="1500" b="1" i="0">
-                <a:solidFill>
-                  <a:srgbClr val="2B2B2B"/>
-                </a:solidFill>
-                <a:latin typeface="Calibri"/>
-              </a:rPr>
-              <a:t>retoma al abrir la Sesión 02</a:t>
-            </a:r>
-            <a:r>
-              <a:rPr sz="1500" b="0" i="0">
-                <a:solidFill>
-                  <a:srgbClr val="2B2B2B"/>
-                </a:solidFill>
-                <a:latin typeface="Calibri"/>
-              </a:rPr>
-              <a:t>.</a:t>
-            </a:r>
-          </a:p>
-          <a:p>
-            <a:pPr lvl="1">
-              <a:spcAft>
-                <a:spcPts val="600"/>
-              </a:spcAft>
+              <a:rPr sz="1300" b="0" i="0">
+                <a:solidFill>
+                  <a:srgbClr val="2B2B2B"/>
+                </a:solidFill>
+                <a:latin typeface="Calibri"/>
+              </a:rPr>
+              <a:t>Traer el avance </a:t>
+            </a:r>
+            <a:r>
+              <a:rPr sz="1300" b="1" i="0">
+                <a:solidFill>
+                  <a:srgbClr val="2B2B2B"/>
+                </a:solidFill>
+                <a:latin typeface="Calibri"/>
+              </a:rPr>
+              <a:t>escrito</a:t>
+            </a:r>
+            <a:r>
+              <a:rPr sz="1300" b="0" i="0">
+                <a:solidFill>
+                  <a:srgbClr val="2B2B2B"/>
+                </a:solidFill>
+                <a:latin typeface="Calibri"/>
+              </a:rPr>
+              <a:t> a cada encuentro: se trabaja sobre lo que ya existe.</a:t>
+            </a:r>
+          </a:p>
+        </p:txBody>
+      </p:sp>
+      <p:sp>
+        <p:nvSpPr>
+          <p:cNvPr id="8" name="Rounded Rectangle 7"/>
+          <p:cNvSpPr/>
+          <p:nvPr/>
+        </p:nvSpPr>
+        <p:spPr>
+          <a:xfrm>
+            <a:off x="640080" y="3621024"/>
+            <a:ext cx="10911535" cy="713232"/>
+          </a:xfrm>
+          <a:prstGeom prst="roundRect">
+            <a:avLst/>
+          </a:prstGeom>
+          <a:solidFill>
+            <a:srgbClr val="FBE4E4"/>
+          </a:solidFill>
+          <a:ln>
+            <a:noFill/>
+          </a:ln>
+          <a:effectLst/>
+        </p:spPr>
+        <p:style>
+          <a:lnRef idx="1">
+            <a:schemeClr val="accent1"/>
+          </a:lnRef>
+          <a:fillRef idx="3">
+            <a:schemeClr val="accent1"/>
+          </a:fillRef>
+          <a:effectRef idx="2">
+            <a:schemeClr val="accent1"/>
+          </a:effectRef>
+          <a:fontRef idx="minor">
+            <a:schemeClr val="lt1"/>
+          </a:fontRef>
+        </p:style>
+        <p:txBody>
+          <a:bodyPr rtlCol="0" anchor="ctr"/>
+          <a:lstStyle/>
+          <a:p>
+            <a:pPr algn="ctr"/>
+          </a:p>
+        </p:txBody>
+      </p:sp>
+      <p:sp>
+        <p:nvSpPr>
+          <p:cNvPr id="9" name="TextBox 8"/>
+          <p:cNvSpPr txBox="1"/>
+          <p:nvPr/>
+        </p:nvSpPr>
+        <p:spPr>
+          <a:xfrm>
+            <a:off x="868680" y="3730752"/>
+            <a:ext cx="10454335" cy="493776"/>
+          </a:xfrm>
+          <a:prstGeom prst="rect">
+            <a:avLst/>
+          </a:prstGeom>
+          <a:noFill/>
+        </p:spPr>
+        <p:txBody>
+          <a:bodyPr wrap="square" anchor="t" lIns="0" rIns="0" tIns="0" bIns="0">
+            <a:spAutoFit/>
+          </a:bodyPr>
+          <a:lstStyle/>
+          <a:p>
+            <a:r>
+              <a:rPr sz="1300" b="1" i="0">
+                <a:solidFill>
+                  <a:srgbClr val="0C2340"/>
+                </a:solidFill>
+                <a:latin typeface="Calibri"/>
+              </a:rPr>
+              <a:t>⚠️ Importante</a:t>
+            </a:r>
+          </a:p>
+          <a:p>
+            <a:pPr>
+              <a:spcBef>
+                <a:spcPts val="400"/>
+              </a:spcBef>
             </a:pPr>
             <a:r>
-              <a:rPr sz="1500" b="0" i="0">
-                <a:solidFill>
-                  <a:srgbClr val="2B2B2B"/>
-                </a:solidFill>
-                <a:latin typeface="Calibri"/>
-              </a:rPr>
-              <a:t>●   </a:t>
-            </a:r>
-            <a:r>
-              <a:rPr sz="1500" b="1" i="0">
-                <a:solidFill>
-                  <a:srgbClr val="2B2B2B"/>
-                </a:solidFill>
-                <a:latin typeface="Calibri"/>
-              </a:rPr>
-              <a:t>Dónde está:</a:t>
-            </a:r>
-            <a:r>
-              <a:rPr sz="1500" b="0" i="0">
-                <a:solidFill>
-                  <a:srgbClr val="2B2B2B"/>
-                </a:solidFill>
-                <a:latin typeface="Calibri"/>
-              </a:rPr>
-              <a:t> ya viene en tu carpeta del curso, en `Sesion 01 - …/` (el PDF y el archivo `Lectura autonoma - Sesion 01.txt` con la cita y el enlace). También queda publicada en CDigital.</a:t>
-            </a:r>
-          </a:p>
-          <a:p>
-            <a:pPr>
-              <a:spcAft>
-                <a:spcPts val="1000"/>
-              </a:spcAft>
-            </a:pPr>
-            <a:r>
-              <a:rPr sz="1600" b="0" i="0">
-                <a:solidFill>
-                  <a:srgbClr val="2B2B2B"/>
-                </a:solidFill>
-                <a:latin typeface="Calibri"/>
-              </a:rPr>
-              <a:t>–   </a:t>
-            </a:r>
-            <a:r>
-              <a:rPr sz="1600" b="1" i="0">
-                <a:solidFill>
-                  <a:srgbClr val="2B2B2B"/>
-                </a:solidFill>
-                <a:latin typeface="Calibri"/>
-              </a:rPr>
-              <a:t>Haga el inventario de su proyecto</a:t>
-            </a:r>
-            <a:r>
-              <a:rPr sz="1600" b="0" i="0">
-                <a:solidFill>
-                  <a:srgbClr val="2B2B2B"/>
-                </a:solidFill>
-                <a:latin typeface="Calibri"/>
-              </a:rPr>
-              <a:t> en un Google Doc llamado `S01_EstadoProyecto_Apellido`:</a:t>
-            </a:r>
-          </a:p>
-          <a:p>
-            <a:pPr lvl="1">
-              <a:spcAft>
-                <a:spcPts val="600"/>
-              </a:spcAft>
-            </a:pPr>
-            <a:r>
-              <a:rPr sz="1500" b="0" i="0">
-                <a:solidFill>
-                  <a:srgbClr val="2B2B2B"/>
-                </a:solidFill>
-                <a:latin typeface="Calibri"/>
-              </a:rPr>
-              <a:t>●   Una </a:t>
-            </a:r>
-            <a:r>
-              <a:rPr sz="1500" b="1" i="0">
-                <a:solidFill>
-                  <a:srgbClr val="2B2B2B"/>
-                </a:solidFill>
-                <a:latin typeface="Calibri"/>
-              </a:rPr>
-              <a:t>matriz de estado</a:t>
-            </a:r>
-            <a:r>
-              <a:rPr sz="1500" b="0" i="0">
-                <a:solidFill>
-                  <a:srgbClr val="2B2B2B"/>
-                </a:solidFill>
-                <a:latin typeface="Calibri"/>
-              </a:rPr>
-              <a:t>: para cada sección (tema, problema, objetivos, marco, metodología) marque </a:t>
-            </a:r>
-            <a:r>
-              <a:rPr sz="1500" b="1" i="0">
-                <a:solidFill>
-                  <a:srgbClr val="2B2B2B"/>
-                </a:solidFill>
-                <a:latin typeface="Calibri"/>
-              </a:rPr>
-              <a:t>lista / a medias / inexistente</a:t>
-            </a:r>
-            <a:r>
-              <a:rPr sz="1500" b="0" i="0">
-                <a:solidFill>
-                  <a:srgbClr val="2B2B2B"/>
-                </a:solidFill>
-                <a:latin typeface="Calibri"/>
-              </a:rPr>
-              <a:t> y pegue la </a:t>
-            </a:r>
-            <a:r>
-              <a:rPr sz="1500" b="1" i="0">
-                <a:solidFill>
-                  <a:srgbClr val="2B2B2B"/>
-                </a:solidFill>
-                <a:latin typeface="Calibri"/>
-              </a:rPr>
-              <a:t>evidencia</a:t>
-            </a:r>
-            <a:r>
-              <a:rPr sz="1500" b="0" i="0">
-                <a:solidFill>
-                  <a:srgbClr val="2B2B2B"/>
-                </a:solidFill>
-                <a:latin typeface="Calibri"/>
-              </a:rPr>
-              <a:t> (el párrafo o el enlace).</a:t>
-            </a:r>
-          </a:p>
-          <a:p>
-            <a:pPr lvl="1">
-              <a:spcAft>
-                <a:spcPts val="600"/>
-              </a:spcAft>
-            </a:pPr>
-            <a:r>
-              <a:rPr sz="1500" b="0" i="0">
-                <a:solidFill>
-                  <a:srgbClr val="2B2B2B"/>
-                </a:solidFill>
-                <a:latin typeface="Calibri"/>
-              </a:rPr>
-              <a:t>●   Su </a:t>
-            </a:r>
-            <a:r>
-              <a:rPr sz="1500" b="1" i="0">
-                <a:solidFill>
-                  <a:srgbClr val="2B2B2B"/>
-                </a:solidFill>
-                <a:latin typeface="Calibri"/>
-              </a:rPr>
-              <a:t>tema delimitado</a:t>
-            </a:r>
-            <a:r>
-              <a:rPr sz="1500" b="0" i="0">
-                <a:solidFill>
-                  <a:srgbClr val="2B2B2B"/>
-                </a:solidFill>
-                <a:latin typeface="Calibri"/>
-              </a:rPr>
-              <a:t> en una sola frase: actor + fenómeno + contexto.</a:t>
-            </a:r>
-          </a:p>
-          <a:p>
-            <a:pPr lvl="1">
-              <a:spcAft>
-                <a:spcPts val="600"/>
-              </a:spcAft>
-            </a:pPr>
-            <a:r>
-              <a:rPr sz="1500" b="0" i="0">
-                <a:solidFill>
-                  <a:srgbClr val="2B2B2B"/>
-                </a:solidFill>
-                <a:latin typeface="Calibri"/>
-              </a:rPr>
-              <a:t>●   </a:t>
-            </a:r>
-            <a:r>
-              <a:rPr sz="1500" b="1" i="0">
-                <a:solidFill>
-                  <a:srgbClr val="2B2B2B"/>
-                </a:solidFill>
-                <a:latin typeface="Calibri"/>
-              </a:rPr>
-              <a:t>Tres compromisos</a:t>
-            </a:r>
-            <a:r>
-              <a:rPr sz="1500" b="0" i="0">
-                <a:solidFill>
-                  <a:srgbClr val="2B2B2B"/>
-                </a:solidFill>
-                <a:latin typeface="Calibri"/>
-              </a:rPr>
-              <a:t> concretos suyos para las próximas dos semanas.</a:t>
-            </a:r>
-          </a:p>
-          <a:p>
-            <a:pPr>
-              <a:spcAft>
-                <a:spcPts val="1000"/>
-              </a:spcAft>
-            </a:pPr>
-            <a:r>
-              <a:rPr sz="1600" b="0" i="0">
-                <a:solidFill>
-                  <a:srgbClr val="2B2B2B"/>
-                </a:solidFill>
-                <a:latin typeface="Calibri"/>
-              </a:rPr>
-              <a:t>–   </a:t>
-            </a:r>
-            <a:r>
-              <a:rPr sz="1600" b="1" i="0">
-                <a:solidFill>
-                  <a:srgbClr val="2B2B2B"/>
-                </a:solidFill>
-                <a:latin typeface="Calibri"/>
-              </a:rPr>
-              <a:t>Súbalo a CDigital antes de la Sesión 02</a:t>
-            </a:r>
-            <a:r>
-              <a:rPr sz="1600" b="0" i="0">
-                <a:solidFill>
-                  <a:srgbClr val="2B2B2B"/>
-                </a:solidFill>
-                <a:latin typeface="Calibri"/>
-              </a:rPr>
-              <a:t> y </a:t>
-            </a:r>
-            <a:r>
-              <a:rPr sz="1600" b="1" i="0">
-                <a:solidFill>
-                  <a:srgbClr val="2B2B2B"/>
-                </a:solidFill>
-                <a:latin typeface="Calibri"/>
-              </a:rPr>
-              <a:t>abra las dos guías del primer corte</a:t>
-            </a:r>
-            <a:r>
-              <a:rPr sz="1600" b="0" i="0">
-                <a:solidFill>
-                  <a:srgbClr val="2B2B2B"/>
-                </a:solidFill>
-                <a:latin typeface="Calibri"/>
-              </a:rPr>
-              <a:t> en `Clases/Recursos/ACAs/`: `Quiz 1 (6%)` y `Parcial 1 (24%)`, que es lo que se pregunta.</a:t>
-            </a:r>
-          </a:p>
-        </p:txBody>
-      </p:sp>
-      <p:sp>
-        <p:nvSpPr>
-          <p:cNvPr id="5" name="TextBox 4"/>
+              <a:rPr sz="1300" b="0" i="0">
+                <a:solidFill>
+                  <a:srgbClr val="2B2B2B"/>
+                </a:solidFill>
+                <a:latin typeface="Calibri"/>
+              </a:rPr>
+              <a:t>Integridad académica: citar siempre en </a:t>
+            </a:r>
+            <a:r>
+              <a:rPr sz="1300" b="1" i="0">
+                <a:solidFill>
+                  <a:srgbClr val="2B2B2B"/>
+                </a:solidFill>
+                <a:latin typeface="Calibri"/>
+              </a:rPr>
+              <a:t>APA 7</a:t>
+            </a:r>
+            <a:r>
+              <a:rPr sz="1300" b="0" i="0">
+                <a:solidFill>
+                  <a:srgbClr val="2B2B2B"/>
+                </a:solidFill>
+                <a:latin typeface="Calibri"/>
+              </a:rPr>
+              <a:t>. El plagio tiene debido proceso.</a:t>
+            </a:r>
+          </a:p>
+        </p:txBody>
+      </p:sp>
+      <p:sp>
+        <p:nvSpPr>
+          <p:cNvPr id="10" name="TextBox 9"/>
           <p:cNvSpPr txBox="1"/>
           <p:nvPr/>
         </p:nvSpPr>
@@ -9526,41 +10691,7 @@
                 </a:solidFill>
                 <a:latin typeface="Calibri"/>
               </a:rPr>
-              <a:t>20</a:t>
-            </a:r>
-          </a:p>
-        </p:txBody>
-      </p:sp>
-      <p:sp>
-        <p:nvSpPr>
-          <p:cNvPr id="6" name="TextBox 5"/>
-          <p:cNvSpPr txBox="1"/>
-          <p:nvPr/>
-        </p:nvSpPr>
-        <p:spPr>
-          <a:xfrm>
-            <a:off x="640080" y="5943600"/>
-            <a:ext cx="9997135" cy="457200"/>
-          </a:xfrm>
-          <a:prstGeom prst="rect">
-            <a:avLst/>
-          </a:prstGeom>
-          <a:noFill/>
-        </p:spPr>
-        <p:txBody>
-          <a:bodyPr wrap="square" anchor="t" lIns="0" rIns="0" tIns="0" bIns="0">
-            <a:spAutoFit/>
-          </a:bodyPr>
-          <a:lstStyle/>
-          <a:p>
-            <a:r>
-              <a:rPr sz="1200" b="0" i="1">
-                <a:solidFill>
-                  <a:srgbClr val="2B2B2B"/>
-                </a:solidFill>
-                <a:latin typeface="Calibri"/>
-              </a:rPr>
-              <a:t>“A medias” e “inexistente” son respuestas honestas y válidas. Lo que no sirve es el “más o menos” sin nada escrito debajo.</a:t>
+              <a:t>22</a:t>
             </a:r>
           </a:p>
         </p:txBody>
@@ -9573,7 +10704,7 @@
 </p:sld>
 </file>
 
-<file path=ppt/slides/slide21.xml><?xml version="1.0" encoding="utf-8"?>
+<file path=ppt/slides/slide23.xml><?xml version="1.0" encoding="utf-8"?>
 <p:sld xmlns:a="http://schemas.openxmlformats.org/drawingml/2006/main" xmlns:p="http://schemas.openxmlformats.org/presentationml/2006/main" xmlns:r="http://schemas.openxmlformats.org/officeDocument/2006/relationships">
   <p:cSld>
     <p:bg>
@@ -9665,27 +10796,195 @@
                 </a:solidFill>
                 <a:latin typeface="Calibri"/>
               </a:rPr>
-              <a:t>ACUERDOS DE TRABAJO</a:t>
-            </a:r>
-          </a:p>
-        </p:txBody>
-      </p:sp>
-      <p:sp>
-        <p:nvSpPr>
-          <p:cNvPr id="4" name="Rounded Rectangle 3"/>
+              <a:t>PARA LA PRÓXIMA SESIÓN</a:t>
+            </a:r>
+          </a:p>
+        </p:txBody>
+      </p:sp>
+      <p:sp>
+        <p:nvSpPr>
+          <p:cNvPr id="4" name="TextBox 3"/>
+          <p:cNvSpPr txBox="1"/>
+          <p:nvPr/>
+        </p:nvSpPr>
+        <p:spPr>
+          <a:xfrm>
+            <a:off x="640080" y="1691639"/>
+            <a:ext cx="10911535" cy="4617720"/>
+          </a:xfrm>
+          <a:prstGeom prst="rect">
+            <a:avLst/>
+          </a:prstGeom>
+          <a:noFill/>
+        </p:spPr>
+        <p:txBody>
+          <a:bodyPr wrap="square" anchor="t" lIns="0" rIns="0" tIns="0" bIns="0">
+            <a:spAutoFit/>
+          </a:bodyPr>
+          <a:lstStyle/>
+          <a:p>
+            <a:pPr>
+              <a:spcAft>
+                <a:spcPts val="1000"/>
+              </a:spcAft>
+            </a:pPr>
+            <a:r>
+              <a:rPr sz="1600" b="0" i="0">
+                <a:solidFill>
+                  <a:srgbClr val="2B2B2B"/>
+                </a:solidFill>
+                <a:latin typeface="Calibri"/>
+              </a:rPr>
+              <a:t>–   </a:t>
+            </a:r>
+            <a:r>
+              <a:rPr sz="1600" b="1" i="0">
+                <a:solidFill>
+                  <a:srgbClr val="2B2B2B"/>
+                </a:solidFill>
+                <a:latin typeface="Calibri"/>
+              </a:rPr>
+              <a:t>Lectura autónoma:</a:t>
+            </a:r>
+            <a:r>
+              <a:rPr sz="1600" b="0" i="0">
+                <a:solidFill>
+                  <a:srgbClr val="2B2B2B"/>
+                </a:solidFill>
+                <a:latin typeface="Calibri"/>
+              </a:rPr>
+              <a:t> Delimitación / reformulación del tema — la retomamos al abrir la Sesión 02.</a:t>
+            </a:r>
+          </a:p>
+          <a:p>
+            <a:pPr>
+              <a:spcAft>
+                <a:spcPts val="1000"/>
+              </a:spcAft>
+            </a:pPr>
+            <a:r>
+              <a:rPr sz="1600" b="0" i="0">
+                <a:solidFill>
+                  <a:srgbClr val="2B2B2B"/>
+                </a:solidFill>
+                <a:latin typeface="Calibri"/>
+              </a:rPr>
+              <a:t>–   Revisar la </a:t>
+            </a:r>
+            <a:r>
+              <a:rPr sz="1600" b="1" i="0">
+                <a:solidFill>
+                  <a:srgbClr val="2B2B2B"/>
+                </a:solidFill>
+                <a:latin typeface="Calibri"/>
+              </a:rPr>
+              <a:t>Presentación del Curso</a:t>
+            </a:r>
+            <a:r>
+              <a:rPr sz="1600" b="0" i="0">
+                <a:solidFill>
+                  <a:srgbClr val="2B2B2B"/>
+                </a:solidFill>
+                <a:latin typeface="Calibri"/>
+              </a:rPr>
+              <a:t> completa (fechas, evaluación, contenido de todas las sesiones).</a:t>
+            </a:r>
+          </a:p>
+          <a:p>
+            <a:pPr>
+              <a:spcAft>
+                <a:spcPts val="1000"/>
+              </a:spcAft>
+            </a:pPr>
+            <a:r>
+              <a:rPr sz="1600" b="0" i="0">
+                <a:solidFill>
+                  <a:srgbClr val="2B2B2B"/>
+                </a:solidFill>
+                <a:latin typeface="Calibri"/>
+              </a:rPr>
+              <a:t>–   Abrir los enunciados de `Clases/Recursos/ACAs/`: son la guía escrita de lo que evalúa cada corte.</a:t>
+            </a:r>
+          </a:p>
+        </p:txBody>
+      </p:sp>
+      <p:sp>
+        <p:nvSpPr>
+          <p:cNvPr id="5" name="TextBox 4"/>
+          <p:cNvSpPr txBox="1"/>
+          <p:nvPr/>
+        </p:nvSpPr>
+        <p:spPr>
+          <a:xfrm>
+            <a:off x="11094415" y="6446520"/>
+            <a:ext cx="548640" cy="274320"/>
+          </a:xfrm>
+          <a:prstGeom prst="rect">
+            <a:avLst/>
+          </a:prstGeom>
+          <a:noFill/>
+        </p:spPr>
+        <p:txBody>
+          <a:bodyPr wrap="square" anchor="t" lIns="0" rIns="0" tIns="0" bIns="0">
+            <a:spAutoFit/>
+          </a:bodyPr>
+          <a:lstStyle/>
+          <a:p>
+            <a:pPr algn="r"/>
+            <a:r>
+              <a:rPr sz="1000" b="1" i="0">
+                <a:solidFill>
+                  <a:srgbClr val="8F989D"/>
+                </a:solidFill>
+                <a:latin typeface="Calibri"/>
+              </a:rPr>
+              <a:t>23</a:t>
+            </a:r>
+          </a:p>
+        </p:txBody>
+      </p:sp>
+    </p:spTree>
+  </p:cSld>
+  <p:clrMapOvr>
+    <a:masterClrMapping/>
+  </p:clrMapOvr>
+</p:sld>
+</file>
+
+<file path=ppt/slides/slide24.xml><?xml version="1.0" encoding="utf-8"?>
+<p:sld xmlns:a="http://schemas.openxmlformats.org/drawingml/2006/main" xmlns:p="http://schemas.openxmlformats.org/presentationml/2006/main" xmlns:r="http://schemas.openxmlformats.org/officeDocument/2006/relationships">
+  <p:cSld>
+    <p:bg>
+      <p:bgPr>
+        <a:solidFill>
+          <a:srgbClr val="FFFFFF"/>
+        </a:solidFill>
+        <a:effectLst/>
+      </p:bgPr>
+    </p:bg>
+    <p:spTree>
+      <p:nvGrpSpPr>
+        <p:cNvPr id="1" name=""/>
+        <p:cNvGrpSpPr/>
+        <p:nvPr/>
+      </p:nvGrpSpPr>
+      <p:grpSpPr/>
+      <p:sp>
+        <p:nvSpPr>
+          <p:cNvPr id="2" name="Rectangle 1"/>
           <p:cNvSpPr/>
           <p:nvPr/>
         </p:nvSpPr>
         <p:spPr>
           <a:xfrm>
-            <a:off x="640080" y="1737360"/>
-            <a:ext cx="10911535" cy="713232"/>
+            <a:off x="0" y="0"/>
+            <a:ext cx="12191695" cy="164592"/>
           </a:xfrm>
-          <a:prstGeom prst="roundRect">
+          <a:prstGeom prst="rect">
             <a:avLst/>
           </a:prstGeom>
           <a:solidFill>
-            <a:srgbClr val="E8F5EC"/>
+            <a:srgbClr val="007433"/>
           </a:solidFill>
           <a:ln>
             <a:noFill/>
@@ -9714,16 +11013,40 @@
           </a:p>
         </p:txBody>
       </p:sp>
-      <p:sp>
-        <p:nvSpPr>
-          <p:cNvPr id="5" name="TextBox 4"/>
+      <p:pic>
+        <p:nvPicPr>
+          <p:cNvPr id="3" name="Picture 2" descr="logo_cun_solo.png"/>
+          <p:cNvPicPr>
+            <a:picLocks noChangeAspect="1"/>
+          </p:cNvPicPr>
+          <p:nvPr/>
+        </p:nvPicPr>
+        <p:blipFill>
+          <a:blip r:embed="rId2"/>
+          <a:stretch>
+            <a:fillRect/>
+          </a:stretch>
+        </p:blipFill>
+        <p:spPr>
+          <a:xfrm>
+            <a:off x="10362895" y="5632704"/>
+            <a:ext cx="1371600" cy="950976"/>
+          </a:xfrm>
+          <a:prstGeom prst="rect">
+            <a:avLst/>
+          </a:prstGeom>
+        </p:spPr>
+      </p:pic>
+      <p:sp>
+        <p:nvSpPr>
+          <p:cNvPr id="4" name="TextBox 3"/>
           <p:cNvSpPr txBox="1"/>
           <p:nvPr/>
         </p:nvSpPr>
         <p:spPr>
           <a:xfrm>
-            <a:off x="868680" y="1847088"/>
-            <a:ext cx="10454335" cy="493776"/>
+            <a:off x="640080" y="1737360"/>
+            <a:ext cx="10911535" cy="1097280"/>
           </a:xfrm>
           <a:prstGeom prst="rect">
             <a:avLst/>
@@ -9731,102 +11054,34 @@
           <a:noFill/>
         </p:spPr>
         <p:txBody>
-          <a:bodyPr wrap="square" anchor="t" lIns="0" rIns="0" tIns="0" bIns="0">
+          <a:bodyPr wrap="square" anchor="ctr" lIns="0" rIns="0" tIns="0" bIns="0">
             <a:spAutoFit/>
           </a:bodyPr>
           <a:lstStyle/>
           <a:p>
-            <a:r>
-              <a:rPr sz="1300" b="1" i="0">
+            <a:pPr algn="ctr"/>
+            <a:r>
+              <a:rPr sz="3400" b="1" i="0">
                 <a:solidFill>
                   <a:srgbClr val="0C2340"/>
                 </a:solidFill>
                 <a:latin typeface="Calibri"/>
               </a:rPr>
-              <a:t>ℹ️ Nota institucional</a:t>
-            </a:r>
-          </a:p>
-          <a:p>
-            <a:pPr>
-              <a:spcBef>
-                <a:spcPts val="400"/>
-              </a:spcBef>
-            </a:pPr>
-            <a:r>
-              <a:rPr sz="1300" b="1" i="0">
-                <a:solidFill>
-                  <a:srgbClr val="2B2B2B"/>
-                </a:solidFill>
-                <a:latin typeface="Calibri"/>
-              </a:rPr>
-              <a:t>Entrega oficial: CDigital.</a:t>
-            </a:r>
-            <a:r>
-              <a:rPr sz="1300" b="0" i="0">
-                <a:solidFill>
-                  <a:srgbClr val="2B2B2B"/>
-                </a:solidFill>
-                <a:latin typeface="Calibri"/>
-              </a:rPr>
-              <a:t> Lo que no esté ahí, no está entregado.</a:t>
-            </a:r>
-          </a:p>
-        </p:txBody>
-      </p:sp>
-      <p:sp>
-        <p:nvSpPr>
-          <p:cNvPr id="6" name="Rounded Rectangle 5"/>
-          <p:cNvSpPr/>
+              <a:t>Cierre — Sesión 01</a:t>
+            </a:r>
+          </a:p>
+        </p:txBody>
+      </p:sp>
+      <p:sp>
+        <p:nvSpPr>
+          <p:cNvPr id="5" name="TextBox 4"/>
+          <p:cNvSpPr txBox="1"/>
           <p:nvPr/>
         </p:nvSpPr>
         <p:spPr>
           <a:xfrm>
-            <a:off x="640080" y="2679191"/>
-            <a:ext cx="10911535" cy="713232"/>
-          </a:xfrm>
-          <a:prstGeom prst="roundRect">
-            <a:avLst/>
-          </a:prstGeom>
-          <a:solidFill>
-            <a:srgbClr val="FDECD8"/>
-          </a:solidFill>
-          <a:ln>
-            <a:noFill/>
-          </a:ln>
-          <a:effectLst/>
-        </p:spPr>
-        <p:style>
-          <a:lnRef idx="1">
-            <a:schemeClr val="accent1"/>
-          </a:lnRef>
-          <a:fillRef idx="3">
-            <a:schemeClr val="accent1"/>
-          </a:fillRef>
-          <a:effectRef idx="2">
-            <a:schemeClr val="accent1"/>
-          </a:effectRef>
-          <a:fontRef idx="minor">
-            <a:schemeClr val="lt1"/>
-          </a:fontRef>
-        </p:style>
-        <p:txBody>
-          <a:bodyPr rtlCol="0" anchor="ctr"/>
-          <a:lstStyle/>
-          <a:p>
-            <a:pPr algn="ctr"/>
-          </a:p>
-        </p:txBody>
-      </p:sp>
-      <p:sp>
-        <p:nvSpPr>
-          <p:cNvPr id="7" name="TextBox 6"/>
-          <p:cNvSpPr txBox="1"/>
-          <p:nvPr/>
-        </p:nvSpPr>
-        <p:spPr>
-          <a:xfrm>
-            <a:off x="868680" y="2788920"/>
-            <a:ext cx="10454335" cy="493776"/>
+            <a:off x="640080" y="3017520"/>
+            <a:ext cx="10911535" cy="1645920"/>
           </a:xfrm>
           <a:prstGeom prst="rect">
             <a:avLst/>
@@ -9839,106 +11094,58 @@
           </a:bodyPr>
           <a:lstStyle/>
           <a:p>
-            <a:r>
-              <a:rPr sz="1300" b="1" i="0">
-                <a:solidFill>
-                  <a:srgbClr val="0C2340"/>
-                </a:solidFill>
-                <a:latin typeface="Calibri"/>
-              </a:rPr>
-              <a:t>💡 Aclaración</a:t>
-            </a:r>
-          </a:p>
-          <a:p>
-            <a:pPr>
-              <a:spcBef>
-                <a:spcPts val="400"/>
-              </a:spcBef>
+            <a:pPr algn="ctr">
+              <a:spcAft>
+                <a:spcPts val="600"/>
+              </a:spcAft>
             </a:pPr>
             <a:r>
-              <a:rPr sz="1300" b="0" i="0">
-                <a:solidFill>
-                  <a:srgbClr val="2B2B2B"/>
-                </a:solidFill>
-                <a:latin typeface="Calibri"/>
-              </a:rPr>
-              <a:t>Traer el avance </a:t>
-            </a:r>
-            <a:r>
-              <a:rPr sz="1300" b="1" i="0">
-                <a:solidFill>
-                  <a:srgbClr val="2B2B2B"/>
-                </a:solidFill>
-                <a:latin typeface="Calibri"/>
-              </a:rPr>
-              <a:t>escrito</a:t>
-            </a:r>
-            <a:r>
-              <a:rPr sz="1300" b="0" i="0">
-                <a:solidFill>
-                  <a:srgbClr val="2B2B2B"/>
-                </a:solidFill>
-                <a:latin typeface="Calibri"/>
-              </a:rPr>
-              <a:t> a cada encuentro: se trabaja sobre lo que ya existe.</a:t>
-            </a:r>
-          </a:p>
-        </p:txBody>
-      </p:sp>
-      <p:sp>
-        <p:nvSpPr>
-          <p:cNvPr id="8" name="Rounded Rectangle 7"/>
-          <p:cNvSpPr/>
+              <a:rPr sz="1600" b="0" i="0">
+                <a:solidFill>
+                  <a:srgbClr val="2B2B2B"/>
+                </a:solidFill>
+                <a:latin typeface="Calibri"/>
+              </a:rPr>
+              <a:t>Ya sabemos qué haremos, cómo se evalúa y quién es quién.</a:t>
+            </a:r>
+          </a:p>
+          <a:p>
+            <a:pPr algn="ctr">
+              <a:spcAft>
+                <a:spcPts val="600"/>
+              </a:spcAft>
+            </a:pPr>
+            <a:r>
+              <a:rPr sz="1600" b="1" i="0">
+                <a:solidFill>
+                  <a:srgbClr val="2B2B2B"/>
+                </a:solidFill>
+                <a:latin typeface="Calibri"/>
+              </a:rPr>
+              <a:t>Sesión 02:</a:t>
+            </a:r>
+            <a:r>
+              <a:rPr sz="1600" b="0" i="0">
+                <a:solidFill>
+                  <a:srgbClr val="2B2B2B"/>
+                </a:solidFill>
+                <a:latin typeface="Calibri"/>
+              </a:rPr>
+              <a:t> arranca el contenido del curso.</a:t>
+            </a:r>
+          </a:p>
+        </p:txBody>
+      </p:sp>
+      <p:sp>
+        <p:nvSpPr>
+          <p:cNvPr id="6" name="TextBox 5"/>
+          <p:cNvSpPr txBox="1"/>
           <p:nvPr/>
         </p:nvSpPr>
         <p:spPr>
           <a:xfrm>
-            <a:off x="640080" y="3621024"/>
-            <a:ext cx="10911535" cy="713232"/>
-          </a:xfrm>
-          <a:prstGeom prst="roundRect">
-            <a:avLst/>
-          </a:prstGeom>
-          <a:solidFill>
-            <a:srgbClr val="FBE4E4"/>
-          </a:solidFill>
-          <a:ln>
-            <a:noFill/>
-          </a:ln>
-          <a:effectLst/>
-        </p:spPr>
-        <p:style>
-          <a:lnRef idx="1">
-            <a:schemeClr val="accent1"/>
-          </a:lnRef>
-          <a:fillRef idx="3">
-            <a:schemeClr val="accent1"/>
-          </a:fillRef>
-          <a:effectRef idx="2">
-            <a:schemeClr val="accent1"/>
-          </a:effectRef>
-          <a:fontRef idx="minor">
-            <a:schemeClr val="lt1"/>
-          </a:fontRef>
-        </p:style>
-        <p:txBody>
-          <a:bodyPr rtlCol="0" anchor="ctr"/>
-          <a:lstStyle/>
-          <a:p>
-            <a:pPr algn="ctr"/>
-          </a:p>
-        </p:txBody>
-      </p:sp>
-      <p:sp>
-        <p:nvSpPr>
-          <p:cNvPr id="9" name="TextBox 8"/>
-          <p:cNvSpPr txBox="1"/>
-          <p:nvPr/>
-        </p:nvSpPr>
-        <p:spPr>
-          <a:xfrm>
-            <a:off x="868680" y="3730752"/>
-            <a:ext cx="10454335" cy="493776"/>
+            <a:off x="640080" y="4754880"/>
+            <a:ext cx="10911535" cy="640080"/>
           </a:xfrm>
           <a:prstGeom prst="rect">
             <a:avLst/>
@@ -9951,83 +11158,15 @@
           </a:bodyPr>
           <a:lstStyle/>
           <a:p>
-            <a:r>
-              <a:rPr sz="1300" b="1" i="0">
-                <a:solidFill>
-                  <a:srgbClr val="0C2340"/>
-                </a:solidFill>
-                <a:latin typeface="Calibri"/>
-              </a:rPr>
-              <a:t>⚠️ Importante</a:t>
-            </a:r>
-          </a:p>
-          <a:p>
-            <a:pPr>
-              <a:spcBef>
-                <a:spcPts val="400"/>
-              </a:spcBef>
-            </a:pPr>
-            <a:r>
-              <a:rPr sz="1300" b="0" i="0">
-                <a:solidFill>
-                  <a:srgbClr val="2B2B2B"/>
-                </a:solidFill>
-                <a:latin typeface="Calibri"/>
-              </a:rPr>
-              <a:t>Integridad académica: citar siempre en </a:t>
-            </a:r>
-            <a:r>
-              <a:rPr sz="1300" b="1" i="0">
-                <a:solidFill>
-                  <a:srgbClr val="2B2B2B"/>
-                </a:solidFill>
-                <a:latin typeface="Calibri"/>
-              </a:rPr>
-              <a:t>APA 7</a:t>
-            </a:r>
-            <a:r>
-              <a:rPr sz="1300" b="0" i="0">
-                <a:solidFill>
-                  <a:srgbClr val="2B2B2B"/>
-                </a:solidFill>
-                <a:latin typeface="Calibri"/>
-              </a:rPr>
-              <a:t>. El plagio tiene debido proceso.</a:t>
-            </a:r>
-          </a:p>
-        </p:txBody>
-      </p:sp>
-      <p:sp>
-        <p:nvSpPr>
-          <p:cNvPr id="10" name="TextBox 9"/>
-          <p:cNvSpPr txBox="1"/>
-          <p:nvPr/>
-        </p:nvSpPr>
-        <p:spPr>
-          <a:xfrm>
-            <a:off x="11094415" y="6446520"/>
-            <a:ext cx="548640" cy="274320"/>
-          </a:xfrm>
-          <a:prstGeom prst="rect">
-            <a:avLst/>
-          </a:prstGeom>
-          <a:noFill/>
-        </p:spPr>
-        <p:txBody>
-          <a:bodyPr wrap="square" anchor="t" lIns="0" rIns="0" tIns="0" bIns="0">
-            <a:spAutoFit/>
-          </a:bodyPr>
-          <a:lstStyle/>
-          <a:p>
-            <a:pPr algn="r"/>
-            <a:r>
-              <a:rPr sz="1000" b="1" i="0">
-                <a:solidFill>
-                  <a:srgbClr val="8F989D"/>
-                </a:solidFill>
-                <a:latin typeface="Calibri"/>
-              </a:rPr>
-              <a:t>21</a:t>
+            <a:pPr algn="ctr"/>
+            <a:r>
+              <a:rPr sz="2000" b="1" i="0">
+                <a:solidFill>
+                  <a:srgbClr val="007433"/>
+                </a:solidFill>
+                <a:latin typeface="Calibri"/>
+              </a:rPr>
+              <a:t>TRABAJO DE GRADO 2</a:t>
             </a:r>
           </a:p>
         </p:txBody>
@@ -10040,7 +11179,7 @@
 </p:sld>
 </file>
 
-<file path=ppt/slides/slide22.xml><?xml version="1.0" encoding="utf-8"?>
+<file path=ppt/slides/slide3.xml><?xml version="1.0" encoding="utf-8"?>
 <p:sld xmlns:a="http://schemas.openxmlformats.org/drawingml/2006/main" xmlns:p="http://schemas.openxmlformats.org/presentationml/2006/main" xmlns:r="http://schemas.openxmlformats.org/officeDocument/2006/relationships">
   <p:cSld>
     <p:bg>
@@ -10132,7 +11271,7 @@
                 </a:solidFill>
                 <a:latin typeface="Calibri"/>
               </a:rPr>
-              <a:t>PARA LA PRÓXIMA SESIÓN</a:t>
+              <a:t>Docente</a:t>
             </a:r>
           </a:p>
         </p:txBody>
@@ -10145,8 +11284,8 @@
         </p:nvSpPr>
         <p:spPr>
           <a:xfrm>
-            <a:off x="640080" y="1691639"/>
-            <a:ext cx="10911535" cy="4617720"/>
+            <a:off x="2560320" y="2148840"/>
+            <a:ext cx="8991295" cy="1874519"/>
           </a:xfrm>
           <a:prstGeom prst="rect">
             <a:avLst/>
@@ -10161,197 +11300,72 @@
           <a:p>
             <a:pPr>
               <a:spcAft>
-                <a:spcPts val="1000"/>
+                <a:spcPts val="1200"/>
               </a:spcAft>
             </a:pPr>
             <a:r>
-              <a:rPr sz="1600" b="0" i="0">
-                <a:solidFill>
-                  <a:srgbClr val="2B2B2B"/>
-                </a:solidFill>
-                <a:latin typeface="Calibri"/>
-              </a:rPr>
-              <a:t>–   </a:t>
-            </a:r>
-            <a:r>
-              <a:rPr sz="1600" b="1" i="0">
-                <a:solidFill>
-                  <a:srgbClr val="2B2B2B"/>
-                </a:solidFill>
-                <a:latin typeface="Calibri"/>
-              </a:rPr>
-              <a:t>Lectura autónoma:</a:t>
-            </a:r>
-            <a:r>
-              <a:rPr sz="1600" b="0" i="0">
-                <a:solidFill>
-                  <a:srgbClr val="2B2B2B"/>
-                </a:solidFill>
-                <a:latin typeface="Calibri"/>
-              </a:rPr>
-              <a:t> Delimitación / reformulación del tema — la retomamos al abrir la Sesión 02.</a:t>
+              <a:rPr sz="1800" b="0" i="0">
+                <a:solidFill>
+                  <a:srgbClr val="2B2B2B"/>
+                </a:solidFill>
+                <a:latin typeface="Calibri"/>
+              </a:rPr>
+              <a:t>Ingeniero de Sistemas</a:t>
             </a:r>
           </a:p>
           <a:p>
             <a:pPr>
               <a:spcAft>
-                <a:spcPts val="1000"/>
+                <a:spcPts val="1200"/>
               </a:spcAft>
             </a:pPr>
             <a:r>
-              <a:rPr sz="1600" b="0" i="0">
-                <a:solidFill>
-                  <a:srgbClr val="2B2B2B"/>
-                </a:solidFill>
-                <a:latin typeface="Calibri"/>
-              </a:rPr>
-              <a:t>–   Revisar la </a:t>
-            </a:r>
-            <a:r>
-              <a:rPr sz="1600" b="1" i="0">
-                <a:solidFill>
-                  <a:srgbClr val="2B2B2B"/>
-                </a:solidFill>
-                <a:latin typeface="Calibri"/>
-              </a:rPr>
-              <a:t>Presentación del Curso</a:t>
-            </a:r>
-            <a:r>
-              <a:rPr sz="1600" b="0" i="0">
-                <a:solidFill>
-                  <a:srgbClr val="2B2B2B"/>
-                </a:solidFill>
-                <a:latin typeface="Calibri"/>
-              </a:rPr>
-              <a:t> completa (fechas, evaluación, contenido de todas las sesiones).</a:t>
+              <a:rPr sz="1800" b="0" i="0">
+                <a:solidFill>
+                  <a:srgbClr val="2B2B2B"/>
+                </a:solidFill>
+                <a:latin typeface="Calibri"/>
+              </a:rPr>
+              <a:t>Candidato a MSc en Inteligencia Artificial</a:t>
             </a:r>
           </a:p>
           <a:p>
             <a:pPr>
               <a:spcAft>
-                <a:spcPts val="1000"/>
+                <a:spcPts val="1200"/>
               </a:spcAft>
             </a:pPr>
             <a:r>
-              <a:rPr sz="1600" b="0" i="0">
-                <a:solidFill>
-                  <a:srgbClr val="2B2B2B"/>
-                </a:solidFill>
-                <a:latin typeface="Calibri"/>
-              </a:rPr>
-              <a:t>–   Abrir los enunciados de `Clases/Recursos/ACAs/`: son la guía escrita de lo que evalúa cada corte.</a:t>
-            </a:r>
-          </a:p>
-        </p:txBody>
-      </p:sp>
-      <p:sp>
-        <p:nvSpPr>
-          <p:cNvPr id="5" name="TextBox 4"/>
-          <p:cNvSpPr txBox="1"/>
-          <p:nvPr/>
-        </p:nvSpPr>
-        <p:spPr>
-          <a:xfrm>
-            <a:off x="11094415" y="6446520"/>
-            <a:ext cx="548640" cy="274320"/>
-          </a:xfrm>
-          <a:prstGeom prst="rect">
-            <a:avLst/>
-          </a:prstGeom>
-          <a:noFill/>
-        </p:spPr>
-        <p:txBody>
-          <a:bodyPr wrap="square" anchor="t" lIns="0" rIns="0" tIns="0" bIns="0">
-            <a:spAutoFit/>
-          </a:bodyPr>
-          <a:lstStyle/>
-          <a:p>
-            <a:pPr algn="r"/>
-            <a:r>
-              <a:rPr sz="1000" b="1" i="0">
-                <a:solidFill>
-                  <a:srgbClr val="8F989D"/>
-                </a:solidFill>
-                <a:latin typeface="Calibri"/>
-              </a:rPr>
-              <a:t>22</a:t>
-            </a:r>
-          </a:p>
-        </p:txBody>
-      </p:sp>
-    </p:spTree>
-  </p:cSld>
-  <p:clrMapOvr>
-    <a:masterClrMapping/>
-  </p:clrMapOvr>
-</p:sld>
-</file>
-
-<file path=ppt/slides/slide23.xml><?xml version="1.0" encoding="utf-8"?>
-<p:sld xmlns:a="http://schemas.openxmlformats.org/drawingml/2006/main" xmlns:p="http://schemas.openxmlformats.org/presentationml/2006/main" xmlns:r="http://schemas.openxmlformats.org/officeDocument/2006/relationships">
-  <p:cSld>
-    <p:bg>
-      <p:bgPr>
-        <a:solidFill>
-          <a:srgbClr val="FFFFFF"/>
-        </a:solidFill>
-        <a:effectLst/>
-      </p:bgPr>
-    </p:bg>
-    <p:spTree>
-      <p:nvGrpSpPr>
-        <p:cNvPr id="1" name=""/>
-        <p:cNvGrpSpPr/>
-        <p:nvPr/>
-      </p:nvGrpSpPr>
-      <p:grpSpPr/>
-      <p:sp>
-        <p:nvSpPr>
-          <p:cNvPr id="2" name="Rectangle 1"/>
-          <p:cNvSpPr/>
-          <p:nvPr/>
-        </p:nvSpPr>
-        <p:spPr>
-          <a:xfrm>
-            <a:off x="0" y="0"/>
-            <a:ext cx="12191695" cy="164592"/>
-          </a:xfrm>
-          <a:prstGeom prst="rect">
-            <a:avLst/>
-          </a:prstGeom>
-          <a:solidFill>
-            <a:srgbClr val="007433"/>
-          </a:solidFill>
-          <a:ln>
-            <a:noFill/>
-          </a:ln>
-          <a:effectLst/>
-        </p:spPr>
-        <p:style>
-          <a:lnRef idx="1">
-            <a:schemeClr val="accent1"/>
-          </a:lnRef>
-          <a:fillRef idx="3">
-            <a:schemeClr val="accent1"/>
-          </a:fillRef>
-          <a:effectRef idx="2">
-            <a:schemeClr val="accent1"/>
-          </a:effectRef>
-          <a:fontRef idx="minor">
-            <a:schemeClr val="lt1"/>
-          </a:fontRef>
-        </p:style>
-        <p:txBody>
-          <a:bodyPr rtlCol="0" anchor="ctr"/>
-          <a:lstStyle/>
-          <a:p>
-            <a:pPr algn="ctr"/>
+              <a:rPr sz="1800" b="0" i="0">
+                <a:solidFill>
+                  <a:srgbClr val="2B2B2B"/>
+                </a:solidFill>
+                <a:latin typeface="Calibri"/>
+              </a:rPr>
+              <a:t>Líder Técnico</a:t>
+            </a:r>
+          </a:p>
+          <a:p>
+            <a:pPr>
+              <a:spcAft>
+                <a:spcPts val="1200"/>
+              </a:spcAft>
+            </a:pPr>
+            <a:r>
+              <a:rPr sz="1800" b="0" i="0">
+                <a:solidFill>
+                  <a:srgbClr val="2B2B2B"/>
+                </a:solidFill>
+                <a:latin typeface="Calibri"/>
+              </a:rPr>
+              <a:t>Speaker Tecnológico</a:t>
+            </a:r>
           </a:p>
         </p:txBody>
       </p:sp>
       <p:pic>
         <p:nvPicPr>
-          <p:cNvPr id="3" name="Picture 2" descr="logo_cun_solo.png"/>
+          <p:cNvPr id="5" name="Picture 4" descr="gmail_icon.png"/>
           <p:cNvPicPr>
             <a:picLocks noChangeAspect="1"/>
           </p:cNvPicPr>
@@ -10365,8 +11379,8 @@
         </p:blipFill>
         <p:spPr>
           <a:xfrm>
-            <a:off x="10362895" y="5632704"/>
-            <a:ext cx="1371600" cy="950976"/>
+            <a:off x="2560320" y="4160520"/>
+            <a:ext cx="292608" cy="292608"/>
           </a:xfrm>
           <a:prstGeom prst="rect">
             <a:avLst/>
@@ -10375,14 +11389,14 @@
       </p:pic>
       <p:sp>
         <p:nvSpPr>
-          <p:cNvPr id="4" name="TextBox 3"/>
+          <p:cNvPr id="6" name="TextBox 5"/>
           <p:cNvSpPr txBox="1"/>
           <p:nvPr/>
         </p:nvSpPr>
         <p:spPr>
           <a:xfrm>
-            <a:off x="640080" y="1737360"/>
-            <a:ext cx="10911535" cy="1097280"/>
+            <a:off x="3063239" y="4142232"/>
+            <a:ext cx="8488375" cy="365760"/>
           </a:xfrm>
           <a:prstGeom prst="rect">
             <a:avLst/>
@@ -10395,29 +11409,52 @@
           </a:bodyPr>
           <a:lstStyle/>
           <a:p>
-            <a:pPr algn="ctr"/>
-            <a:r>
-              <a:rPr sz="3400" b="1" i="0">
-                <a:solidFill>
-                  <a:srgbClr val="0C2340"/>
-                </a:solidFill>
-                <a:latin typeface="Calibri"/>
-              </a:rPr>
-              <a:t>Cierre — Sesión 01</a:t>
-            </a:r>
-          </a:p>
-        </p:txBody>
-      </p:sp>
-      <p:sp>
-        <p:nvSpPr>
-          <p:cNvPr id="5" name="TextBox 4"/>
+            <a:r>
+              <a:rPr sz="1600" b="1" i="0">
+                <a:solidFill>
+                  <a:srgbClr val="007433"/>
+                </a:solidFill>
+                <a:latin typeface="Calibri"/>
+              </a:rPr>
+              <a:t>julian_castanoe@cun.edu.co</a:t>
+            </a:r>
+          </a:p>
+        </p:txBody>
+      </p:sp>
+      <p:pic>
+        <p:nvPicPr>
+          <p:cNvPr id="7" name="Picture 6" descr="logo_cun_solo.png"/>
+          <p:cNvPicPr>
+            <a:picLocks noChangeAspect="1"/>
+          </p:cNvPicPr>
+          <p:nvPr/>
+        </p:nvPicPr>
+        <p:blipFill>
+          <a:blip r:embed="rId3"/>
+          <a:stretch>
+            <a:fillRect/>
+          </a:stretch>
+        </p:blipFill>
+        <p:spPr>
+          <a:xfrm>
+            <a:off x="457200" y="5523586"/>
+            <a:ext cx="1463040" cy="1014374"/>
+          </a:xfrm>
+          <a:prstGeom prst="rect">
+            <a:avLst/>
+          </a:prstGeom>
+        </p:spPr>
+      </p:pic>
+      <p:sp>
+        <p:nvSpPr>
+          <p:cNvPr id="8" name="TextBox 7"/>
           <p:cNvSpPr txBox="1"/>
           <p:nvPr/>
         </p:nvSpPr>
         <p:spPr>
           <a:xfrm>
-            <a:off x="640080" y="3017520"/>
-            <a:ext cx="10911535" cy="1645920"/>
+            <a:off x="11094415" y="6446520"/>
+            <a:ext cx="548640" cy="274320"/>
           </a:xfrm>
           <a:prstGeom prst="rect">
             <a:avLst/>
@@ -10430,79 +11467,15 @@
           </a:bodyPr>
           <a:lstStyle/>
           <a:p>
-            <a:pPr algn="ctr">
-              <a:spcAft>
-                <a:spcPts val="600"/>
-              </a:spcAft>
-            </a:pPr>
-            <a:r>
-              <a:rPr sz="1600" b="0" i="0">
-                <a:solidFill>
-                  <a:srgbClr val="2B2B2B"/>
-                </a:solidFill>
-                <a:latin typeface="Calibri"/>
-              </a:rPr>
-              <a:t>Ya sabemos qué haremos, cómo se evalúa y quién es quién.</a:t>
-            </a:r>
-          </a:p>
-          <a:p>
-            <a:pPr algn="ctr">
-              <a:spcAft>
-                <a:spcPts val="600"/>
-              </a:spcAft>
-            </a:pPr>
-            <a:r>
-              <a:rPr sz="1600" b="1" i="0">
-                <a:solidFill>
-                  <a:srgbClr val="2B2B2B"/>
-                </a:solidFill>
-                <a:latin typeface="Calibri"/>
-              </a:rPr>
-              <a:t>Sesión 02:</a:t>
-            </a:r>
-            <a:r>
-              <a:rPr sz="1600" b="0" i="0">
-                <a:solidFill>
-                  <a:srgbClr val="2B2B2B"/>
-                </a:solidFill>
-                <a:latin typeface="Calibri"/>
-              </a:rPr>
-              <a:t> arranca el contenido del curso.</a:t>
-            </a:r>
-          </a:p>
-        </p:txBody>
-      </p:sp>
-      <p:sp>
-        <p:nvSpPr>
-          <p:cNvPr id="6" name="TextBox 5"/>
-          <p:cNvSpPr txBox="1"/>
-          <p:nvPr/>
-        </p:nvSpPr>
-        <p:spPr>
-          <a:xfrm>
-            <a:off x="640080" y="4754880"/>
-            <a:ext cx="10911535" cy="640080"/>
-          </a:xfrm>
-          <a:prstGeom prst="rect">
-            <a:avLst/>
-          </a:prstGeom>
-          <a:noFill/>
-        </p:spPr>
-        <p:txBody>
-          <a:bodyPr wrap="square" anchor="t" lIns="0" rIns="0" tIns="0" bIns="0">
-            <a:spAutoFit/>
-          </a:bodyPr>
-          <a:lstStyle/>
-          <a:p>
-            <a:pPr algn="ctr"/>
-            <a:r>
-              <a:rPr sz="2000" b="1" i="0">
-                <a:solidFill>
-                  <a:srgbClr val="007433"/>
-                </a:solidFill>
-                <a:latin typeface="Calibri"/>
-              </a:rPr>
-              <a:t>TRABAJO DE GRADO 2</a:t>
+            <a:pPr algn="r"/>
+            <a:r>
+              <a:rPr sz="1000" b="1" i="0">
+                <a:solidFill>
+                  <a:srgbClr val="8F989D"/>
+                </a:solidFill>
+                <a:latin typeface="Calibri"/>
+              </a:rPr>
+              <a:t>3</a:t>
             </a:r>
           </a:p>
         </p:txBody>
@@ -10515,7 +11488,7 @@
 </p:sld>
 </file>
 
-<file path=ppt/slides/slide3.xml><?xml version="1.0" encoding="utf-8"?>
+<file path=ppt/slides/slide4.xml><?xml version="1.0" encoding="utf-8"?>
 <p:sld xmlns:a="http://schemas.openxmlformats.org/drawingml/2006/main" xmlns:p="http://schemas.openxmlformats.org/presentationml/2006/main" xmlns:r="http://schemas.openxmlformats.org/officeDocument/2006/relationships">
   <p:cSld>
     <p:bg>
@@ -10607,315 +11580,6 @@
                 </a:solidFill>
                 <a:latin typeface="Calibri"/>
               </a:rPr>
-              <a:t>Docente</a:t>
-            </a:r>
-          </a:p>
-        </p:txBody>
-      </p:sp>
-      <p:sp>
-        <p:nvSpPr>
-          <p:cNvPr id="4" name="TextBox 3"/>
-          <p:cNvSpPr txBox="1"/>
-          <p:nvPr/>
-        </p:nvSpPr>
-        <p:spPr>
-          <a:xfrm>
-            <a:off x="2560320" y="2148840"/>
-            <a:ext cx="8991295" cy="1874519"/>
-          </a:xfrm>
-          <a:prstGeom prst="rect">
-            <a:avLst/>
-          </a:prstGeom>
-          <a:noFill/>
-        </p:spPr>
-        <p:txBody>
-          <a:bodyPr wrap="square" anchor="t" lIns="0" rIns="0" tIns="0" bIns="0">
-            <a:spAutoFit/>
-          </a:bodyPr>
-          <a:lstStyle/>
-          <a:p>
-            <a:pPr>
-              <a:spcAft>
-                <a:spcPts val="1200"/>
-              </a:spcAft>
-            </a:pPr>
-            <a:r>
-              <a:rPr sz="1800" b="0" i="0">
-                <a:solidFill>
-                  <a:srgbClr val="2B2B2B"/>
-                </a:solidFill>
-                <a:latin typeface="Calibri"/>
-              </a:rPr>
-              <a:t>Ingeniero de Sistemas</a:t>
-            </a:r>
-          </a:p>
-          <a:p>
-            <a:pPr>
-              <a:spcAft>
-                <a:spcPts val="1200"/>
-              </a:spcAft>
-            </a:pPr>
-            <a:r>
-              <a:rPr sz="1800" b="0" i="0">
-                <a:solidFill>
-                  <a:srgbClr val="2B2B2B"/>
-                </a:solidFill>
-                <a:latin typeface="Calibri"/>
-              </a:rPr>
-              <a:t>Candidato a MSc en Inteligencia Artificial</a:t>
-            </a:r>
-          </a:p>
-          <a:p>
-            <a:pPr>
-              <a:spcAft>
-                <a:spcPts val="1200"/>
-              </a:spcAft>
-            </a:pPr>
-            <a:r>
-              <a:rPr sz="1800" b="0" i="0">
-                <a:solidFill>
-                  <a:srgbClr val="2B2B2B"/>
-                </a:solidFill>
-                <a:latin typeface="Calibri"/>
-              </a:rPr>
-              <a:t>Líder Técnico</a:t>
-            </a:r>
-          </a:p>
-          <a:p>
-            <a:pPr>
-              <a:spcAft>
-                <a:spcPts val="1200"/>
-              </a:spcAft>
-            </a:pPr>
-            <a:r>
-              <a:rPr sz="1800" b="0" i="0">
-                <a:solidFill>
-                  <a:srgbClr val="2B2B2B"/>
-                </a:solidFill>
-                <a:latin typeface="Calibri"/>
-              </a:rPr>
-              <a:t>Speaker Tecnológico</a:t>
-            </a:r>
-          </a:p>
-        </p:txBody>
-      </p:sp>
-      <p:pic>
-        <p:nvPicPr>
-          <p:cNvPr id="5" name="Picture 4" descr="gmail_icon.png"/>
-          <p:cNvPicPr>
-            <a:picLocks noChangeAspect="1"/>
-          </p:cNvPicPr>
-          <p:nvPr/>
-        </p:nvPicPr>
-        <p:blipFill>
-          <a:blip r:embed="rId2"/>
-          <a:stretch>
-            <a:fillRect/>
-          </a:stretch>
-        </p:blipFill>
-        <p:spPr>
-          <a:xfrm>
-            <a:off x="2560320" y="4160520"/>
-            <a:ext cx="292608" cy="292608"/>
-          </a:xfrm>
-          <a:prstGeom prst="rect">
-            <a:avLst/>
-          </a:prstGeom>
-        </p:spPr>
-      </p:pic>
-      <p:sp>
-        <p:nvSpPr>
-          <p:cNvPr id="6" name="TextBox 5"/>
-          <p:cNvSpPr txBox="1"/>
-          <p:nvPr/>
-        </p:nvSpPr>
-        <p:spPr>
-          <a:xfrm>
-            <a:off x="3063239" y="4142232"/>
-            <a:ext cx="8488375" cy="365760"/>
-          </a:xfrm>
-          <a:prstGeom prst="rect">
-            <a:avLst/>
-          </a:prstGeom>
-          <a:noFill/>
-        </p:spPr>
-        <p:txBody>
-          <a:bodyPr wrap="square" anchor="ctr" lIns="0" rIns="0" tIns="0" bIns="0">
-            <a:spAutoFit/>
-          </a:bodyPr>
-          <a:lstStyle/>
-          <a:p>
-            <a:r>
-              <a:rPr sz="1600" b="1" i="0">
-                <a:solidFill>
-                  <a:srgbClr val="007433"/>
-                </a:solidFill>
-                <a:latin typeface="Calibri"/>
-              </a:rPr>
-              <a:t>julian_castanoe@cun.edu.co</a:t>
-            </a:r>
-          </a:p>
-        </p:txBody>
-      </p:sp>
-      <p:pic>
-        <p:nvPicPr>
-          <p:cNvPr id="7" name="Picture 6" descr="logo_cun_solo.png"/>
-          <p:cNvPicPr>
-            <a:picLocks noChangeAspect="1"/>
-          </p:cNvPicPr>
-          <p:nvPr/>
-        </p:nvPicPr>
-        <p:blipFill>
-          <a:blip r:embed="rId3"/>
-          <a:stretch>
-            <a:fillRect/>
-          </a:stretch>
-        </p:blipFill>
-        <p:spPr>
-          <a:xfrm>
-            <a:off x="457200" y="5523586"/>
-            <a:ext cx="1463040" cy="1014374"/>
-          </a:xfrm>
-          <a:prstGeom prst="rect">
-            <a:avLst/>
-          </a:prstGeom>
-        </p:spPr>
-      </p:pic>
-      <p:sp>
-        <p:nvSpPr>
-          <p:cNvPr id="8" name="TextBox 7"/>
-          <p:cNvSpPr txBox="1"/>
-          <p:nvPr/>
-        </p:nvSpPr>
-        <p:spPr>
-          <a:xfrm>
-            <a:off x="11094415" y="6446520"/>
-            <a:ext cx="548640" cy="274320"/>
-          </a:xfrm>
-          <a:prstGeom prst="rect">
-            <a:avLst/>
-          </a:prstGeom>
-          <a:noFill/>
-        </p:spPr>
-        <p:txBody>
-          <a:bodyPr wrap="square" anchor="t" lIns="0" rIns="0" tIns="0" bIns="0">
-            <a:spAutoFit/>
-          </a:bodyPr>
-          <a:lstStyle/>
-          <a:p>
-            <a:pPr algn="r"/>
-            <a:r>
-              <a:rPr sz="1000" b="1" i="0">
-                <a:solidFill>
-                  <a:srgbClr val="8F989D"/>
-                </a:solidFill>
-                <a:latin typeface="Calibri"/>
-              </a:rPr>
-              <a:t>3</a:t>
-            </a:r>
-          </a:p>
-        </p:txBody>
-      </p:sp>
-    </p:spTree>
-  </p:cSld>
-  <p:clrMapOvr>
-    <a:masterClrMapping/>
-  </p:clrMapOvr>
-</p:sld>
-</file>
-
-<file path=ppt/slides/slide4.xml><?xml version="1.0" encoding="utf-8"?>
-<p:sld xmlns:a="http://schemas.openxmlformats.org/drawingml/2006/main" xmlns:p="http://schemas.openxmlformats.org/presentationml/2006/main" xmlns:r="http://schemas.openxmlformats.org/officeDocument/2006/relationships">
-  <p:cSld>
-    <p:bg>
-      <p:bgPr>
-        <a:solidFill>
-          <a:srgbClr val="FFFFFF"/>
-        </a:solidFill>
-        <a:effectLst/>
-      </p:bgPr>
-    </p:bg>
-    <p:spTree>
-      <p:nvGrpSpPr>
-        <p:cNvPr id="1" name=""/>
-        <p:cNvGrpSpPr/>
-        <p:nvPr/>
-      </p:nvGrpSpPr>
-      <p:grpSpPr/>
-      <p:sp>
-        <p:nvSpPr>
-          <p:cNvPr id="2" name="Rectangle 1"/>
-          <p:cNvSpPr/>
-          <p:nvPr/>
-        </p:nvSpPr>
-        <p:spPr>
-          <a:xfrm>
-            <a:off x="0" y="0"/>
-            <a:ext cx="12191695" cy="1188720"/>
-          </a:xfrm>
-          <a:prstGeom prst="rect">
-            <a:avLst/>
-          </a:prstGeom>
-          <a:solidFill>
-            <a:srgbClr val="0C2340"/>
-          </a:solidFill>
-          <a:ln>
-            <a:noFill/>
-          </a:ln>
-          <a:effectLst/>
-        </p:spPr>
-        <p:style>
-          <a:lnRef idx="1">
-            <a:schemeClr val="accent1"/>
-          </a:lnRef>
-          <a:fillRef idx="3">
-            <a:schemeClr val="accent1"/>
-          </a:fillRef>
-          <a:effectRef idx="2">
-            <a:schemeClr val="accent1"/>
-          </a:effectRef>
-          <a:fontRef idx="minor">
-            <a:schemeClr val="lt1"/>
-          </a:fontRef>
-        </p:style>
-        <p:txBody>
-          <a:bodyPr rtlCol="0" anchor="ctr"/>
-          <a:lstStyle/>
-          <a:p>
-            <a:pPr algn="ctr"/>
-          </a:p>
-        </p:txBody>
-      </p:sp>
-      <p:sp>
-        <p:nvSpPr>
-          <p:cNvPr id="3" name="TextBox 2"/>
-          <p:cNvSpPr txBox="1"/>
-          <p:nvPr/>
-        </p:nvSpPr>
-        <p:spPr>
-          <a:xfrm>
-            <a:off x="640080" y="0"/>
-            <a:ext cx="9082735" cy="1188720"/>
-          </a:xfrm>
-          <a:prstGeom prst="rect">
-            <a:avLst/>
-          </a:prstGeom>
-          <a:noFill/>
-        </p:spPr>
-        <p:txBody>
-          <a:bodyPr wrap="square" anchor="ctr" lIns="0" rIns="0" tIns="0" bIns="0">
-            <a:spAutoFit/>
-          </a:bodyPr>
-          <a:lstStyle/>
-          <a:p>
-            <a:pPr algn="ctr"/>
-            <a:r>
-              <a:rPr sz="2600" b="1" i="0">
-                <a:solidFill>
-                  <a:srgbClr val="FFFFFF"/>
-                </a:solidFill>
-                <a:latin typeface="Calibri"/>
-              </a:rPr>
               <a:t>PRESÉNTATE — ROMPEHIELOS</a:t>
             </a:r>
           </a:p>
@@ -10951,7 +11615,7 @@
                 </a:solidFill>
                 <a:latin typeface="Calibri"/>
               </a:rPr>
-              <a:t>Preséntate: quién eres y qué esperas del curso</a:t>
+              <a:t>Formulario de Google · encuestas y Q&amp;A en el propio Meet</a:t>
             </a:r>
           </a:p>
         </p:txBody>
@@ -10984,7 +11648,7 @@
               </a:spcAft>
             </a:pPr>
             <a:r>
-              <a:rPr sz="1400" b="0" i="0">
+              <a:rPr sz="1300" b="0" i="0">
                 <a:solidFill>
                   <a:srgbClr val="2B2B2B"/>
                 </a:solidFill>
@@ -10993,22 +11657,22 @@
               <a:t>–   </a:t>
             </a:r>
             <a:r>
-              <a:rPr sz="1400" b="1" i="0">
-                <a:solidFill>
-                  <a:srgbClr val="2B2B2B"/>
-                </a:solidFill>
-                <a:latin typeface="Calibri"/>
-              </a:rPr>
-              <a:t>Escanea o abre:</a:t>
-            </a:r>
-            <a:r>
-              <a:rPr sz="1400" b="0" i="0">
-                <a:solidFill>
-                  <a:srgbClr val="2B2B2B"/>
-                </a:solidFill>
-                <a:latin typeface="Calibri"/>
-              </a:rPr>
-              <a:t> https://padlet.com/andres_dfx/cun-wruz81hmf9k06gd7</a:t>
+              <a:rPr sz="1300" b="1" i="0">
+                <a:solidFill>
+                  <a:srgbClr val="2B2B2B"/>
+                </a:solidFill>
+                <a:latin typeface="Calibri"/>
+              </a:rPr>
+              <a:t>Escanea el QR o abre:</a:t>
+            </a:r>
+            <a:r>
+              <a:rPr sz="1300" b="0" i="0">
+                <a:solidFill>
+                  <a:srgbClr val="2B2B2B"/>
+                </a:solidFill>
+                <a:latin typeface="Calibri"/>
+              </a:rPr>
+              <a:t> [URL Formulario Preséntate — pendiente · TRABAJO DE GRADO 2]</a:t>
             </a:r>
           </a:p>
           <a:p>
@@ -11018,16 +11682,34 @@
               </a:spcAft>
             </a:pPr>
             <a:r>
-              <a:rPr sz="1400" b="0" i="0">
-                <a:solidFill>
-                  <a:srgbClr val="2B2B2B"/>
-                </a:solidFill>
-                <a:latin typeface="Calibri"/>
-              </a:rPr>
-              <a:t>–   En un post-it escribe: </a:t>
-            </a:r>
-            <a:r>
-              <a:rPr sz="1400" b="1" i="0">
+              <a:rPr sz="1300" b="0" i="0">
+                <a:solidFill>
+                  <a:srgbClr val="2B2B2B"/>
+                </a:solidFill>
+                <a:latin typeface="Calibri"/>
+              </a:rPr>
+              <a:t>–   </a:t>
+            </a:r>
+            <a:r>
+              <a:rPr sz="1300" b="1" i="0">
+                <a:solidFill>
+                  <a:srgbClr val="2B2B2B"/>
+                </a:solidFill>
+                <a:latin typeface="Calibri"/>
+              </a:rPr>
+              <a:t>Qué respondes (1 min):</a:t>
+            </a:r>
+            <a:r>
+              <a:rPr sz="1300" b="0" i="0">
+                <a:solidFill>
+                  <a:srgbClr val="2B2B2B"/>
+                </a:solidFill>
+                <a:latin typeface="Calibri"/>
+              </a:rPr>
+              <a:t> tu </a:t>
+            </a:r>
+            <a:r>
+              <a:rPr sz="1300" b="1" i="0">
                 <a:solidFill>
                   <a:srgbClr val="2B2B2B"/>
                 </a:solidFill>
@@ -11036,7 +11718,7 @@
               <a:t>nombre</a:t>
             </a:r>
             <a:r>
-              <a:rPr sz="1400" b="0" i="0">
+              <a:rPr sz="1300" b="0" i="0">
                 <a:solidFill>
                   <a:srgbClr val="2B2B2B"/>
                 </a:solidFill>
@@ -11045,40 +11727,40 @@
               <a:t> + </a:t>
             </a:r>
             <a:r>
-              <a:rPr sz="1400" b="1" i="0">
-                <a:solidFill>
-                  <a:srgbClr val="2B2B2B"/>
-                </a:solidFill>
-                <a:latin typeface="Calibri"/>
-              </a:rPr>
-              <a:t>expectativa del curso</a:t>
-            </a:r>
-            <a:r>
-              <a:rPr sz="1400" b="0" i="0">
-                <a:solidFill>
-                  <a:srgbClr val="2B2B2B"/>
-                </a:solidFill>
-                <a:latin typeface="Calibri"/>
-              </a:rPr>
-              <a:t> o </a:t>
-            </a:r>
-            <a:r>
-              <a:rPr sz="1400" b="1" i="0">
-                <a:solidFill>
-                  <a:srgbClr val="2B2B2B"/>
-                </a:solidFill>
-                <a:latin typeface="Calibri"/>
-              </a:rPr>
-              <a:t>tema de interés</a:t>
-            </a:r>
-            <a:r>
-              <a:rPr sz="1400" b="0" i="0">
-                <a:solidFill>
-                  <a:srgbClr val="2B2B2B"/>
-                </a:solidFill>
-                <a:latin typeface="Calibri"/>
-              </a:rPr>
-              <a:t> (1 frase).</a:t>
+              <a:rPr sz="1300" b="1" i="0">
+                <a:solidFill>
+                  <a:srgbClr val="2B2B2B"/>
+                </a:solidFill>
+                <a:latin typeface="Calibri"/>
+              </a:rPr>
+              <a:t>estado actual</a:t>
+            </a:r>
+            <a:r>
+              <a:rPr sz="1300" b="0" i="0">
+                <a:solidFill>
+                  <a:srgbClr val="2B2B2B"/>
+                </a:solidFill>
+                <a:latin typeface="Calibri"/>
+              </a:rPr>
+              <a:t> del proyecto (1 frase) + expectativa de TG2. Entras con tu correo </a:t>
+            </a:r>
+            <a:r>
+              <a:rPr sz="1300" b="1" i="0">
+                <a:solidFill>
+                  <a:srgbClr val="2B2B2B"/>
+                </a:solidFill>
+                <a:latin typeface="Calibri"/>
+              </a:rPr>
+              <a:t>@cun.edu.co</a:t>
+            </a:r>
+            <a:r>
+              <a:rPr sz="1300" b="0" i="0">
+                <a:solidFill>
+                  <a:srgbClr val="2B2B2B"/>
+                </a:solidFill>
+                <a:latin typeface="Calibri"/>
+              </a:rPr>
+              <a:t>: no hay que crear cuenta ni instalar nada.</a:t>
             </a:r>
           </a:p>
           <a:p>
@@ -11088,31 +11770,31 @@
               </a:spcAft>
             </a:pPr>
             <a:r>
-              <a:rPr sz="1400" b="0" i="0">
-                <a:solidFill>
-                  <a:srgbClr val="2B2B2B"/>
-                </a:solidFill>
-                <a:latin typeface="Calibri"/>
-              </a:rPr>
-              <a:t>–   Tablero oficial: </a:t>
-            </a:r>
-            <a:r>
-              <a:rPr sz="1400" b="1" i="0">
-                <a:solidFill>
-                  <a:srgbClr val="2B2B2B"/>
-                </a:solidFill>
-                <a:latin typeface="Calibri"/>
-              </a:rPr>
-              <a:t>Padlet</a:t>
-            </a:r>
-            <a:r>
-              <a:rPr sz="1400" b="0" i="0">
-                <a:solidFill>
-                  <a:srgbClr val="2B2B2B"/>
-                </a:solidFill>
-                <a:latin typeface="Calibri"/>
-              </a:rPr>
-              <a:t> (mismo enlace en los 5 cursos).</a:t>
+              <a:rPr sz="1300" b="0" i="0">
+                <a:solidFill>
+                  <a:srgbClr val="2B2B2B"/>
+                </a:solidFill>
+                <a:latin typeface="Calibri"/>
+              </a:rPr>
+              <a:t>–   </a:t>
+            </a:r>
+            <a:r>
+              <a:rPr sz="1300" b="1" i="0">
+                <a:solidFill>
+                  <a:srgbClr val="2B2B2B"/>
+                </a:solidFill>
+                <a:latin typeface="Calibri"/>
+              </a:rPr>
+              <a:t>Ahora, ~3 min.</a:t>
+            </a:r>
+            <a:r>
+              <a:rPr sz="1300" b="0" i="0">
+                <a:solidFill>
+                  <a:srgbClr val="2B2B2B"/>
+                </a:solidFill>
+                <a:latin typeface="Calibri"/>
+              </a:rPr>
+              <a:t> Somos 50: no alcanzamos a presentarnos uno por uno, así que el formulario nos ordena.</a:t>
             </a:r>
           </a:p>
           <a:p>
@@ -11122,13 +11804,171 @@
               </a:spcAft>
             </a:pPr>
             <a:r>
-              <a:rPr sz="1400" b="0" i="0">
-                <a:solidFill>
-                  <a:srgbClr val="2B2B2B"/>
-                </a:solidFill>
-                <a:latin typeface="Calibri"/>
-              </a:rPr>
-              <a:t>–   Ahora (~7 min). Leemos juntos 3–4 notas (sin juzgar).</a:t>
+              <a:rPr sz="1300" b="0" i="0">
+                <a:solidFill>
+                  <a:srgbClr val="2B2B2B"/>
+                </a:solidFill>
+                <a:latin typeface="Calibri"/>
+              </a:rPr>
+              <a:t>–   </a:t>
+            </a:r>
+            <a:r>
+              <a:rPr sz="1300" b="1" i="0">
+                <a:solidFill>
+                  <a:srgbClr val="2B2B2B"/>
+                </a:solidFill>
+                <a:latin typeface="Calibri"/>
+              </a:rPr>
+              <a:t>Con eso, hoy:</a:t>
+            </a:r>
+            <a:r>
+              <a:rPr sz="1300" b="0" i="0">
+                <a:solidFill>
+                  <a:srgbClr val="2B2B2B"/>
+                </a:solidFill>
+                <a:latin typeface="Calibri"/>
+              </a:rPr>
+              <a:t> el Docente lee en voz alta </a:t>
+            </a:r>
+            <a:r>
+              <a:rPr sz="1300" b="1" i="0">
+                <a:solidFill>
+                  <a:srgbClr val="2B2B2B"/>
+                </a:solidFill>
+                <a:latin typeface="Calibri"/>
+              </a:rPr>
+              <a:t>5 o 6 respuestas</a:t>
+            </a:r>
+            <a:r>
+              <a:rPr sz="1300" b="0" i="0">
+                <a:solidFill>
+                  <a:srgbClr val="2B2B2B"/>
+                </a:solidFill>
+                <a:latin typeface="Calibri"/>
+              </a:rPr>
+              <a:t> y proyecta el </a:t>
+            </a:r>
+            <a:r>
+              <a:rPr sz="1300" b="1" i="0">
+                <a:solidFill>
+                  <a:srgbClr val="2B2B2B"/>
+                </a:solidFill>
+                <a:latin typeface="Calibri"/>
+              </a:rPr>
+              <a:t>resumen</a:t>
+            </a:r>
+            <a:r>
+              <a:rPr sz="1300" b="0" i="0">
+                <a:solidFill>
+                  <a:srgbClr val="2B2B2B"/>
+                </a:solidFill>
+                <a:latin typeface="Calibri"/>
+              </a:rPr>
+              <a:t> del formulario — ahí quedan todas a la vista, no solo las leídas.</a:t>
+            </a:r>
+          </a:p>
+          <a:p>
+            <a:pPr>
+              <a:spcAft>
+                <a:spcPts val="1000"/>
+              </a:spcAft>
+            </a:pPr>
+            <a:r>
+              <a:rPr sz="1300" b="0" i="0">
+                <a:solidFill>
+                  <a:srgbClr val="2B2B2B"/>
+                </a:solidFill>
+                <a:latin typeface="Calibri"/>
+              </a:rPr>
+              <a:t>–   </a:t>
+            </a:r>
+            <a:r>
+              <a:rPr sz="1300" b="1" i="0">
+                <a:solidFill>
+                  <a:srgbClr val="2B2B2B"/>
+                </a:solidFill>
+                <a:latin typeface="Calibri"/>
+              </a:rPr>
+              <a:t>En vivo:</a:t>
+            </a:r>
+            <a:r>
+              <a:rPr sz="1300" b="0" i="0">
+                <a:solidFill>
+                  <a:srgbClr val="2B2B2B"/>
+                </a:solidFill>
+                <a:latin typeface="Calibri"/>
+              </a:rPr>
+              <a:t> las preguntas y las votaciones van por la </a:t>
+            </a:r>
+            <a:r>
+              <a:rPr sz="1300" b="1" i="0">
+                <a:solidFill>
+                  <a:srgbClr val="2B2B2B"/>
+                </a:solidFill>
+                <a:latin typeface="Calibri"/>
+              </a:rPr>
+              <a:t>encuesta</a:t>
+            </a:r>
+            <a:r>
+              <a:rPr sz="1300" b="0" i="0">
+                <a:solidFill>
+                  <a:srgbClr val="2B2B2B"/>
+                </a:solidFill>
+                <a:latin typeface="Calibri"/>
+              </a:rPr>
+              <a:t> y el </a:t>
+            </a:r>
+            <a:r>
+              <a:rPr sz="1300" b="1" i="0">
+                <a:solidFill>
+                  <a:srgbClr val="2B2B2B"/>
+                </a:solidFill>
+                <a:latin typeface="Calibri"/>
+              </a:rPr>
+              <a:t>Q&amp;A</a:t>
+            </a:r>
+            <a:r>
+              <a:rPr sz="1300" b="0" i="0">
+                <a:solidFill>
+                  <a:srgbClr val="2B2B2B"/>
+                </a:solidFill>
+                <a:latin typeface="Calibri"/>
+              </a:rPr>
+              <a:t> del propio Meet; no hay que abrir ninguna otra plataforma.</a:t>
+            </a:r>
+          </a:p>
+          <a:p>
+            <a:pPr>
+              <a:spcAft>
+                <a:spcPts val="1000"/>
+              </a:spcAft>
+            </a:pPr>
+            <a:r>
+              <a:rPr sz="1300" b="0" i="0">
+                <a:solidFill>
+                  <a:srgbClr val="2B2B2B"/>
+                </a:solidFill>
+                <a:latin typeface="Calibri"/>
+              </a:rPr>
+              <a:t>–   </a:t>
+            </a:r>
+            <a:r>
+              <a:rPr sz="1300" b="1" i="0">
+                <a:solidFill>
+                  <a:srgbClr val="2B2B2B"/>
+                </a:solidFill>
+                <a:latin typeface="Calibri"/>
+              </a:rPr>
+              <a:t>Después:</a:t>
+            </a:r>
+            <a:r>
+              <a:rPr sz="1300" b="0" i="0">
+                <a:solidFill>
+                  <a:srgbClr val="2B2B2B"/>
+                </a:solidFill>
+                <a:latin typeface="Calibri"/>
+              </a:rPr>
+              <a:t> las respuestas quedan en una hoja que el Docente usa todo el periodo (equipos, ejemplos y seguimiento).</a:t>
             </a:r>
           </a:p>
         </p:txBody>
@@ -11177,40 +12017,16 @@
           </a:p>
         </p:txBody>
       </p:sp>
-      <p:pic>
-        <p:nvPicPr>
-          <p:cNvPr id="7" name="Picture 6" descr="qr_presentacion_estudiantes.png"/>
-          <p:cNvPicPr>
-            <a:picLocks noChangeAspect="1"/>
-          </p:cNvPicPr>
+      <p:sp>
+        <p:nvSpPr>
+          <p:cNvPr id="7" name="TextBox 6"/>
+          <p:cNvSpPr txBox="1"/>
           <p:nvPr/>
-        </p:nvPicPr>
-        <p:blipFill>
-          <a:blip r:embed="rId2"/>
-          <a:stretch>
-            <a:fillRect/>
-          </a:stretch>
-        </p:blipFill>
+        </p:nvSpPr>
         <p:spPr>
           <a:xfrm>
-            <a:off x="8442655" y="2103120"/>
-            <a:ext cx="3108960" cy="3108960"/>
-          </a:xfrm>
-          <a:prstGeom prst="rect">
-            <a:avLst/>
-          </a:prstGeom>
-        </p:spPr>
-      </p:pic>
-      <p:sp>
-        <p:nvSpPr>
-          <p:cNvPr id="8" name="TextBox 7"/>
-          <p:cNvSpPr txBox="1"/>
-          <p:nvPr/>
-        </p:nvSpPr>
-        <p:spPr>
-          <a:xfrm>
-            <a:off x="8332927" y="5230367"/>
-            <a:ext cx="3328415" cy="256032"/>
+            <a:off x="8579815" y="2926079"/>
+            <a:ext cx="2834640" cy="1463040"/>
           </a:xfrm>
           <a:prstGeom prst="rect">
             <a:avLst/>
@@ -11218,34 +12034,50 @@
           <a:noFill/>
         </p:spPr>
         <p:txBody>
-          <a:bodyPr wrap="square" anchor="t" lIns="0" rIns="0" tIns="0" bIns="0">
+          <a:bodyPr wrap="square" anchor="ctr" lIns="0" rIns="0" tIns="0" bIns="0">
             <a:spAutoFit/>
           </a:bodyPr>
           <a:lstStyle/>
           <a:p>
             <a:pPr algn="ctr"/>
             <a:r>
-              <a:rPr sz="1200" b="1" i="0">
+              <a:rPr sz="1800" b="1" i="0">
                 <a:solidFill>
                   <a:srgbClr val="0C2340"/>
                 </a:solidFill>
                 <a:latin typeface="Calibri"/>
               </a:rPr>
-              <a:t>Escanea o abre</a:t>
-            </a:r>
-          </a:p>
-        </p:txBody>
-      </p:sp>
-      <p:sp>
-        <p:nvSpPr>
-          <p:cNvPr id="9" name="TextBox 8"/>
+              <a:t>QR pendiente</a:t>
+            </a:r>
+          </a:p>
+          <a:p>
+            <a:pPr algn="ctr">
+              <a:spcBef>
+                <a:spcPts val="1000"/>
+              </a:spcBef>
+            </a:pPr>
+            <a:r>
+              <a:rPr sz="1200" b="0" i="0">
+                <a:solidFill>
+                  <a:srgbClr val="2B2B2B"/>
+                </a:solidFill>
+                <a:latin typeface="Calibri"/>
+              </a:rPr>
+              <a:t>Se genera cuando el formulario tenga enlace real.</a:t>
+            </a:r>
+          </a:p>
+        </p:txBody>
+      </p:sp>
+      <p:sp>
+        <p:nvSpPr>
+          <p:cNvPr id="8" name="TextBox 7"/>
           <p:cNvSpPr txBox="1"/>
           <p:nvPr/>
         </p:nvSpPr>
         <p:spPr>
           <a:xfrm>
-            <a:off x="8332927" y="5468112"/>
-            <a:ext cx="3328415" cy="411480"/>
+            <a:off x="8332927" y="5230367"/>
+            <a:ext cx="3328415" cy="640080"/>
           </a:xfrm>
           <a:prstGeom prst="rect">
             <a:avLst/>
@@ -11266,14 +12098,14 @@
                 </a:solidFill>
                 <a:latin typeface="Calibri"/>
               </a:rPr>
-              <a:t>https://padlet.com/andres_dfx/cun-wruz81hmf9k06gd7</a:t>
-            </a:r>
-          </a:p>
-        </p:txBody>
-      </p:sp>
-      <p:sp>
-        <p:nvSpPr>
-          <p:cNvPr id="10" name="TextBox 9"/>
+              <a:t>[URL Formulario Preséntate — pendiente · TRABAJO DE GRADO 2]</a:t>
+            </a:r>
+          </a:p>
+        </p:txBody>
+      </p:sp>
+      <p:sp>
+        <p:nvSpPr>
+          <p:cNvPr id="9" name="TextBox 8"/>
           <p:cNvSpPr txBox="1"/>
           <p:nvPr/>
         </p:nvSpPr>
@@ -12699,7 +13531,7 @@
                 </a:solidFill>
                 <a:latin typeface="Calibri"/>
               </a:rPr>
-              <a:t>Cómo trabajamos: TG2 es un taller de escritura, no una clase magistral</a:t>
+              <a:t>Preséntate: el formulario del curso (2 minutos)</a:t>
             </a:r>
           </a:p>
         </p:txBody>
@@ -12732,49 +13564,31 @@
               </a:spcAft>
             </a:pPr>
             <a:r>
-              <a:rPr sz="1600" b="0" i="0">
-                <a:solidFill>
-                  <a:srgbClr val="2B2B2B"/>
-                </a:solidFill>
-                <a:latin typeface="Calibri"/>
-              </a:rPr>
-              <a:t>–   </a:t>
-            </a:r>
-            <a:r>
-              <a:rPr sz="1600" b="1" i="0">
-                <a:solidFill>
-                  <a:srgbClr val="2B2B2B"/>
-                </a:solidFill>
-                <a:latin typeface="Calibri"/>
-              </a:rPr>
-              <a:t>Una hora sincrónica por semana</a:t>
-            </a:r>
-            <a:r>
-              <a:rPr sz="1600" b="0" i="0">
-                <a:solidFill>
-                  <a:srgbClr val="2B2B2B"/>
-                </a:solidFill>
-                <a:latin typeface="Calibri"/>
-              </a:rPr>
-              <a:t> y once encuentros. Usted </a:t>
-            </a:r>
-            <a:r>
-              <a:rPr sz="1600" b="1" i="0">
-                <a:solidFill>
-                  <a:srgbClr val="2B2B2B"/>
-                </a:solidFill>
-                <a:latin typeface="Calibri"/>
-              </a:rPr>
-              <a:t>no empieza de cero</a:t>
-            </a:r>
-            <a:r>
-              <a:rPr sz="1600" b="0" i="0">
-                <a:solidFill>
-                  <a:srgbClr val="2B2B2B"/>
-                </a:solidFill>
-                <a:latin typeface="Calibri"/>
-              </a:rPr>
-              <a:t>: trae un proyecto y lo lleva a un avance consolidado.</a:t>
+              <a:rPr sz="1500" b="0" i="0">
+                <a:solidFill>
+                  <a:srgbClr val="2B2B2B"/>
+                </a:solidFill>
+                <a:latin typeface="Calibri"/>
+              </a:rPr>
+              <a:t>–   Somos </a:t>
+            </a:r>
+            <a:r>
+              <a:rPr sz="1500" b="1" i="0">
+                <a:solidFill>
+                  <a:srgbClr val="2B2B2B"/>
+                </a:solidFill>
+                <a:latin typeface="Calibri"/>
+              </a:rPr>
+              <a:t>50 matriculados</a:t>
+            </a:r>
+            <a:r>
+              <a:rPr sz="1500" b="0" i="0">
+                <a:solidFill>
+                  <a:srgbClr val="2B2B2B"/>
+                </a:solidFill>
+                <a:latin typeface="Calibri"/>
+              </a:rPr>
+              <a:t> en una hora semanal: un muro de notas no se alcanza a leer y termina siendo ruido.</a:t>
             </a:r>
           </a:p>
           <a:p>
@@ -12784,49 +13598,99 @@
               </a:spcAft>
             </a:pPr>
             <a:r>
-              <a:rPr sz="1600" b="0" i="0">
-                <a:solidFill>
-                  <a:srgbClr val="2B2B2B"/>
-                </a:solidFill>
-                <a:latin typeface="Calibri"/>
-              </a:rPr>
-              <a:t>–   </a:t>
-            </a:r>
-            <a:r>
-              <a:rPr sz="1600" b="1" i="0">
-                <a:solidFill>
-                  <a:srgbClr val="2B2B2B"/>
-                </a:solidFill>
-                <a:latin typeface="Calibri"/>
-              </a:rPr>
-              <a:t>Antes de cada encuentro:</a:t>
-            </a:r>
-            <a:r>
-              <a:rPr sz="1600" b="0" i="0">
-                <a:solidFill>
-                  <a:srgbClr val="2B2B2B"/>
-                </a:solidFill>
-                <a:latin typeface="Calibri"/>
-              </a:rPr>
-              <a:t> revisa en CDigital lo que el Docente deja y </a:t>
-            </a:r>
-            <a:r>
-              <a:rPr sz="1600" b="1" i="0">
-                <a:solidFill>
-                  <a:srgbClr val="2B2B2B"/>
-                </a:solidFill>
-                <a:latin typeface="Calibri"/>
-              </a:rPr>
-              <a:t>escribe algo</a:t>
-            </a:r>
-            <a:r>
-              <a:rPr sz="1600" b="0" i="0">
-                <a:solidFill>
-                  <a:srgbClr val="2B2B2B"/>
-                </a:solidFill>
-                <a:latin typeface="Calibri"/>
-              </a:rPr>
-              <a:t>, aunque sea imperfecto.</a:t>
+              <a:rPr sz="1500" b="0" i="0">
+                <a:solidFill>
+                  <a:srgbClr val="2B2B2B"/>
+                </a:solidFill>
+                <a:latin typeface="Calibri"/>
+              </a:rPr>
+              <a:t>–   El rompehielos es un </a:t>
+            </a:r>
+            <a:r>
+              <a:rPr sz="1500" b="1" i="0">
+                <a:solidFill>
+                  <a:srgbClr val="2B2B2B"/>
+                </a:solidFill>
+                <a:latin typeface="Calibri"/>
+              </a:rPr>
+              <a:t>formulario de Google</a:t>
+            </a:r>
+            <a:r>
+              <a:rPr sz="1500" b="0" i="0">
+                <a:solidFill>
+                  <a:srgbClr val="2B2B2B"/>
+                </a:solidFill>
+                <a:latin typeface="Calibri"/>
+              </a:rPr>
+              <a:t>: el Docente lo pega en el chat del Meet y queda en el LEEME de `Clases/`.</a:t>
+            </a:r>
+          </a:p>
+          <a:p>
+            <a:pPr lvl="1">
+              <a:spcAft>
+                <a:spcPts val="600"/>
+              </a:spcAft>
+            </a:pPr>
+            <a:r>
+              <a:rPr sz="1400" b="0" i="0">
+                <a:solidFill>
+                  <a:srgbClr val="2B2B2B"/>
+                </a:solidFill>
+                <a:latin typeface="Calibri"/>
+              </a:rPr>
+              <a:t>●   </a:t>
+            </a:r>
+            <a:r>
+              <a:rPr sz="1400" b="1" i="0">
+                <a:solidFill>
+                  <a:srgbClr val="2B2B2B"/>
+                </a:solidFill>
+                <a:latin typeface="Calibri"/>
+              </a:rPr>
+              <a:t>Enlace:</a:t>
+            </a:r>
+            <a:r>
+              <a:rPr sz="1400" b="0" i="0">
+                <a:solidFill>
+                  <a:srgbClr val="2B2B2B"/>
+                </a:solidFill>
+                <a:latin typeface="Calibri"/>
+              </a:rPr>
+              <a:t> [URL Formulario «Preséntate» — pendiente]</a:t>
+            </a:r>
+          </a:p>
+          <a:p>
+            <a:pPr lvl="1">
+              <a:spcAft>
+                <a:spcPts val="600"/>
+              </a:spcAft>
+            </a:pPr>
+            <a:r>
+              <a:rPr sz="1400" b="0" i="0">
+                <a:solidFill>
+                  <a:srgbClr val="2B2B2B"/>
+                </a:solidFill>
+                <a:latin typeface="Calibri"/>
+              </a:rPr>
+              <a:t>●   Se entra con su correo </a:t>
+            </a:r>
+            <a:r>
+              <a:rPr sz="1400" b="1" i="0">
+                <a:solidFill>
+                  <a:srgbClr val="2B2B2B"/>
+                </a:solidFill>
+                <a:latin typeface="Calibri"/>
+              </a:rPr>
+              <a:t>@cun.edu.co</a:t>
+            </a:r>
+            <a:r>
+              <a:rPr sz="1400" b="0" i="0">
+                <a:solidFill>
+                  <a:srgbClr val="2B2B2B"/>
+                </a:solidFill>
+                <a:latin typeface="Calibri"/>
+              </a:rPr>
+              <a:t>: no hay que crear cuenta ni instalar nada.</a:t>
             </a:r>
           </a:p>
           <a:p>
@@ -12836,7 +13700,7 @@
               </a:spcAft>
             </a:pPr>
             <a:r>
-              <a:rPr sz="1600" b="0" i="0">
+              <a:rPr sz="1500" b="0" i="0">
                 <a:solidFill>
                   <a:srgbClr val="2B2B2B"/>
                 </a:solidFill>
@@ -12845,40 +13709,56 @@
               <a:t>–   </a:t>
             </a:r>
             <a:r>
-              <a:rPr sz="1600" b="1" i="0">
-                <a:solidFill>
-                  <a:srgbClr val="2B2B2B"/>
-                </a:solidFill>
-                <a:latin typeface="Calibri"/>
-              </a:rPr>
-              <a:t>Durante el encuentro:</a:t>
-            </a:r>
-            <a:r>
-              <a:rPr sz="1600" b="0" i="0">
-                <a:solidFill>
-                  <a:srgbClr val="2B2B2B"/>
-                </a:solidFill>
-                <a:latin typeface="Calibri"/>
-              </a:rPr>
-              <a:t> 15 minutos de criterio y ejemplo, y el resto </a:t>
-            </a:r>
-            <a:r>
-              <a:rPr sz="1600" b="1" i="0">
-                <a:solidFill>
-                  <a:srgbClr val="2B2B2B"/>
-                </a:solidFill>
-                <a:latin typeface="Calibri"/>
-              </a:rPr>
-              <a:t>escribiendo o corrigiendo su propio documento</a:t>
-            </a:r>
-            <a:r>
-              <a:rPr sz="1600" b="0" i="0">
-                <a:solidFill>
-                  <a:srgbClr val="2B2B2B"/>
-                </a:solidFill>
-                <a:latin typeface="Calibri"/>
-              </a:rPr>
-              <a:t> con el Docente al lado.</a:t>
+              <a:rPr sz="1500" b="1" i="0">
+                <a:solidFill>
+                  <a:srgbClr val="2B2B2B"/>
+                </a:solidFill>
+                <a:latin typeface="Calibri"/>
+              </a:rPr>
+              <a:t>Qué responde</a:t>
+            </a:r>
+            <a:r>
+              <a:rPr sz="1500" b="0" i="0">
+                <a:solidFill>
+                  <a:srgbClr val="2B2B2B"/>
+                </a:solidFill>
+                <a:latin typeface="Calibri"/>
+              </a:rPr>
+              <a:t> (2–3 minutos, una sola vez): nombre, </a:t>
+            </a:r>
+            <a:r>
+              <a:rPr sz="1500" b="1" i="0">
+                <a:solidFill>
+                  <a:srgbClr val="2B2B2B"/>
+                </a:solidFill>
+                <a:latin typeface="Calibri"/>
+              </a:rPr>
+              <a:t>estado actual de su proyecto</a:t>
+            </a:r>
+            <a:r>
+              <a:rPr sz="1500" b="0" i="0">
+                <a:solidFill>
+                  <a:srgbClr val="2B2B2B"/>
+                </a:solidFill>
+                <a:latin typeface="Calibri"/>
+              </a:rPr>
+              <a:t> en una frase y qué espera de TG2.</a:t>
+            </a:r>
+          </a:p>
+          <a:p>
+            <a:pPr lvl="1">
+              <a:spcAft>
+                <a:spcPts val="600"/>
+              </a:spcAft>
+            </a:pPr>
+            <a:r>
+              <a:rPr sz="1400" b="0" i="0">
+                <a:solidFill>
+                  <a:srgbClr val="2B2B2B"/>
+                </a:solidFill>
+                <a:latin typeface="Calibri"/>
+              </a:rPr>
+              <a:t>●   Diga de qué tema viene el proyecto: eso permite juntar en el taller a quienes están escribiendo sobre cosas parecidas.</a:t>
             </a:r>
           </a:p>
           <a:p>
@@ -12888,7 +13768,7 @@
               </a:spcAft>
             </a:pPr>
             <a:r>
-              <a:rPr sz="1600" b="0" i="0">
+              <a:rPr sz="1500" b="0" i="0">
                 <a:solidFill>
                   <a:srgbClr val="2B2B2B"/>
                 </a:solidFill>
@@ -12897,22 +13777,22 @@
               <a:t>–   </a:t>
             </a:r>
             <a:r>
-              <a:rPr sz="1600" b="1" i="0">
-                <a:solidFill>
-                  <a:srgbClr val="2B2B2B"/>
-                </a:solidFill>
-                <a:latin typeface="Calibri"/>
-              </a:rPr>
-              <a:t>Después:</a:t>
-            </a:r>
-            <a:r>
-              <a:rPr sz="1600" b="0" i="0">
-                <a:solidFill>
-                  <a:srgbClr val="2B2B2B"/>
-                </a:solidFill>
-                <a:latin typeface="Calibri"/>
-              </a:rPr>
-              <a:t> termina la sección y la sube a CDigital antes de la siguiente clase.</a:t>
+              <a:rPr sz="1500" b="1" i="0">
+                <a:solidFill>
+                  <a:srgbClr val="2B2B2B"/>
+                </a:solidFill>
+                <a:latin typeface="Calibri"/>
+              </a:rPr>
+              <a:t>Cuándo:</a:t>
+            </a:r>
+            <a:r>
+              <a:rPr sz="1500" b="0" i="0">
+                <a:solidFill>
+                  <a:srgbClr val="2B2B2B"/>
+                </a:solidFill>
+                <a:latin typeface="Calibri"/>
+              </a:rPr>
+              <a:t> en los primeros minutos del encuentro. Luego se proyecta el resumen y se leen en voz alta cinco o seis respuestas.</a:t>
             </a:r>
           </a:p>
           <a:p>
@@ -12922,7 +13802,7 @@
               </a:spcAft>
             </a:pPr>
             <a:r>
-              <a:rPr sz="1600" b="0" i="0">
+              <a:rPr sz="1500" b="0" i="0">
                 <a:solidFill>
                   <a:srgbClr val="2B2B2B"/>
                 </a:solidFill>
@@ -12931,19 +13811,28 @@
               <a:t>–   </a:t>
             </a:r>
             <a:r>
-              <a:rPr sz="1600" b="1" i="0">
-                <a:solidFill>
-                  <a:srgbClr val="2B2B2B"/>
-                </a:solidFill>
-                <a:latin typeface="Calibri"/>
-              </a:rPr>
-              <a:t>Qué traer siempre:</a:t>
-            </a:r>
-          </a:p>
-          <a:p>
-            <a:pPr lvl="1">
+              <a:rPr sz="1500" b="1" i="0">
+                <a:solidFill>
+                  <a:srgbClr val="2B2B2B"/>
+                </a:solidFill>
+                <a:latin typeface="Calibri"/>
+              </a:rPr>
+              <a:t>En vivo, la participación va por el Meet:</a:t>
+            </a:r>
+            <a:r>
+              <a:rPr sz="1500" b="0" i="0">
+                <a:solidFill>
+                  <a:srgbClr val="2B2B2B"/>
+                </a:solidFill>
+                <a:latin typeface="Calibri"/>
+              </a:rPr>
+              <a:t> encuestas y Q&amp;A de la sala, que aguantan al grupo completo.</a:t>
+            </a:r>
+          </a:p>
+          <a:p>
+            <a:pPr>
               <a:spcAft>
-                <a:spcPts val="600"/>
+                <a:spcPts val="1000"/>
               </a:spcAft>
             </a:pPr>
             <a:r>
@@ -12953,57 +13842,7 @@
                 </a:solidFill>
                 <a:latin typeface="Calibri"/>
               </a:rPr>
-              <a:t>●   Su </a:t>
-            </a:r>
-            <a:r>
-              <a:rPr sz="1500" b="1" i="0">
-                <a:solidFill>
-                  <a:srgbClr val="2B2B2B"/>
-                </a:solidFill>
-                <a:latin typeface="Calibri"/>
-              </a:rPr>
-              <a:t>documento de trabajo de grado abierto</a:t>
-            </a:r>
-            <a:r>
-              <a:rPr sz="1500" b="0" i="0">
-                <a:solidFill>
-                  <a:srgbClr val="2B2B2B"/>
-                </a:solidFill>
-                <a:latin typeface="Calibri"/>
-              </a:rPr>
-              <a:t>, en la versión más reciente.</a:t>
-            </a:r>
-          </a:p>
-          <a:p>
-            <a:pPr lvl="1">
-              <a:spcAft>
-                <a:spcPts val="600"/>
-              </a:spcAft>
-            </a:pPr>
-            <a:r>
-              <a:rPr sz="1500" b="0" i="0">
-                <a:solidFill>
-                  <a:srgbClr val="2B2B2B"/>
-                </a:solidFill>
-                <a:latin typeface="Calibri"/>
-              </a:rPr>
-              <a:t>●   La sección de la semana anterior ya escrita (aunque esté fea).</a:t>
-            </a:r>
-          </a:p>
-          <a:p>
-            <a:pPr lvl="1">
-              <a:spcAft>
-                <a:spcPts val="600"/>
-              </a:spcAft>
-            </a:pPr>
-            <a:r>
-              <a:rPr sz="1500" b="0" i="0">
-                <a:solidFill>
-                  <a:srgbClr val="2B2B2B"/>
-                </a:solidFill>
-                <a:latin typeface="Calibri"/>
-              </a:rPr>
-              <a:t>●   Una duda concreta: “este párrafo no me cuadra”, no “no sé por dónde empezar”.</a:t>
+              <a:t>–   Queda abierto hasta la Sesión 02 para quien no alcance hoy.</a:t>
             </a:r>
           </a:p>
         </p:txBody>
@@ -13072,25 +13911,7 @@
                 </a:solidFill>
                 <a:latin typeface="Calibri"/>
               </a:rPr>
-              <a:t>Principio del curso: </a:t>
-            </a:r>
-            <a:r>
-              <a:rPr sz="1200" b="1" i="1">
-                <a:solidFill>
-                  <a:srgbClr val="2B2B2B"/>
-                </a:solidFill>
-                <a:latin typeface="Calibri"/>
-              </a:rPr>
-              <a:t>solo cuenta lo escrito</a:t>
-            </a:r>
-            <a:r>
-              <a:rPr sz="1200" b="0" i="1">
-                <a:solidFill>
-                  <a:srgbClr val="2B2B2B"/>
-                </a:solidFill>
-                <a:latin typeface="Calibri"/>
-              </a:rPr>
-              <a:t>. “Lo tengo en la cabeza” no es un avance, es una intención.</a:t>
+              <a:t>El Docente conserva esa hoja todo el periodo: le dice en qué punto llega cada quien y a quién hay que apurar en la primera mitad del curso.</a:t>
             </a:r>
           </a:p>
         </p:txBody>
@@ -13195,6 +14016,502 @@
                 </a:solidFill>
                 <a:latin typeface="Calibri"/>
               </a:rPr>
+              <a:t>Cómo trabajamos: TG2 es un taller de escritura, no una clase magistral</a:t>
+            </a:r>
+          </a:p>
+        </p:txBody>
+      </p:sp>
+      <p:sp>
+        <p:nvSpPr>
+          <p:cNvPr id="4" name="TextBox 3"/>
+          <p:cNvSpPr txBox="1"/>
+          <p:nvPr/>
+        </p:nvSpPr>
+        <p:spPr>
+          <a:xfrm>
+            <a:off x="640080" y="1691639"/>
+            <a:ext cx="10911535" cy="4617720"/>
+          </a:xfrm>
+          <a:prstGeom prst="rect">
+            <a:avLst/>
+          </a:prstGeom>
+          <a:noFill/>
+        </p:spPr>
+        <p:txBody>
+          <a:bodyPr wrap="square" anchor="t" lIns="0" rIns="0" tIns="0" bIns="0">
+            <a:spAutoFit/>
+          </a:bodyPr>
+          <a:lstStyle/>
+          <a:p>
+            <a:pPr>
+              <a:spcAft>
+                <a:spcPts val="1000"/>
+              </a:spcAft>
+            </a:pPr>
+            <a:r>
+              <a:rPr sz="1600" b="0" i="0">
+                <a:solidFill>
+                  <a:srgbClr val="2B2B2B"/>
+                </a:solidFill>
+                <a:latin typeface="Calibri"/>
+              </a:rPr>
+              <a:t>–   </a:t>
+            </a:r>
+            <a:r>
+              <a:rPr sz="1600" b="1" i="0">
+                <a:solidFill>
+                  <a:srgbClr val="2B2B2B"/>
+                </a:solidFill>
+                <a:latin typeface="Calibri"/>
+              </a:rPr>
+              <a:t>Una hora sincrónica por semana</a:t>
+            </a:r>
+            <a:r>
+              <a:rPr sz="1600" b="0" i="0">
+                <a:solidFill>
+                  <a:srgbClr val="2B2B2B"/>
+                </a:solidFill>
+                <a:latin typeface="Calibri"/>
+              </a:rPr>
+              <a:t> y once encuentros. Usted </a:t>
+            </a:r>
+            <a:r>
+              <a:rPr sz="1600" b="1" i="0">
+                <a:solidFill>
+                  <a:srgbClr val="2B2B2B"/>
+                </a:solidFill>
+                <a:latin typeface="Calibri"/>
+              </a:rPr>
+              <a:t>no empieza de cero</a:t>
+            </a:r>
+            <a:r>
+              <a:rPr sz="1600" b="0" i="0">
+                <a:solidFill>
+                  <a:srgbClr val="2B2B2B"/>
+                </a:solidFill>
+                <a:latin typeface="Calibri"/>
+              </a:rPr>
+              <a:t>: trae un proyecto y lo lleva a un avance consolidado.</a:t>
+            </a:r>
+          </a:p>
+          <a:p>
+            <a:pPr>
+              <a:spcAft>
+                <a:spcPts val="1000"/>
+              </a:spcAft>
+            </a:pPr>
+            <a:r>
+              <a:rPr sz="1600" b="0" i="0">
+                <a:solidFill>
+                  <a:srgbClr val="2B2B2B"/>
+                </a:solidFill>
+                <a:latin typeface="Calibri"/>
+              </a:rPr>
+              <a:t>–   </a:t>
+            </a:r>
+            <a:r>
+              <a:rPr sz="1600" b="1" i="0">
+                <a:solidFill>
+                  <a:srgbClr val="2B2B2B"/>
+                </a:solidFill>
+                <a:latin typeface="Calibri"/>
+              </a:rPr>
+              <a:t>Antes de cada encuentro:</a:t>
+            </a:r>
+            <a:r>
+              <a:rPr sz="1600" b="0" i="0">
+                <a:solidFill>
+                  <a:srgbClr val="2B2B2B"/>
+                </a:solidFill>
+                <a:latin typeface="Calibri"/>
+              </a:rPr>
+              <a:t> revisa en CDigital lo que el Docente deja y </a:t>
+            </a:r>
+            <a:r>
+              <a:rPr sz="1600" b="1" i="0">
+                <a:solidFill>
+                  <a:srgbClr val="2B2B2B"/>
+                </a:solidFill>
+                <a:latin typeface="Calibri"/>
+              </a:rPr>
+              <a:t>escribe algo</a:t>
+            </a:r>
+            <a:r>
+              <a:rPr sz="1600" b="0" i="0">
+                <a:solidFill>
+                  <a:srgbClr val="2B2B2B"/>
+                </a:solidFill>
+                <a:latin typeface="Calibri"/>
+              </a:rPr>
+              <a:t>, aunque sea imperfecto.</a:t>
+            </a:r>
+          </a:p>
+          <a:p>
+            <a:pPr>
+              <a:spcAft>
+                <a:spcPts val="1000"/>
+              </a:spcAft>
+            </a:pPr>
+            <a:r>
+              <a:rPr sz="1600" b="0" i="0">
+                <a:solidFill>
+                  <a:srgbClr val="2B2B2B"/>
+                </a:solidFill>
+                <a:latin typeface="Calibri"/>
+              </a:rPr>
+              <a:t>–   </a:t>
+            </a:r>
+            <a:r>
+              <a:rPr sz="1600" b="1" i="0">
+                <a:solidFill>
+                  <a:srgbClr val="2B2B2B"/>
+                </a:solidFill>
+                <a:latin typeface="Calibri"/>
+              </a:rPr>
+              <a:t>Durante el encuentro:</a:t>
+            </a:r>
+            <a:r>
+              <a:rPr sz="1600" b="0" i="0">
+                <a:solidFill>
+                  <a:srgbClr val="2B2B2B"/>
+                </a:solidFill>
+                <a:latin typeface="Calibri"/>
+              </a:rPr>
+              <a:t> 15 minutos de criterio y ejemplo, y el resto </a:t>
+            </a:r>
+            <a:r>
+              <a:rPr sz="1600" b="1" i="0">
+                <a:solidFill>
+                  <a:srgbClr val="2B2B2B"/>
+                </a:solidFill>
+                <a:latin typeface="Calibri"/>
+              </a:rPr>
+              <a:t>escribiendo o corrigiendo su propio documento</a:t>
+            </a:r>
+            <a:r>
+              <a:rPr sz="1600" b="0" i="0">
+                <a:solidFill>
+                  <a:srgbClr val="2B2B2B"/>
+                </a:solidFill>
+                <a:latin typeface="Calibri"/>
+              </a:rPr>
+              <a:t> con el Docente al lado.</a:t>
+            </a:r>
+          </a:p>
+          <a:p>
+            <a:pPr>
+              <a:spcAft>
+                <a:spcPts val="1000"/>
+              </a:spcAft>
+            </a:pPr>
+            <a:r>
+              <a:rPr sz="1600" b="0" i="0">
+                <a:solidFill>
+                  <a:srgbClr val="2B2B2B"/>
+                </a:solidFill>
+                <a:latin typeface="Calibri"/>
+              </a:rPr>
+              <a:t>–   </a:t>
+            </a:r>
+            <a:r>
+              <a:rPr sz="1600" b="1" i="0">
+                <a:solidFill>
+                  <a:srgbClr val="2B2B2B"/>
+                </a:solidFill>
+                <a:latin typeface="Calibri"/>
+              </a:rPr>
+              <a:t>Después:</a:t>
+            </a:r>
+            <a:r>
+              <a:rPr sz="1600" b="0" i="0">
+                <a:solidFill>
+                  <a:srgbClr val="2B2B2B"/>
+                </a:solidFill>
+                <a:latin typeface="Calibri"/>
+              </a:rPr>
+              <a:t> termina la sección y la sube a CDigital antes de la siguiente clase.</a:t>
+            </a:r>
+          </a:p>
+          <a:p>
+            <a:pPr>
+              <a:spcAft>
+                <a:spcPts val="1000"/>
+              </a:spcAft>
+            </a:pPr>
+            <a:r>
+              <a:rPr sz="1600" b="0" i="0">
+                <a:solidFill>
+                  <a:srgbClr val="2B2B2B"/>
+                </a:solidFill>
+                <a:latin typeface="Calibri"/>
+              </a:rPr>
+              <a:t>–   </a:t>
+            </a:r>
+            <a:r>
+              <a:rPr sz="1600" b="1" i="0">
+                <a:solidFill>
+                  <a:srgbClr val="2B2B2B"/>
+                </a:solidFill>
+                <a:latin typeface="Calibri"/>
+              </a:rPr>
+              <a:t>Qué traer siempre:</a:t>
+            </a:r>
+          </a:p>
+          <a:p>
+            <a:pPr lvl="1">
+              <a:spcAft>
+                <a:spcPts val="600"/>
+              </a:spcAft>
+            </a:pPr>
+            <a:r>
+              <a:rPr sz="1500" b="0" i="0">
+                <a:solidFill>
+                  <a:srgbClr val="2B2B2B"/>
+                </a:solidFill>
+                <a:latin typeface="Calibri"/>
+              </a:rPr>
+              <a:t>●   Su </a:t>
+            </a:r>
+            <a:r>
+              <a:rPr sz="1500" b="1" i="0">
+                <a:solidFill>
+                  <a:srgbClr val="2B2B2B"/>
+                </a:solidFill>
+                <a:latin typeface="Calibri"/>
+              </a:rPr>
+              <a:t>documento de trabajo de grado abierto</a:t>
+            </a:r>
+            <a:r>
+              <a:rPr sz="1500" b="0" i="0">
+                <a:solidFill>
+                  <a:srgbClr val="2B2B2B"/>
+                </a:solidFill>
+                <a:latin typeface="Calibri"/>
+              </a:rPr>
+              <a:t>, en la versión más reciente.</a:t>
+            </a:r>
+          </a:p>
+          <a:p>
+            <a:pPr lvl="1">
+              <a:spcAft>
+                <a:spcPts val="600"/>
+              </a:spcAft>
+            </a:pPr>
+            <a:r>
+              <a:rPr sz="1500" b="0" i="0">
+                <a:solidFill>
+                  <a:srgbClr val="2B2B2B"/>
+                </a:solidFill>
+                <a:latin typeface="Calibri"/>
+              </a:rPr>
+              <a:t>●   La sección de la semana anterior ya escrita (aunque esté fea).</a:t>
+            </a:r>
+          </a:p>
+          <a:p>
+            <a:pPr lvl="1">
+              <a:spcAft>
+                <a:spcPts val="600"/>
+              </a:spcAft>
+            </a:pPr>
+            <a:r>
+              <a:rPr sz="1500" b="0" i="0">
+                <a:solidFill>
+                  <a:srgbClr val="2B2B2B"/>
+                </a:solidFill>
+                <a:latin typeface="Calibri"/>
+              </a:rPr>
+              <a:t>●   Una duda concreta: “este párrafo no me cuadra”, no “no sé por dónde empezar”.</a:t>
+            </a:r>
+          </a:p>
+        </p:txBody>
+      </p:sp>
+      <p:sp>
+        <p:nvSpPr>
+          <p:cNvPr id="5" name="TextBox 4"/>
+          <p:cNvSpPr txBox="1"/>
+          <p:nvPr/>
+        </p:nvSpPr>
+        <p:spPr>
+          <a:xfrm>
+            <a:off x="11094415" y="6446520"/>
+            <a:ext cx="548640" cy="274320"/>
+          </a:xfrm>
+          <a:prstGeom prst="rect">
+            <a:avLst/>
+          </a:prstGeom>
+          <a:noFill/>
+        </p:spPr>
+        <p:txBody>
+          <a:bodyPr wrap="square" anchor="t" lIns="0" rIns="0" tIns="0" bIns="0">
+            <a:spAutoFit/>
+          </a:bodyPr>
+          <a:lstStyle/>
+          <a:p>
+            <a:pPr algn="r"/>
+            <a:r>
+              <a:rPr sz="1000" b="1" i="0">
+                <a:solidFill>
+                  <a:srgbClr val="8F989D"/>
+                </a:solidFill>
+                <a:latin typeface="Calibri"/>
+              </a:rPr>
+              <a:t>7</a:t>
+            </a:r>
+          </a:p>
+        </p:txBody>
+      </p:sp>
+      <p:sp>
+        <p:nvSpPr>
+          <p:cNvPr id="6" name="TextBox 5"/>
+          <p:cNvSpPr txBox="1"/>
+          <p:nvPr/>
+        </p:nvSpPr>
+        <p:spPr>
+          <a:xfrm>
+            <a:off x="640080" y="5943600"/>
+            <a:ext cx="9997135" cy="457200"/>
+          </a:xfrm>
+          <a:prstGeom prst="rect">
+            <a:avLst/>
+          </a:prstGeom>
+          <a:noFill/>
+        </p:spPr>
+        <p:txBody>
+          <a:bodyPr wrap="square" anchor="t" lIns="0" rIns="0" tIns="0" bIns="0">
+            <a:spAutoFit/>
+          </a:bodyPr>
+          <a:lstStyle/>
+          <a:p>
+            <a:r>
+              <a:rPr sz="1200" b="0" i="1">
+                <a:solidFill>
+                  <a:srgbClr val="2B2B2B"/>
+                </a:solidFill>
+                <a:latin typeface="Calibri"/>
+              </a:rPr>
+              <a:t>Principio del curso: </a:t>
+            </a:r>
+            <a:r>
+              <a:rPr sz="1200" b="1" i="1">
+                <a:solidFill>
+                  <a:srgbClr val="2B2B2B"/>
+                </a:solidFill>
+                <a:latin typeface="Calibri"/>
+              </a:rPr>
+              <a:t>solo cuenta lo escrito</a:t>
+            </a:r>
+            <a:r>
+              <a:rPr sz="1200" b="0" i="1">
+                <a:solidFill>
+                  <a:srgbClr val="2B2B2B"/>
+                </a:solidFill>
+                <a:latin typeface="Calibri"/>
+              </a:rPr>
+              <a:t>. “Lo tengo en la cabeza” no es un avance, es una intención.</a:t>
+            </a:r>
+          </a:p>
+        </p:txBody>
+      </p:sp>
+    </p:spTree>
+  </p:cSld>
+  <p:clrMapOvr>
+    <a:masterClrMapping/>
+  </p:clrMapOvr>
+</p:sld>
+</file>
+
+<file path=ppt/slides/slide8.xml><?xml version="1.0" encoding="utf-8"?>
+<p:sld xmlns:a="http://schemas.openxmlformats.org/drawingml/2006/main" xmlns:p="http://schemas.openxmlformats.org/presentationml/2006/main" xmlns:r="http://schemas.openxmlformats.org/officeDocument/2006/relationships">
+  <p:cSld>
+    <p:bg>
+      <p:bgPr>
+        <a:solidFill>
+          <a:srgbClr val="FFFFFF"/>
+        </a:solidFill>
+        <a:effectLst/>
+      </p:bgPr>
+    </p:bg>
+    <p:spTree>
+      <p:nvGrpSpPr>
+        <p:cNvPr id="1" name=""/>
+        <p:cNvGrpSpPr/>
+        <p:nvPr/>
+      </p:nvGrpSpPr>
+      <p:grpSpPr/>
+      <p:sp>
+        <p:nvSpPr>
+          <p:cNvPr id="2" name="Rectangle 1"/>
+          <p:cNvSpPr/>
+          <p:nvPr/>
+        </p:nvSpPr>
+        <p:spPr>
+          <a:xfrm>
+            <a:off x="0" y="0"/>
+            <a:ext cx="12191695" cy="1188720"/>
+          </a:xfrm>
+          <a:prstGeom prst="rect">
+            <a:avLst/>
+          </a:prstGeom>
+          <a:solidFill>
+            <a:srgbClr val="0C2340"/>
+          </a:solidFill>
+          <a:ln>
+            <a:noFill/>
+          </a:ln>
+          <a:effectLst/>
+        </p:spPr>
+        <p:style>
+          <a:lnRef idx="1">
+            <a:schemeClr val="accent1"/>
+          </a:lnRef>
+          <a:fillRef idx="3">
+            <a:schemeClr val="accent1"/>
+          </a:fillRef>
+          <a:effectRef idx="2">
+            <a:schemeClr val="accent1"/>
+          </a:effectRef>
+          <a:fontRef idx="minor">
+            <a:schemeClr val="lt1"/>
+          </a:fontRef>
+        </p:style>
+        <p:txBody>
+          <a:bodyPr rtlCol="0" anchor="ctr"/>
+          <a:lstStyle/>
+          <a:p>
+            <a:pPr algn="ctr"/>
+          </a:p>
+        </p:txBody>
+      </p:sp>
+      <p:sp>
+        <p:nvSpPr>
+          <p:cNvPr id="3" name="TextBox 2"/>
+          <p:cNvSpPr txBox="1"/>
+          <p:nvPr/>
+        </p:nvSpPr>
+        <p:spPr>
+          <a:xfrm>
+            <a:off x="640080" y="0"/>
+            <a:ext cx="9082735" cy="1188720"/>
+          </a:xfrm>
+          <a:prstGeom prst="rect">
+            <a:avLst/>
+          </a:prstGeom>
+          <a:noFill/>
+        </p:spPr>
+        <p:txBody>
+          <a:bodyPr wrap="square" anchor="ctr" lIns="0" rIns="0" tIns="0" bIns="0">
+            <a:spAutoFit/>
+          </a:bodyPr>
+          <a:lstStyle/>
+          <a:p>
+            <a:pPr algn="ctr"/>
+            <a:r>
+              <a:rPr sz="2600" b="1" i="0">
+                <a:solidFill>
+                  <a:srgbClr val="FFFFFF"/>
+                </a:solidFill>
+                <a:latin typeface="Calibri"/>
+              </a:rPr>
               <a:t>Aviso honesto sobre este curso</a:t>
             </a:r>
           </a:p>
@@ -13593,7 +14910,7 @@
                 </a:solidFill>
                 <a:latin typeface="Calibri"/>
               </a:rPr>
-              <a:t>7</a:t>
+              <a:t>8</a:t>
             </a:r>
           </a:p>
         </p:txBody>
@@ -13606,7 +14923,7 @@
 </p:sld>
 </file>
 
-<file path=ppt/slides/slide8.xml><?xml version="1.0" encoding="utf-8"?>
+<file path=ppt/slides/slide9.xml><?xml version="1.0" encoding="utf-8"?>
 <p:sld xmlns:a="http://schemas.openxmlformats.org/drawingml/2006/main" xmlns:p="http://schemas.openxmlformats.org/presentationml/2006/main" xmlns:r="http://schemas.openxmlformats.org/officeDocument/2006/relationships">
   <p:cSld>
     <p:bg>
@@ -14310,626 +15627,17 @@
                 </a:solidFill>
                 <a:latin typeface="Calibri"/>
               </a:rPr>
-              <a:t>: no se cancela, la actividad queda publicada en CDigital.</a:t>
-            </a:r>
-          </a:p>
-        </p:txBody>
-      </p:sp>
-      <p:sp>
-        <p:nvSpPr>
-          <p:cNvPr id="6" name="TextBox 5"/>
-          <p:cNvSpPr txBox="1"/>
-          <p:nvPr/>
-        </p:nvSpPr>
-        <p:spPr>
-          <a:xfrm>
-            <a:off x="11094415" y="6446520"/>
-            <a:ext cx="548640" cy="274320"/>
-          </a:xfrm>
-          <a:prstGeom prst="rect">
-            <a:avLst/>
-          </a:prstGeom>
-          <a:noFill/>
-        </p:spPr>
-        <p:txBody>
-          <a:bodyPr wrap="square" anchor="t" lIns="0" rIns="0" tIns="0" bIns="0">
-            <a:spAutoFit/>
-          </a:bodyPr>
-          <a:lstStyle/>
-          <a:p>
-            <a:pPr algn="r"/>
-            <a:r>
-              <a:rPr sz="1000" b="1" i="0">
-                <a:solidFill>
-                  <a:srgbClr val="8F989D"/>
-                </a:solidFill>
-                <a:latin typeface="Calibri"/>
-              </a:rPr>
-              <a:t>8</a:t>
-            </a:r>
-          </a:p>
-        </p:txBody>
-      </p:sp>
-    </p:spTree>
-  </p:cSld>
-  <p:clrMapOvr>
-    <a:masterClrMapping/>
-  </p:clrMapOvr>
-</p:sld>
-</file>
-
-<file path=ppt/slides/slide9.xml><?xml version="1.0" encoding="utf-8"?>
-<p:sld xmlns:a="http://schemas.openxmlformats.org/drawingml/2006/main" xmlns:p="http://schemas.openxmlformats.org/presentationml/2006/main" xmlns:r="http://schemas.openxmlformats.org/officeDocument/2006/relationships">
-  <p:cSld>
-    <p:bg>
-      <p:bgPr>
-        <a:solidFill>
-          <a:srgbClr val="FFFFFF"/>
-        </a:solidFill>
-        <a:effectLst/>
-      </p:bgPr>
-    </p:bg>
-    <p:spTree>
-      <p:nvGrpSpPr>
-        <p:cNvPr id="1" name=""/>
-        <p:cNvGrpSpPr/>
-        <p:nvPr/>
-      </p:nvGrpSpPr>
-      <p:grpSpPr/>
-      <p:sp>
-        <p:nvSpPr>
-          <p:cNvPr id="2" name="Rectangle 1"/>
-          <p:cNvSpPr/>
-          <p:nvPr/>
-        </p:nvSpPr>
-        <p:spPr>
-          <a:xfrm>
-            <a:off x="0" y="0"/>
-            <a:ext cx="12191695" cy="1188720"/>
-          </a:xfrm>
-          <a:prstGeom prst="rect">
-            <a:avLst/>
-          </a:prstGeom>
-          <a:solidFill>
-            <a:srgbClr val="0C2340"/>
-          </a:solidFill>
-          <a:ln>
-            <a:noFill/>
-          </a:ln>
-          <a:effectLst/>
-        </p:spPr>
-        <p:style>
-          <a:lnRef idx="1">
-            <a:schemeClr val="accent1"/>
-          </a:lnRef>
-          <a:fillRef idx="3">
-            <a:schemeClr val="accent1"/>
-          </a:fillRef>
-          <a:effectRef idx="2">
-            <a:schemeClr val="accent1"/>
-          </a:effectRef>
-          <a:fontRef idx="minor">
-            <a:schemeClr val="lt1"/>
-          </a:fontRef>
-        </p:style>
-        <p:txBody>
-          <a:bodyPr rtlCol="0" anchor="ctr"/>
-          <a:lstStyle/>
-          <a:p>
-            <a:pPr algn="ctr"/>
-          </a:p>
-        </p:txBody>
-      </p:sp>
-      <p:sp>
-        <p:nvSpPr>
-          <p:cNvPr id="3" name="TextBox 2"/>
-          <p:cNvSpPr txBox="1"/>
-          <p:nvPr/>
-        </p:nvSpPr>
-        <p:spPr>
-          <a:xfrm>
-            <a:off x="640080" y="0"/>
-            <a:ext cx="9082735" cy="1188720"/>
-          </a:xfrm>
-          <a:prstGeom prst="rect">
-            <a:avLst/>
-          </a:prstGeom>
-          <a:noFill/>
-        </p:spPr>
-        <p:txBody>
-          <a:bodyPr wrap="square" anchor="ctr" lIns="0" rIns="0" tIns="0" bIns="0">
-            <a:spAutoFit/>
-          </a:bodyPr>
-          <a:lstStyle/>
-          <a:p>
-            <a:pPr algn="ctr"/>
-            <a:r>
-              <a:rPr sz="2600" b="1" i="0">
-                <a:solidFill>
-                  <a:srgbClr val="FFFFFF"/>
-                </a:solidFill>
-                <a:latin typeface="Calibri"/>
-              </a:rPr>
-              <a:t>Mapa del curso (2/2): del método al cierre del avance</a:t>
-            </a:r>
-          </a:p>
-        </p:txBody>
-      </p:sp>
-      <p:graphicFrame>
-        <p:nvGraphicFramePr>
-          <p:cNvPr id="4" name="Table 3"/>
-          <p:cNvGraphicFramePr>
-            <a:graphicFrameLocks noGrp="1"/>
-          </p:cNvGraphicFramePr>
-          <p:nvPr/>
-        </p:nvGraphicFramePr>
-        <p:xfrm>
-          <a:off x="640080" y="1691639"/>
-          <a:ext cx="10911533" cy="3017520"/>
-        </p:xfrm>
-        <a:graphic>
-          <a:graphicData uri="http://schemas.openxmlformats.org/drawingml/2006/table">
-            <a:tbl>
-              <a:tblPr>
-                <a:tableStyleId>{2D5ABB26-0587-4C30-8999-92F81FD0307C}</a:tableStyleId>
-              </a:tblPr>
-              <a:tblGrid>
-                <a:gridCol w="1008629"/>
-                <a:gridCol w="4951452"/>
-                <a:gridCol w="4951452"/>
-              </a:tblGrid>
-              <a:tr h="502920">
-                <a:tc>
-                  <a:txBody>
-                    <a:bodyPr/>
-                    <a:lstStyle/>
-                    <a:p>
-                      <a:pPr algn="l"/>
-                      <a:r>
-                        <a:rPr sz="1300" b="1" i="0">
-                          <a:solidFill>
-                            <a:srgbClr val="FFFFFF"/>
-                          </a:solidFill>
-                          <a:latin typeface="Calibri"/>
-                        </a:rPr>
-                        <a:t>Sesión</a:t>
-                      </a:r>
-                    </a:p>
-                  </a:txBody>
-                  <a:tcPr anchor="ctr" marL="109728" marR="91440" marT="36576" marB="36576">
-                    <a:solidFill>
-                      <a:srgbClr val="0C2340"/>
-                    </a:solidFill>
-                  </a:tcPr>
-                </a:tc>
-                <a:tc>
-                  <a:txBody>
-                    <a:bodyPr/>
-                    <a:lstStyle/>
-                    <a:p>
-                      <a:pPr algn="l"/>
-                      <a:r>
-                        <a:rPr sz="1300" b="1" i="0">
-                          <a:solidFill>
-                            <a:srgbClr val="FFFFFF"/>
-                          </a:solidFill>
-                          <a:latin typeface="Calibri"/>
-                        </a:rPr>
-                        <a:t>De qué se ocupa</a:t>
-                      </a:r>
-                    </a:p>
-                  </a:txBody>
-                  <a:tcPr anchor="ctr" marL="109728" marR="91440" marT="36576" marB="36576">
-                    <a:solidFill>
-                      <a:srgbClr val="0C2340"/>
-                    </a:solidFill>
-                  </a:tcPr>
-                </a:tc>
-                <a:tc>
-                  <a:txBody>
-                    <a:bodyPr/>
-                    <a:lstStyle/>
-                    <a:p>
-                      <a:pPr algn="l"/>
-                      <a:r>
-                        <a:rPr sz="1300" b="1" i="0">
-                          <a:solidFill>
-                            <a:srgbClr val="FFFFFF"/>
-                          </a:solidFill>
-                          <a:latin typeface="Calibri"/>
-                        </a:rPr>
-                        <a:t>Qué queda escrito</a:t>
-                      </a:r>
-                    </a:p>
-                  </a:txBody>
-                  <a:tcPr anchor="ctr" marL="109728" marR="91440" marT="36576" marB="36576">
-                    <a:solidFill>
-                      <a:srgbClr val="0C2340"/>
-                    </a:solidFill>
-                  </a:tcPr>
-                </a:tc>
-              </a:tr>
-              <a:tr h="502920">
-                <a:tc>
-                  <a:txBody>
-                    <a:bodyPr/>
-                    <a:lstStyle/>
-                    <a:p>
-                      <a:pPr algn="l"/>
-                      <a:r>
-                        <a:rPr sz="1200" b="1" i="0">
-                          <a:solidFill>
-                            <a:srgbClr val="2B2B2B"/>
-                          </a:solidFill>
-                          <a:latin typeface="Calibri"/>
-                        </a:rPr>
-                        <a:t>07</a:t>
-                      </a:r>
-                    </a:p>
-                  </a:txBody>
-                  <a:tcPr anchor="ctr" marL="109728" marR="91440" marT="36576" marB="36576">
-                    <a:solidFill>
-                      <a:srgbClr val="FFFFFF"/>
-                    </a:solidFill>
-                  </a:tcPr>
-                </a:tc>
-                <a:tc>
-                  <a:txBody>
-                    <a:bodyPr/>
-                    <a:lstStyle/>
-                    <a:p>
-                      <a:pPr algn="l"/>
-                      <a:r>
-                        <a:rPr sz="1200" b="0" i="0">
-                          <a:solidFill>
-                            <a:srgbClr val="2B2B2B"/>
-                          </a:solidFill>
-                          <a:latin typeface="Calibri"/>
-                        </a:rPr>
-                        <a:t>Diseño metodológico (propuesto)</a:t>
-                      </a:r>
-                    </a:p>
-                  </a:txBody>
-                  <a:tcPr anchor="ctr" marL="109728" marR="91440" marT="36576" marB="36576">
-                    <a:solidFill>
-                      <a:srgbClr val="FFFFFF"/>
-                    </a:solidFill>
-                  </a:tcPr>
-                </a:tc>
-                <a:tc>
-                  <a:txBody>
-                    <a:bodyPr/>
-                    <a:lstStyle/>
-                    <a:p>
-                      <a:pPr algn="l"/>
-                      <a:r>
-                        <a:rPr sz="1200" b="0" i="0">
-                          <a:solidFill>
-                            <a:srgbClr val="2B2B2B"/>
-                          </a:solidFill>
-                          <a:latin typeface="Calibri"/>
-                        </a:rPr>
-                        <a:t>Enfoque, tipo y alcance, escritos en futuro</a:t>
-                      </a:r>
-                    </a:p>
-                  </a:txBody>
-                  <a:tcPr anchor="ctr" marL="109728" marR="91440" marT="36576" marB="36576">
-                    <a:solidFill>
-                      <a:srgbClr val="FFFFFF"/>
-                    </a:solidFill>
-                  </a:tcPr>
-                </a:tc>
-              </a:tr>
-              <a:tr h="502920">
-                <a:tc>
-                  <a:txBody>
-                    <a:bodyPr/>
-                    <a:lstStyle/>
-                    <a:p>
-                      <a:pPr algn="l"/>
-                      <a:r>
-                        <a:rPr sz="1200" b="1" i="0">
-                          <a:solidFill>
-                            <a:srgbClr val="2B2B2B"/>
-                          </a:solidFill>
-                          <a:latin typeface="Calibri"/>
-                        </a:rPr>
-                        <a:t>08</a:t>
-                      </a:r>
-                    </a:p>
-                  </a:txBody>
-                  <a:tcPr anchor="ctr" marL="109728" marR="91440" marT="36576" marB="36576">
-                    <a:solidFill>
-                      <a:srgbClr val="F2F2F2"/>
-                    </a:solidFill>
-                  </a:tcPr>
-                </a:tc>
-                <a:tc>
-                  <a:txBody>
-                    <a:bodyPr/>
-                    <a:lstStyle/>
-                    <a:p>
-                      <a:pPr algn="l"/>
-                      <a:r>
-                        <a:rPr sz="1200" b="0" i="0">
-                          <a:solidFill>
-                            <a:srgbClr val="2B2B2B"/>
-                          </a:solidFill>
-                          <a:latin typeface="Calibri"/>
-                        </a:rPr>
-                        <a:t>Instrumentos y plan de análisis (propuestos)</a:t>
-                      </a:r>
-                    </a:p>
-                  </a:txBody>
-                  <a:tcPr anchor="ctr" marL="109728" marR="91440" marT="36576" marB="36576">
-                    <a:solidFill>
-                      <a:srgbClr val="F2F2F2"/>
-                    </a:solidFill>
-                  </a:tcPr>
-                </a:tc>
-                <a:tc>
-                  <a:txBody>
-                    <a:bodyPr/>
-                    <a:lstStyle/>
-                    <a:p>
-                      <a:pPr algn="l"/>
-                      <a:r>
-                        <a:rPr sz="1200" b="0" i="0">
-                          <a:solidFill>
-                            <a:srgbClr val="2B2B2B"/>
-                          </a:solidFill>
-                          <a:latin typeface="Calibri"/>
-                        </a:rPr>
-                        <a:t>Bosquejo de instrumento y plan de análisis</a:t>
-                      </a:r>
-                    </a:p>
-                  </a:txBody>
-                  <a:tcPr anchor="ctr" marL="109728" marR="91440" marT="36576" marB="36576">
-                    <a:solidFill>
-                      <a:srgbClr val="F2F2F2"/>
-                    </a:solidFill>
-                  </a:tcPr>
-                </a:tc>
-              </a:tr>
-              <a:tr h="502920">
-                <a:tc>
-                  <a:txBody>
-                    <a:bodyPr/>
-                    <a:lstStyle/>
-                    <a:p>
-                      <a:pPr algn="l"/>
-                      <a:r>
-                        <a:rPr sz="1200" b="1" i="0">
-                          <a:solidFill>
-                            <a:srgbClr val="2B2B2B"/>
-                          </a:solidFill>
-                          <a:latin typeface="Calibri"/>
-                        </a:rPr>
-                        <a:t>09</a:t>
-                      </a:r>
-                    </a:p>
-                  </a:txBody>
-                  <a:tcPr anchor="ctr" marL="109728" marR="91440" marT="36576" marB="36576">
-                    <a:solidFill>
-                      <a:srgbClr val="FFFFFF"/>
-                    </a:solidFill>
-                  </a:tcPr>
-                </a:tc>
-                <a:tc>
-                  <a:txBody>
-                    <a:bodyPr/>
-                    <a:lstStyle/>
-                    <a:p>
-                      <a:pPr algn="l"/>
-                      <a:r>
-                        <a:rPr sz="1200" b="0" i="0">
-                          <a:solidFill>
-                            <a:srgbClr val="2B2B2B"/>
-                          </a:solidFill>
-                          <a:latin typeface="Calibri"/>
-                        </a:rPr>
-                        <a:t>Integración del avance · correcciones</a:t>
-                      </a:r>
-                    </a:p>
-                  </a:txBody>
-                  <a:tcPr anchor="ctr" marL="109728" marR="91440" marT="36576" marB="36576">
-                    <a:solidFill>
-                      <a:srgbClr val="FFFFFF"/>
-                    </a:solidFill>
-                  </a:tcPr>
-                </a:tc>
-                <a:tc>
-                  <a:txBody>
-                    <a:bodyPr/>
-                    <a:lstStyle/>
-                    <a:p>
-                      <a:pPr algn="l"/>
-                      <a:r>
-                        <a:rPr sz="1200" b="0" i="0">
-                          <a:solidFill>
-                            <a:srgbClr val="2B2B2B"/>
-                          </a:solidFill>
-                          <a:latin typeface="Calibri"/>
-                        </a:rPr>
-                        <a:t>Documento consolidado y coherente</a:t>
-                      </a:r>
-                    </a:p>
-                  </a:txBody>
-                  <a:tcPr anchor="ctr" marL="109728" marR="91440" marT="36576" marB="36576">
-                    <a:solidFill>
-                      <a:srgbClr val="FFFFFF"/>
-                    </a:solidFill>
-                  </a:tcPr>
-                </a:tc>
-              </a:tr>
-              <a:tr h="502920">
-                <a:tc>
-                  <a:txBody>
-                    <a:bodyPr/>
-                    <a:lstStyle/>
-                    <a:p>
-                      <a:pPr algn="l"/>
-                      <a:r>
-                        <a:rPr sz="1200" b="1" i="0">
-                          <a:solidFill>
-                            <a:srgbClr val="2B2B2B"/>
-                          </a:solidFill>
-                          <a:latin typeface="Calibri"/>
-                        </a:rPr>
-                        <a:t>10</a:t>
-                      </a:r>
-                    </a:p>
-                  </a:txBody>
-                  <a:tcPr anchor="ctr" marL="109728" marR="91440" marT="36576" marB="36576">
-                    <a:solidFill>
-                      <a:srgbClr val="F2F2F2"/>
-                    </a:solidFill>
-                  </a:tcPr>
-                </a:tc>
-                <a:tc>
-                  <a:txBody>
-                    <a:bodyPr/>
-                    <a:lstStyle/>
-                    <a:p>
-                      <a:pPr algn="l"/>
-                      <a:r>
-                        <a:rPr sz="1200" b="0" i="0">
-                          <a:solidFill>
-                            <a:srgbClr val="2B2B2B"/>
-                          </a:solidFill>
-                          <a:latin typeface="Calibri"/>
-                        </a:rPr>
-                        <a:t>Socialización de avances</a:t>
-                      </a:r>
-                    </a:p>
-                  </a:txBody>
-                  <a:tcPr anchor="ctr" marL="109728" marR="91440" marT="36576" marB="36576">
-                    <a:solidFill>
-                      <a:srgbClr val="F2F2F2"/>
-                    </a:solidFill>
-                  </a:tcPr>
-                </a:tc>
-                <a:tc>
-                  <a:txBody>
-                    <a:bodyPr/>
-                    <a:lstStyle/>
-                    <a:p>
-                      <a:pPr algn="l"/>
-                      <a:r>
-                        <a:rPr sz="1200" b="0" i="0">
-                          <a:solidFill>
-                            <a:srgbClr val="2B2B2B"/>
-                          </a:solidFill>
-                          <a:latin typeface="Calibri"/>
-                        </a:rPr>
-                        <a:t>Pitch de 3 minutos y retroalimentación de pares</a:t>
-                      </a:r>
-                    </a:p>
-                  </a:txBody>
-                  <a:tcPr anchor="ctr" marL="109728" marR="91440" marT="36576" marB="36576">
-                    <a:solidFill>
-                      <a:srgbClr val="F2F2F2"/>
-                    </a:solidFill>
-                  </a:tcPr>
-                </a:tc>
-              </a:tr>
-              <a:tr h="502920">
-                <a:tc>
-                  <a:txBody>
-                    <a:bodyPr/>
-                    <a:lstStyle/>
-                    <a:p>
-                      <a:pPr algn="l"/>
-                      <a:r>
-                        <a:rPr sz="1200" b="1" i="0">
-                          <a:solidFill>
-                            <a:srgbClr val="2B2B2B"/>
-                          </a:solidFill>
-                          <a:latin typeface="Calibri"/>
-                        </a:rPr>
-                        <a:t>11</a:t>
-                      </a:r>
-                    </a:p>
-                  </a:txBody>
-                  <a:tcPr anchor="ctr" marL="109728" marR="91440" marT="36576" marB="36576">
-                    <a:solidFill>
-                      <a:srgbClr val="FFFFFF"/>
-                    </a:solidFill>
-                  </a:tcPr>
-                </a:tc>
-                <a:tc>
-                  <a:txBody>
-                    <a:bodyPr/>
-                    <a:lstStyle/>
-                    <a:p>
-                      <a:pPr algn="l"/>
-                      <a:r>
-                        <a:rPr sz="1200" b="0" i="0">
-                          <a:solidFill>
-                            <a:srgbClr val="2B2B2B"/>
-                          </a:solidFill>
-                          <a:latin typeface="Calibri"/>
-                        </a:rPr>
-                        <a:t>Cierre del avance · preparación para TG3</a:t>
-                      </a:r>
-                    </a:p>
-                  </a:txBody>
-                  <a:tcPr anchor="ctr" marL="109728" marR="91440" marT="36576" marB="36576">
-                    <a:solidFill>
-                      <a:srgbClr val="FFFFFF"/>
-                    </a:solidFill>
-                  </a:tcPr>
-                </a:tc>
-                <a:tc>
-                  <a:txBody>
-                    <a:bodyPr/>
-                    <a:lstStyle/>
-                    <a:p>
-                      <a:pPr algn="l"/>
-                      <a:r>
-                        <a:rPr sz="1200" b="0" i="0">
-                          <a:solidFill>
-                            <a:srgbClr val="2B2B2B"/>
-                          </a:solidFill>
-                          <a:latin typeface="Calibri"/>
-                        </a:rPr>
-                        <a:t>Versión limpia y lista de pendientes para TG3</a:t>
-                      </a:r>
-                    </a:p>
-                  </a:txBody>
-                  <a:tcPr anchor="ctr" marL="109728" marR="91440" marT="36576" marB="36576">
-                    <a:solidFill>
-                      <a:srgbClr val="FFFFFF"/>
-                    </a:solidFill>
-                  </a:tcPr>
-                </a:tc>
-              </a:tr>
-            </a:tbl>
-          </a:graphicData>
-        </a:graphic>
-      </p:graphicFrame>
-      <p:sp>
-        <p:nvSpPr>
-          <p:cNvPr id="5" name="TextBox 4"/>
-          <p:cNvSpPr txBox="1"/>
-          <p:nvPr/>
-        </p:nvSpPr>
-        <p:spPr>
-          <a:xfrm>
-            <a:off x="640080" y="4846320"/>
-            <a:ext cx="10911535" cy="548640"/>
-          </a:xfrm>
-          <a:prstGeom prst="rect">
-            <a:avLst/>
-          </a:prstGeom>
-          <a:noFill/>
-        </p:spPr>
-        <p:txBody>
-          <a:bodyPr wrap="square" anchor="t" lIns="0" rIns="0" tIns="0" bIns="0">
-            <a:spAutoFit/>
-          </a:bodyPr>
-          <a:lstStyle/>
-          <a:p>
+              <a:t>: no se cancela. La actividad queda en la carpeta de esa sesión en el </a:t>
+            </a:r>
+            <a:r>
+              <a:rPr sz="1200" b="1" i="1">
+                <a:solidFill>
+                  <a:srgbClr val="2B2B2B"/>
+                </a:solidFill>
+                <a:latin typeface="Calibri"/>
+              </a:rPr>
+              <a:t>Drive de clases</a:t>
+            </a:r>
             <a:r>
               <a:rPr sz="1200" b="0" i="1">
                 <a:solidFill>
@@ -14937,25 +15645,7 @@
                 </a:solidFill>
                 <a:latin typeface="Calibri"/>
               </a:rPr>
-              <a:t>Las once sesiones construyen </a:t>
-            </a:r>
-            <a:r>
-              <a:rPr sz="1200" b="1" i="1">
-                <a:solidFill>
-                  <a:srgbClr val="2B2B2B"/>
-                </a:solidFill>
-                <a:latin typeface="Calibri"/>
-              </a:rPr>
-              <a:t>un solo documento</a:t>
-            </a:r>
-            <a:r>
-              <a:rPr sz="1200" b="0" i="1">
-                <a:solidFill>
-                  <a:srgbClr val="2B2B2B"/>
-                </a:solidFill>
-                <a:latin typeface="Calibri"/>
-              </a:rPr>
-              <a:t>. Si falta a una, la siguiente le va a pedir algo que no escribió.</a:t>
+              <a:t> (`Clases/Sesion NN - …/`) y lo que haya que entregar se sube, como siempre, a CDigital.</a:t>
             </a:r>
           </a:p>
         </p:txBody>

--- a/Pregrado/Trabajo de grado 2/Clases/Sesion 01 - Presentación del curso · docente · estudiantes · ACAs/Presentacion.pptx
+++ b/Pregrado/Trabajo de grado 2/Clases/Sesion 01 - Presentación del curso · docente · estudiantes · ACAs/Presentacion.pptx
@@ -28,7 +28,6 @@
     <p:sldId id="276" r:id="rId27"/>
     <p:sldId id="277" r:id="rId28"/>
     <p:sldId id="278" r:id="rId29"/>
-    <p:sldId id="279" r:id="rId30"/>
   </p:sldIdLst>
   <p:sldSz cx="12191695" cy="6858000" type="screen4x3"/>
   <p:notesSz cx="6858000" cy="9144000"/>
@@ -3480,474 +3479,21 @@
                 </a:solidFill>
                 <a:latin typeface="Calibri"/>
               </a:rPr>
-              <a:t>Mapa del curso (2/2): del método al cierre del avance</a:t>
-            </a:r>
-          </a:p>
-        </p:txBody>
-      </p:sp>
-      <p:graphicFrame>
-        <p:nvGraphicFramePr>
-          <p:cNvPr id="4" name="Table 3"/>
-          <p:cNvGraphicFramePr>
-            <a:graphicFrameLocks noGrp="1"/>
-          </p:cNvGraphicFramePr>
-          <p:nvPr/>
-        </p:nvGraphicFramePr>
-        <p:xfrm>
-          <a:off x="640080" y="1691639"/>
-          <a:ext cx="10911533" cy="3017520"/>
-        </p:xfrm>
-        <a:graphic>
-          <a:graphicData uri="http://schemas.openxmlformats.org/drawingml/2006/table">
-            <a:tbl>
-              <a:tblPr>
-                <a:tableStyleId>{2D5ABB26-0587-4C30-8999-92F81FD0307C}</a:tableStyleId>
-              </a:tblPr>
-              <a:tblGrid>
-                <a:gridCol w="1008629"/>
-                <a:gridCol w="4951452"/>
-                <a:gridCol w="4951452"/>
-              </a:tblGrid>
-              <a:tr h="502920">
-                <a:tc>
-                  <a:txBody>
-                    <a:bodyPr/>
-                    <a:lstStyle/>
-                    <a:p>
-                      <a:pPr algn="l"/>
-                      <a:r>
-                        <a:rPr sz="1300" b="1" i="0">
-                          <a:solidFill>
-                            <a:srgbClr val="FFFFFF"/>
-                          </a:solidFill>
-                          <a:latin typeface="Calibri"/>
-                        </a:rPr>
-                        <a:t>Sesión</a:t>
-                      </a:r>
-                    </a:p>
-                  </a:txBody>
-                  <a:tcPr anchor="ctr" marL="109728" marR="91440" marT="36576" marB="36576">
-                    <a:solidFill>
-                      <a:srgbClr val="0C2340"/>
-                    </a:solidFill>
-                  </a:tcPr>
-                </a:tc>
-                <a:tc>
-                  <a:txBody>
-                    <a:bodyPr/>
-                    <a:lstStyle/>
-                    <a:p>
-                      <a:pPr algn="l"/>
-                      <a:r>
-                        <a:rPr sz="1300" b="1" i="0">
-                          <a:solidFill>
-                            <a:srgbClr val="FFFFFF"/>
-                          </a:solidFill>
-                          <a:latin typeface="Calibri"/>
-                        </a:rPr>
-                        <a:t>De qué se ocupa</a:t>
-                      </a:r>
-                    </a:p>
-                  </a:txBody>
-                  <a:tcPr anchor="ctr" marL="109728" marR="91440" marT="36576" marB="36576">
-                    <a:solidFill>
-                      <a:srgbClr val="0C2340"/>
-                    </a:solidFill>
-                  </a:tcPr>
-                </a:tc>
-                <a:tc>
-                  <a:txBody>
-                    <a:bodyPr/>
-                    <a:lstStyle/>
-                    <a:p>
-                      <a:pPr algn="l"/>
-                      <a:r>
-                        <a:rPr sz="1300" b="1" i="0">
-                          <a:solidFill>
-                            <a:srgbClr val="FFFFFF"/>
-                          </a:solidFill>
-                          <a:latin typeface="Calibri"/>
-                        </a:rPr>
-                        <a:t>Qué queda escrito</a:t>
-                      </a:r>
-                    </a:p>
-                  </a:txBody>
-                  <a:tcPr anchor="ctr" marL="109728" marR="91440" marT="36576" marB="36576">
-                    <a:solidFill>
-                      <a:srgbClr val="0C2340"/>
-                    </a:solidFill>
-                  </a:tcPr>
-                </a:tc>
-              </a:tr>
-              <a:tr h="502920">
-                <a:tc>
-                  <a:txBody>
-                    <a:bodyPr/>
-                    <a:lstStyle/>
-                    <a:p>
-                      <a:pPr algn="l"/>
-                      <a:r>
-                        <a:rPr sz="1200" b="1" i="0">
-                          <a:solidFill>
-                            <a:srgbClr val="2B2B2B"/>
-                          </a:solidFill>
-                          <a:latin typeface="Calibri"/>
-                        </a:rPr>
-                        <a:t>07</a:t>
-                      </a:r>
-                    </a:p>
-                  </a:txBody>
-                  <a:tcPr anchor="ctr" marL="109728" marR="91440" marT="36576" marB="36576">
-                    <a:solidFill>
-                      <a:srgbClr val="FFFFFF"/>
-                    </a:solidFill>
-                  </a:tcPr>
-                </a:tc>
-                <a:tc>
-                  <a:txBody>
-                    <a:bodyPr/>
-                    <a:lstStyle/>
-                    <a:p>
-                      <a:pPr algn="l"/>
-                      <a:r>
-                        <a:rPr sz="1200" b="0" i="0">
-                          <a:solidFill>
-                            <a:srgbClr val="2B2B2B"/>
-                          </a:solidFill>
-                          <a:latin typeface="Calibri"/>
-                        </a:rPr>
-                        <a:t>Diseño metodológico (propuesto)</a:t>
-                      </a:r>
-                    </a:p>
-                  </a:txBody>
-                  <a:tcPr anchor="ctr" marL="109728" marR="91440" marT="36576" marB="36576">
-                    <a:solidFill>
-                      <a:srgbClr val="FFFFFF"/>
-                    </a:solidFill>
-                  </a:tcPr>
-                </a:tc>
-                <a:tc>
-                  <a:txBody>
-                    <a:bodyPr/>
-                    <a:lstStyle/>
-                    <a:p>
-                      <a:pPr algn="l"/>
-                      <a:r>
-                        <a:rPr sz="1200" b="0" i="0">
-                          <a:solidFill>
-                            <a:srgbClr val="2B2B2B"/>
-                          </a:solidFill>
-                          <a:latin typeface="Calibri"/>
-                        </a:rPr>
-                        <a:t>Enfoque, tipo y alcance, escritos en futuro</a:t>
-                      </a:r>
-                    </a:p>
-                  </a:txBody>
-                  <a:tcPr anchor="ctr" marL="109728" marR="91440" marT="36576" marB="36576">
-                    <a:solidFill>
-                      <a:srgbClr val="FFFFFF"/>
-                    </a:solidFill>
-                  </a:tcPr>
-                </a:tc>
-              </a:tr>
-              <a:tr h="502920">
-                <a:tc>
-                  <a:txBody>
-                    <a:bodyPr/>
-                    <a:lstStyle/>
-                    <a:p>
-                      <a:pPr algn="l"/>
-                      <a:r>
-                        <a:rPr sz="1200" b="1" i="0">
-                          <a:solidFill>
-                            <a:srgbClr val="2B2B2B"/>
-                          </a:solidFill>
-                          <a:latin typeface="Calibri"/>
-                        </a:rPr>
-                        <a:t>08</a:t>
-                      </a:r>
-                    </a:p>
-                  </a:txBody>
-                  <a:tcPr anchor="ctr" marL="109728" marR="91440" marT="36576" marB="36576">
-                    <a:solidFill>
-                      <a:srgbClr val="F2F2F2"/>
-                    </a:solidFill>
-                  </a:tcPr>
-                </a:tc>
-                <a:tc>
-                  <a:txBody>
-                    <a:bodyPr/>
-                    <a:lstStyle/>
-                    <a:p>
-                      <a:pPr algn="l"/>
-                      <a:r>
-                        <a:rPr sz="1200" b="0" i="0">
-                          <a:solidFill>
-                            <a:srgbClr val="2B2B2B"/>
-                          </a:solidFill>
-                          <a:latin typeface="Calibri"/>
-                        </a:rPr>
-                        <a:t>Instrumentos y plan de análisis (propuestos)</a:t>
-                      </a:r>
-                    </a:p>
-                  </a:txBody>
-                  <a:tcPr anchor="ctr" marL="109728" marR="91440" marT="36576" marB="36576">
-                    <a:solidFill>
-                      <a:srgbClr val="F2F2F2"/>
-                    </a:solidFill>
-                  </a:tcPr>
-                </a:tc>
-                <a:tc>
-                  <a:txBody>
-                    <a:bodyPr/>
-                    <a:lstStyle/>
-                    <a:p>
-                      <a:pPr algn="l"/>
-                      <a:r>
-                        <a:rPr sz="1200" b="0" i="0">
-                          <a:solidFill>
-                            <a:srgbClr val="2B2B2B"/>
-                          </a:solidFill>
-                          <a:latin typeface="Calibri"/>
-                        </a:rPr>
-                        <a:t>Bosquejo de instrumento y plan de análisis</a:t>
-                      </a:r>
-                    </a:p>
-                  </a:txBody>
-                  <a:tcPr anchor="ctr" marL="109728" marR="91440" marT="36576" marB="36576">
-                    <a:solidFill>
-                      <a:srgbClr val="F2F2F2"/>
-                    </a:solidFill>
-                  </a:tcPr>
-                </a:tc>
-              </a:tr>
-              <a:tr h="502920">
-                <a:tc>
-                  <a:txBody>
-                    <a:bodyPr/>
-                    <a:lstStyle/>
-                    <a:p>
-                      <a:pPr algn="l"/>
-                      <a:r>
-                        <a:rPr sz="1200" b="1" i="0">
-                          <a:solidFill>
-                            <a:srgbClr val="2B2B2B"/>
-                          </a:solidFill>
-                          <a:latin typeface="Calibri"/>
-                        </a:rPr>
-                        <a:t>09</a:t>
-                      </a:r>
-                    </a:p>
-                  </a:txBody>
-                  <a:tcPr anchor="ctr" marL="109728" marR="91440" marT="36576" marB="36576">
-                    <a:solidFill>
-                      <a:srgbClr val="FFFFFF"/>
-                    </a:solidFill>
-                  </a:tcPr>
-                </a:tc>
-                <a:tc>
-                  <a:txBody>
-                    <a:bodyPr/>
-                    <a:lstStyle/>
-                    <a:p>
-                      <a:pPr algn="l"/>
-                      <a:r>
-                        <a:rPr sz="1200" b="0" i="0">
-                          <a:solidFill>
-                            <a:srgbClr val="2B2B2B"/>
-                          </a:solidFill>
-                          <a:latin typeface="Calibri"/>
-                        </a:rPr>
-                        <a:t>Integración del avance · correcciones</a:t>
-                      </a:r>
-                    </a:p>
-                  </a:txBody>
-                  <a:tcPr anchor="ctr" marL="109728" marR="91440" marT="36576" marB="36576">
-                    <a:solidFill>
-                      <a:srgbClr val="FFFFFF"/>
-                    </a:solidFill>
-                  </a:tcPr>
-                </a:tc>
-                <a:tc>
-                  <a:txBody>
-                    <a:bodyPr/>
-                    <a:lstStyle/>
-                    <a:p>
-                      <a:pPr algn="l"/>
-                      <a:r>
-                        <a:rPr sz="1200" b="0" i="0">
-                          <a:solidFill>
-                            <a:srgbClr val="2B2B2B"/>
-                          </a:solidFill>
-                          <a:latin typeface="Calibri"/>
-                        </a:rPr>
-                        <a:t>Documento consolidado y coherente</a:t>
-                      </a:r>
-                    </a:p>
-                  </a:txBody>
-                  <a:tcPr anchor="ctr" marL="109728" marR="91440" marT="36576" marB="36576">
-                    <a:solidFill>
-                      <a:srgbClr val="FFFFFF"/>
-                    </a:solidFill>
-                  </a:tcPr>
-                </a:tc>
-              </a:tr>
-              <a:tr h="502920">
-                <a:tc>
-                  <a:txBody>
-                    <a:bodyPr/>
-                    <a:lstStyle/>
-                    <a:p>
-                      <a:pPr algn="l"/>
-                      <a:r>
-                        <a:rPr sz="1200" b="1" i="0">
-                          <a:solidFill>
-                            <a:srgbClr val="2B2B2B"/>
-                          </a:solidFill>
-                          <a:latin typeface="Calibri"/>
-                        </a:rPr>
-                        <a:t>10</a:t>
-                      </a:r>
-                    </a:p>
-                  </a:txBody>
-                  <a:tcPr anchor="ctr" marL="109728" marR="91440" marT="36576" marB="36576">
-                    <a:solidFill>
-                      <a:srgbClr val="F2F2F2"/>
-                    </a:solidFill>
-                  </a:tcPr>
-                </a:tc>
-                <a:tc>
-                  <a:txBody>
-                    <a:bodyPr/>
-                    <a:lstStyle/>
-                    <a:p>
-                      <a:pPr algn="l"/>
-                      <a:r>
-                        <a:rPr sz="1200" b="0" i="0">
-                          <a:solidFill>
-                            <a:srgbClr val="2B2B2B"/>
-                          </a:solidFill>
-                          <a:latin typeface="Calibri"/>
-                        </a:rPr>
-                        <a:t>Socialización de avances</a:t>
-                      </a:r>
-                    </a:p>
-                  </a:txBody>
-                  <a:tcPr anchor="ctr" marL="109728" marR="91440" marT="36576" marB="36576">
-                    <a:solidFill>
-                      <a:srgbClr val="F2F2F2"/>
-                    </a:solidFill>
-                  </a:tcPr>
-                </a:tc>
-                <a:tc>
-                  <a:txBody>
-                    <a:bodyPr/>
-                    <a:lstStyle/>
-                    <a:p>
-                      <a:pPr algn="l"/>
-                      <a:r>
-                        <a:rPr sz="1200" b="0" i="0">
-                          <a:solidFill>
-                            <a:srgbClr val="2B2B2B"/>
-                          </a:solidFill>
-                          <a:latin typeface="Calibri"/>
-                        </a:rPr>
-                        <a:t>Pitch de 3 minutos y retroalimentación de pares</a:t>
-                      </a:r>
-                    </a:p>
-                  </a:txBody>
-                  <a:tcPr anchor="ctr" marL="109728" marR="91440" marT="36576" marB="36576">
-                    <a:solidFill>
-                      <a:srgbClr val="F2F2F2"/>
-                    </a:solidFill>
-                  </a:tcPr>
-                </a:tc>
-              </a:tr>
-              <a:tr h="502920">
-                <a:tc>
-                  <a:txBody>
-                    <a:bodyPr/>
-                    <a:lstStyle/>
-                    <a:p>
-                      <a:pPr algn="l"/>
-                      <a:r>
-                        <a:rPr sz="1200" b="1" i="0">
-                          <a:solidFill>
-                            <a:srgbClr val="2B2B2B"/>
-                          </a:solidFill>
-                          <a:latin typeface="Calibri"/>
-                        </a:rPr>
-                        <a:t>11</a:t>
-                      </a:r>
-                    </a:p>
-                  </a:txBody>
-                  <a:tcPr anchor="ctr" marL="109728" marR="91440" marT="36576" marB="36576">
-                    <a:solidFill>
-                      <a:srgbClr val="FFFFFF"/>
-                    </a:solidFill>
-                  </a:tcPr>
-                </a:tc>
-                <a:tc>
-                  <a:txBody>
-                    <a:bodyPr/>
-                    <a:lstStyle/>
-                    <a:p>
-                      <a:pPr algn="l"/>
-                      <a:r>
-                        <a:rPr sz="1200" b="0" i="0">
-                          <a:solidFill>
-                            <a:srgbClr val="2B2B2B"/>
-                          </a:solidFill>
-                          <a:latin typeface="Calibri"/>
-                        </a:rPr>
-                        <a:t>Cierre del avance · preparación para TG3</a:t>
-                      </a:r>
-                    </a:p>
-                  </a:txBody>
-                  <a:tcPr anchor="ctr" marL="109728" marR="91440" marT="36576" marB="36576">
-                    <a:solidFill>
-                      <a:srgbClr val="FFFFFF"/>
-                    </a:solidFill>
-                  </a:tcPr>
-                </a:tc>
-                <a:tc>
-                  <a:txBody>
-                    <a:bodyPr/>
-                    <a:lstStyle/>
-                    <a:p>
-                      <a:pPr algn="l"/>
-                      <a:r>
-                        <a:rPr sz="1200" b="0" i="0">
-                          <a:solidFill>
-                            <a:srgbClr val="2B2B2B"/>
-                          </a:solidFill>
-                          <a:latin typeface="Calibri"/>
-                        </a:rPr>
-                        <a:t>Versión limpia y lista de pendientes para TG3</a:t>
-                      </a:r>
-                    </a:p>
-                  </a:txBody>
-                  <a:tcPr anchor="ctr" marL="109728" marR="91440" marT="36576" marB="36576">
-                    <a:solidFill>
-                      <a:srgbClr val="FFFFFF"/>
-                    </a:solidFill>
-                  </a:tcPr>
-                </a:tc>
-              </a:tr>
-            </a:tbl>
-          </a:graphicData>
-        </a:graphic>
-      </p:graphicFrame>
-      <p:sp>
-        <p:nvSpPr>
-          <p:cNvPr id="5" name="TextBox 4"/>
+              <a:t>Qué se llevan al final: el avance escrito que alimenta TG3</a:t>
+            </a:r>
+          </a:p>
+        </p:txBody>
+      </p:sp>
+      <p:sp>
+        <p:nvSpPr>
+          <p:cNvPr id="4" name="TextBox 3"/>
           <p:cNvSpPr txBox="1"/>
           <p:nvPr/>
         </p:nvSpPr>
         <p:spPr>
           <a:xfrm>
-            <a:off x="640080" y="4846320"/>
-            <a:ext cx="10911535" cy="548640"/>
+            <a:off x="640080" y="1691639"/>
+            <a:ext cx="10911535" cy="4617720"/>
           </a:xfrm>
           <a:prstGeom prst="rect">
             <a:avLst/>
@@ -3960,17 +3506,22 @@
           </a:bodyPr>
           <a:lstStyle/>
           <a:p>
-            <a:r>
-              <a:rPr sz="1200" b="0" i="1">
-                <a:solidFill>
-                  <a:srgbClr val="2B2B2B"/>
-                </a:solidFill>
-                <a:latin typeface="Calibri"/>
-              </a:rPr>
-              <a:t>Las once sesiones construyen </a:t>
-            </a:r>
-            <a:r>
-              <a:rPr sz="1200" b="1" i="1">
+            <a:pPr>
+              <a:spcAft>
+                <a:spcPts val="1000"/>
+              </a:spcAft>
+            </a:pPr>
+            <a:r>
+              <a:rPr sz="1600" b="0" i="0">
+                <a:solidFill>
+                  <a:srgbClr val="2B2B2B"/>
+                </a:solidFill>
+                <a:latin typeface="Calibri"/>
+              </a:rPr>
+              <a:t>–   El producto de TG2 es </a:t>
+            </a:r>
+            <a:r>
+              <a:rPr sz="1600" b="1" i="0">
                 <a:solidFill>
                   <a:srgbClr val="2B2B2B"/>
                 </a:solidFill>
@@ -3979,20 +3530,258 @@
               <a:t>un solo documento</a:t>
             </a:r>
             <a:r>
-              <a:rPr sz="1200" b="0" i="1">
-                <a:solidFill>
-                  <a:srgbClr val="2B2B2B"/>
-                </a:solidFill>
-                <a:latin typeface="Calibri"/>
-              </a:rPr>
-              <a:t>. Si falta a una, la siguiente le va a pedir algo que no escribió.</a:t>
-            </a:r>
-          </a:p>
-        </p:txBody>
-      </p:sp>
-      <p:sp>
-        <p:nvSpPr>
-          <p:cNvPr id="6" name="TextBox 5"/>
+              <a:rPr sz="1600" b="0" i="0">
+                <a:solidFill>
+                  <a:srgbClr val="2B2B2B"/>
+                </a:solidFill>
+                <a:latin typeface="Calibri"/>
+              </a:rPr>
+              <a:t>: el avance consolidado de su trabajo de grado.</a:t>
+            </a:r>
+          </a:p>
+          <a:p>
+            <a:pPr>
+              <a:spcAft>
+                <a:spcPts val="1000"/>
+              </a:spcAft>
+            </a:pPr>
+            <a:r>
+              <a:rPr sz="1600" b="0" i="0">
+                <a:solidFill>
+                  <a:srgbClr val="2B2B2B"/>
+                </a:solidFill>
+                <a:latin typeface="Calibri"/>
+              </a:rPr>
+              <a:t>–   Terminar TG2 </a:t>
+            </a:r>
+            <a:r>
+              <a:rPr sz="1600" b="1" i="0">
+                <a:solidFill>
+                  <a:srgbClr val="2B2B2B"/>
+                </a:solidFill>
+                <a:latin typeface="Calibri"/>
+              </a:rPr>
+              <a:t>no</a:t>
+            </a:r>
+            <a:r>
+              <a:rPr sz="1600" b="0" i="0">
+                <a:solidFill>
+                  <a:srgbClr val="2B2B2B"/>
+                </a:solidFill>
+                <a:latin typeface="Calibri"/>
+              </a:rPr>
+              <a:t> es terminar el trabajo de grado. Es dejarlo listo para que en TG3 solo quede </a:t>
+            </a:r>
+            <a:r>
+              <a:rPr sz="1600" b="1" i="0">
+                <a:solidFill>
+                  <a:srgbClr val="2B2B2B"/>
+                </a:solidFill>
+                <a:latin typeface="Calibri"/>
+              </a:rPr>
+              <a:t>ejecutar y sustentar</a:t>
+            </a:r>
+            <a:r>
+              <a:rPr sz="1600" b="0" i="0">
+                <a:solidFill>
+                  <a:srgbClr val="2B2B2B"/>
+                </a:solidFill>
+                <a:latin typeface="Calibri"/>
+              </a:rPr>
+              <a:t>.</a:t>
+            </a:r>
+          </a:p>
+          <a:p>
+            <a:pPr>
+              <a:spcAft>
+                <a:spcPts val="1000"/>
+              </a:spcAft>
+            </a:pPr>
+            <a:r>
+              <a:rPr sz="1600" b="0" i="0">
+                <a:solidFill>
+                  <a:srgbClr val="2B2B2B"/>
+                </a:solidFill>
+                <a:latin typeface="Calibri"/>
+              </a:rPr>
+              <a:t>–   Al cerrar el periodo su documento debe tener:</a:t>
+            </a:r>
+          </a:p>
+          <a:p>
+            <a:pPr lvl="1">
+              <a:spcAft>
+                <a:spcPts val="600"/>
+              </a:spcAft>
+            </a:pPr>
+            <a:r>
+              <a:rPr sz="1500" b="0" i="0">
+                <a:solidFill>
+                  <a:srgbClr val="2B2B2B"/>
+                </a:solidFill>
+                <a:latin typeface="Calibri"/>
+              </a:rPr>
+              <a:t>●   </a:t>
+            </a:r>
+            <a:r>
+              <a:rPr sz="1500" b="1" i="0">
+                <a:solidFill>
+                  <a:srgbClr val="2B2B2B"/>
+                </a:solidFill>
+                <a:latin typeface="Calibri"/>
+              </a:rPr>
+              <a:t>Planteamiento del problema</a:t>
+            </a:r>
+            <a:r>
+              <a:rPr sz="1500" b="0" i="0">
+                <a:solidFill>
+                  <a:srgbClr val="2B2B2B"/>
+                </a:solidFill>
+                <a:latin typeface="Calibri"/>
+              </a:rPr>
+              <a:t>, pregunta y objetivos definitivos.</a:t>
+            </a:r>
+          </a:p>
+          <a:p>
+            <a:pPr lvl="1">
+              <a:spcAft>
+                <a:spcPts val="600"/>
+              </a:spcAft>
+            </a:pPr>
+            <a:r>
+              <a:rPr sz="1500" b="0" i="0">
+                <a:solidFill>
+                  <a:srgbClr val="2B2B2B"/>
+                </a:solidFill>
+                <a:latin typeface="Calibri"/>
+              </a:rPr>
+              <a:t>●   </a:t>
+            </a:r>
+            <a:r>
+              <a:rPr sz="1500" b="1" i="0">
+                <a:solidFill>
+                  <a:srgbClr val="2B2B2B"/>
+                </a:solidFill>
+                <a:latin typeface="Calibri"/>
+              </a:rPr>
+              <a:t>Marco referencial</a:t>
+            </a:r>
+            <a:r>
+              <a:rPr sz="1500" b="0" i="0">
+                <a:solidFill>
+                  <a:srgbClr val="2B2B2B"/>
+                </a:solidFill>
+                <a:latin typeface="Calibri"/>
+              </a:rPr>
+              <a:t>: antecedentes, marco teórico, conceptual y contextual, citados en APA 7.</a:t>
+            </a:r>
+          </a:p>
+          <a:p>
+            <a:pPr lvl="1">
+              <a:spcAft>
+                <a:spcPts val="600"/>
+              </a:spcAft>
+            </a:pPr>
+            <a:r>
+              <a:rPr sz="1500" b="0" i="0">
+                <a:solidFill>
+                  <a:srgbClr val="2B2B2B"/>
+                </a:solidFill>
+                <a:latin typeface="Calibri"/>
+              </a:rPr>
+              <a:t>●   </a:t>
+            </a:r>
+            <a:r>
+              <a:rPr sz="1500" b="1" i="0">
+                <a:solidFill>
+                  <a:srgbClr val="2B2B2B"/>
+                </a:solidFill>
+                <a:latin typeface="Calibri"/>
+              </a:rPr>
+              <a:t>Metodología propuesta</a:t>
+            </a:r>
+            <a:r>
+              <a:rPr sz="1500" b="0" i="0">
+                <a:solidFill>
+                  <a:srgbClr val="2B2B2B"/>
+                </a:solidFill>
+                <a:latin typeface="Calibri"/>
+              </a:rPr>
+              <a:t> (en futuro: “se aplicará”, “se propone”), con instrumentos bosquejados.</a:t>
+            </a:r>
+          </a:p>
+          <a:p>
+            <a:pPr lvl="1">
+              <a:spcAft>
+                <a:spcPts val="600"/>
+              </a:spcAft>
+            </a:pPr>
+            <a:r>
+              <a:rPr sz="1500" b="0" i="0">
+                <a:solidFill>
+                  <a:srgbClr val="2B2B2B"/>
+                </a:solidFill>
+                <a:latin typeface="Calibri"/>
+              </a:rPr>
+              <a:t>●   Una </a:t>
+            </a:r>
+            <a:r>
+              <a:rPr sz="1500" b="1" i="0">
+                <a:solidFill>
+                  <a:srgbClr val="2B2B2B"/>
+                </a:solidFill>
+                <a:latin typeface="Calibri"/>
+              </a:rPr>
+              <a:t>lista de pendientes para TG3</a:t>
+            </a:r>
+            <a:r>
+              <a:rPr sz="1500" b="0" i="0">
+                <a:solidFill>
+                  <a:srgbClr val="2B2B2B"/>
+                </a:solidFill>
+                <a:latin typeface="Calibri"/>
+              </a:rPr>
+              <a:t>, explícita y en imperativo.</a:t>
+            </a:r>
+          </a:p>
+          <a:p>
+            <a:pPr>
+              <a:spcAft>
+                <a:spcPts val="1000"/>
+              </a:spcAft>
+            </a:pPr>
+            <a:r>
+              <a:rPr sz="1600" b="0" i="0">
+                <a:solidFill>
+                  <a:srgbClr val="2B2B2B"/>
+                </a:solidFill>
+                <a:latin typeface="Calibri"/>
+              </a:rPr>
+              <a:t>–   Para qué le sirve después: quien llega a TG3 con esto hecho </a:t>
+            </a:r>
+            <a:r>
+              <a:rPr sz="1600" b="1" i="0">
+                <a:solidFill>
+                  <a:srgbClr val="2B2B2B"/>
+                </a:solidFill>
+                <a:latin typeface="Calibri"/>
+              </a:rPr>
+              <a:t>arranca ejecutando</a:t>
+            </a:r>
+            <a:r>
+              <a:rPr sz="1600" b="0" i="0">
+                <a:solidFill>
+                  <a:srgbClr val="2B2B2B"/>
+                </a:solidFill>
+                <a:latin typeface="Calibri"/>
+              </a:rPr>
+              <a:t>; quien llega sin esto, repite TG2 dentro de TG3 y no alcanza a sustentar.</a:t>
+            </a:r>
+          </a:p>
+        </p:txBody>
+      </p:sp>
+      <p:sp>
+        <p:nvSpPr>
+          <p:cNvPr id="5" name="TextBox 4"/>
           <p:cNvSpPr txBox="1"/>
           <p:nvPr/>
         </p:nvSpPr>
@@ -4021,6 +3810,40 @@
                 <a:latin typeface="Calibri"/>
               </a:rPr>
               <a:t>10</a:t>
+            </a:r>
+          </a:p>
+        </p:txBody>
+      </p:sp>
+      <p:sp>
+        <p:nvSpPr>
+          <p:cNvPr id="6" name="TextBox 5"/>
+          <p:cNvSpPr txBox="1"/>
+          <p:nvPr/>
+        </p:nvSpPr>
+        <p:spPr>
+          <a:xfrm>
+            <a:off x="640080" y="5943600"/>
+            <a:ext cx="9997135" cy="457200"/>
+          </a:xfrm>
+          <a:prstGeom prst="rect">
+            <a:avLst/>
+          </a:prstGeom>
+          <a:noFill/>
+        </p:spPr>
+        <p:txBody>
+          <a:bodyPr wrap="square" anchor="t" lIns="0" rIns="0" tIns="0" bIns="0">
+            <a:spAutoFit/>
+          </a:bodyPr>
+          <a:lstStyle/>
+          <a:p>
+            <a:r>
+              <a:rPr sz="1200" b="0" i="1">
+                <a:solidFill>
+                  <a:srgbClr val="2B2B2B"/>
+                </a:solidFill>
+                <a:latin typeface="Calibri"/>
+              </a:rPr>
+              <a:t>Aquí no hay resultados todavía: el trabajo de campo es de TG3. Prometer hallazgos en este avance es el error que más se arrastra.</a:t>
             </a:r>
           </a:p>
         </p:txBody>
@@ -4125,7 +3948,7 @@
                 </a:solidFill>
                 <a:latin typeface="Calibri"/>
               </a:rPr>
-              <a:t>Qué se llevan al final: el avance escrito que alimenta TG3</a:t>
+              <a:t>El acuerdo pedagógico: qué pactamos hoy</a:t>
             </a:r>
           </a:p>
         </p:txBody>
@@ -4164,7 +3987,7 @@
                 </a:solidFill>
                 <a:latin typeface="Calibri"/>
               </a:rPr>
-              <a:t>–   El producto de TG2 es </a:t>
+              <a:t>–   Es el </a:t>
             </a:r>
             <a:r>
               <a:rPr sz="1600" b="1" i="0">
@@ -4173,7 +3996,7 @@
                 </a:solidFill>
                 <a:latin typeface="Calibri"/>
               </a:rPr>
-              <a:t>un solo documento</a:t>
+              <a:t>pacto de trabajo del curso</a:t>
             </a:r>
             <a:r>
               <a:rPr sz="1600" b="0" i="0">
@@ -4182,7 +4005,7 @@
                 </a:solidFill>
                 <a:latin typeface="Calibri"/>
               </a:rPr>
-              <a:t>: el avance consolidado de su trabajo de grado.</a:t>
+              <a:t>, y se deja por escrito hoy en el espacio del curso en CDigital.</a:t>
             </a:r>
           </a:p>
           <a:p>
@@ -4198,43 +4021,213 @@
                 </a:solidFill>
                 <a:latin typeface="Calibri"/>
               </a:rPr>
-              <a:t>–   Terminar TG2 </a:t>
-            </a:r>
-            <a:r>
-              <a:rPr sz="1600" b="1" i="0">
-                <a:solidFill>
-                  <a:srgbClr val="2B2B2B"/>
-                </a:solidFill>
-                <a:latin typeface="Calibri"/>
-              </a:rPr>
-              <a:t>no</a:t>
-            </a:r>
-            <a:r>
-              <a:rPr sz="1600" b="0" i="0">
-                <a:solidFill>
-                  <a:srgbClr val="2B2B2B"/>
-                </a:solidFill>
-                <a:latin typeface="Calibri"/>
-              </a:rPr>
-              <a:t> es terminar el trabajo de grado. Es dejarlo listo para que en TG3 solo quede </a:t>
-            </a:r>
-            <a:r>
-              <a:rPr sz="1600" b="1" i="0">
-                <a:solidFill>
-                  <a:srgbClr val="2B2B2B"/>
-                </a:solidFill>
-                <a:latin typeface="Calibri"/>
-              </a:rPr>
-              <a:t>ejecutar y sustentar</a:t>
-            </a:r>
-            <a:r>
-              <a:rPr sz="1600" b="0" i="0">
-                <a:solidFill>
-                  <a:srgbClr val="2B2B2B"/>
-                </a:solidFill>
-                <a:latin typeface="Calibri"/>
-              </a:rPr>
-              <a:t>.</a:t>
+              <a:t>–   Qué contiene, punto por punto:</a:t>
+            </a:r>
+          </a:p>
+          <a:p>
+            <a:pPr lvl="1">
+              <a:spcAft>
+                <a:spcPts val="600"/>
+              </a:spcAft>
+            </a:pPr>
+            <a:r>
+              <a:rPr sz="1500" b="0" i="0">
+                <a:solidFill>
+                  <a:srgbClr val="2B2B2B"/>
+                </a:solidFill>
+                <a:latin typeface="Calibri"/>
+              </a:rPr>
+              <a:t>●   </a:t>
+            </a:r>
+            <a:r>
+              <a:rPr sz="1500" b="1" i="0">
+                <a:solidFill>
+                  <a:srgbClr val="2B2B2B"/>
+                </a:solidFill>
+                <a:latin typeface="Calibri"/>
+              </a:rPr>
+              <a:t>Ritmo:</a:t>
+            </a:r>
+            <a:r>
+              <a:rPr sz="1500" b="0" i="0">
+                <a:solidFill>
+                  <a:srgbClr val="2B2B2B"/>
+                </a:solidFill>
+                <a:latin typeface="Calibri"/>
+              </a:rPr>
+              <a:t> una sección escrita por sesión, subida antes del siguiente encuentro.</a:t>
+            </a:r>
+          </a:p>
+          <a:p>
+            <a:pPr lvl="1">
+              <a:spcAft>
+                <a:spcPts val="600"/>
+              </a:spcAft>
+            </a:pPr>
+            <a:r>
+              <a:rPr sz="1500" b="0" i="0">
+                <a:solidFill>
+                  <a:srgbClr val="2B2B2B"/>
+                </a:solidFill>
+                <a:latin typeface="Calibri"/>
+              </a:rPr>
+              <a:t>●   </a:t>
+            </a:r>
+            <a:r>
+              <a:rPr sz="1500" b="1" i="0">
+                <a:solidFill>
+                  <a:srgbClr val="2B2B2B"/>
+                </a:solidFill>
+                <a:latin typeface="Calibri"/>
+              </a:rPr>
+              <a:t>Formato:</a:t>
+            </a:r>
+            <a:r>
+              <a:rPr sz="1500" b="0" i="0">
+                <a:solidFill>
+                  <a:srgbClr val="2B2B2B"/>
+                </a:solidFill>
+                <a:latin typeface="Calibri"/>
+              </a:rPr>
+              <a:t> plantilla APA CUN, abierta en Google Docs.</a:t>
+            </a:r>
+          </a:p>
+          <a:p>
+            <a:pPr lvl="1">
+              <a:spcAft>
+                <a:spcPts val="600"/>
+              </a:spcAft>
+            </a:pPr>
+            <a:r>
+              <a:rPr sz="1500" b="0" i="0">
+                <a:solidFill>
+                  <a:srgbClr val="2B2B2B"/>
+                </a:solidFill>
+                <a:latin typeface="Calibri"/>
+              </a:rPr>
+              <a:t>●   </a:t>
+            </a:r>
+            <a:r>
+              <a:rPr sz="1500" b="1" i="0">
+                <a:solidFill>
+                  <a:srgbClr val="2B2B2B"/>
+                </a:solidFill>
+                <a:latin typeface="Calibri"/>
+              </a:rPr>
+              <a:t>Canal:</a:t>
+            </a:r>
+            <a:r>
+              <a:rPr sz="1500" b="0" i="0">
+                <a:solidFill>
+                  <a:srgbClr val="2B2B2B"/>
+                </a:solidFill>
+                <a:latin typeface="Calibri"/>
+              </a:rPr>
+              <a:t> CDigital para todo lo que se entrega y se califica.</a:t>
+            </a:r>
+          </a:p>
+          <a:p>
+            <a:pPr lvl="1">
+              <a:spcAft>
+                <a:spcPts val="600"/>
+              </a:spcAft>
+            </a:pPr>
+            <a:r>
+              <a:rPr sz="1500" b="0" i="0">
+                <a:solidFill>
+                  <a:srgbClr val="2B2B2B"/>
+                </a:solidFill>
+                <a:latin typeface="Calibri"/>
+              </a:rPr>
+              <a:t>●   </a:t>
+            </a:r>
+            <a:r>
+              <a:rPr sz="1500" b="1" i="0">
+                <a:solidFill>
+                  <a:srgbClr val="2B2B2B"/>
+                </a:solidFill>
+                <a:latin typeface="Calibri"/>
+              </a:rPr>
+              <a:t>Festivos:</a:t>
+            </a:r>
+            <a:r>
+              <a:rPr sz="1500" b="0" i="0">
+                <a:solidFill>
+                  <a:srgbClr val="2B2B2B"/>
+                </a:solidFill>
+                <a:latin typeface="Calibri"/>
+              </a:rPr>
+              <a:t> lunes festivo = </a:t>
+            </a:r>
+            <a:r>
+              <a:rPr sz="1500" b="1" i="0">
+                <a:solidFill>
+                  <a:srgbClr val="2B2B2B"/>
+                </a:solidFill>
+                <a:latin typeface="Calibri"/>
+              </a:rPr>
+              <a:t>clase autónoma</a:t>
+            </a:r>
+            <a:r>
+              <a:rPr sz="1500" b="0" i="0">
+                <a:solidFill>
+                  <a:srgbClr val="2B2B2B"/>
+                </a:solidFill>
+                <a:latin typeface="Calibri"/>
+              </a:rPr>
+              <a:t>. La actividad queda en la carpeta de esa sesión en el </a:t>
+            </a:r>
+            <a:r>
+              <a:rPr sz="1500" b="1" i="0">
+                <a:solidFill>
+                  <a:srgbClr val="2B2B2B"/>
+                </a:solidFill>
+                <a:latin typeface="Calibri"/>
+              </a:rPr>
+              <a:t>Drive de clases</a:t>
+            </a:r>
+            <a:r>
+              <a:rPr sz="1500" b="0" i="0">
+                <a:solidFill>
+                  <a:srgbClr val="2B2B2B"/>
+                </a:solidFill>
+                <a:latin typeface="Calibri"/>
+              </a:rPr>
+              <a:t>; la entrega sigue siendo en CDigital.</a:t>
+            </a:r>
+          </a:p>
+          <a:p>
+            <a:pPr lvl="1">
+              <a:spcAft>
+                <a:spcPts val="600"/>
+              </a:spcAft>
+            </a:pPr>
+            <a:r>
+              <a:rPr sz="1500" b="0" i="0">
+                <a:solidFill>
+                  <a:srgbClr val="2B2B2B"/>
+                </a:solidFill>
+                <a:latin typeface="Calibri"/>
+              </a:rPr>
+              <a:t>●   </a:t>
+            </a:r>
+            <a:r>
+              <a:rPr sz="1500" b="1" i="0">
+                <a:solidFill>
+                  <a:srgbClr val="2B2B2B"/>
+                </a:solidFill>
+                <a:latin typeface="Calibri"/>
+              </a:rPr>
+              <a:t>Retroalimentación:</a:t>
+            </a:r>
+            <a:r>
+              <a:rPr sz="1500" b="0" i="0">
+                <a:solidFill>
+                  <a:srgbClr val="2B2B2B"/>
+                </a:solidFill>
+                <a:latin typeface="Calibri"/>
+              </a:rPr>
+              <a:t> el Docente comenta sobre lo entregado; sin entrega no hay retroalimentación posible.</a:t>
             </a:r>
           </a:p>
           <a:p>
@@ -4250,177 +4243,7 @@
                 </a:solidFill>
                 <a:latin typeface="Calibri"/>
               </a:rPr>
-              <a:t>–   Al cerrar el periodo su documento debe tener:</a:t>
-            </a:r>
-          </a:p>
-          <a:p>
-            <a:pPr lvl="1">
-              <a:spcAft>
-                <a:spcPts val="600"/>
-              </a:spcAft>
-            </a:pPr>
-            <a:r>
-              <a:rPr sz="1500" b="0" i="0">
-                <a:solidFill>
-                  <a:srgbClr val="2B2B2B"/>
-                </a:solidFill>
-                <a:latin typeface="Calibri"/>
-              </a:rPr>
-              <a:t>●   </a:t>
-            </a:r>
-            <a:r>
-              <a:rPr sz="1500" b="1" i="0">
-                <a:solidFill>
-                  <a:srgbClr val="2B2B2B"/>
-                </a:solidFill>
-                <a:latin typeface="Calibri"/>
-              </a:rPr>
-              <a:t>Planteamiento del problema</a:t>
-            </a:r>
-            <a:r>
-              <a:rPr sz="1500" b="0" i="0">
-                <a:solidFill>
-                  <a:srgbClr val="2B2B2B"/>
-                </a:solidFill>
-                <a:latin typeface="Calibri"/>
-              </a:rPr>
-              <a:t>, pregunta y objetivos definitivos.</a:t>
-            </a:r>
-          </a:p>
-          <a:p>
-            <a:pPr lvl="1">
-              <a:spcAft>
-                <a:spcPts val="600"/>
-              </a:spcAft>
-            </a:pPr>
-            <a:r>
-              <a:rPr sz="1500" b="0" i="0">
-                <a:solidFill>
-                  <a:srgbClr val="2B2B2B"/>
-                </a:solidFill>
-                <a:latin typeface="Calibri"/>
-              </a:rPr>
-              <a:t>●   </a:t>
-            </a:r>
-            <a:r>
-              <a:rPr sz="1500" b="1" i="0">
-                <a:solidFill>
-                  <a:srgbClr val="2B2B2B"/>
-                </a:solidFill>
-                <a:latin typeface="Calibri"/>
-              </a:rPr>
-              <a:t>Marco referencial</a:t>
-            </a:r>
-            <a:r>
-              <a:rPr sz="1500" b="0" i="0">
-                <a:solidFill>
-                  <a:srgbClr val="2B2B2B"/>
-                </a:solidFill>
-                <a:latin typeface="Calibri"/>
-              </a:rPr>
-              <a:t>: antecedentes, marco teórico, conceptual y contextual, citados en APA 7.</a:t>
-            </a:r>
-          </a:p>
-          <a:p>
-            <a:pPr lvl="1">
-              <a:spcAft>
-                <a:spcPts val="600"/>
-              </a:spcAft>
-            </a:pPr>
-            <a:r>
-              <a:rPr sz="1500" b="0" i="0">
-                <a:solidFill>
-                  <a:srgbClr val="2B2B2B"/>
-                </a:solidFill>
-                <a:latin typeface="Calibri"/>
-              </a:rPr>
-              <a:t>●   </a:t>
-            </a:r>
-            <a:r>
-              <a:rPr sz="1500" b="1" i="0">
-                <a:solidFill>
-                  <a:srgbClr val="2B2B2B"/>
-                </a:solidFill>
-                <a:latin typeface="Calibri"/>
-              </a:rPr>
-              <a:t>Metodología propuesta</a:t>
-            </a:r>
-            <a:r>
-              <a:rPr sz="1500" b="0" i="0">
-                <a:solidFill>
-                  <a:srgbClr val="2B2B2B"/>
-                </a:solidFill>
-                <a:latin typeface="Calibri"/>
-              </a:rPr>
-              <a:t> (en futuro: “se aplicará”, “se propone”), con instrumentos bosquejados.</a:t>
-            </a:r>
-          </a:p>
-          <a:p>
-            <a:pPr lvl="1">
-              <a:spcAft>
-                <a:spcPts val="600"/>
-              </a:spcAft>
-            </a:pPr>
-            <a:r>
-              <a:rPr sz="1500" b="0" i="0">
-                <a:solidFill>
-                  <a:srgbClr val="2B2B2B"/>
-                </a:solidFill>
-                <a:latin typeface="Calibri"/>
-              </a:rPr>
-              <a:t>●   Una </a:t>
-            </a:r>
-            <a:r>
-              <a:rPr sz="1500" b="1" i="0">
-                <a:solidFill>
-                  <a:srgbClr val="2B2B2B"/>
-                </a:solidFill>
-                <a:latin typeface="Calibri"/>
-              </a:rPr>
-              <a:t>lista de pendientes para TG3</a:t>
-            </a:r>
-            <a:r>
-              <a:rPr sz="1500" b="0" i="0">
-                <a:solidFill>
-                  <a:srgbClr val="2B2B2B"/>
-                </a:solidFill>
-                <a:latin typeface="Calibri"/>
-              </a:rPr>
-              <a:t>, explícita y en imperativo.</a:t>
-            </a:r>
-          </a:p>
-          <a:p>
-            <a:pPr>
-              <a:spcAft>
-                <a:spcPts val="1000"/>
-              </a:spcAft>
-            </a:pPr>
-            <a:r>
-              <a:rPr sz="1600" b="0" i="0">
-                <a:solidFill>
-                  <a:srgbClr val="2B2B2B"/>
-                </a:solidFill>
-                <a:latin typeface="Calibri"/>
-              </a:rPr>
-              <a:t>–   Para qué le sirve después: quien llega a TG3 con esto hecho </a:t>
-            </a:r>
-            <a:r>
-              <a:rPr sz="1600" b="1" i="0">
-                <a:solidFill>
-                  <a:srgbClr val="2B2B2B"/>
-                </a:solidFill>
-                <a:latin typeface="Calibri"/>
-              </a:rPr>
-              <a:t>arranca ejecutando</a:t>
-            </a:r>
-            <a:r>
-              <a:rPr sz="1600" b="0" i="0">
-                <a:solidFill>
-                  <a:srgbClr val="2B2B2B"/>
-                </a:solidFill>
-                <a:latin typeface="Calibri"/>
-              </a:rPr>
-              <a:t>; quien llega sin esto, repite TG2 dentro de TG3 y no alcanza a sustentar.</a:t>
+              <a:t>–   No es un trámite: es lo que se invoca cuando alguien dice “yo no sabía”. Léalo antes de aceptarlo.</a:t>
             </a:r>
           </a:p>
         </p:txBody>
@@ -4460,40 +4283,6 @@
           </a:p>
         </p:txBody>
       </p:sp>
-      <p:sp>
-        <p:nvSpPr>
-          <p:cNvPr id="6" name="TextBox 5"/>
-          <p:cNvSpPr txBox="1"/>
-          <p:nvPr/>
-        </p:nvSpPr>
-        <p:spPr>
-          <a:xfrm>
-            <a:off x="640080" y="5943600"/>
-            <a:ext cx="9997135" cy="457200"/>
-          </a:xfrm>
-          <a:prstGeom prst="rect">
-            <a:avLst/>
-          </a:prstGeom>
-          <a:noFill/>
-        </p:spPr>
-        <p:txBody>
-          <a:bodyPr wrap="square" anchor="t" lIns="0" rIns="0" tIns="0" bIns="0">
-            <a:spAutoFit/>
-          </a:bodyPr>
-          <a:lstStyle/>
-          <a:p>
-            <a:r>
-              <a:rPr sz="1200" b="0" i="1">
-                <a:solidFill>
-                  <a:srgbClr val="2B2B2B"/>
-                </a:solidFill>
-                <a:latin typeface="Calibri"/>
-              </a:rPr>
-              <a:t>Aquí no hay resultados todavía: el trabajo de campo es de TG3. Prometer hallazgos en este avance es el error que más se arrastra.</a:t>
-            </a:r>
-          </a:p>
-        </p:txBody>
-      </p:sp>
     </p:spTree>
   </p:cSld>
   <p:clrMapOvr>
@@ -4503,441 +4292,6 @@
 </file>
 
 <file path=ppt/slides/slide12.xml><?xml version="1.0" encoding="utf-8"?>
-<p:sld xmlns:a="http://schemas.openxmlformats.org/drawingml/2006/main" xmlns:p="http://schemas.openxmlformats.org/presentationml/2006/main" xmlns:r="http://schemas.openxmlformats.org/officeDocument/2006/relationships">
-  <p:cSld>
-    <p:bg>
-      <p:bgPr>
-        <a:solidFill>
-          <a:srgbClr val="FFFFFF"/>
-        </a:solidFill>
-        <a:effectLst/>
-      </p:bgPr>
-    </p:bg>
-    <p:spTree>
-      <p:nvGrpSpPr>
-        <p:cNvPr id="1" name=""/>
-        <p:cNvGrpSpPr/>
-        <p:nvPr/>
-      </p:nvGrpSpPr>
-      <p:grpSpPr/>
-      <p:sp>
-        <p:nvSpPr>
-          <p:cNvPr id="2" name="Rectangle 1"/>
-          <p:cNvSpPr/>
-          <p:nvPr/>
-        </p:nvSpPr>
-        <p:spPr>
-          <a:xfrm>
-            <a:off x="0" y="0"/>
-            <a:ext cx="12191695" cy="1188720"/>
-          </a:xfrm>
-          <a:prstGeom prst="rect">
-            <a:avLst/>
-          </a:prstGeom>
-          <a:solidFill>
-            <a:srgbClr val="0C2340"/>
-          </a:solidFill>
-          <a:ln>
-            <a:noFill/>
-          </a:ln>
-          <a:effectLst/>
-        </p:spPr>
-        <p:style>
-          <a:lnRef idx="1">
-            <a:schemeClr val="accent1"/>
-          </a:lnRef>
-          <a:fillRef idx="3">
-            <a:schemeClr val="accent1"/>
-          </a:fillRef>
-          <a:effectRef idx="2">
-            <a:schemeClr val="accent1"/>
-          </a:effectRef>
-          <a:fontRef idx="minor">
-            <a:schemeClr val="lt1"/>
-          </a:fontRef>
-        </p:style>
-        <p:txBody>
-          <a:bodyPr rtlCol="0" anchor="ctr"/>
-          <a:lstStyle/>
-          <a:p>
-            <a:pPr algn="ctr"/>
-          </a:p>
-        </p:txBody>
-      </p:sp>
-      <p:sp>
-        <p:nvSpPr>
-          <p:cNvPr id="3" name="TextBox 2"/>
-          <p:cNvSpPr txBox="1"/>
-          <p:nvPr/>
-        </p:nvSpPr>
-        <p:spPr>
-          <a:xfrm>
-            <a:off x="640080" y="0"/>
-            <a:ext cx="9082735" cy="1188720"/>
-          </a:xfrm>
-          <a:prstGeom prst="rect">
-            <a:avLst/>
-          </a:prstGeom>
-          <a:noFill/>
-        </p:spPr>
-        <p:txBody>
-          <a:bodyPr wrap="square" anchor="ctr" lIns="0" rIns="0" tIns="0" bIns="0">
-            <a:spAutoFit/>
-          </a:bodyPr>
-          <a:lstStyle/>
-          <a:p>
-            <a:pPr algn="ctr"/>
-            <a:r>
-              <a:rPr sz="2600" b="1" i="0">
-                <a:solidFill>
-                  <a:srgbClr val="FFFFFF"/>
-                </a:solidFill>
-                <a:latin typeface="Calibri"/>
-              </a:rPr>
-              <a:t>El acuerdo pedagógico: qué pactamos hoy</a:t>
-            </a:r>
-          </a:p>
-        </p:txBody>
-      </p:sp>
-      <p:sp>
-        <p:nvSpPr>
-          <p:cNvPr id="4" name="TextBox 3"/>
-          <p:cNvSpPr txBox="1"/>
-          <p:nvPr/>
-        </p:nvSpPr>
-        <p:spPr>
-          <a:xfrm>
-            <a:off x="640080" y="1691639"/>
-            <a:ext cx="10911535" cy="4617720"/>
-          </a:xfrm>
-          <a:prstGeom prst="rect">
-            <a:avLst/>
-          </a:prstGeom>
-          <a:noFill/>
-        </p:spPr>
-        <p:txBody>
-          <a:bodyPr wrap="square" anchor="t" lIns="0" rIns="0" tIns="0" bIns="0">
-            <a:spAutoFit/>
-          </a:bodyPr>
-          <a:lstStyle/>
-          <a:p>
-            <a:pPr>
-              <a:spcAft>
-                <a:spcPts val="1000"/>
-              </a:spcAft>
-            </a:pPr>
-            <a:r>
-              <a:rPr sz="1600" b="0" i="0">
-                <a:solidFill>
-                  <a:srgbClr val="2B2B2B"/>
-                </a:solidFill>
-                <a:latin typeface="Calibri"/>
-              </a:rPr>
-              <a:t>–   Es el </a:t>
-            </a:r>
-            <a:r>
-              <a:rPr sz="1600" b="1" i="0">
-                <a:solidFill>
-                  <a:srgbClr val="2B2B2B"/>
-                </a:solidFill>
-                <a:latin typeface="Calibri"/>
-              </a:rPr>
-              <a:t>pacto de trabajo del curso</a:t>
-            </a:r>
-            <a:r>
-              <a:rPr sz="1600" b="0" i="0">
-                <a:solidFill>
-                  <a:srgbClr val="2B2B2B"/>
-                </a:solidFill>
-                <a:latin typeface="Calibri"/>
-              </a:rPr>
-              <a:t>, y se deja por escrito hoy en el espacio del curso en CDigital.</a:t>
-            </a:r>
-          </a:p>
-          <a:p>
-            <a:pPr>
-              <a:spcAft>
-                <a:spcPts val="1000"/>
-              </a:spcAft>
-            </a:pPr>
-            <a:r>
-              <a:rPr sz="1600" b="0" i="0">
-                <a:solidFill>
-                  <a:srgbClr val="2B2B2B"/>
-                </a:solidFill>
-                <a:latin typeface="Calibri"/>
-              </a:rPr>
-              <a:t>–   Qué contiene, punto por punto:</a:t>
-            </a:r>
-          </a:p>
-          <a:p>
-            <a:pPr lvl="1">
-              <a:spcAft>
-                <a:spcPts val="600"/>
-              </a:spcAft>
-            </a:pPr>
-            <a:r>
-              <a:rPr sz="1500" b="0" i="0">
-                <a:solidFill>
-                  <a:srgbClr val="2B2B2B"/>
-                </a:solidFill>
-                <a:latin typeface="Calibri"/>
-              </a:rPr>
-              <a:t>●   </a:t>
-            </a:r>
-            <a:r>
-              <a:rPr sz="1500" b="1" i="0">
-                <a:solidFill>
-                  <a:srgbClr val="2B2B2B"/>
-                </a:solidFill>
-                <a:latin typeface="Calibri"/>
-              </a:rPr>
-              <a:t>Ritmo:</a:t>
-            </a:r>
-            <a:r>
-              <a:rPr sz="1500" b="0" i="0">
-                <a:solidFill>
-                  <a:srgbClr val="2B2B2B"/>
-                </a:solidFill>
-                <a:latin typeface="Calibri"/>
-              </a:rPr>
-              <a:t> una sección escrita por sesión, subida antes del siguiente encuentro.</a:t>
-            </a:r>
-          </a:p>
-          <a:p>
-            <a:pPr lvl="1">
-              <a:spcAft>
-                <a:spcPts val="600"/>
-              </a:spcAft>
-            </a:pPr>
-            <a:r>
-              <a:rPr sz="1500" b="0" i="0">
-                <a:solidFill>
-                  <a:srgbClr val="2B2B2B"/>
-                </a:solidFill>
-                <a:latin typeface="Calibri"/>
-              </a:rPr>
-              <a:t>●   </a:t>
-            </a:r>
-            <a:r>
-              <a:rPr sz="1500" b="1" i="0">
-                <a:solidFill>
-                  <a:srgbClr val="2B2B2B"/>
-                </a:solidFill>
-                <a:latin typeface="Calibri"/>
-              </a:rPr>
-              <a:t>Formato:</a:t>
-            </a:r>
-            <a:r>
-              <a:rPr sz="1500" b="0" i="0">
-                <a:solidFill>
-                  <a:srgbClr val="2B2B2B"/>
-                </a:solidFill>
-                <a:latin typeface="Calibri"/>
-              </a:rPr>
-              <a:t> plantilla APA CUN, abierta en Google Docs.</a:t>
-            </a:r>
-          </a:p>
-          <a:p>
-            <a:pPr lvl="1">
-              <a:spcAft>
-                <a:spcPts val="600"/>
-              </a:spcAft>
-            </a:pPr>
-            <a:r>
-              <a:rPr sz="1500" b="0" i="0">
-                <a:solidFill>
-                  <a:srgbClr val="2B2B2B"/>
-                </a:solidFill>
-                <a:latin typeface="Calibri"/>
-              </a:rPr>
-              <a:t>●   </a:t>
-            </a:r>
-            <a:r>
-              <a:rPr sz="1500" b="1" i="0">
-                <a:solidFill>
-                  <a:srgbClr val="2B2B2B"/>
-                </a:solidFill>
-                <a:latin typeface="Calibri"/>
-              </a:rPr>
-              <a:t>Canal:</a:t>
-            </a:r>
-            <a:r>
-              <a:rPr sz="1500" b="0" i="0">
-                <a:solidFill>
-                  <a:srgbClr val="2B2B2B"/>
-                </a:solidFill>
-                <a:latin typeface="Calibri"/>
-              </a:rPr>
-              <a:t> CDigital para todo lo que se entrega y se califica.</a:t>
-            </a:r>
-          </a:p>
-          <a:p>
-            <a:pPr lvl="1">
-              <a:spcAft>
-                <a:spcPts val="600"/>
-              </a:spcAft>
-            </a:pPr>
-            <a:r>
-              <a:rPr sz="1500" b="0" i="0">
-                <a:solidFill>
-                  <a:srgbClr val="2B2B2B"/>
-                </a:solidFill>
-                <a:latin typeface="Calibri"/>
-              </a:rPr>
-              <a:t>●   </a:t>
-            </a:r>
-            <a:r>
-              <a:rPr sz="1500" b="1" i="0">
-                <a:solidFill>
-                  <a:srgbClr val="2B2B2B"/>
-                </a:solidFill>
-                <a:latin typeface="Calibri"/>
-              </a:rPr>
-              <a:t>Festivos:</a:t>
-            </a:r>
-            <a:r>
-              <a:rPr sz="1500" b="0" i="0">
-                <a:solidFill>
-                  <a:srgbClr val="2B2B2B"/>
-                </a:solidFill>
-                <a:latin typeface="Calibri"/>
-              </a:rPr>
-              <a:t> lunes festivo = </a:t>
-            </a:r>
-            <a:r>
-              <a:rPr sz="1500" b="1" i="0">
-                <a:solidFill>
-                  <a:srgbClr val="2B2B2B"/>
-                </a:solidFill>
-                <a:latin typeface="Calibri"/>
-              </a:rPr>
-              <a:t>clase autónoma</a:t>
-            </a:r>
-            <a:r>
-              <a:rPr sz="1500" b="0" i="0">
-                <a:solidFill>
-                  <a:srgbClr val="2B2B2B"/>
-                </a:solidFill>
-                <a:latin typeface="Calibri"/>
-              </a:rPr>
-              <a:t>. La actividad queda en la carpeta de esa sesión en el </a:t>
-            </a:r>
-            <a:r>
-              <a:rPr sz="1500" b="1" i="0">
-                <a:solidFill>
-                  <a:srgbClr val="2B2B2B"/>
-                </a:solidFill>
-                <a:latin typeface="Calibri"/>
-              </a:rPr>
-              <a:t>Drive de clases</a:t>
-            </a:r>
-            <a:r>
-              <a:rPr sz="1500" b="0" i="0">
-                <a:solidFill>
-                  <a:srgbClr val="2B2B2B"/>
-                </a:solidFill>
-                <a:latin typeface="Calibri"/>
-              </a:rPr>
-              <a:t>; la entrega sigue siendo en CDigital.</a:t>
-            </a:r>
-          </a:p>
-          <a:p>
-            <a:pPr lvl="1">
-              <a:spcAft>
-                <a:spcPts val="600"/>
-              </a:spcAft>
-            </a:pPr>
-            <a:r>
-              <a:rPr sz="1500" b="0" i="0">
-                <a:solidFill>
-                  <a:srgbClr val="2B2B2B"/>
-                </a:solidFill>
-                <a:latin typeface="Calibri"/>
-              </a:rPr>
-              <a:t>●   </a:t>
-            </a:r>
-            <a:r>
-              <a:rPr sz="1500" b="1" i="0">
-                <a:solidFill>
-                  <a:srgbClr val="2B2B2B"/>
-                </a:solidFill>
-                <a:latin typeface="Calibri"/>
-              </a:rPr>
-              <a:t>Retroalimentación:</a:t>
-            </a:r>
-            <a:r>
-              <a:rPr sz="1500" b="0" i="0">
-                <a:solidFill>
-                  <a:srgbClr val="2B2B2B"/>
-                </a:solidFill>
-                <a:latin typeface="Calibri"/>
-              </a:rPr>
-              <a:t> el Docente comenta sobre lo entregado; sin entrega no hay retroalimentación posible.</a:t>
-            </a:r>
-          </a:p>
-          <a:p>
-            <a:pPr>
-              <a:spcAft>
-                <a:spcPts val="1000"/>
-              </a:spcAft>
-            </a:pPr>
-            <a:r>
-              <a:rPr sz="1600" b="0" i="0">
-                <a:solidFill>
-                  <a:srgbClr val="2B2B2B"/>
-                </a:solidFill>
-                <a:latin typeface="Calibri"/>
-              </a:rPr>
-              <a:t>–   No es un trámite: es lo que se invoca cuando alguien dice “yo no sabía”. Léalo antes de aceptarlo.</a:t>
-            </a:r>
-          </a:p>
-        </p:txBody>
-      </p:sp>
-      <p:sp>
-        <p:nvSpPr>
-          <p:cNvPr id="5" name="TextBox 4"/>
-          <p:cNvSpPr txBox="1"/>
-          <p:nvPr/>
-        </p:nvSpPr>
-        <p:spPr>
-          <a:xfrm>
-            <a:off x="11094415" y="6446520"/>
-            <a:ext cx="548640" cy="274320"/>
-          </a:xfrm>
-          <a:prstGeom prst="rect">
-            <a:avLst/>
-          </a:prstGeom>
-          <a:noFill/>
-        </p:spPr>
-        <p:txBody>
-          <a:bodyPr wrap="square" anchor="t" lIns="0" rIns="0" tIns="0" bIns="0">
-            <a:spAutoFit/>
-          </a:bodyPr>
-          <a:lstStyle/>
-          <a:p>
-            <a:pPr algn="r"/>
-            <a:r>
-              <a:rPr sz="1000" b="1" i="0">
-                <a:solidFill>
-                  <a:srgbClr val="8F989D"/>
-                </a:solidFill>
-                <a:latin typeface="Calibri"/>
-              </a:rPr>
-              <a:t>12</a:t>
-            </a:r>
-          </a:p>
-        </p:txBody>
-      </p:sp>
-    </p:spTree>
-  </p:cSld>
-  <p:clrMapOvr>
-    <a:masterClrMapping/>
-  </p:clrMapOvr>
-</p:sld>
-</file>
-
-<file path=ppt/slides/slide13.xml><?xml version="1.0" encoding="utf-8"?>
 <p:sld xmlns:a="http://schemas.openxmlformats.org/drawingml/2006/main" xmlns:p="http://schemas.openxmlformats.org/presentationml/2006/main" xmlns:r="http://schemas.openxmlformats.org/officeDocument/2006/relationships">
   <p:cSld>
     <p:bg>
@@ -5637,7 +4991,7 @@
                 </a:solidFill>
                 <a:latin typeface="Calibri"/>
               </a:rPr>
-              <a:t>13</a:t>
+              <a:t>12</a:t>
             </a:r>
           </a:p>
         </p:txBody>
@@ -5650,7 +5004,7 @@
 </p:sld>
 </file>
 
-<file path=ppt/slides/slide14.xml><?xml version="1.0" encoding="utf-8"?>
+<file path=ppt/slides/slide13.xml><?xml version="1.0" encoding="utf-8"?>
 <p:sld xmlns:a="http://schemas.openxmlformats.org/drawingml/2006/main" xmlns:p="http://schemas.openxmlformats.org/presentationml/2006/main" xmlns:r="http://schemas.openxmlformats.org/officeDocument/2006/relationships">
   <p:cSld>
     <p:bg>
@@ -6232,7 +5586,7 @@
                 </a:solidFill>
                 <a:latin typeface="Calibri"/>
               </a:rPr>
-              <a:t>14</a:t>
+              <a:t>13</a:t>
             </a:r>
           </a:p>
         </p:txBody>
@@ -6245,7 +5599,7 @@
 </p:sld>
 </file>
 
-<file path=ppt/slides/slide15.xml><?xml version="1.0" encoding="utf-8"?>
+<file path=ppt/slides/slide14.xml><?xml version="1.0" encoding="utf-8"?>
 <p:sld xmlns:a="http://schemas.openxmlformats.org/drawingml/2006/main" xmlns:p="http://schemas.openxmlformats.org/presentationml/2006/main" xmlns:r="http://schemas.openxmlformats.org/officeDocument/2006/relationships">
   <p:cSld>
     <p:bg>
@@ -6631,7 +5985,7 @@
                 </a:solidFill>
                 <a:latin typeface="Calibri"/>
               </a:rPr>
-              <a:t>15</a:t>
+              <a:t>14</a:t>
             </a:r>
           </a:p>
         </p:txBody>
@@ -6696,7 +6050,7 @@
 </p:sld>
 </file>
 
-<file path=ppt/slides/slide16.xml><?xml version="1.0" encoding="utf-8"?>
+<file path=ppt/slides/slide15.xml><?xml version="1.0" encoding="utf-8"?>
 <p:sld xmlns:a="http://schemas.openxmlformats.org/drawingml/2006/main" xmlns:p="http://schemas.openxmlformats.org/presentationml/2006/main" xmlns:r="http://schemas.openxmlformats.org/officeDocument/2006/relationships">
   <p:cSld>
     <p:bg>
@@ -7132,7 +6486,7 @@
                 </a:solidFill>
                 <a:latin typeface="Calibri"/>
               </a:rPr>
-              <a:t>16</a:t>
+              <a:t>15</a:t>
             </a:r>
           </a:p>
         </p:txBody>
@@ -7145,7 +6499,7 @@
 </p:sld>
 </file>
 
-<file path=ppt/slides/slide17.xml><?xml version="1.0" encoding="utf-8"?>
+<file path=ppt/slides/slide16.xml><?xml version="1.0" encoding="utf-8"?>
 <p:sld xmlns:a="http://schemas.openxmlformats.org/drawingml/2006/main" xmlns:p="http://schemas.openxmlformats.org/presentationml/2006/main" xmlns:r="http://schemas.openxmlformats.org/officeDocument/2006/relationships">
   <p:cSld>
     <p:bg>
@@ -7901,7 +7255,7 @@
                 </a:solidFill>
                 <a:latin typeface="Calibri"/>
               </a:rPr>
-              <a:t>17</a:t>
+              <a:t>16</a:t>
             </a:r>
           </a:p>
         </p:txBody>
@@ -7914,7 +7268,7 @@
 </p:sld>
 </file>
 
-<file path=ppt/slides/slide18.xml><?xml version="1.0" encoding="utf-8"?>
+<file path=ppt/slides/slide17.xml><?xml version="1.0" encoding="utf-8"?>
 <p:sld xmlns:a="http://schemas.openxmlformats.org/drawingml/2006/main" xmlns:p="http://schemas.openxmlformats.org/presentationml/2006/main" xmlns:r="http://schemas.openxmlformats.org/officeDocument/2006/relationships">
   <p:cSld>
     <p:bg>
@@ -8327,7 +7681,7 @@
                 </a:solidFill>
                 <a:latin typeface="Calibri"/>
               </a:rPr>
-              <a:t>18</a:t>
+              <a:t>17</a:t>
             </a:r>
           </a:p>
         </p:txBody>
@@ -8340,7 +7694,7 @@
 </p:sld>
 </file>
 
-<file path=ppt/slides/slide19.xml><?xml version="1.0" encoding="utf-8"?>
+<file path=ppt/slides/slide18.xml><?xml version="1.0" encoding="utf-8"?>
 <p:sld xmlns:a="http://schemas.openxmlformats.org/drawingml/2006/main" xmlns:p="http://schemas.openxmlformats.org/presentationml/2006/main" xmlns:r="http://schemas.openxmlformats.org/officeDocument/2006/relationships">
   <p:cSld>
     <p:bg>
@@ -8812,7 +8166,7 @@
                 </a:solidFill>
                 <a:latin typeface="Calibri"/>
               </a:rPr>
-              <a:t>19</a:t>
+              <a:t>18</a:t>
             </a:r>
           </a:p>
         </p:txBody>
@@ -8825,7 +8179,7 @@
 </p:sld>
 </file>
 
-<file path=ppt/slides/slide2.xml><?xml version="1.0" encoding="utf-8"?>
+<file path=ppt/slides/slide19.xml><?xml version="1.0" encoding="utf-8"?>
 <p:sld xmlns:a="http://schemas.openxmlformats.org/drawingml/2006/main" xmlns:p="http://schemas.openxmlformats.org/presentationml/2006/main" xmlns:r="http://schemas.openxmlformats.org/officeDocument/2006/relationships">
   <p:cSld>
     <p:bg>
@@ -8917,21 +8271,65 @@
                 </a:solidFill>
                 <a:latin typeface="Calibri"/>
               </a:rPr>
-              <a:t>AGENDA DE HOY</a:t>
-            </a:r>
-          </a:p>
-        </p:txBody>
-      </p:sp>
-      <p:sp>
-        <p:nvSpPr>
-          <p:cNvPr id="4" name="TextBox 3"/>
+              <a:t>Preguntas frecuentes del primer día</a:t>
+            </a:r>
+          </a:p>
+        </p:txBody>
+      </p:sp>
+      <p:sp>
+        <p:nvSpPr>
+          <p:cNvPr id="4" name="Rounded Rectangle 3"/>
+          <p:cNvSpPr/>
+          <p:nvPr/>
+        </p:nvSpPr>
+        <p:spPr>
+          <a:xfrm>
+            <a:off x="640080" y="1737360"/>
+            <a:ext cx="10911535" cy="1481328"/>
+          </a:xfrm>
+          <a:prstGeom prst="roundRect">
+            <a:avLst/>
+          </a:prstGeom>
+          <a:solidFill>
+            <a:srgbClr val="E8F5EC"/>
+          </a:solidFill>
+          <a:ln>
+            <a:noFill/>
+          </a:ln>
+          <a:effectLst/>
+        </p:spPr>
+        <p:style>
+          <a:lnRef idx="1">
+            <a:schemeClr val="accent1"/>
+          </a:lnRef>
+          <a:fillRef idx="3">
+            <a:schemeClr val="accent1"/>
+          </a:fillRef>
+          <a:effectRef idx="2">
+            <a:schemeClr val="accent1"/>
+          </a:effectRef>
+          <a:fontRef idx="minor">
+            <a:schemeClr val="lt1"/>
+          </a:fontRef>
+        </p:style>
+        <p:txBody>
+          <a:bodyPr rtlCol="0" anchor="ctr"/>
+          <a:lstStyle/>
+          <a:p>
+            <a:pPr algn="ctr"/>
+          </a:p>
+        </p:txBody>
+      </p:sp>
+      <p:sp>
+        <p:nvSpPr>
+          <p:cNvPr id="5" name="TextBox 4"/>
           <p:cNvSpPr txBox="1"/>
           <p:nvPr/>
         </p:nvSpPr>
         <p:spPr>
           <a:xfrm>
-            <a:off x="640080" y="1280160"/>
-            <a:ext cx="10911535" cy="411480"/>
+            <a:off x="868680" y="1847088"/>
+            <a:ext cx="10454335" cy="1261872"/>
           </a:xfrm>
           <a:prstGeom prst="rect">
             <a:avLst/>
@@ -8944,29 +8342,115 @@
           </a:bodyPr>
           <a:lstStyle/>
           <a:p>
+            <a:r>
+              <a:rPr sz="1300" b="1" i="0">
+                <a:solidFill>
+                  <a:srgbClr val="0C2340"/>
+                </a:solidFill>
+                <a:latin typeface="Calibri"/>
+              </a:rPr>
+              <a:t>ℹ️ Nota institucional</a:t>
+            </a:r>
+          </a:p>
+          <a:p>
+            <a:pPr>
+              <a:spcBef>
+                <a:spcPts val="400"/>
+              </a:spcBef>
+            </a:pPr>
+            <a:r>
+              <a:rPr sz="1300" b="1" i="0">
+                <a:solidFill>
+                  <a:srgbClr val="2B2B2B"/>
+                </a:solidFill>
+                <a:latin typeface="Calibri"/>
+              </a:rPr>
+              <a:t>“¿Esto se pierde fácil?”</a:t>
+            </a:r>
+            <a:r>
+              <a:rPr sz="1300" b="0" i="0">
+                <a:solidFill>
+                  <a:srgbClr val="2B2B2B"/>
+                </a:solidFill>
+                <a:latin typeface="Calibri"/>
+              </a:rPr>
+              <a:t> Se pierde por dejar pasar la ventana de un quiz o un parcial y por no entregar la ACA Final; casi nunca por escribir mal. El documento se corrige; la ventana cerrada, no. </a:t>
+            </a:r>
+            <a:r>
+              <a:rPr sz="1300" b="1" i="0">
+                <a:solidFill>
+                  <a:srgbClr val="2B2B2B"/>
+                </a:solidFill>
+                <a:latin typeface="Calibri"/>
+              </a:rPr>
+              <a:t>“¿Puedo trabajar solo?”</a:t>
+            </a:r>
+            <a:r>
+              <a:rPr sz="1300" b="0" i="0">
+                <a:solidFill>
+                  <a:srgbClr val="2B2B2B"/>
+                </a:solidFill>
+                <a:latin typeface="Calibri"/>
+              </a:rPr>
+              <a:t> Según lo que autorice el programa: consúltelo hoy, no a mitad de periodo.</a:t>
+            </a:r>
+          </a:p>
+        </p:txBody>
+      </p:sp>
+      <p:sp>
+        <p:nvSpPr>
+          <p:cNvPr id="6" name="Rounded Rectangle 5"/>
+          <p:cNvSpPr/>
+          <p:nvPr/>
+        </p:nvSpPr>
+        <p:spPr>
+          <a:xfrm>
+            <a:off x="640080" y="3447288"/>
+            <a:ext cx="10911535" cy="1225296"/>
+          </a:xfrm>
+          <a:prstGeom prst="roundRect">
+            <a:avLst/>
+          </a:prstGeom>
+          <a:solidFill>
+            <a:srgbClr val="FBE4E4"/>
+          </a:solidFill>
+          <a:ln>
+            <a:noFill/>
+          </a:ln>
+          <a:effectLst/>
+        </p:spPr>
+        <p:style>
+          <a:lnRef idx="1">
+            <a:schemeClr val="accent1"/>
+          </a:lnRef>
+          <a:fillRef idx="3">
+            <a:schemeClr val="accent1"/>
+          </a:fillRef>
+          <a:effectRef idx="2">
+            <a:schemeClr val="accent1"/>
+          </a:effectRef>
+          <a:fontRef idx="minor">
+            <a:schemeClr val="lt1"/>
+          </a:fontRef>
+        </p:style>
+        <p:txBody>
+          <a:bodyPr rtlCol="0" anchor="ctr"/>
+          <a:lstStyle/>
+          <a:p>
             <a:pPr algn="ctr"/>
-            <a:r>
-              <a:rPr sz="1500" b="0" i="0">
-                <a:solidFill>
-                  <a:srgbClr val="2B2B2B"/>
-                </a:solidFill>
-                <a:latin typeface="Calibri"/>
-              </a:rPr>
-              <a:t>Sesión de encuadre — hoy no vemos tema; el contenido arranca en la Sesión 02.</a:t>
-            </a:r>
-          </a:p>
-        </p:txBody>
-      </p:sp>
-      <p:sp>
-        <p:nvSpPr>
-          <p:cNvPr id="5" name="TextBox 4"/>
+          </a:p>
+        </p:txBody>
+      </p:sp>
+      <p:sp>
+        <p:nvSpPr>
+          <p:cNvPr id="7" name="TextBox 6"/>
           <p:cNvSpPr txBox="1"/>
           <p:nvPr/>
         </p:nvSpPr>
         <p:spPr>
           <a:xfrm>
-            <a:off x="640080" y="2011679"/>
-            <a:ext cx="10911535" cy="4297680"/>
+            <a:off x="868680" y="3557016"/>
+            <a:ext cx="10454335" cy="1005840"/>
           </a:xfrm>
           <a:prstGeom prst="rect">
             <a:avLst/>
@@ -8979,180 +8463,185 @@
           </a:bodyPr>
           <a:lstStyle/>
           <a:p>
+            <a:r>
+              <a:rPr sz="1300" b="1" i="0">
+                <a:solidFill>
+                  <a:srgbClr val="0C2340"/>
+                </a:solidFill>
+                <a:latin typeface="Calibri"/>
+              </a:rPr>
+              <a:t>⚠️ Importante</a:t>
+            </a:r>
+          </a:p>
+          <a:p>
             <a:pPr>
-              <a:spcAft>
-                <a:spcPts val="1000"/>
-              </a:spcAft>
+              <a:spcBef>
+                <a:spcPts val="400"/>
+              </a:spcBef>
             </a:pPr>
             <a:r>
-              <a:rPr sz="1600" b="0" i="0">
-                <a:solidFill>
-                  <a:srgbClr val="2B2B2B"/>
-                </a:solidFill>
-                <a:latin typeface="Calibri"/>
-              </a:rPr>
-              <a:t>–   </a:t>
-            </a:r>
-            <a:r>
-              <a:rPr sz="1600" b="1" i="0">
-                <a:solidFill>
-                  <a:srgbClr val="2B2B2B"/>
-                </a:solidFill>
-                <a:latin typeface="Calibri"/>
-              </a:rPr>
-              <a:t>El curso:</a:t>
-            </a:r>
-            <a:r>
-              <a:rPr sz="1600" b="0" i="0">
-                <a:solidFill>
-                  <a:srgbClr val="2B2B2B"/>
-                </a:solidFill>
-                <a:latin typeface="Calibri"/>
-              </a:rPr>
-              <a:t> de qué se trata, cómo trabajamos y qué se llevan al final.</a:t>
+              <a:rPr sz="1300" b="1" i="0">
+                <a:solidFill>
+                  <a:srgbClr val="2B2B2B"/>
+                </a:solidFill>
+                <a:latin typeface="Calibri"/>
+              </a:rPr>
+              <a:t>“¿Puedo cambiar de tema?”</a:t>
+            </a:r>
+            <a:r>
+              <a:rPr sz="1300" b="0" i="0">
+                <a:solidFill>
+                  <a:srgbClr val="2B2B2B"/>
+                </a:solidFill>
+                <a:latin typeface="Calibri"/>
+              </a:rPr>
+              <a:t> </a:t>
+            </a:r>
+            <a:r>
+              <a:rPr sz="1300" b="1" i="0">
+                <a:solidFill>
+                  <a:srgbClr val="2B2B2B"/>
+                </a:solidFill>
+                <a:latin typeface="Calibri"/>
+              </a:rPr>
+              <a:t>Reformular</a:t>
+            </a:r>
+            <a:r>
+              <a:rPr sz="1300" b="0" i="0">
+                <a:solidFill>
+                  <a:srgbClr val="2B2B2B"/>
+                </a:solidFill>
+                <a:latin typeface="Calibri"/>
+              </a:rPr>
+              <a:t> (afinar el foco) sí, y hoy mismo. </a:t>
+            </a:r>
+            <a:r>
+              <a:rPr sz="1300" b="1" i="0">
+                <a:solidFill>
+                  <a:srgbClr val="2B2B2B"/>
+                </a:solidFill>
+                <a:latin typeface="Calibri"/>
+              </a:rPr>
+              <a:t>Cambiar de proyecto entero</a:t>
+            </a:r>
+            <a:r>
+              <a:rPr sz="1300" b="0" i="0">
+                <a:solidFill>
+                  <a:srgbClr val="2B2B2B"/>
+                </a:solidFill>
+                <a:latin typeface="Calibri"/>
+              </a:rPr>
+              <a:t> cuesta semanas que este periodo no tiene: solo por fuerza mayor y hablado con el Docente.</a:t>
+            </a:r>
+          </a:p>
+        </p:txBody>
+      </p:sp>
+      <p:sp>
+        <p:nvSpPr>
+          <p:cNvPr id="8" name="Rounded Rectangle 7"/>
+          <p:cNvSpPr/>
+          <p:nvPr/>
+        </p:nvSpPr>
+        <p:spPr>
+          <a:xfrm>
+            <a:off x="640080" y="4901184"/>
+            <a:ext cx="10911535" cy="969264"/>
+          </a:xfrm>
+          <a:prstGeom prst="roundRect">
+            <a:avLst/>
+          </a:prstGeom>
+          <a:solidFill>
+            <a:srgbClr val="FDECD8"/>
+          </a:solidFill>
+          <a:ln>
+            <a:noFill/>
+          </a:ln>
+          <a:effectLst/>
+        </p:spPr>
+        <p:style>
+          <a:lnRef idx="1">
+            <a:schemeClr val="accent1"/>
+          </a:lnRef>
+          <a:fillRef idx="3">
+            <a:schemeClr val="accent1"/>
+          </a:fillRef>
+          <a:effectRef idx="2">
+            <a:schemeClr val="accent1"/>
+          </a:effectRef>
+          <a:fontRef idx="minor">
+            <a:schemeClr val="lt1"/>
+          </a:fontRef>
+        </p:style>
+        <p:txBody>
+          <a:bodyPr rtlCol="0" anchor="ctr"/>
+          <a:lstStyle/>
+          <a:p>
+            <a:pPr algn="ctr"/>
+          </a:p>
+        </p:txBody>
+      </p:sp>
+      <p:sp>
+        <p:nvSpPr>
+          <p:cNvPr id="9" name="TextBox 8"/>
+          <p:cNvSpPr txBox="1"/>
+          <p:nvPr/>
+        </p:nvSpPr>
+        <p:spPr>
+          <a:xfrm>
+            <a:off x="868680" y="5010912"/>
+            <a:ext cx="10454335" cy="749808"/>
+          </a:xfrm>
+          <a:prstGeom prst="rect">
+            <a:avLst/>
+          </a:prstGeom>
+          <a:noFill/>
+        </p:spPr>
+        <p:txBody>
+          <a:bodyPr wrap="square" anchor="t" lIns="0" rIns="0" tIns="0" bIns="0">
+            <a:spAutoFit/>
+          </a:bodyPr>
+          <a:lstStyle/>
+          <a:p>
+            <a:r>
+              <a:rPr sz="1300" b="1" i="0">
+                <a:solidFill>
+                  <a:srgbClr val="0C2340"/>
+                </a:solidFill>
+                <a:latin typeface="Calibri"/>
+              </a:rPr>
+              <a:t>💡 Aclaración</a:t>
             </a:r>
           </a:p>
           <a:p>
             <a:pPr>
-              <a:spcAft>
-                <a:spcPts val="1000"/>
-              </a:spcAft>
+              <a:spcBef>
+                <a:spcPts val="400"/>
+              </a:spcBef>
             </a:pPr>
             <a:r>
-              <a:rPr sz="1600" b="0" i="0">
-                <a:solidFill>
-                  <a:srgbClr val="2B2B2B"/>
-                </a:solidFill>
-                <a:latin typeface="Calibri"/>
-              </a:rPr>
-              <a:t>–   </a:t>
-            </a:r>
-            <a:r>
-              <a:rPr sz="1600" b="1" i="0">
-                <a:solidFill>
-                  <a:srgbClr val="2B2B2B"/>
-                </a:solidFill>
-                <a:latin typeface="Calibri"/>
-              </a:rPr>
-              <a:t>El Docente:</a:t>
-            </a:r>
-            <a:r>
-              <a:rPr sz="1600" b="0" i="0">
-                <a:solidFill>
-                  <a:srgbClr val="2B2B2B"/>
-                </a:solidFill>
-                <a:latin typeface="Calibri"/>
-              </a:rPr>
-              <a:t> quién los acompaña y cómo contactarlo.</a:t>
-            </a:r>
-          </a:p>
-          <a:p>
-            <a:pPr>
-              <a:spcAft>
-                <a:spcPts val="1000"/>
-              </a:spcAft>
-            </a:pPr>
-            <a:r>
-              <a:rPr sz="1600" b="0" i="0">
-                <a:solidFill>
-                  <a:srgbClr val="2B2B2B"/>
-                </a:solidFill>
-                <a:latin typeface="Calibri"/>
-              </a:rPr>
-              <a:t>–   </a:t>
-            </a:r>
-            <a:r>
-              <a:rPr sz="1600" b="1" i="0">
-                <a:solidFill>
-                  <a:srgbClr val="2B2B2B"/>
-                </a:solidFill>
-                <a:latin typeface="Calibri"/>
-              </a:rPr>
-              <a:t>Ustedes:</a:t>
-            </a:r>
-            <a:r>
-              <a:rPr sz="1600" b="0" i="0">
-                <a:solidFill>
-                  <a:srgbClr val="2B2B2B"/>
-                </a:solidFill>
-                <a:latin typeface="Calibri"/>
-              </a:rPr>
-              <a:t> nos presentamos en el tablero colaborativo.</a:t>
-            </a:r>
-          </a:p>
-          <a:p>
-            <a:pPr>
-              <a:spcAft>
-                <a:spcPts val="1000"/>
-              </a:spcAft>
-            </a:pPr>
-            <a:r>
-              <a:rPr sz="1600" b="0" i="0">
-                <a:solidFill>
-                  <a:srgbClr val="2B2B2B"/>
-                </a:solidFill>
-                <a:latin typeface="Calibri"/>
-              </a:rPr>
-              <a:t>–   </a:t>
-            </a:r>
-            <a:r>
-              <a:rPr sz="1600" b="1" i="0">
-                <a:solidFill>
-                  <a:srgbClr val="2B2B2B"/>
-                </a:solidFill>
-                <a:latin typeface="Calibri"/>
-              </a:rPr>
-              <a:t>Cómo se evalúa:</a:t>
-            </a:r>
-            <a:r>
-              <a:rPr sz="1600" b="0" i="0">
-                <a:solidFill>
-                  <a:srgbClr val="2B2B2B"/>
-                </a:solidFill>
-                <a:latin typeface="Calibri"/>
-              </a:rPr>
-              <a:t> qué ítems tiene el aula, cuánto pesa cada uno y qué se hace con él.</a:t>
-            </a:r>
-          </a:p>
-          <a:p>
-            <a:pPr>
-              <a:spcAft>
-                <a:spcPts val="1000"/>
-              </a:spcAft>
-            </a:pPr>
-            <a:r>
-              <a:rPr sz="1600" b="0" i="0">
-                <a:solidFill>
-                  <a:srgbClr val="2B2B2B"/>
-                </a:solidFill>
-                <a:latin typeface="Calibri"/>
-              </a:rPr>
-              <a:t>–   </a:t>
-            </a:r>
-            <a:r>
-              <a:rPr sz="1600" b="1" i="0">
-                <a:solidFill>
-                  <a:srgbClr val="2B2B2B"/>
-                </a:solidFill>
-                <a:latin typeface="Calibri"/>
-              </a:rPr>
-              <a:t>Acuerdos</a:t>
-            </a:r>
-            <a:r>
-              <a:rPr sz="1600" b="0" i="0">
-                <a:solidFill>
-                  <a:srgbClr val="2B2B2B"/>
-                </a:solidFill>
-                <a:latin typeface="Calibri"/>
-              </a:rPr>
-              <a:t> de trabajo y el primer encargo autónomo.</a:t>
-            </a:r>
-          </a:p>
-        </p:txBody>
-      </p:sp>
-      <p:sp>
-        <p:nvSpPr>
-          <p:cNvPr id="6" name="TextBox 5"/>
+              <a:rPr sz="1300" b="1" i="0">
+                <a:solidFill>
+                  <a:srgbClr val="2B2B2B"/>
+                </a:solidFill>
+                <a:latin typeface="Calibri"/>
+              </a:rPr>
+              <a:t>“¿Me sirve lo que hice en el semestre anterior?”</a:t>
+            </a:r>
+            <a:r>
+              <a:rPr sz="1300" b="0" i="0">
+                <a:solidFill>
+                  <a:srgbClr val="2B2B2B"/>
+                </a:solidFill>
+                <a:latin typeface="Calibri"/>
+              </a:rPr>
+              <a:t> Sí, esa es la idea: TG2 continúa lo que ya existe. Pero se revisa, se actualiza y se cita si reutiliza fragmentos propios.</a:t>
+            </a:r>
+          </a:p>
+        </p:txBody>
+      </p:sp>
+      <p:sp>
+        <p:nvSpPr>
+          <p:cNvPr id="10" name="TextBox 9"/>
           <p:cNvSpPr txBox="1"/>
           <p:nvPr/>
         </p:nvSpPr>
@@ -9180,7 +8669,7 @@
                 </a:solidFill>
                 <a:latin typeface="Calibri"/>
               </a:rPr>
-              <a:t>2</a:t>
+              <a:t>19</a:t>
             </a:r>
           </a:p>
         </p:txBody>
@@ -9193,7 +8682,7 @@
 </p:sld>
 </file>
 
-<file path=ppt/slides/slide20.xml><?xml version="1.0" encoding="utf-8"?>
+<file path=ppt/slides/slide2.xml><?xml version="1.0" encoding="utf-8"?>
 <p:sld xmlns:a="http://schemas.openxmlformats.org/drawingml/2006/main" xmlns:p="http://schemas.openxmlformats.org/presentationml/2006/main" xmlns:r="http://schemas.openxmlformats.org/officeDocument/2006/relationships">
   <p:cSld>
     <p:bg>
@@ -9285,65 +8774,21 @@
                 </a:solidFill>
                 <a:latin typeface="Calibri"/>
               </a:rPr>
-              <a:t>Preguntas frecuentes del primer día</a:t>
-            </a:r>
-          </a:p>
-        </p:txBody>
-      </p:sp>
-      <p:sp>
-        <p:nvSpPr>
-          <p:cNvPr id="4" name="Rounded Rectangle 3"/>
-          <p:cNvSpPr/>
+              <a:t>AGENDA DE HOY</a:t>
+            </a:r>
+          </a:p>
+        </p:txBody>
+      </p:sp>
+      <p:sp>
+        <p:nvSpPr>
+          <p:cNvPr id="4" name="TextBox 3"/>
+          <p:cNvSpPr txBox="1"/>
           <p:nvPr/>
         </p:nvSpPr>
         <p:spPr>
           <a:xfrm>
-            <a:off x="640080" y="1737360"/>
-            <a:ext cx="10911535" cy="1481328"/>
-          </a:xfrm>
-          <a:prstGeom prst="roundRect">
-            <a:avLst/>
-          </a:prstGeom>
-          <a:solidFill>
-            <a:srgbClr val="E8F5EC"/>
-          </a:solidFill>
-          <a:ln>
-            <a:noFill/>
-          </a:ln>
-          <a:effectLst/>
-        </p:spPr>
-        <p:style>
-          <a:lnRef idx="1">
-            <a:schemeClr val="accent1"/>
-          </a:lnRef>
-          <a:fillRef idx="3">
-            <a:schemeClr val="accent1"/>
-          </a:fillRef>
-          <a:effectRef idx="2">
-            <a:schemeClr val="accent1"/>
-          </a:effectRef>
-          <a:fontRef idx="minor">
-            <a:schemeClr val="lt1"/>
-          </a:fontRef>
-        </p:style>
-        <p:txBody>
-          <a:bodyPr rtlCol="0" anchor="ctr"/>
-          <a:lstStyle/>
-          <a:p>
-            <a:pPr algn="ctr"/>
-          </a:p>
-        </p:txBody>
-      </p:sp>
-      <p:sp>
-        <p:nvSpPr>
-          <p:cNvPr id="5" name="TextBox 4"/>
-          <p:cNvSpPr txBox="1"/>
-          <p:nvPr/>
-        </p:nvSpPr>
-        <p:spPr>
-          <a:xfrm>
-            <a:off x="868680" y="1847088"/>
-            <a:ext cx="10454335" cy="1261872"/>
+            <a:off x="640080" y="1280160"/>
+            <a:ext cx="10911535" cy="411480"/>
           </a:xfrm>
           <a:prstGeom prst="rect">
             <a:avLst/>
@@ -9356,115 +8801,29 @@
           </a:bodyPr>
           <a:lstStyle/>
           <a:p>
-            <a:r>
-              <a:rPr sz="1300" b="1" i="0">
-                <a:solidFill>
-                  <a:srgbClr val="0C2340"/>
-                </a:solidFill>
-                <a:latin typeface="Calibri"/>
-              </a:rPr>
-              <a:t>ℹ️ Nota institucional</a:t>
-            </a:r>
-          </a:p>
-          <a:p>
-            <a:pPr>
-              <a:spcBef>
-                <a:spcPts val="400"/>
-              </a:spcBef>
-            </a:pPr>
-            <a:r>
-              <a:rPr sz="1300" b="1" i="0">
-                <a:solidFill>
-                  <a:srgbClr val="2B2B2B"/>
-                </a:solidFill>
-                <a:latin typeface="Calibri"/>
-              </a:rPr>
-              <a:t>“¿Esto se pierde fácil?”</a:t>
-            </a:r>
-            <a:r>
-              <a:rPr sz="1300" b="0" i="0">
-                <a:solidFill>
-                  <a:srgbClr val="2B2B2B"/>
-                </a:solidFill>
-                <a:latin typeface="Calibri"/>
-              </a:rPr>
-              <a:t> Se pierde por dejar pasar la ventana de un quiz o un parcial y por no entregar la ACA Final; casi nunca por escribir mal. El documento se corrige; la ventana cerrada, no. </a:t>
-            </a:r>
-            <a:r>
-              <a:rPr sz="1300" b="1" i="0">
-                <a:solidFill>
-                  <a:srgbClr val="2B2B2B"/>
-                </a:solidFill>
-                <a:latin typeface="Calibri"/>
-              </a:rPr>
-              <a:t>“¿Puedo trabajar solo?”</a:t>
-            </a:r>
-            <a:r>
-              <a:rPr sz="1300" b="0" i="0">
-                <a:solidFill>
-                  <a:srgbClr val="2B2B2B"/>
-                </a:solidFill>
-                <a:latin typeface="Calibri"/>
-              </a:rPr>
-              <a:t> Según lo que autorice el programa: consúltelo hoy, no a mitad de periodo.</a:t>
-            </a:r>
-          </a:p>
-        </p:txBody>
-      </p:sp>
-      <p:sp>
-        <p:nvSpPr>
-          <p:cNvPr id="6" name="Rounded Rectangle 5"/>
-          <p:cNvSpPr/>
+            <a:pPr algn="ctr"/>
+            <a:r>
+              <a:rPr sz="1500" b="0" i="0">
+                <a:solidFill>
+                  <a:srgbClr val="2B2B2B"/>
+                </a:solidFill>
+                <a:latin typeface="Calibri"/>
+              </a:rPr>
+              <a:t>Sesión de encuadre — hoy no vemos tema; el contenido arranca en la Sesión 02.</a:t>
+            </a:r>
+          </a:p>
+        </p:txBody>
+      </p:sp>
+      <p:sp>
+        <p:nvSpPr>
+          <p:cNvPr id="5" name="TextBox 4"/>
+          <p:cNvSpPr txBox="1"/>
           <p:nvPr/>
         </p:nvSpPr>
         <p:spPr>
           <a:xfrm>
-            <a:off x="640080" y="3447288"/>
-            <a:ext cx="10911535" cy="1225296"/>
-          </a:xfrm>
-          <a:prstGeom prst="roundRect">
-            <a:avLst/>
-          </a:prstGeom>
-          <a:solidFill>
-            <a:srgbClr val="FBE4E4"/>
-          </a:solidFill>
-          <a:ln>
-            <a:noFill/>
-          </a:ln>
-          <a:effectLst/>
-        </p:spPr>
-        <p:style>
-          <a:lnRef idx="1">
-            <a:schemeClr val="accent1"/>
-          </a:lnRef>
-          <a:fillRef idx="3">
-            <a:schemeClr val="accent1"/>
-          </a:fillRef>
-          <a:effectRef idx="2">
-            <a:schemeClr val="accent1"/>
-          </a:effectRef>
-          <a:fontRef idx="minor">
-            <a:schemeClr val="lt1"/>
-          </a:fontRef>
-        </p:style>
-        <p:txBody>
-          <a:bodyPr rtlCol="0" anchor="ctr"/>
-          <a:lstStyle/>
-          <a:p>
-            <a:pPr algn="ctr"/>
-          </a:p>
-        </p:txBody>
-      </p:sp>
-      <p:sp>
-        <p:nvSpPr>
-          <p:cNvPr id="7" name="TextBox 6"/>
-          <p:cNvSpPr txBox="1"/>
-          <p:nvPr/>
-        </p:nvSpPr>
-        <p:spPr>
-          <a:xfrm>
-            <a:off x="868680" y="3557016"/>
-            <a:ext cx="10454335" cy="1005840"/>
+            <a:off x="640080" y="2011679"/>
+            <a:ext cx="10911535" cy="4297680"/>
           </a:xfrm>
           <a:prstGeom prst="rect">
             <a:avLst/>
@@ -9477,185 +8836,180 @@
           </a:bodyPr>
           <a:lstStyle/>
           <a:p>
-            <a:r>
-              <a:rPr sz="1300" b="1" i="0">
-                <a:solidFill>
-                  <a:srgbClr val="0C2340"/>
-                </a:solidFill>
-                <a:latin typeface="Calibri"/>
-              </a:rPr>
-              <a:t>⚠️ Importante</a:t>
-            </a:r>
-          </a:p>
-          <a:p>
             <a:pPr>
-              <a:spcBef>
-                <a:spcPts val="400"/>
-              </a:spcBef>
+              <a:spcAft>
+                <a:spcPts val="1000"/>
+              </a:spcAft>
             </a:pPr>
             <a:r>
-              <a:rPr sz="1300" b="1" i="0">
-                <a:solidFill>
-                  <a:srgbClr val="2B2B2B"/>
-                </a:solidFill>
-                <a:latin typeface="Calibri"/>
-              </a:rPr>
-              <a:t>“¿Puedo cambiar de tema?”</a:t>
-            </a:r>
-            <a:r>
-              <a:rPr sz="1300" b="0" i="0">
-                <a:solidFill>
-                  <a:srgbClr val="2B2B2B"/>
-                </a:solidFill>
-                <a:latin typeface="Calibri"/>
-              </a:rPr>
-              <a:t> </a:t>
-            </a:r>
-            <a:r>
-              <a:rPr sz="1300" b="1" i="0">
-                <a:solidFill>
-                  <a:srgbClr val="2B2B2B"/>
-                </a:solidFill>
-                <a:latin typeface="Calibri"/>
-              </a:rPr>
-              <a:t>Reformular</a:t>
-            </a:r>
-            <a:r>
-              <a:rPr sz="1300" b="0" i="0">
-                <a:solidFill>
-                  <a:srgbClr val="2B2B2B"/>
-                </a:solidFill>
-                <a:latin typeface="Calibri"/>
-              </a:rPr>
-              <a:t> (afinar el foco) sí, y hoy mismo. </a:t>
-            </a:r>
-            <a:r>
-              <a:rPr sz="1300" b="1" i="0">
-                <a:solidFill>
-                  <a:srgbClr val="2B2B2B"/>
-                </a:solidFill>
-                <a:latin typeface="Calibri"/>
-              </a:rPr>
-              <a:t>Cambiar de proyecto entero</a:t>
-            </a:r>
-            <a:r>
-              <a:rPr sz="1300" b="0" i="0">
-                <a:solidFill>
-                  <a:srgbClr val="2B2B2B"/>
-                </a:solidFill>
-                <a:latin typeface="Calibri"/>
-              </a:rPr>
-              <a:t> cuesta semanas que este periodo no tiene: solo por fuerza mayor y hablado con el Docente.</a:t>
-            </a:r>
-          </a:p>
-        </p:txBody>
-      </p:sp>
-      <p:sp>
-        <p:nvSpPr>
-          <p:cNvPr id="8" name="Rounded Rectangle 7"/>
-          <p:cNvSpPr/>
-          <p:nvPr/>
-        </p:nvSpPr>
-        <p:spPr>
-          <a:xfrm>
-            <a:off x="640080" y="4901184"/>
-            <a:ext cx="10911535" cy="969264"/>
-          </a:xfrm>
-          <a:prstGeom prst="roundRect">
-            <a:avLst/>
-          </a:prstGeom>
-          <a:solidFill>
-            <a:srgbClr val="FDECD8"/>
-          </a:solidFill>
-          <a:ln>
-            <a:noFill/>
-          </a:ln>
-          <a:effectLst/>
-        </p:spPr>
-        <p:style>
-          <a:lnRef idx="1">
-            <a:schemeClr val="accent1"/>
-          </a:lnRef>
-          <a:fillRef idx="3">
-            <a:schemeClr val="accent1"/>
-          </a:fillRef>
-          <a:effectRef idx="2">
-            <a:schemeClr val="accent1"/>
-          </a:effectRef>
-          <a:fontRef idx="minor">
-            <a:schemeClr val="lt1"/>
-          </a:fontRef>
-        </p:style>
-        <p:txBody>
-          <a:bodyPr rtlCol="0" anchor="ctr"/>
-          <a:lstStyle/>
-          <a:p>
-            <a:pPr algn="ctr"/>
-          </a:p>
-        </p:txBody>
-      </p:sp>
-      <p:sp>
-        <p:nvSpPr>
-          <p:cNvPr id="9" name="TextBox 8"/>
-          <p:cNvSpPr txBox="1"/>
-          <p:nvPr/>
-        </p:nvSpPr>
-        <p:spPr>
-          <a:xfrm>
-            <a:off x="868680" y="5010912"/>
-            <a:ext cx="10454335" cy="749808"/>
-          </a:xfrm>
-          <a:prstGeom prst="rect">
-            <a:avLst/>
-          </a:prstGeom>
-          <a:noFill/>
-        </p:spPr>
-        <p:txBody>
-          <a:bodyPr wrap="square" anchor="t" lIns="0" rIns="0" tIns="0" bIns="0">
-            <a:spAutoFit/>
-          </a:bodyPr>
-          <a:lstStyle/>
-          <a:p>
-            <a:r>
-              <a:rPr sz="1300" b="1" i="0">
-                <a:solidFill>
-                  <a:srgbClr val="0C2340"/>
-                </a:solidFill>
-                <a:latin typeface="Calibri"/>
-              </a:rPr>
-              <a:t>💡 Aclaración</a:t>
+              <a:rPr sz="1600" b="0" i="0">
+                <a:solidFill>
+                  <a:srgbClr val="2B2B2B"/>
+                </a:solidFill>
+                <a:latin typeface="Calibri"/>
+              </a:rPr>
+              <a:t>–   </a:t>
+            </a:r>
+            <a:r>
+              <a:rPr sz="1600" b="1" i="0">
+                <a:solidFill>
+                  <a:srgbClr val="2B2B2B"/>
+                </a:solidFill>
+                <a:latin typeface="Calibri"/>
+              </a:rPr>
+              <a:t>El curso:</a:t>
+            </a:r>
+            <a:r>
+              <a:rPr sz="1600" b="0" i="0">
+                <a:solidFill>
+                  <a:srgbClr val="2B2B2B"/>
+                </a:solidFill>
+                <a:latin typeface="Calibri"/>
+              </a:rPr>
+              <a:t> de qué se trata, cómo trabajamos y qué se llevan al final.</a:t>
             </a:r>
           </a:p>
           <a:p>
             <a:pPr>
-              <a:spcBef>
-                <a:spcPts val="400"/>
-              </a:spcBef>
+              <a:spcAft>
+                <a:spcPts val="1000"/>
+              </a:spcAft>
             </a:pPr>
             <a:r>
-              <a:rPr sz="1300" b="1" i="0">
-                <a:solidFill>
-                  <a:srgbClr val="2B2B2B"/>
-                </a:solidFill>
-                <a:latin typeface="Calibri"/>
-              </a:rPr>
-              <a:t>“¿Me sirve lo que hice en el semestre anterior?”</a:t>
-            </a:r>
-            <a:r>
-              <a:rPr sz="1300" b="0" i="0">
-                <a:solidFill>
-                  <a:srgbClr val="2B2B2B"/>
-                </a:solidFill>
-                <a:latin typeface="Calibri"/>
-              </a:rPr>
-              <a:t> Sí, esa es la idea: TG2 continúa lo que ya existe. Pero se revisa, se actualiza y se cita si reutiliza fragmentos propios.</a:t>
-            </a:r>
-          </a:p>
-        </p:txBody>
-      </p:sp>
-      <p:sp>
-        <p:nvSpPr>
-          <p:cNvPr id="10" name="TextBox 9"/>
+              <a:rPr sz="1600" b="0" i="0">
+                <a:solidFill>
+                  <a:srgbClr val="2B2B2B"/>
+                </a:solidFill>
+                <a:latin typeface="Calibri"/>
+              </a:rPr>
+              <a:t>–   </a:t>
+            </a:r>
+            <a:r>
+              <a:rPr sz="1600" b="1" i="0">
+                <a:solidFill>
+                  <a:srgbClr val="2B2B2B"/>
+                </a:solidFill>
+                <a:latin typeface="Calibri"/>
+              </a:rPr>
+              <a:t>El Docente:</a:t>
+            </a:r>
+            <a:r>
+              <a:rPr sz="1600" b="0" i="0">
+                <a:solidFill>
+                  <a:srgbClr val="2B2B2B"/>
+                </a:solidFill>
+                <a:latin typeface="Calibri"/>
+              </a:rPr>
+              <a:t> quién los acompaña y cómo contactarlo.</a:t>
+            </a:r>
+          </a:p>
+          <a:p>
+            <a:pPr>
+              <a:spcAft>
+                <a:spcPts val="1000"/>
+              </a:spcAft>
+            </a:pPr>
+            <a:r>
+              <a:rPr sz="1600" b="0" i="0">
+                <a:solidFill>
+                  <a:srgbClr val="2B2B2B"/>
+                </a:solidFill>
+                <a:latin typeface="Calibri"/>
+              </a:rPr>
+              <a:t>–   </a:t>
+            </a:r>
+            <a:r>
+              <a:rPr sz="1600" b="1" i="0">
+                <a:solidFill>
+                  <a:srgbClr val="2B2B2B"/>
+                </a:solidFill>
+                <a:latin typeface="Calibri"/>
+              </a:rPr>
+              <a:t>Ustedes:</a:t>
+            </a:r>
+            <a:r>
+              <a:rPr sz="1600" b="0" i="0">
+                <a:solidFill>
+                  <a:srgbClr val="2B2B2B"/>
+                </a:solidFill>
+                <a:latin typeface="Calibri"/>
+              </a:rPr>
+              <a:t> arrancamos con un juego de 8 minutos —«dos verdades y una mentira»— y hay premio.</a:t>
+            </a:r>
+          </a:p>
+          <a:p>
+            <a:pPr>
+              <a:spcAft>
+                <a:spcPts val="1000"/>
+              </a:spcAft>
+            </a:pPr>
+            <a:r>
+              <a:rPr sz="1600" b="0" i="0">
+                <a:solidFill>
+                  <a:srgbClr val="2B2B2B"/>
+                </a:solidFill>
+                <a:latin typeface="Calibri"/>
+              </a:rPr>
+              <a:t>–   </a:t>
+            </a:r>
+            <a:r>
+              <a:rPr sz="1600" b="1" i="0">
+                <a:solidFill>
+                  <a:srgbClr val="2B2B2B"/>
+                </a:solidFill>
+                <a:latin typeface="Calibri"/>
+              </a:rPr>
+              <a:t>Cómo se evalúa:</a:t>
+            </a:r>
+            <a:r>
+              <a:rPr sz="1600" b="0" i="0">
+                <a:solidFill>
+                  <a:srgbClr val="2B2B2B"/>
+                </a:solidFill>
+                <a:latin typeface="Calibri"/>
+              </a:rPr>
+              <a:t> qué ítems tiene el aula, cuánto pesa cada uno y qué se hace con él.</a:t>
+            </a:r>
+          </a:p>
+          <a:p>
+            <a:pPr>
+              <a:spcAft>
+                <a:spcPts val="1000"/>
+              </a:spcAft>
+            </a:pPr>
+            <a:r>
+              <a:rPr sz="1600" b="0" i="0">
+                <a:solidFill>
+                  <a:srgbClr val="2B2B2B"/>
+                </a:solidFill>
+                <a:latin typeface="Calibri"/>
+              </a:rPr>
+              <a:t>–   </a:t>
+            </a:r>
+            <a:r>
+              <a:rPr sz="1600" b="1" i="0">
+                <a:solidFill>
+                  <a:srgbClr val="2B2B2B"/>
+                </a:solidFill>
+                <a:latin typeface="Calibri"/>
+              </a:rPr>
+              <a:t>Acuerdos</a:t>
+            </a:r>
+            <a:r>
+              <a:rPr sz="1600" b="0" i="0">
+                <a:solidFill>
+                  <a:srgbClr val="2B2B2B"/>
+                </a:solidFill>
+                <a:latin typeface="Calibri"/>
+              </a:rPr>
+              <a:t> de trabajo y el primer encargo autónomo.</a:t>
+            </a:r>
+          </a:p>
+        </p:txBody>
+      </p:sp>
+      <p:sp>
+        <p:nvSpPr>
+          <p:cNvPr id="6" name="TextBox 5"/>
           <p:cNvSpPr txBox="1"/>
           <p:nvPr/>
         </p:nvSpPr>
@@ -9683,7 +9037,7 @@
                 </a:solidFill>
                 <a:latin typeface="Calibri"/>
               </a:rPr>
-              <a:t>20</a:t>
+              <a:t>2</a:t>
             </a:r>
           </a:p>
         </p:txBody>
@@ -9696,7 +9050,7 @@
 </p:sld>
 </file>
 
-<file path=ppt/slides/slide21.xml><?xml version="1.0" encoding="utf-8"?>
+<file path=ppt/slides/slide20.xml><?xml version="1.0" encoding="utf-8"?>
 <p:sld xmlns:a="http://schemas.openxmlformats.org/drawingml/2006/main" xmlns:p="http://schemas.openxmlformats.org/presentationml/2006/main" xmlns:r="http://schemas.openxmlformats.org/officeDocument/2006/relationships">
   <p:cSld>
     <p:bg>
@@ -10190,7 +9544,7 @@
                 </a:solidFill>
                 <a:latin typeface="Calibri"/>
               </a:rPr>
-              <a:t>21</a:t>
+              <a:t>20</a:t>
             </a:r>
           </a:p>
         </p:txBody>
@@ -10237,7 +9591,7 @@
 </p:sld>
 </file>
 
-<file path=ppt/slides/slide22.xml><?xml version="1.0" encoding="utf-8"?>
+<file path=ppt/slides/slide21.xml><?xml version="1.0" encoding="utf-8"?>
 <p:sld xmlns:a="http://schemas.openxmlformats.org/drawingml/2006/main" xmlns:p="http://schemas.openxmlformats.org/presentationml/2006/main" xmlns:r="http://schemas.openxmlformats.org/officeDocument/2006/relationships">
   <p:cSld>
     <p:bg>
@@ -10691,7 +10045,7 @@
                 </a:solidFill>
                 <a:latin typeface="Calibri"/>
               </a:rPr>
-              <a:t>22</a:t>
+              <a:t>21</a:t>
             </a:r>
           </a:p>
         </p:txBody>
@@ -10704,7 +10058,7 @@
 </p:sld>
 </file>
 
-<file path=ppt/slides/slide23.xml><?xml version="1.0" encoding="utf-8"?>
+<file path=ppt/slides/slide22.xml><?xml version="1.0" encoding="utf-8"?>
 <p:sld xmlns:a="http://schemas.openxmlformats.org/drawingml/2006/main" xmlns:p="http://schemas.openxmlformats.org/presentationml/2006/main" xmlns:r="http://schemas.openxmlformats.org/officeDocument/2006/relationships">
   <p:cSld>
     <p:bg>
@@ -10938,7 +10292,7 @@
                 </a:solidFill>
                 <a:latin typeface="Calibri"/>
               </a:rPr>
-              <a:t>23</a:t>
+              <a:t>22</a:t>
             </a:r>
           </a:p>
         </p:txBody>
@@ -10951,7 +10305,7 @@
 </p:sld>
 </file>
 
-<file path=ppt/slides/slide24.xml><?xml version="1.0" encoding="utf-8"?>
+<file path=ppt/slides/slide23.xml><?xml version="1.0" encoding="utf-8"?>
 <p:sld xmlns:a="http://schemas.openxmlformats.org/drawingml/2006/main" xmlns:p="http://schemas.openxmlformats.org/presentationml/2006/main" xmlns:r="http://schemas.openxmlformats.org/officeDocument/2006/relationships">
   <p:cSld>
     <p:bg>
@@ -11580,7 +10934,7 @@
                 </a:solidFill>
                 <a:latin typeface="Calibri"/>
               </a:rPr>
-              <a:t>PRESÉNTATE — ROMPEHIELOS</a:t>
+              <a:t>ROMPEHIELOS — DOS VERDADES Y UNA MENTIRA</a:t>
             </a:r>
           </a:p>
         </p:txBody>
@@ -11615,7 +10969,7 @@
                 </a:solidFill>
                 <a:latin typeface="Calibri"/>
               </a:rPr>
-              <a:t>Formulario de Google · encuestas y Q&amp;A en el propio Meet</a:t>
+              <a:t>Dos verdades y una mentira · Slido · 8 minutos</a:t>
             </a:r>
           </a:p>
         </p:txBody>
@@ -11663,7 +11017,7 @@
                 </a:solidFill>
                 <a:latin typeface="Calibri"/>
               </a:rPr>
-              <a:t>Escanea el QR o abre:</a:t>
+              <a:t>Entra a slido.com</a:t>
             </a:r>
             <a:r>
               <a:rPr sz="1300" b="0" i="0">
@@ -11672,7 +11026,25 @@
                 </a:solidFill>
                 <a:latin typeface="Calibri"/>
               </a:rPr>
-              <a:t> [URL Formulario Preséntate — pendiente · TRABAJO DE GRADO 2]</a:t>
+              <a:t> y escribe el </a:t>
+            </a:r>
+            <a:r>
+              <a:rPr sz="1300" b="1" i="0">
+                <a:solidFill>
+                  <a:srgbClr val="2B2B2B"/>
+                </a:solidFill>
+                <a:latin typeface="Calibri"/>
+              </a:rPr>
+              <a:t>código del evento</a:t>
+            </a:r>
+            <a:r>
+              <a:rPr sz="1300" b="0" i="0">
+                <a:solidFill>
+                  <a:srgbClr val="2B2B2B"/>
+                </a:solidFill>
+                <a:latin typeface="Calibri"/>
+              </a:rPr>
+              <a:t> que el Docente pega en el chat del Meet. Sin cuenta ni instalar nada.</a:t>
             </a:r>
           </a:p>
           <a:p>
@@ -11697,7 +11069,7 @@
                 </a:solidFill>
                 <a:latin typeface="Calibri"/>
               </a:rPr>
-              <a:t>Qué respondes (1 min):</a:t>
+              <a:t>El juego:</a:t>
             </a:r>
             <a:r>
               <a:rPr sz="1300" b="0" i="0">
@@ -11706,7 +11078,7 @@
                 </a:solidFill>
                 <a:latin typeface="Calibri"/>
               </a:rPr>
-              <a:t> tu </a:t>
+              <a:t> «</a:t>
             </a:r>
             <a:r>
               <a:rPr sz="1300" b="1" i="0">
@@ -11715,7 +11087,7 @@
                 </a:solidFill>
                 <a:latin typeface="Calibri"/>
               </a:rPr>
-              <a:t>nombre</a:t>
+              <a:t>dos verdades y una mentira</a:t>
             </a:r>
             <a:r>
               <a:rPr sz="1300" b="0" i="0">
@@ -11724,7 +11096,7 @@
                 </a:solidFill>
                 <a:latin typeface="Calibri"/>
               </a:rPr>
-              <a:t> + </a:t>
+              <a:t>» sobre el Docente. Se proyectan tres frases suyas y votas </a:t>
             </a:r>
             <a:r>
               <a:rPr sz="1300" b="1" i="0">
@@ -11733,7 +11105,7 @@
                 </a:solidFill>
                 <a:latin typeface="Calibri"/>
               </a:rPr>
-              <a:t>estado actual</a:t>
+              <a:t>cuál de las tres NO es cierta</a:t>
             </a:r>
             <a:r>
               <a:rPr sz="1300" b="0" i="0">
@@ -11742,7 +11114,7 @@
                 </a:solidFill>
                 <a:latin typeface="Calibri"/>
               </a:rPr>
-              <a:t> del proyecto (1 frase) + expectativa de TG2. Entras con tu correo </a:t>
+              <a:t> — acertar es </a:t>
             </a:r>
             <a:r>
               <a:rPr sz="1300" b="1" i="0">
@@ -11751,7 +11123,7 @@
                 </a:solidFill>
                 <a:latin typeface="Calibri"/>
               </a:rPr>
-              <a:t>@cun.edu.co</a:t>
+              <a:t>1 entre 3</a:t>
             </a:r>
             <a:r>
               <a:rPr sz="1300" b="0" i="0">
@@ -11760,7 +11132,7 @@
                 </a:solidFill>
                 <a:latin typeface="Calibri"/>
               </a:rPr>
-              <a:t>: no hay que crear cuenta ni instalar nada.</a:t>
+              <a:t>, así que arrancamos todos iguales.</a:t>
             </a:r>
           </a:p>
           <a:p>
@@ -11785,7 +11157,7 @@
                 </a:solidFill>
                 <a:latin typeface="Calibri"/>
               </a:rPr>
-              <a:t>Ahora, ~3 min.</a:t>
+              <a:t>Tres rondas (~4 min).</a:t>
             </a:r>
             <a:r>
               <a:rPr sz="1300" b="0" i="0">
@@ -11794,7 +11166,7 @@
                 </a:solidFill>
                 <a:latin typeface="Calibri"/>
               </a:rPr>
-              <a:t> Somos 50: no alcanzamos a presentarnos uno por uno, así que el formulario nos ordena.</a:t>
+              <a:t> Al cerrar cada una el Docente revela la mentira y cuenta la historia de la verdad más rara: ahí queda hecha su presentación.</a:t>
             </a:r>
           </a:p>
           <a:p>
@@ -11819,7 +11191,7 @@
                 </a:solidFill>
                 <a:latin typeface="Calibri"/>
               </a:rPr>
-              <a:t>Con eso, hoy:</a:t>
+              <a:t>Ronda final (~2 min):</a:t>
             </a:r>
             <a:r>
               <a:rPr sz="1300" b="0" i="0">
@@ -11828,7 +11200,7 @@
                 </a:solidFill>
                 <a:latin typeface="Calibri"/>
               </a:rPr>
-              <a:t> el Docente lee en voz alta </a:t>
+              <a:t> sale la tabla de posiciones y los </a:t>
             </a:r>
             <a:r>
               <a:rPr sz="1300" b="1" i="0">
@@ -11837,7 +11209,7 @@
                 </a:solidFill>
                 <a:latin typeface="Calibri"/>
               </a:rPr>
-              <a:t>5 o 6 respuestas</a:t>
+              <a:t>tres primeros</a:t>
             </a:r>
             <a:r>
               <a:rPr sz="1300" b="0" i="0">
@@ -11846,7 +11218,7 @@
                 </a:solidFill>
                 <a:latin typeface="Calibri"/>
               </a:rPr>
-              <a:t> y proyecta el </a:t>
+              <a:t> toman el micrófono con </a:t>
             </a:r>
             <a:r>
               <a:rPr sz="1300" b="1" i="0">
@@ -11855,7 +11227,7 @@
                 </a:solidFill>
                 <a:latin typeface="Calibri"/>
               </a:rPr>
-              <a:t>resumen</a:t>
+              <a:t>sus</a:t>
             </a:r>
             <a:r>
               <a:rPr sz="1300" b="0" i="0">
@@ -11864,7 +11236,7 @@
                 </a:solidFill>
                 <a:latin typeface="Calibri"/>
               </a:rPr>
-              <a:t> del formulario — ahí quedan todas a la vista, no solo las leídas.</a:t>
+              <a:t> dos verdades y una mentira. Gana quien engañe a más gente. Hablan tres, no 50.</a:t>
             </a:r>
           </a:p>
           <a:p>
@@ -11889,7 +11261,7 @@
                 </a:solidFill>
                 <a:latin typeface="Calibri"/>
               </a:rPr>
-              <a:t>En vivo:</a:t>
+              <a:t>Premio:</a:t>
             </a:r>
             <a:r>
               <a:rPr sz="1300" b="0" i="0">
@@ -11898,7 +11270,7 @@
                 </a:solidFill>
                 <a:latin typeface="Calibri"/>
               </a:rPr>
-              <a:t> las preguntas y las votaciones van por la </a:t>
+              <a:t> </a:t>
             </a:r>
             <a:r>
               <a:rPr sz="1300" b="1" i="0">
@@ -11907,7 +11279,7 @@
                 </a:solidFill>
                 <a:latin typeface="Calibri"/>
               </a:rPr>
-              <a:t>encuesta</a:t>
+              <a:t>revisión 1 a 1 con el Docente</a:t>
             </a:r>
             <a:r>
               <a:rPr sz="1300" b="0" i="0">
@@ -11916,25 +11288,7 @@
                 </a:solidFill>
                 <a:latin typeface="Calibri"/>
               </a:rPr>
-              <a:t> y el </a:t>
-            </a:r>
-            <a:r>
-              <a:rPr sz="1300" b="1" i="0">
-                <a:solidFill>
-                  <a:srgbClr val="2B2B2B"/>
-                </a:solidFill>
-                <a:latin typeface="Calibri"/>
-              </a:rPr>
-              <a:t>Q&amp;A</a:t>
-            </a:r>
-            <a:r>
-              <a:rPr sz="1300" b="0" i="0">
-                <a:solidFill>
-                  <a:srgbClr val="2B2B2B"/>
-                </a:solidFill>
-                <a:latin typeface="Calibri"/>
-              </a:rPr>
-              <a:t> del propio Meet; no hay que abrir ninguna otra plataforma.</a:t>
+              <a:t> del avance del ganador, antes de la primera entrega.</a:t>
             </a:r>
           </a:p>
           <a:p>
@@ -11959,7 +11313,7 @@
                 </a:solidFill>
                 <a:latin typeface="Calibri"/>
               </a:rPr>
-              <a:t>Después:</a:t>
+              <a:t>Las preguntas</a:t>
             </a:r>
             <a:r>
               <a:rPr sz="1300" b="0" i="0">
@@ -11968,7 +11322,25 @@
                 </a:solidFill>
                 <a:latin typeface="Calibri"/>
               </a:rPr>
-              <a:t> las respuestas quedan en una hoja que el Docente usa todo el periodo (equipos, ejemplos y seguimiento).</a:t>
+              <a:t> de toda la sesión van por el </a:t>
+            </a:r>
+            <a:r>
+              <a:rPr sz="1300" b="1" i="0">
+                <a:solidFill>
+                  <a:srgbClr val="2B2B2B"/>
+                </a:solidFill>
+                <a:latin typeface="Calibri"/>
+              </a:rPr>
+              <a:t>Q&amp;A</a:t>
+            </a:r>
+            <a:r>
+              <a:rPr sz="1300" b="0" i="0">
+                <a:solidFill>
+                  <a:srgbClr val="2B2B2B"/>
+                </a:solidFill>
+                <a:latin typeface="Calibri"/>
+              </a:rPr>
+              <a:t> del mismo Slido.</a:t>
             </a:r>
           </a:p>
         </p:txBody>
@@ -12025,8 +11397,8 @@
         </p:nvSpPr>
         <p:spPr>
           <a:xfrm>
-            <a:off x="8579815" y="2926079"/>
-            <a:ext cx="2834640" cy="1463040"/>
+            <a:off x="8534095" y="2606039"/>
+            <a:ext cx="2926079" cy="2103120"/>
           </a:xfrm>
           <a:prstGeom prst="rect">
             <a:avLst/>
@@ -12041,29 +11413,65 @@
           <a:p>
             <a:pPr algn="ctr"/>
             <a:r>
-              <a:rPr sz="1800" b="1" i="0">
-                <a:solidFill>
-                  <a:srgbClr val="0C2340"/>
-                </a:solidFill>
-                <a:latin typeface="Calibri"/>
-              </a:rPr>
-              <a:t>QR pendiente</a:t>
+              <a:rPr sz="3000" b="1" i="0">
+                <a:solidFill>
+                  <a:srgbClr val="007433"/>
+                </a:solidFill>
+                <a:latin typeface="Calibri"/>
+              </a:rPr>
+              <a:t>slido.com</a:t>
             </a:r>
           </a:p>
           <a:p>
             <a:pPr algn="ctr">
               <a:spcBef>
-                <a:spcPts val="1000"/>
+                <a:spcPts val="1400"/>
               </a:spcBef>
             </a:pPr>
             <a:r>
-              <a:rPr sz="1200" b="0" i="0">
-                <a:solidFill>
-                  <a:srgbClr val="2B2B2B"/>
-                </a:solidFill>
-                <a:latin typeface="Calibri"/>
-              </a:rPr>
-              <a:t>Se genera cuando el formulario tenga enlace real.</a:t>
+              <a:rPr sz="1300" b="0" i="0">
+                <a:solidFill>
+                  <a:srgbClr val="0C2340"/>
+                </a:solidFill>
+                <a:latin typeface="Calibri"/>
+              </a:rPr>
+              <a:t>El </a:t>
+            </a:r>
+            <a:r>
+              <a:rPr sz="1300" b="1" i="0">
+                <a:solidFill>
+                  <a:srgbClr val="0C2340"/>
+                </a:solidFill>
+                <a:latin typeface="Calibri"/>
+              </a:rPr>
+              <a:t>código del evento</a:t>
+            </a:r>
+            <a:r>
+              <a:rPr sz="1300" b="0" i="0">
+                <a:solidFill>
+                  <a:srgbClr val="0C2340"/>
+                </a:solidFill>
+                <a:latin typeface="Calibri"/>
+              </a:rPr>
+              <a:t> te lo pega el Docente en el </a:t>
+            </a:r>
+            <a:r>
+              <a:rPr sz="1300" b="1" i="0">
+                <a:solidFill>
+                  <a:srgbClr val="0C2340"/>
+                </a:solidFill>
+                <a:latin typeface="Calibri"/>
+              </a:rPr>
+              <a:t>chat del Meet</a:t>
+            </a:r>
+            <a:r>
+              <a:rPr sz="1300" b="0" i="0">
+                <a:solidFill>
+                  <a:srgbClr val="0C2340"/>
+                </a:solidFill>
+                <a:latin typeface="Calibri"/>
+              </a:rPr>
+              <a:t>.</a:t>
             </a:r>
           </a:p>
         </p:txBody>
@@ -12098,7 +11506,7 @@
                 </a:solidFill>
                 <a:latin typeface="Calibri"/>
               </a:rPr>
-              <a:t>[URL Formulario Preséntate — pendiente · TRABAJO DE GRADO 2]</a:t>
+              <a:t>[URL Slido — evento del rompehielos pendiente · TRABAJO DE GRADO 2]</a:t>
             </a:r>
           </a:p>
         </p:txBody>
@@ -13531,7 +12939,7 @@
                 </a:solidFill>
                 <a:latin typeface="Calibri"/>
               </a:rPr>
-              <a:t>Preséntate: el formulario del curso (2 minutos)</a:t>
+              <a:t>Cómo trabajamos: TG2 es un taller de escritura, no una clase magistral</a:t>
             </a:r>
           </a:p>
         </p:txBody>
@@ -13564,31 +12972,49 @@
               </a:spcAft>
             </a:pPr>
             <a:r>
-              <a:rPr sz="1500" b="0" i="0">
-                <a:solidFill>
-                  <a:srgbClr val="2B2B2B"/>
-                </a:solidFill>
-                <a:latin typeface="Calibri"/>
-              </a:rPr>
-              <a:t>–   Somos </a:t>
-            </a:r>
-            <a:r>
-              <a:rPr sz="1500" b="1" i="0">
-                <a:solidFill>
-                  <a:srgbClr val="2B2B2B"/>
-                </a:solidFill>
-                <a:latin typeface="Calibri"/>
-              </a:rPr>
-              <a:t>50 matriculados</a:t>
-            </a:r>
-            <a:r>
-              <a:rPr sz="1500" b="0" i="0">
-                <a:solidFill>
-                  <a:srgbClr val="2B2B2B"/>
-                </a:solidFill>
-                <a:latin typeface="Calibri"/>
-              </a:rPr>
-              <a:t> en una hora semanal: un muro de notas no se alcanza a leer y termina siendo ruido.</a:t>
+              <a:rPr sz="1600" b="0" i="0">
+                <a:solidFill>
+                  <a:srgbClr val="2B2B2B"/>
+                </a:solidFill>
+                <a:latin typeface="Calibri"/>
+              </a:rPr>
+              <a:t>–   </a:t>
+            </a:r>
+            <a:r>
+              <a:rPr sz="1600" b="1" i="0">
+                <a:solidFill>
+                  <a:srgbClr val="2B2B2B"/>
+                </a:solidFill>
+                <a:latin typeface="Calibri"/>
+              </a:rPr>
+              <a:t>Una hora sincrónica por semana</a:t>
+            </a:r>
+            <a:r>
+              <a:rPr sz="1600" b="0" i="0">
+                <a:solidFill>
+                  <a:srgbClr val="2B2B2B"/>
+                </a:solidFill>
+                <a:latin typeface="Calibri"/>
+              </a:rPr>
+              <a:t> y once encuentros. Usted </a:t>
+            </a:r>
+            <a:r>
+              <a:rPr sz="1600" b="1" i="0">
+                <a:solidFill>
+                  <a:srgbClr val="2B2B2B"/>
+                </a:solidFill>
+                <a:latin typeface="Calibri"/>
+              </a:rPr>
+              <a:t>no empieza de cero</a:t>
+            </a:r>
+            <a:r>
+              <a:rPr sz="1600" b="0" i="0">
+                <a:solidFill>
+                  <a:srgbClr val="2B2B2B"/>
+                </a:solidFill>
+                <a:latin typeface="Calibri"/>
+              </a:rPr>
+              <a:t>: trae un proyecto y lo lleva a un avance consolidado.</a:t>
             </a:r>
           </a:p>
           <a:p>
@@ -13598,31 +13024,160 @@
               </a:spcAft>
             </a:pPr>
             <a:r>
-              <a:rPr sz="1500" b="0" i="0">
-                <a:solidFill>
-                  <a:srgbClr val="2B2B2B"/>
-                </a:solidFill>
-                <a:latin typeface="Calibri"/>
-              </a:rPr>
-              <a:t>–   El rompehielos es un </a:t>
-            </a:r>
-            <a:r>
-              <a:rPr sz="1500" b="1" i="0">
-                <a:solidFill>
-                  <a:srgbClr val="2B2B2B"/>
-                </a:solidFill>
-                <a:latin typeface="Calibri"/>
-              </a:rPr>
-              <a:t>formulario de Google</a:t>
-            </a:r>
-            <a:r>
-              <a:rPr sz="1500" b="0" i="0">
-                <a:solidFill>
-                  <a:srgbClr val="2B2B2B"/>
-                </a:solidFill>
-                <a:latin typeface="Calibri"/>
-              </a:rPr>
-              <a:t>: el Docente lo pega en el chat del Meet y queda en el LEEME de `Clases/`.</a:t>
+              <a:rPr sz="1600" b="0" i="0">
+                <a:solidFill>
+                  <a:srgbClr val="2B2B2B"/>
+                </a:solidFill>
+                <a:latin typeface="Calibri"/>
+              </a:rPr>
+              <a:t>–   </a:t>
+            </a:r>
+            <a:r>
+              <a:rPr sz="1600" b="1" i="0">
+                <a:solidFill>
+                  <a:srgbClr val="2B2B2B"/>
+                </a:solidFill>
+                <a:latin typeface="Calibri"/>
+              </a:rPr>
+              <a:t>Antes de cada encuentro:</a:t>
+            </a:r>
+            <a:r>
+              <a:rPr sz="1600" b="0" i="0">
+                <a:solidFill>
+                  <a:srgbClr val="2B2B2B"/>
+                </a:solidFill>
+                <a:latin typeface="Calibri"/>
+              </a:rPr>
+              <a:t> revisa en CDigital lo que el Docente deja y </a:t>
+            </a:r>
+            <a:r>
+              <a:rPr sz="1600" b="1" i="0">
+                <a:solidFill>
+                  <a:srgbClr val="2B2B2B"/>
+                </a:solidFill>
+                <a:latin typeface="Calibri"/>
+              </a:rPr>
+              <a:t>escribe algo</a:t>
+            </a:r>
+            <a:r>
+              <a:rPr sz="1600" b="0" i="0">
+                <a:solidFill>
+                  <a:srgbClr val="2B2B2B"/>
+                </a:solidFill>
+                <a:latin typeface="Calibri"/>
+              </a:rPr>
+              <a:t>, aunque sea imperfecto.</a:t>
+            </a:r>
+          </a:p>
+          <a:p>
+            <a:pPr>
+              <a:spcAft>
+                <a:spcPts val="1000"/>
+              </a:spcAft>
+            </a:pPr>
+            <a:r>
+              <a:rPr sz="1600" b="0" i="0">
+                <a:solidFill>
+                  <a:srgbClr val="2B2B2B"/>
+                </a:solidFill>
+                <a:latin typeface="Calibri"/>
+              </a:rPr>
+              <a:t>–   </a:t>
+            </a:r>
+            <a:r>
+              <a:rPr sz="1600" b="1" i="0">
+                <a:solidFill>
+                  <a:srgbClr val="2B2B2B"/>
+                </a:solidFill>
+                <a:latin typeface="Calibri"/>
+              </a:rPr>
+              <a:t>Durante el encuentro:</a:t>
+            </a:r>
+            <a:r>
+              <a:rPr sz="1600" b="0" i="0">
+                <a:solidFill>
+                  <a:srgbClr val="2B2B2B"/>
+                </a:solidFill>
+                <a:latin typeface="Calibri"/>
+              </a:rPr>
+              <a:t> 15 minutos de criterio y ejemplo, y el resto </a:t>
+            </a:r>
+            <a:r>
+              <a:rPr sz="1600" b="1" i="0">
+                <a:solidFill>
+                  <a:srgbClr val="2B2B2B"/>
+                </a:solidFill>
+                <a:latin typeface="Calibri"/>
+              </a:rPr>
+              <a:t>escribiendo o corrigiendo su propio documento</a:t>
+            </a:r>
+            <a:r>
+              <a:rPr sz="1600" b="0" i="0">
+                <a:solidFill>
+                  <a:srgbClr val="2B2B2B"/>
+                </a:solidFill>
+                <a:latin typeface="Calibri"/>
+              </a:rPr>
+              <a:t> con el Docente al lado.</a:t>
+            </a:r>
+          </a:p>
+          <a:p>
+            <a:pPr>
+              <a:spcAft>
+                <a:spcPts val="1000"/>
+              </a:spcAft>
+            </a:pPr>
+            <a:r>
+              <a:rPr sz="1600" b="0" i="0">
+                <a:solidFill>
+                  <a:srgbClr val="2B2B2B"/>
+                </a:solidFill>
+                <a:latin typeface="Calibri"/>
+              </a:rPr>
+              <a:t>–   </a:t>
+            </a:r>
+            <a:r>
+              <a:rPr sz="1600" b="1" i="0">
+                <a:solidFill>
+                  <a:srgbClr val="2B2B2B"/>
+                </a:solidFill>
+                <a:latin typeface="Calibri"/>
+              </a:rPr>
+              <a:t>Después:</a:t>
+            </a:r>
+            <a:r>
+              <a:rPr sz="1600" b="0" i="0">
+                <a:solidFill>
+                  <a:srgbClr val="2B2B2B"/>
+                </a:solidFill>
+                <a:latin typeface="Calibri"/>
+              </a:rPr>
+              <a:t> termina la sección y la sube a CDigital antes de la siguiente clase.</a:t>
+            </a:r>
+          </a:p>
+          <a:p>
+            <a:pPr>
+              <a:spcAft>
+                <a:spcPts val="1000"/>
+              </a:spcAft>
+            </a:pPr>
+            <a:r>
+              <a:rPr sz="1600" b="0" i="0">
+                <a:solidFill>
+                  <a:srgbClr val="2B2B2B"/>
+                </a:solidFill>
+                <a:latin typeface="Calibri"/>
+              </a:rPr>
+              <a:t>–   </a:t>
+            </a:r>
+            <a:r>
+              <a:rPr sz="1600" b="1" i="0">
+                <a:solidFill>
+                  <a:srgbClr val="2B2B2B"/>
+                </a:solidFill>
+                <a:latin typeface="Calibri"/>
+              </a:rPr>
+              <a:t>Qué traer siempre:</a:t>
             </a:r>
           </a:p>
           <a:p>
@@ -13632,31 +13187,31 @@
               </a:spcAft>
             </a:pPr>
             <a:r>
-              <a:rPr sz="1400" b="0" i="0">
-                <a:solidFill>
-                  <a:srgbClr val="2B2B2B"/>
-                </a:solidFill>
-                <a:latin typeface="Calibri"/>
-              </a:rPr>
-              <a:t>●   </a:t>
-            </a:r>
-            <a:r>
-              <a:rPr sz="1400" b="1" i="0">
-                <a:solidFill>
-                  <a:srgbClr val="2B2B2B"/>
-                </a:solidFill>
-                <a:latin typeface="Calibri"/>
-              </a:rPr>
-              <a:t>Enlace:</a:t>
-            </a:r>
-            <a:r>
-              <a:rPr sz="1400" b="0" i="0">
-                <a:solidFill>
-                  <a:srgbClr val="2B2B2B"/>
-                </a:solidFill>
-                <a:latin typeface="Calibri"/>
-              </a:rPr>
-              <a:t> [URL Formulario «Preséntate» — pendiente]</a:t>
+              <a:rPr sz="1500" b="0" i="0">
+                <a:solidFill>
+                  <a:srgbClr val="2B2B2B"/>
+                </a:solidFill>
+                <a:latin typeface="Calibri"/>
+              </a:rPr>
+              <a:t>●   Su </a:t>
+            </a:r>
+            <a:r>
+              <a:rPr sz="1500" b="1" i="0">
+                <a:solidFill>
+                  <a:srgbClr val="2B2B2B"/>
+                </a:solidFill>
+                <a:latin typeface="Calibri"/>
+              </a:rPr>
+              <a:t>documento de trabajo de grado abierto</a:t>
+            </a:r>
+            <a:r>
+              <a:rPr sz="1500" b="0" i="0">
+                <a:solidFill>
+                  <a:srgbClr val="2B2B2B"/>
+                </a:solidFill>
+                <a:latin typeface="Calibri"/>
+              </a:rPr>
+              <a:t>, en la versión más reciente.</a:t>
             </a:r>
           </a:p>
           <a:p>
@@ -13666,83 +13221,13 @@
               </a:spcAft>
             </a:pPr>
             <a:r>
-              <a:rPr sz="1400" b="0" i="0">
-                <a:solidFill>
-                  <a:srgbClr val="2B2B2B"/>
-                </a:solidFill>
-                <a:latin typeface="Calibri"/>
-              </a:rPr>
-              <a:t>●   Se entra con su correo </a:t>
-            </a:r>
-            <a:r>
-              <a:rPr sz="1400" b="1" i="0">
-                <a:solidFill>
-                  <a:srgbClr val="2B2B2B"/>
-                </a:solidFill>
-                <a:latin typeface="Calibri"/>
-              </a:rPr>
-              <a:t>@cun.edu.co</a:t>
-            </a:r>
-            <a:r>
-              <a:rPr sz="1400" b="0" i="0">
-                <a:solidFill>
-                  <a:srgbClr val="2B2B2B"/>
-                </a:solidFill>
-                <a:latin typeface="Calibri"/>
-              </a:rPr>
-              <a:t>: no hay que crear cuenta ni instalar nada.</a:t>
-            </a:r>
-          </a:p>
-          <a:p>
-            <a:pPr>
-              <a:spcAft>
-                <a:spcPts val="1000"/>
-              </a:spcAft>
-            </a:pPr>
-            <a:r>
               <a:rPr sz="1500" b="0" i="0">
                 <a:solidFill>
                   <a:srgbClr val="2B2B2B"/>
                 </a:solidFill>
                 <a:latin typeface="Calibri"/>
               </a:rPr>
-              <a:t>–   </a:t>
-            </a:r>
-            <a:r>
-              <a:rPr sz="1500" b="1" i="0">
-                <a:solidFill>
-                  <a:srgbClr val="2B2B2B"/>
-                </a:solidFill>
-                <a:latin typeface="Calibri"/>
-              </a:rPr>
-              <a:t>Qué responde</a:t>
-            </a:r>
-            <a:r>
-              <a:rPr sz="1500" b="0" i="0">
-                <a:solidFill>
-                  <a:srgbClr val="2B2B2B"/>
-                </a:solidFill>
-                <a:latin typeface="Calibri"/>
-              </a:rPr>
-              <a:t> (2–3 minutos, una sola vez): nombre, </a:t>
-            </a:r>
-            <a:r>
-              <a:rPr sz="1500" b="1" i="0">
-                <a:solidFill>
-                  <a:srgbClr val="2B2B2B"/>
-                </a:solidFill>
-                <a:latin typeface="Calibri"/>
-              </a:rPr>
-              <a:t>estado actual de su proyecto</a:t>
-            </a:r>
-            <a:r>
-              <a:rPr sz="1500" b="0" i="0">
-                <a:solidFill>
-                  <a:srgbClr val="2B2B2B"/>
-                </a:solidFill>
-                <a:latin typeface="Calibri"/>
-              </a:rPr>
-              <a:t> en una frase y qué espera de TG2.</a:t>
+              <a:t>●   La sección de la semana anterior ya escrita (aunque esté fea).</a:t>
             </a:r>
           </a:p>
           <a:p>
@@ -13752,97 +13237,13 @@
               </a:spcAft>
             </a:pPr>
             <a:r>
-              <a:rPr sz="1400" b="0" i="0">
-                <a:solidFill>
-                  <a:srgbClr val="2B2B2B"/>
-                </a:solidFill>
-                <a:latin typeface="Calibri"/>
-              </a:rPr>
-              <a:t>●   Diga de qué tema viene el proyecto: eso permite juntar en el taller a quienes están escribiendo sobre cosas parecidas.</a:t>
-            </a:r>
-          </a:p>
-          <a:p>
-            <a:pPr>
-              <a:spcAft>
-                <a:spcPts val="1000"/>
-              </a:spcAft>
-            </a:pPr>
-            <a:r>
               <a:rPr sz="1500" b="0" i="0">
                 <a:solidFill>
                   <a:srgbClr val="2B2B2B"/>
                 </a:solidFill>
                 <a:latin typeface="Calibri"/>
               </a:rPr>
-              <a:t>–   </a:t>
-            </a:r>
-            <a:r>
-              <a:rPr sz="1500" b="1" i="0">
-                <a:solidFill>
-                  <a:srgbClr val="2B2B2B"/>
-                </a:solidFill>
-                <a:latin typeface="Calibri"/>
-              </a:rPr>
-              <a:t>Cuándo:</a:t>
-            </a:r>
-            <a:r>
-              <a:rPr sz="1500" b="0" i="0">
-                <a:solidFill>
-                  <a:srgbClr val="2B2B2B"/>
-                </a:solidFill>
-                <a:latin typeface="Calibri"/>
-              </a:rPr>
-              <a:t> en los primeros minutos del encuentro. Luego se proyecta el resumen y se leen en voz alta cinco o seis respuestas.</a:t>
-            </a:r>
-          </a:p>
-          <a:p>
-            <a:pPr>
-              <a:spcAft>
-                <a:spcPts val="1000"/>
-              </a:spcAft>
-            </a:pPr>
-            <a:r>
-              <a:rPr sz="1500" b="0" i="0">
-                <a:solidFill>
-                  <a:srgbClr val="2B2B2B"/>
-                </a:solidFill>
-                <a:latin typeface="Calibri"/>
-              </a:rPr>
-              <a:t>–   </a:t>
-            </a:r>
-            <a:r>
-              <a:rPr sz="1500" b="1" i="0">
-                <a:solidFill>
-                  <a:srgbClr val="2B2B2B"/>
-                </a:solidFill>
-                <a:latin typeface="Calibri"/>
-              </a:rPr>
-              <a:t>En vivo, la participación va por el Meet:</a:t>
-            </a:r>
-            <a:r>
-              <a:rPr sz="1500" b="0" i="0">
-                <a:solidFill>
-                  <a:srgbClr val="2B2B2B"/>
-                </a:solidFill>
-                <a:latin typeface="Calibri"/>
-              </a:rPr>
-              <a:t> encuestas y Q&amp;A de la sala, que aguantan al grupo completo.</a:t>
-            </a:r>
-          </a:p>
-          <a:p>
-            <a:pPr>
-              <a:spcAft>
-                <a:spcPts val="1000"/>
-              </a:spcAft>
-            </a:pPr>
-            <a:r>
-              <a:rPr sz="1500" b="0" i="0">
-                <a:solidFill>
-                  <a:srgbClr val="2B2B2B"/>
-                </a:solidFill>
-                <a:latin typeface="Calibri"/>
-              </a:rPr>
-              <a:t>–   Queda abierto hasta la Sesión 02 para quien no alcance hoy.</a:t>
+              <a:t>●   Una duda concreta: “este párrafo no me cuadra”, no “no sé por dónde empezar”.</a:t>
             </a:r>
           </a:p>
         </p:txBody>
@@ -13911,7 +13312,25 @@
                 </a:solidFill>
                 <a:latin typeface="Calibri"/>
               </a:rPr>
-              <a:t>El Docente conserva esa hoja todo el periodo: le dice en qué punto llega cada quien y a quién hay que apurar en la primera mitad del curso.</a:t>
+              <a:t>Principio del curso: </a:t>
+            </a:r>
+            <a:r>
+              <a:rPr sz="1200" b="1" i="1">
+                <a:solidFill>
+                  <a:srgbClr val="2B2B2B"/>
+                </a:solidFill>
+                <a:latin typeface="Calibri"/>
+              </a:rPr>
+              <a:t>solo cuenta lo escrito</a:t>
+            </a:r>
+            <a:r>
+              <a:rPr sz="1200" b="0" i="1">
+                <a:solidFill>
+                  <a:srgbClr val="2B2B2B"/>
+                </a:solidFill>
+                <a:latin typeface="Calibri"/>
+              </a:rPr>
+              <a:t>. “Lo tengo en la cabeza” no es un avance, es una intención.</a:t>
             </a:r>
           </a:p>
         </p:txBody>
@@ -14016,502 +13435,6 @@
                 </a:solidFill>
                 <a:latin typeface="Calibri"/>
               </a:rPr>
-              <a:t>Cómo trabajamos: TG2 es un taller de escritura, no una clase magistral</a:t>
-            </a:r>
-          </a:p>
-        </p:txBody>
-      </p:sp>
-      <p:sp>
-        <p:nvSpPr>
-          <p:cNvPr id="4" name="TextBox 3"/>
-          <p:cNvSpPr txBox="1"/>
-          <p:nvPr/>
-        </p:nvSpPr>
-        <p:spPr>
-          <a:xfrm>
-            <a:off x="640080" y="1691639"/>
-            <a:ext cx="10911535" cy="4617720"/>
-          </a:xfrm>
-          <a:prstGeom prst="rect">
-            <a:avLst/>
-          </a:prstGeom>
-          <a:noFill/>
-        </p:spPr>
-        <p:txBody>
-          <a:bodyPr wrap="square" anchor="t" lIns="0" rIns="0" tIns="0" bIns="0">
-            <a:spAutoFit/>
-          </a:bodyPr>
-          <a:lstStyle/>
-          <a:p>
-            <a:pPr>
-              <a:spcAft>
-                <a:spcPts val="1000"/>
-              </a:spcAft>
-            </a:pPr>
-            <a:r>
-              <a:rPr sz="1600" b="0" i="0">
-                <a:solidFill>
-                  <a:srgbClr val="2B2B2B"/>
-                </a:solidFill>
-                <a:latin typeface="Calibri"/>
-              </a:rPr>
-              <a:t>–   </a:t>
-            </a:r>
-            <a:r>
-              <a:rPr sz="1600" b="1" i="0">
-                <a:solidFill>
-                  <a:srgbClr val="2B2B2B"/>
-                </a:solidFill>
-                <a:latin typeface="Calibri"/>
-              </a:rPr>
-              <a:t>Una hora sincrónica por semana</a:t>
-            </a:r>
-            <a:r>
-              <a:rPr sz="1600" b="0" i="0">
-                <a:solidFill>
-                  <a:srgbClr val="2B2B2B"/>
-                </a:solidFill>
-                <a:latin typeface="Calibri"/>
-              </a:rPr>
-              <a:t> y once encuentros. Usted </a:t>
-            </a:r>
-            <a:r>
-              <a:rPr sz="1600" b="1" i="0">
-                <a:solidFill>
-                  <a:srgbClr val="2B2B2B"/>
-                </a:solidFill>
-                <a:latin typeface="Calibri"/>
-              </a:rPr>
-              <a:t>no empieza de cero</a:t>
-            </a:r>
-            <a:r>
-              <a:rPr sz="1600" b="0" i="0">
-                <a:solidFill>
-                  <a:srgbClr val="2B2B2B"/>
-                </a:solidFill>
-                <a:latin typeface="Calibri"/>
-              </a:rPr>
-              <a:t>: trae un proyecto y lo lleva a un avance consolidado.</a:t>
-            </a:r>
-          </a:p>
-          <a:p>
-            <a:pPr>
-              <a:spcAft>
-                <a:spcPts val="1000"/>
-              </a:spcAft>
-            </a:pPr>
-            <a:r>
-              <a:rPr sz="1600" b="0" i="0">
-                <a:solidFill>
-                  <a:srgbClr val="2B2B2B"/>
-                </a:solidFill>
-                <a:latin typeface="Calibri"/>
-              </a:rPr>
-              <a:t>–   </a:t>
-            </a:r>
-            <a:r>
-              <a:rPr sz="1600" b="1" i="0">
-                <a:solidFill>
-                  <a:srgbClr val="2B2B2B"/>
-                </a:solidFill>
-                <a:latin typeface="Calibri"/>
-              </a:rPr>
-              <a:t>Antes de cada encuentro:</a:t>
-            </a:r>
-            <a:r>
-              <a:rPr sz="1600" b="0" i="0">
-                <a:solidFill>
-                  <a:srgbClr val="2B2B2B"/>
-                </a:solidFill>
-                <a:latin typeface="Calibri"/>
-              </a:rPr>
-              <a:t> revisa en CDigital lo que el Docente deja y </a:t>
-            </a:r>
-            <a:r>
-              <a:rPr sz="1600" b="1" i="0">
-                <a:solidFill>
-                  <a:srgbClr val="2B2B2B"/>
-                </a:solidFill>
-                <a:latin typeface="Calibri"/>
-              </a:rPr>
-              <a:t>escribe algo</a:t>
-            </a:r>
-            <a:r>
-              <a:rPr sz="1600" b="0" i="0">
-                <a:solidFill>
-                  <a:srgbClr val="2B2B2B"/>
-                </a:solidFill>
-                <a:latin typeface="Calibri"/>
-              </a:rPr>
-              <a:t>, aunque sea imperfecto.</a:t>
-            </a:r>
-          </a:p>
-          <a:p>
-            <a:pPr>
-              <a:spcAft>
-                <a:spcPts val="1000"/>
-              </a:spcAft>
-            </a:pPr>
-            <a:r>
-              <a:rPr sz="1600" b="0" i="0">
-                <a:solidFill>
-                  <a:srgbClr val="2B2B2B"/>
-                </a:solidFill>
-                <a:latin typeface="Calibri"/>
-              </a:rPr>
-              <a:t>–   </a:t>
-            </a:r>
-            <a:r>
-              <a:rPr sz="1600" b="1" i="0">
-                <a:solidFill>
-                  <a:srgbClr val="2B2B2B"/>
-                </a:solidFill>
-                <a:latin typeface="Calibri"/>
-              </a:rPr>
-              <a:t>Durante el encuentro:</a:t>
-            </a:r>
-            <a:r>
-              <a:rPr sz="1600" b="0" i="0">
-                <a:solidFill>
-                  <a:srgbClr val="2B2B2B"/>
-                </a:solidFill>
-                <a:latin typeface="Calibri"/>
-              </a:rPr>
-              <a:t> 15 minutos de criterio y ejemplo, y el resto </a:t>
-            </a:r>
-            <a:r>
-              <a:rPr sz="1600" b="1" i="0">
-                <a:solidFill>
-                  <a:srgbClr val="2B2B2B"/>
-                </a:solidFill>
-                <a:latin typeface="Calibri"/>
-              </a:rPr>
-              <a:t>escribiendo o corrigiendo su propio documento</a:t>
-            </a:r>
-            <a:r>
-              <a:rPr sz="1600" b="0" i="0">
-                <a:solidFill>
-                  <a:srgbClr val="2B2B2B"/>
-                </a:solidFill>
-                <a:latin typeface="Calibri"/>
-              </a:rPr>
-              <a:t> con el Docente al lado.</a:t>
-            </a:r>
-          </a:p>
-          <a:p>
-            <a:pPr>
-              <a:spcAft>
-                <a:spcPts val="1000"/>
-              </a:spcAft>
-            </a:pPr>
-            <a:r>
-              <a:rPr sz="1600" b="0" i="0">
-                <a:solidFill>
-                  <a:srgbClr val="2B2B2B"/>
-                </a:solidFill>
-                <a:latin typeface="Calibri"/>
-              </a:rPr>
-              <a:t>–   </a:t>
-            </a:r>
-            <a:r>
-              <a:rPr sz="1600" b="1" i="0">
-                <a:solidFill>
-                  <a:srgbClr val="2B2B2B"/>
-                </a:solidFill>
-                <a:latin typeface="Calibri"/>
-              </a:rPr>
-              <a:t>Después:</a:t>
-            </a:r>
-            <a:r>
-              <a:rPr sz="1600" b="0" i="0">
-                <a:solidFill>
-                  <a:srgbClr val="2B2B2B"/>
-                </a:solidFill>
-                <a:latin typeface="Calibri"/>
-              </a:rPr>
-              <a:t> termina la sección y la sube a CDigital antes de la siguiente clase.</a:t>
-            </a:r>
-          </a:p>
-          <a:p>
-            <a:pPr>
-              <a:spcAft>
-                <a:spcPts val="1000"/>
-              </a:spcAft>
-            </a:pPr>
-            <a:r>
-              <a:rPr sz="1600" b="0" i="0">
-                <a:solidFill>
-                  <a:srgbClr val="2B2B2B"/>
-                </a:solidFill>
-                <a:latin typeface="Calibri"/>
-              </a:rPr>
-              <a:t>–   </a:t>
-            </a:r>
-            <a:r>
-              <a:rPr sz="1600" b="1" i="0">
-                <a:solidFill>
-                  <a:srgbClr val="2B2B2B"/>
-                </a:solidFill>
-                <a:latin typeface="Calibri"/>
-              </a:rPr>
-              <a:t>Qué traer siempre:</a:t>
-            </a:r>
-          </a:p>
-          <a:p>
-            <a:pPr lvl="1">
-              <a:spcAft>
-                <a:spcPts val="600"/>
-              </a:spcAft>
-            </a:pPr>
-            <a:r>
-              <a:rPr sz="1500" b="0" i="0">
-                <a:solidFill>
-                  <a:srgbClr val="2B2B2B"/>
-                </a:solidFill>
-                <a:latin typeface="Calibri"/>
-              </a:rPr>
-              <a:t>●   Su </a:t>
-            </a:r>
-            <a:r>
-              <a:rPr sz="1500" b="1" i="0">
-                <a:solidFill>
-                  <a:srgbClr val="2B2B2B"/>
-                </a:solidFill>
-                <a:latin typeface="Calibri"/>
-              </a:rPr>
-              <a:t>documento de trabajo de grado abierto</a:t>
-            </a:r>
-            <a:r>
-              <a:rPr sz="1500" b="0" i="0">
-                <a:solidFill>
-                  <a:srgbClr val="2B2B2B"/>
-                </a:solidFill>
-                <a:latin typeface="Calibri"/>
-              </a:rPr>
-              <a:t>, en la versión más reciente.</a:t>
-            </a:r>
-          </a:p>
-          <a:p>
-            <a:pPr lvl="1">
-              <a:spcAft>
-                <a:spcPts val="600"/>
-              </a:spcAft>
-            </a:pPr>
-            <a:r>
-              <a:rPr sz="1500" b="0" i="0">
-                <a:solidFill>
-                  <a:srgbClr val="2B2B2B"/>
-                </a:solidFill>
-                <a:latin typeface="Calibri"/>
-              </a:rPr>
-              <a:t>●   La sección de la semana anterior ya escrita (aunque esté fea).</a:t>
-            </a:r>
-          </a:p>
-          <a:p>
-            <a:pPr lvl="1">
-              <a:spcAft>
-                <a:spcPts val="600"/>
-              </a:spcAft>
-            </a:pPr>
-            <a:r>
-              <a:rPr sz="1500" b="0" i="0">
-                <a:solidFill>
-                  <a:srgbClr val="2B2B2B"/>
-                </a:solidFill>
-                <a:latin typeface="Calibri"/>
-              </a:rPr>
-              <a:t>●   Una duda concreta: “este párrafo no me cuadra”, no “no sé por dónde empezar”.</a:t>
-            </a:r>
-          </a:p>
-        </p:txBody>
-      </p:sp>
-      <p:sp>
-        <p:nvSpPr>
-          <p:cNvPr id="5" name="TextBox 4"/>
-          <p:cNvSpPr txBox="1"/>
-          <p:nvPr/>
-        </p:nvSpPr>
-        <p:spPr>
-          <a:xfrm>
-            <a:off x="11094415" y="6446520"/>
-            <a:ext cx="548640" cy="274320"/>
-          </a:xfrm>
-          <a:prstGeom prst="rect">
-            <a:avLst/>
-          </a:prstGeom>
-          <a:noFill/>
-        </p:spPr>
-        <p:txBody>
-          <a:bodyPr wrap="square" anchor="t" lIns="0" rIns="0" tIns="0" bIns="0">
-            <a:spAutoFit/>
-          </a:bodyPr>
-          <a:lstStyle/>
-          <a:p>
-            <a:pPr algn="r"/>
-            <a:r>
-              <a:rPr sz="1000" b="1" i="0">
-                <a:solidFill>
-                  <a:srgbClr val="8F989D"/>
-                </a:solidFill>
-                <a:latin typeface="Calibri"/>
-              </a:rPr>
-              <a:t>7</a:t>
-            </a:r>
-          </a:p>
-        </p:txBody>
-      </p:sp>
-      <p:sp>
-        <p:nvSpPr>
-          <p:cNvPr id="6" name="TextBox 5"/>
-          <p:cNvSpPr txBox="1"/>
-          <p:nvPr/>
-        </p:nvSpPr>
-        <p:spPr>
-          <a:xfrm>
-            <a:off x="640080" y="5943600"/>
-            <a:ext cx="9997135" cy="457200"/>
-          </a:xfrm>
-          <a:prstGeom prst="rect">
-            <a:avLst/>
-          </a:prstGeom>
-          <a:noFill/>
-        </p:spPr>
-        <p:txBody>
-          <a:bodyPr wrap="square" anchor="t" lIns="0" rIns="0" tIns="0" bIns="0">
-            <a:spAutoFit/>
-          </a:bodyPr>
-          <a:lstStyle/>
-          <a:p>
-            <a:r>
-              <a:rPr sz="1200" b="0" i="1">
-                <a:solidFill>
-                  <a:srgbClr val="2B2B2B"/>
-                </a:solidFill>
-                <a:latin typeface="Calibri"/>
-              </a:rPr>
-              <a:t>Principio del curso: </a:t>
-            </a:r>
-            <a:r>
-              <a:rPr sz="1200" b="1" i="1">
-                <a:solidFill>
-                  <a:srgbClr val="2B2B2B"/>
-                </a:solidFill>
-                <a:latin typeface="Calibri"/>
-              </a:rPr>
-              <a:t>solo cuenta lo escrito</a:t>
-            </a:r>
-            <a:r>
-              <a:rPr sz="1200" b="0" i="1">
-                <a:solidFill>
-                  <a:srgbClr val="2B2B2B"/>
-                </a:solidFill>
-                <a:latin typeface="Calibri"/>
-              </a:rPr>
-              <a:t>. “Lo tengo en la cabeza” no es un avance, es una intención.</a:t>
-            </a:r>
-          </a:p>
-        </p:txBody>
-      </p:sp>
-    </p:spTree>
-  </p:cSld>
-  <p:clrMapOvr>
-    <a:masterClrMapping/>
-  </p:clrMapOvr>
-</p:sld>
-</file>
-
-<file path=ppt/slides/slide8.xml><?xml version="1.0" encoding="utf-8"?>
-<p:sld xmlns:a="http://schemas.openxmlformats.org/drawingml/2006/main" xmlns:p="http://schemas.openxmlformats.org/presentationml/2006/main" xmlns:r="http://schemas.openxmlformats.org/officeDocument/2006/relationships">
-  <p:cSld>
-    <p:bg>
-      <p:bgPr>
-        <a:solidFill>
-          <a:srgbClr val="FFFFFF"/>
-        </a:solidFill>
-        <a:effectLst/>
-      </p:bgPr>
-    </p:bg>
-    <p:spTree>
-      <p:nvGrpSpPr>
-        <p:cNvPr id="1" name=""/>
-        <p:cNvGrpSpPr/>
-        <p:nvPr/>
-      </p:nvGrpSpPr>
-      <p:grpSpPr/>
-      <p:sp>
-        <p:nvSpPr>
-          <p:cNvPr id="2" name="Rectangle 1"/>
-          <p:cNvSpPr/>
-          <p:nvPr/>
-        </p:nvSpPr>
-        <p:spPr>
-          <a:xfrm>
-            <a:off x="0" y="0"/>
-            <a:ext cx="12191695" cy="1188720"/>
-          </a:xfrm>
-          <a:prstGeom prst="rect">
-            <a:avLst/>
-          </a:prstGeom>
-          <a:solidFill>
-            <a:srgbClr val="0C2340"/>
-          </a:solidFill>
-          <a:ln>
-            <a:noFill/>
-          </a:ln>
-          <a:effectLst/>
-        </p:spPr>
-        <p:style>
-          <a:lnRef idx="1">
-            <a:schemeClr val="accent1"/>
-          </a:lnRef>
-          <a:fillRef idx="3">
-            <a:schemeClr val="accent1"/>
-          </a:fillRef>
-          <a:effectRef idx="2">
-            <a:schemeClr val="accent1"/>
-          </a:effectRef>
-          <a:fontRef idx="minor">
-            <a:schemeClr val="lt1"/>
-          </a:fontRef>
-        </p:style>
-        <p:txBody>
-          <a:bodyPr rtlCol="0" anchor="ctr"/>
-          <a:lstStyle/>
-          <a:p>
-            <a:pPr algn="ctr"/>
-          </a:p>
-        </p:txBody>
-      </p:sp>
-      <p:sp>
-        <p:nvSpPr>
-          <p:cNvPr id="3" name="TextBox 2"/>
-          <p:cNvSpPr txBox="1"/>
-          <p:nvPr/>
-        </p:nvSpPr>
-        <p:spPr>
-          <a:xfrm>
-            <a:off x="640080" y="0"/>
-            <a:ext cx="9082735" cy="1188720"/>
-          </a:xfrm>
-          <a:prstGeom prst="rect">
-            <a:avLst/>
-          </a:prstGeom>
-          <a:noFill/>
-        </p:spPr>
-        <p:txBody>
-          <a:bodyPr wrap="square" anchor="ctr" lIns="0" rIns="0" tIns="0" bIns="0">
-            <a:spAutoFit/>
-          </a:bodyPr>
-          <a:lstStyle/>
-          <a:p>
-            <a:pPr algn="ctr"/>
-            <a:r>
-              <a:rPr sz="2600" b="1" i="0">
-                <a:solidFill>
-                  <a:srgbClr val="FFFFFF"/>
-                </a:solidFill>
-                <a:latin typeface="Calibri"/>
-              </a:rPr>
               <a:t>Aviso honesto sobre este curso</a:t>
             </a:r>
           </a:p>
@@ -14910,7 +13833,7 @@
                 </a:solidFill>
                 <a:latin typeface="Calibri"/>
               </a:rPr>
-              <a:t>8</a:t>
+              <a:t>7</a:t>
             </a:r>
           </a:p>
         </p:txBody>
@@ -14923,7 +13846,7 @@
 </p:sld>
 </file>
 
-<file path=ppt/slides/slide9.xml><?xml version="1.0" encoding="utf-8"?>
+<file path=ppt/slides/slide8.xml><?xml version="1.0" encoding="utf-8"?>
 <p:sld xmlns:a="http://schemas.openxmlformats.org/drawingml/2006/main" xmlns:p="http://schemas.openxmlformats.org/presentationml/2006/main" xmlns:r="http://schemas.openxmlformats.org/officeDocument/2006/relationships">
   <p:cSld>
     <p:bg>
@@ -15680,6 +14603,651 @@
                 </a:solidFill>
                 <a:latin typeface="Calibri"/>
               </a:rPr>
+              <a:t>8</a:t>
+            </a:r>
+          </a:p>
+        </p:txBody>
+      </p:sp>
+    </p:spTree>
+  </p:cSld>
+  <p:clrMapOvr>
+    <a:masterClrMapping/>
+  </p:clrMapOvr>
+</p:sld>
+</file>
+
+<file path=ppt/slides/slide9.xml><?xml version="1.0" encoding="utf-8"?>
+<p:sld xmlns:a="http://schemas.openxmlformats.org/drawingml/2006/main" xmlns:p="http://schemas.openxmlformats.org/presentationml/2006/main" xmlns:r="http://schemas.openxmlformats.org/officeDocument/2006/relationships">
+  <p:cSld>
+    <p:bg>
+      <p:bgPr>
+        <a:solidFill>
+          <a:srgbClr val="FFFFFF"/>
+        </a:solidFill>
+        <a:effectLst/>
+      </p:bgPr>
+    </p:bg>
+    <p:spTree>
+      <p:nvGrpSpPr>
+        <p:cNvPr id="1" name=""/>
+        <p:cNvGrpSpPr/>
+        <p:nvPr/>
+      </p:nvGrpSpPr>
+      <p:grpSpPr/>
+      <p:sp>
+        <p:nvSpPr>
+          <p:cNvPr id="2" name="Rectangle 1"/>
+          <p:cNvSpPr/>
+          <p:nvPr/>
+        </p:nvSpPr>
+        <p:spPr>
+          <a:xfrm>
+            <a:off x="0" y="0"/>
+            <a:ext cx="12191695" cy="1188720"/>
+          </a:xfrm>
+          <a:prstGeom prst="rect">
+            <a:avLst/>
+          </a:prstGeom>
+          <a:solidFill>
+            <a:srgbClr val="0C2340"/>
+          </a:solidFill>
+          <a:ln>
+            <a:noFill/>
+          </a:ln>
+          <a:effectLst/>
+        </p:spPr>
+        <p:style>
+          <a:lnRef idx="1">
+            <a:schemeClr val="accent1"/>
+          </a:lnRef>
+          <a:fillRef idx="3">
+            <a:schemeClr val="accent1"/>
+          </a:fillRef>
+          <a:effectRef idx="2">
+            <a:schemeClr val="accent1"/>
+          </a:effectRef>
+          <a:fontRef idx="minor">
+            <a:schemeClr val="lt1"/>
+          </a:fontRef>
+        </p:style>
+        <p:txBody>
+          <a:bodyPr rtlCol="0" anchor="ctr"/>
+          <a:lstStyle/>
+          <a:p>
+            <a:pPr algn="ctr"/>
+          </a:p>
+        </p:txBody>
+      </p:sp>
+      <p:sp>
+        <p:nvSpPr>
+          <p:cNvPr id="3" name="TextBox 2"/>
+          <p:cNvSpPr txBox="1"/>
+          <p:nvPr/>
+        </p:nvSpPr>
+        <p:spPr>
+          <a:xfrm>
+            <a:off x="640080" y="0"/>
+            <a:ext cx="9082735" cy="1188720"/>
+          </a:xfrm>
+          <a:prstGeom prst="rect">
+            <a:avLst/>
+          </a:prstGeom>
+          <a:noFill/>
+        </p:spPr>
+        <p:txBody>
+          <a:bodyPr wrap="square" anchor="ctr" lIns="0" rIns="0" tIns="0" bIns="0">
+            <a:spAutoFit/>
+          </a:bodyPr>
+          <a:lstStyle/>
+          <a:p>
+            <a:pPr algn="ctr"/>
+            <a:r>
+              <a:rPr sz="2600" b="1" i="0">
+                <a:solidFill>
+                  <a:srgbClr val="FFFFFF"/>
+                </a:solidFill>
+                <a:latin typeface="Calibri"/>
+              </a:rPr>
+              <a:t>Mapa del curso (2/2): del método al cierre del avance</a:t>
+            </a:r>
+          </a:p>
+        </p:txBody>
+      </p:sp>
+      <p:graphicFrame>
+        <p:nvGraphicFramePr>
+          <p:cNvPr id="4" name="Table 3"/>
+          <p:cNvGraphicFramePr>
+            <a:graphicFrameLocks noGrp="1"/>
+          </p:cNvGraphicFramePr>
+          <p:nvPr/>
+        </p:nvGraphicFramePr>
+        <p:xfrm>
+          <a:off x="640080" y="1691639"/>
+          <a:ext cx="10911533" cy="3017520"/>
+        </p:xfrm>
+        <a:graphic>
+          <a:graphicData uri="http://schemas.openxmlformats.org/drawingml/2006/table">
+            <a:tbl>
+              <a:tblPr>
+                <a:tableStyleId>{2D5ABB26-0587-4C30-8999-92F81FD0307C}</a:tableStyleId>
+              </a:tblPr>
+              <a:tblGrid>
+                <a:gridCol w="1008629"/>
+                <a:gridCol w="4951452"/>
+                <a:gridCol w="4951452"/>
+              </a:tblGrid>
+              <a:tr h="502920">
+                <a:tc>
+                  <a:txBody>
+                    <a:bodyPr/>
+                    <a:lstStyle/>
+                    <a:p>
+                      <a:pPr algn="l"/>
+                      <a:r>
+                        <a:rPr sz="1300" b="1" i="0">
+                          <a:solidFill>
+                            <a:srgbClr val="FFFFFF"/>
+                          </a:solidFill>
+                          <a:latin typeface="Calibri"/>
+                        </a:rPr>
+                        <a:t>Sesión</a:t>
+                      </a:r>
+                    </a:p>
+                  </a:txBody>
+                  <a:tcPr anchor="ctr" marL="109728" marR="91440" marT="36576" marB="36576">
+                    <a:solidFill>
+                      <a:srgbClr val="0C2340"/>
+                    </a:solidFill>
+                  </a:tcPr>
+                </a:tc>
+                <a:tc>
+                  <a:txBody>
+                    <a:bodyPr/>
+                    <a:lstStyle/>
+                    <a:p>
+                      <a:pPr algn="l"/>
+                      <a:r>
+                        <a:rPr sz="1300" b="1" i="0">
+                          <a:solidFill>
+                            <a:srgbClr val="FFFFFF"/>
+                          </a:solidFill>
+                          <a:latin typeface="Calibri"/>
+                        </a:rPr>
+                        <a:t>De qué se ocupa</a:t>
+                      </a:r>
+                    </a:p>
+                  </a:txBody>
+                  <a:tcPr anchor="ctr" marL="109728" marR="91440" marT="36576" marB="36576">
+                    <a:solidFill>
+                      <a:srgbClr val="0C2340"/>
+                    </a:solidFill>
+                  </a:tcPr>
+                </a:tc>
+                <a:tc>
+                  <a:txBody>
+                    <a:bodyPr/>
+                    <a:lstStyle/>
+                    <a:p>
+                      <a:pPr algn="l"/>
+                      <a:r>
+                        <a:rPr sz="1300" b="1" i="0">
+                          <a:solidFill>
+                            <a:srgbClr val="FFFFFF"/>
+                          </a:solidFill>
+                          <a:latin typeface="Calibri"/>
+                        </a:rPr>
+                        <a:t>Qué queda escrito</a:t>
+                      </a:r>
+                    </a:p>
+                  </a:txBody>
+                  <a:tcPr anchor="ctr" marL="109728" marR="91440" marT="36576" marB="36576">
+                    <a:solidFill>
+                      <a:srgbClr val="0C2340"/>
+                    </a:solidFill>
+                  </a:tcPr>
+                </a:tc>
+              </a:tr>
+              <a:tr h="502920">
+                <a:tc>
+                  <a:txBody>
+                    <a:bodyPr/>
+                    <a:lstStyle/>
+                    <a:p>
+                      <a:pPr algn="l"/>
+                      <a:r>
+                        <a:rPr sz="1200" b="1" i="0">
+                          <a:solidFill>
+                            <a:srgbClr val="2B2B2B"/>
+                          </a:solidFill>
+                          <a:latin typeface="Calibri"/>
+                        </a:rPr>
+                        <a:t>07</a:t>
+                      </a:r>
+                    </a:p>
+                  </a:txBody>
+                  <a:tcPr anchor="ctr" marL="109728" marR="91440" marT="36576" marB="36576">
+                    <a:solidFill>
+                      <a:srgbClr val="FFFFFF"/>
+                    </a:solidFill>
+                  </a:tcPr>
+                </a:tc>
+                <a:tc>
+                  <a:txBody>
+                    <a:bodyPr/>
+                    <a:lstStyle/>
+                    <a:p>
+                      <a:pPr algn="l"/>
+                      <a:r>
+                        <a:rPr sz="1200" b="0" i="0">
+                          <a:solidFill>
+                            <a:srgbClr val="2B2B2B"/>
+                          </a:solidFill>
+                          <a:latin typeface="Calibri"/>
+                        </a:rPr>
+                        <a:t>Diseño metodológico (propuesto)</a:t>
+                      </a:r>
+                    </a:p>
+                  </a:txBody>
+                  <a:tcPr anchor="ctr" marL="109728" marR="91440" marT="36576" marB="36576">
+                    <a:solidFill>
+                      <a:srgbClr val="FFFFFF"/>
+                    </a:solidFill>
+                  </a:tcPr>
+                </a:tc>
+                <a:tc>
+                  <a:txBody>
+                    <a:bodyPr/>
+                    <a:lstStyle/>
+                    <a:p>
+                      <a:pPr algn="l"/>
+                      <a:r>
+                        <a:rPr sz="1200" b="0" i="0">
+                          <a:solidFill>
+                            <a:srgbClr val="2B2B2B"/>
+                          </a:solidFill>
+                          <a:latin typeface="Calibri"/>
+                        </a:rPr>
+                        <a:t>Enfoque, tipo y alcance, escritos en futuro</a:t>
+                      </a:r>
+                    </a:p>
+                  </a:txBody>
+                  <a:tcPr anchor="ctr" marL="109728" marR="91440" marT="36576" marB="36576">
+                    <a:solidFill>
+                      <a:srgbClr val="FFFFFF"/>
+                    </a:solidFill>
+                  </a:tcPr>
+                </a:tc>
+              </a:tr>
+              <a:tr h="502920">
+                <a:tc>
+                  <a:txBody>
+                    <a:bodyPr/>
+                    <a:lstStyle/>
+                    <a:p>
+                      <a:pPr algn="l"/>
+                      <a:r>
+                        <a:rPr sz="1200" b="1" i="0">
+                          <a:solidFill>
+                            <a:srgbClr val="2B2B2B"/>
+                          </a:solidFill>
+                          <a:latin typeface="Calibri"/>
+                        </a:rPr>
+                        <a:t>08</a:t>
+                      </a:r>
+                    </a:p>
+                  </a:txBody>
+                  <a:tcPr anchor="ctr" marL="109728" marR="91440" marT="36576" marB="36576">
+                    <a:solidFill>
+                      <a:srgbClr val="F2F2F2"/>
+                    </a:solidFill>
+                  </a:tcPr>
+                </a:tc>
+                <a:tc>
+                  <a:txBody>
+                    <a:bodyPr/>
+                    <a:lstStyle/>
+                    <a:p>
+                      <a:pPr algn="l"/>
+                      <a:r>
+                        <a:rPr sz="1200" b="0" i="0">
+                          <a:solidFill>
+                            <a:srgbClr val="2B2B2B"/>
+                          </a:solidFill>
+                          <a:latin typeface="Calibri"/>
+                        </a:rPr>
+                        <a:t>Instrumentos y plan de análisis (propuestos)</a:t>
+                      </a:r>
+                    </a:p>
+                  </a:txBody>
+                  <a:tcPr anchor="ctr" marL="109728" marR="91440" marT="36576" marB="36576">
+                    <a:solidFill>
+                      <a:srgbClr val="F2F2F2"/>
+                    </a:solidFill>
+                  </a:tcPr>
+                </a:tc>
+                <a:tc>
+                  <a:txBody>
+                    <a:bodyPr/>
+                    <a:lstStyle/>
+                    <a:p>
+                      <a:pPr algn="l"/>
+                      <a:r>
+                        <a:rPr sz="1200" b="0" i="0">
+                          <a:solidFill>
+                            <a:srgbClr val="2B2B2B"/>
+                          </a:solidFill>
+                          <a:latin typeface="Calibri"/>
+                        </a:rPr>
+                        <a:t>Bosquejo de instrumento y plan de análisis</a:t>
+                      </a:r>
+                    </a:p>
+                  </a:txBody>
+                  <a:tcPr anchor="ctr" marL="109728" marR="91440" marT="36576" marB="36576">
+                    <a:solidFill>
+                      <a:srgbClr val="F2F2F2"/>
+                    </a:solidFill>
+                  </a:tcPr>
+                </a:tc>
+              </a:tr>
+              <a:tr h="502920">
+                <a:tc>
+                  <a:txBody>
+                    <a:bodyPr/>
+                    <a:lstStyle/>
+                    <a:p>
+                      <a:pPr algn="l"/>
+                      <a:r>
+                        <a:rPr sz="1200" b="1" i="0">
+                          <a:solidFill>
+                            <a:srgbClr val="2B2B2B"/>
+                          </a:solidFill>
+                          <a:latin typeface="Calibri"/>
+                        </a:rPr>
+                        <a:t>09</a:t>
+                      </a:r>
+                    </a:p>
+                  </a:txBody>
+                  <a:tcPr anchor="ctr" marL="109728" marR="91440" marT="36576" marB="36576">
+                    <a:solidFill>
+                      <a:srgbClr val="FFFFFF"/>
+                    </a:solidFill>
+                  </a:tcPr>
+                </a:tc>
+                <a:tc>
+                  <a:txBody>
+                    <a:bodyPr/>
+                    <a:lstStyle/>
+                    <a:p>
+                      <a:pPr algn="l"/>
+                      <a:r>
+                        <a:rPr sz="1200" b="0" i="0">
+                          <a:solidFill>
+                            <a:srgbClr val="2B2B2B"/>
+                          </a:solidFill>
+                          <a:latin typeface="Calibri"/>
+                        </a:rPr>
+                        <a:t>Integración del avance · correcciones</a:t>
+                      </a:r>
+                    </a:p>
+                  </a:txBody>
+                  <a:tcPr anchor="ctr" marL="109728" marR="91440" marT="36576" marB="36576">
+                    <a:solidFill>
+                      <a:srgbClr val="FFFFFF"/>
+                    </a:solidFill>
+                  </a:tcPr>
+                </a:tc>
+                <a:tc>
+                  <a:txBody>
+                    <a:bodyPr/>
+                    <a:lstStyle/>
+                    <a:p>
+                      <a:pPr algn="l"/>
+                      <a:r>
+                        <a:rPr sz="1200" b="0" i="0">
+                          <a:solidFill>
+                            <a:srgbClr val="2B2B2B"/>
+                          </a:solidFill>
+                          <a:latin typeface="Calibri"/>
+                        </a:rPr>
+                        <a:t>Documento consolidado y coherente</a:t>
+                      </a:r>
+                    </a:p>
+                  </a:txBody>
+                  <a:tcPr anchor="ctr" marL="109728" marR="91440" marT="36576" marB="36576">
+                    <a:solidFill>
+                      <a:srgbClr val="FFFFFF"/>
+                    </a:solidFill>
+                  </a:tcPr>
+                </a:tc>
+              </a:tr>
+              <a:tr h="502920">
+                <a:tc>
+                  <a:txBody>
+                    <a:bodyPr/>
+                    <a:lstStyle/>
+                    <a:p>
+                      <a:pPr algn="l"/>
+                      <a:r>
+                        <a:rPr sz="1200" b="1" i="0">
+                          <a:solidFill>
+                            <a:srgbClr val="2B2B2B"/>
+                          </a:solidFill>
+                          <a:latin typeface="Calibri"/>
+                        </a:rPr>
+                        <a:t>10</a:t>
+                      </a:r>
+                    </a:p>
+                  </a:txBody>
+                  <a:tcPr anchor="ctr" marL="109728" marR="91440" marT="36576" marB="36576">
+                    <a:solidFill>
+                      <a:srgbClr val="F2F2F2"/>
+                    </a:solidFill>
+                  </a:tcPr>
+                </a:tc>
+                <a:tc>
+                  <a:txBody>
+                    <a:bodyPr/>
+                    <a:lstStyle/>
+                    <a:p>
+                      <a:pPr algn="l"/>
+                      <a:r>
+                        <a:rPr sz="1200" b="0" i="0">
+                          <a:solidFill>
+                            <a:srgbClr val="2B2B2B"/>
+                          </a:solidFill>
+                          <a:latin typeface="Calibri"/>
+                        </a:rPr>
+                        <a:t>Socialización de avances</a:t>
+                      </a:r>
+                    </a:p>
+                  </a:txBody>
+                  <a:tcPr anchor="ctr" marL="109728" marR="91440" marT="36576" marB="36576">
+                    <a:solidFill>
+                      <a:srgbClr val="F2F2F2"/>
+                    </a:solidFill>
+                  </a:tcPr>
+                </a:tc>
+                <a:tc>
+                  <a:txBody>
+                    <a:bodyPr/>
+                    <a:lstStyle/>
+                    <a:p>
+                      <a:pPr algn="l"/>
+                      <a:r>
+                        <a:rPr sz="1200" b="0" i="0">
+                          <a:solidFill>
+                            <a:srgbClr val="2B2B2B"/>
+                          </a:solidFill>
+                          <a:latin typeface="Calibri"/>
+                        </a:rPr>
+                        <a:t>Pitch de 3 minutos y retroalimentación de pares</a:t>
+                      </a:r>
+                    </a:p>
+                  </a:txBody>
+                  <a:tcPr anchor="ctr" marL="109728" marR="91440" marT="36576" marB="36576">
+                    <a:solidFill>
+                      <a:srgbClr val="F2F2F2"/>
+                    </a:solidFill>
+                  </a:tcPr>
+                </a:tc>
+              </a:tr>
+              <a:tr h="502920">
+                <a:tc>
+                  <a:txBody>
+                    <a:bodyPr/>
+                    <a:lstStyle/>
+                    <a:p>
+                      <a:pPr algn="l"/>
+                      <a:r>
+                        <a:rPr sz="1200" b="1" i="0">
+                          <a:solidFill>
+                            <a:srgbClr val="2B2B2B"/>
+                          </a:solidFill>
+                          <a:latin typeface="Calibri"/>
+                        </a:rPr>
+                        <a:t>11</a:t>
+                      </a:r>
+                    </a:p>
+                  </a:txBody>
+                  <a:tcPr anchor="ctr" marL="109728" marR="91440" marT="36576" marB="36576">
+                    <a:solidFill>
+                      <a:srgbClr val="FFFFFF"/>
+                    </a:solidFill>
+                  </a:tcPr>
+                </a:tc>
+                <a:tc>
+                  <a:txBody>
+                    <a:bodyPr/>
+                    <a:lstStyle/>
+                    <a:p>
+                      <a:pPr algn="l"/>
+                      <a:r>
+                        <a:rPr sz="1200" b="0" i="0">
+                          <a:solidFill>
+                            <a:srgbClr val="2B2B2B"/>
+                          </a:solidFill>
+                          <a:latin typeface="Calibri"/>
+                        </a:rPr>
+                        <a:t>Cierre del avance · preparación para TG3</a:t>
+                      </a:r>
+                    </a:p>
+                  </a:txBody>
+                  <a:tcPr anchor="ctr" marL="109728" marR="91440" marT="36576" marB="36576">
+                    <a:solidFill>
+                      <a:srgbClr val="FFFFFF"/>
+                    </a:solidFill>
+                  </a:tcPr>
+                </a:tc>
+                <a:tc>
+                  <a:txBody>
+                    <a:bodyPr/>
+                    <a:lstStyle/>
+                    <a:p>
+                      <a:pPr algn="l"/>
+                      <a:r>
+                        <a:rPr sz="1200" b="0" i="0">
+                          <a:solidFill>
+                            <a:srgbClr val="2B2B2B"/>
+                          </a:solidFill>
+                          <a:latin typeface="Calibri"/>
+                        </a:rPr>
+                        <a:t>Versión limpia y lista de pendientes para TG3</a:t>
+                      </a:r>
+                    </a:p>
+                  </a:txBody>
+                  <a:tcPr anchor="ctr" marL="109728" marR="91440" marT="36576" marB="36576">
+                    <a:solidFill>
+                      <a:srgbClr val="FFFFFF"/>
+                    </a:solidFill>
+                  </a:tcPr>
+                </a:tc>
+              </a:tr>
+            </a:tbl>
+          </a:graphicData>
+        </a:graphic>
+      </p:graphicFrame>
+      <p:sp>
+        <p:nvSpPr>
+          <p:cNvPr id="5" name="TextBox 4"/>
+          <p:cNvSpPr txBox="1"/>
+          <p:nvPr/>
+        </p:nvSpPr>
+        <p:spPr>
+          <a:xfrm>
+            <a:off x="640080" y="4846320"/>
+            <a:ext cx="10911535" cy="548640"/>
+          </a:xfrm>
+          <a:prstGeom prst="rect">
+            <a:avLst/>
+          </a:prstGeom>
+          <a:noFill/>
+        </p:spPr>
+        <p:txBody>
+          <a:bodyPr wrap="square" anchor="t" lIns="0" rIns="0" tIns="0" bIns="0">
+            <a:spAutoFit/>
+          </a:bodyPr>
+          <a:lstStyle/>
+          <a:p>
+            <a:r>
+              <a:rPr sz="1200" b="0" i="1">
+                <a:solidFill>
+                  <a:srgbClr val="2B2B2B"/>
+                </a:solidFill>
+                <a:latin typeface="Calibri"/>
+              </a:rPr>
+              <a:t>Las once sesiones construyen </a:t>
+            </a:r>
+            <a:r>
+              <a:rPr sz="1200" b="1" i="1">
+                <a:solidFill>
+                  <a:srgbClr val="2B2B2B"/>
+                </a:solidFill>
+                <a:latin typeface="Calibri"/>
+              </a:rPr>
+              <a:t>un solo documento</a:t>
+            </a:r>
+            <a:r>
+              <a:rPr sz="1200" b="0" i="1">
+                <a:solidFill>
+                  <a:srgbClr val="2B2B2B"/>
+                </a:solidFill>
+                <a:latin typeface="Calibri"/>
+              </a:rPr>
+              <a:t>. Si falta a una, la siguiente le va a pedir algo que no escribió.</a:t>
+            </a:r>
+          </a:p>
+        </p:txBody>
+      </p:sp>
+      <p:sp>
+        <p:nvSpPr>
+          <p:cNvPr id="6" name="TextBox 5"/>
+          <p:cNvSpPr txBox="1"/>
+          <p:nvPr/>
+        </p:nvSpPr>
+        <p:spPr>
+          <a:xfrm>
+            <a:off x="11094415" y="6446520"/>
+            <a:ext cx="548640" cy="274320"/>
+          </a:xfrm>
+          <a:prstGeom prst="rect">
+            <a:avLst/>
+          </a:prstGeom>
+          <a:noFill/>
+        </p:spPr>
+        <p:txBody>
+          <a:bodyPr wrap="square" anchor="t" lIns="0" rIns="0" tIns="0" bIns="0">
+            <a:spAutoFit/>
+          </a:bodyPr>
+          <a:lstStyle/>
+          <a:p>
+            <a:pPr algn="r"/>
+            <a:r>
+              <a:rPr sz="1000" b="1" i="0">
+                <a:solidFill>
+                  <a:srgbClr val="8F989D"/>
+                </a:solidFill>
+                <a:latin typeface="Calibri"/>
+              </a:rPr>
               <a:t>9</a:t>
             </a:r>
           </a:p>

--- a/Pregrado/Trabajo de grado 2/Clases/Sesion 01 - Presentación del curso · docente · estudiantes · ACAs/Presentacion.pptx
+++ b/Pregrado/Trabajo de grado 2/Clases/Sesion 01 - Presentación del curso · docente · estudiantes · ACAs/Presentacion.pptx
@@ -28,6 +28,7 @@
     <p:sldId id="276" r:id="rId27"/>
     <p:sldId id="277" r:id="rId28"/>
     <p:sldId id="278" r:id="rId29"/>
+    <p:sldId id="279" r:id="rId30"/>
   </p:sldIdLst>
   <p:sldSz cx="12191695" cy="6858000" type="screen4x3"/>
   <p:notesSz cx="6858000" cy="9144000"/>
@@ -5361,7 +5362,7 @@
                 </a:solidFill>
                 <a:latin typeface="Calibri"/>
               </a:rPr>
-              <a:t> Suba a </a:t>
+              <a:t> El aula tiene </a:t>
             </a:r>
             <a:r>
               <a:rPr sz="1600" b="1" i="0">
@@ -5370,7 +5371,7 @@
                 </a:solidFill>
                 <a:latin typeface="Calibri"/>
               </a:rPr>
-              <a:t>CDigital</a:t>
+              <a:t>una sola tarea documental</a:t>
             </a:r>
             <a:r>
               <a:rPr sz="1600" b="0" i="0">
@@ -5379,7 +5380,43 @@
                 </a:solidFill>
                 <a:latin typeface="Calibri"/>
               </a:rPr>
-              <a:t> en el espacio de la sesión: [URL CDigital — campus del curso pendiente]</a:t>
+              <a:t>: la </a:t>
+            </a:r>
+            <a:r>
+              <a:rPr sz="1600" b="1" i="0">
+                <a:solidFill>
+                  <a:srgbClr val="2B2B2B"/>
+                </a:solidFill>
+                <a:latin typeface="Calibri"/>
+              </a:rPr>
+              <a:t>ACA Final</a:t>
+            </a:r>
+            <a:r>
+              <a:rPr sz="1600" b="0" i="0">
+                <a:solidFill>
+                  <a:srgbClr val="2B2B2B"/>
+                </a:solidFill>
+                <a:latin typeface="Calibri"/>
+              </a:rPr>
+              <a:t>. Ese es el archivo que se sube, en https://cdigital.cun.edu.co/course/view.php?id=129268. Los avances de cada sesión </a:t>
+            </a:r>
+            <a:r>
+              <a:rPr sz="1600" b="1" i="0">
+                <a:solidFill>
+                  <a:srgbClr val="2B2B2B"/>
+                </a:solidFill>
+                <a:latin typeface="Calibri"/>
+              </a:rPr>
+              <a:t>no se suben</a:t>
+            </a:r>
+            <a:r>
+              <a:rPr sz="1600" b="0" i="0">
+                <a:solidFill>
+                  <a:srgbClr val="2B2B2B"/>
+                </a:solidFill>
+                <a:latin typeface="Calibri"/>
+              </a:rPr>
+              <a:t>: se guardan en su Drive y se traen a clase.</a:t>
             </a:r>
           </a:p>
           <a:p>
@@ -10306,6 +10343,1214 @@
 </file>
 
 <file path=ppt/slides/slide23.xml><?xml version="1.0" encoding="utf-8"?>
+<p:sld xmlns:a="http://schemas.openxmlformats.org/drawingml/2006/main" xmlns:p="http://schemas.openxmlformats.org/presentationml/2006/main" xmlns:r="http://schemas.openxmlformats.org/officeDocument/2006/relationships">
+  <p:cSld>
+    <p:bg>
+      <p:bgPr>
+        <a:solidFill>
+          <a:srgbClr val="FFFFFF"/>
+        </a:solidFill>
+        <a:effectLst/>
+      </p:bgPr>
+    </p:bg>
+    <p:spTree>
+      <p:nvGrpSpPr>
+        <p:cNvPr id="1" name=""/>
+        <p:cNvGrpSpPr/>
+        <p:nvPr/>
+      </p:nvGrpSpPr>
+      <p:grpSpPr/>
+      <p:sp>
+        <p:nvSpPr>
+          <p:cNvPr id="2" name="Rectangle 1"/>
+          <p:cNvSpPr/>
+          <p:nvPr/>
+        </p:nvSpPr>
+        <p:spPr>
+          <a:xfrm>
+            <a:off x="0" y="0"/>
+            <a:ext cx="12191695" cy="1188720"/>
+          </a:xfrm>
+          <a:prstGeom prst="rect">
+            <a:avLst/>
+          </a:prstGeom>
+          <a:solidFill>
+            <a:srgbClr val="0C2340"/>
+          </a:solidFill>
+          <a:ln>
+            <a:noFill/>
+          </a:ln>
+          <a:effectLst/>
+        </p:spPr>
+        <p:style>
+          <a:lnRef idx="1">
+            <a:schemeClr val="accent1"/>
+          </a:lnRef>
+          <a:fillRef idx="3">
+            <a:schemeClr val="accent1"/>
+          </a:fillRef>
+          <a:effectRef idx="2">
+            <a:schemeClr val="accent1"/>
+          </a:effectRef>
+          <a:fontRef idx="minor">
+            <a:schemeClr val="lt1"/>
+          </a:fontRef>
+        </p:style>
+        <p:txBody>
+          <a:bodyPr rtlCol="0" anchor="ctr"/>
+          <a:lstStyle/>
+          <a:p>
+            <a:pPr algn="ctr"/>
+          </a:p>
+        </p:txBody>
+      </p:sp>
+      <p:sp>
+        <p:nvSpPr>
+          <p:cNvPr id="3" name="TextBox 2"/>
+          <p:cNvSpPr txBox="1"/>
+          <p:nvPr/>
+        </p:nvSpPr>
+        <p:spPr>
+          <a:xfrm>
+            <a:off x="640080" y="0"/>
+            <a:ext cx="9082735" cy="1188720"/>
+          </a:xfrm>
+          <a:prstGeom prst="rect">
+            <a:avLst/>
+          </a:prstGeom>
+          <a:noFill/>
+        </p:spPr>
+        <p:txBody>
+          <a:bodyPr wrap="square" anchor="ctr" lIns="0" rIns="0" tIns="0" bIns="0">
+            <a:spAutoFit/>
+          </a:bodyPr>
+          <a:lstStyle/>
+          <a:p>
+            <a:pPr algn="ctr"/>
+            <a:r>
+              <a:rPr sz="2600" b="1" i="0">
+                <a:solidFill>
+                  <a:srgbClr val="FFFFFF"/>
+                </a:solidFill>
+                <a:latin typeface="Calibri"/>
+              </a:rPr>
+              <a:t>RUTA DE ENTREGABLES DEL CURSO</a:t>
+            </a:r>
+          </a:p>
+        </p:txBody>
+      </p:sp>
+      <p:sp>
+        <p:nvSpPr>
+          <p:cNvPr id="4" name="TextBox 3"/>
+          <p:cNvSpPr txBox="1"/>
+          <p:nvPr/>
+        </p:nvSpPr>
+        <p:spPr>
+          <a:xfrm>
+            <a:off x="640080" y="1280160"/>
+            <a:ext cx="10911535" cy="411480"/>
+          </a:xfrm>
+          <a:prstGeom prst="rect">
+            <a:avLst/>
+          </a:prstGeom>
+          <a:noFill/>
+        </p:spPr>
+        <p:txBody>
+          <a:bodyPr wrap="square" anchor="t" lIns="0" rIns="0" tIns="0" bIns="0">
+            <a:spAutoFit/>
+          </a:bodyPr>
+          <a:lstStyle/>
+          <a:p>
+            <a:pPr algn="ctr"/>
+            <a:r>
+              <a:rPr sz="1500" b="0" i="0">
+                <a:solidFill>
+                  <a:srgbClr val="2B2B2B"/>
+                </a:solidFill>
+                <a:latin typeface="Calibri"/>
+              </a:rPr>
+              <a:t>Sin fechas a propósito: aquí va </a:t>
+            </a:r>
+            <a:r>
+              <a:rPr sz="1500" b="1" i="0">
+                <a:solidFill>
+                  <a:srgbClr val="2B2B2B"/>
+                </a:solidFill>
+                <a:latin typeface="Calibri"/>
+              </a:rPr>
+              <a:t>en qué punto del curso</a:t>
+            </a:r>
+            <a:r>
+              <a:rPr sz="1500" b="0" i="0">
+                <a:solidFill>
+                  <a:srgbClr val="2B2B2B"/>
+                </a:solidFill>
+                <a:latin typeface="Calibri"/>
+              </a:rPr>
+              <a:t> cierra cada ítem · la ventana exacta la fija CDigital</a:t>
+            </a:r>
+          </a:p>
+        </p:txBody>
+      </p:sp>
+      <p:graphicFrame>
+        <p:nvGraphicFramePr>
+          <p:cNvPr id="5" name="Table 4"/>
+          <p:cNvGraphicFramePr>
+            <a:graphicFrameLocks noGrp="1"/>
+          </p:cNvGraphicFramePr>
+          <p:nvPr/>
+        </p:nvGraphicFramePr>
+        <p:xfrm>
+          <a:off x="640080" y="2011679"/>
+          <a:ext cx="10911533" cy="4297680"/>
+        </p:xfrm>
+        <a:graphic>
+          <a:graphicData uri="http://schemas.openxmlformats.org/drawingml/2006/table">
+            <a:tbl>
+              <a:tblPr>
+                <a:tableStyleId>{2D5ABB26-0587-4C30-8999-92F81FD0307C}</a:tableStyleId>
+              </a:tblPr>
+              <a:tblGrid>
+                <a:gridCol w="2659113"/>
+                <a:gridCol w="2659113"/>
+                <a:gridCol w="5593307"/>
+              </a:tblGrid>
+              <a:tr h="477520">
+                <a:tc>
+                  <a:txBody>
+                    <a:bodyPr/>
+                    <a:lstStyle/>
+                    <a:p>
+                      <a:pPr algn="l"/>
+                      <a:r>
+                        <a:rPr sz="1300" b="1" i="0">
+                          <a:solidFill>
+                            <a:srgbClr val="FFFFFF"/>
+                          </a:solidFill>
+                          <a:latin typeface="Calibri"/>
+                        </a:rPr>
+                        <a:t>Cierra en la semana de…</a:t>
+                      </a:r>
+                    </a:p>
+                  </a:txBody>
+                  <a:tcPr anchor="ctr" marL="109728" marR="91440" marT="36576" marB="36576">
+                    <a:solidFill>
+                      <a:srgbClr val="0C2340"/>
+                    </a:solidFill>
+                  </a:tcPr>
+                </a:tc>
+                <a:tc>
+                  <a:txBody>
+                    <a:bodyPr/>
+                    <a:lstStyle/>
+                    <a:p>
+                      <a:pPr algn="l"/>
+                      <a:r>
+                        <a:rPr sz="1300" b="1" i="0">
+                          <a:solidFill>
+                            <a:srgbClr val="FFFFFF"/>
+                          </a:solidFill>
+                          <a:latin typeface="Calibri"/>
+                        </a:rPr>
+                        <a:t>Entregable</a:t>
+                      </a:r>
+                    </a:p>
+                  </a:txBody>
+                  <a:tcPr anchor="ctr" marL="109728" marR="91440" marT="36576" marB="36576">
+                    <a:solidFill>
+                      <a:srgbClr val="0C2340"/>
+                    </a:solidFill>
+                  </a:tcPr>
+                </a:tc>
+                <a:tc>
+                  <a:txBody>
+                    <a:bodyPr/>
+                    <a:lstStyle/>
+                    <a:p>
+                      <a:pPr algn="l"/>
+                      <a:r>
+                        <a:rPr sz="1300" b="1" i="0">
+                          <a:solidFill>
+                            <a:srgbClr val="FFFFFF"/>
+                          </a:solidFill>
+                          <a:latin typeface="Calibri"/>
+                        </a:rPr>
+                        <a:t>Qué debes tener listo</a:t>
+                      </a:r>
+                    </a:p>
+                  </a:txBody>
+                  <a:tcPr anchor="ctr" marL="109728" marR="91440" marT="36576" marB="36576">
+                    <a:solidFill>
+                      <a:srgbClr val="0C2340"/>
+                    </a:solidFill>
+                  </a:tcPr>
+                </a:tc>
+              </a:tr>
+              <a:tr h="477520">
+                <a:tc>
+                  <a:txBody>
+                    <a:bodyPr/>
+                    <a:lstStyle/>
+                    <a:p>
+                      <a:pPr algn="l"/>
+                      <a:r>
+                        <a:rPr sz="1100" b="1" i="0">
+                          <a:solidFill>
+                            <a:srgbClr val="2B2B2B"/>
+                          </a:solidFill>
+                          <a:latin typeface="Calibri"/>
+                        </a:rPr>
+                        <a:t>Sesión 03</a:t>
+                      </a:r>
+                      <a:r>
+                        <a:rPr sz="1100" b="0" i="0">
+                          <a:solidFill>
+                            <a:srgbClr val="2B2B2B"/>
+                          </a:solidFill>
+                          <a:latin typeface="Calibri"/>
+                        </a:rPr>
+                        <a:t> · pendiente</a:t>
+                      </a:r>
+                    </a:p>
+                  </a:txBody>
+                  <a:tcPr anchor="ctr" marL="109728" marR="91440" marT="36576" marB="36576">
+                    <a:solidFill>
+                      <a:srgbClr val="FFFFFF"/>
+                    </a:solidFill>
+                  </a:tcPr>
+                </a:tc>
+                <a:tc>
+                  <a:txBody>
+                    <a:bodyPr/>
+                    <a:lstStyle/>
+                    <a:p>
+                      <a:pPr algn="l"/>
+                      <a:r>
+                        <a:rPr sz="1100" b="1" i="0">
+                          <a:solidFill>
+                            <a:srgbClr val="2B2B2B"/>
+                          </a:solidFill>
+                          <a:latin typeface="Calibri"/>
+                        </a:rPr>
+                        <a:t>Quiz 1</a:t>
+                      </a:r>
+                      <a:r>
+                        <a:rPr sz="1100" b="0" i="0">
+                          <a:solidFill>
+                            <a:srgbClr val="2B2B2B"/>
+                          </a:solidFill>
+                          <a:latin typeface="Calibri"/>
+                        </a:rPr>
+                        <a:t> · Cuestionario · 6%</a:t>
+                      </a:r>
+                    </a:p>
+                  </a:txBody>
+                  <a:tcPr anchor="ctr" marL="109728" marR="91440" marT="36576" marB="36576">
+                    <a:solidFill>
+                      <a:srgbClr val="FFFFFF"/>
+                    </a:solidFill>
+                  </a:tcPr>
+                </a:tc>
+                <a:tc>
+                  <a:txBody>
+                    <a:bodyPr/>
+                    <a:lstStyle/>
+                    <a:p>
+                      <a:pPr algn="l"/>
+                      <a:r>
+                        <a:rPr sz="1100" b="0" i="0">
+                          <a:solidFill>
+                            <a:srgbClr val="2B2B2B"/>
+                          </a:solidFill>
+                          <a:latin typeface="Calibri"/>
+                        </a:rPr>
+                        <a:t>Ten formulados </a:t>
+                      </a:r>
+                      <a:r>
+                        <a:rPr sz="1100" b="1" i="0">
+                          <a:solidFill>
+                            <a:srgbClr val="2B2B2B"/>
+                          </a:solidFill>
+                          <a:latin typeface="Calibri"/>
+                        </a:rPr>
+                        <a:t>pregunta, objetivos y título</a:t>
+                      </a:r>
+                      <a:r>
+                        <a:rPr sz="1100" b="0" i="0">
+                          <a:solidFill>
+                            <a:srgbClr val="2B2B2B"/>
+                          </a:solidFill>
+                          <a:latin typeface="Calibri"/>
+                        </a:rPr>
+                        <a:t> provisional.</a:t>
+                      </a:r>
+                    </a:p>
+                  </a:txBody>
+                  <a:tcPr anchor="ctr" marL="109728" marR="91440" marT="36576" marB="36576">
+                    <a:solidFill>
+                      <a:srgbClr val="FFFFFF"/>
+                    </a:solidFill>
+                  </a:tcPr>
+                </a:tc>
+              </a:tr>
+              <a:tr h="477520">
+                <a:tc>
+                  <a:txBody>
+                    <a:bodyPr/>
+                    <a:lstStyle/>
+                    <a:p>
+                      <a:pPr algn="l"/>
+                      <a:r>
+                        <a:rPr sz="1100" b="1" i="0">
+                          <a:solidFill>
+                            <a:srgbClr val="2B2B2B"/>
+                          </a:solidFill>
+                          <a:latin typeface="Calibri"/>
+                        </a:rPr>
+                        <a:t>Sesión 05</a:t>
+                      </a:r>
+                      <a:r>
+                        <a:rPr sz="1100" b="0" i="0">
+                          <a:solidFill>
+                            <a:srgbClr val="2B2B2B"/>
+                          </a:solidFill>
+                          <a:latin typeface="Calibri"/>
+                        </a:rPr>
+                        <a:t> · pendiente</a:t>
+                      </a:r>
+                    </a:p>
+                  </a:txBody>
+                  <a:tcPr anchor="ctr" marL="109728" marR="91440" marT="36576" marB="36576">
+                    <a:solidFill>
+                      <a:srgbClr val="F2F2F2"/>
+                    </a:solidFill>
+                  </a:tcPr>
+                </a:tc>
+                <a:tc>
+                  <a:txBody>
+                    <a:bodyPr/>
+                    <a:lstStyle/>
+                    <a:p>
+                      <a:pPr algn="l"/>
+                      <a:r>
+                        <a:rPr sz="1100" b="1" i="0">
+                          <a:solidFill>
+                            <a:srgbClr val="2B2B2B"/>
+                          </a:solidFill>
+                          <a:latin typeface="Calibri"/>
+                        </a:rPr>
+                        <a:t>Parcial 1</a:t>
+                      </a:r>
+                      <a:r>
+                        <a:rPr sz="1100" b="0" i="0">
+                          <a:solidFill>
+                            <a:srgbClr val="2B2B2B"/>
+                          </a:solidFill>
+                          <a:latin typeface="Calibri"/>
+                        </a:rPr>
+                        <a:t> · Cuestionario · 24%</a:t>
+                      </a:r>
+                    </a:p>
+                  </a:txBody>
+                  <a:tcPr anchor="ctr" marL="109728" marR="91440" marT="36576" marB="36576">
+                    <a:solidFill>
+                      <a:srgbClr val="F2F2F2"/>
+                    </a:solidFill>
+                  </a:tcPr>
+                </a:tc>
+                <a:tc>
+                  <a:txBody>
+                    <a:bodyPr/>
+                    <a:lstStyle/>
+                    <a:p>
+                      <a:pPr algn="l"/>
+                      <a:r>
+                        <a:rPr sz="1100" b="0" i="0">
+                          <a:solidFill>
+                            <a:srgbClr val="2B2B2B"/>
+                          </a:solidFill>
+                          <a:latin typeface="Calibri"/>
+                        </a:rPr>
+                        <a:t>Repasa </a:t>
+                      </a:r>
+                      <a:r>
+                        <a:rPr sz="1100" b="1" i="0">
+                          <a:solidFill>
+                            <a:srgbClr val="2B2B2B"/>
+                          </a:solidFill>
+                          <a:latin typeface="Calibri"/>
+                        </a:rPr>
+                        <a:t>estructura APA CUN</a:t>
+                      </a:r>
+                      <a:r>
+                        <a:rPr sz="1100" b="0" i="0">
+                          <a:solidFill>
+                            <a:srgbClr val="2B2B2B"/>
+                          </a:solidFill>
+                          <a:latin typeface="Calibri"/>
+                        </a:rPr>
+                        <a:t> y antecedentes Fase I, más pregunta, objetivos y título.</a:t>
+                      </a:r>
+                    </a:p>
+                  </a:txBody>
+                  <a:tcPr anchor="ctr" marL="109728" marR="91440" marT="36576" marB="36576">
+                    <a:solidFill>
+                      <a:srgbClr val="F2F2F2"/>
+                    </a:solidFill>
+                  </a:tcPr>
+                </a:tc>
+              </a:tr>
+              <a:tr h="477520">
+                <a:tc>
+                  <a:txBody>
+                    <a:bodyPr/>
+                    <a:lstStyle/>
+                    <a:p>
+                      <a:pPr algn="l"/>
+                      <a:r>
+                        <a:rPr sz="1100" b="1" i="0">
+                          <a:solidFill>
+                            <a:srgbClr val="2B2B2B"/>
+                          </a:solidFill>
+                          <a:latin typeface="Calibri"/>
+                        </a:rPr>
+                        <a:t>Sesión 07</a:t>
+                      </a:r>
+                      <a:r>
+                        <a:rPr sz="1100" b="0" i="0">
+                          <a:solidFill>
+                            <a:srgbClr val="2B2B2B"/>
+                          </a:solidFill>
+                          <a:latin typeface="Calibri"/>
+                        </a:rPr>
+                        <a:t> · pendiente</a:t>
+                      </a:r>
+                    </a:p>
+                  </a:txBody>
+                  <a:tcPr anchor="ctr" marL="109728" marR="91440" marT="36576" marB="36576">
+                    <a:solidFill>
+                      <a:srgbClr val="FFFFFF"/>
+                    </a:solidFill>
+                  </a:tcPr>
+                </a:tc>
+                <a:tc>
+                  <a:txBody>
+                    <a:bodyPr/>
+                    <a:lstStyle/>
+                    <a:p>
+                      <a:pPr algn="l"/>
+                      <a:r>
+                        <a:rPr sz="1100" b="1" i="0">
+                          <a:solidFill>
+                            <a:srgbClr val="2B2B2B"/>
+                          </a:solidFill>
+                          <a:latin typeface="Calibri"/>
+                        </a:rPr>
+                        <a:t>Quiz 2</a:t>
+                      </a:r>
+                      <a:r>
+                        <a:rPr sz="1100" b="0" i="0">
+                          <a:solidFill>
+                            <a:srgbClr val="2B2B2B"/>
+                          </a:solidFill>
+                          <a:latin typeface="Calibri"/>
+                        </a:rPr>
+                        <a:t> · Cuestionario · 9%</a:t>
+                      </a:r>
+                    </a:p>
+                  </a:txBody>
+                  <a:tcPr anchor="ctr" marL="109728" marR="91440" marT="36576" marB="36576">
+                    <a:solidFill>
+                      <a:srgbClr val="FFFFFF"/>
+                    </a:solidFill>
+                  </a:tcPr>
+                </a:tc>
+                <a:tc>
+                  <a:txBody>
+                    <a:bodyPr/>
+                    <a:lstStyle/>
+                    <a:p>
+                      <a:pPr algn="l"/>
+                      <a:r>
+                        <a:rPr sz="1100" b="0" i="0">
+                          <a:solidFill>
+                            <a:srgbClr val="2B2B2B"/>
+                          </a:solidFill>
+                          <a:latin typeface="Calibri"/>
+                        </a:rPr>
+                        <a:t>Distingue </a:t>
+                      </a:r>
+                      <a:r>
+                        <a:rPr sz="1100" b="1" i="0">
+                          <a:solidFill>
+                            <a:srgbClr val="2B2B2B"/>
+                          </a:solidFill>
+                          <a:latin typeface="Calibri"/>
+                        </a:rPr>
+                        <a:t>marco teórico, conceptual y contextual</a:t>
+                      </a:r>
+                      <a:r>
+                        <a:rPr sz="1100" b="0" i="0">
+                          <a:solidFill>
+                            <a:srgbClr val="2B2B2B"/>
+                          </a:solidFill>
+                          <a:latin typeface="Calibri"/>
+                        </a:rPr>
+                        <a:t> y cómo se articulan con tu pregunta.</a:t>
+                      </a:r>
+                    </a:p>
+                  </a:txBody>
+                  <a:tcPr anchor="ctr" marL="109728" marR="91440" marT="36576" marB="36576">
+                    <a:solidFill>
+                      <a:srgbClr val="FFFFFF"/>
+                    </a:solidFill>
+                  </a:tcPr>
+                </a:tc>
+              </a:tr>
+              <a:tr h="477520">
+                <a:tc>
+                  <a:txBody>
+                    <a:bodyPr/>
+                    <a:lstStyle/>
+                    <a:p>
+                      <a:pPr algn="l"/>
+                      <a:r>
+                        <a:rPr sz="1100" b="1" i="0">
+                          <a:solidFill>
+                            <a:srgbClr val="2B2B2B"/>
+                          </a:solidFill>
+                          <a:latin typeface="Calibri"/>
+                        </a:rPr>
+                        <a:t>Sesión 08</a:t>
+                      </a:r>
+                      <a:r>
+                        <a:rPr sz="1100" b="0" i="0">
+                          <a:solidFill>
+                            <a:srgbClr val="2B2B2B"/>
+                          </a:solidFill>
+                          <a:latin typeface="Calibri"/>
+                        </a:rPr>
+                        <a:t> · pendiente</a:t>
+                      </a:r>
+                    </a:p>
+                  </a:txBody>
+                  <a:tcPr anchor="ctr" marL="109728" marR="91440" marT="36576" marB="36576">
+                    <a:solidFill>
+                      <a:srgbClr val="F2F2F2"/>
+                    </a:solidFill>
+                  </a:tcPr>
+                </a:tc>
+                <a:tc>
+                  <a:txBody>
+                    <a:bodyPr/>
+                    <a:lstStyle/>
+                    <a:p>
+                      <a:pPr algn="l"/>
+                      <a:r>
+                        <a:rPr sz="1100" b="1" i="0">
+                          <a:solidFill>
+                            <a:srgbClr val="2B2B2B"/>
+                          </a:solidFill>
+                          <a:latin typeface="Calibri"/>
+                        </a:rPr>
+                        <a:t>Parcial 2</a:t>
+                      </a:r>
+                      <a:r>
+                        <a:rPr sz="1100" b="0" i="0">
+                          <a:solidFill>
+                            <a:srgbClr val="2B2B2B"/>
+                          </a:solidFill>
+                          <a:latin typeface="Calibri"/>
+                        </a:rPr>
+                        <a:t> · Cuestionario · 21%</a:t>
+                      </a:r>
+                    </a:p>
+                  </a:txBody>
+                  <a:tcPr anchor="ctr" marL="109728" marR="91440" marT="36576" marB="36576">
+                    <a:solidFill>
+                      <a:srgbClr val="F2F2F2"/>
+                    </a:solidFill>
+                  </a:tcPr>
+                </a:tc>
+                <a:tc>
+                  <a:txBody>
+                    <a:bodyPr/>
+                    <a:lstStyle/>
+                    <a:p>
+                      <a:pPr algn="l"/>
+                      <a:r>
+                        <a:rPr sz="1100" b="0" i="0">
+                          <a:solidFill>
+                            <a:srgbClr val="2B2B2B"/>
+                          </a:solidFill>
+                          <a:latin typeface="Calibri"/>
+                        </a:rPr>
+                        <a:t>Repasa los tres marcos y el </a:t>
+                      </a:r>
+                      <a:r>
+                        <a:rPr sz="1100" b="1" i="0">
+                          <a:solidFill>
+                            <a:srgbClr val="2B2B2B"/>
+                          </a:solidFill>
+                          <a:latin typeface="Calibri"/>
+                        </a:rPr>
+                        <a:t>diseño metodológico</a:t>
+                      </a:r>
+                      <a:r>
+                        <a:rPr sz="1100" b="0" i="0">
+                          <a:solidFill>
+                            <a:srgbClr val="2B2B2B"/>
+                          </a:solidFill>
+                          <a:latin typeface="Calibri"/>
+                        </a:rPr>
+                        <a:t>: enfoque, tipo, alcance y diseño.</a:t>
+                      </a:r>
+                    </a:p>
+                  </a:txBody>
+                  <a:tcPr anchor="ctr" marL="109728" marR="91440" marT="36576" marB="36576">
+                    <a:solidFill>
+                      <a:srgbClr val="F2F2F2"/>
+                    </a:solidFill>
+                  </a:tcPr>
+                </a:tc>
+              </a:tr>
+              <a:tr h="477520">
+                <a:tc>
+                  <a:txBody>
+                    <a:bodyPr/>
+                    <a:lstStyle/>
+                    <a:p>
+                      <a:pPr algn="l"/>
+                      <a:r>
+                        <a:rPr sz="1100" b="1" i="0">
+                          <a:solidFill>
+                            <a:srgbClr val="2B2B2B"/>
+                          </a:solidFill>
+                          <a:latin typeface="Calibri"/>
+                        </a:rPr>
+                        <a:t>Sesión 10</a:t>
+                      </a:r>
+                      <a:r>
+                        <a:rPr sz="1100" b="0" i="0">
+                          <a:solidFill>
+                            <a:srgbClr val="2B2B2B"/>
+                          </a:solidFill>
+                          <a:latin typeface="Calibri"/>
+                        </a:rPr>
+                        <a:t> · pendiente</a:t>
+                      </a:r>
+                    </a:p>
+                  </a:txBody>
+                  <a:tcPr anchor="ctr" marL="109728" marR="91440" marT="36576" marB="36576">
+                    <a:solidFill>
+                      <a:srgbClr val="FFFFFF"/>
+                    </a:solidFill>
+                  </a:tcPr>
+                </a:tc>
+                <a:tc>
+                  <a:txBody>
+                    <a:bodyPr/>
+                    <a:lstStyle/>
+                    <a:p>
+                      <a:pPr algn="l"/>
+                      <a:r>
+                        <a:rPr sz="1100" b="1" i="0">
+                          <a:solidFill>
+                            <a:srgbClr val="2B2B2B"/>
+                          </a:solidFill>
+                          <a:latin typeface="Calibri"/>
+                        </a:rPr>
+                        <a:t>Quiz 3</a:t>
+                      </a:r>
+                      <a:r>
+                        <a:rPr sz="1100" b="0" i="0">
+                          <a:solidFill>
+                            <a:srgbClr val="2B2B2B"/>
+                          </a:solidFill>
+                          <a:latin typeface="Calibri"/>
+                        </a:rPr>
+                        <a:t> · Cuestionario · 4%</a:t>
+                      </a:r>
+                    </a:p>
+                  </a:txBody>
+                  <a:tcPr anchor="ctr" marL="109728" marR="91440" marT="36576" marB="36576">
+                    <a:solidFill>
+                      <a:srgbClr val="FFFFFF"/>
+                    </a:solidFill>
+                  </a:tcPr>
+                </a:tc>
+                <a:tc>
+                  <a:txBody>
+                    <a:bodyPr/>
+                    <a:lstStyle/>
+                    <a:p>
+                      <a:pPr algn="l"/>
+                      <a:r>
+                        <a:rPr sz="1100" b="0" i="0">
+                          <a:solidFill>
+                            <a:srgbClr val="2B2B2B"/>
+                          </a:solidFill>
+                          <a:latin typeface="Calibri"/>
+                        </a:rPr>
+                        <a:t>Ten claros </a:t>
+                      </a:r>
+                      <a:r>
+                        <a:rPr sz="1100" b="1" i="0">
+                          <a:solidFill>
+                            <a:srgbClr val="2B2B2B"/>
+                          </a:solidFill>
+                          <a:latin typeface="Calibri"/>
+                        </a:rPr>
+                        <a:t>instrumentos y plan de análisis</a:t>
+                      </a:r>
+                      <a:r>
+                        <a:rPr sz="1100" b="0" i="0">
+                          <a:solidFill>
+                            <a:srgbClr val="2B2B2B"/>
+                          </a:solidFill>
+                          <a:latin typeface="Calibri"/>
+                        </a:rPr>
+                        <a:t> propuestos y la integración del avance.</a:t>
+                      </a:r>
+                    </a:p>
+                  </a:txBody>
+                  <a:tcPr anchor="ctr" marL="109728" marR="91440" marT="36576" marB="36576">
+                    <a:solidFill>
+                      <a:srgbClr val="FFFFFF"/>
+                    </a:solidFill>
+                  </a:tcPr>
+                </a:tc>
+              </a:tr>
+              <a:tr h="477520">
+                <a:tc>
+                  <a:txBody>
+                    <a:bodyPr/>
+                    <a:lstStyle/>
+                    <a:p>
+                      <a:pPr algn="l"/>
+                      <a:r>
+                        <a:rPr sz="1100" b="1" i="0">
+                          <a:solidFill>
+                            <a:srgbClr val="2B2B2B"/>
+                          </a:solidFill>
+                          <a:latin typeface="Calibri"/>
+                        </a:rPr>
+                        <a:t>Sesión 11</a:t>
+                      </a:r>
+                      <a:r>
+                        <a:rPr sz="1100" b="0" i="0">
+                          <a:solidFill>
+                            <a:srgbClr val="2B2B2B"/>
+                          </a:solidFill>
+                          <a:latin typeface="Calibri"/>
+                        </a:rPr>
+                        <a:t> · pendiente</a:t>
+                      </a:r>
+                    </a:p>
+                  </a:txBody>
+                  <a:tcPr anchor="ctr" marL="109728" marR="91440" marT="36576" marB="36576">
+                    <a:solidFill>
+                      <a:srgbClr val="F2F2F2"/>
+                    </a:solidFill>
+                  </a:tcPr>
+                </a:tc>
+                <a:tc>
+                  <a:txBody>
+                    <a:bodyPr/>
+                    <a:lstStyle/>
+                    <a:p>
+                      <a:pPr algn="l"/>
+                      <a:r>
+                        <a:rPr sz="1100" b="1" i="0">
+                          <a:solidFill>
+                            <a:srgbClr val="2B2B2B"/>
+                          </a:solidFill>
+                          <a:latin typeface="Calibri"/>
+                        </a:rPr>
+                        <a:t>ACA Final</a:t>
+                      </a:r>
+                      <a:r>
+                        <a:rPr sz="1100" b="0" i="0">
+                          <a:solidFill>
+                            <a:srgbClr val="2B2B2B"/>
+                          </a:solidFill>
+                          <a:latin typeface="Calibri"/>
+                        </a:rPr>
+                        <a:t> · Tarea · 32,8%</a:t>
+                      </a:r>
+                    </a:p>
+                  </a:txBody>
+                  <a:tcPr anchor="ctr" marL="109728" marR="91440" marT="36576" marB="36576">
+                    <a:solidFill>
+                      <a:srgbClr val="F2F2F2"/>
+                    </a:solidFill>
+                  </a:tcPr>
+                </a:tc>
+                <a:tc>
+                  <a:txBody>
+                    <a:bodyPr/>
+                    <a:lstStyle/>
+                    <a:p>
+                      <a:pPr algn="l"/>
+                      <a:r>
+                        <a:rPr sz="1100" b="0" i="0">
+                          <a:solidFill>
+                            <a:srgbClr val="2B2B2B"/>
+                          </a:solidFill>
+                          <a:latin typeface="Calibri"/>
+                        </a:rPr>
+                        <a:t>Sube el </a:t>
+                      </a:r>
+                      <a:r>
+                        <a:rPr sz="1100" b="1" i="0">
+                          <a:solidFill>
+                            <a:srgbClr val="2B2B2B"/>
+                          </a:solidFill>
+                          <a:latin typeface="Calibri"/>
+                        </a:rPr>
+                        <a:t>avance consolidado</a:t>
+                      </a:r>
+                      <a:r>
+                        <a:rPr sz="1100" b="0" i="0">
+                          <a:solidFill>
+                            <a:srgbClr val="2B2B2B"/>
+                          </a:solidFill>
+                          <a:latin typeface="Calibri"/>
+                        </a:rPr>
+                        <a:t> en plantilla APA CUN, integrado y listo para TG3.</a:t>
+                      </a:r>
+                    </a:p>
+                  </a:txBody>
+                  <a:tcPr anchor="ctr" marL="109728" marR="91440" marT="36576" marB="36576">
+                    <a:solidFill>
+                      <a:srgbClr val="F2F2F2"/>
+                    </a:solidFill>
+                  </a:tcPr>
+                </a:tc>
+              </a:tr>
+              <a:tr h="477520">
+                <a:tc>
+                  <a:txBody>
+                    <a:bodyPr/>
+                    <a:lstStyle/>
+                    <a:p>
+                      <a:pPr algn="l"/>
+                      <a:r>
+                        <a:rPr sz="1100" b="1" i="0">
+                          <a:solidFill>
+                            <a:srgbClr val="2B2B2B"/>
+                          </a:solidFill>
+                          <a:latin typeface="Calibri"/>
+                        </a:rPr>
+                        <a:t>Sesión 11</a:t>
+                      </a:r>
+                      <a:r>
+                        <a:rPr sz="1100" b="0" i="0">
+                          <a:solidFill>
+                            <a:srgbClr val="2B2B2B"/>
+                          </a:solidFill>
+                          <a:latin typeface="Calibri"/>
+                        </a:rPr>
+                        <a:t> · pendiente</a:t>
+                      </a:r>
+                    </a:p>
+                  </a:txBody>
+                  <a:tcPr anchor="ctr" marL="109728" marR="91440" marT="36576" marB="36576">
+                    <a:solidFill>
+                      <a:srgbClr val="FFFFFF"/>
+                    </a:solidFill>
+                  </a:tcPr>
+                </a:tc>
+                <a:tc>
+                  <a:txBody>
+                    <a:bodyPr/>
+                    <a:lstStyle/>
+                    <a:p>
+                      <a:pPr algn="l"/>
+                      <a:r>
+                        <a:rPr sz="1100" b="1" i="0">
+                          <a:solidFill>
+                            <a:srgbClr val="2B2B2B"/>
+                          </a:solidFill>
+                          <a:latin typeface="Calibri"/>
+                        </a:rPr>
+                        <a:t>Autoevaluación</a:t>
+                      </a:r>
+                      <a:r>
+                        <a:rPr sz="1100" b="0" i="0">
+                          <a:solidFill>
+                            <a:srgbClr val="2B2B2B"/>
+                          </a:solidFill>
+                          <a:latin typeface="Calibri"/>
+                        </a:rPr>
+                        <a:t> · Cuestionario · 1,6%</a:t>
+                      </a:r>
+                    </a:p>
+                  </a:txBody>
+                  <a:tcPr anchor="ctr" marL="109728" marR="91440" marT="36576" marB="36576">
+                    <a:solidFill>
+                      <a:srgbClr val="FFFFFF"/>
+                    </a:solidFill>
+                  </a:tcPr>
+                </a:tc>
+                <a:tc>
+                  <a:txBody>
+                    <a:bodyPr/>
+                    <a:lstStyle/>
+                    <a:p>
+                      <a:pPr algn="l"/>
+                      <a:r>
+                        <a:rPr sz="1100" b="0" i="0">
+                          <a:solidFill>
+                            <a:srgbClr val="2B2B2B"/>
+                          </a:solidFill>
+                          <a:latin typeface="Calibri"/>
+                        </a:rPr>
+                        <a:t>Diligénciala tú, de forma </a:t>
+                      </a:r>
+                      <a:r>
+                        <a:rPr sz="1100" b="1" i="0">
+                          <a:solidFill>
+                            <a:srgbClr val="2B2B2B"/>
+                          </a:solidFill>
+                          <a:latin typeface="Calibri"/>
+                        </a:rPr>
+                        <a:t>individual</a:t>
+                      </a:r>
+                      <a:r>
+                        <a:rPr sz="1100" b="0" i="0">
+                          <a:solidFill>
+                            <a:srgbClr val="2B2B2B"/>
+                          </a:solidFill>
+                          <a:latin typeface="Calibri"/>
+                        </a:rPr>
+                        <a:t>, valorando tu participación real.</a:t>
+                      </a:r>
+                    </a:p>
+                  </a:txBody>
+                  <a:tcPr anchor="ctr" marL="109728" marR="91440" marT="36576" marB="36576">
+                    <a:solidFill>
+                      <a:srgbClr val="FFFFFF"/>
+                    </a:solidFill>
+                  </a:tcPr>
+                </a:tc>
+              </a:tr>
+              <a:tr h="477520">
+                <a:tc>
+                  <a:txBody>
+                    <a:bodyPr/>
+                    <a:lstStyle/>
+                    <a:p>
+                      <a:pPr algn="l"/>
+                      <a:r>
+                        <a:rPr sz="1100" b="1" i="0">
+                          <a:solidFill>
+                            <a:srgbClr val="2B2B2B"/>
+                          </a:solidFill>
+                          <a:latin typeface="Calibri"/>
+                        </a:rPr>
+                        <a:t>Sesión 11</a:t>
+                      </a:r>
+                      <a:r>
+                        <a:rPr sz="1100" b="0" i="0">
+                          <a:solidFill>
+                            <a:srgbClr val="2B2B2B"/>
+                          </a:solidFill>
+                          <a:latin typeface="Calibri"/>
+                        </a:rPr>
+                        <a:t> · pendiente</a:t>
+                      </a:r>
+                    </a:p>
+                  </a:txBody>
+                  <a:tcPr anchor="ctr" marL="109728" marR="91440" marT="36576" marB="36576">
+                    <a:solidFill>
+                      <a:srgbClr val="F2F2F2"/>
+                    </a:solidFill>
+                  </a:tcPr>
+                </a:tc>
+                <a:tc>
+                  <a:txBody>
+                    <a:bodyPr/>
+                    <a:lstStyle/>
+                    <a:p>
+                      <a:pPr algn="l"/>
+                      <a:r>
+                        <a:rPr sz="1100" b="1" i="0">
+                          <a:solidFill>
+                            <a:srgbClr val="2B2B2B"/>
+                          </a:solidFill>
+                          <a:latin typeface="Calibri"/>
+                        </a:rPr>
+                        <a:t>Coevaluación</a:t>
+                      </a:r>
+                      <a:r>
+                        <a:rPr sz="1100" b="0" i="0">
+                          <a:solidFill>
+                            <a:srgbClr val="2B2B2B"/>
+                          </a:solidFill>
+                          <a:latin typeface="Calibri"/>
+                        </a:rPr>
+                        <a:t> · Foro · 1,6%</a:t>
+                      </a:r>
+                    </a:p>
+                  </a:txBody>
+                  <a:tcPr anchor="ctr" marL="109728" marR="91440" marT="36576" marB="36576">
+                    <a:solidFill>
+                      <a:srgbClr val="F2F2F2"/>
+                    </a:solidFill>
+                  </a:tcPr>
+                </a:tc>
+                <a:tc>
+                  <a:txBody>
+                    <a:bodyPr/>
+                    <a:lstStyle/>
+                    <a:p>
+                      <a:pPr algn="l"/>
+                      <a:r>
+                        <a:rPr sz="1100" b="1" i="0">
+                          <a:solidFill>
+                            <a:srgbClr val="2B2B2B"/>
+                          </a:solidFill>
+                          <a:latin typeface="Calibri"/>
+                        </a:rPr>
+                        <a:t>Publica</a:t>
+                      </a:r>
+                      <a:r>
+                        <a:rPr sz="1100" b="0" i="0">
+                          <a:solidFill>
+                            <a:srgbClr val="2B2B2B"/>
+                          </a:solidFill>
+                          <a:latin typeface="Calibri"/>
+                        </a:rPr>
+                        <a:t> tu aporte: valora hechos del trabajo del equipo, nunca a las personas.</a:t>
+                      </a:r>
+                    </a:p>
+                  </a:txBody>
+                  <a:tcPr anchor="ctr" marL="109728" marR="91440" marT="36576" marB="36576">
+                    <a:solidFill>
+                      <a:srgbClr val="F2F2F2"/>
+                    </a:solidFill>
+                  </a:tcPr>
+                </a:tc>
+              </a:tr>
+            </a:tbl>
+          </a:graphicData>
+        </a:graphic>
+      </p:graphicFrame>
+      <p:sp>
+        <p:nvSpPr>
+          <p:cNvPr id="6" name="TextBox 5"/>
+          <p:cNvSpPr txBox="1"/>
+          <p:nvPr/>
+        </p:nvSpPr>
+        <p:spPr>
+          <a:xfrm>
+            <a:off x="640080" y="6080760"/>
+            <a:ext cx="10911535" cy="548640"/>
+          </a:xfrm>
+          <a:prstGeom prst="rect">
+            <a:avLst/>
+          </a:prstGeom>
+          <a:noFill/>
+        </p:spPr>
+        <p:txBody>
+          <a:bodyPr wrap="square" anchor="t" lIns="0" rIns="0" tIns="0" bIns="0">
+            <a:spAutoFit/>
+          </a:bodyPr>
+          <a:lstStyle/>
+          <a:p>
+            <a:r>
+              <a:rPr sz="1200" b="0" i="1">
+                <a:solidFill>
+                  <a:srgbClr val="2B2B2B"/>
+                </a:solidFill>
+                <a:latin typeface="Calibri"/>
+              </a:rPr>
+              <a:t>Esta misma tabla va al final de todas las sesiones. La </a:t>
+            </a:r>
+            <a:r>
+              <a:rPr sz="1200" b="1" i="1">
+                <a:solidFill>
+                  <a:srgbClr val="2B2B2B"/>
+                </a:solidFill>
+                <a:latin typeface="Calibri"/>
+              </a:rPr>
+              <a:t>fecha</a:t>
+            </a:r>
+            <a:r>
+              <a:rPr sz="1200" b="0" i="1">
+                <a:solidFill>
+                  <a:srgbClr val="2B2B2B"/>
+                </a:solidFill>
+                <a:latin typeface="Calibri"/>
+              </a:rPr>
+              <a:t> de cada ventana está en el enunciado del ítem (`Clases/Recursos/ACAs/`) y en el aula: si el aula y cualquier otro material se contradicen, </a:t>
+            </a:r>
+            <a:r>
+              <a:rPr sz="1200" b="1" i="1">
+                <a:solidFill>
+                  <a:srgbClr val="2B2B2B"/>
+                </a:solidFill>
+                <a:latin typeface="Calibri"/>
+              </a:rPr>
+              <a:t>manda el aula</a:t>
+            </a:r>
+            <a:r>
+              <a:rPr sz="1200" b="0" i="1">
+                <a:solidFill>
+                  <a:srgbClr val="2B2B2B"/>
+                </a:solidFill>
+                <a:latin typeface="Calibri"/>
+              </a:rPr>
+              <a:t>.</a:t>
+            </a:r>
+          </a:p>
+        </p:txBody>
+      </p:sp>
+      <p:sp>
+        <p:nvSpPr>
+          <p:cNvPr id="7" name="TextBox 6"/>
+          <p:cNvSpPr txBox="1"/>
+          <p:nvPr/>
+        </p:nvSpPr>
+        <p:spPr>
+          <a:xfrm>
+            <a:off x="11094415" y="6446520"/>
+            <a:ext cx="548640" cy="274320"/>
+          </a:xfrm>
+          <a:prstGeom prst="rect">
+            <a:avLst/>
+          </a:prstGeom>
+          <a:noFill/>
+        </p:spPr>
+        <p:txBody>
+          <a:bodyPr wrap="square" anchor="t" lIns="0" rIns="0" tIns="0" bIns="0">
+            <a:spAutoFit/>
+          </a:bodyPr>
+          <a:lstStyle/>
+          <a:p>
+            <a:pPr algn="r"/>
+            <a:r>
+              <a:rPr sz="1000" b="1" i="0">
+                <a:solidFill>
+                  <a:srgbClr val="8F989D"/>
+                </a:solidFill>
+                <a:latin typeface="Calibri"/>
+              </a:rPr>
+              <a:t>23</a:t>
+            </a:r>
+          </a:p>
+        </p:txBody>
+      </p:sp>
+    </p:spTree>
+  </p:cSld>
+  <p:clrMapOvr>
+    <a:masterClrMapping/>
+  </p:clrMapOvr>
+</p:sld>
+</file>
+
+<file path=ppt/slides/slide24.xml><?xml version="1.0" encoding="utf-8"?>
 <p:sld xmlns:a="http://schemas.openxmlformats.org/drawingml/2006/main" xmlns:p="http://schemas.openxmlformats.org/presentationml/2006/main" xmlns:r="http://schemas.openxmlformats.org/officeDocument/2006/relationships">
   <p:cSld>
     <p:bg>
@@ -14234,7 +15479,7 @@
                           </a:solidFill>
                           <a:latin typeface="Calibri"/>
                         </a:rPr>
-                        <a:t>Estructura del documento / artículo de avance</a:t>
+                        <a:t>Estructura del documento de avance</a:t>
                       </a:r>
                     </a:p>
                   </a:txBody>
